--- a/docs/ppt/医院数据管理平台-项目介绍.pptx
+++ b/docs/ppt/医院数据管理平台-项目介绍.pptx
@@ -3115,7 +3115,7 @@
             <a:avLst/>
           </a:prstGeom>
           <a:solidFill>
-            <a:srgbClr val="0A2A52"/>
+            <a:srgbClr val="02091A"/>
           </a:solidFill>
           <a:ln>
             <a:noFill/>
@@ -3170,7 +3170,7 @@
             <a:r>
               <a:rPr sz="1400" b="1" i="0">
                 <a:solidFill>
-                  <a:srgbClr val="7FD9FF"/>
+                  <a:srgbClr val="7FE3FF"/>
                 </a:solidFill>
                 <a:latin typeface="微软雅黑"/>
                 <a:ea typeface="微软雅黑"/>
@@ -3225,7 +3225,7 @@
             <a:r>
               <a:rPr sz="4400" b="1" i="0">
                 <a:solidFill>
-                  <a:srgbClr val="7FD9FF"/>
+                  <a:srgbClr val="7FE3FF"/>
                 </a:solidFill>
                 <a:latin typeface="微软雅黑"/>
                 <a:ea typeface="微软雅黑"/>
@@ -3266,7 +3266,7 @@
             <a:r>
               <a:rPr sz="1700" b="0" i="0">
                 <a:solidFill>
-                  <a:srgbClr val="C8DCF2"/>
+                  <a:srgbClr val="C7DCF2"/>
                 </a:solidFill>
                 <a:latin typeface="微软雅黑"/>
                 <a:ea typeface="微软雅黑"/>
@@ -3280,7 +3280,7 @@
             <a:r>
               <a:rPr sz="1700" b="0" i="0">
                 <a:solidFill>
-                  <a:srgbClr val="C8DCF2"/>
+                  <a:srgbClr val="C7DCF2"/>
                 </a:solidFill>
                 <a:latin typeface="微软雅黑"/>
                 <a:ea typeface="微软雅黑"/>
@@ -3308,11 +3308,11 @@
             </a:avLst>
           </a:prstGeom>
           <a:solidFill>
-            <a:srgbClr val="123A69"/>
+            <a:srgbClr val="0A2448"/>
           </a:solidFill>
           <a:ln w="9525">
             <a:solidFill>
-              <a:srgbClr val="2A5A94"/>
+              <a:srgbClr val="1A4272"/>
             </a:solidFill>
           </a:ln>
           <a:effectLst/>
@@ -3354,7 +3354,7 @@
             <a:avLst/>
           </a:prstGeom>
           <a:solidFill>
-            <a:srgbClr val="1E88E5"/>
+            <a:srgbClr val="7FE3FF"/>
           </a:solidFill>
           <a:ln w="19050">
             <a:solidFill>
@@ -3444,7 +3444,7 @@
             <a:r>
               <a:rPr sz="950" b="0" i="0">
                 <a:solidFill>
-                  <a:srgbClr val="9FC2E6"/>
+                  <a:srgbClr val="7F9DC4"/>
                 </a:solidFill>
                 <a:latin typeface="微软雅黑"/>
                 <a:ea typeface="微软雅黑"/>
@@ -3472,11 +3472,11 @@
             </a:avLst>
           </a:prstGeom>
           <a:solidFill>
-            <a:srgbClr val="123A69"/>
+            <a:srgbClr val="0A2448"/>
           </a:solidFill>
           <a:ln w="9525">
             <a:solidFill>
-              <a:srgbClr val="2A5A94"/>
+              <a:srgbClr val="1A4272"/>
             </a:solidFill>
           </a:ln>
           <a:effectLst/>
@@ -3518,7 +3518,7 @@
             <a:avLst/>
           </a:prstGeom>
           <a:solidFill>
-            <a:srgbClr val="1E88E5"/>
+            <a:srgbClr val="7FE3FF"/>
           </a:solidFill>
           <a:ln w="19050">
             <a:solidFill>
@@ -3608,7 +3608,7 @@
             <a:r>
               <a:rPr sz="950" b="0" i="0">
                 <a:solidFill>
-                  <a:srgbClr val="9FC2E6"/>
+                  <a:srgbClr val="7F9DC4"/>
                 </a:solidFill>
                 <a:latin typeface="微软雅黑"/>
                 <a:ea typeface="微软雅黑"/>
@@ -3636,11 +3636,11 @@
             </a:avLst>
           </a:prstGeom>
           <a:solidFill>
-            <a:srgbClr val="123A69"/>
+            <a:srgbClr val="0A2448"/>
           </a:solidFill>
           <a:ln w="9525">
             <a:solidFill>
-              <a:srgbClr val="2A5A94"/>
+              <a:srgbClr val="1A4272"/>
             </a:solidFill>
           </a:ln>
           <a:effectLst/>
@@ -3682,7 +3682,7 @@
             <a:avLst/>
           </a:prstGeom>
           <a:solidFill>
-            <a:srgbClr val="1E88E5"/>
+            <a:srgbClr val="7FE3FF"/>
           </a:solidFill>
           <a:ln w="19050">
             <a:solidFill>
@@ -3772,7 +3772,7 @@
             <a:r>
               <a:rPr sz="950" b="0" i="0">
                 <a:solidFill>
-                  <a:srgbClr val="9FC2E6"/>
+                  <a:srgbClr val="7F9DC4"/>
                 </a:solidFill>
                 <a:latin typeface="微软雅黑"/>
                 <a:ea typeface="微软雅黑"/>
@@ -3803,138 +3803,23 @@
       <p:grpSpPr/>
       <p:sp>
         <p:nvSpPr>
-          <p:cNvPr id="2" name="TextBox 1"/>
-          <p:cNvSpPr txBox="1"/>
-          <p:nvPr/>
-        </p:nvSpPr>
-        <p:spPr>
-          <a:xfrm>
-            <a:off x="566928" y="329184"/>
-            <a:ext cx="11057839" cy="274320"/>
+          <p:cNvPr id="2" name="Rectangle 1"/>
+          <p:cNvSpPr/>
+          <p:nvPr/>
+        </p:nvSpPr>
+        <p:spPr>
+          <a:xfrm>
+            <a:off x="0" y="0"/>
+            <a:ext cx="12191695" cy="6858000"/>
           </a:xfrm>
           <a:prstGeom prst="rect">
             <a:avLst/>
           </a:prstGeom>
-          <a:noFill/>
-        </p:spPr>
-        <p:txBody>
-          <a:bodyPr wrap="square" anchor="t" lIns="0" rIns="0" tIns="0" bIns="0">
-            <a:spAutoFit/>
-          </a:bodyPr>
-          <a:lstStyle/>
-          <a:p>
-            <a:pPr algn="l"/>
-            <a:r>
-              <a:rPr sz="1150" b="1" i="0">
-                <a:solidFill>
-                  <a:srgbClr val="1E88E5"/>
-                </a:solidFill>
-                <a:latin typeface="微软雅黑"/>
-                <a:ea typeface="微软雅黑"/>
-                <a:cs typeface="微软雅黑"/>
-              </a:rPr>
-              <a:t>03 · 怎么用</a:t>
-            </a:r>
-          </a:p>
-        </p:txBody>
-      </p:sp>
-      <p:sp>
-        <p:nvSpPr>
-          <p:cNvPr id="3" name="TextBox 2"/>
-          <p:cNvSpPr txBox="1"/>
-          <p:nvPr/>
-        </p:nvSpPr>
-        <p:spPr>
-          <a:xfrm>
-            <a:off x="566928" y="621792"/>
-            <a:ext cx="11057839" cy="640080"/>
-          </a:xfrm>
-          <a:prstGeom prst="rect">
-            <a:avLst/>
-          </a:prstGeom>
-          <a:noFill/>
-        </p:spPr>
-        <p:txBody>
-          <a:bodyPr wrap="square" anchor="t" lIns="0" rIns="0" tIns="0" bIns="0">
-            <a:spAutoFit/>
-          </a:bodyPr>
-          <a:lstStyle/>
-          <a:p>
-            <a:pPr algn="l"/>
-            <a:r>
-              <a:rPr sz="2700" b="1" i="0">
-                <a:solidFill>
-                  <a:srgbClr val="0B3B72"/>
-                </a:solidFill>
-                <a:latin typeface="微软雅黑"/>
-                <a:ea typeface="微软雅黑"/>
-                <a:cs typeface="微软雅黑"/>
-              </a:rPr>
-              <a:t>两个入口，按需要选</a:t>
-            </a:r>
-          </a:p>
-        </p:txBody>
-      </p:sp>
-      <p:sp>
-        <p:nvSpPr>
-          <p:cNvPr id="4" name="TextBox 3"/>
-          <p:cNvSpPr txBox="1"/>
-          <p:nvPr/>
-        </p:nvSpPr>
-        <p:spPr>
-          <a:xfrm>
-            <a:off x="10161727" y="6382512"/>
-            <a:ext cx="1463040" cy="274320"/>
-          </a:xfrm>
-          <a:prstGeom prst="rect">
-            <a:avLst/>
-          </a:prstGeom>
-          <a:noFill/>
-        </p:spPr>
-        <p:txBody>
-          <a:bodyPr wrap="square" anchor="t" lIns="0" rIns="0" tIns="0" bIns="0">
-            <a:spAutoFit/>
-          </a:bodyPr>
-          <a:lstStyle/>
-          <a:p>
-            <a:pPr algn="r"/>
-            <a:r>
-              <a:rPr sz="1000" b="0" i="0">
-                <a:solidFill>
-                  <a:srgbClr val="5A6B85"/>
-                </a:solidFill>
-                <a:latin typeface="微软雅黑"/>
-                <a:ea typeface="微软雅黑"/>
-                <a:cs typeface="微软雅黑"/>
-              </a:rPr>
-              <a:t>急救绿道 · 10 / 13</a:t>
-            </a:r>
-          </a:p>
-        </p:txBody>
-      </p:sp>
-      <p:sp>
-        <p:nvSpPr>
-          <p:cNvPr id="5" name="Rounded Rectangle 4"/>
-          <p:cNvSpPr/>
-          <p:nvPr/>
-        </p:nvSpPr>
-        <p:spPr>
-          <a:xfrm>
-            <a:off x="566928" y="1609344"/>
-            <a:ext cx="5346039" cy="3703320"/>
-          </a:xfrm>
-          <a:prstGeom prst="roundRect">
-            <a:avLst>
-              <a:gd name="adj" fmla="val 6000"/>
-            </a:avLst>
-          </a:prstGeom>
           <a:solidFill>
-            <a:srgbClr val="FFFFFF"/>
+            <a:srgbClr val="04122B"/>
           </a:solidFill>
-          <a:ln w="9525">
-            <a:solidFill>
-              <a:srgbClr val="D6E2F0"/>
-            </a:solidFill>
+          <a:ln>
+            <a:noFill/>
           </a:ln>
           <a:effectLst/>
         </p:spPr>
@@ -3962,7 +3847,166 @@
       </p:sp>
       <p:sp>
         <p:nvSpPr>
-          <p:cNvPr id="6" name="Rectangle 5"/>
+          <p:cNvPr id="3" name="TextBox 2"/>
+          <p:cNvSpPr txBox="1"/>
+          <p:nvPr/>
+        </p:nvSpPr>
+        <p:spPr>
+          <a:xfrm>
+            <a:off x="566928" y="329184"/>
+            <a:ext cx="11057839" cy="274320"/>
+          </a:xfrm>
+          <a:prstGeom prst="rect">
+            <a:avLst/>
+          </a:prstGeom>
+          <a:noFill/>
+        </p:spPr>
+        <p:txBody>
+          <a:bodyPr wrap="square" anchor="t" lIns="0" rIns="0" tIns="0" bIns="0">
+            <a:spAutoFit/>
+          </a:bodyPr>
+          <a:lstStyle/>
+          <a:p>
+            <a:pPr algn="l"/>
+            <a:r>
+              <a:rPr sz="1150" b="1" i="0">
+                <a:solidFill>
+                  <a:srgbClr val="7FE3FF"/>
+                </a:solidFill>
+                <a:latin typeface="微软雅黑"/>
+                <a:ea typeface="微软雅黑"/>
+                <a:cs typeface="微软雅黑"/>
+              </a:rPr>
+              <a:t>03 · 怎么用</a:t>
+            </a:r>
+          </a:p>
+        </p:txBody>
+      </p:sp>
+      <p:sp>
+        <p:nvSpPr>
+          <p:cNvPr id="4" name="TextBox 3"/>
+          <p:cNvSpPr txBox="1"/>
+          <p:nvPr/>
+        </p:nvSpPr>
+        <p:spPr>
+          <a:xfrm>
+            <a:off x="566928" y="621792"/>
+            <a:ext cx="11057839" cy="640080"/>
+          </a:xfrm>
+          <a:prstGeom prst="rect">
+            <a:avLst/>
+          </a:prstGeom>
+          <a:noFill/>
+        </p:spPr>
+        <p:txBody>
+          <a:bodyPr wrap="square" anchor="t" lIns="0" rIns="0" tIns="0" bIns="0">
+            <a:spAutoFit/>
+          </a:bodyPr>
+          <a:lstStyle/>
+          <a:p>
+            <a:pPr algn="l"/>
+            <a:r>
+              <a:rPr sz="2700" b="1" i="0">
+                <a:solidFill>
+                  <a:srgbClr val="ECF7FF"/>
+                </a:solidFill>
+                <a:latin typeface="微软雅黑"/>
+                <a:ea typeface="微软雅黑"/>
+                <a:cs typeface="微软雅黑"/>
+              </a:rPr>
+              <a:t>两个入口，按需要选</a:t>
+            </a:r>
+          </a:p>
+        </p:txBody>
+      </p:sp>
+      <p:sp>
+        <p:nvSpPr>
+          <p:cNvPr id="5" name="TextBox 4"/>
+          <p:cNvSpPr txBox="1"/>
+          <p:nvPr/>
+        </p:nvSpPr>
+        <p:spPr>
+          <a:xfrm>
+            <a:off x="10161727" y="6382512"/>
+            <a:ext cx="1463040" cy="274320"/>
+          </a:xfrm>
+          <a:prstGeom prst="rect">
+            <a:avLst/>
+          </a:prstGeom>
+          <a:noFill/>
+        </p:spPr>
+        <p:txBody>
+          <a:bodyPr wrap="square" anchor="t" lIns="0" rIns="0" tIns="0" bIns="0">
+            <a:spAutoFit/>
+          </a:bodyPr>
+          <a:lstStyle/>
+          <a:p>
+            <a:pPr algn="r"/>
+            <a:r>
+              <a:rPr sz="1000" b="0" i="0">
+                <a:solidFill>
+                  <a:srgbClr val="7E9EC4"/>
+                </a:solidFill>
+                <a:latin typeface="微软雅黑"/>
+                <a:ea typeface="微软雅黑"/>
+                <a:cs typeface="微软雅黑"/>
+              </a:rPr>
+              <a:t>急救绿道 · 10 / 13</a:t>
+            </a:r>
+          </a:p>
+        </p:txBody>
+      </p:sp>
+      <p:sp>
+        <p:nvSpPr>
+          <p:cNvPr id="6" name="Rounded Rectangle 5"/>
+          <p:cNvSpPr/>
+          <p:nvPr/>
+        </p:nvSpPr>
+        <p:spPr>
+          <a:xfrm>
+            <a:off x="566928" y="1609344"/>
+            <a:ext cx="5346039" cy="3703320"/>
+          </a:xfrm>
+          <a:prstGeom prst="roundRect">
+            <a:avLst>
+              <a:gd name="adj" fmla="val 6000"/>
+            </a:avLst>
+          </a:prstGeom>
+          <a:solidFill>
+            <a:srgbClr val="061A38"/>
+          </a:solidFill>
+          <a:ln w="9525">
+            <a:solidFill>
+              <a:srgbClr val="1A4272"/>
+            </a:solidFill>
+          </a:ln>
+          <a:effectLst/>
+        </p:spPr>
+        <p:style>
+          <a:lnRef idx="1">
+            <a:schemeClr val="accent1"/>
+          </a:lnRef>
+          <a:fillRef idx="3">
+            <a:schemeClr val="accent1"/>
+          </a:fillRef>
+          <a:effectRef idx="2">
+            <a:schemeClr val="accent1"/>
+          </a:effectRef>
+          <a:fontRef idx="minor">
+            <a:schemeClr val="lt1"/>
+          </a:fontRef>
+        </p:style>
+        <p:txBody>
+          <a:bodyPr rtlCol="0" anchor="ctr"/>
+          <a:lstStyle/>
+          <a:p>
+            <a:pPr algn="ctr"/>
+          </a:p>
+        </p:txBody>
+      </p:sp>
+      <p:sp>
+        <p:nvSpPr>
+          <p:cNvPr id="7" name="Rectangle 6"/>
           <p:cNvSpPr/>
           <p:nvPr/>
         </p:nvSpPr>
@@ -3975,7 +4019,7 @@
             <a:avLst/>
           </a:prstGeom>
           <a:solidFill>
-            <a:srgbClr val="2E9E5B"/>
+            <a:srgbClr val="7FFFE0"/>
           </a:solidFill>
           <a:ln>
             <a:noFill/>
@@ -4006,7 +4050,7 @@
       </p:sp>
       <p:sp>
         <p:nvSpPr>
-          <p:cNvPr id="7" name="TextBox 6"/>
+          <p:cNvPr id="8" name="TextBox 7"/>
           <p:cNvSpPr txBox="1"/>
           <p:nvPr/>
         </p:nvSpPr>
@@ -4034,7 +4078,7 @@
             <a:r>
               <a:rPr sz="1150" b="1" i="0">
                 <a:solidFill>
-                  <a:srgbClr val="5A6B85"/>
+                  <a:srgbClr val="7E9EC4"/>
                 </a:solidFill>
                 <a:latin typeface="微软雅黑"/>
                 <a:ea typeface="微软雅黑"/>
@@ -4052,7 +4096,7 @@
             <a:r>
               <a:rPr sz="1800" b="1" i="0">
                 <a:solidFill>
-                  <a:srgbClr val="0B3B72"/>
+                  <a:srgbClr val="ECF7FF"/>
                 </a:solidFill>
                 <a:latin typeface="微软雅黑"/>
                 <a:ea typeface="微软雅黑"/>
@@ -4070,7 +4114,7 @@
             <a:r>
               <a:rPr sz="1100" b="0" i="0">
                 <a:solidFill>
-                  <a:srgbClr val="146CC0"/>
+                  <a:srgbClr val="5CC8FF"/>
                 </a:solidFill>
                 <a:latin typeface="微软雅黑"/>
                 <a:ea typeface="微软雅黑"/>
@@ -4091,7 +4135,7 @@
             <a:r>
               <a:rPr sz="1250" b="0" i="0">
                 <a:solidFill>
-                  <a:srgbClr val="1F2D3D"/>
+                  <a:srgbClr val="BBD4EC"/>
                 </a:solidFill>
                 <a:latin typeface="微软雅黑"/>
                 <a:ea typeface="微软雅黑"/>
@@ -4112,7 +4156,7 @@
             <a:r>
               <a:rPr sz="1250" b="0" i="0">
                 <a:solidFill>
-                  <a:srgbClr val="1F2D3D"/>
+                  <a:srgbClr val="BBD4EC"/>
                 </a:solidFill>
                 <a:latin typeface="微软雅黑"/>
                 <a:ea typeface="微软雅黑"/>
@@ -4133,7 +4177,7 @@
             <a:r>
               <a:rPr sz="1250" b="0" i="0">
                 <a:solidFill>
-                  <a:srgbClr val="1F2D3D"/>
+                  <a:srgbClr val="BBD4EC"/>
                 </a:solidFill>
                 <a:latin typeface="微软雅黑"/>
                 <a:ea typeface="微软雅黑"/>
@@ -4154,7 +4198,7 @@
             <a:r>
               <a:rPr sz="1250" b="0" i="0">
                 <a:solidFill>
-                  <a:srgbClr val="1F2D3D"/>
+                  <a:srgbClr val="BBD4EC"/>
                 </a:solidFill>
                 <a:latin typeface="微软雅黑"/>
                 <a:ea typeface="微软雅黑"/>
@@ -4167,7 +4211,7 @@
       </p:sp>
       <p:sp>
         <p:nvSpPr>
-          <p:cNvPr id="8" name="Rounded Rectangle 7"/>
+          <p:cNvPr id="9" name="Rounded Rectangle 8"/>
           <p:cNvSpPr/>
           <p:nvPr/>
         </p:nvSpPr>
@@ -4182,11 +4226,11 @@
             </a:avLst>
           </a:prstGeom>
           <a:solidFill>
-            <a:srgbClr val="FFFFFF"/>
+            <a:srgbClr val="061A38"/>
           </a:solidFill>
           <a:ln w="9525">
             <a:solidFill>
-              <a:srgbClr val="D6E2F0"/>
+              <a:srgbClr val="1A4272"/>
             </a:solidFill>
           </a:ln>
           <a:effectLst/>
@@ -4215,7 +4259,7 @@
       </p:sp>
       <p:sp>
         <p:nvSpPr>
-          <p:cNvPr id="9" name="Rectangle 8"/>
+          <p:cNvPr id="10" name="Rectangle 9"/>
           <p:cNvSpPr/>
           <p:nvPr/>
         </p:nvSpPr>
@@ -4228,7 +4272,7 @@
             <a:avLst/>
           </a:prstGeom>
           <a:solidFill>
-            <a:srgbClr val="1E88E5"/>
+            <a:srgbClr val="7FE3FF"/>
           </a:solidFill>
           <a:ln>
             <a:noFill/>
@@ -4259,7 +4303,7 @@
       </p:sp>
       <p:sp>
         <p:nvSpPr>
-          <p:cNvPr id="10" name="TextBox 9"/>
+          <p:cNvPr id="11" name="TextBox 10"/>
           <p:cNvSpPr txBox="1"/>
           <p:nvPr/>
         </p:nvSpPr>
@@ -4287,7 +4331,7 @@
             <a:r>
               <a:rPr sz="1150" b="1" i="0">
                 <a:solidFill>
-                  <a:srgbClr val="5A6B85"/>
+                  <a:srgbClr val="7E9EC4"/>
                 </a:solidFill>
                 <a:latin typeface="微软雅黑"/>
                 <a:ea typeface="微软雅黑"/>
@@ -4305,7 +4349,7 @@
             <a:r>
               <a:rPr sz="1800" b="1" i="0">
                 <a:solidFill>
-                  <a:srgbClr val="0B3B72"/>
+                  <a:srgbClr val="ECF7FF"/>
                 </a:solidFill>
                 <a:latin typeface="微软雅黑"/>
                 <a:ea typeface="微软雅黑"/>
@@ -4323,7 +4367,7 @@
             <a:r>
               <a:rPr sz="1100" b="0" i="0">
                 <a:solidFill>
-                  <a:srgbClr val="146CC0"/>
+                  <a:srgbClr val="5CC8FF"/>
                 </a:solidFill>
                 <a:latin typeface="微软雅黑"/>
                 <a:ea typeface="微软雅黑"/>
@@ -4344,7 +4388,7 @@
             <a:r>
               <a:rPr sz="1250" b="0" i="0">
                 <a:solidFill>
-                  <a:srgbClr val="1F2D3D"/>
+                  <a:srgbClr val="BBD4EC"/>
                 </a:solidFill>
                 <a:latin typeface="微软雅黑"/>
                 <a:ea typeface="微软雅黑"/>
@@ -4365,7 +4409,7 @@
             <a:r>
               <a:rPr sz="1250" b="0" i="0">
                 <a:solidFill>
-                  <a:srgbClr val="1F2D3D"/>
+                  <a:srgbClr val="BBD4EC"/>
                 </a:solidFill>
                 <a:latin typeface="微软雅黑"/>
                 <a:ea typeface="微软雅黑"/>
@@ -4386,7 +4430,7 @@
             <a:r>
               <a:rPr sz="1250" b="0" i="0">
                 <a:solidFill>
-                  <a:srgbClr val="1F2D3D"/>
+                  <a:srgbClr val="BBD4EC"/>
                 </a:solidFill>
                 <a:latin typeface="微软雅黑"/>
                 <a:ea typeface="微软雅黑"/>
@@ -4407,7 +4451,7 @@
             <a:r>
               <a:rPr sz="1250" b="0" i="0">
                 <a:solidFill>
-                  <a:srgbClr val="1F2D3D"/>
+                  <a:srgbClr val="BBD4EC"/>
                 </a:solidFill>
                 <a:latin typeface="微软雅黑"/>
                 <a:ea typeface="微软雅黑"/>
@@ -4438,7 +4482,51 @@
       <p:grpSpPr/>
       <p:sp>
         <p:nvSpPr>
-          <p:cNvPr id="2" name="TextBox 1"/>
+          <p:cNvPr id="2" name="Rectangle 1"/>
+          <p:cNvSpPr/>
+          <p:nvPr/>
+        </p:nvSpPr>
+        <p:spPr>
+          <a:xfrm>
+            <a:off x="0" y="0"/>
+            <a:ext cx="12191695" cy="6858000"/>
+          </a:xfrm>
+          <a:prstGeom prst="rect">
+            <a:avLst/>
+          </a:prstGeom>
+          <a:solidFill>
+            <a:srgbClr val="04122B"/>
+          </a:solidFill>
+          <a:ln>
+            <a:noFill/>
+          </a:ln>
+          <a:effectLst/>
+        </p:spPr>
+        <p:style>
+          <a:lnRef idx="1">
+            <a:schemeClr val="accent1"/>
+          </a:lnRef>
+          <a:fillRef idx="3">
+            <a:schemeClr val="accent1"/>
+          </a:fillRef>
+          <a:effectRef idx="2">
+            <a:schemeClr val="accent1"/>
+          </a:effectRef>
+          <a:fontRef idx="minor">
+            <a:schemeClr val="lt1"/>
+          </a:fontRef>
+        </p:style>
+        <p:txBody>
+          <a:bodyPr rtlCol="0" anchor="ctr"/>
+          <a:lstStyle/>
+          <a:p>
+            <a:pPr algn="ctr"/>
+          </a:p>
+        </p:txBody>
+      </p:sp>
+      <p:sp>
+        <p:nvSpPr>
+          <p:cNvPr id="3" name="TextBox 2"/>
           <p:cNvSpPr txBox="1"/>
           <p:nvPr/>
         </p:nvSpPr>
@@ -4462,7 +4550,7 @@
             <a:r>
               <a:rPr sz="1150" b="1" i="0">
                 <a:solidFill>
-                  <a:srgbClr val="1E88E5"/>
+                  <a:srgbClr val="7FE3FF"/>
                 </a:solidFill>
                 <a:latin typeface="微软雅黑"/>
                 <a:ea typeface="微软雅黑"/>
@@ -4475,7 +4563,7 @@
       </p:sp>
       <p:sp>
         <p:nvSpPr>
-          <p:cNvPr id="3" name="TextBox 2"/>
+          <p:cNvPr id="4" name="TextBox 3"/>
           <p:cNvSpPr txBox="1"/>
           <p:nvPr/>
         </p:nvSpPr>
@@ -4499,7 +4587,7 @@
             <a:r>
               <a:rPr sz="2700" b="1" i="0">
                 <a:solidFill>
-                  <a:srgbClr val="0B3B72"/>
+                  <a:srgbClr val="ECF7FF"/>
                 </a:solidFill>
                 <a:latin typeface="微软雅黑"/>
                 <a:ea typeface="微软雅黑"/>
@@ -4512,7 +4600,7 @@
       </p:sp>
       <p:sp>
         <p:nvSpPr>
-          <p:cNvPr id="4" name="TextBox 3"/>
+          <p:cNvPr id="5" name="TextBox 4"/>
           <p:cNvSpPr txBox="1"/>
           <p:nvPr/>
         </p:nvSpPr>
@@ -4536,7 +4624,7 @@
             <a:r>
               <a:rPr sz="1000" b="0" i="0">
                 <a:solidFill>
-                  <a:srgbClr val="5A6B85"/>
+                  <a:srgbClr val="7E9EC4"/>
                 </a:solidFill>
                 <a:latin typeface="微软雅黑"/>
                 <a:ea typeface="微软雅黑"/>
@@ -4549,7 +4637,7 @@
       </p:sp>
       <p:graphicFrame>
         <p:nvGraphicFramePr>
-          <p:cNvPr id="5" name="Table 4"/>
+          <p:cNvPr id="6" name="Table 5"/>
           <p:cNvGraphicFramePr>
             <a:graphicFrameLocks noGrp="1"/>
           </p:cNvGraphicFramePr>
@@ -4579,7 +4667,7 @@
                       <a:r>
                         <a:rPr sz="1100" b="1" i="0">
                           <a:solidFill>
-                            <a:srgbClr val="0B3B72"/>
+                            <a:srgbClr val="7FE3FF"/>
                           </a:solidFill>
                           <a:latin typeface="微软雅黑"/>
                           <a:ea typeface="微软雅黑"/>
@@ -4591,7 +4679,7 @@
                   </a:txBody>
                   <a:tcPr marL="100584" marR="100584" marT="41148" marB="41148" anchor="ctr">
                     <a:solidFill>
-                      <a:srgbClr val="E8F1FB"/>
+                      <a:srgbClr val="0C2C54"/>
                     </a:solidFill>
                   </a:tcPr>
                 </a:tc>
@@ -4603,7 +4691,7 @@
                       <a:r>
                         <a:rPr sz="1100" b="1" i="0">
                           <a:solidFill>
-                            <a:srgbClr val="0B3B72"/>
+                            <a:srgbClr val="7FE3FF"/>
                           </a:solidFill>
                           <a:latin typeface="微软雅黑"/>
                           <a:ea typeface="微软雅黑"/>
@@ -4615,7 +4703,7 @@
                   </a:txBody>
                   <a:tcPr marL="100584" marR="100584" marT="41148" marB="41148" anchor="ctr">
                     <a:solidFill>
-                      <a:srgbClr val="E8F1FB"/>
+                      <a:srgbClr val="0C2C54"/>
                     </a:solidFill>
                   </a:tcPr>
                 </a:tc>
@@ -4627,7 +4715,7 @@
                       <a:r>
                         <a:rPr sz="1100" b="1" i="0">
                           <a:solidFill>
-                            <a:srgbClr val="0B3B72"/>
+                            <a:srgbClr val="7FE3FF"/>
                           </a:solidFill>
                           <a:latin typeface="微软雅黑"/>
                           <a:ea typeface="微软雅黑"/>
@@ -4639,7 +4727,7 @@
                   </a:txBody>
                   <a:tcPr marL="100584" marR="100584" marT="41148" marB="41148" anchor="ctr">
                     <a:solidFill>
-                      <a:srgbClr val="E8F1FB"/>
+                      <a:srgbClr val="0C2C54"/>
                     </a:solidFill>
                   </a:tcPr>
                 </a:tc>
@@ -4653,7 +4741,7 @@
                       <a:r>
                         <a:rPr sz="1100" b="0" i="0">
                           <a:solidFill>
-                            <a:srgbClr val="1F2D3D"/>
+                            <a:srgbClr val="BBD4EC"/>
                           </a:solidFill>
                           <a:latin typeface="微软雅黑"/>
                           <a:ea typeface="微软雅黑"/>
@@ -4665,7 +4753,7 @@
                   </a:txBody>
                   <a:tcPr marL="100584" marR="100584" marT="41148" marB="41148" anchor="ctr">
                     <a:solidFill>
-                      <a:srgbClr val="FFFFFF"/>
+                      <a:srgbClr val="061A38"/>
                     </a:solidFill>
                   </a:tcPr>
                 </a:tc>
@@ -4677,7 +4765,7 @@
                       <a:r>
                         <a:rPr sz="1100" b="0" i="0">
                           <a:solidFill>
-                            <a:srgbClr val="1F2D3D"/>
+                            <a:srgbClr val="BBD4EC"/>
                           </a:solidFill>
                           <a:latin typeface="微软雅黑"/>
                           <a:ea typeface="微软雅黑"/>
@@ -4689,7 +4777,7 @@
                   </a:txBody>
                   <a:tcPr marL="100584" marR="100584" marT="41148" marB="41148" anchor="ctr">
                     <a:solidFill>
-                      <a:srgbClr val="FFFFFF"/>
+                      <a:srgbClr val="061A38"/>
                     </a:solidFill>
                   </a:tcPr>
                 </a:tc>
@@ -4701,7 +4789,7 @@
                       <a:r>
                         <a:rPr sz="1100" b="0" i="0">
                           <a:solidFill>
-                            <a:srgbClr val="1F2D3D"/>
+                            <a:srgbClr val="BBD4EC"/>
                           </a:solidFill>
                           <a:latin typeface="微软雅黑"/>
                           <a:ea typeface="微软雅黑"/>
@@ -4713,7 +4801,7 @@
                   </a:txBody>
                   <a:tcPr marL="100584" marR="100584" marT="41148" marB="41148" anchor="ctr">
                     <a:solidFill>
-                      <a:srgbClr val="FFFFFF"/>
+                      <a:srgbClr val="061A38"/>
                     </a:solidFill>
                   </a:tcPr>
                 </a:tc>
@@ -4727,7 +4815,7 @@
                       <a:r>
                         <a:rPr sz="1100" b="0" i="0">
                           <a:solidFill>
-                            <a:srgbClr val="1F2D3D"/>
+                            <a:srgbClr val="BBD4EC"/>
                           </a:solidFill>
                           <a:latin typeface="微软雅黑"/>
                           <a:ea typeface="微软雅黑"/>
@@ -4739,7 +4827,7 @@
                   </a:txBody>
                   <a:tcPr marL="100584" marR="100584" marT="41148" marB="41148" anchor="ctr">
                     <a:solidFill>
-                      <a:srgbClr val="F2F6FC"/>
+                      <a:srgbClr val="08224A"/>
                     </a:solidFill>
                   </a:tcPr>
                 </a:tc>
@@ -4751,7 +4839,7 @@
                       <a:r>
                         <a:rPr sz="1100" b="0" i="0">
                           <a:solidFill>
-                            <a:srgbClr val="1F2D3D"/>
+                            <a:srgbClr val="BBD4EC"/>
                           </a:solidFill>
                           <a:latin typeface="微软雅黑"/>
                           <a:ea typeface="微软雅黑"/>
@@ -4763,7 +4851,7 @@
                   </a:txBody>
                   <a:tcPr marL="100584" marR="100584" marT="41148" marB="41148" anchor="ctr">
                     <a:solidFill>
-                      <a:srgbClr val="F2F6FC"/>
+                      <a:srgbClr val="08224A"/>
                     </a:solidFill>
                   </a:tcPr>
                 </a:tc>
@@ -4775,7 +4863,7 @@
                       <a:r>
                         <a:rPr sz="1100" b="0" i="0">
                           <a:solidFill>
-                            <a:srgbClr val="1F2D3D"/>
+                            <a:srgbClr val="BBD4EC"/>
                           </a:solidFill>
                           <a:latin typeface="微软雅黑"/>
                           <a:ea typeface="微软雅黑"/>
@@ -4787,7 +4875,7 @@
                   </a:txBody>
                   <a:tcPr marL="100584" marR="100584" marT="41148" marB="41148" anchor="ctr">
                     <a:solidFill>
-                      <a:srgbClr val="F2F6FC"/>
+                      <a:srgbClr val="08224A"/>
                     </a:solidFill>
                   </a:tcPr>
                 </a:tc>
@@ -4801,7 +4889,7 @@
                       <a:r>
                         <a:rPr sz="1100" b="0" i="0">
                           <a:solidFill>
-                            <a:srgbClr val="1F2D3D"/>
+                            <a:srgbClr val="BBD4EC"/>
                           </a:solidFill>
                           <a:latin typeface="微软雅黑"/>
                           <a:ea typeface="微软雅黑"/>
@@ -4813,7 +4901,7 @@
                   </a:txBody>
                   <a:tcPr marL="100584" marR="100584" marT="41148" marB="41148" anchor="ctr">
                     <a:solidFill>
-                      <a:srgbClr val="FFFFFF"/>
+                      <a:srgbClr val="061A38"/>
                     </a:solidFill>
                   </a:tcPr>
                 </a:tc>
@@ -4825,7 +4913,7 @@
                       <a:r>
                         <a:rPr sz="1100" b="0" i="0">
                           <a:solidFill>
-                            <a:srgbClr val="1F2D3D"/>
+                            <a:srgbClr val="BBD4EC"/>
                           </a:solidFill>
                           <a:latin typeface="微软雅黑"/>
                           <a:ea typeface="微软雅黑"/>
@@ -4837,7 +4925,7 @@
                   </a:txBody>
                   <a:tcPr marL="100584" marR="100584" marT="41148" marB="41148" anchor="ctr">
                     <a:solidFill>
-                      <a:srgbClr val="FFFFFF"/>
+                      <a:srgbClr val="061A38"/>
                     </a:solidFill>
                   </a:tcPr>
                 </a:tc>
@@ -4849,7 +4937,7 @@
                       <a:r>
                         <a:rPr sz="1100" b="0" i="0">
                           <a:solidFill>
-                            <a:srgbClr val="1F2D3D"/>
+                            <a:srgbClr val="BBD4EC"/>
                           </a:solidFill>
                           <a:latin typeface="微软雅黑"/>
                           <a:ea typeface="微软雅黑"/>
@@ -4861,7 +4949,7 @@
                   </a:txBody>
                   <a:tcPr marL="100584" marR="100584" marT="41148" marB="41148" anchor="ctr">
                     <a:solidFill>
-                      <a:srgbClr val="FFFFFF"/>
+                      <a:srgbClr val="061A38"/>
                     </a:solidFill>
                   </a:tcPr>
                 </a:tc>
@@ -4875,7 +4963,7 @@
                       <a:r>
                         <a:rPr sz="1100" b="0" i="0">
                           <a:solidFill>
-                            <a:srgbClr val="1F2D3D"/>
+                            <a:srgbClr val="BBD4EC"/>
                           </a:solidFill>
                           <a:latin typeface="微软雅黑"/>
                           <a:ea typeface="微软雅黑"/>
@@ -4887,7 +4975,7 @@
                   </a:txBody>
                   <a:tcPr marL="100584" marR="100584" marT="41148" marB="41148" anchor="ctr">
                     <a:solidFill>
-                      <a:srgbClr val="F2F6FC"/>
+                      <a:srgbClr val="08224A"/>
                     </a:solidFill>
                   </a:tcPr>
                 </a:tc>
@@ -4899,7 +4987,7 @@
                       <a:r>
                         <a:rPr sz="1100" b="0" i="0">
                           <a:solidFill>
-                            <a:srgbClr val="1F2D3D"/>
+                            <a:srgbClr val="BBD4EC"/>
                           </a:solidFill>
                           <a:latin typeface="微软雅黑"/>
                           <a:ea typeface="微软雅黑"/>
@@ -4911,7 +4999,7 @@
                   </a:txBody>
                   <a:tcPr marL="100584" marR="100584" marT="41148" marB="41148" anchor="ctr">
                     <a:solidFill>
-                      <a:srgbClr val="F2F6FC"/>
+                      <a:srgbClr val="08224A"/>
                     </a:solidFill>
                   </a:tcPr>
                 </a:tc>
@@ -4923,7 +5011,7 @@
                       <a:r>
                         <a:rPr sz="1100" b="0" i="0">
                           <a:solidFill>
-                            <a:srgbClr val="1F2D3D"/>
+                            <a:srgbClr val="BBD4EC"/>
                           </a:solidFill>
                           <a:latin typeface="微软雅黑"/>
                           <a:ea typeface="微软雅黑"/>
@@ -4935,7 +5023,7 @@
                   </a:txBody>
                   <a:tcPr marL="100584" marR="100584" marT="41148" marB="41148" anchor="ctr">
                     <a:solidFill>
-                      <a:srgbClr val="F2F6FC"/>
+                      <a:srgbClr val="08224A"/>
                     </a:solidFill>
                   </a:tcPr>
                 </a:tc>
@@ -4949,7 +5037,7 @@
                       <a:r>
                         <a:rPr sz="1100" b="0" i="0">
                           <a:solidFill>
-                            <a:srgbClr val="1F2D3D"/>
+                            <a:srgbClr val="BBD4EC"/>
                           </a:solidFill>
                           <a:latin typeface="微软雅黑"/>
                           <a:ea typeface="微软雅黑"/>
@@ -4961,7 +5049,7 @@
                   </a:txBody>
                   <a:tcPr marL="100584" marR="100584" marT="41148" marB="41148" anchor="ctr">
                     <a:solidFill>
-                      <a:srgbClr val="FFFFFF"/>
+                      <a:srgbClr val="061A38"/>
                     </a:solidFill>
                   </a:tcPr>
                 </a:tc>
@@ -4973,7 +5061,7 @@
                       <a:r>
                         <a:rPr sz="1100" b="0" i="0">
                           <a:solidFill>
-                            <a:srgbClr val="1F2D3D"/>
+                            <a:srgbClr val="BBD4EC"/>
                           </a:solidFill>
                           <a:latin typeface="微软雅黑"/>
                           <a:ea typeface="微软雅黑"/>
@@ -4985,7 +5073,7 @@
                   </a:txBody>
                   <a:tcPr marL="100584" marR="100584" marT="41148" marB="41148" anchor="ctr">
                     <a:solidFill>
-                      <a:srgbClr val="FFFFFF"/>
+                      <a:srgbClr val="061A38"/>
                     </a:solidFill>
                   </a:tcPr>
                 </a:tc>
@@ -4997,7 +5085,7 @@
                       <a:r>
                         <a:rPr sz="1100" b="0" i="0">
                           <a:solidFill>
-                            <a:srgbClr val="1F2D3D"/>
+                            <a:srgbClr val="BBD4EC"/>
                           </a:solidFill>
                           <a:latin typeface="微软雅黑"/>
                           <a:ea typeface="微软雅黑"/>
@@ -5009,7 +5097,7 @@
                   </a:txBody>
                   <a:tcPr marL="100584" marR="100584" marT="41148" marB="41148" anchor="ctr">
                     <a:solidFill>
-                      <a:srgbClr val="FFFFFF"/>
+                      <a:srgbClr val="061A38"/>
                     </a:solidFill>
                   </a:tcPr>
                 </a:tc>
@@ -5038,7 +5126,51 @@
       <p:grpSpPr/>
       <p:sp>
         <p:nvSpPr>
-          <p:cNvPr id="2" name="TextBox 1"/>
+          <p:cNvPr id="2" name="Rectangle 1"/>
+          <p:cNvSpPr/>
+          <p:nvPr/>
+        </p:nvSpPr>
+        <p:spPr>
+          <a:xfrm>
+            <a:off x="0" y="0"/>
+            <a:ext cx="12191695" cy="6858000"/>
+          </a:xfrm>
+          <a:prstGeom prst="rect">
+            <a:avLst/>
+          </a:prstGeom>
+          <a:solidFill>
+            <a:srgbClr val="04122B"/>
+          </a:solidFill>
+          <a:ln>
+            <a:noFill/>
+          </a:ln>
+          <a:effectLst/>
+        </p:spPr>
+        <p:style>
+          <a:lnRef idx="1">
+            <a:schemeClr val="accent1"/>
+          </a:lnRef>
+          <a:fillRef idx="3">
+            <a:schemeClr val="accent1"/>
+          </a:fillRef>
+          <a:effectRef idx="2">
+            <a:schemeClr val="accent1"/>
+          </a:effectRef>
+          <a:fontRef idx="minor">
+            <a:schemeClr val="lt1"/>
+          </a:fontRef>
+        </p:style>
+        <p:txBody>
+          <a:bodyPr rtlCol="0" anchor="ctr"/>
+          <a:lstStyle/>
+          <a:p>
+            <a:pPr algn="ctr"/>
+          </a:p>
+        </p:txBody>
+      </p:sp>
+      <p:sp>
+        <p:nvSpPr>
+          <p:cNvPr id="3" name="TextBox 2"/>
           <p:cNvSpPr txBox="1"/>
           <p:nvPr/>
         </p:nvSpPr>
@@ -5062,7 +5194,7 @@
             <a:r>
               <a:rPr sz="1150" b="1" i="0">
                 <a:solidFill>
-                  <a:srgbClr val="1E88E5"/>
+                  <a:srgbClr val="7FE3FF"/>
                 </a:solidFill>
                 <a:latin typeface="微软雅黑"/>
                 <a:ea typeface="微软雅黑"/>
@@ -5075,7 +5207,7 @@
       </p:sp>
       <p:sp>
         <p:nvSpPr>
-          <p:cNvPr id="3" name="TextBox 2"/>
+          <p:cNvPr id="4" name="TextBox 3"/>
           <p:cNvSpPr txBox="1"/>
           <p:nvPr/>
         </p:nvSpPr>
@@ -5099,7 +5231,7 @@
             <a:r>
               <a:rPr sz="2700" b="1" i="0">
                 <a:solidFill>
-                  <a:srgbClr val="0B3B72"/>
+                  <a:srgbClr val="ECF7FF"/>
                 </a:solidFill>
                 <a:latin typeface="微软雅黑"/>
                 <a:ea typeface="微软雅黑"/>
@@ -5112,7 +5244,7 @@
       </p:sp>
       <p:sp>
         <p:nvSpPr>
-          <p:cNvPr id="4" name="TextBox 3"/>
+          <p:cNvPr id="5" name="TextBox 4"/>
           <p:cNvSpPr txBox="1"/>
           <p:nvPr/>
         </p:nvSpPr>
@@ -5136,7 +5268,7 @@
             <a:r>
               <a:rPr sz="1000" b="0" i="0">
                 <a:solidFill>
-                  <a:srgbClr val="5A6B85"/>
+                  <a:srgbClr val="7E9EC4"/>
                 </a:solidFill>
                 <a:latin typeface="微软雅黑"/>
                 <a:ea typeface="微软雅黑"/>
@@ -5149,7 +5281,7 @@
       </p:sp>
       <p:graphicFrame>
         <p:nvGraphicFramePr>
-          <p:cNvPr id="5" name="Table 4"/>
+          <p:cNvPr id="6" name="Table 5"/>
           <p:cNvGraphicFramePr>
             <a:graphicFrameLocks noGrp="1"/>
           </p:cNvGraphicFramePr>
@@ -5179,7 +5311,7 @@
                       <a:r>
                         <a:rPr sz="1100" b="1" i="0">
                           <a:solidFill>
-                            <a:srgbClr val="0B3B72"/>
+                            <a:srgbClr val="7FE3FF"/>
                           </a:solidFill>
                           <a:latin typeface="微软雅黑"/>
                           <a:ea typeface="微软雅黑"/>
@@ -5191,7 +5323,7 @@
                   </a:txBody>
                   <a:tcPr marL="100584" marR="100584" marT="41148" marB="41148" anchor="ctr">
                     <a:solidFill>
-                      <a:srgbClr val="E8F1FB"/>
+                      <a:srgbClr val="0C2C54"/>
                     </a:solidFill>
                   </a:tcPr>
                 </a:tc>
@@ -5203,7 +5335,7 @@
                       <a:r>
                         <a:rPr sz="1100" b="1" i="0">
                           <a:solidFill>
-                            <a:srgbClr val="0B3B72"/>
+                            <a:srgbClr val="7FE3FF"/>
                           </a:solidFill>
                           <a:latin typeface="微软雅黑"/>
                           <a:ea typeface="微软雅黑"/>
@@ -5215,7 +5347,7 @@
                   </a:txBody>
                   <a:tcPr marL="100584" marR="100584" marT="41148" marB="41148" anchor="ctr">
                     <a:solidFill>
-                      <a:srgbClr val="E8F1FB"/>
+                      <a:srgbClr val="0C2C54"/>
                     </a:solidFill>
                   </a:tcPr>
                 </a:tc>
@@ -5227,7 +5359,7 @@
                       <a:r>
                         <a:rPr sz="1100" b="1" i="0">
                           <a:solidFill>
-                            <a:srgbClr val="0B3B72"/>
+                            <a:srgbClr val="7FE3FF"/>
                           </a:solidFill>
                           <a:latin typeface="微软雅黑"/>
                           <a:ea typeface="微软雅黑"/>
@@ -5239,7 +5371,7 @@
                   </a:txBody>
                   <a:tcPr marL="100584" marR="100584" marT="41148" marB="41148" anchor="ctr">
                     <a:solidFill>
-                      <a:srgbClr val="E8F1FB"/>
+                      <a:srgbClr val="0C2C54"/>
                     </a:solidFill>
                   </a:tcPr>
                 </a:tc>
@@ -5253,7 +5385,7 @@
                       <a:r>
                         <a:rPr sz="1100" b="0" i="0">
                           <a:solidFill>
-                            <a:srgbClr val="1F2D3D"/>
+                            <a:srgbClr val="BBD4EC"/>
                           </a:solidFill>
                           <a:latin typeface="微软雅黑"/>
                           <a:ea typeface="微软雅黑"/>
@@ -5265,7 +5397,7 @@
                   </a:txBody>
                   <a:tcPr marL="100584" marR="100584" marT="41148" marB="41148" anchor="ctr">
                     <a:solidFill>
-                      <a:srgbClr val="FFFFFF"/>
+                      <a:srgbClr val="061A38"/>
                     </a:solidFill>
                   </a:tcPr>
                 </a:tc>
@@ -5277,7 +5409,7 @@
                       <a:r>
                         <a:rPr sz="1100" b="0" i="0">
                           <a:solidFill>
-                            <a:srgbClr val="1F2D3D"/>
+                            <a:srgbClr val="BBD4EC"/>
                           </a:solidFill>
                           <a:latin typeface="微软雅黑"/>
                           <a:ea typeface="微软雅黑"/>
@@ -5289,7 +5421,7 @@
                   </a:txBody>
                   <a:tcPr marL="100584" marR="100584" marT="41148" marB="41148" anchor="ctr">
                     <a:solidFill>
-                      <a:srgbClr val="FFFFFF"/>
+                      <a:srgbClr val="061A38"/>
                     </a:solidFill>
                   </a:tcPr>
                 </a:tc>
@@ -5301,7 +5433,7 @@
                       <a:r>
                         <a:rPr sz="1100" b="0" i="0">
                           <a:solidFill>
-                            <a:srgbClr val="1F2D3D"/>
+                            <a:srgbClr val="BBD4EC"/>
                           </a:solidFill>
                           <a:latin typeface="微软雅黑"/>
                           <a:ea typeface="微软雅黑"/>
@@ -5313,7 +5445,7 @@
                   </a:txBody>
                   <a:tcPr marL="100584" marR="100584" marT="41148" marB="41148" anchor="ctr">
                     <a:solidFill>
-                      <a:srgbClr val="FFFFFF"/>
+                      <a:srgbClr val="061A38"/>
                     </a:solidFill>
                   </a:tcPr>
                 </a:tc>
@@ -5327,7 +5459,7 @@
                       <a:r>
                         <a:rPr sz="1100" b="0" i="0">
                           <a:solidFill>
-                            <a:srgbClr val="1F2D3D"/>
+                            <a:srgbClr val="BBD4EC"/>
                           </a:solidFill>
                           <a:latin typeface="微软雅黑"/>
                           <a:ea typeface="微软雅黑"/>
@@ -5339,7 +5471,7 @@
                   </a:txBody>
                   <a:tcPr marL="100584" marR="100584" marT="41148" marB="41148" anchor="ctr">
                     <a:solidFill>
-                      <a:srgbClr val="F2F6FC"/>
+                      <a:srgbClr val="08224A"/>
                     </a:solidFill>
                   </a:tcPr>
                 </a:tc>
@@ -5351,7 +5483,7 @@
                       <a:r>
                         <a:rPr sz="1100" b="0" i="0">
                           <a:solidFill>
-                            <a:srgbClr val="1F2D3D"/>
+                            <a:srgbClr val="BBD4EC"/>
                           </a:solidFill>
                           <a:latin typeface="微软雅黑"/>
                           <a:ea typeface="微软雅黑"/>
@@ -5363,7 +5495,7 @@
                   </a:txBody>
                   <a:tcPr marL="100584" marR="100584" marT="41148" marB="41148" anchor="ctr">
                     <a:solidFill>
-                      <a:srgbClr val="F2F6FC"/>
+                      <a:srgbClr val="08224A"/>
                     </a:solidFill>
                   </a:tcPr>
                 </a:tc>
@@ -5375,7 +5507,7 @@
                       <a:r>
                         <a:rPr sz="1100" b="0" i="0">
                           <a:solidFill>
-                            <a:srgbClr val="1F2D3D"/>
+                            <a:srgbClr val="BBD4EC"/>
                           </a:solidFill>
                           <a:latin typeface="微软雅黑"/>
                           <a:ea typeface="微软雅黑"/>
@@ -5387,7 +5519,7 @@
                   </a:txBody>
                   <a:tcPr marL="100584" marR="100584" marT="41148" marB="41148" anchor="ctr">
                     <a:solidFill>
-                      <a:srgbClr val="F2F6FC"/>
+                      <a:srgbClr val="08224A"/>
                     </a:solidFill>
                   </a:tcPr>
                 </a:tc>
@@ -5401,7 +5533,7 @@
                       <a:r>
                         <a:rPr sz="1100" b="0" i="0">
                           <a:solidFill>
-                            <a:srgbClr val="1F2D3D"/>
+                            <a:srgbClr val="BBD4EC"/>
                           </a:solidFill>
                           <a:latin typeface="微软雅黑"/>
                           <a:ea typeface="微软雅黑"/>
@@ -5413,7 +5545,7 @@
                   </a:txBody>
                   <a:tcPr marL="100584" marR="100584" marT="41148" marB="41148" anchor="ctr">
                     <a:solidFill>
-                      <a:srgbClr val="FFFFFF"/>
+                      <a:srgbClr val="061A38"/>
                     </a:solidFill>
                   </a:tcPr>
                 </a:tc>
@@ -5425,7 +5557,7 @@
                       <a:r>
                         <a:rPr sz="1100" b="0" i="0">
                           <a:solidFill>
-                            <a:srgbClr val="1F2D3D"/>
+                            <a:srgbClr val="BBD4EC"/>
                           </a:solidFill>
                           <a:latin typeface="微软雅黑"/>
                           <a:ea typeface="微软雅黑"/>
@@ -5437,7 +5569,7 @@
                   </a:txBody>
                   <a:tcPr marL="100584" marR="100584" marT="41148" marB="41148" anchor="ctr">
                     <a:solidFill>
-                      <a:srgbClr val="FFFFFF"/>
+                      <a:srgbClr val="061A38"/>
                     </a:solidFill>
                   </a:tcPr>
                 </a:tc>
@@ -5449,7 +5581,7 @@
                       <a:r>
                         <a:rPr sz="1100" b="0" i="0">
                           <a:solidFill>
-                            <a:srgbClr val="1F2D3D"/>
+                            <a:srgbClr val="BBD4EC"/>
                           </a:solidFill>
                           <a:latin typeface="微软雅黑"/>
                           <a:ea typeface="微软雅黑"/>
@@ -5461,7 +5593,7 @@
                   </a:txBody>
                   <a:tcPr marL="100584" marR="100584" marT="41148" marB="41148" anchor="ctr">
                     <a:solidFill>
-                      <a:srgbClr val="FFFFFF"/>
+                      <a:srgbClr val="061A38"/>
                     </a:solidFill>
                   </a:tcPr>
                 </a:tc>
@@ -5475,7 +5607,7 @@
                       <a:r>
                         <a:rPr sz="1100" b="0" i="0">
                           <a:solidFill>
-                            <a:srgbClr val="1F2D3D"/>
+                            <a:srgbClr val="BBD4EC"/>
                           </a:solidFill>
                           <a:latin typeface="微软雅黑"/>
                           <a:ea typeface="微软雅黑"/>
@@ -5487,7 +5619,7 @@
                   </a:txBody>
                   <a:tcPr marL="100584" marR="100584" marT="41148" marB="41148" anchor="ctr">
                     <a:solidFill>
-                      <a:srgbClr val="F2F6FC"/>
+                      <a:srgbClr val="08224A"/>
                     </a:solidFill>
                   </a:tcPr>
                 </a:tc>
@@ -5499,7 +5631,7 @@
                       <a:r>
                         <a:rPr sz="1100" b="0" i="0">
                           <a:solidFill>
-                            <a:srgbClr val="1F2D3D"/>
+                            <a:srgbClr val="BBD4EC"/>
                           </a:solidFill>
                           <a:latin typeface="微软雅黑"/>
                           <a:ea typeface="微软雅黑"/>
@@ -5511,7 +5643,7 @@
                   </a:txBody>
                   <a:tcPr marL="100584" marR="100584" marT="41148" marB="41148" anchor="ctr">
                     <a:solidFill>
-                      <a:srgbClr val="F2F6FC"/>
+                      <a:srgbClr val="08224A"/>
                     </a:solidFill>
                   </a:tcPr>
                 </a:tc>
@@ -5523,7 +5655,7 @@
                       <a:r>
                         <a:rPr sz="1100" b="0" i="0">
                           <a:solidFill>
-                            <a:srgbClr val="1F2D3D"/>
+                            <a:srgbClr val="BBD4EC"/>
                           </a:solidFill>
                           <a:latin typeface="微软雅黑"/>
                           <a:ea typeface="微软雅黑"/>
@@ -5535,7 +5667,7 @@
                   </a:txBody>
                   <a:tcPr marL="100584" marR="100584" marT="41148" marB="41148" anchor="ctr">
                     <a:solidFill>
-                      <a:srgbClr val="F2F6FC"/>
+                      <a:srgbClr val="08224A"/>
                     </a:solidFill>
                   </a:tcPr>
                 </a:tc>
@@ -5549,7 +5681,7 @@
                       <a:r>
                         <a:rPr sz="1100" b="0" i="0">
                           <a:solidFill>
-                            <a:srgbClr val="1F2D3D"/>
+                            <a:srgbClr val="BBD4EC"/>
                           </a:solidFill>
                           <a:latin typeface="微软雅黑"/>
                           <a:ea typeface="微软雅黑"/>
@@ -5561,7 +5693,7 @@
                   </a:txBody>
                   <a:tcPr marL="100584" marR="100584" marT="41148" marB="41148" anchor="ctr">
                     <a:solidFill>
-                      <a:srgbClr val="FFFFFF"/>
+                      <a:srgbClr val="061A38"/>
                     </a:solidFill>
                   </a:tcPr>
                 </a:tc>
@@ -5573,7 +5705,7 @@
                       <a:r>
                         <a:rPr sz="1100" b="0" i="0">
                           <a:solidFill>
-                            <a:srgbClr val="1F2D3D"/>
+                            <a:srgbClr val="BBD4EC"/>
                           </a:solidFill>
                           <a:latin typeface="微软雅黑"/>
                           <a:ea typeface="微软雅黑"/>
@@ -5585,7 +5717,7 @@
                   </a:txBody>
                   <a:tcPr marL="100584" marR="100584" marT="41148" marB="41148" anchor="ctr">
                     <a:solidFill>
-                      <a:srgbClr val="FFFFFF"/>
+                      <a:srgbClr val="061A38"/>
                     </a:solidFill>
                   </a:tcPr>
                 </a:tc>
@@ -5597,7 +5729,7 @@
                       <a:r>
                         <a:rPr sz="1100" b="0" i="0">
                           <a:solidFill>
-                            <a:srgbClr val="1F2D3D"/>
+                            <a:srgbClr val="BBD4EC"/>
                           </a:solidFill>
                           <a:latin typeface="微软雅黑"/>
                           <a:ea typeface="微软雅黑"/>
@@ -5609,7 +5741,7 @@
                   </a:txBody>
                   <a:tcPr marL="100584" marR="100584" marT="41148" marB="41148" anchor="ctr">
                     <a:solidFill>
-                      <a:srgbClr val="FFFFFF"/>
+                      <a:srgbClr val="061A38"/>
                     </a:solidFill>
                   </a:tcPr>
                 </a:tc>
@@ -5620,7 +5752,7 @@
       </p:graphicFrame>
       <p:sp>
         <p:nvSpPr>
-          <p:cNvPr id="6" name="TextBox 5"/>
+          <p:cNvPr id="7" name="TextBox 6"/>
           <p:cNvSpPr txBox="1"/>
           <p:nvPr/>
         </p:nvSpPr>
@@ -5644,7 +5776,7 @@
             <a:r>
               <a:rPr sz="1350" b="0" i="0">
                 <a:solidFill>
-                  <a:srgbClr val="1F2D3D"/>
+                  <a:srgbClr val="BBD4EC"/>
                 </a:solidFill>
                 <a:latin typeface="微软雅黑"/>
                 <a:ea typeface="微软雅黑"/>
@@ -5655,7 +5787,7 @@
             <a:r>
               <a:rPr sz="1350" b="1" i="0">
                 <a:solidFill>
-                  <a:srgbClr val="0B3B72"/>
+                  <a:srgbClr val="ECF7FF"/>
                 </a:solidFill>
                 <a:latin typeface="微软雅黑"/>
                 <a:ea typeface="微软雅黑"/>
@@ -5666,7 +5798,7 @@
             <a:r>
               <a:rPr sz="1350" b="0" i="0">
                 <a:solidFill>
-                  <a:srgbClr val="1F2D3D"/>
+                  <a:srgbClr val="BBD4EC"/>
                 </a:solidFill>
                 <a:latin typeface="微软雅黑"/>
                 <a:ea typeface="微软雅黑"/>
@@ -5710,7 +5842,7 @@
             <a:avLst/>
           </a:prstGeom>
           <a:solidFill>
-            <a:srgbClr val="0A2A52"/>
+            <a:srgbClr val="02091A"/>
           </a:solidFill>
           <a:ln>
             <a:noFill/>
@@ -5783,7 +5915,7 @@
             <a:r>
               <a:rPr sz="1600" b="0" i="0">
                 <a:solidFill>
-                  <a:srgbClr val="C8DCF2"/>
+                  <a:srgbClr val="C7DCF2"/>
                 </a:solidFill>
                 <a:latin typeface="微软雅黑"/>
                 <a:ea typeface="微软雅黑"/>
@@ -5811,11 +5943,11 @@
             </a:avLst>
           </a:prstGeom>
           <a:solidFill>
-            <a:srgbClr val="123A69"/>
+            <a:srgbClr val="0A2448"/>
           </a:solidFill>
           <a:ln w="9525">
             <a:solidFill>
-              <a:srgbClr val="2A5A94"/>
+              <a:srgbClr val="1A4272"/>
             </a:solidFill>
           </a:ln>
           <a:effectLst/>
@@ -5857,7 +5989,7 @@
             <a:avLst/>
           </a:prstGeom>
           <a:solidFill>
-            <a:srgbClr val="1E88E5"/>
+            <a:srgbClr val="7FE3FF"/>
           </a:solidFill>
           <a:ln w="19050">
             <a:solidFill>
@@ -5947,7 +6079,7 @@
             <a:r>
               <a:rPr sz="950" b="0" i="0">
                 <a:solidFill>
-                  <a:srgbClr val="9FC2E6"/>
+                  <a:srgbClr val="7F9DC4"/>
                 </a:solidFill>
                 <a:latin typeface="微软雅黑"/>
                 <a:ea typeface="微软雅黑"/>
@@ -5975,11 +6107,11 @@
             </a:avLst>
           </a:prstGeom>
           <a:solidFill>
-            <a:srgbClr val="123A69"/>
+            <a:srgbClr val="0A2448"/>
           </a:solidFill>
           <a:ln w="9525">
             <a:solidFill>
-              <a:srgbClr val="2A5A94"/>
+              <a:srgbClr val="1A4272"/>
             </a:solidFill>
           </a:ln>
           <a:effectLst/>
@@ -6021,7 +6153,7 @@
             <a:avLst/>
           </a:prstGeom>
           <a:solidFill>
-            <a:srgbClr val="1E88E5"/>
+            <a:srgbClr val="7FE3FF"/>
           </a:solidFill>
           <a:ln w="19050">
             <a:solidFill>
@@ -6111,7 +6243,7 @@
             <a:r>
               <a:rPr sz="950" b="0" i="0">
                 <a:solidFill>
-                  <a:srgbClr val="9FC2E6"/>
+                  <a:srgbClr val="7F9DC4"/>
                 </a:solidFill>
                 <a:latin typeface="微软雅黑"/>
                 <a:ea typeface="微软雅黑"/>
@@ -6139,11 +6271,11 @@
             </a:avLst>
           </a:prstGeom>
           <a:solidFill>
-            <a:srgbClr val="123A69"/>
+            <a:srgbClr val="0A2448"/>
           </a:solidFill>
           <a:ln w="9525">
             <a:solidFill>
-              <a:srgbClr val="2A5A94"/>
+              <a:srgbClr val="1A4272"/>
             </a:solidFill>
           </a:ln>
           <a:effectLst/>
@@ -6185,7 +6317,7 @@
             <a:avLst/>
           </a:prstGeom>
           <a:solidFill>
-            <a:srgbClr val="1E88E5"/>
+            <a:srgbClr val="7FE3FF"/>
           </a:solidFill>
           <a:ln w="19050">
             <a:solidFill>
@@ -6275,7 +6407,7 @@
             <a:r>
               <a:rPr sz="950" b="0" i="0">
                 <a:solidFill>
-                  <a:srgbClr val="9FC2E6"/>
+                  <a:srgbClr val="7F9DC4"/>
                 </a:solidFill>
                 <a:latin typeface="微软雅黑"/>
                 <a:ea typeface="微软雅黑"/>
@@ -6361,138 +6493,23 @@
       <p:grpSpPr/>
       <p:sp>
         <p:nvSpPr>
-          <p:cNvPr id="2" name="TextBox 1"/>
-          <p:cNvSpPr txBox="1"/>
-          <p:nvPr/>
-        </p:nvSpPr>
-        <p:spPr>
-          <a:xfrm>
-            <a:off x="566928" y="329184"/>
-            <a:ext cx="11057839" cy="274320"/>
+          <p:cNvPr id="2" name="Rectangle 1"/>
+          <p:cNvSpPr/>
+          <p:nvPr/>
+        </p:nvSpPr>
+        <p:spPr>
+          <a:xfrm>
+            <a:off x="0" y="0"/>
+            <a:ext cx="12191695" cy="6858000"/>
           </a:xfrm>
           <a:prstGeom prst="rect">
             <a:avLst/>
           </a:prstGeom>
-          <a:noFill/>
-        </p:spPr>
-        <p:txBody>
-          <a:bodyPr wrap="square" anchor="t" lIns="0" rIns="0" tIns="0" bIns="0">
-            <a:spAutoFit/>
-          </a:bodyPr>
-          <a:lstStyle/>
-          <a:p>
-            <a:pPr algn="l"/>
-            <a:r>
-              <a:rPr sz="1150" b="1" i="0">
-                <a:solidFill>
-                  <a:srgbClr val="1E88E5"/>
-                </a:solidFill>
-                <a:latin typeface="微软雅黑"/>
-                <a:ea typeface="微软雅黑"/>
-                <a:cs typeface="微软雅黑"/>
-              </a:rPr>
-              <a:t>目录</a:t>
-            </a:r>
-          </a:p>
-        </p:txBody>
-      </p:sp>
-      <p:sp>
-        <p:nvSpPr>
-          <p:cNvPr id="3" name="TextBox 2"/>
-          <p:cNvSpPr txBox="1"/>
-          <p:nvPr/>
-        </p:nvSpPr>
-        <p:spPr>
-          <a:xfrm>
-            <a:off x="566928" y="621792"/>
-            <a:ext cx="11057839" cy="640080"/>
-          </a:xfrm>
-          <a:prstGeom prst="rect">
-            <a:avLst/>
-          </a:prstGeom>
-          <a:noFill/>
-        </p:spPr>
-        <p:txBody>
-          <a:bodyPr wrap="square" anchor="t" lIns="0" rIns="0" tIns="0" bIns="0">
-            <a:spAutoFit/>
-          </a:bodyPr>
-          <a:lstStyle/>
-          <a:p>
-            <a:pPr algn="l"/>
-            <a:r>
-              <a:rPr sz="2700" b="1" i="0">
-                <a:solidFill>
-                  <a:srgbClr val="0B3B72"/>
-                </a:solidFill>
-                <a:latin typeface="微软雅黑"/>
-                <a:ea typeface="微软雅黑"/>
-                <a:cs typeface="微软雅黑"/>
-              </a:rPr>
-              <a:t>今天只讲三个问题</a:t>
-            </a:r>
-          </a:p>
-        </p:txBody>
-      </p:sp>
-      <p:sp>
-        <p:nvSpPr>
-          <p:cNvPr id="4" name="TextBox 3"/>
-          <p:cNvSpPr txBox="1"/>
-          <p:nvPr/>
-        </p:nvSpPr>
-        <p:spPr>
-          <a:xfrm>
-            <a:off x="10161727" y="6382512"/>
-            <a:ext cx="1463040" cy="274320"/>
-          </a:xfrm>
-          <a:prstGeom prst="rect">
-            <a:avLst/>
-          </a:prstGeom>
-          <a:noFill/>
-        </p:spPr>
-        <p:txBody>
-          <a:bodyPr wrap="square" anchor="t" lIns="0" rIns="0" tIns="0" bIns="0">
-            <a:spAutoFit/>
-          </a:bodyPr>
-          <a:lstStyle/>
-          <a:p>
-            <a:pPr algn="r"/>
-            <a:r>
-              <a:rPr sz="1000" b="0" i="0">
-                <a:solidFill>
-                  <a:srgbClr val="5A6B85"/>
-                </a:solidFill>
-                <a:latin typeface="微软雅黑"/>
-                <a:ea typeface="微软雅黑"/>
-                <a:cs typeface="微软雅黑"/>
-              </a:rPr>
-              <a:t>急救绿道 · 2 / 13</a:t>
-            </a:r>
-          </a:p>
-        </p:txBody>
-      </p:sp>
-      <p:sp>
-        <p:nvSpPr>
-          <p:cNvPr id="5" name="Rounded Rectangle 4"/>
-          <p:cNvSpPr/>
-          <p:nvPr/>
-        </p:nvSpPr>
-        <p:spPr>
-          <a:xfrm>
-            <a:off x="566928" y="1975104"/>
-            <a:ext cx="3411626" cy="2286000"/>
-          </a:xfrm>
-          <a:prstGeom prst="roundRect">
-            <a:avLst>
-              <a:gd name="adj" fmla="val 6000"/>
-            </a:avLst>
-          </a:prstGeom>
           <a:solidFill>
-            <a:srgbClr val="FFFFFF"/>
+            <a:srgbClr val="04122B"/>
           </a:solidFill>
-          <a:ln w="9525">
-            <a:solidFill>
-              <a:srgbClr val="D6E2F0"/>
-            </a:solidFill>
+          <a:ln>
+            <a:noFill/>
           </a:ln>
           <a:effectLst/>
         </p:spPr>
@@ -6520,7 +6537,166 @@
       </p:sp>
       <p:sp>
         <p:nvSpPr>
-          <p:cNvPr id="6" name="Rectangle 5"/>
+          <p:cNvPr id="3" name="TextBox 2"/>
+          <p:cNvSpPr txBox="1"/>
+          <p:nvPr/>
+        </p:nvSpPr>
+        <p:spPr>
+          <a:xfrm>
+            <a:off x="566928" y="329184"/>
+            <a:ext cx="11057839" cy="274320"/>
+          </a:xfrm>
+          <a:prstGeom prst="rect">
+            <a:avLst/>
+          </a:prstGeom>
+          <a:noFill/>
+        </p:spPr>
+        <p:txBody>
+          <a:bodyPr wrap="square" anchor="t" lIns="0" rIns="0" tIns="0" bIns="0">
+            <a:spAutoFit/>
+          </a:bodyPr>
+          <a:lstStyle/>
+          <a:p>
+            <a:pPr algn="l"/>
+            <a:r>
+              <a:rPr sz="1150" b="1" i="0">
+                <a:solidFill>
+                  <a:srgbClr val="7FE3FF"/>
+                </a:solidFill>
+                <a:latin typeface="微软雅黑"/>
+                <a:ea typeface="微软雅黑"/>
+                <a:cs typeface="微软雅黑"/>
+              </a:rPr>
+              <a:t>目录</a:t>
+            </a:r>
+          </a:p>
+        </p:txBody>
+      </p:sp>
+      <p:sp>
+        <p:nvSpPr>
+          <p:cNvPr id="4" name="TextBox 3"/>
+          <p:cNvSpPr txBox="1"/>
+          <p:nvPr/>
+        </p:nvSpPr>
+        <p:spPr>
+          <a:xfrm>
+            <a:off x="566928" y="621792"/>
+            <a:ext cx="11057839" cy="640080"/>
+          </a:xfrm>
+          <a:prstGeom prst="rect">
+            <a:avLst/>
+          </a:prstGeom>
+          <a:noFill/>
+        </p:spPr>
+        <p:txBody>
+          <a:bodyPr wrap="square" anchor="t" lIns="0" rIns="0" tIns="0" bIns="0">
+            <a:spAutoFit/>
+          </a:bodyPr>
+          <a:lstStyle/>
+          <a:p>
+            <a:pPr algn="l"/>
+            <a:r>
+              <a:rPr sz="2700" b="1" i="0">
+                <a:solidFill>
+                  <a:srgbClr val="ECF7FF"/>
+                </a:solidFill>
+                <a:latin typeface="微软雅黑"/>
+                <a:ea typeface="微软雅黑"/>
+                <a:cs typeface="微软雅黑"/>
+              </a:rPr>
+              <a:t>今天只讲三个问题</a:t>
+            </a:r>
+          </a:p>
+        </p:txBody>
+      </p:sp>
+      <p:sp>
+        <p:nvSpPr>
+          <p:cNvPr id="5" name="TextBox 4"/>
+          <p:cNvSpPr txBox="1"/>
+          <p:nvPr/>
+        </p:nvSpPr>
+        <p:spPr>
+          <a:xfrm>
+            <a:off x="10161727" y="6382512"/>
+            <a:ext cx="1463040" cy="274320"/>
+          </a:xfrm>
+          <a:prstGeom prst="rect">
+            <a:avLst/>
+          </a:prstGeom>
+          <a:noFill/>
+        </p:spPr>
+        <p:txBody>
+          <a:bodyPr wrap="square" anchor="t" lIns="0" rIns="0" tIns="0" bIns="0">
+            <a:spAutoFit/>
+          </a:bodyPr>
+          <a:lstStyle/>
+          <a:p>
+            <a:pPr algn="r"/>
+            <a:r>
+              <a:rPr sz="1000" b="0" i="0">
+                <a:solidFill>
+                  <a:srgbClr val="7E9EC4"/>
+                </a:solidFill>
+                <a:latin typeface="微软雅黑"/>
+                <a:ea typeface="微软雅黑"/>
+                <a:cs typeface="微软雅黑"/>
+              </a:rPr>
+              <a:t>急救绿道 · 2 / 13</a:t>
+            </a:r>
+          </a:p>
+        </p:txBody>
+      </p:sp>
+      <p:sp>
+        <p:nvSpPr>
+          <p:cNvPr id="6" name="Rounded Rectangle 5"/>
+          <p:cNvSpPr/>
+          <p:nvPr/>
+        </p:nvSpPr>
+        <p:spPr>
+          <a:xfrm>
+            <a:off x="566928" y="1975104"/>
+            <a:ext cx="3411626" cy="2286000"/>
+          </a:xfrm>
+          <a:prstGeom prst="roundRect">
+            <a:avLst>
+              <a:gd name="adj" fmla="val 6000"/>
+            </a:avLst>
+          </a:prstGeom>
+          <a:solidFill>
+            <a:srgbClr val="061A38"/>
+          </a:solidFill>
+          <a:ln w="9525">
+            <a:solidFill>
+              <a:srgbClr val="1A4272"/>
+            </a:solidFill>
+          </a:ln>
+          <a:effectLst/>
+        </p:spPr>
+        <p:style>
+          <a:lnRef idx="1">
+            <a:schemeClr val="accent1"/>
+          </a:lnRef>
+          <a:fillRef idx="3">
+            <a:schemeClr val="accent1"/>
+          </a:fillRef>
+          <a:effectRef idx="2">
+            <a:schemeClr val="accent1"/>
+          </a:effectRef>
+          <a:fontRef idx="minor">
+            <a:schemeClr val="lt1"/>
+          </a:fontRef>
+        </p:style>
+        <p:txBody>
+          <a:bodyPr rtlCol="0" anchor="ctr"/>
+          <a:lstStyle/>
+          <a:p>
+            <a:pPr algn="ctr"/>
+          </a:p>
+        </p:txBody>
+      </p:sp>
+      <p:sp>
+        <p:nvSpPr>
+          <p:cNvPr id="7" name="Rectangle 6"/>
           <p:cNvSpPr/>
           <p:nvPr/>
         </p:nvSpPr>
@@ -6533,7 +6709,7 @@
             <a:avLst/>
           </a:prstGeom>
           <a:solidFill>
-            <a:srgbClr val="1E88E5"/>
+            <a:srgbClr val="7FE3FF"/>
           </a:solidFill>
           <a:ln>
             <a:noFill/>
@@ -6564,7 +6740,7 @@
       </p:sp>
       <p:sp>
         <p:nvSpPr>
-          <p:cNvPr id="7" name="TextBox 6"/>
+          <p:cNvPr id="8" name="TextBox 7"/>
           <p:cNvSpPr txBox="1"/>
           <p:nvPr/>
         </p:nvSpPr>
@@ -6592,7 +6768,7 @@
             <a:r>
               <a:rPr sz="1900" b="1" i="0">
                 <a:solidFill>
-                  <a:srgbClr val="0B3B72"/>
+                  <a:srgbClr val="ECF7FF"/>
                 </a:solidFill>
                 <a:latin typeface="微软雅黑"/>
                 <a:ea typeface="微软雅黑"/>
@@ -6613,7 +6789,7 @@
             <a:r>
               <a:rPr sz="1300" b="0" i="0">
                 <a:solidFill>
-                  <a:srgbClr val="1F2D3D"/>
+                  <a:srgbClr val="BBD4EC"/>
                 </a:solidFill>
                 <a:latin typeface="微软雅黑"/>
                 <a:ea typeface="微软雅黑"/>
@@ -6627,7 +6803,7 @@
             <a:r>
               <a:rPr sz="1100" b="0" i="0">
                 <a:solidFill>
-                  <a:srgbClr val="5A6B85"/>
+                  <a:srgbClr val="7E9EC4"/>
                 </a:solidFill>
                 <a:latin typeface="微软雅黑"/>
                 <a:ea typeface="微软雅黑"/>
@@ -6640,7 +6816,7 @@
       </p:sp>
       <p:sp>
         <p:nvSpPr>
-          <p:cNvPr id="8" name="Rounded Rectangle 7"/>
+          <p:cNvPr id="9" name="Rounded Rectangle 8"/>
           <p:cNvSpPr/>
           <p:nvPr/>
         </p:nvSpPr>
@@ -6655,11 +6831,11 @@
             </a:avLst>
           </a:prstGeom>
           <a:solidFill>
-            <a:srgbClr val="FFFFFF"/>
+            <a:srgbClr val="061A38"/>
           </a:solidFill>
           <a:ln w="9525">
             <a:solidFill>
-              <a:srgbClr val="D6E2F0"/>
+              <a:srgbClr val="1A4272"/>
             </a:solidFill>
           </a:ln>
           <a:effectLst/>
@@ -6688,7 +6864,7 @@
       </p:sp>
       <p:sp>
         <p:nvSpPr>
-          <p:cNvPr id="9" name="Rectangle 8"/>
+          <p:cNvPr id="10" name="Rectangle 9"/>
           <p:cNvSpPr/>
           <p:nvPr/>
         </p:nvSpPr>
@@ -6701,7 +6877,7 @@
             <a:avLst/>
           </a:prstGeom>
           <a:solidFill>
-            <a:srgbClr val="1E88E5"/>
+            <a:srgbClr val="7FE3FF"/>
           </a:solidFill>
           <a:ln>
             <a:noFill/>
@@ -6732,7 +6908,7 @@
       </p:sp>
       <p:sp>
         <p:nvSpPr>
-          <p:cNvPr id="10" name="TextBox 9"/>
+          <p:cNvPr id="11" name="TextBox 10"/>
           <p:cNvSpPr txBox="1"/>
           <p:nvPr/>
         </p:nvSpPr>
@@ -6760,7 +6936,7 @@
             <a:r>
               <a:rPr sz="1900" b="1" i="0">
                 <a:solidFill>
-                  <a:srgbClr val="0B3B72"/>
+                  <a:srgbClr val="ECF7FF"/>
                 </a:solidFill>
                 <a:latin typeface="微软雅黑"/>
                 <a:ea typeface="微软雅黑"/>
@@ -6781,7 +6957,7 @@
             <a:r>
               <a:rPr sz="1300" b="0" i="0">
                 <a:solidFill>
-                  <a:srgbClr val="1F2D3D"/>
+                  <a:srgbClr val="BBD4EC"/>
                 </a:solidFill>
                 <a:latin typeface="微软雅黑"/>
                 <a:ea typeface="微软雅黑"/>
@@ -6795,7 +6971,7 @@
             <a:r>
               <a:rPr sz="1100" b="0" i="0">
                 <a:solidFill>
-                  <a:srgbClr val="5A6B85"/>
+                  <a:srgbClr val="7E9EC4"/>
                 </a:solidFill>
                 <a:latin typeface="微软雅黑"/>
                 <a:ea typeface="微软雅黑"/>
@@ -6808,7 +6984,7 @@
       </p:sp>
       <p:sp>
         <p:nvSpPr>
-          <p:cNvPr id="11" name="Rounded Rectangle 10"/>
+          <p:cNvPr id="12" name="Rounded Rectangle 11"/>
           <p:cNvSpPr/>
           <p:nvPr/>
         </p:nvSpPr>
@@ -6823,11 +6999,11 @@
             </a:avLst>
           </a:prstGeom>
           <a:solidFill>
-            <a:srgbClr val="FFFFFF"/>
+            <a:srgbClr val="061A38"/>
           </a:solidFill>
           <a:ln w="9525">
             <a:solidFill>
-              <a:srgbClr val="D6E2F0"/>
+              <a:srgbClr val="1A4272"/>
             </a:solidFill>
           </a:ln>
           <a:effectLst/>
@@ -6856,7 +7032,7 @@
       </p:sp>
       <p:sp>
         <p:nvSpPr>
-          <p:cNvPr id="12" name="Rectangle 11"/>
+          <p:cNvPr id="13" name="Rectangle 12"/>
           <p:cNvSpPr/>
           <p:nvPr/>
         </p:nvSpPr>
@@ -6869,7 +7045,7 @@
             <a:avLst/>
           </a:prstGeom>
           <a:solidFill>
-            <a:srgbClr val="1E88E5"/>
+            <a:srgbClr val="7FE3FF"/>
           </a:solidFill>
           <a:ln>
             <a:noFill/>
@@ -6900,7 +7076,7 @@
       </p:sp>
       <p:sp>
         <p:nvSpPr>
-          <p:cNvPr id="13" name="TextBox 12"/>
+          <p:cNvPr id="14" name="TextBox 13"/>
           <p:cNvSpPr txBox="1"/>
           <p:nvPr/>
         </p:nvSpPr>
@@ -6928,7 +7104,7 @@
             <a:r>
               <a:rPr sz="1900" b="1" i="0">
                 <a:solidFill>
-                  <a:srgbClr val="0B3B72"/>
+                  <a:srgbClr val="ECF7FF"/>
                 </a:solidFill>
                 <a:latin typeface="微软雅黑"/>
                 <a:ea typeface="微软雅黑"/>
@@ -6949,7 +7125,7 @@
             <a:r>
               <a:rPr sz="1300" b="0" i="0">
                 <a:solidFill>
-                  <a:srgbClr val="1F2D3D"/>
+                  <a:srgbClr val="BBD4EC"/>
                 </a:solidFill>
                 <a:latin typeface="微软雅黑"/>
                 <a:ea typeface="微软雅黑"/>
@@ -6963,7 +7139,7 @@
             <a:r>
               <a:rPr sz="1100" b="0" i="0">
                 <a:solidFill>
-                  <a:srgbClr val="5A6B85"/>
+                  <a:srgbClr val="7E9EC4"/>
                 </a:solidFill>
                 <a:latin typeface="微软雅黑"/>
                 <a:ea typeface="微软雅黑"/>
@@ -6994,175 +7170,23 @@
       <p:grpSpPr/>
       <p:sp>
         <p:nvSpPr>
-          <p:cNvPr id="2" name="TextBox 1"/>
-          <p:cNvSpPr txBox="1"/>
-          <p:nvPr/>
-        </p:nvSpPr>
-        <p:spPr>
-          <a:xfrm>
-            <a:off x="566928" y="329184"/>
-            <a:ext cx="11057839" cy="274320"/>
+          <p:cNvPr id="2" name="Rectangle 1"/>
+          <p:cNvSpPr/>
+          <p:nvPr/>
+        </p:nvSpPr>
+        <p:spPr>
+          <a:xfrm>
+            <a:off x="0" y="0"/>
+            <a:ext cx="12191695" cy="6858000"/>
           </a:xfrm>
           <a:prstGeom prst="rect">
             <a:avLst/>
           </a:prstGeom>
-          <a:noFill/>
-        </p:spPr>
-        <p:txBody>
-          <a:bodyPr wrap="square" anchor="t" lIns="0" rIns="0" tIns="0" bIns="0">
-            <a:spAutoFit/>
-          </a:bodyPr>
-          <a:lstStyle/>
-          <a:p>
-            <a:pPr algn="l"/>
-            <a:r>
-              <a:rPr sz="1150" b="1" i="0">
-                <a:solidFill>
-                  <a:srgbClr val="1E88E5"/>
-                </a:solidFill>
-                <a:latin typeface="微软雅黑"/>
-                <a:ea typeface="微软雅黑"/>
-                <a:cs typeface="微软雅黑"/>
-              </a:rPr>
-              <a:t>01 · 它是什么</a:t>
-            </a:r>
-          </a:p>
-        </p:txBody>
-      </p:sp>
-      <p:sp>
-        <p:nvSpPr>
-          <p:cNvPr id="3" name="TextBox 2"/>
-          <p:cNvSpPr txBox="1"/>
-          <p:nvPr/>
-        </p:nvSpPr>
-        <p:spPr>
-          <a:xfrm>
-            <a:off x="566928" y="621792"/>
-            <a:ext cx="11057839" cy="640080"/>
-          </a:xfrm>
-          <a:prstGeom prst="rect">
-            <a:avLst/>
-          </a:prstGeom>
-          <a:noFill/>
-        </p:spPr>
-        <p:txBody>
-          <a:bodyPr wrap="square" anchor="t" lIns="0" rIns="0" tIns="0" bIns="0">
-            <a:spAutoFit/>
-          </a:bodyPr>
-          <a:lstStyle/>
-          <a:p>
-            <a:pPr algn="l"/>
-            <a:r>
-              <a:rPr sz="2700" b="1" i="0">
-                <a:solidFill>
-                  <a:srgbClr val="0B3B72"/>
-                </a:solidFill>
-                <a:latin typeface="微软雅黑"/>
-                <a:ea typeface="微软雅黑"/>
-                <a:cs typeface="微软雅黑"/>
-              </a:rPr>
-              <a:t>一句话：把「急救快不快」变成看得见的数字</a:t>
-            </a:r>
-          </a:p>
-        </p:txBody>
-      </p:sp>
-      <p:sp>
-        <p:nvSpPr>
-          <p:cNvPr id="4" name="TextBox 3"/>
-          <p:cNvSpPr txBox="1"/>
-          <p:nvPr/>
-        </p:nvSpPr>
-        <p:spPr>
-          <a:xfrm>
-            <a:off x="10161727" y="6382512"/>
-            <a:ext cx="1463040" cy="274320"/>
-          </a:xfrm>
-          <a:prstGeom prst="rect">
-            <a:avLst/>
-          </a:prstGeom>
-          <a:noFill/>
-        </p:spPr>
-        <p:txBody>
-          <a:bodyPr wrap="square" anchor="t" lIns="0" rIns="0" tIns="0" bIns="0">
-            <a:spAutoFit/>
-          </a:bodyPr>
-          <a:lstStyle/>
-          <a:p>
-            <a:pPr algn="r"/>
-            <a:r>
-              <a:rPr sz="1000" b="0" i="0">
-                <a:solidFill>
-                  <a:srgbClr val="5A6B85"/>
-                </a:solidFill>
-                <a:latin typeface="微软雅黑"/>
-                <a:ea typeface="微软雅黑"/>
-                <a:cs typeface="微软雅黑"/>
-              </a:rPr>
-              <a:t>急救绿道 · 3 / 13</a:t>
-            </a:r>
-          </a:p>
-        </p:txBody>
-      </p:sp>
-      <p:sp>
-        <p:nvSpPr>
-          <p:cNvPr id="5" name="TextBox 4"/>
-          <p:cNvSpPr txBox="1"/>
-          <p:nvPr/>
-        </p:nvSpPr>
-        <p:spPr>
-          <a:xfrm>
-            <a:off x="566928" y="1207007"/>
-            <a:ext cx="11057839" cy="365760"/>
-          </a:xfrm>
-          <a:prstGeom prst="rect">
-            <a:avLst/>
-          </a:prstGeom>
-          <a:noFill/>
-        </p:spPr>
-        <p:txBody>
-          <a:bodyPr wrap="square" anchor="t" lIns="0" rIns="0" tIns="0" bIns="0">
-            <a:spAutoFit/>
-          </a:bodyPr>
-          <a:lstStyle/>
-          <a:p>
-            <a:pPr algn="l"/>
-            <a:r>
-              <a:rPr sz="1450" b="0" i="0">
-                <a:solidFill>
-                  <a:srgbClr val="5A6B85"/>
-                </a:solidFill>
-                <a:latin typeface="微软雅黑"/>
-                <a:ea typeface="微软雅黑"/>
-                <a:cs typeface="微软雅黑"/>
-              </a:rPr>
-              <a:t>过去要翻表格、打电话问；现在抬头看屏幕就知道。</a:t>
-            </a:r>
-          </a:p>
-        </p:txBody>
-      </p:sp>
-      <p:sp>
-        <p:nvSpPr>
-          <p:cNvPr id="6" name="Rounded Rectangle 5"/>
-          <p:cNvSpPr/>
-          <p:nvPr/>
-        </p:nvSpPr>
-        <p:spPr>
-          <a:xfrm>
-            <a:off x="566928" y="1901952"/>
-            <a:ext cx="3411626" cy="2743200"/>
-          </a:xfrm>
-          <a:prstGeom prst="roundRect">
-            <a:avLst>
-              <a:gd name="adj" fmla="val 6000"/>
-            </a:avLst>
-          </a:prstGeom>
           <a:solidFill>
-            <a:srgbClr val="FFFFFF"/>
+            <a:srgbClr val="04122B"/>
           </a:solidFill>
-          <a:ln w="9525">
-            <a:solidFill>
-              <a:srgbClr val="D6E2F0"/>
-            </a:solidFill>
+          <a:ln>
+            <a:noFill/>
           </a:ln>
           <a:effectLst/>
         </p:spPr>
@@ -7190,7 +7214,203 @@
       </p:sp>
       <p:sp>
         <p:nvSpPr>
-          <p:cNvPr id="7" name="TextBox 6"/>
+          <p:cNvPr id="3" name="TextBox 2"/>
+          <p:cNvSpPr txBox="1"/>
+          <p:nvPr/>
+        </p:nvSpPr>
+        <p:spPr>
+          <a:xfrm>
+            <a:off x="566928" y="329184"/>
+            <a:ext cx="11057839" cy="274320"/>
+          </a:xfrm>
+          <a:prstGeom prst="rect">
+            <a:avLst/>
+          </a:prstGeom>
+          <a:noFill/>
+        </p:spPr>
+        <p:txBody>
+          <a:bodyPr wrap="square" anchor="t" lIns="0" rIns="0" tIns="0" bIns="0">
+            <a:spAutoFit/>
+          </a:bodyPr>
+          <a:lstStyle/>
+          <a:p>
+            <a:pPr algn="l"/>
+            <a:r>
+              <a:rPr sz="1150" b="1" i="0">
+                <a:solidFill>
+                  <a:srgbClr val="7FE3FF"/>
+                </a:solidFill>
+                <a:latin typeface="微软雅黑"/>
+                <a:ea typeface="微软雅黑"/>
+                <a:cs typeface="微软雅黑"/>
+              </a:rPr>
+              <a:t>01 · 它是什么</a:t>
+            </a:r>
+          </a:p>
+        </p:txBody>
+      </p:sp>
+      <p:sp>
+        <p:nvSpPr>
+          <p:cNvPr id="4" name="TextBox 3"/>
+          <p:cNvSpPr txBox="1"/>
+          <p:nvPr/>
+        </p:nvSpPr>
+        <p:spPr>
+          <a:xfrm>
+            <a:off x="566928" y="621792"/>
+            <a:ext cx="11057839" cy="640080"/>
+          </a:xfrm>
+          <a:prstGeom prst="rect">
+            <a:avLst/>
+          </a:prstGeom>
+          <a:noFill/>
+        </p:spPr>
+        <p:txBody>
+          <a:bodyPr wrap="square" anchor="t" lIns="0" rIns="0" tIns="0" bIns="0">
+            <a:spAutoFit/>
+          </a:bodyPr>
+          <a:lstStyle/>
+          <a:p>
+            <a:pPr algn="l"/>
+            <a:r>
+              <a:rPr sz="2700" b="1" i="0">
+                <a:solidFill>
+                  <a:srgbClr val="ECF7FF"/>
+                </a:solidFill>
+                <a:latin typeface="微软雅黑"/>
+                <a:ea typeface="微软雅黑"/>
+                <a:cs typeface="微软雅黑"/>
+              </a:rPr>
+              <a:t>一句话：把「急救快不快」变成看得见的数字</a:t>
+            </a:r>
+          </a:p>
+        </p:txBody>
+      </p:sp>
+      <p:sp>
+        <p:nvSpPr>
+          <p:cNvPr id="5" name="TextBox 4"/>
+          <p:cNvSpPr txBox="1"/>
+          <p:nvPr/>
+        </p:nvSpPr>
+        <p:spPr>
+          <a:xfrm>
+            <a:off x="10161727" y="6382512"/>
+            <a:ext cx="1463040" cy="274320"/>
+          </a:xfrm>
+          <a:prstGeom prst="rect">
+            <a:avLst/>
+          </a:prstGeom>
+          <a:noFill/>
+        </p:spPr>
+        <p:txBody>
+          <a:bodyPr wrap="square" anchor="t" lIns="0" rIns="0" tIns="0" bIns="0">
+            <a:spAutoFit/>
+          </a:bodyPr>
+          <a:lstStyle/>
+          <a:p>
+            <a:pPr algn="r"/>
+            <a:r>
+              <a:rPr sz="1000" b="0" i="0">
+                <a:solidFill>
+                  <a:srgbClr val="7E9EC4"/>
+                </a:solidFill>
+                <a:latin typeface="微软雅黑"/>
+                <a:ea typeface="微软雅黑"/>
+                <a:cs typeface="微软雅黑"/>
+              </a:rPr>
+              <a:t>急救绿道 · 3 / 13</a:t>
+            </a:r>
+          </a:p>
+        </p:txBody>
+      </p:sp>
+      <p:sp>
+        <p:nvSpPr>
+          <p:cNvPr id="6" name="TextBox 5"/>
+          <p:cNvSpPr txBox="1"/>
+          <p:nvPr/>
+        </p:nvSpPr>
+        <p:spPr>
+          <a:xfrm>
+            <a:off x="566928" y="1207007"/>
+            <a:ext cx="11057839" cy="365760"/>
+          </a:xfrm>
+          <a:prstGeom prst="rect">
+            <a:avLst/>
+          </a:prstGeom>
+          <a:noFill/>
+        </p:spPr>
+        <p:txBody>
+          <a:bodyPr wrap="square" anchor="t" lIns="0" rIns="0" tIns="0" bIns="0">
+            <a:spAutoFit/>
+          </a:bodyPr>
+          <a:lstStyle/>
+          <a:p>
+            <a:pPr algn="l"/>
+            <a:r>
+              <a:rPr sz="1450" b="0" i="0">
+                <a:solidFill>
+                  <a:srgbClr val="7E9EC4"/>
+                </a:solidFill>
+                <a:latin typeface="微软雅黑"/>
+                <a:ea typeface="微软雅黑"/>
+                <a:cs typeface="微软雅黑"/>
+              </a:rPr>
+              <a:t>过去要翻表格、打电话问；现在抬头看屏幕就知道。</a:t>
+            </a:r>
+          </a:p>
+        </p:txBody>
+      </p:sp>
+      <p:sp>
+        <p:nvSpPr>
+          <p:cNvPr id="7" name="Rounded Rectangle 6"/>
+          <p:cNvSpPr/>
+          <p:nvPr/>
+        </p:nvSpPr>
+        <p:spPr>
+          <a:xfrm>
+            <a:off x="566928" y="1901952"/>
+            <a:ext cx="3411626" cy="2743200"/>
+          </a:xfrm>
+          <a:prstGeom prst="roundRect">
+            <a:avLst>
+              <a:gd name="adj" fmla="val 6000"/>
+            </a:avLst>
+          </a:prstGeom>
+          <a:solidFill>
+            <a:srgbClr val="061A38"/>
+          </a:solidFill>
+          <a:ln w="9525">
+            <a:solidFill>
+              <a:srgbClr val="1A4272"/>
+            </a:solidFill>
+          </a:ln>
+          <a:effectLst/>
+        </p:spPr>
+        <p:style>
+          <a:lnRef idx="1">
+            <a:schemeClr val="accent1"/>
+          </a:lnRef>
+          <a:fillRef idx="3">
+            <a:schemeClr val="accent1"/>
+          </a:fillRef>
+          <a:effectRef idx="2">
+            <a:schemeClr val="accent1"/>
+          </a:effectRef>
+          <a:fontRef idx="minor">
+            <a:schemeClr val="lt1"/>
+          </a:fontRef>
+        </p:style>
+        <p:txBody>
+          <a:bodyPr rtlCol="0" anchor="ctr"/>
+          <a:lstStyle/>
+          <a:p>
+            <a:pPr algn="ctr"/>
+          </a:p>
+        </p:txBody>
+      </p:sp>
+      <p:sp>
+        <p:nvSpPr>
+          <p:cNvPr id="8" name="TextBox 7"/>
           <p:cNvSpPr txBox="1"/>
           <p:nvPr/>
         </p:nvSpPr>
@@ -7218,7 +7438,7 @@
             <a:r>
               <a:rPr sz="2600" b="0" i="0">
                 <a:solidFill>
-                  <a:srgbClr val="1F2D3D"/>
+                  <a:srgbClr val="BBD4EC"/>
                 </a:solidFill>
                 <a:latin typeface="微软雅黑"/>
                 <a:ea typeface="微软雅黑"/>
@@ -7236,7 +7456,7 @@
             <a:r>
               <a:rPr sz="1800" b="1" i="0">
                 <a:solidFill>
-                  <a:srgbClr val="0B3B72"/>
+                  <a:srgbClr val="ECF7FF"/>
                 </a:solidFill>
                 <a:latin typeface="微软雅黑"/>
                 <a:ea typeface="微软雅黑"/>
@@ -7254,7 +7474,7 @@
             <a:r>
               <a:rPr sz="1250" b="0" i="0">
                 <a:solidFill>
-                  <a:srgbClr val="1F2D3D"/>
+                  <a:srgbClr val="BBD4EC"/>
                 </a:solidFill>
                 <a:latin typeface="微软雅黑"/>
                 <a:ea typeface="微软雅黑"/>
@@ -7267,7 +7487,7 @@
       </p:sp>
       <p:sp>
         <p:nvSpPr>
-          <p:cNvPr id="8" name="Rounded Rectangle 7"/>
+          <p:cNvPr id="9" name="Rounded Rectangle 8"/>
           <p:cNvSpPr/>
           <p:nvPr/>
         </p:nvSpPr>
@@ -7282,11 +7502,11 @@
             </a:avLst>
           </a:prstGeom>
           <a:solidFill>
-            <a:srgbClr val="FFFFFF"/>
+            <a:srgbClr val="061A38"/>
           </a:solidFill>
           <a:ln w="9525">
             <a:solidFill>
-              <a:srgbClr val="D6E2F0"/>
+              <a:srgbClr val="1A4272"/>
             </a:solidFill>
           </a:ln>
           <a:effectLst/>
@@ -7315,7 +7535,7 @@
       </p:sp>
       <p:sp>
         <p:nvSpPr>
-          <p:cNvPr id="9" name="TextBox 8"/>
+          <p:cNvPr id="10" name="TextBox 9"/>
           <p:cNvSpPr txBox="1"/>
           <p:nvPr/>
         </p:nvSpPr>
@@ -7343,7 +7563,7 @@
             <a:r>
               <a:rPr sz="2600" b="0" i="0">
                 <a:solidFill>
-                  <a:srgbClr val="1F2D3D"/>
+                  <a:srgbClr val="BBD4EC"/>
                 </a:solidFill>
                 <a:latin typeface="微软雅黑"/>
                 <a:ea typeface="微软雅黑"/>
@@ -7361,7 +7581,7 @@
             <a:r>
               <a:rPr sz="1800" b="1" i="0">
                 <a:solidFill>
-                  <a:srgbClr val="0B3B72"/>
+                  <a:srgbClr val="ECF7FF"/>
                 </a:solidFill>
                 <a:latin typeface="微软雅黑"/>
                 <a:ea typeface="微软雅黑"/>
@@ -7379,7 +7599,7 @@
             <a:r>
               <a:rPr sz="1250" b="0" i="0">
                 <a:solidFill>
-                  <a:srgbClr val="1F2D3D"/>
+                  <a:srgbClr val="BBD4EC"/>
                 </a:solidFill>
                 <a:latin typeface="微软雅黑"/>
                 <a:ea typeface="微软雅黑"/>
@@ -7392,7 +7612,7 @@
       </p:sp>
       <p:sp>
         <p:nvSpPr>
-          <p:cNvPr id="10" name="Rounded Rectangle 9"/>
+          <p:cNvPr id="11" name="Rounded Rectangle 10"/>
           <p:cNvSpPr/>
           <p:nvPr/>
         </p:nvSpPr>
@@ -7407,11 +7627,11 @@
             </a:avLst>
           </a:prstGeom>
           <a:solidFill>
-            <a:srgbClr val="FFFFFF"/>
+            <a:srgbClr val="061A38"/>
           </a:solidFill>
           <a:ln w="9525">
             <a:solidFill>
-              <a:srgbClr val="D6E2F0"/>
+              <a:srgbClr val="1A4272"/>
             </a:solidFill>
           </a:ln>
           <a:effectLst/>
@@ -7440,7 +7660,7 @@
       </p:sp>
       <p:sp>
         <p:nvSpPr>
-          <p:cNvPr id="11" name="TextBox 10"/>
+          <p:cNvPr id="12" name="TextBox 11"/>
           <p:cNvSpPr txBox="1"/>
           <p:nvPr/>
         </p:nvSpPr>
@@ -7468,7 +7688,7 @@
             <a:r>
               <a:rPr sz="2600" b="0" i="0">
                 <a:solidFill>
-                  <a:srgbClr val="1F2D3D"/>
+                  <a:srgbClr val="BBD4EC"/>
                 </a:solidFill>
                 <a:latin typeface="微软雅黑"/>
                 <a:ea typeface="微软雅黑"/>
@@ -7486,7 +7706,7 @@
             <a:r>
               <a:rPr sz="1800" b="1" i="0">
                 <a:solidFill>
-                  <a:srgbClr val="0B3B72"/>
+                  <a:srgbClr val="ECF7FF"/>
                 </a:solidFill>
                 <a:latin typeface="微软雅黑"/>
                 <a:ea typeface="微软雅黑"/>
@@ -7504,7 +7724,7 @@
             <a:r>
               <a:rPr sz="1250" b="0" i="0">
                 <a:solidFill>
-                  <a:srgbClr val="1F2D3D"/>
+                  <a:srgbClr val="BBD4EC"/>
                 </a:solidFill>
                 <a:latin typeface="微软雅黑"/>
                 <a:ea typeface="微软雅黑"/>
@@ -7535,7 +7755,51 @@
       <p:grpSpPr/>
       <p:sp>
         <p:nvSpPr>
-          <p:cNvPr id="2" name="TextBox 1"/>
+          <p:cNvPr id="2" name="Rectangle 1"/>
+          <p:cNvSpPr/>
+          <p:nvPr/>
+        </p:nvSpPr>
+        <p:spPr>
+          <a:xfrm>
+            <a:off x="0" y="0"/>
+            <a:ext cx="12191695" cy="6858000"/>
+          </a:xfrm>
+          <a:prstGeom prst="rect">
+            <a:avLst/>
+          </a:prstGeom>
+          <a:solidFill>
+            <a:srgbClr val="04122B"/>
+          </a:solidFill>
+          <a:ln>
+            <a:noFill/>
+          </a:ln>
+          <a:effectLst/>
+        </p:spPr>
+        <p:style>
+          <a:lnRef idx="1">
+            <a:schemeClr val="accent1"/>
+          </a:lnRef>
+          <a:fillRef idx="3">
+            <a:schemeClr val="accent1"/>
+          </a:fillRef>
+          <a:effectRef idx="2">
+            <a:schemeClr val="accent1"/>
+          </a:effectRef>
+          <a:fontRef idx="minor">
+            <a:schemeClr val="lt1"/>
+          </a:fontRef>
+        </p:style>
+        <p:txBody>
+          <a:bodyPr rtlCol="0" anchor="ctr"/>
+          <a:lstStyle/>
+          <a:p>
+            <a:pPr algn="ctr"/>
+          </a:p>
+        </p:txBody>
+      </p:sp>
+      <p:sp>
+        <p:nvSpPr>
+          <p:cNvPr id="3" name="TextBox 2"/>
           <p:cNvSpPr txBox="1"/>
           <p:nvPr/>
         </p:nvSpPr>
@@ -7559,7 +7823,7 @@
             <a:r>
               <a:rPr sz="1150" b="1" i="0">
                 <a:solidFill>
-                  <a:srgbClr val="1E88E5"/>
+                  <a:srgbClr val="7FE3FF"/>
                 </a:solidFill>
                 <a:latin typeface="微软雅黑"/>
                 <a:ea typeface="微软雅黑"/>
@@ -7572,7 +7836,7 @@
       </p:sp>
       <p:sp>
         <p:nvSpPr>
-          <p:cNvPr id="3" name="TextBox 2"/>
+          <p:cNvPr id="4" name="TextBox 3"/>
           <p:cNvSpPr txBox="1"/>
           <p:nvPr/>
         </p:nvSpPr>
@@ -7596,7 +7860,7 @@
             <a:r>
               <a:rPr sz="2700" b="1" i="0">
                 <a:solidFill>
-                  <a:srgbClr val="0B3B72"/>
+                  <a:srgbClr val="ECF7FF"/>
                 </a:solidFill>
                 <a:latin typeface="微软雅黑"/>
                 <a:ea typeface="微软雅黑"/>
@@ -7609,7 +7873,7 @@
       </p:sp>
       <p:sp>
         <p:nvSpPr>
-          <p:cNvPr id="4" name="TextBox 3"/>
+          <p:cNvPr id="5" name="TextBox 4"/>
           <p:cNvSpPr txBox="1"/>
           <p:nvPr/>
         </p:nvSpPr>
@@ -7633,7 +7897,7 @@
             <a:r>
               <a:rPr sz="1000" b="0" i="0">
                 <a:solidFill>
-                  <a:srgbClr val="5A6B85"/>
+                  <a:srgbClr val="7E9EC4"/>
                 </a:solidFill>
                 <a:latin typeface="微软雅黑"/>
                 <a:ea typeface="微软雅黑"/>
@@ -7646,7 +7910,7 @@
       </p:sp>
       <p:pic>
         <p:nvPicPr>
-          <p:cNvPr id="5" name="Picture 4" descr="screen.png"/>
+          <p:cNvPr id="6" name="Picture 5" descr="screen.png"/>
           <p:cNvPicPr>
             <a:picLocks noChangeAspect="1"/>
           </p:cNvPicPr>
@@ -7670,7 +7934,7 @@
       </p:pic>
       <p:sp>
         <p:nvSpPr>
-          <p:cNvPr id="6" name="TextBox 5"/>
+          <p:cNvPr id="7" name="TextBox 6"/>
           <p:cNvSpPr txBox="1"/>
           <p:nvPr/>
         </p:nvSpPr>
@@ -7694,7 +7958,7 @@
             <a:r>
               <a:rPr sz="950" b="0" i="0">
                 <a:solidFill>
-                  <a:srgbClr val="5A6B85"/>
+                  <a:srgbClr val="7E9EC4"/>
                 </a:solidFill>
                 <a:latin typeface="微软雅黑"/>
                 <a:ea typeface="微软雅黑"/>
@@ -7707,7 +7971,7 @@
       </p:sp>
       <p:sp>
         <p:nvSpPr>
-          <p:cNvPr id="7" name="Oval 6"/>
+          <p:cNvPr id="8" name="Oval 7"/>
           <p:cNvSpPr/>
           <p:nvPr/>
         </p:nvSpPr>
@@ -7720,7 +7984,7 @@
             <a:avLst/>
           </a:prstGeom>
           <a:solidFill>
-            <a:srgbClr val="1E88E5"/>
+            <a:srgbClr val="7FE3FF"/>
           </a:solidFill>
           <a:ln w="19050">
             <a:solidFill>
@@ -7764,7 +8028,7 @@
       </p:sp>
       <p:sp>
         <p:nvSpPr>
-          <p:cNvPr id="8" name="Oval 7"/>
+          <p:cNvPr id="9" name="Oval 8"/>
           <p:cNvSpPr/>
           <p:nvPr/>
         </p:nvSpPr>
@@ -7777,7 +8041,7 @@
             <a:avLst/>
           </a:prstGeom>
           <a:solidFill>
-            <a:srgbClr val="1E88E5"/>
+            <a:srgbClr val="7FE3FF"/>
           </a:solidFill>
           <a:ln w="19050">
             <a:solidFill>
@@ -7821,7 +8085,7 @@
       </p:sp>
       <p:sp>
         <p:nvSpPr>
-          <p:cNvPr id="9" name="Oval 8"/>
+          <p:cNvPr id="10" name="Oval 9"/>
           <p:cNvSpPr/>
           <p:nvPr/>
         </p:nvSpPr>
@@ -7834,7 +8098,7 @@
             <a:avLst/>
           </a:prstGeom>
           <a:solidFill>
-            <a:srgbClr val="1E88E5"/>
+            <a:srgbClr val="7FE3FF"/>
           </a:solidFill>
           <a:ln w="19050">
             <a:solidFill>
@@ -7878,7 +8142,7 @@
       </p:sp>
       <p:sp>
         <p:nvSpPr>
-          <p:cNvPr id="10" name="Oval 9"/>
+          <p:cNvPr id="11" name="Oval 10"/>
           <p:cNvSpPr/>
           <p:nvPr/>
         </p:nvSpPr>
@@ -7891,7 +8155,7 @@
             <a:avLst/>
           </a:prstGeom>
           <a:solidFill>
-            <a:srgbClr val="1E88E5"/>
+            <a:srgbClr val="7FE3FF"/>
           </a:solidFill>
           <a:ln w="19050">
             <a:solidFill>
@@ -7935,7 +8199,7 @@
       </p:sp>
       <p:sp>
         <p:nvSpPr>
-          <p:cNvPr id="11" name="Oval 10"/>
+          <p:cNvPr id="12" name="Oval 11"/>
           <p:cNvSpPr/>
           <p:nvPr/>
         </p:nvSpPr>
@@ -7948,7 +8212,7 @@
             <a:avLst/>
           </a:prstGeom>
           <a:solidFill>
-            <a:srgbClr val="1E88E5"/>
+            <a:srgbClr val="7FE3FF"/>
           </a:solidFill>
           <a:ln w="19050">
             <a:solidFill>
@@ -7992,7 +8256,7 @@
       </p:sp>
       <p:sp>
         <p:nvSpPr>
-          <p:cNvPr id="12" name="Rounded Rectangle 11"/>
+          <p:cNvPr id="13" name="Rounded Rectangle 12"/>
           <p:cNvSpPr/>
           <p:nvPr/>
         </p:nvSpPr>
@@ -8007,11 +8271,11 @@
             </a:avLst>
           </a:prstGeom>
           <a:solidFill>
-            <a:srgbClr val="F2F6FC"/>
+            <a:srgbClr val="08224A"/>
           </a:solidFill>
           <a:ln w="9525">
             <a:solidFill>
-              <a:srgbClr val="D6E2F0"/>
+              <a:srgbClr val="1A4272"/>
             </a:solidFill>
           </a:ln>
           <a:effectLst/>
@@ -8040,7 +8304,7 @@
       </p:sp>
       <p:sp>
         <p:nvSpPr>
-          <p:cNvPr id="13" name="Oval 12"/>
+          <p:cNvPr id="14" name="Oval 13"/>
           <p:cNvSpPr/>
           <p:nvPr/>
         </p:nvSpPr>
@@ -8053,7 +8317,7 @@
             <a:avLst/>
           </a:prstGeom>
           <a:solidFill>
-            <a:srgbClr val="1E88E5"/>
+            <a:srgbClr val="7FE3FF"/>
           </a:solidFill>
           <a:ln w="19050">
             <a:solidFill>
@@ -8097,7 +8361,7 @@
       </p:sp>
       <p:sp>
         <p:nvSpPr>
-          <p:cNvPr id="14" name="TextBox 13"/>
+          <p:cNvPr id="15" name="TextBox 14"/>
           <p:cNvSpPr txBox="1"/>
           <p:nvPr/>
         </p:nvSpPr>
@@ -8125,7 +8389,7 @@
             <a:r>
               <a:rPr sz="1150" b="1" i="0">
                 <a:solidFill>
-                  <a:srgbClr val="1F2D3D"/>
+                  <a:srgbClr val="BBD4EC"/>
                 </a:solidFill>
                 <a:latin typeface="微软雅黑"/>
                 <a:ea typeface="微软雅黑"/>
@@ -8143,7 +8407,7 @@
             <a:r>
               <a:rPr sz="950" b="0" i="0">
                 <a:solidFill>
-                  <a:srgbClr val="5A6B85"/>
+                  <a:srgbClr val="7E9EC4"/>
                 </a:solidFill>
                 <a:latin typeface="微软雅黑"/>
                 <a:ea typeface="微软雅黑"/>
@@ -8156,7 +8420,7 @@
       </p:sp>
       <p:sp>
         <p:nvSpPr>
-          <p:cNvPr id="15" name="Rounded Rectangle 14"/>
+          <p:cNvPr id="16" name="Rounded Rectangle 15"/>
           <p:cNvSpPr/>
           <p:nvPr/>
         </p:nvSpPr>
@@ -8171,11 +8435,11 @@
             </a:avLst>
           </a:prstGeom>
           <a:solidFill>
-            <a:srgbClr val="F2F6FC"/>
+            <a:srgbClr val="08224A"/>
           </a:solidFill>
           <a:ln w="9525">
             <a:solidFill>
-              <a:srgbClr val="D6E2F0"/>
+              <a:srgbClr val="1A4272"/>
             </a:solidFill>
           </a:ln>
           <a:effectLst/>
@@ -8204,7 +8468,7 @@
       </p:sp>
       <p:sp>
         <p:nvSpPr>
-          <p:cNvPr id="16" name="Oval 15"/>
+          <p:cNvPr id="17" name="Oval 16"/>
           <p:cNvSpPr/>
           <p:nvPr/>
         </p:nvSpPr>
@@ -8217,7 +8481,7 @@
             <a:avLst/>
           </a:prstGeom>
           <a:solidFill>
-            <a:srgbClr val="1E88E5"/>
+            <a:srgbClr val="7FE3FF"/>
           </a:solidFill>
           <a:ln w="19050">
             <a:solidFill>
@@ -8261,7 +8525,7 @@
       </p:sp>
       <p:sp>
         <p:nvSpPr>
-          <p:cNvPr id="17" name="TextBox 16"/>
+          <p:cNvPr id="18" name="TextBox 17"/>
           <p:cNvSpPr txBox="1"/>
           <p:nvPr/>
         </p:nvSpPr>
@@ -8289,7 +8553,7 @@
             <a:r>
               <a:rPr sz="1150" b="1" i="0">
                 <a:solidFill>
-                  <a:srgbClr val="1F2D3D"/>
+                  <a:srgbClr val="BBD4EC"/>
                 </a:solidFill>
                 <a:latin typeface="微软雅黑"/>
                 <a:ea typeface="微软雅黑"/>
@@ -8307,7 +8571,7 @@
             <a:r>
               <a:rPr sz="950" b="0" i="0">
                 <a:solidFill>
-                  <a:srgbClr val="5A6B85"/>
+                  <a:srgbClr val="7E9EC4"/>
                 </a:solidFill>
                 <a:latin typeface="微软雅黑"/>
                 <a:ea typeface="微软雅黑"/>
@@ -8320,7 +8584,7 @@
       </p:sp>
       <p:sp>
         <p:nvSpPr>
-          <p:cNvPr id="18" name="Rounded Rectangle 17"/>
+          <p:cNvPr id="19" name="Rounded Rectangle 18"/>
           <p:cNvSpPr/>
           <p:nvPr/>
         </p:nvSpPr>
@@ -8335,11 +8599,11 @@
             </a:avLst>
           </a:prstGeom>
           <a:solidFill>
-            <a:srgbClr val="F2F6FC"/>
+            <a:srgbClr val="08224A"/>
           </a:solidFill>
           <a:ln w="9525">
             <a:solidFill>
-              <a:srgbClr val="D6E2F0"/>
+              <a:srgbClr val="1A4272"/>
             </a:solidFill>
           </a:ln>
           <a:effectLst/>
@@ -8368,7 +8632,7 @@
       </p:sp>
       <p:sp>
         <p:nvSpPr>
-          <p:cNvPr id="19" name="Oval 18"/>
+          <p:cNvPr id="20" name="Oval 19"/>
           <p:cNvSpPr/>
           <p:nvPr/>
         </p:nvSpPr>
@@ -8381,7 +8645,7 @@
             <a:avLst/>
           </a:prstGeom>
           <a:solidFill>
-            <a:srgbClr val="1E88E5"/>
+            <a:srgbClr val="7FE3FF"/>
           </a:solidFill>
           <a:ln w="19050">
             <a:solidFill>
@@ -8425,7 +8689,7 @@
       </p:sp>
       <p:sp>
         <p:nvSpPr>
-          <p:cNvPr id="20" name="TextBox 19"/>
+          <p:cNvPr id="21" name="TextBox 20"/>
           <p:cNvSpPr txBox="1"/>
           <p:nvPr/>
         </p:nvSpPr>
@@ -8453,7 +8717,7 @@
             <a:r>
               <a:rPr sz="1150" b="1" i="0">
                 <a:solidFill>
-                  <a:srgbClr val="1F2D3D"/>
+                  <a:srgbClr val="BBD4EC"/>
                 </a:solidFill>
                 <a:latin typeface="微软雅黑"/>
                 <a:ea typeface="微软雅黑"/>
@@ -8471,7 +8735,7 @@
             <a:r>
               <a:rPr sz="950" b="0" i="0">
                 <a:solidFill>
-                  <a:srgbClr val="5A6B85"/>
+                  <a:srgbClr val="7E9EC4"/>
                 </a:solidFill>
                 <a:latin typeface="微软雅黑"/>
                 <a:ea typeface="微软雅黑"/>
@@ -8484,7 +8748,7 @@
       </p:sp>
       <p:sp>
         <p:nvSpPr>
-          <p:cNvPr id="21" name="Rounded Rectangle 20"/>
+          <p:cNvPr id="22" name="Rounded Rectangle 21"/>
           <p:cNvSpPr/>
           <p:nvPr/>
         </p:nvSpPr>
@@ -8499,11 +8763,11 @@
             </a:avLst>
           </a:prstGeom>
           <a:solidFill>
-            <a:srgbClr val="F2F6FC"/>
+            <a:srgbClr val="08224A"/>
           </a:solidFill>
           <a:ln w="9525">
             <a:solidFill>
-              <a:srgbClr val="D6E2F0"/>
+              <a:srgbClr val="1A4272"/>
             </a:solidFill>
           </a:ln>
           <a:effectLst/>
@@ -8532,7 +8796,7 @@
       </p:sp>
       <p:sp>
         <p:nvSpPr>
-          <p:cNvPr id="22" name="Oval 21"/>
+          <p:cNvPr id="23" name="Oval 22"/>
           <p:cNvSpPr/>
           <p:nvPr/>
         </p:nvSpPr>
@@ -8545,7 +8809,7 @@
             <a:avLst/>
           </a:prstGeom>
           <a:solidFill>
-            <a:srgbClr val="1E88E5"/>
+            <a:srgbClr val="7FE3FF"/>
           </a:solidFill>
           <a:ln w="19050">
             <a:solidFill>
@@ -8589,7 +8853,7 @@
       </p:sp>
       <p:sp>
         <p:nvSpPr>
-          <p:cNvPr id="23" name="TextBox 22"/>
+          <p:cNvPr id="24" name="TextBox 23"/>
           <p:cNvSpPr txBox="1"/>
           <p:nvPr/>
         </p:nvSpPr>
@@ -8617,7 +8881,7 @@
             <a:r>
               <a:rPr sz="1150" b="1" i="0">
                 <a:solidFill>
-                  <a:srgbClr val="1F2D3D"/>
+                  <a:srgbClr val="BBD4EC"/>
                 </a:solidFill>
                 <a:latin typeface="微软雅黑"/>
                 <a:ea typeface="微软雅黑"/>
@@ -8635,7 +8899,7 @@
             <a:r>
               <a:rPr sz="950" b="0" i="0">
                 <a:solidFill>
-                  <a:srgbClr val="5A6B85"/>
+                  <a:srgbClr val="7E9EC4"/>
                 </a:solidFill>
                 <a:latin typeface="微软雅黑"/>
                 <a:ea typeface="微软雅黑"/>
@@ -8648,7 +8912,7 @@
       </p:sp>
       <p:sp>
         <p:nvSpPr>
-          <p:cNvPr id="24" name="Rounded Rectangle 23"/>
+          <p:cNvPr id="25" name="Rounded Rectangle 24"/>
           <p:cNvSpPr/>
           <p:nvPr/>
         </p:nvSpPr>
@@ -8663,11 +8927,11 @@
             </a:avLst>
           </a:prstGeom>
           <a:solidFill>
-            <a:srgbClr val="F2F6FC"/>
+            <a:srgbClr val="08224A"/>
           </a:solidFill>
           <a:ln w="9525">
             <a:solidFill>
-              <a:srgbClr val="D6E2F0"/>
+              <a:srgbClr val="1A4272"/>
             </a:solidFill>
           </a:ln>
           <a:effectLst/>
@@ -8696,7 +8960,7 @@
       </p:sp>
       <p:sp>
         <p:nvSpPr>
-          <p:cNvPr id="25" name="Oval 24"/>
+          <p:cNvPr id="26" name="Oval 25"/>
           <p:cNvSpPr/>
           <p:nvPr/>
         </p:nvSpPr>
@@ -8709,7 +8973,7 @@
             <a:avLst/>
           </a:prstGeom>
           <a:solidFill>
-            <a:srgbClr val="1E88E5"/>
+            <a:srgbClr val="7FE3FF"/>
           </a:solidFill>
           <a:ln w="19050">
             <a:solidFill>
@@ -8753,7 +9017,7 @@
       </p:sp>
       <p:sp>
         <p:nvSpPr>
-          <p:cNvPr id="26" name="TextBox 25"/>
+          <p:cNvPr id="27" name="TextBox 26"/>
           <p:cNvSpPr txBox="1"/>
           <p:nvPr/>
         </p:nvSpPr>
@@ -8781,7 +9045,7 @@
             <a:r>
               <a:rPr sz="1150" b="1" i="0">
                 <a:solidFill>
-                  <a:srgbClr val="1F2D3D"/>
+                  <a:srgbClr val="BBD4EC"/>
                 </a:solidFill>
                 <a:latin typeface="微软雅黑"/>
                 <a:ea typeface="微软雅黑"/>
@@ -8799,7 +9063,7 @@
             <a:r>
               <a:rPr sz="950" b="0" i="0">
                 <a:solidFill>
-                  <a:srgbClr val="5A6B85"/>
+                  <a:srgbClr val="7E9EC4"/>
                 </a:solidFill>
                 <a:latin typeface="微软雅黑"/>
                 <a:ea typeface="微软雅黑"/>
@@ -8830,7 +9094,51 @@
       <p:grpSpPr/>
       <p:sp>
         <p:nvSpPr>
-          <p:cNvPr id="2" name="TextBox 1"/>
+          <p:cNvPr id="2" name="Rectangle 1"/>
+          <p:cNvSpPr/>
+          <p:nvPr/>
+        </p:nvSpPr>
+        <p:spPr>
+          <a:xfrm>
+            <a:off x="0" y="0"/>
+            <a:ext cx="12191695" cy="6858000"/>
+          </a:xfrm>
+          <a:prstGeom prst="rect">
+            <a:avLst/>
+          </a:prstGeom>
+          <a:solidFill>
+            <a:srgbClr val="04122B"/>
+          </a:solidFill>
+          <a:ln>
+            <a:noFill/>
+          </a:ln>
+          <a:effectLst/>
+        </p:spPr>
+        <p:style>
+          <a:lnRef idx="1">
+            <a:schemeClr val="accent1"/>
+          </a:lnRef>
+          <a:fillRef idx="3">
+            <a:schemeClr val="accent1"/>
+          </a:fillRef>
+          <a:effectRef idx="2">
+            <a:schemeClr val="accent1"/>
+          </a:effectRef>
+          <a:fontRef idx="minor">
+            <a:schemeClr val="lt1"/>
+          </a:fontRef>
+        </p:style>
+        <p:txBody>
+          <a:bodyPr rtlCol="0" anchor="ctr"/>
+          <a:lstStyle/>
+          <a:p>
+            <a:pPr algn="ctr"/>
+          </a:p>
+        </p:txBody>
+      </p:sp>
+      <p:sp>
+        <p:nvSpPr>
+          <p:cNvPr id="3" name="TextBox 2"/>
           <p:cNvSpPr txBox="1"/>
           <p:nvPr/>
         </p:nvSpPr>
@@ -8854,7 +9162,7 @@
             <a:r>
               <a:rPr sz="1150" b="1" i="0">
                 <a:solidFill>
-                  <a:srgbClr val="1E88E5"/>
+                  <a:srgbClr val="7FE3FF"/>
                 </a:solidFill>
                 <a:latin typeface="微软雅黑"/>
                 <a:ea typeface="微软雅黑"/>
@@ -8867,7 +9175,7 @@
       </p:sp>
       <p:sp>
         <p:nvSpPr>
-          <p:cNvPr id="3" name="TextBox 2"/>
+          <p:cNvPr id="4" name="TextBox 3"/>
           <p:cNvSpPr txBox="1"/>
           <p:nvPr/>
         </p:nvSpPr>
@@ -8891,7 +9199,7 @@
             <a:r>
               <a:rPr sz="2700" b="1" i="0">
                 <a:solidFill>
-                  <a:srgbClr val="0B3B72"/>
+                  <a:srgbClr val="ECF7FF"/>
                 </a:solidFill>
                 <a:latin typeface="微软雅黑"/>
                 <a:ea typeface="微软雅黑"/>
@@ -8904,7 +9212,7 @@
       </p:sp>
       <p:sp>
         <p:nvSpPr>
-          <p:cNvPr id="4" name="TextBox 3"/>
+          <p:cNvPr id="5" name="TextBox 4"/>
           <p:cNvSpPr txBox="1"/>
           <p:nvPr/>
         </p:nvSpPr>
@@ -8928,7 +9236,7 @@
             <a:r>
               <a:rPr sz="1000" b="0" i="0">
                 <a:solidFill>
-                  <a:srgbClr val="5A6B85"/>
+                  <a:srgbClr val="7E9EC4"/>
                 </a:solidFill>
                 <a:latin typeface="微软雅黑"/>
                 <a:ea typeface="微软雅黑"/>
@@ -8941,7 +9249,7 @@
       </p:sp>
       <p:pic>
         <p:nvPicPr>
-          <p:cNvPr id="5" name="Picture 4" descr="admin.png"/>
+          <p:cNvPr id="6" name="Picture 5" descr="admin.png"/>
           <p:cNvPicPr>
             <a:picLocks noChangeAspect="1"/>
           </p:cNvPicPr>
@@ -8965,7 +9273,7 @@
       </p:pic>
       <p:sp>
         <p:nvSpPr>
-          <p:cNvPr id="6" name="TextBox 5"/>
+          <p:cNvPr id="7" name="TextBox 6"/>
           <p:cNvSpPr txBox="1"/>
           <p:nvPr/>
         </p:nvSpPr>
@@ -8989,7 +9297,7 @@
             <a:r>
               <a:rPr sz="950" b="0" i="0">
                 <a:solidFill>
-                  <a:srgbClr val="5A6B85"/>
+                  <a:srgbClr val="7E9EC4"/>
                 </a:solidFill>
                 <a:latin typeface="微软雅黑"/>
                 <a:ea typeface="微软雅黑"/>
@@ -9002,7 +9310,7 @@
       </p:sp>
       <p:sp>
         <p:nvSpPr>
-          <p:cNvPr id="7" name="Rounded Rectangle 6"/>
+          <p:cNvPr id="8" name="Rounded Rectangle 7"/>
           <p:cNvSpPr/>
           <p:nvPr/>
         </p:nvSpPr>
@@ -9017,11 +9325,11 @@
             </a:avLst>
           </a:prstGeom>
           <a:solidFill>
-            <a:srgbClr val="F2F6FC"/>
+            <a:srgbClr val="08224A"/>
           </a:solidFill>
           <a:ln w="9525">
             <a:solidFill>
-              <a:srgbClr val="D6E2F0"/>
+              <a:srgbClr val="1A4272"/>
             </a:solidFill>
           </a:ln>
           <a:effectLst/>
@@ -9050,7 +9358,7 @@
       </p:sp>
       <p:sp>
         <p:nvSpPr>
-          <p:cNvPr id="8" name="Oval 7"/>
+          <p:cNvPr id="9" name="Oval 8"/>
           <p:cNvSpPr/>
           <p:nvPr/>
         </p:nvSpPr>
@@ -9063,7 +9371,7 @@
             <a:avLst/>
           </a:prstGeom>
           <a:solidFill>
-            <a:srgbClr val="1E88E5"/>
+            <a:srgbClr val="7FE3FF"/>
           </a:solidFill>
           <a:ln w="19050">
             <a:solidFill>
@@ -9107,7 +9415,7 @@
       </p:sp>
       <p:sp>
         <p:nvSpPr>
-          <p:cNvPr id="9" name="TextBox 8"/>
+          <p:cNvPr id="10" name="TextBox 9"/>
           <p:cNvSpPr txBox="1"/>
           <p:nvPr/>
         </p:nvSpPr>
@@ -9135,7 +9443,7 @@
             <a:r>
               <a:rPr sz="1150" b="1" i="0">
                 <a:solidFill>
-                  <a:srgbClr val="1F2D3D"/>
+                  <a:srgbClr val="BBD4EC"/>
                 </a:solidFill>
                 <a:latin typeface="微软雅黑"/>
                 <a:ea typeface="微软雅黑"/>
@@ -9149,7 +9457,7 @@
             <a:r>
               <a:rPr sz="950" b="0" i="0">
                 <a:solidFill>
-                  <a:srgbClr val="5A6B85"/>
+                  <a:srgbClr val="7E9EC4"/>
                 </a:solidFill>
                 <a:latin typeface="微软雅黑"/>
                 <a:ea typeface="微软雅黑"/>
@@ -9162,7 +9470,7 @@
       </p:sp>
       <p:sp>
         <p:nvSpPr>
-          <p:cNvPr id="10" name="Rounded Rectangle 9"/>
+          <p:cNvPr id="11" name="Rounded Rectangle 10"/>
           <p:cNvSpPr/>
           <p:nvPr/>
         </p:nvSpPr>
@@ -9177,11 +9485,11 @@
             </a:avLst>
           </a:prstGeom>
           <a:solidFill>
-            <a:srgbClr val="F2F6FC"/>
+            <a:srgbClr val="08224A"/>
           </a:solidFill>
           <a:ln w="9525">
             <a:solidFill>
-              <a:srgbClr val="D6E2F0"/>
+              <a:srgbClr val="1A4272"/>
             </a:solidFill>
           </a:ln>
           <a:effectLst/>
@@ -9210,7 +9518,7 @@
       </p:sp>
       <p:sp>
         <p:nvSpPr>
-          <p:cNvPr id="11" name="Oval 10"/>
+          <p:cNvPr id="12" name="Oval 11"/>
           <p:cNvSpPr/>
           <p:nvPr/>
         </p:nvSpPr>
@@ -9223,7 +9531,7 @@
             <a:avLst/>
           </a:prstGeom>
           <a:solidFill>
-            <a:srgbClr val="1E88E5"/>
+            <a:srgbClr val="7FE3FF"/>
           </a:solidFill>
           <a:ln w="19050">
             <a:solidFill>
@@ -9267,7 +9575,7 @@
       </p:sp>
       <p:sp>
         <p:nvSpPr>
-          <p:cNvPr id="12" name="TextBox 11"/>
+          <p:cNvPr id="13" name="TextBox 12"/>
           <p:cNvSpPr txBox="1"/>
           <p:nvPr/>
         </p:nvSpPr>
@@ -9295,7 +9603,7 @@
             <a:r>
               <a:rPr sz="1150" b="1" i="0">
                 <a:solidFill>
-                  <a:srgbClr val="1F2D3D"/>
+                  <a:srgbClr val="BBD4EC"/>
                 </a:solidFill>
                 <a:latin typeface="微软雅黑"/>
                 <a:ea typeface="微软雅黑"/>
@@ -9309,7 +9617,7 @@
             <a:r>
               <a:rPr sz="950" b="0" i="0">
                 <a:solidFill>
-                  <a:srgbClr val="5A6B85"/>
+                  <a:srgbClr val="7E9EC4"/>
                 </a:solidFill>
                 <a:latin typeface="微软雅黑"/>
                 <a:ea typeface="微软雅黑"/>
@@ -9322,7 +9630,7 @@
       </p:sp>
       <p:sp>
         <p:nvSpPr>
-          <p:cNvPr id="13" name="Rounded Rectangle 12"/>
+          <p:cNvPr id="14" name="Rounded Rectangle 13"/>
           <p:cNvSpPr/>
           <p:nvPr/>
         </p:nvSpPr>
@@ -9337,11 +9645,11 @@
             </a:avLst>
           </a:prstGeom>
           <a:solidFill>
-            <a:srgbClr val="F2F6FC"/>
+            <a:srgbClr val="08224A"/>
           </a:solidFill>
           <a:ln w="9525">
             <a:solidFill>
-              <a:srgbClr val="D6E2F0"/>
+              <a:srgbClr val="1A4272"/>
             </a:solidFill>
           </a:ln>
           <a:effectLst/>
@@ -9370,7 +9678,7 @@
       </p:sp>
       <p:sp>
         <p:nvSpPr>
-          <p:cNvPr id="14" name="Oval 13"/>
+          <p:cNvPr id="15" name="Oval 14"/>
           <p:cNvSpPr/>
           <p:nvPr/>
         </p:nvSpPr>
@@ -9383,7 +9691,7 @@
             <a:avLst/>
           </a:prstGeom>
           <a:solidFill>
-            <a:srgbClr val="1E88E5"/>
+            <a:srgbClr val="7FE3FF"/>
           </a:solidFill>
           <a:ln w="19050">
             <a:solidFill>
@@ -9427,7 +9735,7 @@
       </p:sp>
       <p:sp>
         <p:nvSpPr>
-          <p:cNvPr id="15" name="TextBox 14"/>
+          <p:cNvPr id="16" name="TextBox 15"/>
           <p:cNvSpPr txBox="1"/>
           <p:nvPr/>
         </p:nvSpPr>
@@ -9455,7 +9763,7 @@
             <a:r>
               <a:rPr sz="1150" b="1" i="0">
                 <a:solidFill>
-                  <a:srgbClr val="1F2D3D"/>
+                  <a:srgbClr val="BBD4EC"/>
                 </a:solidFill>
                 <a:latin typeface="微软雅黑"/>
                 <a:ea typeface="微软雅黑"/>
@@ -9469,7 +9777,7 @@
             <a:r>
               <a:rPr sz="950" b="0" i="0">
                 <a:solidFill>
-                  <a:srgbClr val="5A6B85"/>
+                  <a:srgbClr val="7E9EC4"/>
                 </a:solidFill>
                 <a:latin typeface="微软雅黑"/>
                 <a:ea typeface="微软雅黑"/>
@@ -9482,7 +9790,7 @@
       </p:sp>
       <p:sp>
         <p:nvSpPr>
-          <p:cNvPr id="16" name="Rounded Rectangle 15"/>
+          <p:cNvPr id="17" name="Rounded Rectangle 16"/>
           <p:cNvSpPr/>
           <p:nvPr/>
         </p:nvSpPr>
@@ -9497,11 +9805,11 @@
             </a:avLst>
           </a:prstGeom>
           <a:solidFill>
-            <a:srgbClr val="F2F6FC"/>
+            <a:srgbClr val="08224A"/>
           </a:solidFill>
           <a:ln w="9525">
             <a:solidFill>
-              <a:srgbClr val="D6E2F0"/>
+              <a:srgbClr val="1A4272"/>
             </a:solidFill>
           </a:ln>
           <a:effectLst/>
@@ -9530,7 +9838,7 @@
       </p:sp>
       <p:sp>
         <p:nvSpPr>
-          <p:cNvPr id="17" name="Oval 16"/>
+          <p:cNvPr id="18" name="Oval 17"/>
           <p:cNvSpPr/>
           <p:nvPr/>
         </p:nvSpPr>
@@ -9543,7 +9851,7 @@
             <a:avLst/>
           </a:prstGeom>
           <a:solidFill>
-            <a:srgbClr val="1E88E5"/>
+            <a:srgbClr val="7FE3FF"/>
           </a:solidFill>
           <a:ln w="19050">
             <a:solidFill>
@@ -9587,7 +9895,7 @@
       </p:sp>
       <p:sp>
         <p:nvSpPr>
-          <p:cNvPr id="18" name="TextBox 17"/>
+          <p:cNvPr id="19" name="TextBox 18"/>
           <p:cNvSpPr txBox="1"/>
           <p:nvPr/>
         </p:nvSpPr>
@@ -9615,7 +9923,7 @@
             <a:r>
               <a:rPr sz="1150" b="1" i="0">
                 <a:solidFill>
-                  <a:srgbClr val="1F2D3D"/>
+                  <a:srgbClr val="BBD4EC"/>
                 </a:solidFill>
                 <a:latin typeface="微软雅黑"/>
                 <a:ea typeface="微软雅黑"/>
@@ -9629,7 +9937,7 @@
             <a:r>
               <a:rPr sz="950" b="0" i="0">
                 <a:solidFill>
-                  <a:srgbClr val="5A6B85"/>
+                  <a:srgbClr val="7E9EC4"/>
                 </a:solidFill>
                 <a:latin typeface="微软雅黑"/>
                 <a:ea typeface="微软雅黑"/>
@@ -9642,7 +9950,7 @@
       </p:sp>
       <p:sp>
         <p:nvSpPr>
-          <p:cNvPr id="19" name="Rounded Rectangle 18"/>
+          <p:cNvPr id="20" name="Rounded Rectangle 19"/>
           <p:cNvSpPr/>
           <p:nvPr/>
         </p:nvSpPr>
@@ -9657,11 +9965,11 @@
             </a:avLst>
           </a:prstGeom>
           <a:solidFill>
-            <a:srgbClr val="F2F6FC"/>
+            <a:srgbClr val="08224A"/>
           </a:solidFill>
           <a:ln w="9525">
             <a:solidFill>
-              <a:srgbClr val="D6E2F0"/>
+              <a:srgbClr val="1A4272"/>
             </a:solidFill>
           </a:ln>
           <a:effectLst/>
@@ -9690,7 +9998,7 @@
       </p:sp>
       <p:sp>
         <p:nvSpPr>
-          <p:cNvPr id="20" name="Oval 19"/>
+          <p:cNvPr id="21" name="Oval 20"/>
           <p:cNvSpPr/>
           <p:nvPr/>
         </p:nvSpPr>
@@ -9703,7 +10011,7 @@
             <a:avLst/>
           </a:prstGeom>
           <a:solidFill>
-            <a:srgbClr val="1E88E5"/>
+            <a:srgbClr val="7FE3FF"/>
           </a:solidFill>
           <a:ln w="19050">
             <a:solidFill>
@@ -9747,7 +10055,7 @@
       </p:sp>
       <p:sp>
         <p:nvSpPr>
-          <p:cNvPr id="21" name="TextBox 20"/>
+          <p:cNvPr id="22" name="TextBox 21"/>
           <p:cNvSpPr txBox="1"/>
           <p:nvPr/>
         </p:nvSpPr>
@@ -9775,7 +10083,7 @@
             <a:r>
               <a:rPr sz="1150" b="1" i="0">
                 <a:solidFill>
-                  <a:srgbClr val="1F2D3D"/>
+                  <a:srgbClr val="BBD4EC"/>
                 </a:solidFill>
                 <a:latin typeface="微软雅黑"/>
                 <a:ea typeface="微软雅黑"/>
@@ -9789,7 +10097,7 @@
             <a:r>
               <a:rPr sz="950" b="0" i="0">
                 <a:solidFill>
-                  <a:srgbClr val="5A6B85"/>
+                  <a:srgbClr val="7E9EC4"/>
                 </a:solidFill>
                 <a:latin typeface="微软雅黑"/>
                 <a:ea typeface="微软雅黑"/>
@@ -9802,7 +10110,7 @@
       </p:sp>
       <p:sp>
         <p:nvSpPr>
-          <p:cNvPr id="22" name="Rounded Rectangle 21"/>
+          <p:cNvPr id="23" name="Rounded Rectangle 22"/>
           <p:cNvSpPr/>
           <p:nvPr/>
         </p:nvSpPr>
@@ -9817,11 +10125,11 @@
             </a:avLst>
           </a:prstGeom>
           <a:solidFill>
-            <a:srgbClr val="F2F6FC"/>
+            <a:srgbClr val="08224A"/>
           </a:solidFill>
           <a:ln w="9525">
             <a:solidFill>
-              <a:srgbClr val="D6E2F0"/>
+              <a:srgbClr val="1A4272"/>
             </a:solidFill>
           </a:ln>
           <a:effectLst/>
@@ -9850,7 +10158,7 @@
       </p:sp>
       <p:sp>
         <p:nvSpPr>
-          <p:cNvPr id="23" name="Oval 22"/>
+          <p:cNvPr id="24" name="Oval 23"/>
           <p:cNvSpPr/>
           <p:nvPr/>
         </p:nvSpPr>
@@ -9863,7 +10171,7 @@
             <a:avLst/>
           </a:prstGeom>
           <a:solidFill>
-            <a:srgbClr val="1E88E5"/>
+            <a:srgbClr val="7FE3FF"/>
           </a:solidFill>
           <a:ln w="19050">
             <a:solidFill>
@@ -9907,7 +10215,7 @@
       </p:sp>
       <p:sp>
         <p:nvSpPr>
-          <p:cNvPr id="24" name="TextBox 23"/>
+          <p:cNvPr id="25" name="TextBox 24"/>
           <p:cNvSpPr txBox="1"/>
           <p:nvPr/>
         </p:nvSpPr>
@@ -9935,7 +10243,7 @@
             <a:r>
               <a:rPr sz="1150" b="1" i="0">
                 <a:solidFill>
-                  <a:srgbClr val="1F2D3D"/>
+                  <a:srgbClr val="BBD4EC"/>
                 </a:solidFill>
                 <a:latin typeface="微软雅黑"/>
                 <a:ea typeface="微软雅黑"/>
@@ -9949,7 +10257,7 @@
             <a:r>
               <a:rPr sz="950" b="0" i="0">
                 <a:solidFill>
-                  <a:srgbClr val="5A6B85"/>
+                  <a:srgbClr val="7E9EC4"/>
                 </a:solidFill>
                 <a:latin typeface="微软雅黑"/>
                 <a:ea typeface="微软雅黑"/>
@@ -9962,7 +10270,7 @@
       </p:sp>
       <p:sp>
         <p:nvSpPr>
-          <p:cNvPr id="25" name="TextBox 24"/>
+          <p:cNvPr id="26" name="TextBox 25"/>
           <p:cNvSpPr txBox="1"/>
           <p:nvPr/>
         </p:nvSpPr>
@@ -9993,7 +10301,7 @@
             <a:r>
               <a:rPr sz="1150" b="1" i="0">
                 <a:solidFill>
-                  <a:srgbClr val="1F2D3D"/>
+                  <a:srgbClr val="BBD4EC"/>
                 </a:solidFill>
                 <a:latin typeface="微软雅黑"/>
                 <a:ea typeface="微软雅黑"/>
@@ -10004,7 +10312,7 @@
             <a:r>
               <a:rPr sz="1150" b="0" i="0">
                 <a:solidFill>
-                  <a:srgbClr val="1F2D3D"/>
+                  <a:srgbClr val="BBD4EC"/>
                 </a:solidFill>
                 <a:latin typeface="微软雅黑"/>
                 <a:ea typeface="微软雅黑"/>
@@ -10022,7 +10330,7 @@
             <a:r>
               <a:rPr sz="1150" b="1" i="0">
                 <a:solidFill>
-                  <a:srgbClr val="146CC0"/>
+                  <a:srgbClr val="5CC8FF"/>
                 </a:solidFill>
                 <a:latin typeface="微软雅黑"/>
                 <a:ea typeface="微软雅黑"/>
@@ -10033,7 +10341,7 @@
             <a:r>
               <a:rPr sz="1150" b="0" i="0">
                 <a:solidFill>
-                  <a:srgbClr val="1F2D3D"/>
+                  <a:srgbClr val="BBD4EC"/>
                 </a:solidFill>
                 <a:latin typeface="微软雅黑"/>
                 <a:ea typeface="微软雅黑"/>
@@ -10064,138 +10372,23 @@
       <p:grpSpPr/>
       <p:sp>
         <p:nvSpPr>
-          <p:cNvPr id="2" name="TextBox 1"/>
-          <p:cNvSpPr txBox="1"/>
-          <p:nvPr/>
-        </p:nvSpPr>
-        <p:spPr>
-          <a:xfrm>
-            <a:off x="566928" y="329184"/>
-            <a:ext cx="11057839" cy="274320"/>
+          <p:cNvPr id="2" name="Rectangle 1"/>
+          <p:cNvSpPr/>
+          <p:nvPr/>
+        </p:nvSpPr>
+        <p:spPr>
+          <a:xfrm>
+            <a:off x="0" y="0"/>
+            <a:ext cx="12191695" cy="6858000"/>
           </a:xfrm>
           <a:prstGeom prst="rect">
             <a:avLst/>
           </a:prstGeom>
-          <a:noFill/>
-        </p:spPr>
-        <p:txBody>
-          <a:bodyPr wrap="square" anchor="t" lIns="0" rIns="0" tIns="0" bIns="0">
-            <a:spAutoFit/>
-          </a:bodyPr>
-          <a:lstStyle/>
-          <a:p>
-            <a:pPr algn="l"/>
-            <a:r>
-              <a:rPr sz="1150" b="1" i="0">
-                <a:solidFill>
-                  <a:srgbClr val="1E88E5"/>
-                </a:solidFill>
-                <a:latin typeface="微软雅黑"/>
-                <a:ea typeface="微软雅黑"/>
-                <a:cs typeface="微软雅黑"/>
-              </a:rPr>
-              <a:t>01 · 它是什么</a:t>
-            </a:r>
-          </a:p>
-        </p:txBody>
-      </p:sp>
-      <p:sp>
-        <p:nvSpPr>
-          <p:cNvPr id="3" name="TextBox 2"/>
-          <p:cNvSpPr txBox="1"/>
-          <p:nvPr/>
-        </p:nvSpPr>
-        <p:spPr>
-          <a:xfrm>
-            <a:off x="566928" y="621792"/>
-            <a:ext cx="11057839" cy="640080"/>
-          </a:xfrm>
-          <a:prstGeom prst="rect">
-            <a:avLst/>
-          </a:prstGeom>
-          <a:noFill/>
-        </p:spPr>
-        <p:txBody>
-          <a:bodyPr wrap="square" anchor="t" lIns="0" rIns="0" tIns="0" bIns="0">
-            <a:spAutoFit/>
-          </a:bodyPr>
-          <a:lstStyle/>
-          <a:p>
-            <a:pPr algn="l"/>
-            <a:r>
-              <a:rPr sz="2700" b="1" i="0">
-                <a:solidFill>
-                  <a:srgbClr val="0B3B72"/>
-                </a:solidFill>
-                <a:latin typeface="微软雅黑"/>
-                <a:ea typeface="微软雅黑"/>
-                <a:cs typeface="微软雅黑"/>
-              </a:rPr>
-              <a:t>用数字感受一下这套系统</a:t>
-            </a:r>
-          </a:p>
-        </p:txBody>
-      </p:sp>
-      <p:sp>
-        <p:nvSpPr>
-          <p:cNvPr id="4" name="TextBox 3"/>
-          <p:cNvSpPr txBox="1"/>
-          <p:nvPr/>
-        </p:nvSpPr>
-        <p:spPr>
-          <a:xfrm>
-            <a:off x="10161727" y="6382512"/>
-            <a:ext cx="1463040" cy="274320"/>
-          </a:xfrm>
-          <a:prstGeom prst="rect">
-            <a:avLst/>
-          </a:prstGeom>
-          <a:noFill/>
-        </p:spPr>
-        <p:txBody>
-          <a:bodyPr wrap="square" anchor="t" lIns="0" rIns="0" tIns="0" bIns="0">
-            <a:spAutoFit/>
-          </a:bodyPr>
-          <a:lstStyle/>
-          <a:p>
-            <a:pPr algn="r"/>
-            <a:r>
-              <a:rPr sz="1000" b="0" i="0">
-                <a:solidFill>
-                  <a:srgbClr val="5A6B85"/>
-                </a:solidFill>
-                <a:latin typeface="微软雅黑"/>
-                <a:ea typeface="微软雅黑"/>
-                <a:cs typeface="微软雅黑"/>
-              </a:rPr>
-              <a:t>急救绿道 · 6 / 13</a:t>
-            </a:r>
-          </a:p>
-        </p:txBody>
-      </p:sp>
-      <p:sp>
-        <p:nvSpPr>
-          <p:cNvPr id="5" name="Rounded Rectangle 4"/>
-          <p:cNvSpPr/>
-          <p:nvPr/>
-        </p:nvSpPr>
-        <p:spPr>
-          <a:xfrm>
-            <a:off x="566928" y="1837943"/>
-            <a:ext cx="2526715" cy="2148840"/>
-          </a:xfrm>
-          <a:prstGeom prst="roundRect">
-            <a:avLst>
-              <a:gd name="adj" fmla="val 6000"/>
-            </a:avLst>
-          </a:prstGeom>
           <a:solidFill>
-            <a:srgbClr val="FFFFFF"/>
+            <a:srgbClr val="04122B"/>
           </a:solidFill>
-          <a:ln w="9525">
-            <a:solidFill>
-              <a:srgbClr val="D6E2F0"/>
-            </a:solidFill>
+          <a:ln>
+            <a:noFill/>
           </a:ln>
           <a:effectLst/>
         </p:spPr>
@@ -10223,7 +10416,166 @@
       </p:sp>
       <p:sp>
         <p:nvSpPr>
-          <p:cNvPr id="6" name="Rectangle 5"/>
+          <p:cNvPr id="3" name="TextBox 2"/>
+          <p:cNvSpPr txBox="1"/>
+          <p:nvPr/>
+        </p:nvSpPr>
+        <p:spPr>
+          <a:xfrm>
+            <a:off x="566928" y="329184"/>
+            <a:ext cx="11057839" cy="274320"/>
+          </a:xfrm>
+          <a:prstGeom prst="rect">
+            <a:avLst/>
+          </a:prstGeom>
+          <a:noFill/>
+        </p:spPr>
+        <p:txBody>
+          <a:bodyPr wrap="square" anchor="t" lIns="0" rIns="0" tIns="0" bIns="0">
+            <a:spAutoFit/>
+          </a:bodyPr>
+          <a:lstStyle/>
+          <a:p>
+            <a:pPr algn="l"/>
+            <a:r>
+              <a:rPr sz="1150" b="1" i="0">
+                <a:solidFill>
+                  <a:srgbClr val="7FE3FF"/>
+                </a:solidFill>
+                <a:latin typeface="微软雅黑"/>
+                <a:ea typeface="微软雅黑"/>
+                <a:cs typeface="微软雅黑"/>
+              </a:rPr>
+              <a:t>01 · 它是什么</a:t>
+            </a:r>
+          </a:p>
+        </p:txBody>
+      </p:sp>
+      <p:sp>
+        <p:nvSpPr>
+          <p:cNvPr id="4" name="TextBox 3"/>
+          <p:cNvSpPr txBox="1"/>
+          <p:nvPr/>
+        </p:nvSpPr>
+        <p:spPr>
+          <a:xfrm>
+            <a:off x="566928" y="621792"/>
+            <a:ext cx="11057839" cy="640080"/>
+          </a:xfrm>
+          <a:prstGeom prst="rect">
+            <a:avLst/>
+          </a:prstGeom>
+          <a:noFill/>
+        </p:spPr>
+        <p:txBody>
+          <a:bodyPr wrap="square" anchor="t" lIns="0" rIns="0" tIns="0" bIns="0">
+            <a:spAutoFit/>
+          </a:bodyPr>
+          <a:lstStyle/>
+          <a:p>
+            <a:pPr algn="l"/>
+            <a:r>
+              <a:rPr sz="2700" b="1" i="0">
+                <a:solidFill>
+                  <a:srgbClr val="ECF7FF"/>
+                </a:solidFill>
+                <a:latin typeface="微软雅黑"/>
+                <a:ea typeface="微软雅黑"/>
+                <a:cs typeface="微软雅黑"/>
+              </a:rPr>
+              <a:t>用数字感受一下这套系统</a:t>
+            </a:r>
+          </a:p>
+        </p:txBody>
+      </p:sp>
+      <p:sp>
+        <p:nvSpPr>
+          <p:cNvPr id="5" name="TextBox 4"/>
+          <p:cNvSpPr txBox="1"/>
+          <p:nvPr/>
+        </p:nvSpPr>
+        <p:spPr>
+          <a:xfrm>
+            <a:off x="10161727" y="6382512"/>
+            <a:ext cx="1463040" cy="274320"/>
+          </a:xfrm>
+          <a:prstGeom prst="rect">
+            <a:avLst/>
+          </a:prstGeom>
+          <a:noFill/>
+        </p:spPr>
+        <p:txBody>
+          <a:bodyPr wrap="square" anchor="t" lIns="0" rIns="0" tIns="0" bIns="0">
+            <a:spAutoFit/>
+          </a:bodyPr>
+          <a:lstStyle/>
+          <a:p>
+            <a:pPr algn="r"/>
+            <a:r>
+              <a:rPr sz="1000" b="0" i="0">
+                <a:solidFill>
+                  <a:srgbClr val="7E9EC4"/>
+                </a:solidFill>
+                <a:latin typeface="微软雅黑"/>
+                <a:ea typeface="微软雅黑"/>
+                <a:cs typeface="微软雅黑"/>
+              </a:rPr>
+              <a:t>急救绿道 · 6 / 13</a:t>
+            </a:r>
+          </a:p>
+        </p:txBody>
+      </p:sp>
+      <p:sp>
+        <p:nvSpPr>
+          <p:cNvPr id="6" name="Rounded Rectangle 5"/>
+          <p:cNvSpPr/>
+          <p:nvPr/>
+        </p:nvSpPr>
+        <p:spPr>
+          <a:xfrm>
+            <a:off x="566928" y="1837943"/>
+            <a:ext cx="2526715" cy="2148840"/>
+          </a:xfrm>
+          <a:prstGeom prst="roundRect">
+            <a:avLst>
+              <a:gd name="adj" fmla="val 6000"/>
+            </a:avLst>
+          </a:prstGeom>
+          <a:solidFill>
+            <a:srgbClr val="061A38"/>
+          </a:solidFill>
+          <a:ln w="9525">
+            <a:solidFill>
+              <a:srgbClr val="1A4272"/>
+            </a:solidFill>
+          </a:ln>
+          <a:effectLst/>
+        </p:spPr>
+        <p:style>
+          <a:lnRef idx="1">
+            <a:schemeClr val="accent1"/>
+          </a:lnRef>
+          <a:fillRef idx="3">
+            <a:schemeClr val="accent1"/>
+          </a:fillRef>
+          <a:effectRef idx="2">
+            <a:schemeClr val="accent1"/>
+          </a:effectRef>
+          <a:fontRef idx="minor">
+            <a:schemeClr val="lt1"/>
+          </a:fontRef>
+        </p:style>
+        <p:txBody>
+          <a:bodyPr rtlCol="0" anchor="ctr"/>
+          <a:lstStyle/>
+          <a:p>
+            <a:pPr algn="ctr"/>
+          </a:p>
+        </p:txBody>
+      </p:sp>
+      <p:sp>
+        <p:nvSpPr>
+          <p:cNvPr id="7" name="Rectangle 6"/>
           <p:cNvSpPr/>
           <p:nvPr/>
         </p:nvSpPr>
@@ -10236,7 +10588,7 @@
             <a:avLst/>
           </a:prstGeom>
           <a:solidFill>
-            <a:srgbClr val="1E88E5"/>
+            <a:srgbClr val="7FE3FF"/>
           </a:solidFill>
           <a:ln>
             <a:noFill/>
@@ -10267,7 +10619,7 @@
       </p:sp>
       <p:sp>
         <p:nvSpPr>
-          <p:cNvPr id="7" name="TextBox 6"/>
+          <p:cNvPr id="8" name="TextBox 7"/>
           <p:cNvSpPr txBox="1"/>
           <p:nvPr/>
         </p:nvSpPr>
@@ -10295,7 +10647,7 @@
             <a:r>
               <a:rPr sz="1100" b="1" i="0">
                 <a:solidFill>
-                  <a:srgbClr val="5A6B85"/>
+                  <a:srgbClr val="7E9EC4"/>
                 </a:solidFill>
                 <a:latin typeface="微软雅黑"/>
                 <a:ea typeface="微软雅黑"/>
@@ -10313,7 +10665,7 @@
             <a:r>
               <a:rPr sz="4000" b="1" i="0">
                 <a:solidFill>
-                  <a:srgbClr val="0B3B72"/>
+                  <a:srgbClr val="ECF7FF"/>
                 </a:solidFill>
                 <a:latin typeface="微软雅黑"/>
                 <a:ea typeface="微软雅黑"/>
@@ -10331,7 +10683,7 @@
             <a:r>
               <a:rPr sz="1100" b="0" i="0">
                 <a:solidFill>
-                  <a:srgbClr val="1F2D3D"/>
+                  <a:srgbClr val="BBD4EC"/>
                 </a:solidFill>
                 <a:latin typeface="微软雅黑"/>
                 <a:ea typeface="微软雅黑"/>
@@ -10344,7 +10696,7 @@
       </p:sp>
       <p:sp>
         <p:nvSpPr>
-          <p:cNvPr id="8" name="Rounded Rectangle 7"/>
+          <p:cNvPr id="9" name="Rounded Rectangle 8"/>
           <p:cNvSpPr/>
           <p:nvPr/>
         </p:nvSpPr>
@@ -10359,11 +10711,11 @@
             </a:avLst>
           </a:prstGeom>
           <a:solidFill>
-            <a:srgbClr val="FFFFFF"/>
+            <a:srgbClr val="061A38"/>
           </a:solidFill>
           <a:ln w="9525">
             <a:solidFill>
-              <a:srgbClr val="D6E2F0"/>
+              <a:srgbClr val="1A4272"/>
             </a:solidFill>
           </a:ln>
           <a:effectLst/>
@@ -10392,7 +10744,7 @@
       </p:sp>
       <p:sp>
         <p:nvSpPr>
-          <p:cNvPr id="9" name="Rectangle 8"/>
+          <p:cNvPr id="10" name="Rectangle 9"/>
           <p:cNvSpPr/>
           <p:nvPr/>
         </p:nvSpPr>
@@ -10405,7 +10757,7 @@
             <a:avLst/>
           </a:prstGeom>
           <a:solidFill>
-            <a:srgbClr val="1E88E5"/>
+            <a:srgbClr val="7FE3FF"/>
           </a:solidFill>
           <a:ln>
             <a:noFill/>
@@ -10436,7 +10788,7 @@
       </p:sp>
       <p:sp>
         <p:nvSpPr>
-          <p:cNvPr id="10" name="TextBox 9"/>
+          <p:cNvPr id="11" name="TextBox 10"/>
           <p:cNvSpPr txBox="1"/>
           <p:nvPr/>
         </p:nvSpPr>
@@ -10464,7 +10816,7 @@
             <a:r>
               <a:rPr sz="1100" b="1" i="0">
                 <a:solidFill>
-                  <a:srgbClr val="5A6B85"/>
+                  <a:srgbClr val="7E9EC4"/>
                 </a:solidFill>
                 <a:latin typeface="微软雅黑"/>
                 <a:ea typeface="微软雅黑"/>
@@ -10482,7 +10834,7 @@
             <a:r>
               <a:rPr sz="4000" b="1" i="0">
                 <a:solidFill>
-                  <a:srgbClr val="0B3B72"/>
+                  <a:srgbClr val="ECF7FF"/>
                 </a:solidFill>
                 <a:latin typeface="微软雅黑"/>
                 <a:ea typeface="微软雅黑"/>
@@ -10500,7 +10852,7 @@
             <a:r>
               <a:rPr sz="1100" b="0" i="0">
                 <a:solidFill>
-                  <a:srgbClr val="1F2D3D"/>
+                  <a:srgbClr val="BBD4EC"/>
                 </a:solidFill>
                 <a:latin typeface="微软雅黑"/>
                 <a:ea typeface="微软雅黑"/>
@@ -10513,7 +10865,7 @@
       </p:sp>
       <p:sp>
         <p:nvSpPr>
-          <p:cNvPr id="11" name="Rounded Rectangle 10"/>
+          <p:cNvPr id="12" name="Rounded Rectangle 11"/>
           <p:cNvSpPr/>
           <p:nvPr/>
         </p:nvSpPr>
@@ -10528,11 +10880,11 @@
             </a:avLst>
           </a:prstGeom>
           <a:solidFill>
-            <a:srgbClr val="FFFFFF"/>
+            <a:srgbClr val="061A38"/>
           </a:solidFill>
           <a:ln w="9525">
             <a:solidFill>
-              <a:srgbClr val="D6E2F0"/>
+              <a:srgbClr val="1A4272"/>
             </a:solidFill>
           </a:ln>
           <a:effectLst/>
@@ -10561,7 +10913,7 @@
       </p:sp>
       <p:sp>
         <p:nvSpPr>
-          <p:cNvPr id="12" name="Rectangle 11"/>
+          <p:cNvPr id="13" name="Rectangle 12"/>
           <p:cNvSpPr/>
           <p:nvPr/>
         </p:nvSpPr>
@@ -10574,7 +10926,7 @@
             <a:avLst/>
           </a:prstGeom>
           <a:solidFill>
-            <a:srgbClr val="1E88E5"/>
+            <a:srgbClr val="7FE3FF"/>
           </a:solidFill>
           <a:ln>
             <a:noFill/>
@@ -10605,7 +10957,7 @@
       </p:sp>
       <p:sp>
         <p:nvSpPr>
-          <p:cNvPr id="13" name="TextBox 12"/>
+          <p:cNvPr id="14" name="TextBox 13"/>
           <p:cNvSpPr txBox="1"/>
           <p:nvPr/>
         </p:nvSpPr>
@@ -10633,7 +10985,7 @@
             <a:r>
               <a:rPr sz="1100" b="1" i="0">
                 <a:solidFill>
-                  <a:srgbClr val="5A6B85"/>
+                  <a:srgbClr val="7E9EC4"/>
                 </a:solidFill>
                 <a:latin typeface="微软雅黑"/>
                 <a:ea typeface="微软雅黑"/>
@@ -10651,7 +11003,7 @@
             <a:r>
               <a:rPr sz="4000" b="1" i="0">
                 <a:solidFill>
-                  <a:srgbClr val="0B3B72"/>
+                  <a:srgbClr val="ECF7FF"/>
                 </a:solidFill>
                 <a:latin typeface="微软雅黑"/>
                 <a:ea typeface="微软雅黑"/>
@@ -10669,7 +11021,7 @@
             <a:r>
               <a:rPr sz="1100" b="0" i="0">
                 <a:solidFill>
-                  <a:srgbClr val="1F2D3D"/>
+                  <a:srgbClr val="BBD4EC"/>
                 </a:solidFill>
                 <a:latin typeface="微软雅黑"/>
                 <a:ea typeface="微软雅黑"/>
@@ -10682,7 +11034,7 @@
       </p:sp>
       <p:sp>
         <p:nvSpPr>
-          <p:cNvPr id="14" name="Rounded Rectangle 13"/>
+          <p:cNvPr id="15" name="Rounded Rectangle 14"/>
           <p:cNvSpPr/>
           <p:nvPr/>
         </p:nvSpPr>
@@ -10697,11 +11049,11 @@
             </a:avLst>
           </a:prstGeom>
           <a:solidFill>
-            <a:srgbClr val="FFFFFF"/>
+            <a:srgbClr val="061A38"/>
           </a:solidFill>
           <a:ln w="9525">
             <a:solidFill>
-              <a:srgbClr val="D6E2F0"/>
+              <a:srgbClr val="1A4272"/>
             </a:solidFill>
           </a:ln>
           <a:effectLst/>
@@ -10730,7 +11082,7 @@
       </p:sp>
       <p:sp>
         <p:nvSpPr>
-          <p:cNvPr id="15" name="Rectangle 14"/>
+          <p:cNvPr id="16" name="Rectangle 15"/>
           <p:cNvSpPr/>
           <p:nvPr/>
         </p:nvSpPr>
@@ -10743,7 +11095,7 @@
             <a:avLst/>
           </a:prstGeom>
           <a:solidFill>
-            <a:srgbClr val="1E88E5"/>
+            <a:srgbClr val="7FE3FF"/>
           </a:solidFill>
           <a:ln>
             <a:noFill/>
@@ -10774,7 +11126,7 @@
       </p:sp>
       <p:sp>
         <p:nvSpPr>
-          <p:cNvPr id="16" name="TextBox 15"/>
+          <p:cNvPr id="17" name="TextBox 16"/>
           <p:cNvSpPr txBox="1"/>
           <p:nvPr/>
         </p:nvSpPr>
@@ -10802,7 +11154,7 @@
             <a:r>
               <a:rPr sz="1100" b="1" i="0">
                 <a:solidFill>
-                  <a:srgbClr val="5A6B85"/>
+                  <a:srgbClr val="7E9EC4"/>
                 </a:solidFill>
                 <a:latin typeface="微软雅黑"/>
                 <a:ea typeface="微软雅黑"/>
@@ -10820,7 +11172,7 @@
             <a:r>
               <a:rPr sz="4000" b="1" i="0">
                 <a:solidFill>
-                  <a:srgbClr val="0B3B72"/>
+                  <a:srgbClr val="ECF7FF"/>
                 </a:solidFill>
                 <a:latin typeface="微软雅黑"/>
                 <a:ea typeface="微软雅黑"/>
@@ -10838,7 +11190,7 @@
             <a:r>
               <a:rPr sz="1100" b="0" i="0">
                 <a:solidFill>
-                  <a:srgbClr val="1F2D3D"/>
+                  <a:srgbClr val="BBD4EC"/>
                 </a:solidFill>
                 <a:latin typeface="微软雅黑"/>
                 <a:ea typeface="微软雅黑"/>
@@ -10851,7 +11203,7 @@
       </p:sp>
       <p:sp>
         <p:nvSpPr>
-          <p:cNvPr id="17" name="TextBox 16"/>
+          <p:cNvPr id="18" name="TextBox 17"/>
           <p:cNvSpPr txBox="1"/>
           <p:nvPr/>
         </p:nvSpPr>
@@ -10879,7 +11231,7 @@
             <a:r>
               <a:rPr sz="1500" b="0" i="0">
                 <a:solidFill>
-                  <a:srgbClr val="1F2D3D"/>
+                  <a:srgbClr val="BBD4EC"/>
                 </a:solidFill>
                 <a:latin typeface="微软雅黑"/>
                 <a:ea typeface="微软雅黑"/>
@@ -10890,7 +11242,7 @@
             <a:r>
               <a:rPr sz="1500" b="1" i="0">
                 <a:solidFill>
-                  <a:srgbClr val="0B3B72"/>
+                  <a:srgbClr val="ECF7FF"/>
                 </a:solidFill>
                 <a:latin typeface="微软雅黑"/>
                 <a:ea typeface="微软雅黑"/>
@@ -10921,138 +11273,23 @@
       <p:grpSpPr/>
       <p:sp>
         <p:nvSpPr>
-          <p:cNvPr id="2" name="TextBox 1"/>
-          <p:cNvSpPr txBox="1"/>
-          <p:nvPr/>
-        </p:nvSpPr>
-        <p:spPr>
-          <a:xfrm>
-            <a:off x="566928" y="329184"/>
-            <a:ext cx="11057839" cy="274320"/>
+          <p:cNvPr id="2" name="Rectangle 1"/>
+          <p:cNvSpPr/>
+          <p:nvPr/>
+        </p:nvSpPr>
+        <p:spPr>
+          <a:xfrm>
+            <a:off x="0" y="0"/>
+            <a:ext cx="12191695" cy="6858000"/>
           </a:xfrm>
           <a:prstGeom prst="rect">
             <a:avLst/>
           </a:prstGeom>
-          <a:noFill/>
-        </p:spPr>
-        <p:txBody>
-          <a:bodyPr wrap="square" anchor="t" lIns="0" rIns="0" tIns="0" bIns="0">
-            <a:spAutoFit/>
-          </a:bodyPr>
-          <a:lstStyle/>
-          <a:p>
-            <a:pPr algn="l"/>
-            <a:r>
-              <a:rPr sz="1150" b="1" i="0">
-                <a:solidFill>
-                  <a:srgbClr val="1E88E5"/>
-                </a:solidFill>
-                <a:latin typeface="微软雅黑"/>
-                <a:ea typeface="微软雅黑"/>
-                <a:cs typeface="微软雅黑"/>
-              </a:rPr>
-              <a:t>02 · 怎么做的</a:t>
-            </a:r>
-          </a:p>
-        </p:txBody>
-      </p:sp>
-      <p:sp>
-        <p:nvSpPr>
-          <p:cNvPr id="3" name="TextBox 2"/>
-          <p:cNvSpPr txBox="1"/>
-          <p:nvPr/>
-        </p:nvSpPr>
-        <p:spPr>
-          <a:xfrm>
-            <a:off x="566928" y="621792"/>
-            <a:ext cx="11057839" cy="640080"/>
-          </a:xfrm>
-          <a:prstGeom prst="rect">
-            <a:avLst/>
-          </a:prstGeom>
-          <a:noFill/>
-        </p:spPr>
-        <p:txBody>
-          <a:bodyPr wrap="square" anchor="t" lIns="0" rIns="0" tIns="0" bIns="0">
-            <a:spAutoFit/>
-          </a:bodyPr>
-          <a:lstStyle/>
-          <a:p>
-            <a:pPr algn="l"/>
-            <a:r>
-              <a:rPr sz="2700" b="1" i="0">
-                <a:solidFill>
-                  <a:srgbClr val="0B3B72"/>
-                </a:solidFill>
-                <a:latin typeface="微软雅黑"/>
-                <a:ea typeface="微软雅黑"/>
-                <a:cs typeface="微软雅黑"/>
-              </a:rPr>
-              <a:t>一条数据从产生到上屏，走五步</a:t>
-            </a:r>
-          </a:p>
-        </p:txBody>
-      </p:sp>
-      <p:sp>
-        <p:nvSpPr>
-          <p:cNvPr id="4" name="TextBox 3"/>
-          <p:cNvSpPr txBox="1"/>
-          <p:nvPr/>
-        </p:nvSpPr>
-        <p:spPr>
-          <a:xfrm>
-            <a:off x="10161727" y="6382512"/>
-            <a:ext cx="1463040" cy="274320"/>
-          </a:xfrm>
-          <a:prstGeom prst="rect">
-            <a:avLst/>
-          </a:prstGeom>
-          <a:noFill/>
-        </p:spPr>
-        <p:txBody>
-          <a:bodyPr wrap="square" anchor="t" lIns="0" rIns="0" tIns="0" bIns="0">
-            <a:spAutoFit/>
-          </a:bodyPr>
-          <a:lstStyle/>
-          <a:p>
-            <a:pPr algn="r"/>
-            <a:r>
-              <a:rPr sz="1000" b="0" i="0">
-                <a:solidFill>
-                  <a:srgbClr val="5A6B85"/>
-                </a:solidFill>
-                <a:latin typeface="微软雅黑"/>
-                <a:ea typeface="微软雅黑"/>
-                <a:cs typeface="微软雅黑"/>
-              </a:rPr>
-              <a:t>急救绿道 · 7 / 13</a:t>
-            </a:r>
-          </a:p>
-        </p:txBody>
-      </p:sp>
-      <p:sp>
-        <p:nvSpPr>
-          <p:cNvPr id="5" name="Rounded Rectangle 4"/>
-          <p:cNvSpPr/>
-          <p:nvPr/>
-        </p:nvSpPr>
-        <p:spPr>
-          <a:xfrm>
-            <a:off x="566928" y="2020824"/>
-            <a:ext cx="1904329" cy="1783080"/>
-          </a:xfrm>
-          <a:prstGeom prst="roundRect">
-            <a:avLst>
-              <a:gd name="adj" fmla="val 6000"/>
-            </a:avLst>
-          </a:prstGeom>
           <a:solidFill>
-            <a:srgbClr val="FFFFFF"/>
+            <a:srgbClr val="04122B"/>
           </a:solidFill>
-          <a:ln w="9525">
-            <a:solidFill>
-              <a:srgbClr val="D6E2F0"/>
-            </a:solidFill>
+          <a:ln>
+            <a:noFill/>
           </a:ln>
           <a:effectLst/>
         </p:spPr>
@@ -11080,7 +11317,166 @@
       </p:sp>
       <p:sp>
         <p:nvSpPr>
-          <p:cNvPr id="6" name="TextBox 5"/>
+          <p:cNvPr id="3" name="TextBox 2"/>
+          <p:cNvSpPr txBox="1"/>
+          <p:nvPr/>
+        </p:nvSpPr>
+        <p:spPr>
+          <a:xfrm>
+            <a:off x="566928" y="329184"/>
+            <a:ext cx="11057839" cy="274320"/>
+          </a:xfrm>
+          <a:prstGeom prst="rect">
+            <a:avLst/>
+          </a:prstGeom>
+          <a:noFill/>
+        </p:spPr>
+        <p:txBody>
+          <a:bodyPr wrap="square" anchor="t" lIns="0" rIns="0" tIns="0" bIns="0">
+            <a:spAutoFit/>
+          </a:bodyPr>
+          <a:lstStyle/>
+          <a:p>
+            <a:pPr algn="l"/>
+            <a:r>
+              <a:rPr sz="1150" b="1" i="0">
+                <a:solidFill>
+                  <a:srgbClr val="7FE3FF"/>
+                </a:solidFill>
+                <a:latin typeface="微软雅黑"/>
+                <a:ea typeface="微软雅黑"/>
+                <a:cs typeface="微软雅黑"/>
+              </a:rPr>
+              <a:t>02 · 怎么做的</a:t>
+            </a:r>
+          </a:p>
+        </p:txBody>
+      </p:sp>
+      <p:sp>
+        <p:nvSpPr>
+          <p:cNvPr id="4" name="TextBox 3"/>
+          <p:cNvSpPr txBox="1"/>
+          <p:nvPr/>
+        </p:nvSpPr>
+        <p:spPr>
+          <a:xfrm>
+            <a:off x="566928" y="621792"/>
+            <a:ext cx="11057839" cy="640080"/>
+          </a:xfrm>
+          <a:prstGeom prst="rect">
+            <a:avLst/>
+          </a:prstGeom>
+          <a:noFill/>
+        </p:spPr>
+        <p:txBody>
+          <a:bodyPr wrap="square" anchor="t" lIns="0" rIns="0" tIns="0" bIns="0">
+            <a:spAutoFit/>
+          </a:bodyPr>
+          <a:lstStyle/>
+          <a:p>
+            <a:pPr algn="l"/>
+            <a:r>
+              <a:rPr sz="2700" b="1" i="0">
+                <a:solidFill>
+                  <a:srgbClr val="ECF7FF"/>
+                </a:solidFill>
+                <a:latin typeface="微软雅黑"/>
+                <a:ea typeface="微软雅黑"/>
+                <a:cs typeface="微软雅黑"/>
+              </a:rPr>
+              <a:t>一条数据从产生到上屏，走五步</a:t>
+            </a:r>
+          </a:p>
+        </p:txBody>
+      </p:sp>
+      <p:sp>
+        <p:nvSpPr>
+          <p:cNvPr id="5" name="TextBox 4"/>
+          <p:cNvSpPr txBox="1"/>
+          <p:nvPr/>
+        </p:nvSpPr>
+        <p:spPr>
+          <a:xfrm>
+            <a:off x="10161727" y="6382512"/>
+            <a:ext cx="1463040" cy="274320"/>
+          </a:xfrm>
+          <a:prstGeom prst="rect">
+            <a:avLst/>
+          </a:prstGeom>
+          <a:noFill/>
+        </p:spPr>
+        <p:txBody>
+          <a:bodyPr wrap="square" anchor="t" lIns="0" rIns="0" tIns="0" bIns="0">
+            <a:spAutoFit/>
+          </a:bodyPr>
+          <a:lstStyle/>
+          <a:p>
+            <a:pPr algn="r"/>
+            <a:r>
+              <a:rPr sz="1000" b="0" i="0">
+                <a:solidFill>
+                  <a:srgbClr val="7E9EC4"/>
+                </a:solidFill>
+                <a:latin typeface="微软雅黑"/>
+                <a:ea typeface="微软雅黑"/>
+                <a:cs typeface="微软雅黑"/>
+              </a:rPr>
+              <a:t>急救绿道 · 7 / 13</a:t>
+            </a:r>
+          </a:p>
+        </p:txBody>
+      </p:sp>
+      <p:sp>
+        <p:nvSpPr>
+          <p:cNvPr id="6" name="Rounded Rectangle 5"/>
+          <p:cNvSpPr/>
+          <p:nvPr/>
+        </p:nvSpPr>
+        <p:spPr>
+          <a:xfrm>
+            <a:off x="566928" y="2020824"/>
+            <a:ext cx="1904329" cy="1783080"/>
+          </a:xfrm>
+          <a:prstGeom prst="roundRect">
+            <a:avLst>
+              <a:gd name="adj" fmla="val 6000"/>
+            </a:avLst>
+          </a:prstGeom>
+          <a:solidFill>
+            <a:srgbClr val="061A38"/>
+          </a:solidFill>
+          <a:ln w="9525">
+            <a:solidFill>
+              <a:srgbClr val="1A4272"/>
+            </a:solidFill>
+          </a:ln>
+          <a:effectLst/>
+        </p:spPr>
+        <p:style>
+          <a:lnRef idx="1">
+            <a:schemeClr val="accent1"/>
+          </a:lnRef>
+          <a:fillRef idx="3">
+            <a:schemeClr val="accent1"/>
+          </a:fillRef>
+          <a:effectRef idx="2">
+            <a:schemeClr val="accent1"/>
+          </a:effectRef>
+          <a:fontRef idx="minor">
+            <a:schemeClr val="lt1"/>
+          </a:fontRef>
+        </p:style>
+        <p:txBody>
+          <a:bodyPr rtlCol="0" anchor="ctr"/>
+          <a:lstStyle/>
+          <a:p>
+            <a:pPr algn="ctr"/>
+          </a:p>
+        </p:txBody>
+      </p:sp>
+      <p:sp>
+        <p:nvSpPr>
+          <p:cNvPr id="7" name="TextBox 6"/>
           <p:cNvSpPr txBox="1"/>
           <p:nvPr/>
         </p:nvSpPr>
@@ -11108,7 +11504,7 @@
             <a:r>
               <a:rPr sz="1500" b="1" i="0">
                 <a:solidFill>
-                  <a:srgbClr val="0B3B72"/>
+                  <a:srgbClr val="ECF7FF"/>
                 </a:solidFill>
                 <a:latin typeface="微软雅黑"/>
                 <a:ea typeface="微软雅黑"/>
@@ -11126,7 +11522,7 @@
             <a:r>
               <a:rPr sz="1050" b="0" i="0">
                 <a:solidFill>
-                  <a:srgbClr val="1F2D3D"/>
+                  <a:srgbClr val="BBD4EC"/>
                 </a:solidFill>
                 <a:latin typeface="微软雅黑"/>
                 <a:ea typeface="微软雅黑"/>
@@ -11140,7 +11536,7 @@
       </p:sp>
       <p:sp>
         <p:nvSpPr>
-          <p:cNvPr id="7" name="TextBox 6"/>
+          <p:cNvPr id="8" name="TextBox 7"/>
           <p:cNvSpPr txBox="1"/>
           <p:nvPr/>
         </p:nvSpPr>
@@ -11164,7 +11560,7 @@
             <a:r>
               <a:rPr sz="2000" b="1" i="0">
                 <a:solidFill>
-                  <a:srgbClr val="1E88E5"/>
+                  <a:srgbClr val="7FE3FF"/>
                 </a:solidFill>
                 <a:latin typeface="微软雅黑"/>
                 <a:ea typeface="微软雅黑"/>
@@ -11177,7 +11573,7 @@
       </p:sp>
       <p:sp>
         <p:nvSpPr>
-          <p:cNvPr id="8" name="Rounded Rectangle 7"/>
+          <p:cNvPr id="9" name="Rounded Rectangle 8"/>
           <p:cNvSpPr/>
           <p:nvPr/>
         </p:nvSpPr>
@@ -11192,11 +11588,11 @@
             </a:avLst>
           </a:prstGeom>
           <a:solidFill>
-            <a:srgbClr val="FFFFFF"/>
+            <a:srgbClr val="061A38"/>
           </a:solidFill>
           <a:ln w="9525">
             <a:solidFill>
-              <a:srgbClr val="D6E2F0"/>
+              <a:srgbClr val="1A4272"/>
             </a:solidFill>
           </a:ln>
           <a:effectLst/>
@@ -11225,7 +11621,7 @@
       </p:sp>
       <p:sp>
         <p:nvSpPr>
-          <p:cNvPr id="9" name="TextBox 8"/>
+          <p:cNvPr id="10" name="TextBox 9"/>
           <p:cNvSpPr txBox="1"/>
           <p:nvPr/>
         </p:nvSpPr>
@@ -11253,7 +11649,7 @@
             <a:r>
               <a:rPr sz="1500" b="1" i="0">
                 <a:solidFill>
-                  <a:srgbClr val="0B3B72"/>
+                  <a:srgbClr val="ECF7FF"/>
                 </a:solidFill>
                 <a:latin typeface="微软雅黑"/>
                 <a:ea typeface="微软雅黑"/>
@@ -11271,7 +11667,7 @@
             <a:r>
               <a:rPr sz="1050" b="0" i="0">
                 <a:solidFill>
-                  <a:srgbClr val="1F2D3D"/>
+                  <a:srgbClr val="BBD4EC"/>
                 </a:solidFill>
                 <a:latin typeface="微软雅黑"/>
                 <a:ea typeface="微软雅黑"/>
@@ -11285,7 +11681,7 @@
       </p:sp>
       <p:sp>
         <p:nvSpPr>
-          <p:cNvPr id="10" name="TextBox 9"/>
+          <p:cNvPr id="11" name="TextBox 10"/>
           <p:cNvSpPr txBox="1"/>
           <p:nvPr/>
         </p:nvSpPr>
@@ -11309,7 +11705,7 @@
             <a:r>
               <a:rPr sz="2000" b="1" i="0">
                 <a:solidFill>
-                  <a:srgbClr val="1E88E5"/>
+                  <a:srgbClr val="7FE3FF"/>
                 </a:solidFill>
                 <a:latin typeface="微软雅黑"/>
                 <a:ea typeface="微软雅黑"/>
@@ -11322,7 +11718,7 @@
       </p:sp>
       <p:sp>
         <p:nvSpPr>
-          <p:cNvPr id="11" name="Rounded Rectangle 10"/>
+          <p:cNvPr id="12" name="Rounded Rectangle 11"/>
           <p:cNvSpPr/>
           <p:nvPr/>
         </p:nvSpPr>
@@ -11337,11 +11733,11 @@
             </a:avLst>
           </a:prstGeom>
           <a:solidFill>
-            <a:srgbClr val="FFFFFF"/>
+            <a:srgbClr val="061A38"/>
           </a:solidFill>
           <a:ln w="9525">
             <a:solidFill>
-              <a:srgbClr val="D6E2F0"/>
+              <a:srgbClr val="1A4272"/>
             </a:solidFill>
           </a:ln>
           <a:effectLst/>
@@ -11370,7 +11766,7 @@
       </p:sp>
       <p:sp>
         <p:nvSpPr>
-          <p:cNvPr id="12" name="Rectangle 11"/>
+          <p:cNvPr id="13" name="Rectangle 12"/>
           <p:cNvSpPr/>
           <p:nvPr/>
         </p:nvSpPr>
@@ -11383,7 +11779,7 @@
             <a:avLst/>
           </a:prstGeom>
           <a:solidFill>
-            <a:srgbClr val="1E88E5"/>
+            <a:srgbClr val="7FE3FF"/>
           </a:solidFill>
           <a:ln>
             <a:noFill/>
@@ -11414,7 +11810,7 @@
       </p:sp>
       <p:sp>
         <p:nvSpPr>
-          <p:cNvPr id="13" name="TextBox 12"/>
+          <p:cNvPr id="14" name="TextBox 13"/>
           <p:cNvSpPr txBox="1"/>
           <p:nvPr/>
         </p:nvSpPr>
@@ -11442,7 +11838,7 @@
             <a:r>
               <a:rPr sz="1500" b="1" i="0">
                 <a:solidFill>
-                  <a:srgbClr val="0B3B72"/>
+                  <a:srgbClr val="ECF7FF"/>
                 </a:solidFill>
                 <a:latin typeface="微软雅黑"/>
                 <a:ea typeface="微软雅黑"/>
@@ -11460,7 +11856,7 @@
             <a:r>
               <a:rPr sz="1050" b="0" i="0">
                 <a:solidFill>
-                  <a:srgbClr val="1F2D3D"/>
+                  <a:srgbClr val="BBD4EC"/>
                 </a:solidFill>
                 <a:latin typeface="微软雅黑"/>
                 <a:ea typeface="微软雅黑"/>
@@ -11474,7 +11870,7 @@
       </p:sp>
       <p:sp>
         <p:nvSpPr>
-          <p:cNvPr id="14" name="TextBox 13"/>
+          <p:cNvPr id="15" name="TextBox 14"/>
           <p:cNvSpPr txBox="1"/>
           <p:nvPr/>
         </p:nvSpPr>
@@ -11498,7 +11894,7 @@
             <a:r>
               <a:rPr sz="2000" b="1" i="0">
                 <a:solidFill>
-                  <a:srgbClr val="1E88E5"/>
+                  <a:srgbClr val="7FE3FF"/>
                 </a:solidFill>
                 <a:latin typeface="微软雅黑"/>
                 <a:ea typeface="微软雅黑"/>
@@ -11511,7 +11907,7 @@
       </p:sp>
       <p:sp>
         <p:nvSpPr>
-          <p:cNvPr id="15" name="Rounded Rectangle 14"/>
+          <p:cNvPr id="16" name="Rounded Rectangle 15"/>
           <p:cNvSpPr/>
           <p:nvPr/>
         </p:nvSpPr>
@@ -11526,11 +11922,11 @@
             </a:avLst>
           </a:prstGeom>
           <a:solidFill>
-            <a:srgbClr val="FFFFFF"/>
+            <a:srgbClr val="061A38"/>
           </a:solidFill>
           <a:ln w="9525">
             <a:solidFill>
-              <a:srgbClr val="D6E2F0"/>
+              <a:srgbClr val="1A4272"/>
             </a:solidFill>
           </a:ln>
           <a:effectLst/>
@@ -11559,7 +11955,7 @@
       </p:sp>
       <p:sp>
         <p:nvSpPr>
-          <p:cNvPr id="16" name="Rectangle 15"/>
+          <p:cNvPr id="17" name="Rectangle 16"/>
           <p:cNvSpPr/>
           <p:nvPr/>
         </p:nvSpPr>
@@ -11572,7 +11968,7 @@
             <a:avLst/>
           </a:prstGeom>
           <a:solidFill>
-            <a:srgbClr val="1E88E5"/>
+            <a:srgbClr val="7FE3FF"/>
           </a:solidFill>
           <a:ln>
             <a:noFill/>
@@ -11603,7 +11999,7 @@
       </p:sp>
       <p:sp>
         <p:nvSpPr>
-          <p:cNvPr id="17" name="TextBox 16"/>
+          <p:cNvPr id="18" name="TextBox 17"/>
           <p:cNvSpPr txBox="1"/>
           <p:nvPr/>
         </p:nvSpPr>
@@ -11631,7 +12027,7 @@
             <a:r>
               <a:rPr sz="1500" b="1" i="0">
                 <a:solidFill>
-                  <a:srgbClr val="0B3B72"/>
+                  <a:srgbClr val="ECF7FF"/>
                 </a:solidFill>
                 <a:latin typeface="微软雅黑"/>
                 <a:ea typeface="微软雅黑"/>
@@ -11649,7 +12045,7 @@
             <a:r>
               <a:rPr sz="1050" b="0" i="0">
                 <a:solidFill>
-                  <a:srgbClr val="1F2D3D"/>
+                  <a:srgbClr val="BBD4EC"/>
                 </a:solidFill>
                 <a:latin typeface="微软雅黑"/>
                 <a:ea typeface="微软雅黑"/>
@@ -11663,7 +12059,7 @@
       </p:sp>
       <p:sp>
         <p:nvSpPr>
-          <p:cNvPr id="18" name="TextBox 17"/>
+          <p:cNvPr id="19" name="TextBox 18"/>
           <p:cNvSpPr txBox="1"/>
           <p:nvPr/>
         </p:nvSpPr>
@@ -11687,7 +12083,7 @@
             <a:r>
               <a:rPr sz="2000" b="1" i="0">
                 <a:solidFill>
-                  <a:srgbClr val="1E88E5"/>
+                  <a:srgbClr val="7FE3FF"/>
                 </a:solidFill>
                 <a:latin typeface="微软雅黑"/>
                 <a:ea typeface="微软雅黑"/>
@@ -11700,7 +12096,7 @@
       </p:sp>
       <p:sp>
         <p:nvSpPr>
-          <p:cNvPr id="19" name="Rounded Rectangle 18"/>
+          <p:cNvPr id="20" name="Rounded Rectangle 19"/>
           <p:cNvSpPr/>
           <p:nvPr/>
         </p:nvSpPr>
@@ -11715,11 +12111,11 @@
             </a:avLst>
           </a:prstGeom>
           <a:solidFill>
-            <a:srgbClr val="FFFFFF"/>
+            <a:srgbClr val="061A38"/>
           </a:solidFill>
           <a:ln w="9525">
             <a:solidFill>
-              <a:srgbClr val="D6E2F0"/>
+              <a:srgbClr val="1A4272"/>
             </a:solidFill>
           </a:ln>
           <a:effectLst/>
@@ -11748,7 +12144,7 @@
       </p:sp>
       <p:sp>
         <p:nvSpPr>
-          <p:cNvPr id="20" name="TextBox 19"/>
+          <p:cNvPr id="21" name="TextBox 20"/>
           <p:cNvSpPr txBox="1"/>
           <p:nvPr/>
         </p:nvSpPr>
@@ -11776,7 +12172,7 @@
             <a:r>
               <a:rPr sz="1500" b="1" i="0">
                 <a:solidFill>
-                  <a:srgbClr val="0B3B72"/>
+                  <a:srgbClr val="ECF7FF"/>
                 </a:solidFill>
                 <a:latin typeface="微软雅黑"/>
                 <a:ea typeface="微软雅黑"/>
@@ -11794,7 +12190,7 @@
             <a:r>
               <a:rPr sz="1050" b="0" i="0">
                 <a:solidFill>
-                  <a:srgbClr val="1F2D3D"/>
+                  <a:srgbClr val="BBD4EC"/>
                 </a:solidFill>
                 <a:latin typeface="微软雅黑"/>
                 <a:ea typeface="微软雅黑"/>
@@ -11808,7 +12204,7 @@
       </p:sp>
       <p:sp>
         <p:nvSpPr>
-          <p:cNvPr id="21" name="Rounded Rectangle 20"/>
+          <p:cNvPr id="22" name="Rounded Rectangle 21"/>
           <p:cNvSpPr/>
           <p:nvPr/>
         </p:nvSpPr>
@@ -11823,11 +12219,11 @@
             </a:avLst>
           </a:prstGeom>
           <a:solidFill>
-            <a:srgbClr val="F2F6FC"/>
+            <a:srgbClr val="08224A"/>
           </a:solidFill>
           <a:ln w="9525">
             <a:solidFill>
-              <a:srgbClr val="D6E2F0"/>
+              <a:srgbClr val="1A4272"/>
             </a:solidFill>
           </a:ln>
           <a:effectLst/>
@@ -11856,7 +12252,7 @@
       </p:sp>
       <p:sp>
         <p:nvSpPr>
-          <p:cNvPr id="22" name="TextBox 21"/>
+          <p:cNvPr id="23" name="TextBox 22"/>
           <p:cNvSpPr txBox="1"/>
           <p:nvPr/>
         </p:nvSpPr>
@@ -11884,7 +12280,7 @@
             <a:r>
               <a:rPr sz="1100" b="1" i="0">
                 <a:solidFill>
-                  <a:srgbClr val="1F2D3D"/>
+                  <a:srgbClr val="BBD4EC"/>
                 </a:solidFill>
                 <a:latin typeface="微软雅黑"/>
                 <a:ea typeface="微软雅黑"/>
@@ -11902,7 +12298,7 @@
             <a:r>
               <a:rPr sz="950" b="0" i="0">
                 <a:solidFill>
-                  <a:srgbClr val="5A6B85"/>
+                  <a:srgbClr val="7E9EC4"/>
                 </a:solidFill>
                 <a:latin typeface="微软雅黑"/>
                 <a:ea typeface="微软雅黑"/>
@@ -11915,7 +12311,7 @@
       </p:sp>
       <p:sp>
         <p:nvSpPr>
-          <p:cNvPr id="23" name="Rounded Rectangle 22"/>
+          <p:cNvPr id="24" name="Rounded Rectangle 23"/>
           <p:cNvSpPr/>
           <p:nvPr/>
         </p:nvSpPr>
@@ -11930,11 +12326,11 @@
             </a:avLst>
           </a:prstGeom>
           <a:solidFill>
-            <a:srgbClr val="F2F6FC"/>
+            <a:srgbClr val="08224A"/>
           </a:solidFill>
           <a:ln w="9525">
             <a:solidFill>
-              <a:srgbClr val="D6E2F0"/>
+              <a:srgbClr val="1A4272"/>
             </a:solidFill>
           </a:ln>
           <a:effectLst/>
@@ -11963,7 +12359,7 @@
       </p:sp>
       <p:sp>
         <p:nvSpPr>
-          <p:cNvPr id="24" name="TextBox 23"/>
+          <p:cNvPr id="25" name="TextBox 24"/>
           <p:cNvSpPr txBox="1"/>
           <p:nvPr/>
         </p:nvSpPr>
@@ -11991,7 +12387,7 @@
             <a:r>
               <a:rPr sz="1100" b="1" i="0">
                 <a:solidFill>
-                  <a:srgbClr val="1F2D3D"/>
+                  <a:srgbClr val="BBD4EC"/>
                 </a:solidFill>
                 <a:latin typeface="微软雅黑"/>
                 <a:ea typeface="微软雅黑"/>
@@ -12009,7 +12405,7 @@
             <a:r>
               <a:rPr sz="950" b="0" i="0">
                 <a:solidFill>
-                  <a:srgbClr val="5A6B85"/>
+                  <a:srgbClr val="7E9EC4"/>
                 </a:solidFill>
                 <a:latin typeface="微软雅黑"/>
                 <a:ea typeface="微软雅黑"/>
@@ -12022,7 +12418,7 @@
       </p:sp>
       <p:sp>
         <p:nvSpPr>
-          <p:cNvPr id="25" name="Rounded Rectangle 24"/>
+          <p:cNvPr id="26" name="Rounded Rectangle 25"/>
           <p:cNvSpPr/>
           <p:nvPr/>
         </p:nvSpPr>
@@ -12037,11 +12433,11 @@
             </a:avLst>
           </a:prstGeom>
           <a:solidFill>
-            <a:srgbClr val="F2F6FC"/>
+            <a:srgbClr val="08224A"/>
           </a:solidFill>
           <a:ln w="9525">
             <a:solidFill>
-              <a:srgbClr val="D6E2F0"/>
+              <a:srgbClr val="1A4272"/>
             </a:solidFill>
           </a:ln>
           <a:effectLst/>
@@ -12070,7 +12466,7 @@
       </p:sp>
       <p:sp>
         <p:nvSpPr>
-          <p:cNvPr id="26" name="TextBox 25"/>
+          <p:cNvPr id="27" name="TextBox 26"/>
           <p:cNvSpPr txBox="1"/>
           <p:nvPr/>
         </p:nvSpPr>
@@ -12098,7 +12494,7 @@
             <a:r>
               <a:rPr sz="1100" b="1" i="0">
                 <a:solidFill>
-                  <a:srgbClr val="1F2D3D"/>
+                  <a:srgbClr val="BBD4EC"/>
                 </a:solidFill>
                 <a:latin typeface="微软雅黑"/>
                 <a:ea typeface="微软雅黑"/>
@@ -12116,7 +12512,7 @@
             <a:r>
               <a:rPr sz="950" b="0" i="0">
                 <a:solidFill>
-                  <a:srgbClr val="5A6B85"/>
+                  <a:srgbClr val="7E9EC4"/>
                 </a:solidFill>
                 <a:latin typeface="微软雅黑"/>
                 <a:ea typeface="微软雅黑"/>
@@ -12129,7 +12525,7 @@
       </p:sp>
       <p:sp>
         <p:nvSpPr>
-          <p:cNvPr id="27" name="Rounded Rectangle 26"/>
+          <p:cNvPr id="28" name="Rounded Rectangle 27"/>
           <p:cNvSpPr/>
           <p:nvPr/>
         </p:nvSpPr>
@@ -12144,11 +12540,11 @@
             </a:avLst>
           </a:prstGeom>
           <a:solidFill>
-            <a:srgbClr val="F2F6FC"/>
+            <a:srgbClr val="08224A"/>
           </a:solidFill>
           <a:ln w="9525">
             <a:solidFill>
-              <a:srgbClr val="D6E2F0"/>
+              <a:srgbClr val="1A4272"/>
             </a:solidFill>
           </a:ln>
           <a:effectLst/>
@@ -12177,7 +12573,7 @@
       </p:sp>
       <p:sp>
         <p:nvSpPr>
-          <p:cNvPr id="28" name="TextBox 27"/>
+          <p:cNvPr id="29" name="TextBox 28"/>
           <p:cNvSpPr txBox="1"/>
           <p:nvPr/>
         </p:nvSpPr>
@@ -12205,7 +12601,7 @@
             <a:r>
               <a:rPr sz="1100" b="1" i="0">
                 <a:solidFill>
-                  <a:srgbClr val="1F2D3D"/>
+                  <a:srgbClr val="BBD4EC"/>
                 </a:solidFill>
                 <a:latin typeface="微软雅黑"/>
                 <a:ea typeface="微软雅黑"/>
@@ -12223,7 +12619,7 @@
             <a:r>
               <a:rPr sz="950" b="0" i="0">
                 <a:solidFill>
-                  <a:srgbClr val="5A6B85"/>
+                  <a:srgbClr val="7E9EC4"/>
                 </a:solidFill>
                 <a:latin typeface="微软雅黑"/>
                 <a:ea typeface="微软雅黑"/>
@@ -12254,138 +12650,23 @@
       <p:grpSpPr/>
       <p:sp>
         <p:nvSpPr>
-          <p:cNvPr id="2" name="TextBox 1"/>
-          <p:cNvSpPr txBox="1"/>
-          <p:nvPr/>
-        </p:nvSpPr>
-        <p:spPr>
-          <a:xfrm>
-            <a:off x="566928" y="329184"/>
-            <a:ext cx="11057839" cy="274320"/>
+          <p:cNvPr id="2" name="Rectangle 1"/>
+          <p:cNvSpPr/>
+          <p:nvPr/>
+        </p:nvSpPr>
+        <p:spPr>
+          <a:xfrm>
+            <a:off x="0" y="0"/>
+            <a:ext cx="12191695" cy="6858000"/>
           </a:xfrm>
           <a:prstGeom prst="rect">
             <a:avLst/>
           </a:prstGeom>
-          <a:noFill/>
-        </p:spPr>
-        <p:txBody>
-          <a:bodyPr wrap="square" anchor="t" lIns="0" rIns="0" tIns="0" bIns="0">
-            <a:spAutoFit/>
-          </a:bodyPr>
-          <a:lstStyle/>
-          <a:p>
-            <a:pPr algn="l"/>
-            <a:r>
-              <a:rPr sz="1150" b="1" i="0">
-                <a:solidFill>
-                  <a:srgbClr val="1E88E5"/>
-                </a:solidFill>
-                <a:latin typeface="微软雅黑"/>
-                <a:ea typeface="微软雅黑"/>
-                <a:cs typeface="微软雅黑"/>
-              </a:rPr>
-              <a:t>02 · 怎么做的</a:t>
-            </a:r>
-          </a:p>
-        </p:txBody>
-      </p:sp>
-      <p:sp>
-        <p:nvSpPr>
-          <p:cNvPr id="3" name="TextBox 2"/>
-          <p:cNvSpPr txBox="1"/>
-          <p:nvPr/>
-        </p:nvSpPr>
-        <p:spPr>
-          <a:xfrm>
-            <a:off x="566928" y="621792"/>
-            <a:ext cx="11057839" cy="640080"/>
-          </a:xfrm>
-          <a:prstGeom prst="rect">
-            <a:avLst/>
-          </a:prstGeom>
-          <a:noFill/>
-        </p:spPr>
-        <p:txBody>
-          <a:bodyPr wrap="square" anchor="t" lIns="0" rIns="0" tIns="0" bIns="0">
-            <a:spAutoFit/>
-          </a:bodyPr>
-          <a:lstStyle/>
-          <a:p>
-            <a:pPr algn="l"/>
-            <a:r>
-              <a:rPr sz="2700" b="1" i="0">
-                <a:solidFill>
-                  <a:srgbClr val="0B3B72"/>
-                </a:solidFill>
-                <a:latin typeface="微软雅黑"/>
-                <a:ea typeface="微软雅黑"/>
-                <a:cs typeface="微软雅黑"/>
-              </a:rPr>
-              <a:t>系统分四层，各管各的</a:t>
-            </a:r>
-          </a:p>
-        </p:txBody>
-      </p:sp>
-      <p:sp>
-        <p:nvSpPr>
-          <p:cNvPr id="4" name="TextBox 3"/>
-          <p:cNvSpPr txBox="1"/>
-          <p:nvPr/>
-        </p:nvSpPr>
-        <p:spPr>
-          <a:xfrm>
-            <a:off x="10161727" y="6382512"/>
-            <a:ext cx="1463040" cy="274320"/>
-          </a:xfrm>
-          <a:prstGeom prst="rect">
-            <a:avLst/>
-          </a:prstGeom>
-          <a:noFill/>
-        </p:spPr>
-        <p:txBody>
-          <a:bodyPr wrap="square" anchor="t" lIns="0" rIns="0" tIns="0" bIns="0">
-            <a:spAutoFit/>
-          </a:bodyPr>
-          <a:lstStyle/>
-          <a:p>
-            <a:pPr algn="r"/>
-            <a:r>
-              <a:rPr sz="1000" b="0" i="0">
-                <a:solidFill>
-                  <a:srgbClr val="5A6B85"/>
-                </a:solidFill>
-                <a:latin typeface="微软雅黑"/>
-                <a:ea typeface="微软雅黑"/>
-                <a:cs typeface="微软雅黑"/>
-              </a:rPr>
-              <a:t>急救绿道 · 8 / 13</a:t>
-            </a:r>
-          </a:p>
-        </p:txBody>
-      </p:sp>
-      <p:sp>
-        <p:nvSpPr>
-          <p:cNvPr id="5" name="Rounded Rectangle 4"/>
-          <p:cNvSpPr/>
-          <p:nvPr/>
-        </p:nvSpPr>
-        <p:spPr>
-          <a:xfrm>
-            <a:off x="566928" y="1389888"/>
-            <a:ext cx="1051560" cy="932688"/>
-          </a:xfrm>
-          <a:prstGeom prst="roundRect">
-            <a:avLst>
-              <a:gd name="adj" fmla="val 6000"/>
-            </a:avLst>
-          </a:prstGeom>
           <a:solidFill>
-            <a:srgbClr val="E8F1FB"/>
+            <a:srgbClr val="04122B"/>
           </a:solidFill>
-          <a:ln w="9525">
-            <a:solidFill>
-              <a:srgbClr val="D6E2F0"/>
-            </a:solidFill>
+          <a:ln>
+            <a:noFill/>
           </a:ln>
           <a:effectLst/>
         </p:spPr>
@@ -12413,14 +12694,14 @@
       </p:sp>
       <p:sp>
         <p:nvSpPr>
-          <p:cNvPr id="6" name="TextBox 5"/>
+          <p:cNvPr id="3" name="TextBox 2"/>
           <p:cNvSpPr txBox="1"/>
           <p:nvPr/>
         </p:nvSpPr>
         <p:spPr>
           <a:xfrm>
-            <a:off x="566928" y="1709928"/>
-            <a:ext cx="1051560" cy="310896"/>
+            <a:off x="566928" y="329184"/>
+            <a:ext cx="11057839" cy="274320"/>
           </a:xfrm>
           <a:prstGeom prst="rect">
             <a:avLst/>
@@ -12433,31 +12714,105 @@
           </a:bodyPr>
           <a:lstStyle/>
           <a:p>
-            <a:pPr algn="ctr"/>
-            <a:r>
-              <a:rPr sz="1200" b="1" i="0">
-                <a:solidFill>
-                  <a:srgbClr val="0B3B72"/>
-                </a:solidFill>
-                <a:latin typeface="微软雅黑"/>
-                <a:ea typeface="微软雅黑"/>
-                <a:cs typeface="微软雅黑"/>
-              </a:rPr>
-              <a:t>使用者</a:t>
-            </a:r>
-          </a:p>
-        </p:txBody>
-      </p:sp>
-      <p:sp>
-        <p:nvSpPr>
-          <p:cNvPr id="7" name="Rounded Rectangle 6"/>
+            <a:pPr algn="l"/>
+            <a:r>
+              <a:rPr sz="1150" b="1" i="0">
+                <a:solidFill>
+                  <a:srgbClr val="7FE3FF"/>
+                </a:solidFill>
+                <a:latin typeface="微软雅黑"/>
+                <a:ea typeface="微软雅黑"/>
+                <a:cs typeface="微软雅黑"/>
+              </a:rPr>
+              <a:t>02 · 怎么做的</a:t>
+            </a:r>
+          </a:p>
+        </p:txBody>
+      </p:sp>
+      <p:sp>
+        <p:nvSpPr>
+          <p:cNvPr id="4" name="TextBox 3"/>
+          <p:cNvSpPr txBox="1"/>
+          <p:nvPr/>
+        </p:nvSpPr>
+        <p:spPr>
+          <a:xfrm>
+            <a:off x="566928" y="621792"/>
+            <a:ext cx="11057839" cy="640080"/>
+          </a:xfrm>
+          <a:prstGeom prst="rect">
+            <a:avLst/>
+          </a:prstGeom>
+          <a:noFill/>
+        </p:spPr>
+        <p:txBody>
+          <a:bodyPr wrap="square" anchor="t" lIns="0" rIns="0" tIns="0" bIns="0">
+            <a:spAutoFit/>
+          </a:bodyPr>
+          <a:lstStyle/>
+          <a:p>
+            <a:pPr algn="l"/>
+            <a:r>
+              <a:rPr sz="2700" b="1" i="0">
+                <a:solidFill>
+                  <a:srgbClr val="ECF7FF"/>
+                </a:solidFill>
+                <a:latin typeface="微软雅黑"/>
+                <a:ea typeface="微软雅黑"/>
+                <a:cs typeface="微软雅黑"/>
+              </a:rPr>
+              <a:t>系统分四层，各管各的</a:t>
+            </a:r>
+          </a:p>
+        </p:txBody>
+      </p:sp>
+      <p:sp>
+        <p:nvSpPr>
+          <p:cNvPr id="5" name="TextBox 4"/>
+          <p:cNvSpPr txBox="1"/>
+          <p:nvPr/>
+        </p:nvSpPr>
+        <p:spPr>
+          <a:xfrm>
+            <a:off x="10161727" y="6382512"/>
+            <a:ext cx="1463040" cy="274320"/>
+          </a:xfrm>
+          <a:prstGeom prst="rect">
+            <a:avLst/>
+          </a:prstGeom>
+          <a:noFill/>
+        </p:spPr>
+        <p:txBody>
+          <a:bodyPr wrap="square" anchor="t" lIns="0" rIns="0" tIns="0" bIns="0">
+            <a:spAutoFit/>
+          </a:bodyPr>
+          <a:lstStyle/>
+          <a:p>
+            <a:pPr algn="r"/>
+            <a:r>
+              <a:rPr sz="1000" b="0" i="0">
+                <a:solidFill>
+                  <a:srgbClr val="7E9EC4"/>
+                </a:solidFill>
+                <a:latin typeface="微软雅黑"/>
+                <a:ea typeface="微软雅黑"/>
+                <a:cs typeface="微软雅黑"/>
+              </a:rPr>
+              <a:t>急救绿道 · 8 / 13</a:t>
+            </a:r>
+          </a:p>
+        </p:txBody>
+      </p:sp>
+      <p:sp>
+        <p:nvSpPr>
+          <p:cNvPr id="6" name="Rounded Rectangle 5"/>
           <p:cNvSpPr/>
           <p:nvPr/>
         </p:nvSpPr>
         <p:spPr>
           <a:xfrm>
-            <a:off x="1783080" y="1389888"/>
-            <a:ext cx="3183026" cy="932688"/>
+            <a:off x="566928" y="1389888"/>
+            <a:ext cx="1051560" cy="932688"/>
           </a:xfrm>
           <a:prstGeom prst="roundRect">
             <a:avLst>
@@ -12465,11 +12820,11 @@
             </a:avLst>
           </a:prstGeom>
           <a:solidFill>
-            <a:srgbClr val="FFFFFF"/>
+            <a:srgbClr val="061A38"/>
           </a:solidFill>
           <a:ln w="9525">
             <a:solidFill>
-              <a:srgbClr val="D6E2F0"/>
+              <a:srgbClr val="1A4272"/>
             </a:solidFill>
           </a:ln>
           <a:effectLst/>
@@ -12498,7 +12853,92 @@
       </p:sp>
       <p:sp>
         <p:nvSpPr>
-          <p:cNvPr id="8" name="TextBox 7"/>
+          <p:cNvPr id="7" name="TextBox 6"/>
+          <p:cNvSpPr txBox="1"/>
+          <p:nvPr/>
+        </p:nvSpPr>
+        <p:spPr>
+          <a:xfrm>
+            <a:off x="566928" y="1709928"/>
+            <a:ext cx="1051560" cy="310896"/>
+          </a:xfrm>
+          <a:prstGeom prst="rect">
+            <a:avLst/>
+          </a:prstGeom>
+          <a:noFill/>
+        </p:spPr>
+        <p:txBody>
+          <a:bodyPr wrap="square" anchor="t" lIns="0" rIns="0" tIns="0" bIns="0">
+            <a:spAutoFit/>
+          </a:bodyPr>
+          <a:lstStyle/>
+          <a:p>
+            <a:pPr algn="ctr"/>
+            <a:r>
+              <a:rPr sz="1200" b="1" i="0">
+                <a:solidFill>
+                  <a:srgbClr val="ECF7FF"/>
+                </a:solidFill>
+                <a:latin typeface="微软雅黑"/>
+                <a:ea typeface="微软雅黑"/>
+                <a:cs typeface="微软雅黑"/>
+              </a:rPr>
+              <a:t>使用者</a:t>
+            </a:r>
+          </a:p>
+        </p:txBody>
+      </p:sp>
+      <p:sp>
+        <p:nvSpPr>
+          <p:cNvPr id="8" name="Rounded Rectangle 7"/>
+          <p:cNvSpPr/>
+          <p:nvPr/>
+        </p:nvSpPr>
+        <p:spPr>
+          <a:xfrm>
+            <a:off x="1783080" y="1389888"/>
+            <a:ext cx="3183026" cy="932688"/>
+          </a:xfrm>
+          <a:prstGeom prst="roundRect">
+            <a:avLst>
+              <a:gd name="adj" fmla="val 6000"/>
+            </a:avLst>
+          </a:prstGeom>
+          <a:solidFill>
+            <a:srgbClr val="061A38"/>
+          </a:solidFill>
+          <a:ln w="9525">
+            <a:solidFill>
+              <a:srgbClr val="1A4272"/>
+            </a:solidFill>
+          </a:ln>
+          <a:effectLst/>
+        </p:spPr>
+        <p:style>
+          <a:lnRef idx="1">
+            <a:schemeClr val="accent1"/>
+          </a:lnRef>
+          <a:fillRef idx="3">
+            <a:schemeClr val="accent1"/>
+          </a:fillRef>
+          <a:effectRef idx="2">
+            <a:schemeClr val="accent1"/>
+          </a:effectRef>
+          <a:fontRef idx="minor">
+            <a:schemeClr val="lt1"/>
+          </a:fontRef>
+        </p:style>
+        <p:txBody>
+          <a:bodyPr rtlCol="0" anchor="ctr"/>
+          <a:lstStyle/>
+          <a:p>
+            <a:pPr algn="ctr"/>
+          </a:p>
+        </p:txBody>
+      </p:sp>
+      <p:sp>
+        <p:nvSpPr>
+          <p:cNvPr id="9" name="TextBox 8"/>
           <p:cNvSpPr txBox="1"/>
           <p:nvPr/>
         </p:nvSpPr>
@@ -12526,7 +12966,7 @@
             <a:r>
               <a:rPr sz="1500" b="0" i="0">
                 <a:solidFill>
-                  <a:srgbClr val="1F2D3D"/>
+                  <a:srgbClr val="BBD4EC"/>
                 </a:solidFill>
                 <a:latin typeface="微软雅黑"/>
                 <a:ea typeface="微软雅黑"/>
@@ -12544,7 +12984,7 @@
             <a:r>
               <a:rPr sz="1250" b="1" i="0">
                 <a:solidFill>
-                  <a:srgbClr val="1F2D3D"/>
+                  <a:srgbClr val="BBD4EC"/>
                 </a:solidFill>
                 <a:latin typeface="微软雅黑"/>
                 <a:ea typeface="微软雅黑"/>
@@ -12562,7 +13002,7 @@
             <a:r>
               <a:rPr sz="950" b="0" i="0">
                 <a:solidFill>
-                  <a:srgbClr val="5A6B85"/>
+                  <a:srgbClr val="7E9EC4"/>
                 </a:solidFill>
                 <a:latin typeface="微软雅黑"/>
                 <a:ea typeface="微软雅黑"/>
@@ -12575,7 +13015,7 @@
       </p:sp>
       <p:sp>
         <p:nvSpPr>
-          <p:cNvPr id="9" name="Rounded Rectangle 8"/>
+          <p:cNvPr id="10" name="Rounded Rectangle 9"/>
           <p:cNvSpPr/>
           <p:nvPr/>
         </p:nvSpPr>
@@ -12590,11 +13030,11 @@
             </a:avLst>
           </a:prstGeom>
           <a:solidFill>
-            <a:srgbClr val="FFFFFF"/>
+            <a:srgbClr val="061A38"/>
           </a:solidFill>
           <a:ln w="9525">
             <a:solidFill>
-              <a:srgbClr val="D6E2F0"/>
+              <a:srgbClr val="1A4272"/>
             </a:solidFill>
           </a:ln>
           <a:effectLst/>
@@ -12623,7 +13063,7 @@
       </p:sp>
       <p:sp>
         <p:nvSpPr>
-          <p:cNvPr id="10" name="TextBox 9"/>
+          <p:cNvPr id="11" name="TextBox 10"/>
           <p:cNvSpPr txBox="1"/>
           <p:nvPr/>
         </p:nvSpPr>
@@ -12651,7 +13091,7 @@
             <a:r>
               <a:rPr sz="1500" b="0" i="0">
                 <a:solidFill>
-                  <a:srgbClr val="1F2D3D"/>
+                  <a:srgbClr val="BBD4EC"/>
                 </a:solidFill>
                 <a:latin typeface="微软雅黑"/>
                 <a:ea typeface="微软雅黑"/>
@@ -12669,7 +13109,7 @@
             <a:r>
               <a:rPr sz="1250" b="1" i="0">
                 <a:solidFill>
-                  <a:srgbClr val="1F2D3D"/>
+                  <a:srgbClr val="BBD4EC"/>
                 </a:solidFill>
                 <a:latin typeface="微软雅黑"/>
                 <a:ea typeface="微软雅黑"/>
@@ -12687,7 +13127,7 @@
             <a:r>
               <a:rPr sz="950" b="0" i="0">
                 <a:solidFill>
-                  <a:srgbClr val="5A6B85"/>
+                  <a:srgbClr val="7E9EC4"/>
                 </a:solidFill>
                 <a:latin typeface="微软雅黑"/>
                 <a:ea typeface="微软雅黑"/>
@@ -12700,7 +13140,7 @@
       </p:sp>
       <p:sp>
         <p:nvSpPr>
-          <p:cNvPr id="11" name="Rounded Rectangle 10"/>
+          <p:cNvPr id="12" name="Rounded Rectangle 11"/>
           <p:cNvSpPr/>
           <p:nvPr/>
         </p:nvSpPr>
@@ -12715,11 +13155,11 @@
             </a:avLst>
           </a:prstGeom>
           <a:solidFill>
-            <a:srgbClr val="FFFFFF"/>
+            <a:srgbClr val="061A38"/>
           </a:solidFill>
           <a:ln w="9525">
             <a:solidFill>
-              <a:srgbClr val="D6E2F0"/>
+              <a:srgbClr val="1A4272"/>
             </a:solidFill>
           </a:ln>
           <a:effectLst/>
@@ -12748,7 +13188,7 @@
       </p:sp>
       <p:sp>
         <p:nvSpPr>
-          <p:cNvPr id="12" name="TextBox 11"/>
+          <p:cNvPr id="13" name="TextBox 12"/>
           <p:cNvSpPr txBox="1"/>
           <p:nvPr/>
         </p:nvSpPr>
@@ -12776,7 +13216,7 @@
             <a:r>
               <a:rPr sz="1500" b="0" i="0">
                 <a:solidFill>
-                  <a:srgbClr val="1F2D3D"/>
+                  <a:srgbClr val="BBD4EC"/>
                 </a:solidFill>
                 <a:latin typeface="微软雅黑"/>
                 <a:ea typeface="微软雅黑"/>
@@ -12794,7 +13234,7 @@
             <a:r>
               <a:rPr sz="1250" b="1" i="0">
                 <a:solidFill>
-                  <a:srgbClr val="1F2D3D"/>
+                  <a:srgbClr val="BBD4EC"/>
                 </a:solidFill>
                 <a:latin typeface="微软雅黑"/>
                 <a:ea typeface="微软雅黑"/>
@@ -12812,7 +13252,7 @@
             <a:r>
               <a:rPr sz="950" b="0" i="0">
                 <a:solidFill>
-                  <a:srgbClr val="5A6B85"/>
+                  <a:srgbClr val="7E9EC4"/>
                 </a:solidFill>
                 <a:latin typeface="微软雅黑"/>
                 <a:ea typeface="微软雅黑"/>
@@ -12825,7 +13265,7 @@
       </p:sp>
       <p:sp>
         <p:nvSpPr>
-          <p:cNvPr id="13" name="Rounded Rectangle 12"/>
+          <p:cNvPr id="14" name="Rounded Rectangle 13"/>
           <p:cNvSpPr/>
           <p:nvPr/>
         </p:nvSpPr>
@@ -12840,11 +13280,11 @@
             </a:avLst>
           </a:prstGeom>
           <a:solidFill>
-            <a:srgbClr val="E8F1FB"/>
+            <a:srgbClr val="061A38"/>
           </a:solidFill>
           <a:ln w="9525">
             <a:solidFill>
-              <a:srgbClr val="D6E2F0"/>
+              <a:srgbClr val="1A4272"/>
             </a:solidFill>
           </a:ln>
           <a:effectLst/>
@@ -12873,7 +13313,7 @@
       </p:sp>
       <p:sp>
         <p:nvSpPr>
-          <p:cNvPr id="14" name="TextBox 13"/>
+          <p:cNvPr id="15" name="TextBox 14"/>
           <p:cNvSpPr txBox="1"/>
           <p:nvPr/>
         </p:nvSpPr>
@@ -12897,7 +13337,7 @@
             <a:r>
               <a:rPr sz="1200" b="1" i="0">
                 <a:solidFill>
-                  <a:srgbClr val="0B3B72"/>
+                  <a:srgbClr val="ECF7FF"/>
                 </a:solidFill>
                 <a:latin typeface="微软雅黑"/>
                 <a:ea typeface="微软雅黑"/>
@@ -12910,7 +13350,7 @@
       </p:sp>
       <p:sp>
         <p:nvSpPr>
-          <p:cNvPr id="15" name="Rounded Rectangle 14"/>
+          <p:cNvPr id="16" name="Rounded Rectangle 15"/>
           <p:cNvSpPr/>
           <p:nvPr/>
         </p:nvSpPr>
@@ -12925,11 +13365,11 @@
             </a:avLst>
           </a:prstGeom>
           <a:solidFill>
-            <a:srgbClr val="FFFFFF"/>
+            <a:srgbClr val="061A38"/>
           </a:solidFill>
           <a:ln w="9525">
             <a:solidFill>
-              <a:srgbClr val="D6E2F0"/>
+              <a:srgbClr val="1A4272"/>
             </a:solidFill>
           </a:ln>
           <a:effectLst/>
@@ -12958,7 +13398,7 @@
       </p:sp>
       <p:sp>
         <p:nvSpPr>
-          <p:cNvPr id="16" name="Rectangle 15"/>
+          <p:cNvPr id="17" name="Rectangle 16"/>
           <p:cNvSpPr/>
           <p:nvPr/>
         </p:nvSpPr>
@@ -12971,7 +13411,7 @@
             <a:avLst/>
           </a:prstGeom>
           <a:solidFill>
-            <a:srgbClr val="1E88E5"/>
+            <a:srgbClr val="7FE3FF"/>
           </a:solidFill>
           <a:ln>
             <a:noFill/>
@@ -13002,7 +13442,7 @@
       </p:sp>
       <p:sp>
         <p:nvSpPr>
-          <p:cNvPr id="17" name="TextBox 16"/>
+          <p:cNvPr id="18" name="TextBox 17"/>
           <p:cNvSpPr txBox="1"/>
           <p:nvPr/>
         </p:nvSpPr>
@@ -13030,7 +13470,7 @@
             <a:r>
               <a:rPr sz="1500" b="0" i="0">
                 <a:solidFill>
-                  <a:srgbClr val="1F2D3D"/>
+                  <a:srgbClr val="BBD4EC"/>
                 </a:solidFill>
                 <a:latin typeface="微软雅黑"/>
                 <a:ea typeface="微软雅黑"/>
@@ -13048,7 +13488,7 @@
             <a:r>
               <a:rPr sz="1250" b="1" i="0">
                 <a:solidFill>
-                  <a:srgbClr val="1F2D3D"/>
+                  <a:srgbClr val="BBD4EC"/>
                 </a:solidFill>
                 <a:latin typeface="微软雅黑"/>
                 <a:ea typeface="微软雅黑"/>
@@ -13066,7 +13506,7 @@
             <a:r>
               <a:rPr sz="950" b="0" i="0">
                 <a:solidFill>
-                  <a:srgbClr val="5A6B85"/>
+                  <a:srgbClr val="7E9EC4"/>
                 </a:solidFill>
                 <a:latin typeface="微软雅黑"/>
                 <a:ea typeface="微软雅黑"/>
@@ -13079,7 +13519,7 @@
       </p:sp>
       <p:sp>
         <p:nvSpPr>
-          <p:cNvPr id="18" name="Rounded Rectangle 17"/>
+          <p:cNvPr id="19" name="Rounded Rectangle 18"/>
           <p:cNvSpPr/>
           <p:nvPr/>
         </p:nvSpPr>
@@ -13094,11 +13534,11 @@
             </a:avLst>
           </a:prstGeom>
           <a:solidFill>
-            <a:srgbClr val="FFFFFF"/>
+            <a:srgbClr val="061A38"/>
           </a:solidFill>
           <a:ln w="9525">
             <a:solidFill>
-              <a:srgbClr val="D6E2F0"/>
+              <a:srgbClr val="1A4272"/>
             </a:solidFill>
           </a:ln>
           <a:effectLst/>
@@ -13127,7 +13567,7 @@
       </p:sp>
       <p:sp>
         <p:nvSpPr>
-          <p:cNvPr id="19" name="Rectangle 18"/>
+          <p:cNvPr id="20" name="Rectangle 19"/>
           <p:cNvSpPr/>
           <p:nvPr/>
         </p:nvSpPr>
@@ -13140,7 +13580,7 @@
             <a:avLst/>
           </a:prstGeom>
           <a:solidFill>
-            <a:srgbClr val="1E88E5"/>
+            <a:srgbClr val="7FE3FF"/>
           </a:solidFill>
           <a:ln>
             <a:noFill/>
@@ -13171,7 +13611,7 @@
       </p:sp>
       <p:sp>
         <p:nvSpPr>
-          <p:cNvPr id="20" name="TextBox 19"/>
+          <p:cNvPr id="21" name="TextBox 20"/>
           <p:cNvSpPr txBox="1"/>
           <p:nvPr/>
         </p:nvSpPr>
@@ -13199,7 +13639,7 @@
             <a:r>
               <a:rPr sz="1500" b="0" i="0">
                 <a:solidFill>
-                  <a:srgbClr val="1F2D3D"/>
+                  <a:srgbClr val="BBD4EC"/>
                 </a:solidFill>
                 <a:latin typeface="微软雅黑"/>
                 <a:ea typeface="微软雅黑"/>
@@ -13217,7 +13657,7 @@
             <a:r>
               <a:rPr sz="1250" b="1" i="0">
                 <a:solidFill>
-                  <a:srgbClr val="1F2D3D"/>
+                  <a:srgbClr val="BBD4EC"/>
                 </a:solidFill>
                 <a:latin typeface="微软雅黑"/>
                 <a:ea typeface="微软雅黑"/>
@@ -13235,7 +13675,7 @@
             <a:r>
               <a:rPr sz="950" b="0" i="0">
                 <a:solidFill>
-                  <a:srgbClr val="5A6B85"/>
+                  <a:srgbClr val="7E9EC4"/>
                 </a:solidFill>
                 <a:latin typeface="微软雅黑"/>
                 <a:ea typeface="微软雅黑"/>
@@ -13248,7 +13688,7 @@
       </p:sp>
       <p:sp>
         <p:nvSpPr>
-          <p:cNvPr id="21" name="Rounded Rectangle 20"/>
+          <p:cNvPr id="22" name="Rounded Rectangle 21"/>
           <p:cNvSpPr/>
           <p:nvPr/>
         </p:nvSpPr>
@@ -13263,11 +13703,11 @@
             </a:avLst>
           </a:prstGeom>
           <a:solidFill>
-            <a:srgbClr val="E8F1FB"/>
+            <a:srgbClr val="061A38"/>
           </a:solidFill>
           <a:ln w="9525">
             <a:solidFill>
-              <a:srgbClr val="D6E2F0"/>
+              <a:srgbClr val="1A4272"/>
             </a:solidFill>
           </a:ln>
           <a:effectLst/>
@@ -13296,7 +13736,7 @@
       </p:sp>
       <p:sp>
         <p:nvSpPr>
-          <p:cNvPr id="22" name="TextBox 21"/>
+          <p:cNvPr id="23" name="TextBox 22"/>
           <p:cNvSpPr txBox="1"/>
           <p:nvPr/>
         </p:nvSpPr>
@@ -13320,7 +13760,7 @@
             <a:r>
               <a:rPr sz="1200" b="1" i="0">
                 <a:solidFill>
-                  <a:srgbClr val="0B3B72"/>
+                  <a:srgbClr val="ECF7FF"/>
                 </a:solidFill>
                 <a:latin typeface="微软雅黑"/>
                 <a:ea typeface="微软雅黑"/>
@@ -13333,7 +13773,7 @@
       </p:sp>
       <p:sp>
         <p:nvSpPr>
-          <p:cNvPr id="23" name="Rounded Rectangle 22"/>
+          <p:cNvPr id="24" name="Rounded Rectangle 23"/>
           <p:cNvSpPr/>
           <p:nvPr/>
         </p:nvSpPr>
@@ -13348,11 +13788,11 @@
             </a:avLst>
           </a:prstGeom>
           <a:solidFill>
-            <a:srgbClr val="FFFFFF"/>
+            <a:srgbClr val="061A38"/>
           </a:solidFill>
           <a:ln w="9525">
             <a:solidFill>
-              <a:srgbClr val="D6E2F0"/>
+              <a:srgbClr val="1A4272"/>
             </a:solidFill>
           </a:ln>
           <a:effectLst/>
@@ -13381,7 +13821,7 @@
       </p:sp>
       <p:sp>
         <p:nvSpPr>
-          <p:cNvPr id="24" name="Rectangle 23"/>
+          <p:cNvPr id="25" name="Rectangle 24"/>
           <p:cNvSpPr/>
           <p:nvPr/>
         </p:nvSpPr>
@@ -13394,7 +13834,7 @@
             <a:avLst/>
           </a:prstGeom>
           <a:solidFill>
-            <a:srgbClr val="1E88E5"/>
+            <a:srgbClr val="7FE3FF"/>
           </a:solidFill>
           <a:ln>
             <a:noFill/>
@@ -13425,7 +13865,7 @@
       </p:sp>
       <p:sp>
         <p:nvSpPr>
-          <p:cNvPr id="25" name="TextBox 24"/>
+          <p:cNvPr id="26" name="TextBox 25"/>
           <p:cNvSpPr txBox="1"/>
           <p:nvPr/>
         </p:nvSpPr>
@@ -13453,7 +13893,7 @@
             <a:r>
               <a:rPr sz="1250" b="1" i="0">
                 <a:solidFill>
-                  <a:srgbClr val="1F2D3D"/>
+                  <a:srgbClr val="BBD4EC"/>
                 </a:solidFill>
                 <a:latin typeface="微软雅黑"/>
                 <a:ea typeface="微软雅黑"/>
@@ -13471,7 +13911,7 @@
             <a:r>
               <a:rPr sz="950" b="0" i="0">
                 <a:solidFill>
-                  <a:srgbClr val="5A6B85"/>
+                  <a:srgbClr val="7E9EC4"/>
                 </a:solidFill>
                 <a:latin typeface="微软雅黑"/>
                 <a:ea typeface="微软雅黑"/>
@@ -13484,7 +13924,7 @@
       </p:sp>
       <p:sp>
         <p:nvSpPr>
-          <p:cNvPr id="26" name="Rounded Rectangle 25"/>
+          <p:cNvPr id="27" name="Rounded Rectangle 26"/>
           <p:cNvSpPr/>
           <p:nvPr/>
         </p:nvSpPr>
@@ -13499,11 +13939,11 @@
             </a:avLst>
           </a:prstGeom>
           <a:solidFill>
-            <a:srgbClr val="FFFFFF"/>
+            <a:srgbClr val="061A38"/>
           </a:solidFill>
           <a:ln w="9525">
             <a:solidFill>
-              <a:srgbClr val="D6E2F0"/>
+              <a:srgbClr val="1A4272"/>
             </a:solidFill>
           </a:ln>
           <a:effectLst/>
@@ -13532,7 +13972,7 @@
       </p:sp>
       <p:sp>
         <p:nvSpPr>
-          <p:cNvPr id="27" name="Rectangle 26"/>
+          <p:cNvPr id="28" name="Rectangle 27"/>
           <p:cNvSpPr/>
           <p:nvPr/>
         </p:nvSpPr>
@@ -13545,7 +13985,7 @@
             <a:avLst/>
           </a:prstGeom>
           <a:solidFill>
-            <a:srgbClr val="1E88E5"/>
+            <a:srgbClr val="7FE3FF"/>
           </a:solidFill>
           <a:ln>
             <a:noFill/>
@@ -13576,7 +14016,7 @@
       </p:sp>
       <p:sp>
         <p:nvSpPr>
-          <p:cNvPr id="28" name="TextBox 27"/>
+          <p:cNvPr id="29" name="TextBox 28"/>
           <p:cNvSpPr txBox="1"/>
           <p:nvPr/>
         </p:nvSpPr>
@@ -13604,7 +14044,7 @@
             <a:r>
               <a:rPr sz="1250" b="1" i="0">
                 <a:solidFill>
-                  <a:srgbClr val="1F2D3D"/>
+                  <a:srgbClr val="BBD4EC"/>
                 </a:solidFill>
                 <a:latin typeface="微软雅黑"/>
                 <a:ea typeface="微软雅黑"/>
@@ -13622,7 +14062,7 @@
             <a:r>
               <a:rPr sz="950" b="0" i="0">
                 <a:solidFill>
-                  <a:srgbClr val="5A6B85"/>
+                  <a:srgbClr val="7E9EC4"/>
                 </a:solidFill>
                 <a:latin typeface="微软雅黑"/>
                 <a:ea typeface="微软雅黑"/>
@@ -13635,7 +14075,7 @@
       </p:sp>
       <p:sp>
         <p:nvSpPr>
-          <p:cNvPr id="29" name="Rounded Rectangle 28"/>
+          <p:cNvPr id="30" name="Rounded Rectangle 29"/>
           <p:cNvSpPr/>
           <p:nvPr/>
         </p:nvSpPr>
@@ -13650,11 +14090,11 @@
             </a:avLst>
           </a:prstGeom>
           <a:solidFill>
-            <a:srgbClr val="FFFFFF"/>
+            <a:srgbClr val="061A38"/>
           </a:solidFill>
           <a:ln w="9525">
             <a:solidFill>
-              <a:srgbClr val="D6E2F0"/>
+              <a:srgbClr val="1A4272"/>
             </a:solidFill>
           </a:ln>
           <a:effectLst/>
@@ -13683,7 +14123,7 @@
       </p:sp>
       <p:sp>
         <p:nvSpPr>
-          <p:cNvPr id="30" name="Rectangle 29"/>
+          <p:cNvPr id="31" name="Rectangle 30"/>
           <p:cNvSpPr/>
           <p:nvPr/>
         </p:nvSpPr>
@@ -13696,7 +14136,7 @@
             <a:avLst/>
           </a:prstGeom>
           <a:solidFill>
-            <a:srgbClr val="1E88E5"/>
+            <a:srgbClr val="7FE3FF"/>
           </a:solidFill>
           <a:ln>
             <a:noFill/>
@@ -13727,7 +14167,7 @@
       </p:sp>
       <p:sp>
         <p:nvSpPr>
-          <p:cNvPr id="31" name="TextBox 30"/>
+          <p:cNvPr id="32" name="TextBox 31"/>
           <p:cNvSpPr txBox="1"/>
           <p:nvPr/>
         </p:nvSpPr>
@@ -13755,7 +14195,7 @@
             <a:r>
               <a:rPr sz="1250" b="1" i="0">
                 <a:solidFill>
-                  <a:srgbClr val="1F2D3D"/>
+                  <a:srgbClr val="BBD4EC"/>
                 </a:solidFill>
                 <a:latin typeface="微软雅黑"/>
                 <a:ea typeface="微软雅黑"/>
@@ -13773,7 +14213,7 @@
             <a:r>
               <a:rPr sz="950" b="0" i="0">
                 <a:solidFill>
-                  <a:srgbClr val="5A6B85"/>
+                  <a:srgbClr val="7E9EC4"/>
                 </a:solidFill>
                 <a:latin typeface="微软雅黑"/>
                 <a:ea typeface="微软雅黑"/>
@@ -13786,7 +14226,7 @@
       </p:sp>
       <p:sp>
         <p:nvSpPr>
-          <p:cNvPr id="32" name="Rounded Rectangle 31"/>
+          <p:cNvPr id="33" name="Rounded Rectangle 32"/>
           <p:cNvSpPr/>
           <p:nvPr/>
         </p:nvSpPr>
@@ -13801,11 +14241,11 @@
             </a:avLst>
           </a:prstGeom>
           <a:solidFill>
-            <a:srgbClr val="E8F1FB"/>
+            <a:srgbClr val="061A38"/>
           </a:solidFill>
           <a:ln w="9525">
             <a:solidFill>
-              <a:srgbClr val="D6E2F0"/>
+              <a:srgbClr val="1A4272"/>
             </a:solidFill>
           </a:ln>
           <a:effectLst/>
@@ -13834,7 +14274,7 @@
       </p:sp>
       <p:sp>
         <p:nvSpPr>
-          <p:cNvPr id="33" name="TextBox 32"/>
+          <p:cNvPr id="34" name="TextBox 33"/>
           <p:cNvSpPr txBox="1"/>
           <p:nvPr/>
         </p:nvSpPr>
@@ -13858,7 +14298,7 @@
             <a:r>
               <a:rPr sz="1200" b="1" i="0">
                 <a:solidFill>
-                  <a:srgbClr val="0B3B72"/>
+                  <a:srgbClr val="ECF7FF"/>
                 </a:solidFill>
                 <a:latin typeface="微软雅黑"/>
                 <a:ea typeface="微软雅黑"/>
@@ -13871,7 +14311,7 @@
       </p:sp>
       <p:sp>
         <p:nvSpPr>
-          <p:cNvPr id="34" name="Rounded Rectangle 33"/>
+          <p:cNvPr id="35" name="Rounded Rectangle 34"/>
           <p:cNvSpPr/>
           <p:nvPr/>
         </p:nvSpPr>
@@ -13886,11 +14326,11 @@
             </a:avLst>
           </a:prstGeom>
           <a:solidFill>
-            <a:srgbClr val="FFFFFF"/>
+            <a:srgbClr val="061A38"/>
           </a:solidFill>
           <a:ln w="9525">
             <a:solidFill>
-              <a:srgbClr val="D6E2F0"/>
+              <a:srgbClr val="1A4272"/>
             </a:solidFill>
           </a:ln>
           <a:effectLst/>
@@ -13919,7 +14359,7 @@
       </p:sp>
       <p:sp>
         <p:nvSpPr>
-          <p:cNvPr id="35" name="TextBox 34"/>
+          <p:cNvPr id="36" name="TextBox 35"/>
           <p:cNvSpPr txBox="1"/>
           <p:nvPr/>
         </p:nvSpPr>
@@ -13947,7 +14387,7 @@
             <a:r>
               <a:rPr sz="1250" b="1" i="0">
                 <a:solidFill>
-                  <a:srgbClr val="1F2D3D"/>
+                  <a:srgbClr val="BBD4EC"/>
                 </a:solidFill>
                 <a:latin typeface="微软雅黑"/>
                 <a:ea typeface="微软雅黑"/>
@@ -13965,7 +14405,7 @@
             <a:r>
               <a:rPr sz="950" b="0" i="0">
                 <a:solidFill>
-                  <a:srgbClr val="5A6B85"/>
+                  <a:srgbClr val="7E9EC4"/>
                 </a:solidFill>
                 <a:latin typeface="微软雅黑"/>
                 <a:ea typeface="微软雅黑"/>
@@ -13978,7 +14418,7 @@
       </p:sp>
       <p:sp>
         <p:nvSpPr>
-          <p:cNvPr id="36" name="Rounded Rectangle 35"/>
+          <p:cNvPr id="37" name="Rounded Rectangle 36"/>
           <p:cNvSpPr/>
           <p:nvPr/>
         </p:nvSpPr>
@@ -13993,11 +14433,11 @@
             </a:avLst>
           </a:prstGeom>
           <a:solidFill>
-            <a:srgbClr val="FFFFFF"/>
+            <a:srgbClr val="061A38"/>
           </a:solidFill>
           <a:ln w="9525">
             <a:solidFill>
-              <a:srgbClr val="D6E2F0"/>
+              <a:srgbClr val="1A4272"/>
             </a:solidFill>
           </a:ln>
           <a:effectLst/>
@@ -14026,7 +14466,7 @@
       </p:sp>
       <p:sp>
         <p:nvSpPr>
-          <p:cNvPr id="37" name="TextBox 36"/>
+          <p:cNvPr id="38" name="TextBox 37"/>
           <p:cNvSpPr txBox="1"/>
           <p:nvPr/>
         </p:nvSpPr>
@@ -14054,7 +14494,7 @@
             <a:r>
               <a:rPr sz="1250" b="1" i="0">
                 <a:solidFill>
-                  <a:srgbClr val="1F2D3D"/>
+                  <a:srgbClr val="BBD4EC"/>
                 </a:solidFill>
                 <a:latin typeface="微软雅黑"/>
                 <a:ea typeface="微软雅黑"/>
@@ -14072,7 +14512,7 @@
             <a:r>
               <a:rPr sz="950" b="0" i="0">
                 <a:solidFill>
-                  <a:srgbClr val="5A6B85"/>
+                  <a:srgbClr val="7E9EC4"/>
                 </a:solidFill>
                 <a:latin typeface="微软雅黑"/>
                 <a:ea typeface="微软雅黑"/>
@@ -14085,7 +14525,7 @@
       </p:sp>
       <p:sp>
         <p:nvSpPr>
-          <p:cNvPr id="38" name="Rounded Rectangle 37"/>
+          <p:cNvPr id="39" name="Rounded Rectangle 38"/>
           <p:cNvSpPr/>
           <p:nvPr/>
         </p:nvSpPr>
@@ -14100,11 +14540,11 @@
             </a:avLst>
           </a:prstGeom>
           <a:solidFill>
-            <a:srgbClr val="F2F6FC"/>
+            <a:srgbClr val="08224A"/>
           </a:solidFill>
           <a:ln w="9525">
             <a:solidFill>
-              <a:srgbClr val="D6E2F0"/>
+              <a:srgbClr val="1A4272"/>
             </a:solidFill>
           </a:ln>
           <a:effectLst/>
@@ -14133,7 +14573,7 @@
       </p:sp>
       <p:sp>
         <p:nvSpPr>
-          <p:cNvPr id="39" name="TextBox 38"/>
+          <p:cNvPr id="40" name="TextBox 39"/>
           <p:cNvSpPr txBox="1"/>
           <p:nvPr/>
         </p:nvSpPr>
@@ -14161,7 +14601,7 @@
             <a:r>
               <a:rPr sz="1100" b="1" i="0">
                 <a:solidFill>
-                  <a:srgbClr val="146CC0"/>
+                  <a:srgbClr val="5CC8FF"/>
                 </a:solidFill>
                 <a:latin typeface="微软雅黑"/>
                 <a:ea typeface="微软雅黑"/>
@@ -14175,7 +14615,7 @@
             <a:r>
               <a:rPr sz="950" b="0" i="0">
                 <a:solidFill>
-                  <a:srgbClr val="5A6B85"/>
+                  <a:srgbClr val="7E9EC4"/>
                 </a:solidFill>
                 <a:latin typeface="微软雅黑"/>
                 <a:ea typeface="微软雅黑"/>
@@ -14188,7 +14628,7 @@
       </p:sp>
       <p:sp>
         <p:nvSpPr>
-          <p:cNvPr id="40" name="Rounded Rectangle 39"/>
+          <p:cNvPr id="41" name="Rounded Rectangle 40"/>
           <p:cNvSpPr/>
           <p:nvPr/>
         </p:nvSpPr>
@@ -14203,11 +14643,11 @@
             </a:avLst>
           </a:prstGeom>
           <a:solidFill>
-            <a:srgbClr val="F2F6FC"/>
+            <a:srgbClr val="08224A"/>
           </a:solidFill>
           <a:ln w="9525">
             <a:solidFill>
-              <a:srgbClr val="D6E2F0"/>
+              <a:srgbClr val="1A4272"/>
             </a:solidFill>
           </a:ln>
           <a:effectLst/>
@@ -14236,7 +14676,7 @@
       </p:sp>
       <p:sp>
         <p:nvSpPr>
-          <p:cNvPr id="41" name="TextBox 40"/>
+          <p:cNvPr id="42" name="TextBox 41"/>
           <p:cNvSpPr txBox="1"/>
           <p:nvPr/>
         </p:nvSpPr>
@@ -14264,7 +14704,7 @@
             <a:r>
               <a:rPr sz="1100" b="1" i="0">
                 <a:solidFill>
-                  <a:srgbClr val="146CC0"/>
+                  <a:srgbClr val="5CC8FF"/>
                 </a:solidFill>
                 <a:latin typeface="微软雅黑"/>
                 <a:ea typeface="微软雅黑"/>
@@ -14278,7 +14718,7 @@
             <a:r>
               <a:rPr sz="950" b="0" i="0">
                 <a:solidFill>
-                  <a:srgbClr val="5A6B85"/>
+                  <a:srgbClr val="7E9EC4"/>
                 </a:solidFill>
                 <a:latin typeface="微软雅黑"/>
                 <a:ea typeface="微软雅黑"/>
@@ -14291,7 +14731,7 @@
       </p:sp>
       <p:sp>
         <p:nvSpPr>
-          <p:cNvPr id="42" name="Rounded Rectangle 41"/>
+          <p:cNvPr id="43" name="Rounded Rectangle 42"/>
           <p:cNvSpPr/>
           <p:nvPr/>
         </p:nvSpPr>
@@ -14306,11 +14746,11 @@
             </a:avLst>
           </a:prstGeom>
           <a:solidFill>
-            <a:srgbClr val="F2F6FC"/>
+            <a:srgbClr val="08224A"/>
           </a:solidFill>
           <a:ln w="9525">
             <a:solidFill>
-              <a:srgbClr val="D6E2F0"/>
+              <a:srgbClr val="1A4272"/>
             </a:solidFill>
           </a:ln>
           <a:effectLst/>
@@ -14339,7 +14779,7 @@
       </p:sp>
       <p:sp>
         <p:nvSpPr>
-          <p:cNvPr id="43" name="TextBox 42"/>
+          <p:cNvPr id="44" name="TextBox 43"/>
           <p:cNvSpPr txBox="1"/>
           <p:nvPr/>
         </p:nvSpPr>
@@ -14367,7 +14807,7 @@
             <a:r>
               <a:rPr sz="1100" b="1" i="0">
                 <a:solidFill>
-                  <a:srgbClr val="146CC0"/>
+                  <a:srgbClr val="5CC8FF"/>
                 </a:solidFill>
                 <a:latin typeface="微软雅黑"/>
                 <a:ea typeface="微软雅黑"/>
@@ -14381,7 +14821,7 @@
             <a:r>
               <a:rPr sz="950" b="0" i="0">
                 <a:solidFill>
-                  <a:srgbClr val="5A6B85"/>
+                  <a:srgbClr val="7E9EC4"/>
                 </a:solidFill>
                 <a:latin typeface="微软雅黑"/>
                 <a:ea typeface="微软雅黑"/>
@@ -14412,197 +14852,23 @@
       <p:grpSpPr/>
       <p:sp>
         <p:nvSpPr>
-          <p:cNvPr id="2" name="TextBox 1"/>
-          <p:cNvSpPr txBox="1"/>
-          <p:nvPr/>
-        </p:nvSpPr>
-        <p:spPr>
-          <a:xfrm>
-            <a:off x="566928" y="329184"/>
-            <a:ext cx="11057839" cy="274320"/>
+          <p:cNvPr id="2" name="Rectangle 1"/>
+          <p:cNvSpPr/>
+          <p:nvPr/>
+        </p:nvSpPr>
+        <p:spPr>
+          <a:xfrm>
+            <a:off x="0" y="0"/>
+            <a:ext cx="12191695" cy="6858000"/>
           </a:xfrm>
           <a:prstGeom prst="rect">
             <a:avLst/>
           </a:prstGeom>
-          <a:noFill/>
-        </p:spPr>
-        <p:txBody>
-          <a:bodyPr wrap="square" anchor="t" lIns="0" rIns="0" tIns="0" bIns="0">
-            <a:spAutoFit/>
-          </a:bodyPr>
-          <a:lstStyle/>
-          <a:p>
-            <a:pPr algn="l"/>
-            <a:r>
-              <a:rPr sz="1150" b="1" i="0">
-                <a:solidFill>
-                  <a:srgbClr val="1E88E5"/>
-                </a:solidFill>
-                <a:latin typeface="微软雅黑"/>
-                <a:ea typeface="微软雅黑"/>
-                <a:cs typeface="微软雅黑"/>
-              </a:rPr>
-              <a:t>02 · 怎么做的</a:t>
-            </a:r>
-          </a:p>
-        </p:txBody>
-      </p:sp>
-      <p:sp>
-        <p:nvSpPr>
-          <p:cNvPr id="3" name="TextBox 2"/>
-          <p:cNvSpPr txBox="1"/>
-          <p:nvPr/>
-        </p:nvSpPr>
-        <p:spPr>
-          <a:xfrm>
-            <a:off x="566928" y="621792"/>
-            <a:ext cx="11057839" cy="640080"/>
-          </a:xfrm>
-          <a:prstGeom prst="rect">
-            <a:avLst/>
-          </a:prstGeom>
-          <a:noFill/>
-        </p:spPr>
-        <p:txBody>
-          <a:bodyPr wrap="square" anchor="t" lIns="0" rIns="0" tIns="0" bIns="0">
-            <a:spAutoFit/>
-          </a:bodyPr>
-          <a:lstStyle/>
-          <a:p>
-            <a:pPr algn="l"/>
-            <a:r>
-              <a:rPr sz="2700" b="1" i="0">
-                <a:solidFill>
-                  <a:srgbClr val="0B3B72"/>
-                </a:solidFill>
-                <a:latin typeface="微软雅黑"/>
-                <a:ea typeface="微软雅黑"/>
-                <a:cs typeface="微软雅黑"/>
-              </a:rPr>
-              <a:t>「随时能打开」是怎么做到的</a:t>
-            </a:r>
-          </a:p>
-        </p:txBody>
-      </p:sp>
-      <p:sp>
-        <p:nvSpPr>
-          <p:cNvPr id="4" name="TextBox 3"/>
-          <p:cNvSpPr txBox="1"/>
-          <p:nvPr/>
-        </p:nvSpPr>
-        <p:spPr>
-          <a:xfrm>
-            <a:off x="10161727" y="6382512"/>
-            <a:ext cx="1463040" cy="274320"/>
-          </a:xfrm>
-          <a:prstGeom prst="rect">
-            <a:avLst/>
-          </a:prstGeom>
-          <a:noFill/>
-        </p:spPr>
-        <p:txBody>
-          <a:bodyPr wrap="square" anchor="t" lIns="0" rIns="0" tIns="0" bIns="0">
-            <a:spAutoFit/>
-          </a:bodyPr>
-          <a:lstStyle/>
-          <a:p>
-            <a:pPr algn="r"/>
-            <a:r>
-              <a:rPr sz="1000" b="0" i="0">
-                <a:solidFill>
-                  <a:srgbClr val="5A6B85"/>
-                </a:solidFill>
-                <a:latin typeface="微软雅黑"/>
-                <a:ea typeface="微软雅黑"/>
-                <a:cs typeface="微软雅黑"/>
-              </a:rPr>
-              <a:t>急救绿道 · 9 / 13</a:t>
-            </a:r>
-          </a:p>
-        </p:txBody>
-      </p:sp>
-      <p:sp>
-        <p:nvSpPr>
-          <p:cNvPr id="5" name="TextBox 4"/>
-          <p:cNvSpPr txBox="1"/>
-          <p:nvPr/>
-        </p:nvSpPr>
-        <p:spPr>
-          <a:xfrm>
-            <a:off x="566928" y="1225295"/>
-            <a:ext cx="11057839" cy="365760"/>
-          </a:xfrm>
-          <a:prstGeom prst="rect">
-            <a:avLst/>
-          </a:prstGeom>
-          <a:noFill/>
-        </p:spPr>
-        <p:txBody>
-          <a:bodyPr wrap="square" anchor="t" lIns="0" rIns="0" tIns="0" bIns="0">
-            <a:spAutoFit/>
-          </a:bodyPr>
-          <a:lstStyle/>
-          <a:p>
-            <a:pPr algn="l"/>
-            <a:r>
-              <a:rPr sz="1400" b="0" i="0">
-                <a:solidFill>
-                  <a:srgbClr val="1F2D3D"/>
-                </a:solidFill>
-                <a:latin typeface="微软雅黑"/>
-                <a:ea typeface="微软雅黑"/>
-                <a:cs typeface="微软雅黑"/>
-              </a:rPr>
-              <a:t>起因是一个真实的坑：服务跑在前台窗口里，</a:t>
-            </a:r>
-            <a:r>
-              <a:rPr sz="1400" b="1" i="0">
-                <a:solidFill>
-                  <a:srgbClr val="146CC0"/>
-                </a:solidFill>
-                <a:latin typeface="微软雅黑"/>
-                <a:ea typeface="微软雅黑"/>
-                <a:cs typeface="微软雅黑"/>
-              </a:rPr>
-              <a:t>按 Ctrl+C 想复制文字，结果把服务关了</a:t>
-            </a:r>
-            <a:r>
-              <a:rPr sz="1400" b="0" i="0">
-                <a:solidFill>
-                  <a:srgbClr val="1F2D3D"/>
-                </a:solidFill>
-                <a:latin typeface="微软雅黑"/>
-                <a:ea typeface="微软雅黑"/>
-                <a:cs typeface="微软雅黑"/>
-              </a:rPr>
-              <a:t>。</a:t>
-            </a:r>
-          </a:p>
-        </p:txBody>
-      </p:sp>
-      <p:sp>
-        <p:nvSpPr>
-          <p:cNvPr id="6" name="Rounded Rectangle 5"/>
-          <p:cNvSpPr/>
-          <p:nvPr/>
-        </p:nvSpPr>
-        <p:spPr>
-          <a:xfrm>
-            <a:off x="566928" y="2048256"/>
-            <a:ext cx="2526715" cy="2194560"/>
-          </a:xfrm>
-          <a:prstGeom prst="roundRect">
-            <a:avLst>
-              <a:gd name="adj" fmla="val 6000"/>
-            </a:avLst>
-          </a:prstGeom>
           <a:solidFill>
-            <a:srgbClr val="FFFFFF"/>
+            <a:srgbClr val="04122B"/>
           </a:solidFill>
-          <a:ln w="9525">
-            <a:solidFill>
-              <a:srgbClr val="D6E2F0"/>
-            </a:solidFill>
+          <a:ln>
+            <a:noFill/>
           </a:ln>
           <a:effectLst/>
         </p:spPr>
@@ -14630,7 +14896,225 @@
       </p:sp>
       <p:sp>
         <p:nvSpPr>
-          <p:cNvPr id="7" name="Rectangle 6"/>
+          <p:cNvPr id="3" name="TextBox 2"/>
+          <p:cNvSpPr txBox="1"/>
+          <p:nvPr/>
+        </p:nvSpPr>
+        <p:spPr>
+          <a:xfrm>
+            <a:off x="566928" y="329184"/>
+            <a:ext cx="11057839" cy="274320"/>
+          </a:xfrm>
+          <a:prstGeom prst="rect">
+            <a:avLst/>
+          </a:prstGeom>
+          <a:noFill/>
+        </p:spPr>
+        <p:txBody>
+          <a:bodyPr wrap="square" anchor="t" lIns="0" rIns="0" tIns="0" bIns="0">
+            <a:spAutoFit/>
+          </a:bodyPr>
+          <a:lstStyle/>
+          <a:p>
+            <a:pPr algn="l"/>
+            <a:r>
+              <a:rPr sz="1150" b="1" i="0">
+                <a:solidFill>
+                  <a:srgbClr val="7FE3FF"/>
+                </a:solidFill>
+                <a:latin typeface="微软雅黑"/>
+                <a:ea typeface="微软雅黑"/>
+                <a:cs typeface="微软雅黑"/>
+              </a:rPr>
+              <a:t>02 · 怎么做的</a:t>
+            </a:r>
+          </a:p>
+        </p:txBody>
+      </p:sp>
+      <p:sp>
+        <p:nvSpPr>
+          <p:cNvPr id="4" name="TextBox 3"/>
+          <p:cNvSpPr txBox="1"/>
+          <p:nvPr/>
+        </p:nvSpPr>
+        <p:spPr>
+          <a:xfrm>
+            <a:off x="566928" y="621792"/>
+            <a:ext cx="11057839" cy="640080"/>
+          </a:xfrm>
+          <a:prstGeom prst="rect">
+            <a:avLst/>
+          </a:prstGeom>
+          <a:noFill/>
+        </p:spPr>
+        <p:txBody>
+          <a:bodyPr wrap="square" anchor="t" lIns="0" rIns="0" tIns="0" bIns="0">
+            <a:spAutoFit/>
+          </a:bodyPr>
+          <a:lstStyle/>
+          <a:p>
+            <a:pPr algn="l"/>
+            <a:r>
+              <a:rPr sz="2700" b="1" i="0">
+                <a:solidFill>
+                  <a:srgbClr val="ECF7FF"/>
+                </a:solidFill>
+                <a:latin typeface="微软雅黑"/>
+                <a:ea typeface="微软雅黑"/>
+                <a:cs typeface="微软雅黑"/>
+              </a:rPr>
+              <a:t>「随时能打开」是怎么做到的</a:t>
+            </a:r>
+          </a:p>
+        </p:txBody>
+      </p:sp>
+      <p:sp>
+        <p:nvSpPr>
+          <p:cNvPr id="5" name="TextBox 4"/>
+          <p:cNvSpPr txBox="1"/>
+          <p:nvPr/>
+        </p:nvSpPr>
+        <p:spPr>
+          <a:xfrm>
+            <a:off x="10161727" y="6382512"/>
+            <a:ext cx="1463040" cy="274320"/>
+          </a:xfrm>
+          <a:prstGeom prst="rect">
+            <a:avLst/>
+          </a:prstGeom>
+          <a:noFill/>
+        </p:spPr>
+        <p:txBody>
+          <a:bodyPr wrap="square" anchor="t" lIns="0" rIns="0" tIns="0" bIns="0">
+            <a:spAutoFit/>
+          </a:bodyPr>
+          <a:lstStyle/>
+          <a:p>
+            <a:pPr algn="r"/>
+            <a:r>
+              <a:rPr sz="1000" b="0" i="0">
+                <a:solidFill>
+                  <a:srgbClr val="7E9EC4"/>
+                </a:solidFill>
+                <a:latin typeface="微软雅黑"/>
+                <a:ea typeface="微软雅黑"/>
+                <a:cs typeface="微软雅黑"/>
+              </a:rPr>
+              <a:t>急救绿道 · 9 / 13</a:t>
+            </a:r>
+          </a:p>
+        </p:txBody>
+      </p:sp>
+      <p:sp>
+        <p:nvSpPr>
+          <p:cNvPr id="6" name="TextBox 5"/>
+          <p:cNvSpPr txBox="1"/>
+          <p:nvPr/>
+        </p:nvSpPr>
+        <p:spPr>
+          <a:xfrm>
+            <a:off x="566928" y="1225295"/>
+            <a:ext cx="11057839" cy="365760"/>
+          </a:xfrm>
+          <a:prstGeom prst="rect">
+            <a:avLst/>
+          </a:prstGeom>
+          <a:noFill/>
+        </p:spPr>
+        <p:txBody>
+          <a:bodyPr wrap="square" anchor="t" lIns="0" rIns="0" tIns="0" bIns="0">
+            <a:spAutoFit/>
+          </a:bodyPr>
+          <a:lstStyle/>
+          <a:p>
+            <a:pPr algn="l"/>
+            <a:r>
+              <a:rPr sz="1400" b="0" i="0">
+                <a:solidFill>
+                  <a:srgbClr val="BBD4EC"/>
+                </a:solidFill>
+                <a:latin typeface="微软雅黑"/>
+                <a:ea typeface="微软雅黑"/>
+                <a:cs typeface="微软雅黑"/>
+              </a:rPr>
+              <a:t>起因是一个真实的坑：服务跑在前台窗口里，</a:t>
+            </a:r>
+            <a:r>
+              <a:rPr sz="1400" b="1" i="0">
+                <a:solidFill>
+                  <a:srgbClr val="5CC8FF"/>
+                </a:solidFill>
+                <a:latin typeface="微软雅黑"/>
+                <a:ea typeface="微软雅黑"/>
+                <a:cs typeface="微软雅黑"/>
+              </a:rPr>
+              <a:t>按 Ctrl+C 想复制文字，结果把服务关了</a:t>
+            </a:r>
+            <a:r>
+              <a:rPr sz="1400" b="0" i="0">
+                <a:solidFill>
+                  <a:srgbClr val="BBD4EC"/>
+                </a:solidFill>
+                <a:latin typeface="微软雅黑"/>
+                <a:ea typeface="微软雅黑"/>
+                <a:cs typeface="微软雅黑"/>
+              </a:rPr>
+              <a:t>。</a:t>
+            </a:r>
+          </a:p>
+        </p:txBody>
+      </p:sp>
+      <p:sp>
+        <p:nvSpPr>
+          <p:cNvPr id="7" name="Rounded Rectangle 6"/>
+          <p:cNvSpPr/>
+          <p:nvPr/>
+        </p:nvSpPr>
+        <p:spPr>
+          <a:xfrm>
+            <a:off x="566928" y="2048256"/>
+            <a:ext cx="2526715" cy="2194560"/>
+          </a:xfrm>
+          <a:prstGeom prst="roundRect">
+            <a:avLst>
+              <a:gd name="adj" fmla="val 6000"/>
+            </a:avLst>
+          </a:prstGeom>
+          <a:solidFill>
+            <a:srgbClr val="061A38"/>
+          </a:solidFill>
+          <a:ln w="9525">
+            <a:solidFill>
+              <a:srgbClr val="1A4272"/>
+            </a:solidFill>
+          </a:ln>
+          <a:effectLst/>
+        </p:spPr>
+        <p:style>
+          <a:lnRef idx="1">
+            <a:schemeClr val="accent1"/>
+          </a:lnRef>
+          <a:fillRef idx="3">
+            <a:schemeClr val="accent1"/>
+          </a:fillRef>
+          <a:effectRef idx="2">
+            <a:schemeClr val="accent1"/>
+          </a:effectRef>
+          <a:fontRef idx="minor">
+            <a:schemeClr val="lt1"/>
+          </a:fontRef>
+        </p:style>
+        <p:txBody>
+          <a:bodyPr rtlCol="0" anchor="ctr"/>
+          <a:lstStyle/>
+          <a:p>
+            <a:pPr algn="ctr"/>
+          </a:p>
+        </p:txBody>
+      </p:sp>
+      <p:sp>
+        <p:nvSpPr>
+          <p:cNvPr id="8" name="Rectangle 7"/>
           <p:cNvSpPr/>
           <p:nvPr/>
         </p:nvSpPr>
@@ -14643,7 +15127,7 @@
             <a:avLst/>
           </a:prstGeom>
           <a:solidFill>
-            <a:srgbClr val="1E88E5"/>
+            <a:srgbClr val="7FE3FF"/>
           </a:solidFill>
           <a:ln>
             <a:noFill/>
@@ -14674,7 +15158,7 @@
       </p:sp>
       <p:sp>
         <p:nvSpPr>
-          <p:cNvPr id="8" name="Oval 7"/>
+          <p:cNvPr id="9" name="Oval 8"/>
           <p:cNvSpPr/>
           <p:nvPr/>
         </p:nvSpPr>
@@ -14687,7 +15171,7 @@
             <a:avLst/>
           </a:prstGeom>
           <a:solidFill>
-            <a:srgbClr val="1E88E5"/>
+            <a:srgbClr val="7FE3FF"/>
           </a:solidFill>
           <a:ln w="19050">
             <a:solidFill>
@@ -14731,7 +15215,7 @@
       </p:sp>
       <p:sp>
         <p:nvSpPr>
-          <p:cNvPr id="9" name="TextBox 8"/>
+          <p:cNvPr id="10" name="TextBox 9"/>
           <p:cNvSpPr txBox="1"/>
           <p:nvPr/>
         </p:nvSpPr>
@@ -14759,7 +15243,7 @@
             <a:r>
               <a:rPr sz="1500" b="1" i="0">
                 <a:solidFill>
-                  <a:srgbClr val="0B3B72"/>
+                  <a:srgbClr val="ECF7FF"/>
                 </a:solidFill>
                 <a:latin typeface="微软雅黑"/>
                 <a:ea typeface="微软雅黑"/>
@@ -14777,7 +15261,7 @@
             <a:r>
               <a:rPr sz="1100" b="0" i="0">
                 <a:solidFill>
-                  <a:srgbClr val="1F2D3D"/>
+                  <a:srgbClr val="BBD4EC"/>
                 </a:solidFill>
                 <a:latin typeface="微软雅黑"/>
                 <a:ea typeface="微软雅黑"/>
@@ -14790,7 +15274,7 @@
       </p:sp>
       <p:sp>
         <p:nvSpPr>
-          <p:cNvPr id="10" name="Rounded Rectangle 9"/>
+          <p:cNvPr id="11" name="Rounded Rectangle 10"/>
           <p:cNvSpPr/>
           <p:nvPr/>
         </p:nvSpPr>
@@ -14805,11 +15289,11 @@
             </a:avLst>
           </a:prstGeom>
           <a:solidFill>
-            <a:srgbClr val="FFFFFF"/>
+            <a:srgbClr val="061A38"/>
           </a:solidFill>
           <a:ln w="9525">
             <a:solidFill>
-              <a:srgbClr val="D6E2F0"/>
+              <a:srgbClr val="1A4272"/>
             </a:solidFill>
           </a:ln>
           <a:effectLst/>
@@ -14838,7 +15322,7 @@
       </p:sp>
       <p:sp>
         <p:nvSpPr>
-          <p:cNvPr id="11" name="Rectangle 10"/>
+          <p:cNvPr id="12" name="Rectangle 11"/>
           <p:cNvSpPr/>
           <p:nvPr/>
         </p:nvSpPr>
@@ -14851,7 +15335,7 @@
             <a:avLst/>
           </a:prstGeom>
           <a:solidFill>
-            <a:srgbClr val="1E88E5"/>
+            <a:srgbClr val="7FE3FF"/>
           </a:solidFill>
           <a:ln>
             <a:noFill/>
@@ -14882,7 +15366,7 @@
       </p:sp>
       <p:sp>
         <p:nvSpPr>
-          <p:cNvPr id="12" name="Oval 11"/>
+          <p:cNvPr id="13" name="Oval 12"/>
           <p:cNvSpPr/>
           <p:nvPr/>
         </p:nvSpPr>
@@ -14895,7 +15379,7 @@
             <a:avLst/>
           </a:prstGeom>
           <a:solidFill>
-            <a:srgbClr val="1E88E5"/>
+            <a:srgbClr val="7FE3FF"/>
           </a:solidFill>
           <a:ln w="19050">
             <a:solidFill>
@@ -14939,7 +15423,7 @@
       </p:sp>
       <p:sp>
         <p:nvSpPr>
-          <p:cNvPr id="13" name="TextBox 12"/>
+          <p:cNvPr id="14" name="TextBox 13"/>
           <p:cNvSpPr txBox="1"/>
           <p:nvPr/>
         </p:nvSpPr>
@@ -14967,7 +15451,7 @@
             <a:r>
               <a:rPr sz="1500" b="1" i="0">
                 <a:solidFill>
-                  <a:srgbClr val="0B3B72"/>
+                  <a:srgbClr val="ECF7FF"/>
                 </a:solidFill>
                 <a:latin typeface="微软雅黑"/>
                 <a:ea typeface="微软雅黑"/>
@@ -14985,7 +15469,7 @@
             <a:r>
               <a:rPr sz="1100" b="0" i="0">
                 <a:solidFill>
-                  <a:srgbClr val="1F2D3D"/>
+                  <a:srgbClr val="BBD4EC"/>
                 </a:solidFill>
                 <a:latin typeface="微软雅黑"/>
                 <a:ea typeface="微软雅黑"/>
@@ -14998,7 +15482,7 @@
       </p:sp>
       <p:sp>
         <p:nvSpPr>
-          <p:cNvPr id="14" name="Rounded Rectangle 13"/>
+          <p:cNvPr id="15" name="Rounded Rectangle 14"/>
           <p:cNvSpPr/>
           <p:nvPr/>
         </p:nvSpPr>
@@ -15013,11 +15497,11 @@
             </a:avLst>
           </a:prstGeom>
           <a:solidFill>
-            <a:srgbClr val="FFFFFF"/>
+            <a:srgbClr val="061A38"/>
           </a:solidFill>
           <a:ln w="9525">
             <a:solidFill>
-              <a:srgbClr val="D6E2F0"/>
+              <a:srgbClr val="1A4272"/>
             </a:solidFill>
           </a:ln>
           <a:effectLst/>
@@ -15046,7 +15530,7 @@
       </p:sp>
       <p:sp>
         <p:nvSpPr>
-          <p:cNvPr id="15" name="Rectangle 14"/>
+          <p:cNvPr id="16" name="Rectangle 15"/>
           <p:cNvSpPr/>
           <p:nvPr/>
         </p:nvSpPr>
@@ -15059,7 +15543,7 @@
             <a:avLst/>
           </a:prstGeom>
           <a:solidFill>
-            <a:srgbClr val="1E88E5"/>
+            <a:srgbClr val="7FE3FF"/>
           </a:solidFill>
           <a:ln>
             <a:noFill/>
@@ -15090,7 +15574,7 @@
       </p:sp>
       <p:sp>
         <p:nvSpPr>
-          <p:cNvPr id="16" name="Oval 15"/>
+          <p:cNvPr id="17" name="Oval 16"/>
           <p:cNvSpPr/>
           <p:nvPr/>
         </p:nvSpPr>
@@ -15103,7 +15587,7 @@
             <a:avLst/>
           </a:prstGeom>
           <a:solidFill>
-            <a:srgbClr val="1E88E5"/>
+            <a:srgbClr val="7FE3FF"/>
           </a:solidFill>
           <a:ln w="19050">
             <a:solidFill>
@@ -15147,7 +15631,7 @@
       </p:sp>
       <p:sp>
         <p:nvSpPr>
-          <p:cNvPr id="17" name="TextBox 16"/>
+          <p:cNvPr id="18" name="TextBox 17"/>
           <p:cNvSpPr txBox="1"/>
           <p:nvPr/>
         </p:nvSpPr>
@@ -15175,7 +15659,7 @@
             <a:r>
               <a:rPr sz="1500" b="1" i="0">
                 <a:solidFill>
-                  <a:srgbClr val="0B3B72"/>
+                  <a:srgbClr val="ECF7FF"/>
                 </a:solidFill>
                 <a:latin typeface="微软雅黑"/>
                 <a:ea typeface="微软雅黑"/>
@@ -15193,7 +15677,7 @@
             <a:r>
               <a:rPr sz="1100" b="0" i="0">
                 <a:solidFill>
-                  <a:srgbClr val="1F2D3D"/>
+                  <a:srgbClr val="BBD4EC"/>
                 </a:solidFill>
                 <a:latin typeface="微软雅黑"/>
                 <a:ea typeface="微软雅黑"/>
@@ -15206,7 +15690,7 @@
       </p:sp>
       <p:sp>
         <p:nvSpPr>
-          <p:cNvPr id="18" name="Rounded Rectangle 17"/>
+          <p:cNvPr id="19" name="Rounded Rectangle 18"/>
           <p:cNvSpPr/>
           <p:nvPr/>
         </p:nvSpPr>
@@ -15221,11 +15705,11 @@
             </a:avLst>
           </a:prstGeom>
           <a:solidFill>
-            <a:srgbClr val="FFFFFF"/>
+            <a:srgbClr val="061A38"/>
           </a:solidFill>
           <a:ln w="9525">
             <a:solidFill>
-              <a:srgbClr val="D6E2F0"/>
+              <a:srgbClr val="1A4272"/>
             </a:solidFill>
           </a:ln>
           <a:effectLst/>
@@ -15254,7 +15738,7 @@
       </p:sp>
       <p:sp>
         <p:nvSpPr>
-          <p:cNvPr id="19" name="Rectangle 18"/>
+          <p:cNvPr id="20" name="Rectangle 19"/>
           <p:cNvSpPr/>
           <p:nvPr/>
         </p:nvSpPr>
@@ -15267,7 +15751,7 @@
             <a:avLst/>
           </a:prstGeom>
           <a:solidFill>
-            <a:srgbClr val="1E88E5"/>
+            <a:srgbClr val="7FE3FF"/>
           </a:solidFill>
           <a:ln>
             <a:noFill/>
@@ -15298,7 +15782,7 @@
       </p:sp>
       <p:sp>
         <p:nvSpPr>
-          <p:cNvPr id="20" name="Oval 19"/>
+          <p:cNvPr id="21" name="Oval 20"/>
           <p:cNvSpPr/>
           <p:nvPr/>
         </p:nvSpPr>
@@ -15311,7 +15795,7 @@
             <a:avLst/>
           </a:prstGeom>
           <a:solidFill>
-            <a:srgbClr val="1E88E5"/>
+            <a:srgbClr val="7FE3FF"/>
           </a:solidFill>
           <a:ln w="19050">
             <a:solidFill>
@@ -15355,7 +15839,7 @@
       </p:sp>
       <p:sp>
         <p:nvSpPr>
-          <p:cNvPr id="21" name="TextBox 20"/>
+          <p:cNvPr id="22" name="TextBox 21"/>
           <p:cNvSpPr txBox="1"/>
           <p:nvPr/>
         </p:nvSpPr>
@@ -15383,7 +15867,7 @@
             <a:r>
               <a:rPr sz="1500" b="1" i="0">
                 <a:solidFill>
-                  <a:srgbClr val="0B3B72"/>
+                  <a:srgbClr val="ECF7FF"/>
                 </a:solidFill>
                 <a:latin typeface="微软雅黑"/>
                 <a:ea typeface="微软雅黑"/>
@@ -15401,7 +15885,7 @@
             <a:r>
               <a:rPr sz="1100" b="0" i="0">
                 <a:solidFill>
-                  <a:srgbClr val="1F2D3D"/>
+                  <a:srgbClr val="BBD4EC"/>
                 </a:solidFill>
                 <a:latin typeface="微软雅黑"/>
                 <a:ea typeface="微软雅黑"/>
@@ -15414,7 +15898,7 @@
       </p:sp>
       <p:sp>
         <p:nvSpPr>
-          <p:cNvPr id="22" name="TextBox 21"/>
+          <p:cNvPr id="23" name="TextBox 22"/>
           <p:cNvSpPr txBox="1"/>
           <p:nvPr/>
         </p:nvSpPr>
@@ -15438,7 +15922,7 @@
             <a:r>
               <a:rPr sz="1350" b="0" i="0">
                 <a:solidFill>
-                  <a:srgbClr val="1F2D3D"/>
+                  <a:srgbClr val="BBD4EC"/>
                 </a:solidFill>
                 <a:latin typeface="微软雅黑"/>
                 <a:ea typeface="微软雅黑"/>
@@ -15449,7 +15933,7 @@
             <a:r>
               <a:rPr sz="1350" b="1" i="0">
                 <a:solidFill>
-                  <a:srgbClr val="0B3B72"/>
+                  <a:srgbClr val="ECF7FF"/>
                 </a:solidFill>
                 <a:latin typeface="微软雅黑"/>
                 <a:ea typeface="微软雅黑"/>
@@ -15460,7 +15944,7 @@
             <a:r>
               <a:rPr sz="1350" b="0" i="0">
                 <a:solidFill>
-                  <a:srgbClr val="1F2D3D"/>
+                  <a:srgbClr val="BBD4EC"/>
                 </a:solidFill>
                 <a:latin typeface="微软雅黑"/>
                 <a:ea typeface="微软雅黑"/>

--- a/docs/ppt/医院数据管理平台-项目介绍.pptx
+++ b/docs/ppt/医院数据管理平台-项目介绍.pptx
@@ -5289,7 +5289,7 @@
         </p:nvGraphicFramePr>
         <p:xfrm>
           <a:off x="566928" y="1655064"/>
-          <a:ext cx="11057839" cy="4114068"/>
+          <a:ext cx="11057839" cy="3789273"/>
         </p:xfrm>
         <a:graphic>
           <a:graphicData uri="http://schemas.openxmlformats.org/drawingml/2006/table">
@@ -5302,7 +5302,7 @@
                 <a:gridCol w="1097280"/>
                 <a:gridCol w="7583119"/>
               </a:tblGrid>
-              <a:tr h="639348">
+              <a:tr h="588873">
                 <a:tc>
                   <a:txBody>
                     <a:bodyPr/>
@@ -5376,7 +5376,7 @@
                   </a:tcPr>
                 </a:tc>
               </a:tr>
-              <a:tr h="694944">
+              <a:tr h="640080">
                 <a:tc>
                   <a:txBody>
                     <a:bodyPr/>
@@ -5450,7 +5450,7 @@
                   </a:tcPr>
                 </a:tc>
               </a:tr>
-              <a:tr h="694944">
+              <a:tr h="640080">
                 <a:tc>
                   <a:txBody>
                     <a:bodyPr/>
@@ -5524,7 +5524,7 @@
                   </a:tcPr>
                 </a:tc>
               </a:tr>
-              <a:tr h="694944">
+              <a:tr h="640080">
                 <a:tc>
                   <a:txBody>
                     <a:bodyPr/>
@@ -5598,7 +5598,7 @@
                   </a:tcPr>
                 </a:tc>
               </a:tr>
-              <a:tr h="694944">
+              <a:tr h="640080">
                 <a:tc>
                   <a:txBody>
                     <a:bodyPr/>
@@ -5672,7 +5672,7 @@
                   </a:tcPr>
                 </a:tc>
               </a:tr>
-              <a:tr h="694944">
+              <a:tr h="640080">
                 <a:tc>
                   <a:txBody>
                     <a:bodyPr/>
@@ -5758,7 +5758,7 @@
         </p:nvSpPr>
         <p:spPr>
           <a:xfrm>
-            <a:off x="566928" y="5312664"/>
+            <a:off x="566928" y="5590640"/>
             <a:ext cx="11057839" cy="457200"/>
           </a:xfrm>
           <a:prstGeom prst="rect">

--- a/docs/ppt/医院数据管理平台-项目介绍.pptx
+++ b/docs/ppt/医院数据管理平台-项目介绍.pptx
@@ -1,25 +1,25 @@
 
 <file path=ppt/presentation.xml><?xml version="1.0" encoding="utf-8"?>
-<p:presentation xmlns:a="http://schemas.openxmlformats.org/drawingml/2006/main" xmlns:r="http://schemas.openxmlformats.org/officeDocument/2006/relationships" xmlns:p="http://schemas.openxmlformats.org/presentationml/2006/main" saveSubsetFonts="1" autoCompressPictures="0">
+<p:presentation xmlns:a="http://schemas.openxmlformats.org/drawingml/2006/main" xmlns:r="http://schemas.openxmlformats.org/officeDocument/2006/relationships" xmlns:p="http://schemas.openxmlformats.org/presentationml/2006/main" autoCompressPictures="0">
   <p:sldMasterIdLst>
     <p:sldMasterId id="2147483648" r:id="rId1"/>
   </p:sldMasterIdLst>
   <p:sldIdLst>
-    <p:sldId id="256" r:id="rId7"/>
-    <p:sldId id="257" r:id="rId8"/>
-    <p:sldId id="258" r:id="rId9"/>
-    <p:sldId id="259" r:id="rId10"/>
-    <p:sldId id="260" r:id="rId11"/>
-    <p:sldId id="261" r:id="rId12"/>
-    <p:sldId id="262" r:id="rId13"/>
-    <p:sldId id="263" r:id="rId14"/>
-    <p:sldId id="264" r:id="rId15"/>
-    <p:sldId id="265" r:id="rId16"/>
-    <p:sldId id="266" r:id="rId17"/>
-    <p:sldId id="267" r:id="rId18"/>
-    <p:sldId id="268" r:id="rId19"/>
+    <p:sldId id="256" r:id="rId3"/>
+    <p:sldId id="257" r:id="rId4"/>
+    <p:sldId id="258" r:id="rId5"/>
+    <p:sldId id="259" r:id="rId6"/>
+    <p:sldId id="260" r:id="rId7"/>
+    <p:sldId id="261" r:id="rId8"/>
+    <p:sldId id="262" r:id="rId9"/>
+    <p:sldId id="263" r:id="rId10"/>
+    <p:sldId id="264" r:id="rId11"/>
+    <p:sldId id="265" r:id="rId12"/>
+    <p:sldId id="266" r:id="rId13"/>
+    <p:sldId id="267" r:id="rId14"/>
+    <p:sldId id="268" r:id="rId15"/>
   </p:sldIdLst>
-  <p:sldSz cx="12191695" cy="6858000" type="screen4x3"/>
+  <p:sldSz cx="12191365" cy="6858000" type="screen4x3"/>
   <p:notesSz cx="6858000" cy="9144000"/>
   <p:defaultTextStyle>
     <a:defPPr>
@@ -116,6 +116,22 @@
       </a:defRPr>
     </a:lvl9pPr>
   </p:defaultTextStyle>
+  <p:extLst>
+    <p:ext uri="{EFAFB233-063F-42B5-8137-9DF3F51BA10A}">
+      <p15:sldGuideLst xmlns:p15="http://schemas.microsoft.com/office/powerpoint/2012/main">
+        <p15:guide id="1" orient="horz" pos="2177" userDrawn="1">
+          <p15:clr>
+            <a:srgbClr val="A4A3A4"/>
+          </p15:clr>
+        </p15:guide>
+        <p15:guide id="2" pos="2880" userDrawn="1">
+          <p15:clr>
+            <a:srgbClr val="A4A3A4"/>
+          </p15:clr>
+        </p15:guide>
+      </p15:sldGuideLst>
+    </p:ext>
+  </p:extLst>
 </p:presentation>
 </file>
 
@@ -300,7 +316,6 @@
           <a:p>
             <a:fld id="{5BCAD085-E8A6-8845-BD4E-CB4CCA059FC4}" type="datetimeFigureOut">
               <a:rPr lang="en-US" smtClean="0"/>
-              <a:t>1/27/13</a:t>
             </a:fld>
             <a:endParaRPr lang="en-US"/>
           </a:p>
@@ -342,18 +357,12 @@
           <a:p>
             <a:fld id="{C1FF6DA9-008F-8B48-92A6-B652298478BF}" type="slidenum">
               <a:rPr lang="en-US" smtClean="0"/>
-              <a:t>‹#›</a:t>
             </a:fld>
             <a:endParaRPr lang="en-US"/>
           </a:p>
         </p:txBody>
       </p:sp>
     </p:spTree>
-    <p:extLst>
-      <p:ext uri="{BB962C8B-B14F-4D97-AF65-F5344CB8AC3E}">
-        <p14:creationId xmlns:p14="http://schemas.microsoft.com/office/powerpoint/2010/main" val="3168075583"/>
-      </p:ext>
-    </p:extLst>
   </p:cSld>
   <p:clrMapOvr>
     <a:masterClrMapping/>
@@ -421,6 +430,7 @@
               <a:rPr lang="en-US" smtClean="0"/>
               <a:t>Click to edit Master text styles</a:t>
             </a:r>
+            <a:endParaRPr lang="en-US" smtClean="0"/>
           </a:p>
           <a:p>
             <a:pPr lvl="1"/>
@@ -428,6 +438,7 @@
               <a:rPr lang="en-US" smtClean="0"/>
               <a:t>Second level</a:t>
             </a:r>
+            <a:endParaRPr lang="en-US" smtClean="0"/>
           </a:p>
           <a:p>
             <a:pPr lvl="2"/>
@@ -435,6 +446,7 @@
               <a:rPr lang="en-US" smtClean="0"/>
               <a:t>Third level</a:t>
             </a:r>
+            <a:endParaRPr lang="en-US" smtClean="0"/>
           </a:p>
           <a:p>
             <a:pPr lvl="3"/>
@@ -442,6 +454,7 @@
               <a:rPr lang="en-US" smtClean="0"/>
               <a:t>Fourth level</a:t>
             </a:r>
+            <a:endParaRPr lang="en-US" smtClean="0"/>
           </a:p>
           <a:p>
             <a:pPr lvl="4"/>
@@ -470,7 +483,6 @@
           <a:p>
             <a:fld id="{5BCAD085-E8A6-8845-BD4E-CB4CCA059FC4}" type="datetimeFigureOut">
               <a:rPr lang="en-US" smtClean="0"/>
-              <a:t>1/27/13</a:t>
             </a:fld>
             <a:endParaRPr lang="en-US"/>
           </a:p>
@@ -512,18 +524,12 @@
           <a:p>
             <a:fld id="{C1FF6DA9-008F-8B48-92A6-B652298478BF}" type="slidenum">
               <a:rPr lang="en-US" smtClean="0"/>
-              <a:t>‹#›</a:t>
             </a:fld>
             <a:endParaRPr lang="en-US"/>
           </a:p>
         </p:txBody>
       </p:sp>
     </p:spTree>
-    <p:extLst>
-      <p:ext uri="{BB962C8B-B14F-4D97-AF65-F5344CB8AC3E}">
-        <p14:creationId xmlns:p14="http://schemas.microsoft.com/office/powerpoint/2010/main" val="2910927964"/>
-      </p:ext>
-    </p:extLst>
   </p:cSld>
   <p:clrMapOvr>
     <a:masterClrMapping/>
@@ -601,6 +607,7 @@
               <a:rPr lang="en-US" smtClean="0"/>
               <a:t>Click to edit Master text styles</a:t>
             </a:r>
+            <a:endParaRPr lang="en-US" smtClean="0"/>
           </a:p>
           <a:p>
             <a:pPr lvl="1"/>
@@ -608,6 +615,7 @@
               <a:rPr lang="en-US" smtClean="0"/>
               <a:t>Second level</a:t>
             </a:r>
+            <a:endParaRPr lang="en-US" smtClean="0"/>
           </a:p>
           <a:p>
             <a:pPr lvl="2"/>
@@ -615,6 +623,7 @@
               <a:rPr lang="en-US" smtClean="0"/>
               <a:t>Third level</a:t>
             </a:r>
+            <a:endParaRPr lang="en-US" smtClean="0"/>
           </a:p>
           <a:p>
             <a:pPr lvl="3"/>
@@ -622,6 +631,7 @@
               <a:rPr lang="en-US" smtClean="0"/>
               <a:t>Fourth level</a:t>
             </a:r>
+            <a:endParaRPr lang="en-US" smtClean="0"/>
           </a:p>
           <a:p>
             <a:pPr lvl="4"/>
@@ -650,7 +660,6 @@
           <a:p>
             <a:fld id="{5BCAD085-E8A6-8845-BD4E-CB4CCA059FC4}" type="datetimeFigureOut">
               <a:rPr lang="en-US" smtClean="0"/>
-              <a:t>1/27/13</a:t>
             </a:fld>
             <a:endParaRPr lang="en-US"/>
           </a:p>
@@ -692,18 +701,12 @@
           <a:p>
             <a:fld id="{C1FF6DA9-008F-8B48-92A6-B652298478BF}" type="slidenum">
               <a:rPr lang="en-US" smtClean="0"/>
-              <a:t>‹#›</a:t>
             </a:fld>
             <a:endParaRPr lang="en-US"/>
           </a:p>
         </p:txBody>
       </p:sp>
     </p:spTree>
-    <p:extLst>
-      <p:ext uri="{BB962C8B-B14F-4D97-AF65-F5344CB8AC3E}">
-        <p14:creationId xmlns:p14="http://schemas.microsoft.com/office/powerpoint/2010/main" val="3612223792"/>
-      </p:ext>
-    </p:extLst>
   </p:cSld>
   <p:clrMapOvr>
     <a:masterClrMapping/>
@@ -771,6 +774,7 @@
               <a:rPr lang="en-US" smtClean="0"/>
               <a:t>Click to edit Master text styles</a:t>
             </a:r>
+            <a:endParaRPr lang="en-US" smtClean="0"/>
           </a:p>
           <a:p>
             <a:pPr lvl="1"/>
@@ -778,6 +782,7 @@
               <a:rPr lang="en-US" smtClean="0"/>
               <a:t>Second level</a:t>
             </a:r>
+            <a:endParaRPr lang="en-US" smtClean="0"/>
           </a:p>
           <a:p>
             <a:pPr lvl="2"/>
@@ -785,6 +790,7 @@
               <a:rPr lang="en-US" smtClean="0"/>
               <a:t>Third level</a:t>
             </a:r>
+            <a:endParaRPr lang="en-US" smtClean="0"/>
           </a:p>
           <a:p>
             <a:pPr lvl="3"/>
@@ -792,6 +798,7 @@
               <a:rPr lang="en-US" smtClean="0"/>
               <a:t>Fourth level</a:t>
             </a:r>
+            <a:endParaRPr lang="en-US" smtClean="0"/>
           </a:p>
           <a:p>
             <a:pPr lvl="4"/>
@@ -820,7 +827,6 @@
           <a:p>
             <a:fld id="{5BCAD085-E8A6-8845-BD4E-CB4CCA059FC4}" type="datetimeFigureOut">
               <a:rPr lang="en-US" smtClean="0"/>
-              <a:t>1/27/13</a:t>
             </a:fld>
             <a:endParaRPr lang="en-US"/>
           </a:p>
@@ -862,18 +868,12 @@
           <a:p>
             <a:fld id="{C1FF6DA9-008F-8B48-92A6-B652298478BF}" type="slidenum">
               <a:rPr lang="en-US" smtClean="0"/>
-              <a:t>‹#›</a:t>
             </a:fld>
             <a:endParaRPr lang="en-US"/>
           </a:p>
         </p:txBody>
       </p:sp>
     </p:spTree>
-    <p:extLst>
-      <p:ext uri="{BB962C8B-B14F-4D97-AF65-F5344CB8AC3E}">
-        <p14:creationId xmlns:p14="http://schemas.microsoft.com/office/powerpoint/2010/main" val="2614314258"/>
-      </p:ext>
-    </p:extLst>
   </p:cSld>
   <p:clrMapOvr>
     <a:masterClrMapping/>
@@ -1046,6 +1046,7 @@
               <a:rPr lang="en-US" smtClean="0"/>
               <a:t>Click to edit Master text styles</a:t>
             </a:r>
+            <a:endParaRPr lang="en-US" smtClean="0"/>
           </a:p>
         </p:txBody>
       </p:sp>
@@ -1066,7 +1067,6 @@
           <a:p>
             <a:fld id="{5BCAD085-E8A6-8845-BD4E-CB4CCA059FC4}" type="datetimeFigureOut">
               <a:rPr lang="en-US" smtClean="0"/>
-              <a:t>1/27/13</a:t>
             </a:fld>
             <a:endParaRPr lang="en-US"/>
           </a:p>
@@ -1108,18 +1108,12 @@
           <a:p>
             <a:fld id="{C1FF6DA9-008F-8B48-92A6-B652298478BF}" type="slidenum">
               <a:rPr lang="en-US" smtClean="0"/>
-              <a:t>‹#›</a:t>
             </a:fld>
             <a:endParaRPr lang="en-US"/>
           </a:p>
         </p:txBody>
       </p:sp>
     </p:spTree>
-    <p:extLst>
-      <p:ext uri="{BB962C8B-B14F-4D97-AF65-F5344CB8AC3E}">
-        <p14:creationId xmlns:p14="http://schemas.microsoft.com/office/powerpoint/2010/main" val="960648375"/>
-      </p:ext>
-    </p:extLst>
   </p:cSld>
   <p:clrMapOvr>
     <a:masterClrMapping/>
@@ -1220,6 +1214,7 @@
               <a:rPr lang="en-US" smtClean="0"/>
               <a:t>Click to edit Master text styles</a:t>
             </a:r>
+            <a:endParaRPr lang="en-US" smtClean="0"/>
           </a:p>
           <a:p>
             <a:pPr lvl="1"/>
@@ -1227,6 +1222,7 @@
               <a:rPr lang="en-US" smtClean="0"/>
               <a:t>Second level</a:t>
             </a:r>
+            <a:endParaRPr lang="en-US" smtClean="0"/>
           </a:p>
           <a:p>
             <a:pPr lvl="2"/>
@@ -1234,6 +1230,7 @@
               <a:rPr lang="en-US" smtClean="0"/>
               <a:t>Third level</a:t>
             </a:r>
+            <a:endParaRPr lang="en-US" smtClean="0"/>
           </a:p>
           <a:p>
             <a:pPr lvl="3"/>
@@ -1241,6 +1238,7 @@
               <a:rPr lang="en-US" smtClean="0"/>
               <a:t>Fourth level</a:t>
             </a:r>
+            <a:endParaRPr lang="en-US" smtClean="0"/>
           </a:p>
           <a:p>
             <a:pPr lvl="4"/>
@@ -1305,6 +1303,7 @@
               <a:rPr lang="en-US" smtClean="0"/>
               <a:t>Click to edit Master text styles</a:t>
             </a:r>
+            <a:endParaRPr lang="en-US" smtClean="0"/>
           </a:p>
           <a:p>
             <a:pPr lvl="1"/>
@@ -1312,6 +1311,7 @@
               <a:rPr lang="en-US" smtClean="0"/>
               <a:t>Second level</a:t>
             </a:r>
+            <a:endParaRPr lang="en-US" smtClean="0"/>
           </a:p>
           <a:p>
             <a:pPr lvl="2"/>
@@ -1319,6 +1319,7 @@
               <a:rPr lang="en-US" smtClean="0"/>
               <a:t>Third level</a:t>
             </a:r>
+            <a:endParaRPr lang="en-US" smtClean="0"/>
           </a:p>
           <a:p>
             <a:pPr lvl="3"/>
@@ -1326,6 +1327,7 @@
               <a:rPr lang="en-US" smtClean="0"/>
               <a:t>Fourth level</a:t>
             </a:r>
+            <a:endParaRPr lang="en-US" smtClean="0"/>
           </a:p>
           <a:p>
             <a:pPr lvl="4"/>
@@ -1354,7 +1356,6 @@
           <a:p>
             <a:fld id="{5BCAD085-E8A6-8845-BD4E-CB4CCA059FC4}" type="datetimeFigureOut">
               <a:rPr lang="en-US" smtClean="0"/>
-              <a:t>1/27/13</a:t>
             </a:fld>
             <a:endParaRPr lang="en-US"/>
           </a:p>
@@ -1396,18 +1397,12 @@
           <a:p>
             <a:fld id="{C1FF6DA9-008F-8B48-92A6-B652298478BF}" type="slidenum">
               <a:rPr lang="en-US" smtClean="0"/>
-              <a:t>‹#›</a:t>
             </a:fld>
             <a:endParaRPr lang="en-US"/>
           </a:p>
         </p:txBody>
       </p:sp>
     </p:spTree>
-    <p:extLst>
-      <p:ext uri="{BB962C8B-B14F-4D97-AF65-F5344CB8AC3E}">
-        <p14:creationId xmlns:p14="http://schemas.microsoft.com/office/powerpoint/2010/main" val="2782244947"/>
-      </p:ext>
-    </p:extLst>
   </p:cSld>
   <p:clrMapOvr>
     <a:masterClrMapping/>
@@ -1521,6 +1516,7 @@
               <a:rPr lang="en-US" smtClean="0"/>
               <a:t>Click to edit Master text styles</a:t>
             </a:r>
+            <a:endParaRPr lang="en-US" smtClean="0"/>
           </a:p>
         </p:txBody>
       </p:sp>
@@ -1577,6 +1573,7 @@
               <a:rPr lang="en-US" smtClean="0"/>
               <a:t>Click to edit Master text styles</a:t>
             </a:r>
+            <a:endParaRPr lang="en-US" smtClean="0"/>
           </a:p>
           <a:p>
             <a:pPr lvl="1"/>
@@ -1584,6 +1581,7 @@
               <a:rPr lang="en-US" smtClean="0"/>
               <a:t>Second level</a:t>
             </a:r>
+            <a:endParaRPr lang="en-US" smtClean="0"/>
           </a:p>
           <a:p>
             <a:pPr lvl="2"/>
@@ -1591,6 +1589,7 @@
               <a:rPr lang="en-US" smtClean="0"/>
               <a:t>Third level</a:t>
             </a:r>
+            <a:endParaRPr lang="en-US" smtClean="0"/>
           </a:p>
           <a:p>
             <a:pPr lvl="3"/>
@@ -1598,6 +1597,7 @@
               <a:rPr lang="en-US" smtClean="0"/>
               <a:t>Fourth level</a:t>
             </a:r>
+            <a:endParaRPr lang="en-US" smtClean="0"/>
           </a:p>
           <a:p>
             <a:pPr lvl="4"/>
@@ -1671,6 +1671,7 @@
               <a:rPr lang="en-US" smtClean="0"/>
               <a:t>Click to edit Master text styles</a:t>
             </a:r>
+            <a:endParaRPr lang="en-US" smtClean="0"/>
           </a:p>
         </p:txBody>
       </p:sp>
@@ -1727,6 +1728,7 @@
               <a:rPr lang="en-US" smtClean="0"/>
               <a:t>Click to edit Master text styles</a:t>
             </a:r>
+            <a:endParaRPr lang="en-US" smtClean="0"/>
           </a:p>
           <a:p>
             <a:pPr lvl="1"/>
@@ -1734,6 +1736,7 @@
               <a:rPr lang="en-US" smtClean="0"/>
               <a:t>Second level</a:t>
             </a:r>
+            <a:endParaRPr lang="en-US" smtClean="0"/>
           </a:p>
           <a:p>
             <a:pPr lvl="2"/>
@@ -1741,6 +1744,7 @@
               <a:rPr lang="en-US" smtClean="0"/>
               <a:t>Third level</a:t>
             </a:r>
+            <a:endParaRPr lang="en-US" smtClean="0"/>
           </a:p>
           <a:p>
             <a:pPr lvl="3"/>
@@ -1748,6 +1752,7 @@
               <a:rPr lang="en-US" smtClean="0"/>
               <a:t>Fourth level</a:t>
             </a:r>
+            <a:endParaRPr lang="en-US" smtClean="0"/>
           </a:p>
           <a:p>
             <a:pPr lvl="4"/>
@@ -1776,7 +1781,6 @@
           <a:p>
             <a:fld id="{5BCAD085-E8A6-8845-BD4E-CB4CCA059FC4}" type="datetimeFigureOut">
               <a:rPr lang="en-US" smtClean="0"/>
-              <a:t>1/27/13</a:t>
             </a:fld>
             <a:endParaRPr lang="en-US"/>
           </a:p>
@@ -1818,18 +1822,12 @@
           <a:p>
             <a:fld id="{C1FF6DA9-008F-8B48-92A6-B652298478BF}" type="slidenum">
               <a:rPr lang="en-US" smtClean="0"/>
-              <a:t>‹#›</a:t>
             </a:fld>
             <a:endParaRPr lang="en-US"/>
           </a:p>
         </p:txBody>
       </p:sp>
     </p:spTree>
-    <p:extLst>
-      <p:ext uri="{BB962C8B-B14F-4D97-AF65-F5344CB8AC3E}">
-        <p14:creationId xmlns:p14="http://schemas.microsoft.com/office/powerpoint/2010/main" val="990158736"/>
-      </p:ext>
-    </p:extLst>
   </p:cSld>
   <p:clrMapOvr>
     <a:masterClrMapping/>
@@ -1894,7 +1892,6 @@
           <a:p>
             <a:fld id="{5BCAD085-E8A6-8845-BD4E-CB4CCA059FC4}" type="datetimeFigureOut">
               <a:rPr lang="en-US" smtClean="0"/>
-              <a:t>1/27/13</a:t>
             </a:fld>
             <a:endParaRPr lang="en-US"/>
           </a:p>
@@ -1936,18 +1933,12 @@
           <a:p>
             <a:fld id="{C1FF6DA9-008F-8B48-92A6-B652298478BF}" type="slidenum">
               <a:rPr lang="en-US" smtClean="0"/>
-              <a:t>‹#›</a:t>
             </a:fld>
             <a:endParaRPr lang="en-US"/>
           </a:p>
         </p:txBody>
       </p:sp>
     </p:spTree>
-    <p:extLst>
-      <p:ext uri="{BB962C8B-B14F-4D97-AF65-F5344CB8AC3E}">
-        <p14:creationId xmlns:p14="http://schemas.microsoft.com/office/powerpoint/2010/main" val="727027711"/>
-      </p:ext>
-    </p:extLst>
   </p:cSld>
   <p:clrMapOvr>
     <a:masterClrMapping/>
@@ -1989,7 +1980,6 @@
           <a:p>
             <a:fld id="{5BCAD085-E8A6-8845-BD4E-CB4CCA059FC4}" type="datetimeFigureOut">
               <a:rPr lang="en-US" smtClean="0"/>
-              <a:t>1/27/13</a:t>
             </a:fld>
             <a:endParaRPr lang="en-US"/>
           </a:p>
@@ -2031,18 +2021,12 @@
           <a:p>
             <a:fld id="{C1FF6DA9-008F-8B48-92A6-B652298478BF}" type="slidenum">
               <a:rPr lang="en-US" smtClean="0"/>
-              <a:t>‹#›</a:t>
             </a:fld>
             <a:endParaRPr lang="en-US"/>
           </a:p>
         </p:txBody>
       </p:sp>
     </p:spTree>
-    <p:extLst>
-      <p:ext uri="{BB962C8B-B14F-4D97-AF65-F5344CB8AC3E}">
-        <p14:creationId xmlns:p14="http://schemas.microsoft.com/office/powerpoint/2010/main" val="1212999818"/>
-      </p:ext>
-    </p:extLst>
   </p:cSld>
   <p:clrMapOvr>
     <a:masterClrMapping/>
@@ -2152,6 +2136,7 @@
               <a:rPr lang="en-US" smtClean="0"/>
               <a:t>Click to edit Master text styles</a:t>
             </a:r>
+            <a:endParaRPr lang="en-US" smtClean="0"/>
           </a:p>
           <a:p>
             <a:pPr lvl="1"/>
@@ -2159,6 +2144,7 @@
               <a:rPr lang="en-US" smtClean="0"/>
               <a:t>Second level</a:t>
             </a:r>
+            <a:endParaRPr lang="en-US" smtClean="0"/>
           </a:p>
           <a:p>
             <a:pPr lvl="2"/>
@@ -2166,6 +2152,7 @@
               <a:rPr lang="en-US" smtClean="0"/>
               <a:t>Third level</a:t>
             </a:r>
+            <a:endParaRPr lang="en-US" smtClean="0"/>
           </a:p>
           <a:p>
             <a:pPr lvl="3"/>
@@ -2173,6 +2160,7 @@
               <a:rPr lang="en-US" smtClean="0"/>
               <a:t>Fourth level</a:t>
             </a:r>
+            <a:endParaRPr lang="en-US" smtClean="0"/>
           </a:p>
           <a:p>
             <a:pPr lvl="4"/>
@@ -2246,6 +2234,7 @@
               <a:rPr lang="en-US" smtClean="0"/>
               <a:t>Click to edit Master text styles</a:t>
             </a:r>
+            <a:endParaRPr lang="en-US" smtClean="0"/>
           </a:p>
         </p:txBody>
       </p:sp>
@@ -2266,7 +2255,6 @@
           <a:p>
             <a:fld id="{5BCAD085-E8A6-8845-BD4E-CB4CCA059FC4}" type="datetimeFigureOut">
               <a:rPr lang="en-US" smtClean="0"/>
-              <a:t>1/27/13</a:t>
             </a:fld>
             <a:endParaRPr lang="en-US"/>
           </a:p>
@@ -2308,18 +2296,12 @@
           <a:p>
             <a:fld id="{C1FF6DA9-008F-8B48-92A6-B652298478BF}" type="slidenum">
               <a:rPr lang="en-US" smtClean="0"/>
-              <a:t>‹#›</a:t>
             </a:fld>
             <a:endParaRPr lang="en-US"/>
           </a:p>
         </p:txBody>
       </p:sp>
     </p:spTree>
-    <p:extLst>
-      <p:ext uri="{BB962C8B-B14F-4D97-AF65-F5344CB8AC3E}">
-        <p14:creationId xmlns:p14="http://schemas.microsoft.com/office/powerpoint/2010/main" val="1840726560"/>
-      </p:ext>
-    </p:extLst>
   </p:cSld>
   <p:clrMapOvr>
     <a:masterClrMapping/>
@@ -2499,6 +2481,7 @@
               <a:rPr lang="en-US" smtClean="0"/>
               <a:t>Click to edit Master text styles</a:t>
             </a:r>
+            <a:endParaRPr lang="en-US" smtClean="0"/>
           </a:p>
         </p:txBody>
       </p:sp>
@@ -2519,7 +2502,6 @@
           <a:p>
             <a:fld id="{5BCAD085-E8A6-8845-BD4E-CB4CCA059FC4}" type="datetimeFigureOut">
               <a:rPr lang="en-US" smtClean="0"/>
-              <a:t>1/27/13</a:t>
             </a:fld>
             <a:endParaRPr lang="en-US"/>
           </a:p>
@@ -2561,18 +2543,12 @@
           <a:p>
             <a:fld id="{C1FF6DA9-008F-8B48-92A6-B652298478BF}" type="slidenum">
               <a:rPr lang="en-US" smtClean="0"/>
-              <a:t>‹#›</a:t>
             </a:fld>
             <a:endParaRPr lang="en-US"/>
           </a:p>
         </p:txBody>
       </p:sp>
     </p:spTree>
-    <p:extLst>
-      <p:ext uri="{BB962C8B-B14F-4D97-AF65-F5344CB8AC3E}">
-        <p14:creationId xmlns:p14="http://schemas.microsoft.com/office/powerpoint/2010/main" val="3889236939"/>
-      </p:ext>
-    </p:extLst>
   </p:cSld>
   <p:clrMapOvr>
     <a:masterClrMapping/>
@@ -2665,6 +2641,7 @@
               <a:rPr lang="en-US" smtClean="0"/>
               <a:t>Click to edit Master text styles</a:t>
             </a:r>
+            <a:endParaRPr lang="en-US" smtClean="0"/>
           </a:p>
           <a:p>
             <a:pPr lvl="1"/>
@@ -2672,6 +2649,7 @@
               <a:rPr lang="en-US" smtClean="0"/>
               <a:t>Second level</a:t>
             </a:r>
+            <a:endParaRPr lang="en-US" smtClean="0"/>
           </a:p>
           <a:p>
             <a:pPr lvl="2"/>
@@ -2679,6 +2657,7 @@
               <a:rPr lang="en-US" smtClean="0"/>
               <a:t>Third level</a:t>
             </a:r>
+            <a:endParaRPr lang="en-US" smtClean="0"/>
           </a:p>
           <a:p>
             <a:pPr lvl="3"/>
@@ -2686,6 +2665,7 @@
               <a:rPr lang="en-US" smtClean="0"/>
               <a:t>Fourth level</a:t>
             </a:r>
+            <a:endParaRPr lang="en-US" smtClean="0"/>
           </a:p>
           <a:p>
             <a:pPr lvl="4"/>
@@ -2732,7 +2712,6 @@
           <a:p>
             <a:fld id="{5BCAD085-E8A6-8845-BD4E-CB4CCA059FC4}" type="datetimeFigureOut">
               <a:rPr lang="en-US" smtClean="0"/>
-              <a:t>1/27/13</a:t>
             </a:fld>
             <a:endParaRPr lang="en-US"/>
           </a:p>
@@ -2810,18 +2789,12 @@
           <a:p>
             <a:fld id="{C1FF6DA9-008F-8B48-92A6-B652298478BF}" type="slidenum">
               <a:rPr lang="en-US" smtClean="0"/>
-              <a:t>‹#›</a:t>
             </a:fld>
             <a:endParaRPr lang="en-US"/>
           </a:p>
         </p:txBody>
       </p:sp>
     </p:spTree>
-    <p:extLst>
-      <p:ext uri="{BB962C8B-B14F-4D97-AF65-F5344CB8AC3E}">
-        <p14:creationId xmlns:p14="http://schemas.microsoft.com/office/powerpoint/2010/main" val="2209977519"/>
-      </p:ext>
-    </p:extLst>
   </p:cSld>
   <p:clrMap bg1="lt1" tx1="dk1" bg2="lt2" tx2="dk2" accent1="accent1" accent2="accent2" accent3="accent3" accent4="accent4" accent5="accent5" accent6="accent6" hlink="hlink" folHlink="folHlink"/>
   <p:sldLayoutIdLst>
@@ -2859,7 +2832,7 @@
         <a:spcBef>
           <a:spcPct val="20000"/>
         </a:spcBef>
-        <a:buFont typeface="Arial"/>
+        <a:buFont typeface="Arial" panose="020B0604020202020204"/>
         <a:buChar char="•"/>
         <a:defRPr sz="3200" kern="1200">
           <a:solidFill>
@@ -2874,7 +2847,7 @@
         <a:spcBef>
           <a:spcPct val="20000"/>
         </a:spcBef>
-        <a:buFont typeface="Arial"/>
+        <a:buFont typeface="Arial" panose="020B0604020202020204"/>
         <a:buChar char="–"/>
         <a:defRPr sz="2800" kern="1200">
           <a:solidFill>
@@ -2889,7 +2862,7 @@
         <a:spcBef>
           <a:spcPct val="20000"/>
         </a:spcBef>
-        <a:buFont typeface="Arial"/>
+        <a:buFont typeface="Arial" panose="020B0604020202020204"/>
         <a:buChar char="•"/>
         <a:defRPr sz="2400" kern="1200">
           <a:solidFill>
@@ -2904,7 +2877,7 @@
         <a:spcBef>
           <a:spcPct val="20000"/>
         </a:spcBef>
-        <a:buFont typeface="Arial"/>
+        <a:buFont typeface="Arial" panose="020B0604020202020204"/>
         <a:buChar char="–"/>
         <a:defRPr sz="2000" kern="1200">
           <a:solidFill>
@@ -2919,7 +2892,7 @@
         <a:spcBef>
           <a:spcPct val="20000"/>
         </a:spcBef>
-        <a:buFont typeface="Arial"/>
+        <a:buFont typeface="Arial" panose="020B0604020202020204"/>
         <a:buChar char="»"/>
         <a:defRPr sz="2000" kern="1200">
           <a:solidFill>
@@ -2934,7 +2907,7 @@
         <a:spcBef>
           <a:spcPct val="20000"/>
         </a:spcBef>
-        <a:buFont typeface="Arial"/>
+        <a:buFont typeface="Arial" panose="020B0604020202020204"/>
         <a:buChar char="•"/>
         <a:defRPr sz="2000" kern="1200">
           <a:solidFill>
@@ -2949,7 +2922,7 @@
         <a:spcBef>
           <a:spcPct val="20000"/>
         </a:spcBef>
-        <a:buFont typeface="Arial"/>
+        <a:buFont typeface="Arial" panose="020B0604020202020204"/>
         <a:buChar char="•"/>
         <a:defRPr sz="2000" kern="1200">
           <a:solidFill>
@@ -2964,7 +2937,7 @@
         <a:spcBef>
           <a:spcPct val="20000"/>
         </a:spcBef>
-        <a:buFont typeface="Arial"/>
+        <a:buFont typeface="Arial" panose="020B0604020202020204"/>
         <a:buChar char="•"/>
         <a:defRPr sz="2000" kern="1200">
           <a:solidFill>
@@ -2979,7 +2952,7 @@
         <a:spcBef>
           <a:spcPct val="20000"/>
         </a:spcBef>
-        <a:buFont typeface="Arial"/>
+        <a:buFont typeface="Arial" panose="020B0604020202020204"/>
         <a:buChar char="•"/>
         <a:defRPr sz="2000" kern="1200">
           <a:solidFill>
@@ -3091,7 +3064,7 @@
 </file>
 
 <file path=ppt/slides/slide1.xml><?xml version="1.0" encoding="utf-8"?>
-<p:sld xmlns:a="http://schemas.openxmlformats.org/drawingml/2006/main" xmlns:p="http://schemas.openxmlformats.org/presentationml/2006/main" xmlns:r="http://schemas.openxmlformats.org/officeDocument/2006/relationships">
+<p:sld xmlns:a="http://schemas.openxmlformats.org/drawingml/2006/main" xmlns:r="http://schemas.openxmlformats.org/officeDocument/2006/relationships" xmlns:p="http://schemas.openxmlformats.org/presentationml/2006/main">
   <p:cSld>
     <p:spTree>
       <p:nvGrpSpPr>
@@ -3161,7 +3134,7 @@
           <a:noFill/>
         </p:spPr>
         <p:txBody>
-          <a:bodyPr wrap="square" anchor="t" lIns="0" rIns="0" tIns="0" bIns="0">
+          <a:bodyPr wrap="square" lIns="0" tIns="0" rIns="0" bIns="0" anchor="t">
             <a:spAutoFit/>
           </a:bodyPr>
           <a:lstStyle/>
@@ -3172,12 +3145,20 @@
                 <a:solidFill>
                   <a:srgbClr val="7FE3FF"/>
                 </a:solidFill>
-                <a:latin typeface="微软雅黑"/>
-                <a:ea typeface="微软雅黑"/>
-                <a:cs typeface="微软雅黑"/>
+                <a:latin typeface="微软雅黑" panose="020B0503020204020204" charset="-122"/>
+                <a:ea typeface="微软雅黑" panose="020B0503020204020204" charset="-122"/>
+                <a:cs typeface="微软雅黑" panose="020B0503020204020204" charset="-122"/>
               </a:rPr>
               <a:t>项目介绍 · 2026</a:t>
             </a:r>
+            <a:endParaRPr sz="1400" b="1" i="0">
+              <a:solidFill>
+                <a:srgbClr val="7FE3FF"/>
+              </a:solidFill>
+              <a:latin typeface="微软雅黑" panose="020B0503020204020204" charset="-122"/>
+              <a:ea typeface="微软雅黑" panose="020B0503020204020204" charset="-122"/>
+              <a:cs typeface="微软雅黑" panose="020B0503020204020204" charset="-122"/>
+            </a:endParaRPr>
           </a:p>
         </p:txBody>
       </p:sp>
@@ -3198,7 +3179,7 @@
           <a:noFill/>
         </p:spPr>
         <p:txBody>
-          <a:bodyPr wrap="square" anchor="t" lIns="0" rIns="0" tIns="0" bIns="0">
+          <a:bodyPr wrap="square" lIns="0" tIns="0" rIns="0" bIns="0" anchor="t">
             <a:spAutoFit/>
           </a:bodyPr>
           <a:lstStyle/>
@@ -3213,12 +3194,20 @@
                 <a:solidFill>
                   <a:srgbClr val="FFFFFF"/>
                 </a:solidFill>
-                <a:latin typeface="微软雅黑"/>
-                <a:ea typeface="微软雅黑"/>
-                <a:cs typeface="微软雅黑"/>
+                <a:latin typeface="微软雅黑" panose="020B0503020204020204" charset="-122"/>
+                <a:ea typeface="微软雅黑" panose="020B0503020204020204" charset="-122"/>
+                <a:cs typeface="微软雅黑" panose="020B0503020204020204" charset="-122"/>
               </a:rPr>
               <a:t>医院数据管理平台</a:t>
             </a:r>
+            <a:endParaRPr sz="4400" b="1" i="0">
+              <a:solidFill>
+                <a:srgbClr val="FFFFFF"/>
+              </a:solidFill>
+              <a:latin typeface="微软雅黑" panose="020B0503020204020204" charset="-122"/>
+              <a:ea typeface="微软雅黑" panose="020B0503020204020204" charset="-122"/>
+              <a:cs typeface="微软雅黑" panose="020B0503020204020204" charset="-122"/>
+            </a:endParaRPr>
           </a:p>
           <a:p>
             <a:pPr algn="l"/>
@@ -3227,12 +3216,20 @@
                 <a:solidFill>
                   <a:srgbClr val="7FE3FF"/>
                 </a:solidFill>
-                <a:latin typeface="微软雅黑"/>
-                <a:ea typeface="微软雅黑"/>
-                <a:cs typeface="微软雅黑"/>
+                <a:latin typeface="微软雅黑" panose="020B0503020204020204" charset="-122"/>
+                <a:ea typeface="微软雅黑" panose="020B0503020204020204" charset="-122"/>
+                <a:cs typeface="微软雅黑" panose="020B0503020204020204" charset="-122"/>
               </a:rPr>
               <a:t>急救绿道</a:t>
             </a:r>
+            <a:endParaRPr sz="4400" b="1" i="0">
+              <a:solidFill>
+                <a:srgbClr val="7FE3FF"/>
+              </a:solidFill>
+              <a:latin typeface="微软雅黑" panose="020B0503020204020204" charset="-122"/>
+              <a:ea typeface="微软雅黑" panose="020B0503020204020204" charset="-122"/>
+              <a:cs typeface="微软雅黑" panose="020B0503020204020204" charset="-122"/>
+            </a:endParaRPr>
           </a:p>
         </p:txBody>
       </p:sp>
@@ -3253,7 +3250,7 @@
           <a:noFill/>
         </p:spPr>
         <p:txBody>
-          <a:bodyPr wrap="square" anchor="t" lIns="0" rIns="0" tIns="0" bIns="0">
+          <a:bodyPr wrap="square" lIns="0" tIns="0" rIns="0" bIns="0" anchor="t">
             <a:spAutoFit/>
           </a:bodyPr>
           <a:lstStyle/>
@@ -3268,12 +3265,20 @@
                 <a:solidFill>
                   <a:srgbClr val="C7DCF2"/>
                 </a:solidFill>
-                <a:latin typeface="微软雅黑"/>
-                <a:ea typeface="微软雅黑"/>
-                <a:cs typeface="微软雅黑"/>
+                <a:latin typeface="微软雅黑" panose="020B0503020204020204" charset="-122"/>
+                <a:ea typeface="微软雅黑" panose="020B0503020204020204" charset="-122"/>
+                <a:cs typeface="微软雅黑" panose="020B0503020204020204" charset="-122"/>
               </a:rPr>
               <a:t>一块大屏看全局，一个后台管细节。</a:t>
             </a:r>
+            <a:endParaRPr sz="1700" b="0" i="0">
+              <a:solidFill>
+                <a:srgbClr val="C7DCF2"/>
+              </a:solidFill>
+              <a:latin typeface="微软雅黑" panose="020B0503020204020204" charset="-122"/>
+              <a:ea typeface="微软雅黑" panose="020B0503020204020204" charset="-122"/>
+              <a:cs typeface="微软雅黑" panose="020B0503020204020204" charset="-122"/>
+            </a:endParaRPr>
           </a:p>
           <a:p>
             <a:pPr algn="l"/>
@@ -3282,12 +3287,20 @@
                 <a:solidFill>
                   <a:srgbClr val="C7DCF2"/>
                 </a:solidFill>
-                <a:latin typeface="微软雅黑"/>
-                <a:ea typeface="微软雅黑"/>
-                <a:cs typeface="微软雅黑"/>
+                <a:latin typeface="微软雅黑" panose="020B0503020204020204" charset="-122"/>
+                <a:ea typeface="微软雅黑" panose="020B0503020204020204" charset="-122"/>
+                <a:cs typeface="微软雅黑" panose="020B0503020204020204" charset="-122"/>
               </a:rPr>
               <a:t>这份 PPT 用大白话讲清楚：它是什么、怎么做的、怎么用。</a:t>
             </a:r>
+            <a:endParaRPr sz="1700" b="0" i="0">
+              <a:solidFill>
+                <a:srgbClr val="C7DCF2"/>
+              </a:solidFill>
+              <a:latin typeface="微软雅黑" panose="020B0503020204020204" charset="-122"/>
+              <a:ea typeface="微软雅黑" panose="020B0503020204020204" charset="-122"/>
+              <a:cs typeface="微软雅黑" panose="020B0503020204020204" charset="-122"/>
+            </a:endParaRPr>
           </a:p>
         </p:txBody>
       </p:sp>
@@ -3378,7 +3391,7 @@
           </a:fontRef>
         </p:style>
         <p:txBody>
-          <a:bodyPr rtlCol="0" anchor="ctr" lIns="0" rIns="0" tIns="0" bIns="0"/>
+          <a:bodyPr lIns="0" tIns="0" rIns="0" bIns="0" rtlCol="0" anchor="ctr"/>
           <a:lstStyle/>
           <a:p>
             <a:pPr algn="ctr"/>
@@ -3387,12 +3400,20 @@
                 <a:solidFill>
                   <a:srgbClr val="FFFFFF"/>
                 </a:solidFill>
-                <a:latin typeface="微软雅黑"/>
-                <a:ea typeface="微软雅黑"/>
-                <a:cs typeface="微软雅黑"/>
+                <a:latin typeface="微软雅黑" panose="020B0503020204020204" charset="-122"/>
+                <a:ea typeface="微软雅黑" panose="020B0503020204020204" charset="-122"/>
+                <a:cs typeface="微软雅黑" panose="020B0503020204020204" charset="-122"/>
               </a:rPr>
               <a:t>1</a:t>
             </a:r>
+            <a:endParaRPr sz="1100" b="1" i="0">
+              <a:solidFill>
+                <a:srgbClr val="FFFFFF"/>
+              </a:solidFill>
+              <a:latin typeface="微软雅黑" panose="020B0503020204020204" charset="-122"/>
+              <a:ea typeface="微软雅黑" panose="020B0503020204020204" charset="-122"/>
+              <a:cs typeface="微软雅黑" panose="020B0503020204020204" charset="-122"/>
+            </a:endParaRPr>
           </a:p>
         </p:txBody>
       </p:sp>
@@ -3413,7 +3434,7 @@
           <a:noFill/>
         </p:spPr>
         <p:txBody>
-          <a:bodyPr wrap="square" anchor="t" lIns="0" rIns="0" tIns="0" bIns="0">
+          <a:bodyPr wrap="square" lIns="0" tIns="0" rIns="0" bIns="0" anchor="t">
             <a:spAutoFit/>
           </a:bodyPr>
           <a:lstStyle/>
@@ -3428,12 +3449,20 @@
                 <a:solidFill>
                   <a:srgbClr val="FFFFFF"/>
                 </a:solidFill>
-                <a:latin typeface="微软雅黑"/>
-                <a:ea typeface="微软雅黑"/>
-                <a:cs typeface="微软雅黑"/>
+                <a:latin typeface="微软雅黑" panose="020B0503020204020204" charset="-122"/>
+                <a:ea typeface="微软雅黑" panose="020B0503020204020204" charset="-122"/>
+                <a:cs typeface="微软雅黑" panose="020B0503020204020204" charset="-122"/>
               </a:rPr>
               <a:t>全自动</a:t>
             </a:r>
+            <a:endParaRPr sz="1300" b="1" i="0">
+              <a:solidFill>
+                <a:srgbClr val="FFFFFF"/>
+              </a:solidFill>
+              <a:latin typeface="微软雅黑" panose="020B0503020204020204" charset="-122"/>
+              <a:ea typeface="微软雅黑" panose="020B0503020204020204" charset="-122"/>
+              <a:cs typeface="微软雅黑" panose="020B0503020204020204" charset="-122"/>
+            </a:endParaRPr>
           </a:p>
           <a:p>
             <a:pPr algn="l">
@@ -3446,12 +3475,20 @@
                 <a:solidFill>
                   <a:srgbClr val="7F9DC4"/>
                 </a:solidFill>
-                <a:latin typeface="微软雅黑"/>
-                <a:ea typeface="微软雅黑"/>
-                <a:cs typeface="微软雅黑"/>
+                <a:latin typeface="微软雅黑" panose="020B0503020204020204" charset="-122"/>
+                <a:ea typeface="微软雅黑" panose="020B0503020204020204" charset="-122"/>
+                <a:cs typeface="微软雅黑" panose="020B0503020204020204" charset="-122"/>
               </a:rPr>
               <a:t>双击启动，之后开机即用、崩了自愈</a:t>
             </a:r>
+            <a:endParaRPr sz="950" b="0" i="0">
+              <a:solidFill>
+                <a:srgbClr val="7F9DC4"/>
+              </a:solidFill>
+              <a:latin typeface="微软雅黑" panose="020B0503020204020204" charset="-122"/>
+              <a:ea typeface="微软雅黑" panose="020B0503020204020204" charset="-122"/>
+              <a:cs typeface="微软雅黑" panose="020B0503020204020204" charset="-122"/>
+            </a:endParaRPr>
           </a:p>
         </p:txBody>
       </p:sp>
@@ -3542,7 +3579,7 @@
           </a:fontRef>
         </p:style>
         <p:txBody>
-          <a:bodyPr rtlCol="0" anchor="ctr" lIns="0" rIns="0" tIns="0" bIns="0"/>
+          <a:bodyPr lIns="0" tIns="0" rIns="0" bIns="0" rtlCol="0" anchor="ctr"/>
           <a:lstStyle/>
           <a:p>
             <a:pPr algn="ctr"/>
@@ -3551,12 +3588,20 @@
                 <a:solidFill>
                   <a:srgbClr val="FFFFFF"/>
                 </a:solidFill>
-                <a:latin typeface="微软雅黑"/>
-                <a:ea typeface="微软雅黑"/>
-                <a:cs typeface="微软雅黑"/>
+                <a:latin typeface="微软雅黑" panose="020B0503020204020204" charset="-122"/>
+                <a:ea typeface="微软雅黑" panose="020B0503020204020204" charset="-122"/>
+                <a:cs typeface="微软雅黑" panose="020B0503020204020204" charset="-122"/>
               </a:rPr>
               <a:t>2</a:t>
             </a:r>
+            <a:endParaRPr sz="1100" b="1" i="0">
+              <a:solidFill>
+                <a:srgbClr val="FFFFFF"/>
+              </a:solidFill>
+              <a:latin typeface="微软雅黑" panose="020B0503020204020204" charset="-122"/>
+              <a:ea typeface="微软雅黑" panose="020B0503020204020204" charset="-122"/>
+              <a:cs typeface="微软雅黑" panose="020B0503020204020204" charset="-122"/>
+            </a:endParaRPr>
           </a:p>
         </p:txBody>
       </p:sp>
@@ -3577,7 +3622,7 @@
           <a:noFill/>
         </p:spPr>
         <p:txBody>
-          <a:bodyPr wrap="square" anchor="t" lIns="0" rIns="0" tIns="0" bIns="0">
+          <a:bodyPr wrap="square" lIns="0" tIns="0" rIns="0" bIns="0" anchor="t">
             <a:spAutoFit/>
           </a:bodyPr>
           <a:lstStyle/>
@@ -3592,12 +3637,20 @@
                 <a:solidFill>
                   <a:srgbClr val="FFFFFF"/>
                 </a:solidFill>
-                <a:latin typeface="微软雅黑"/>
-                <a:ea typeface="微软雅黑"/>
-                <a:cs typeface="微软雅黑"/>
+                <a:latin typeface="微软雅黑" panose="020B0503020204020204" charset="-122"/>
+                <a:ea typeface="微软雅黑" panose="020B0503020204020204" charset="-122"/>
+                <a:cs typeface="微软雅黑" panose="020B0503020204020204" charset="-122"/>
               </a:rPr>
               <a:t>有验收</a:t>
             </a:r>
+            <a:endParaRPr sz="1300" b="1" i="0">
+              <a:solidFill>
+                <a:srgbClr val="FFFFFF"/>
+              </a:solidFill>
+              <a:latin typeface="微软雅黑" panose="020B0503020204020204" charset="-122"/>
+              <a:ea typeface="微软雅黑" panose="020B0503020204020204" charset="-122"/>
+              <a:cs typeface="微软雅黑" panose="020B0503020204020204" charset="-122"/>
+            </a:endParaRPr>
           </a:p>
           <a:p>
             <a:pPr algn="l">
@@ -3610,12 +3663,20 @@
                 <a:solidFill>
                   <a:srgbClr val="7F9DC4"/>
                 </a:solidFill>
-                <a:latin typeface="微软雅黑"/>
-                <a:ea typeface="微软雅黑"/>
-                <a:cs typeface="微软雅黑"/>
+                <a:latin typeface="微软雅黑" panose="020B0503020204020204" charset="-122"/>
+                <a:ea typeface="微软雅黑" panose="020B0503020204020204" charset="-122"/>
+                <a:cs typeface="微软雅黑" panose="020B0503020204020204" charset="-122"/>
               </a:rPr>
               <a:t>71 项自动化检查，改坏了立刻知道</a:t>
             </a:r>
+            <a:endParaRPr sz="950" b="0" i="0">
+              <a:solidFill>
+                <a:srgbClr val="7F9DC4"/>
+              </a:solidFill>
+              <a:latin typeface="微软雅黑" panose="020B0503020204020204" charset="-122"/>
+              <a:ea typeface="微软雅黑" panose="020B0503020204020204" charset="-122"/>
+              <a:cs typeface="微软雅黑" panose="020B0503020204020204" charset="-122"/>
+            </a:endParaRPr>
           </a:p>
         </p:txBody>
       </p:sp>
@@ -3706,7 +3767,7 @@
           </a:fontRef>
         </p:style>
         <p:txBody>
-          <a:bodyPr rtlCol="0" anchor="ctr" lIns="0" rIns="0" tIns="0" bIns="0"/>
+          <a:bodyPr lIns="0" tIns="0" rIns="0" bIns="0" rtlCol="0" anchor="ctr"/>
           <a:lstStyle/>
           <a:p>
             <a:pPr algn="ctr"/>
@@ -3715,12 +3776,20 @@
                 <a:solidFill>
                   <a:srgbClr val="FFFFFF"/>
                 </a:solidFill>
-                <a:latin typeface="微软雅黑"/>
-                <a:ea typeface="微软雅黑"/>
-                <a:cs typeface="微软雅黑"/>
+                <a:latin typeface="微软雅黑" panose="020B0503020204020204" charset="-122"/>
+                <a:ea typeface="微软雅黑" panose="020B0503020204020204" charset="-122"/>
+                <a:cs typeface="微软雅黑" panose="020B0503020204020204" charset="-122"/>
               </a:rPr>
               <a:t>3</a:t>
             </a:r>
+            <a:endParaRPr sz="1100" b="1" i="0">
+              <a:solidFill>
+                <a:srgbClr val="FFFFFF"/>
+              </a:solidFill>
+              <a:latin typeface="微软雅黑" panose="020B0503020204020204" charset="-122"/>
+              <a:ea typeface="微软雅黑" panose="020B0503020204020204" charset="-122"/>
+              <a:cs typeface="微软雅黑" panose="020B0503020204020204" charset="-122"/>
+            </a:endParaRPr>
           </a:p>
         </p:txBody>
       </p:sp>
@@ -3741,7 +3810,7 @@
           <a:noFill/>
         </p:spPr>
         <p:txBody>
-          <a:bodyPr wrap="square" anchor="t" lIns="0" rIns="0" tIns="0" bIns="0">
+          <a:bodyPr wrap="square" lIns="0" tIns="0" rIns="0" bIns="0" anchor="t">
             <a:spAutoFit/>
           </a:bodyPr>
           <a:lstStyle/>
@@ -3756,12 +3825,20 @@
                 <a:solidFill>
                   <a:srgbClr val="FFFFFF"/>
                 </a:solidFill>
-                <a:latin typeface="微软雅黑"/>
-                <a:ea typeface="微软雅黑"/>
-                <a:cs typeface="微软雅黑"/>
+                <a:latin typeface="微软雅黑" panose="020B0503020204020204" charset="-122"/>
+                <a:ea typeface="微软雅黑" panose="020B0503020204020204" charset="-122"/>
+                <a:cs typeface="微软雅黑" panose="020B0503020204020204" charset="-122"/>
               </a:rPr>
               <a:t>已脱敏</a:t>
             </a:r>
+            <a:endParaRPr sz="1300" b="1" i="0">
+              <a:solidFill>
+                <a:srgbClr val="FFFFFF"/>
+              </a:solidFill>
+              <a:latin typeface="微软雅黑" panose="020B0503020204020204" charset="-122"/>
+              <a:ea typeface="微软雅黑" panose="020B0503020204020204" charset="-122"/>
+              <a:cs typeface="微软雅黑" panose="020B0503020204020204" charset="-122"/>
+            </a:endParaRPr>
           </a:p>
           <a:p>
             <a:pPr algn="l">
@@ -3774,12 +3851,20 @@
                 <a:solidFill>
                   <a:srgbClr val="7F9DC4"/>
                 </a:solidFill>
-                <a:latin typeface="微软雅黑"/>
-                <a:ea typeface="微软雅黑"/>
-                <a:cs typeface="微软雅黑"/>
+                <a:latin typeface="微软雅黑" panose="020B0503020204020204" charset="-122"/>
+                <a:ea typeface="微软雅黑" panose="020B0503020204020204" charset="-122"/>
+                <a:cs typeface="微软雅黑" panose="020B0503020204020204" charset="-122"/>
               </a:rPr>
               <a:t>示例机构名与合成数据，可安全公开</a:t>
             </a:r>
+            <a:endParaRPr sz="950" b="0" i="0">
+              <a:solidFill>
+                <a:srgbClr val="7F9DC4"/>
+              </a:solidFill>
+              <a:latin typeface="微软雅黑" panose="020B0503020204020204" charset="-122"/>
+              <a:ea typeface="微软雅黑" panose="020B0503020204020204" charset="-122"/>
+              <a:cs typeface="微软雅黑" panose="020B0503020204020204" charset="-122"/>
+            </a:endParaRPr>
           </a:p>
         </p:txBody>
       </p:sp>
@@ -3792,7 +3877,7 @@
 </file>
 
 <file path=ppt/slides/slide10.xml><?xml version="1.0" encoding="utf-8"?>
-<p:sld xmlns:a="http://schemas.openxmlformats.org/drawingml/2006/main" xmlns:p="http://schemas.openxmlformats.org/presentationml/2006/main" xmlns:r="http://schemas.openxmlformats.org/officeDocument/2006/relationships">
+<p:sld xmlns:a="http://schemas.openxmlformats.org/drawingml/2006/main" xmlns:r="http://schemas.openxmlformats.org/officeDocument/2006/relationships" xmlns:p="http://schemas.openxmlformats.org/presentationml/2006/main">
   <p:cSld>
     <p:spTree>
       <p:nvGrpSpPr>
@@ -3862,7 +3947,7 @@
           <a:noFill/>
         </p:spPr>
         <p:txBody>
-          <a:bodyPr wrap="square" anchor="t" lIns="0" rIns="0" tIns="0" bIns="0">
+          <a:bodyPr wrap="square" lIns="0" tIns="0" rIns="0" bIns="0" anchor="t">
             <a:spAutoFit/>
           </a:bodyPr>
           <a:lstStyle/>
@@ -3873,12 +3958,20 @@
                 <a:solidFill>
                   <a:srgbClr val="7FE3FF"/>
                 </a:solidFill>
-                <a:latin typeface="微软雅黑"/>
-                <a:ea typeface="微软雅黑"/>
-                <a:cs typeface="微软雅黑"/>
+                <a:latin typeface="微软雅黑" panose="020B0503020204020204" charset="-122"/>
+                <a:ea typeface="微软雅黑" panose="020B0503020204020204" charset="-122"/>
+                <a:cs typeface="微软雅黑" panose="020B0503020204020204" charset="-122"/>
               </a:rPr>
               <a:t>03 · 怎么用</a:t>
             </a:r>
+            <a:endParaRPr sz="1150" b="1" i="0">
+              <a:solidFill>
+                <a:srgbClr val="7FE3FF"/>
+              </a:solidFill>
+              <a:latin typeface="微软雅黑" panose="020B0503020204020204" charset="-122"/>
+              <a:ea typeface="微软雅黑" panose="020B0503020204020204" charset="-122"/>
+              <a:cs typeface="微软雅黑" panose="020B0503020204020204" charset="-122"/>
+            </a:endParaRPr>
           </a:p>
         </p:txBody>
       </p:sp>
@@ -3899,7 +3992,7 @@
           <a:noFill/>
         </p:spPr>
         <p:txBody>
-          <a:bodyPr wrap="square" anchor="t" lIns="0" rIns="0" tIns="0" bIns="0">
+          <a:bodyPr wrap="square" lIns="0" tIns="0" rIns="0" bIns="0" anchor="t">
             <a:spAutoFit/>
           </a:bodyPr>
           <a:lstStyle/>
@@ -3910,12 +4003,20 @@
                 <a:solidFill>
                   <a:srgbClr val="ECF7FF"/>
                 </a:solidFill>
-                <a:latin typeface="微软雅黑"/>
-                <a:ea typeface="微软雅黑"/>
-                <a:cs typeface="微软雅黑"/>
+                <a:latin typeface="微软雅黑" panose="020B0503020204020204" charset="-122"/>
+                <a:ea typeface="微软雅黑" panose="020B0503020204020204" charset="-122"/>
+                <a:cs typeface="微软雅黑" panose="020B0503020204020204" charset="-122"/>
               </a:rPr>
               <a:t>两个入口，按需要选</a:t>
             </a:r>
+            <a:endParaRPr sz="2700" b="1" i="0">
+              <a:solidFill>
+                <a:srgbClr val="ECF7FF"/>
+              </a:solidFill>
+              <a:latin typeface="微软雅黑" panose="020B0503020204020204" charset="-122"/>
+              <a:ea typeface="微软雅黑" panose="020B0503020204020204" charset="-122"/>
+              <a:cs typeface="微软雅黑" panose="020B0503020204020204" charset="-122"/>
+            </a:endParaRPr>
           </a:p>
         </p:txBody>
       </p:sp>
@@ -3936,7 +4037,7 @@
           <a:noFill/>
         </p:spPr>
         <p:txBody>
-          <a:bodyPr wrap="square" anchor="t" lIns="0" rIns="0" tIns="0" bIns="0">
+          <a:bodyPr wrap="square" lIns="0" tIns="0" rIns="0" bIns="0" anchor="t">
             <a:spAutoFit/>
           </a:bodyPr>
           <a:lstStyle/>
@@ -3947,12 +4048,20 @@
                 <a:solidFill>
                   <a:srgbClr val="7E9EC4"/>
                 </a:solidFill>
-                <a:latin typeface="微软雅黑"/>
-                <a:ea typeface="微软雅黑"/>
-                <a:cs typeface="微软雅黑"/>
+                <a:latin typeface="微软雅黑" panose="020B0503020204020204" charset="-122"/>
+                <a:ea typeface="微软雅黑" panose="020B0503020204020204" charset="-122"/>
+                <a:cs typeface="微软雅黑" panose="020B0503020204020204" charset="-122"/>
               </a:rPr>
               <a:t>急救绿道 · 10 / 13</a:t>
             </a:r>
+            <a:endParaRPr sz="1000" b="0" i="0">
+              <a:solidFill>
+                <a:srgbClr val="7E9EC4"/>
+              </a:solidFill>
+              <a:latin typeface="微软雅黑" panose="020B0503020204020204" charset="-122"/>
+              <a:ea typeface="微软雅黑" panose="020B0503020204020204" charset="-122"/>
+              <a:cs typeface="微软雅黑" panose="020B0503020204020204" charset="-122"/>
+            </a:endParaRPr>
           </a:p>
         </p:txBody>
       </p:sp>
@@ -4065,7 +4174,7 @@
           <a:noFill/>
         </p:spPr>
         <p:txBody>
-          <a:bodyPr wrap="square" anchor="t" lIns="0" rIns="0" tIns="0" bIns="0">
+          <a:bodyPr wrap="square" lIns="0" tIns="0" rIns="0" bIns="0" anchor="t">
             <a:spAutoFit/>
           </a:bodyPr>
           <a:lstStyle/>
@@ -4080,12 +4189,20 @@
                 <a:solidFill>
                   <a:srgbClr val="7E9EC4"/>
                 </a:solidFill>
-                <a:latin typeface="微软雅黑"/>
-                <a:ea typeface="微软雅黑"/>
-                <a:cs typeface="微软雅黑"/>
+                <a:latin typeface="微软雅黑" panose="020B0503020204020204" charset="-122"/>
+                <a:ea typeface="微软雅黑" panose="020B0503020204020204" charset="-122"/>
+                <a:cs typeface="微软雅黑" panose="020B0503020204020204" charset="-122"/>
               </a:rPr>
               <a:t>本地完整版</a:t>
             </a:r>
+            <a:endParaRPr sz="1150" b="1" i="0">
+              <a:solidFill>
+                <a:srgbClr val="7E9EC4"/>
+              </a:solidFill>
+              <a:latin typeface="微软雅黑" panose="020B0503020204020204" charset="-122"/>
+              <a:ea typeface="微软雅黑" panose="020B0503020204020204" charset="-122"/>
+              <a:cs typeface="微软雅黑" panose="020B0503020204020204" charset="-122"/>
+            </a:endParaRPr>
           </a:p>
           <a:p>
             <a:pPr algn="l">
@@ -4098,12 +4215,20 @@
                 <a:solidFill>
                   <a:srgbClr val="ECF7FF"/>
                 </a:solidFill>
-                <a:latin typeface="微软雅黑"/>
-                <a:ea typeface="微软雅黑"/>
-                <a:cs typeface="微软雅黑"/>
+                <a:latin typeface="微软雅黑" panose="020B0503020204020204" charset="-122"/>
+                <a:ea typeface="微软雅黑" panose="020B0503020204020204" charset="-122"/>
+                <a:cs typeface="微软雅黑" panose="020B0503020204020204" charset="-122"/>
               </a:rPr>
               <a:t>功能齐全，装在电脑上跑</a:t>
             </a:r>
+            <a:endParaRPr sz="1800" b="1" i="0">
+              <a:solidFill>
+                <a:srgbClr val="ECF7FF"/>
+              </a:solidFill>
+              <a:latin typeface="微软雅黑" panose="020B0503020204020204" charset="-122"/>
+              <a:ea typeface="微软雅黑" panose="020B0503020204020204" charset="-122"/>
+              <a:cs typeface="微软雅黑" panose="020B0503020204020204" charset="-122"/>
+            </a:endParaRPr>
           </a:p>
           <a:p>
             <a:pPr algn="l">
@@ -4116,12 +4241,20 @@
                 <a:solidFill>
                   <a:srgbClr val="5CC8FF"/>
                 </a:solidFill>
-                <a:latin typeface="微软雅黑"/>
-                <a:ea typeface="微软雅黑"/>
-                <a:cs typeface="微软雅黑"/>
+                <a:latin typeface="微软雅黑" panose="020B0503020204020204" charset="-122"/>
+                <a:ea typeface="微软雅黑" panose="020B0503020204020204" charset="-122"/>
+                <a:cs typeface="微软雅黑" panose="020B0503020204020204" charset="-122"/>
               </a:rPr>
               <a:t>http://127.0.0.1:3000/admin/</a:t>
             </a:r>
+            <a:endParaRPr sz="1100" b="0" i="0">
+              <a:solidFill>
+                <a:srgbClr val="5CC8FF"/>
+              </a:solidFill>
+              <a:latin typeface="微软雅黑" panose="020B0503020204020204" charset="-122"/>
+              <a:ea typeface="微软雅黑" panose="020B0503020204020204" charset="-122"/>
+              <a:cs typeface="微软雅黑" panose="020B0503020204020204" charset="-122"/>
+            </a:endParaRPr>
           </a:p>
           <a:p>
             <a:pPr algn="l">
@@ -4137,12 +4270,20 @@
                 <a:solidFill>
                   <a:srgbClr val="BBD4EC"/>
                 </a:solidFill>
-                <a:latin typeface="微软雅黑"/>
-                <a:ea typeface="微软雅黑"/>
-                <a:cs typeface="微软雅黑"/>
+                <a:latin typeface="微软雅黑" panose="020B0503020204020204" charset="-122"/>
+                <a:ea typeface="微软雅黑" panose="020B0503020204020204" charset="-122"/>
+                <a:cs typeface="微软雅黑" panose="020B0503020204020204" charset="-122"/>
               </a:rPr>
               <a:t>· 登录、增删改、报表导出全都能用</a:t>
             </a:r>
+            <a:endParaRPr sz="1250" b="0" i="0">
+              <a:solidFill>
+                <a:srgbClr val="BBD4EC"/>
+              </a:solidFill>
+              <a:latin typeface="微软雅黑" panose="020B0503020204020204" charset="-122"/>
+              <a:ea typeface="微软雅黑" panose="020B0503020204020204" charset="-122"/>
+              <a:cs typeface="微软雅黑" panose="020B0503020204020204" charset="-122"/>
+            </a:endParaRPr>
           </a:p>
           <a:p>
             <a:pPr algn="l">
@@ -4158,12 +4299,20 @@
                 <a:solidFill>
                   <a:srgbClr val="BBD4EC"/>
                 </a:solidFill>
-                <a:latin typeface="微软雅黑"/>
-                <a:ea typeface="微软雅黑"/>
-                <a:cs typeface="微软雅黑"/>
+                <a:latin typeface="微软雅黑" panose="020B0503020204020204" charset="-122"/>
+                <a:ea typeface="微软雅黑" panose="020B0503020204020204" charset="-122"/>
+                <a:cs typeface="微软雅黑" panose="020B0503020204020204" charset="-122"/>
               </a:rPr>
               <a:t>· 数据存在本机，不外传</a:t>
             </a:r>
+            <a:endParaRPr sz="1250" b="0" i="0">
+              <a:solidFill>
+                <a:srgbClr val="BBD4EC"/>
+              </a:solidFill>
+              <a:latin typeface="微软雅黑" panose="020B0503020204020204" charset="-122"/>
+              <a:ea typeface="微软雅黑" panose="020B0503020204020204" charset="-122"/>
+              <a:cs typeface="微软雅黑" panose="020B0503020204020204" charset="-122"/>
+            </a:endParaRPr>
           </a:p>
           <a:p>
             <a:pPr algn="l">
@@ -4179,12 +4328,20 @@
                 <a:solidFill>
                   <a:srgbClr val="BBD4EC"/>
                 </a:solidFill>
-                <a:latin typeface="微软雅黑"/>
-                <a:ea typeface="微软雅黑"/>
-                <a:cs typeface="微软雅黑"/>
+                <a:latin typeface="微软雅黑" panose="020B0503020204020204" charset="-122"/>
+                <a:ea typeface="微软雅黑" panose="020B0503020204020204" charset="-122"/>
+                <a:cs typeface="微软雅黑" panose="020B0503020204020204" charset="-122"/>
               </a:rPr>
               <a:t>· 双击「启动.bat」即可，无需装环境</a:t>
             </a:r>
+            <a:endParaRPr sz="1250" b="0" i="0">
+              <a:solidFill>
+                <a:srgbClr val="BBD4EC"/>
+              </a:solidFill>
+              <a:latin typeface="微软雅黑" panose="020B0503020204020204" charset="-122"/>
+              <a:ea typeface="微软雅黑" panose="020B0503020204020204" charset="-122"/>
+              <a:cs typeface="微软雅黑" panose="020B0503020204020204" charset="-122"/>
+            </a:endParaRPr>
           </a:p>
           <a:p>
             <a:pPr algn="l">
@@ -4200,12 +4357,20 @@
                 <a:solidFill>
                   <a:srgbClr val="BBD4EC"/>
                 </a:solidFill>
-                <a:latin typeface="微软雅黑"/>
-                <a:ea typeface="微软雅黑"/>
-                <a:cs typeface="微软雅黑"/>
+                <a:latin typeface="微软雅黑" panose="020B0503020204020204" charset="-122"/>
+                <a:ea typeface="微软雅黑" panose="020B0503020204020204" charset="-122"/>
+                <a:cs typeface="微软雅黑" panose="020B0503020204020204" charset="-122"/>
               </a:rPr>
               <a:t>· 适合：院内日常使用、演示汇报</a:t>
             </a:r>
+            <a:endParaRPr sz="1250" b="0" i="0">
+              <a:solidFill>
+                <a:srgbClr val="BBD4EC"/>
+              </a:solidFill>
+              <a:latin typeface="微软雅黑" panose="020B0503020204020204" charset="-122"/>
+              <a:ea typeface="微软雅黑" panose="020B0503020204020204" charset="-122"/>
+              <a:cs typeface="微软雅黑" panose="020B0503020204020204" charset="-122"/>
+            </a:endParaRPr>
           </a:p>
         </p:txBody>
       </p:sp>
@@ -4318,7 +4483,7 @@
           <a:noFill/>
         </p:spPr>
         <p:txBody>
-          <a:bodyPr wrap="square" anchor="t" lIns="0" rIns="0" tIns="0" bIns="0">
+          <a:bodyPr wrap="square" lIns="0" tIns="0" rIns="0" bIns="0" anchor="t">
             <a:spAutoFit/>
           </a:bodyPr>
           <a:lstStyle/>
@@ -4333,12 +4498,20 @@
                 <a:solidFill>
                   <a:srgbClr val="7E9EC4"/>
                 </a:solidFill>
-                <a:latin typeface="微软雅黑"/>
-                <a:ea typeface="微软雅黑"/>
-                <a:cs typeface="微软雅黑"/>
+                <a:latin typeface="微软雅黑" panose="020B0503020204020204" charset="-122"/>
+                <a:ea typeface="微软雅黑" panose="020B0503020204020204" charset="-122"/>
+                <a:cs typeface="微软雅黑" panose="020B0503020204020204" charset="-122"/>
               </a:rPr>
               <a:t>公网演示版</a:t>
             </a:r>
+            <a:endParaRPr sz="1150" b="1" i="0">
+              <a:solidFill>
+                <a:srgbClr val="7E9EC4"/>
+              </a:solidFill>
+              <a:latin typeface="微软雅黑" panose="020B0503020204020204" charset="-122"/>
+              <a:ea typeface="微软雅黑" panose="020B0503020204020204" charset="-122"/>
+              <a:cs typeface="微软雅黑" panose="020B0503020204020204" charset="-122"/>
+            </a:endParaRPr>
           </a:p>
           <a:p>
             <a:pPr algn="l">
@@ -4351,12 +4524,20 @@
                 <a:solidFill>
                   <a:srgbClr val="ECF7FF"/>
                 </a:solidFill>
-                <a:latin typeface="微软雅黑"/>
-                <a:ea typeface="微软雅黑"/>
-                <a:cs typeface="微软雅黑"/>
+                <a:latin typeface="微软雅黑" panose="020B0503020204020204" charset="-122"/>
+                <a:ea typeface="微软雅黑" panose="020B0503020204020204" charset="-122"/>
+                <a:cs typeface="微软雅黑" panose="020B0503020204020204" charset="-122"/>
               </a:rPr>
               <a:t>发个链接就能看，装了就能用</a:t>
             </a:r>
+            <a:endParaRPr sz="1800" b="1" i="0">
+              <a:solidFill>
+                <a:srgbClr val="ECF7FF"/>
+              </a:solidFill>
+              <a:latin typeface="微软雅黑" panose="020B0503020204020204" charset="-122"/>
+              <a:ea typeface="微软雅黑" panose="020B0503020204020204" charset="-122"/>
+              <a:cs typeface="微软雅黑" panose="020B0503020204020204" charset="-122"/>
+            </a:endParaRPr>
           </a:p>
           <a:p>
             <a:pPr algn="l">
@@ -4369,12 +4550,20 @@
                 <a:solidFill>
                   <a:srgbClr val="5CC8FF"/>
                 </a:solidFill>
-                <a:latin typeface="微软雅黑"/>
-                <a:ea typeface="微软雅黑"/>
-                <a:cs typeface="微软雅黑"/>
+                <a:latin typeface="微软雅黑" panose="020B0503020204020204" charset="-122"/>
+                <a:ea typeface="微软雅黑" panose="020B0503020204020204" charset="-122"/>
+                <a:cs typeface="微软雅黑" panose="020B0503020204020204" charset="-122"/>
               </a:rPr>
               <a:t>popostar11.github.io/hospital-data-platform</a:t>
             </a:r>
+            <a:endParaRPr sz="1100" b="0" i="0">
+              <a:solidFill>
+                <a:srgbClr val="5CC8FF"/>
+              </a:solidFill>
+              <a:latin typeface="微软雅黑" panose="020B0503020204020204" charset="-122"/>
+              <a:ea typeface="微软雅黑" panose="020B0503020204020204" charset="-122"/>
+              <a:cs typeface="微软雅黑" panose="020B0503020204020204" charset="-122"/>
+            </a:endParaRPr>
           </a:p>
           <a:p>
             <a:pPr algn="l">
@@ -4390,12 +4579,20 @@
                 <a:solidFill>
                   <a:srgbClr val="BBD4EC"/>
                 </a:solidFill>
-                <a:latin typeface="微软雅黑"/>
-                <a:ea typeface="微软雅黑"/>
-                <a:cs typeface="微软雅黑"/>
+                <a:latin typeface="微软雅黑" panose="020B0503020204020204" charset="-122"/>
+                <a:ea typeface="微软雅黑" panose="020B0503020204020204" charset="-122"/>
+                <a:cs typeface="微软雅黑" panose="020B0503020204020204" charset="-122"/>
               </a:rPr>
               <a:t>· 任何人、任何设备打开即看大屏</a:t>
             </a:r>
+            <a:endParaRPr sz="1250" b="0" i="0">
+              <a:solidFill>
+                <a:srgbClr val="BBD4EC"/>
+              </a:solidFill>
+              <a:latin typeface="微软雅黑" panose="020B0503020204020204" charset="-122"/>
+              <a:ea typeface="微软雅黑" panose="020B0503020204020204" charset="-122"/>
+              <a:cs typeface="微软雅黑" panose="020B0503020204020204" charset="-122"/>
+            </a:endParaRPr>
           </a:p>
           <a:p>
             <a:pPr algn="l">
@@ -4411,12 +4608,20 @@
                 <a:solidFill>
                   <a:srgbClr val="BBD4EC"/>
                 </a:solidFill>
-                <a:latin typeface="微软雅黑"/>
-                <a:ea typeface="微软雅黑"/>
-                <a:cs typeface="微软雅黑"/>
+                <a:latin typeface="微软雅黑" panose="020B0503020204020204" charset="-122"/>
+                <a:ea typeface="微软雅黑" panose="020B0503020204020204" charset="-122"/>
+                <a:cs typeface="微软雅黑" panose="020B0503020204020204" charset="-122"/>
               </a:rPr>
               <a:t>· 数据是导出的静态快照，只读</a:t>
             </a:r>
+            <a:endParaRPr sz="1250" b="0" i="0">
+              <a:solidFill>
+                <a:srgbClr val="BBD4EC"/>
+              </a:solidFill>
+              <a:latin typeface="微软雅黑" panose="020B0503020204020204" charset="-122"/>
+              <a:ea typeface="微软雅黑" panose="020B0503020204020204" charset="-122"/>
+              <a:cs typeface="微软雅黑" panose="020B0503020204020204" charset="-122"/>
+            </a:endParaRPr>
           </a:p>
           <a:p>
             <a:pPr algn="l">
@@ -4432,12 +4637,20 @@
                 <a:solidFill>
                   <a:srgbClr val="BBD4EC"/>
                 </a:solidFill>
-                <a:latin typeface="微软雅黑"/>
-                <a:ea typeface="微软雅黑"/>
-                <a:cs typeface="微软雅黑"/>
+                <a:latin typeface="微软雅黑" panose="020B0503020204020204" charset="-122"/>
+                <a:ea typeface="微软雅黑" panose="020B0503020204020204" charset="-122"/>
+                <a:cs typeface="微软雅黑" panose="020B0503020204020204" charset="-122"/>
               </a:rPr>
               <a:t>· 不需要服务器、不需要账号、不花钱</a:t>
             </a:r>
+            <a:endParaRPr sz="1250" b="0" i="0">
+              <a:solidFill>
+                <a:srgbClr val="BBD4EC"/>
+              </a:solidFill>
+              <a:latin typeface="微软雅黑" panose="020B0503020204020204" charset="-122"/>
+              <a:ea typeface="微软雅黑" panose="020B0503020204020204" charset="-122"/>
+              <a:cs typeface="微软雅黑" panose="020B0503020204020204" charset="-122"/>
+            </a:endParaRPr>
           </a:p>
           <a:p>
             <a:pPr algn="l">
@@ -4453,12 +4666,20 @@
                 <a:solidFill>
                   <a:srgbClr val="BBD4EC"/>
                 </a:solidFill>
-                <a:latin typeface="微软雅黑"/>
-                <a:ea typeface="微软雅黑"/>
-                <a:cs typeface="微软雅黑"/>
+                <a:latin typeface="微软雅黑" panose="020B0503020204020204" charset="-122"/>
+                <a:ea typeface="微软雅黑" panose="020B0503020204020204" charset="-122"/>
+                <a:cs typeface="微软雅黑" panose="020B0503020204020204" charset="-122"/>
               </a:rPr>
               <a:t>· 适合：分享给同行、外出演示</a:t>
             </a:r>
+            <a:endParaRPr sz="1250" b="0" i="0">
+              <a:solidFill>
+                <a:srgbClr val="BBD4EC"/>
+              </a:solidFill>
+              <a:latin typeface="微软雅黑" panose="020B0503020204020204" charset="-122"/>
+              <a:ea typeface="微软雅黑" panose="020B0503020204020204" charset="-122"/>
+              <a:cs typeface="微软雅黑" panose="020B0503020204020204" charset="-122"/>
+            </a:endParaRPr>
           </a:p>
         </p:txBody>
       </p:sp>
@@ -4471,7 +4692,7 @@
 </file>
 
 <file path=ppt/slides/slide11.xml><?xml version="1.0" encoding="utf-8"?>
-<p:sld xmlns:a="http://schemas.openxmlformats.org/drawingml/2006/main" xmlns:p="http://schemas.openxmlformats.org/presentationml/2006/main" xmlns:r="http://schemas.openxmlformats.org/officeDocument/2006/relationships">
+<p:sld xmlns:a="http://schemas.openxmlformats.org/drawingml/2006/main" xmlns:r="http://schemas.openxmlformats.org/officeDocument/2006/relationships" xmlns:p="http://schemas.openxmlformats.org/presentationml/2006/main">
   <p:cSld>
     <p:spTree>
       <p:nvGrpSpPr>
@@ -4541,7 +4762,7 @@
           <a:noFill/>
         </p:spPr>
         <p:txBody>
-          <a:bodyPr wrap="square" anchor="t" lIns="0" rIns="0" tIns="0" bIns="0">
+          <a:bodyPr wrap="square" lIns="0" tIns="0" rIns="0" bIns="0" anchor="t">
             <a:spAutoFit/>
           </a:bodyPr>
           <a:lstStyle/>
@@ -4552,12 +4773,20 @@
                 <a:solidFill>
                   <a:srgbClr val="7FE3FF"/>
                 </a:solidFill>
-                <a:latin typeface="微软雅黑"/>
-                <a:ea typeface="微软雅黑"/>
-                <a:cs typeface="微软雅黑"/>
+                <a:latin typeface="微软雅黑" panose="020B0503020204020204" charset="-122"/>
+                <a:ea typeface="微软雅黑" panose="020B0503020204020204" charset="-122"/>
+                <a:cs typeface="微软雅黑" panose="020B0503020204020204" charset="-122"/>
               </a:rPr>
               <a:t>02 · 怎么做的</a:t>
             </a:r>
+            <a:endParaRPr sz="1150" b="1" i="0">
+              <a:solidFill>
+                <a:srgbClr val="7FE3FF"/>
+              </a:solidFill>
+              <a:latin typeface="微软雅黑" panose="020B0503020204020204" charset="-122"/>
+              <a:ea typeface="微软雅黑" panose="020B0503020204020204" charset="-122"/>
+              <a:cs typeface="微软雅黑" panose="020B0503020204020204" charset="-122"/>
+            </a:endParaRPr>
           </a:p>
         </p:txBody>
       </p:sp>
@@ -4578,7 +4807,7 @@
           <a:noFill/>
         </p:spPr>
         <p:txBody>
-          <a:bodyPr wrap="square" anchor="t" lIns="0" rIns="0" tIns="0" bIns="0">
+          <a:bodyPr wrap="square" lIns="0" tIns="0" rIns="0" bIns="0" anchor="t">
             <a:spAutoFit/>
           </a:bodyPr>
           <a:lstStyle/>
@@ -4589,12 +4818,20 @@
                 <a:solidFill>
                   <a:srgbClr val="ECF7FF"/>
                 </a:solidFill>
-                <a:latin typeface="微软雅黑"/>
-                <a:ea typeface="微软雅黑"/>
-                <a:cs typeface="微软雅黑"/>
+                <a:latin typeface="微软雅黑" panose="020B0503020204020204" charset="-122"/>
+                <a:ea typeface="微软雅黑" panose="020B0503020204020204" charset="-122"/>
+                <a:cs typeface="微软雅黑" panose="020B0503020204020204" charset="-122"/>
               </a:rPr>
               <a:t>几个关键选择，以及为什么</a:t>
             </a:r>
+            <a:endParaRPr sz="2700" b="1" i="0">
+              <a:solidFill>
+                <a:srgbClr val="ECF7FF"/>
+              </a:solidFill>
+              <a:latin typeface="微软雅黑" panose="020B0503020204020204" charset="-122"/>
+              <a:ea typeface="微软雅黑" panose="020B0503020204020204" charset="-122"/>
+              <a:cs typeface="微软雅黑" panose="020B0503020204020204" charset="-122"/>
+            </a:endParaRPr>
           </a:p>
         </p:txBody>
       </p:sp>
@@ -4615,7 +4852,7 @@
           <a:noFill/>
         </p:spPr>
         <p:txBody>
-          <a:bodyPr wrap="square" anchor="t" lIns="0" rIns="0" tIns="0" bIns="0">
+          <a:bodyPr wrap="square" lIns="0" tIns="0" rIns="0" bIns="0" anchor="t">
             <a:spAutoFit/>
           </a:bodyPr>
           <a:lstStyle/>
@@ -4626,12 +4863,20 @@
                 <a:solidFill>
                   <a:srgbClr val="7E9EC4"/>
                 </a:solidFill>
-                <a:latin typeface="微软雅黑"/>
-                <a:ea typeface="微软雅黑"/>
-                <a:cs typeface="微软雅黑"/>
+                <a:latin typeface="微软雅黑" panose="020B0503020204020204" charset="-122"/>
+                <a:ea typeface="微软雅黑" panose="020B0503020204020204" charset="-122"/>
+                <a:cs typeface="微软雅黑" panose="020B0503020204020204" charset="-122"/>
               </a:rPr>
               <a:t>急救绿道 · 11 / 13</a:t>
             </a:r>
+            <a:endParaRPr sz="1000" b="0" i="0">
+              <a:solidFill>
+                <a:srgbClr val="7E9EC4"/>
+              </a:solidFill>
+              <a:latin typeface="微软雅黑" panose="020B0503020204020204" charset="-122"/>
+              <a:ea typeface="微软雅黑" panose="020B0503020204020204" charset="-122"/>
+              <a:cs typeface="微软雅黑" panose="020B0503020204020204" charset="-122"/>
+            </a:endParaRPr>
           </a:p>
         </p:txBody>
       </p:sp>
@@ -4669,12 +4914,20 @@
                           <a:solidFill>
                             <a:srgbClr val="7FE3FF"/>
                           </a:solidFill>
-                          <a:latin typeface="微软雅黑"/>
-                          <a:ea typeface="微软雅黑"/>
-                          <a:cs typeface="微软雅黑"/>
+                          <a:latin typeface="微软雅黑" panose="020B0503020204020204" charset="-122"/>
+                          <a:ea typeface="微软雅黑" panose="020B0503020204020204" charset="-122"/>
+                          <a:cs typeface="微软雅黑" panose="020B0503020204020204" charset="-122"/>
                         </a:rPr>
                         <a:t>选择</a:t>
                       </a:r>
+                      <a:endParaRPr sz="1100" b="1" i="0">
+                        <a:solidFill>
+                          <a:srgbClr val="7FE3FF"/>
+                        </a:solidFill>
+                        <a:latin typeface="微软雅黑" panose="020B0503020204020204" charset="-122"/>
+                        <a:ea typeface="微软雅黑" panose="020B0503020204020204" charset="-122"/>
+                        <a:cs typeface="微软雅黑" panose="020B0503020204020204" charset="-122"/>
+                      </a:endParaRPr>
                     </a:p>
                   </a:txBody>
                   <a:tcPr marL="100584" marR="100584" marT="41148" marB="41148" anchor="ctr">
@@ -4693,12 +4946,20 @@
                           <a:solidFill>
                             <a:srgbClr val="7FE3FF"/>
                           </a:solidFill>
-                          <a:latin typeface="微软雅黑"/>
-                          <a:ea typeface="微软雅黑"/>
-                          <a:cs typeface="微软雅黑"/>
+                          <a:latin typeface="微软雅黑" panose="020B0503020204020204" charset="-122"/>
+                          <a:ea typeface="微软雅黑" panose="020B0503020204020204" charset="-122"/>
+                          <a:cs typeface="微软雅黑" panose="020B0503020204020204" charset="-122"/>
                         </a:rPr>
                         <a:t>决定了什么</a:t>
                       </a:r>
+                      <a:endParaRPr sz="1100" b="1" i="0">
+                        <a:solidFill>
+                          <a:srgbClr val="7FE3FF"/>
+                        </a:solidFill>
+                        <a:latin typeface="微软雅黑" panose="020B0503020204020204" charset="-122"/>
+                        <a:ea typeface="微软雅黑" panose="020B0503020204020204" charset="-122"/>
+                        <a:cs typeface="微软雅黑" panose="020B0503020204020204" charset="-122"/>
+                      </a:endParaRPr>
                     </a:p>
                   </a:txBody>
                   <a:tcPr marL="100584" marR="100584" marT="41148" marB="41148" anchor="ctr">
@@ -4717,12 +4978,20 @@
                           <a:solidFill>
                             <a:srgbClr val="7FE3FF"/>
                           </a:solidFill>
-                          <a:latin typeface="微软雅黑"/>
-                          <a:ea typeface="微软雅黑"/>
-                          <a:cs typeface="微软雅黑"/>
+                          <a:latin typeface="微软雅黑" panose="020B0503020204020204" charset="-122"/>
+                          <a:ea typeface="微软雅黑" panose="020B0503020204020204" charset="-122"/>
+                          <a:cs typeface="微软雅黑" panose="020B0503020204020204" charset="-122"/>
                         </a:rPr>
                         <a:t>为什么这么定</a:t>
                       </a:r>
+                      <a:endParaRPr sz="1100" b="1" i="0">
+                        <a:solidFill>
+                          <a:srgbClr val="7FE3FF"/>
+                        </a:solidFill>
+                        <a:latin typeface="微软雅黑" panose="020B0503020204020204" charset="-122"/>
+                        <a:ea typeface="微软雅黑" panose="020B0503020204020204" charset="-122"/>
+                        <a:cs typeface="微软雅黑" panose="020B0503020204020204" charset="-122"/>
+                      </a:endParaRPr>
                     </a:p>
                   </a:txBody>
                   <a:tcPr marL="100584" marR="100584" marT="41148" marB="41148" anchor="ctr">
@@ -4743,12 +5012,20 @@
                           <a:solidFill>
                             <a:srgbClr val="BBD4EC"/>
                           </a:solidFill>
-                          <a:latin typeface="微软雅黑"/>
-                          <a:ea typeface="微软雅黑"/>
-                          <a:cs typeface="微软雅黑"/>
+                          <a:latin typeface="微软雅黑" panose="020B0503020204020204" charset="-122"/>
+                          <a:ea typeface="微软雅黑" panose="020B0503020204020204" charset="-122"/>
+                          <a:cs typeface="微软雅黑" panose="020B0503020204020204" charset="-122"/>
                         </a:rPr>
                         <a:t>SQLite 单文件数据库</a:t>
                       </a:r>
+                      <a:endParaRPr sz="1100" b="0" i="0">
+                        <a:solidFill>
+                          <a:srgbClr val="BBD4EC"/>
+                        </a:solidFill>
+                        <a:latin typeface="微软雅黑" panose="020B0503020204020204" charset="-122"/>
+                        <a:ea typeface="微软雅黑" panose="020B0503020204020204" charset="-122"/>
+                        <a:cs typeface="微软雅黑" panose="020B0503020204020204" charset="-122"/>
+                      </a:endParaRPr>
                     </a:p>
                   </a:txBody>
                   <a:tcPr marL="100584" marR="100584" marT="41148" marB="41148" anchor="ctr">
@@ -4767,12 +5044,20 @@
                           <a:solidFill>
                             <a:srgbClr val="BBD4EC"/>
                           </a:solidFill>
-                          <a:latin typeface="微软雅黑"/>
-                          <a:ea typeface="微软雅黑"/>
-                          <a:cs typeface="微软雅黑"/>
+                          <a:latin typeface="微软雅黑" panose="020B0503020204020204" charset="-122"/>
+                          <a:ea typeface="微软雅黑" panose="020B0503020204020204" charset="-122"/>
+                          <a:cs typeface="微软雅黑" panose="020B0503020204020204" charset="-122"/>
                         </a:rPr>
                         <a:t>不用装 MySQL</a:t>
                       </a:r>
+                      <a:endParaRPr sz="1100" b="0" i="0">
+                        <a:solidFill>
+                          <a:srgbClr val="BBD4EC"/>
+                        </a:solidFill>
+                        <a:latin typeface="微软雅黑" panose="020B0503020204020204" charset="-122"/>
+                        <a:ea typeface="微软雅黑" panose="020B0503020204020204" charset="-122"/>
+                        <a:cs typeface="微软雅黑" panose="020B0503020204020204" charset="-122"/>
+                      </a:endParaRPr>
                     </a:p>
                   </a:txBody>
                   <a:tcPr marL="100584" marR="100584" marT="41148" marB="41148" anchor="ctr">
@@ -4791,12 +5076,20 @@
                           <a:solidFill>
                             <a:srgbClr val="BBD4EC"/>
                           </a:solidFill>
-                          <a:latin typeface="微软雅黑"/>
-                          <a:ea typeface="微软雅黑"/>
-                          <a:cs typeface="微软雅黑"/>
+                          <a:latin typeface="微软雅黑" panose="020B0503020204020204" charset="-122"/>
+                          <a:ea typeface="微软雅黑" panose="020B0503020204020204" charset="-122"/>
+                          <a:cs typeface="微软雅黑" panose="020B0503020204020204" charset="-122"/>
                         </a:rPr>
                         <a:t>院内一台电脑就能跑，拷走一个文件就是完整备份；数据量到几十万条都够用</a:t>
                       </a:r>
+                      <a:endParaRPr sz="1100" b="0" i="0">
+                        <a:solidFill>
+                          <a:srgbClr val="BBD4EC"/>
+                        </a:solidFill>
+                        <a:latin typeface="微软雅黑" panose="020B0503020204020204" charset="-122"/>
+                        <a:ea typeface="微软雅黑" panose="020B0503020204020204" charset="-122"/>
+                        <a:cs typeface="微软雅黑" panose="020B0503020204020204" charset="-122"/>
+                      </a:endParaRPr>
                     </a:p>
                   </a:txBody>
                   <a:tcPr marL="100584" marR="100584" marT="41148" marB="41148" anchor="ctr">
@@ -4817,12 +5110,20 @@
                           <a:solidFill>
                             <a:srgbClr val="BBD4EC"/>
                           </a:solidFill>
-                          <a:latin typeface="微软雅黑"/>
-                          <a:ea typeface="微软雅黑"/>
-                          <a:cs typeface="微软雅黑"/>
+                          <a:latin typeface="微软雅黑" panose="020B0503020204020204" charset="-122"/>
+                          <a:ea typeface="微软雅黑" panose="020B0503020204020204" charset="-122"/>
+                          <a:cs typeface="微软雅黑" panose="020B0503020204020204" charset="-122"/>
                         </a:rPr>
                         <a:t>大屏与后台分成两个前端</a:t>
                       </a:r>
+                      <a:endParaRPr sz="1100" b="0" i="0">
+                        <a:solidFill>
+                          <a:srgbClr val="BBD4EC"/>
+                        </a:solidFill>
+                        <a:latin typeface="微软雅黑" panose="020B0503020204020204" charset="-122"/>
+                        <a:ea typeface="微软雅黑" panose="020B0503020204020204" charset="-122"/>
+                        <a:cs typeface="微软雅黑" panose="020B0503020204020204" charset="-122"/>
+                      </a:endParaRPr>
                     </a:p>
                   </a:txBody>
                   <a:tcPr marL="100584" marR="100584" marT="41148" marB="41148" anchor="ctr">
@@ -4841,12 +5142,20 @@
                           <a:solidFill>
                             <a:srgbClr val="BBD4EC"/>
                           </a:solidFill>
-                          <a:latin typeface="微软雅黑"/>
-                          <a:ea typeface="微软雅黑"/>
-                          <a:cs typeface="微软雅黑"/>
+                          <a:latin typeface="微软雅黑" panose="020B0503020204020204" charset="-122"/>
+                          <a:ea typeface="微软雅黑" panose="020B0503020204020204" charset="-122"/>
+                          <a:cs typeface="微软雅黑" panose="020B0503020204020204" charset="-122"/>
                         </a:rPr>
                         <a:t>互不影响</a:t>
                       </a:r>
+                      <a:endParaRPr sz="1100" b="0" i="0">
+                        <a:solidFill>
+                          <a:srgbClr val="BBD4EC"/>
+                        </a:solidFill>
+                        <a:latin typeface="微软雅黑" panose="020B0503020204020204" charset="-122"/>
+                        <a:ea typeface="微软雅黑" panose="020B0503020204020204" charset="-122"/>
+                        <a:cs typeface="微软雅黑" panose="020B0503020204020204" charset="-122"/>
+                      </a:endParaRPr>
                     </a:p>
                   </a:txBody>
                   <a:tcPr marL="100584" marR="100584" marT="41148" marB="41148" anchor="ctr">
@@ -4865,12 +5174,20 @@
                           <a:solidFill>
                             <a:srgbClr val="BBD4EC"/>
                           </a:solidFill>
-                          <a:latin typeface="微软雅黑"/>
-                          <a:ea typeface="微软雅黑"/>
-                          <a:cs typeface="微软雅黑"/>
+                          <a:latin typeface="微软雅黑" panose="020B0503020204020204" charset="-122"/>
+                          <a:ea typeface="微软雅黑" panose="020B0503020204020204" charset="-122"/>
+                          <a:cs typeface="微软雅黑" panose="020B0503020204020204" charset="-122"/>
                         </a:rPr>
                         <a:t>大屏要 7×24 常驻、不能被后台改崩；分开后各自升级，大屏可以只读锁定</a:t>
                       </a:r>
+                      <a:endParaRPr sz="1100" b="0" i="0">
+                        <a:solidFill>
+                          <a:srgbClr val="BBD4EC"/>
+                        </a:solidFill>
+                        <a:latin typeface="微软雅黑" panose="020B0503020204020204" charset="-122"/>
+                        <a:ea typeface="微软雅黑" panose="020B0503020204020204" charset="-122"/>
+                        <a:cs typeface="微软雅黑" panose="020B0503020204020204" charset="-122"/>
+                      </a:endParaRPr>
                     </a:p>
                   </a:txBody>
                   <a:tcPr marL="100584" marR="100584" marT="41148" marB="41148" anchor="ctr">
@@ -4891,12 +5208,20 @@
                           <a:solidFill>
                             <a:srgbClr val="BBD4EC"/>
                           </a:solidFill>
-                          <a:latin typeface="微软雅黑"/>
-                          <a:ea typeface="微软雅黑"/>
-                          <a:cs typeface="微软雅黑"/>
+                          <a:latin typeface="微软雅黑" panose="020B0503020204020204" charset="-122"/>
+                          <a:ea typeface="微软雅黑" panose="020B0503020204020204" charset="-122"/>
+                          <a:cs typeface="微软雅黑" panose="020B0503020204020204" charset="-122"/>
                         </a:rPr>
                         <a:t>计算放在服务端</a:t>
                       </a:r>
+                      <a:endParaRPr sz="1100" b="0" i="0">
+                        <a:solidFill>
+                          <a:srgbClr val="BBD4EC"/>
+                        </a:solidFill>
+                        <a:latin typeface="微软雅黑" panose="020B0503020204020204" charset="-122"/>
+                        <a:ea typeface="微软雅黑" panose="020B0503020204020204" charset="-122"/>
+                        <a:cs typeface="微软雅黑" panose="020B0503020204020204" charset="-122"/>
+                      </a:endParaRPr>
                     </a:p>
                   </a:txBody>
                   <a:tcPr marL="100584" marR="100584" marT="41148" marB="41148" anchor="ctr">
@@ -4915,12 +5240,20 @@
                           <a:solidFill>
                             <a:srgbClr val="BBD4EC"/>
                           </a:solidFill>
-                          <a:latin typeface="微软雅黑"/>
-                          <a:ea typeface="微软雅黑"/>
-                          <a:cs typeface="微软雅黑"/>
+                          <a:latin typeface="微软雅黑" panose="020B0503020204020204" charset="-122"/>
+                          <a:ea typeface="微软雅黑" panose="020B0503020204020204" charset="-122"/>
+                          <a:cs typeface="微软雅黑" panose="020B0503020204020204" charset="-122"/>
                         </a:rPr>
                         <a:t>屏幕只管画</a:t>
                       </a:r>
+                      <a:endParaRPr sz="1100" b="0" i="0">
+                        <a:solidFill>
+                          <a:srgbClr val="BBD4EC"/>
+                        </a:solidFill>
+                        <a:latin typeface="微软雅黑" panose="020B0503020204020204" charset="-122"/>
+                        <a:ea typeface="微软雅黑" panose="020B0503020204020204" charset="-122"/>
+                        <a:cs typeface="微软雅黑" panose="020B0503020204020204" charset="-122"/>
+                      </a:endParaRPr>
                     </a:p>
                   </a:txBody>
                   <a:tcPr marL="100584" marR="100584" marT="41148" marB="41148" anchor="ctr">
@@ -4939,12 +5272,20 @@
                           <a:solidFill>
                             <a:srgbClr val="BBD4EC"/>
                           </a:solidFill>
-                          <a:latin typeface="微软雅黑"/>
-                          <a:ea typeface="微软雅黑"/>
-                          <a:cs typeface="微软雅黑"/>
+                          <a:latin typeface="微软雅黑" panose="020B0503020204020204" charset="-122"/>
+                          <a:ea typeface="微软雅黑" panose="020B0503020204020204" charset="-122"/>
+                          <a:cs typeface="微软雅黑" panose="020B0503020204020204" charset="-122"/>
                         </a:rPr>
                         <a:t>换屏幕、加屏幕不用改逻辑，弱配置的终端也能流畅</a:t>
                       </a:r>
+                      <a:endParaRPr sz="1100" b="0" i="0">
+                        <a:solidFill>
+                          <a:srgbClr val="BBD4EC"/>
+                        </a:solidFill>
+                        <a:latin typeface="微软雅黑" panose="020B0503020204020204" charset="-122"/>
+                        <a:ea typeface="微软雅黑" panose="020B0503020204020204" charset="-122"/>
+                        <a:cs typeface="微软雅黑" panose="020B0503020204020204" charset="-122"/>
+                      </a:endParaRPr>
                     </a:p>
                   </a:txBody>
                   <a:tcPr marL="100584" marR="100584" marT="41148" marB="41148" anchor="ctr">
@@ -4965,12 +5306,20 @@
                           <a:solidFill>
                             <a:srgbClr val="BBD4EC"/>
                           </a:solidFill>
-                          <a:latin typeface="微软雅黑"/>
-                          <a:ea typeface="微软雅黑"/>
-                          <a:cs typeface="微软雅黑"/>
+                          <a:latin typeface="微软雅黑" panose="020B0503020204020204" charset="-122"/>
+                          <a:ea typeface="微软雅黑" panose="020B0503020204020204" charset="-122"/>
+                          <a:cs typeface="微软雅黑" panose="020B0503020204020204" charset="-122"/>
                         </a:rPr>
                         <a:t>公网版重写一层后端</a:t>
                       </a:r>
+                      <a:endParaRPr sz="1100" b="0" i="0">
+                        <a:solidFill>
+                          <a:srgbClr val="BBD4EC"/>
+                        </a:solidFill>
+                        <a:latin typeface="微软雅黑" panose="020B0503020204020204" charset="-122"/>
+                        <a:ea typeface="微软雅黑" panose="020B0503020204020204" charset="-122"/>
+                        <a:cs typeface="微软雅黑" panose="020B0503020204020204" charset="-122"/>
+                      </a:endParaRPr>
                     </a:p>
                   </a:txBody>
                   <a:tcPr marL="100584" marR="100584" marT="41148" marB="41148" anchor="ctr">
@@ -4989,12 +5338,20 @@
                           <a:solidFill>
                             <a:srgbClr val="BBD4EC"/>
                           </a:solidFill>
-                          <a:latin typeface="微软雅黑"/>
-                          <a:ea typeface="微软雅黑"/>
-                          <a:cs typeface="微软雅黑"/>
+                          <a:latin typeface="微软雅黑" panose="020B0503020204020204" charset="-122"/>
+                          <a:ea typeface="微软雅黑" panose="020B0503020204020204" charset="-122"/>
+                          <a:cs typeface="微软雅黑" panose="020B0503020204020204" charset="-122"/>
                         </a:rPr>
                         <a:t>能上 Cloudflare 免费额度</a:t>
                       </a:r>
+                      <a:endParaRPr sz="1100" b="0" i="0">
+                        <a:solidFill>
+                          <a:srgbClr val="BBD4EC"/>
+                        </a:solidFill>
+                        <a:latin typeface="微软雅黑" panose="020B0503020204020204" charset="-122"/>
+                        <a:ea typeface="微软雅黑" panose="020B0503020204020204" charset="-122"/>
+                        <a:cs typeface="微软雅黑" panose="020B0503020204020204" charset="-122"/>
+                      </a:endParaRPr>
                     </a:p>
                   </a:txBody>
                   <a:tcPr marL="100584" marR="100584" marT="41148" marB="41148" anchor="ctr">
@@ -5013,12 +5370,20 @@
                           <a:solidFill>
                             <a:srgbClr val="BBD4EC"/>
                           </a:solidFill>
-                          <a:latin typeface="微软雅黑"/>
-                          <a:ea typeface="微软雅黑"/>
-                          <a:cs typeface="微软雅黑"/>
+                          <a:latin typeface="微软雅黑" panose="020B0503020204020204" charset="-122"/>
+                          <a:ea typeface="微软雅黑" panose="020B0503020204020204" charset="-122"/>
+                          <a:cs typeface="微软雅黑" panose="020B0503020204020204" charset="-122"/>
                         </a:rPr>
                         <a:t>云函数跑不了本地数据库和 NestJS；重写的是「壳」，接口与算法口径和本地版保持一致</a:t>
                       </a:r>
+                      <a:endParaRPr sz="1100" b="0" i="0">
+                        <a:solidFill>
+                          <a:srgbClr val="BBD4EC"/>
+                        </a:solidFill>
+                        <a:latin typeface="微软雅黑" panose="020B0503020204020204" charset="-122"/>
+                        <a:ea typeface="微软雅黑" panose="020B0503020204020204" charset="-122"/>
+                        <a:cs typeface="微软雅黑" panose="020B0503020204020204" charset="-122"/>
+                      </a:endParaRPr>
                     </a:p>
                   </a:txBody>
                   <a:tcPr marL="100584" marR="100584" marT="41148" marB="41148" anchor="ctr">
@@ -5039,12 +5404,20 @@
                           <a:solidFill>
                             <a:srgbClr val="BBD4EC"/>
                           </a:solidFill>
-                          <a:latin typeface="微软雅黑"/>
-                          <a:ea typeface="微软雅黑"/>
-                          <a:cs typeface="微软雅黑"/>
+                          <a:latin typeface="微软雅黑" panose="020B0503020204020204" charset="-122"/>
+                          <a:ea typeface="微软雅黑" panose="020B0503020204020204" charset="-122"/>
+                          <a:cs typeface="微软雅黑" panose="020B0503020204020204" charset="-122"/>
                         </a:rPr>
                         <a:t>机构名与数据全部脱敏</a:t>
                       </a:r>
+                      <a:endParaRPr sz="1100" b="0" i="0">
+                        <a:solidFill>
+                          <a:srgbClr val="BBD4EC"/>
+                        </a:solidFill>
+                        <a:latin typeface="微软雅黑" panose="020B0503020204020204" charset="-122"/>
+                        <a:ea typeface="微软雅黑" panose="020B0503020204020204" charset="-122"/>
+                        <a:cs typeface="微软雅黑" panose="020B0503020204020204" charset="-122"/>
+                      </a:endParaRPr>
                     </a:p>
                   </a:txBody>
                   <a:tcPr marL="100584" marR="100584" marT="41148" marB="41148" anchor="ctr">
@@ -5063,12 +5436,20 @@
                           <a:solidFill>
                             <a:srgbClr val="BBD4EC"/>
                           </a:solidFill>
-                          <a:latin typeface="微软雅黑"/>
-                          <a:ea typeface="微软雅黑"/>
-                          <a:cs typeface="微软雅黑"/>
+                          <a:latin typeface="微软雅黑" panose="020B0503020204020204" charset="-122"/>
+                          <a:ea typeface="微软雅黑" panose="020B0503020204020204" charset="-122"/>
+                          <a:cs typeface="微软雅黑" panose="020B0503020204020204" charset="-122"/>
                         </a:rPr>
                         <a:t>可以安全公开</a:t>
                       </a:r>
+                      <a:endParaRPr sz="1100" b="0" i="0">
+                        <a:solidFill>
+                          <a:srgbClr val="BBD4EC"/>
+                        </a:solidFill>
+                        <a:latin typeface="微软雅黑" panose="020B0503020204020204" charset="-122"/>
+                        <a:ea typeface="微软雅黑" panose="020B0503020204020204" charset="-122"/>
+                        <a:cs typeface="微软雅黑" panose="020B0503020204020204" charset="-122"/>
+                      </a:endParaRPr>
                     </a:p>
                   </a:txBody>
                   <a:tcPr marL="100584" marR="100584" marT="41148" marB="41148" anchor="ctr">
@@ -5087,12 +5468,20 @@
                           <a:solidFill>
                             <a:srgbClr val="BBD4EC"/>
                           </a:solidFill>
-                          <a:latin typeface="微软雅黑"/>
-                          <a:ea typeface="微软雅黑"/>
-                          <a:cs typeface="微软雅黑"/>
+                          <a:latin typeface="微软雅黑" panose="020B0503020204020204" charset="-122"/>
+                          <a:ea typeface="微软雅黑" panose="020B0503020204020204" charset="-122"/>
+                          <a:cs typeface="微软雅黑" panose="020B0503020204020204" charset="-122"/>
                         </a:rPr>
                         <a:t>示例机构名 + 合成数据，真实素材不进仓库；公开仓库里搜不到任何真实名称</a:t>
                       </a:r>
+                      <a:endParaRPr sz="1100" b="0" i="0">
+                        <a:solidFill>
+                          <a:srgbClr val="BBD4EC"/>
+                        </a:solidFill>
+                        <a:latin typeface="微软雅黑" panose="020B0503020204020204" charset="-122"/>
+                        <a:ea typeface="微软雅黑" panose="020B0503020204020204" charset="-122"/>
+                        <a:cs typeface="微软雅黑" panose="020B0503020204020204" charset="-122"/>
+                      </a:endParaRPr>
                     </a:p>
                   </a:txBody>
                   <a:tcPr marL="100584" marR="100584" marT="41148" marB="41148" anchor="ctr">
@@ -5115,7 +5504,7 @@
 </file>
 
 <file path=ppt/slides/slide12.xml><?xml version="1.0" encoding="utf-8"?>
-<p:sld xmlns:a="http://schemas.openxmlformats.org/drawingml/2006/main" xmlns:p="http://schemas.openxmlformats.org/presentationml/2006/main" xmlns:r="http://schemas.openxmlformats.org/officeDocument/2006/relationships">
+<p:sld xmlns:a="http://schemas.openxmlformats.org/drawingml/2006/main" xmlns:r="http://schemas.openxmlformats.org/officeDocument/2006/relationships" xmlns:p="http://schemas.openxmlformats.org/presentationml/2006/main">
   <p:cSld>
     <p:spTree>
       <p:nvGrpSpPr>
@@ -5185,7 +5574,7 @@
           <a:noFill/>
         </p:spPr>
         <p:txBody>
-          <a:bodyPr wrap="square" anchor="t" lIns="0" rIns="0" tIns="0" bIns="0">
+          <a:bodyPr wrap="square" lIns="0" tIns="0" rIns="0" bIns="0" anchor="t">
             <a:spAutoFit/>
           </a:bodyPr>
           <a:lstStyle/>
@@ -5196,12 +5585,20 @@
                 <a:solidFill>
                   <a:srgbClr val="7FE3FF"/>
                 </a:solidFill>
-                <a:latin typeface="微软雅黑"/>
-                <a:ea typeface="微软雅黑"/>
-                <a:cs typeface="微软雅黑"/>
+                <a:latin typeface="微软雅黑" panose="020B0503020204020204" charset="-122"/>
+                <a:ea typeface="微软雅黑" panose="020B0503020204020204" charset="-122"/>
+                <a:cs typeface="微软雅黑" panose="020B0503020204020204" charset="-122"/>
               </a:rPr>
               <a:t>03 · 怎么用</a:t>
             </a:r>
+            <a:endParaRPr sz="1150" b="1" i="0">
+              <a:solidFill>
+                <a:srgbClr val="7FE3FF"/>
+              </a:solidFill>
+              <a:latin typeface="微软雅黑" panose="020B0503020204020204" charset="-122"/>
+              <a:ea typeface="微软雅黑" panose="020B0503020204020204" charset="-122"/>
+              <a:cs typeface="微软雅黑" panose="020B0503020204020204" charset="-122"/>
+            </a:endParaRPr>
           </a:p>
         </p:txBody>
       </p:sp>
@@ -5222,7 +5619,7 @@
           <a:noFill/>
         </p:spPr>
         <p:txBody>
-          <a:bodyPr wrap="square" anchor="t" lIns="0" rIns="0" tIns="0" bIns="0">
+          <a:bodyPr wrap="square" lIns="0" tIns="0" rIns="0" bIns="0" anchor="t">
             <a:spAutoFit/>
           </a:bodyPr>
           <a:lstStyle/>
@@ -5233,12 +5630,20 @@
                 <a:solidFill>
                   <a:srgbClr val="ECF7FF"/>
                 </a:solidFill>
-                <a:latin typeface="微软雅黑"/>
-                <a:ea typeface="微软雅黑"/>
-                <a:cs typeface="微软雅黑"/>
+                <a:latin typeface="微软雅黑" panose="020B0503020204020204" charset="-122"/>
+                <a:ea typeface="微软雅黑" panose="020B0503020204020204" charset="-122"/>
+                <a:cs typeface="微软雅黑" panose="020B0503020204020204" charset="-122"/>
               </a:rPr>
               <a:t>改完代码，用 71 项检查确认没坏</a:t>
             </a:r>
+            <a:endParaRPr sz="2700" b="1" i="0">
+              <a:solidFill>
+                <a:srgbClr val="ECF7FF"/>
+              </a:solidFill>
+              <a:latin typeface="微软雅黑" panose="020B0503020204020204" charset="-122"/>
+              <a:ea typeface="微软雅黑" panose="020B0503020204020204" charset="-122"/>
+              <a:cs typeface="微软雅黑" panose="020B0503020204020204" charset="-122"/>
+            </a:endParaRPr>
           </a:p>
         </p:txBody>
       </p:sp>
@@ -5259,7 +5664,7 @@
           <a:noFill/>
         </p:spPr>
         <p:txBody>
-          <a:bodyPr wrap="square" anchor="t" lIns="0" rIns="0" tIns="0" bIns="0">
+          <a:bodyPr wrap="square" lIns="0" tIns="0" rIns="0" bIns="0" anchor="t">
             <a:spAutoFit/>
           </a:bodyPr>
           <a:lstStyle/>
@@ -5270,12 +5675,20 @@
                 <a:solidFill>
                   <a:srgbClr val="7E9EC4"/>
                 </a:solidFill>
-                <a:latin typeface="微软雅黑"/>
-                <a:ea typeface="微软雅黑"/>
-                <a:cs typeface="微软雅黑"/>
+                <a:latin typeface="微软雅黑" panose="020B0503020204020204" charset="-122"/>
+                <a:ea typeface="微软雅黑" panose="020B0503020204020204" charset="-122"/>
+                <a:cs typeface="微软雅黑" panose="020B0503020204020204" charset="-122"/>
               </a:rPr>
               <a:t>急救绿道 · 12 / 13</a:t>
             </a:r>
+            <a:endParaRPr sz="1000" b="0" i="0">
+              <a:solidFill>
+                <a:srgbClr val="7E9EC4"/>
+              </a:solidFill>
+              <a:latin typeface="微软雅黑" panose="020B0503020204020204" charset="-122"/>
+              <a:ea typeface="微软雅黑" panose="020B0503020204020204" charset="-122"/>
+              <a:cs typeface="微软雅黑" panose="020B0503020204020204" charset="-122"/>
+            </a:endParaRPr>
           </a:p>
         </p:txBody>
       </p:sp>
@@ -5313,12 +5726,20 @@
                           <a:solidFill>
                             <a:srgbClr val="7FE3FF"/>
                           </a:solidFill>
-                          <a:latin typeface="微软雅黑"/>
-                          <a:ea typeface="微软雅黑"/>
-                          <a:cs typeface="微软雅黑"/>
+                          <a:latin typeface="微软雅黑" panose="020B0503020204020204" charset="-122"/>
+                          <a:ea typeface="微软雅黑" panose="020B0503020204020204" charset="-122"/>
+                          <a:cs typeface="微软雅黑" panose="020B0503020204020204" charset="-122"/>
                         </a:rPr>
                         <a:t>验收套件</a:t>
                       </a:r>
+                      <a:endParaRPr sz="1100" b="1" i="0">
+                        <a:solidFill>
+                          <a:srgbClr val="7FE3FF"/>
+                        </a:solidFill>
+                        <a:latin typeface="微软雅黑" panose="020B0503020204020204" charset="-122"/>
+                        <a:ea typeface="微软雅黑" panose="020B0503020204020204" charset="-122"/>
+                        <a:cs typeface="微软雅黑" panose="020B0503020204020204" charset="-122"/>
+                      </a:endParaRPr>
                     </a:p>
                   </a:txBody>
                   <a:tcPr marL="100584" marR="100584" marT="41148" marB="41148" anchor="ctr">
@@ -5337,12 +5758,20 @@
                           <a:solidFill>
                             <a:srgbClr val="7FE3FF"/>
                           </a:solidFill>
-                          <a:latin typeface="微软雅黑"/>
-                          <a:ea typeface="微软雅黑"/>
-                          <a:cs typeface="微软雅黑"/>
+                          <a:latin typeface="微软雅黑" panose="020B0503020204020204" charset="-122"/>
+                          <a:ea typeface="微软雅黑" panose="020B0503020204020204" charset="-122"/>
+                          <a:cs typeface="微软雅黑" panose="020B0503020204020204" charset="-122"/>
                         </a:rPr>
                         <a:t>项数</a:t>
                       </a:r>
+                      <a:endParaRPr sz="1100" b="1" i="0">
+                        <a:solidFill>
+                          <a:srgbClr val="7FE3FF"/>
+                        </a:solidFill>
+                        <a:latin typeface="微软雅黑" panose="020B0503020204020204" charset="-122"/>
+                        <a:ea typeface="微软雅黑" panose="020B0503020204020204" charset="-122"/>
+                        <a:cs typeface="微软雅黑" panose="020B0503020204020204" charset="-122"/>
+                      </a:endParaRPr>
                     </a:p>
                   </a:txBody>
                   <a:tcPr marL="100584" marR="100584" marT="41148" marB="41148" anchor="ctr">
@@ -5361,12 +5790,20 @@
                           <a:solidFill>
                             <a:srgbClr val="7FE3FF"/>
                           </a:solidFill>
-                          <a:latin typeface="微软雅黑"/>
-                          <a:ea typeface="微软雅黑"/>
-                          <a:cs typeface="微软雅黑"/>
+                          <a:latin typeface="微软雅黑" panose="020B0503020204020204" charset="-122"/>
+                          <a:ea typeface="微软雅黑" panose="020B0503020204020204" charset="-122"/>
+                          <a:cs typeface="微软雅黑" panose="020B0503020204020204" charset="-122"/>
                         </a:rPr>
                         <a:t>检查什么</a:t>
                       </a:r>
+                      <a:endParaRPr sz="1100" b="1" i="0">
+                        <a:solidFill>
+                          <a:srgbClr val="7FE3FF"/>
+                        </a:solidFill>
+                        <a:latin typeface="微软雅黑" panose="020B0503020204020204" charset="-122"/>
+                        <a:ea typeface="微软雅黑" panose="020B0503020204020204" charset="-122"/>
+                        <a:cs typeface="微软雅黑" panose="020B0503020204020204" charset="-122"/>
+                      </a:endParaRPr>
                     </a:p>
                   </a:txBody>
                   <a:tcPr marL="100584" marR="100584" marT="41148" marB="41148" anchor="ctr">
@@ -5387,12 +5824,20 @@
                           <a:solidFill>
                             <a:srgbClr val="BBD4EC"/>
                           </a:solidFill>
-                          <a:latin typeface="微软雅黑"/>
-                          <a:ea typeface="微软雅黑"/>
-                          <a:cs typeface="微软雅黑"/>
+                          <a:latin typeface="微软雅黑" panose="020B0503020204020204" charset="-122"/>
+                          <a:ea typeface="微软雅黑" panose="020B0503020204020204" charset="-122"/>
+                          <a:cs typeface="微软雅黑" panose="020B0503020204020204" charset="-122"/>
                         </a:rPr>
                         <a:t>接口验收</a:t>
                       </a:r>
+                      <a:endParaRPr sz="1100" b="0" i="0">
+                        <a:solidFill>
+                          <a:srgbClr val="BBD4EC"/>
+                        </a:solidFill>
+                        <a:latin typeface="微软雅黑" panose="020B0503020204020204" charset="-122"/>
+                        <a:ea typeface="微软雅黑" panose="020B0503020204020204" charset="-122"/>
+                        <a:cs typeface="微软雅黑" panose="020B0503020204020204" charset="-122"/>
+                      </a:endParaRPr>
                     </a:p>
                   </a:txBody>
                   <a:tcPr marL="100584" marR="100584" marT="41148" marB="41148" anchor="ctr">
@@ -5411,12 +5856,20 @@
                           <a:solidFill>
                             <a:srgbClr val="BBD4EC"/>
                           </a:solidFill>
-                          <a:latin typeface="微软雅黑"/>
-                          <a:ea typeface="微软雅黑"/>
-                          <a:cs typeface="微软雅黑"/>
+                          <a:latin typeface="微软雅黑" panose="020B0503020204020204" charset="-122"/>
+                          <a:ea typeface="微软雅黑" panose="020B0503020204020204" charset="-122"/>
+                          <a:cs typeface="微软雅黑" panose="020B0503020204020204" charset="-122"/>
                         </a:rPr>
                         <a:t>37 项</a:t>
                       </a:r>
+                      <a:endParaRPr sz="1100" b="0" i="0">
+                        <a:solidFill>
+                          <a:srgbClr val="BBD4EC"/>
+                        </a:solidFill>
+                        <a:latin typeface="微软雅黑" panose="020B0503020204020204" charset="-122"/>
+                        <a:ea typeface="微软雅黑" panose="020B0503020204020204" charset="-122"/>
+                        <a:cs typeface="微软雅黑" panose="020B0503020204020204" charset="-122"/>
+                      </a:endParaRPr>
                     </a:p>
                   </a:txBody>
                   <a:tcPr marL="100584" marR="100584" marT="41148" marB="41148" anchor="ctr">
@@ -5435,12 +5888,20 @@
                           <a:solidFill>
                             <a:srgbClr val="BBD4EC"/>
                           </a:solidFill>
-                          <a:latin typeface="微软雅黑"/>
-                          <a:ea typeface="微软雅黑"/>
-                          <a:cs typeface="微软雅黑"/>
+                          <a:latin typeface="微软雅黑" panose="020B0503020204020204" charset="-122"/>
+                          <a:ea typeface="微软雅黑" panose="020B0503020204020204" charset="-122"/>
+                          <a:cs typeface="微软雅黑" panose="020B0503020204020204" charset="-122"/>
                         </a:rPr>
                         <a:t>把大屏上的每个数字都钉死成断言：累计人数、12 个月序列、24 小时表格内容、筛选排序、权限拦截</a:t>
                       </a:r>
+                      <a:endParaRPr sz="1100" b="0" i="0">
+                        <a:solidFill>
+                          <a:srgbClr val="BBD4EC"/>
+                        </a:solidFill>
+                        <a:latin typeface="微软雅黑" panose="020B0503020204020204" charset="-122"/>
+                        <a:ea typeface="微软雅黑" panose="020B0503020204020204" charset="-122"/>
+                        <a:cs typeface="微软雅黑" panose="020B0503020204020204" charset="-122"/>
+                      </a:endParaRPr>
                     </a:p>
                   </a:txBody>
                   <a:tcPr marL="100584" marR="100584" marT="41148" marB="41148" anchor="ctr">
@@ -5461,12 +5922,20 @@
                           <a:solidFill>
                             <a:srgbClr val="BBD4EC"/>
                           </a:solidFill>
-                          <a:latin typeface="微软雅黑"/>
-                          <a:ea typeface="微软雅黑"/>
-                          <a:cs typeface="微软雅黑"/>
+                          <a:latin typeface="微软雅黑" panose="020B0503020204020204" charset="-122"/>
+                          <a:ea typeface="微软雅黑" panose="020B0503020204020204" charset="-122"/>
+                          <a:cs typeface="微软雅黑" panose="020B0503020204020204" charset="-122"/>
                         </a:rPr>
                         <a:t>大屏验收</a:t>
                       </a:r>
+                      <a:endParaRPr sz="1100" b="0" i="0">
+                        <a:solidFill>
+                          <a:srgbClr val="BBD4EC"/>
+                        </a:solidFill>
+                        <a:latin typeface="微软雅黑" panose="020B0503020204020204" charset="-122"/>
+                        <a:ea typeface="微软雅黑" panose="020B0503020204020204" charset="-122"/>
+                        <a:cs typeface="微软雅黑" panose="020B0503020204020204" charset="-122"/>
+                      </a:endParaRPr>
                     </a:p>
                   </a:txBody>
                   <a:tcPr marL="100584" marR="100584" marT="41148" marB="41148" anchor="ctr">
@@ -5485,12 +5954,20 @@
                           <a:solidFill>
                             <a:srgbClr val="BBD4EC"/>
                           </a:solidFill>
-                          <a:latin typeface="微软雅黑"/>
-                          <a:ea typeface="微软雅黑"/>
-                          <a:cs typeface="微软雅黑"/>
+                          <a:latin typeface="微软雅黑" panose="020B0503020204020204" charset="-122"/>
+                          <a:ea typeface="微软雅黑" panose="020B0503020204020204" charset="-122"/>
+                          <a:cs typeface="微软雅黑" panose="020B0503020204020204" charset="-122"/>
                         </a:rPr>
                         <a:t>7 项</a:t>
                       </a:r>
+                      <a:endParaRPr sz="1100" b="0" i="0">
+                        <a:solidFill>
+                          <a:srgbClr val="BBD4EC"/>
+                        </a:solidFill>
+                        <a:latin typeface="微软雅黑" panose="020B0503020204020204" charset="-122"/>
+                        <a:ea typeface="微软雅黑" panose="020B0503020204020204" charset="-122"/>
+                        <a:cs typeface="微软雅黑" panose="020B0503020204020204" charset="-122"/>
+                      </a:endParaRPr>
                     </a:p>
                   </a:txBody>
                   <a:tcPr marL="100584" marR="100584" marT="41148" marB="41148" anchor="ctr">
@@ -5509,12 +5986,20 @@
                           <a:solidFill>
                             <a:srgbClr val="BBD4EC"/>
                           </a:solidFill>
-                          <a:latin typeface="微软雅黑"/>
-                          <a:ea typeface="微软雅黑"/>
-                          <a:cs typeface="微软雅黑"/>
+                          <a:latin typeface="微软雅黑" panose="020B0503020204020204" charset="-122"/>
+                          <a:ea typeface="微软雅黑" panose="020B0503020204020204" charset="-122"/>
+                          <a:cs typeface="微软雅黑" panose="020B0503020204020204" charset="-122"/>
                         </a:rPr>
                         <a:t>真浏览器打开：标题、8 列表头、姓名脱敏、无缝滚动，并输出 1920×1080 截图</a:t>
                       </a:r>
+                      <a:endParaRPr sz="1100" b="0" i="0">
+                        <a:solidFill>
+                          <a:srgbClr val="BBD4EC"/>
+                        </a:solidFill>
+                        <a:latin typeface="微软雅黑" panose="020B0503020204020204" charset="-122"/>
+                        <a:ea typeface="微软雅黑" panose="020B0503020204020204" charset="-122"/>
+                        <a:cs typeface="微软雅黑" panose="020B0503020204020204" charset="-122"/>
+                      </a:endParaRPr>
                     </a:p>
                   </a:txBody>
                   <a:tcPr marL="100584" marR="100584" marT="41148" marB="41148" anchor="ctr">
@@ -5535,12 +6020,20 @@
                           <a:solidFill>
                             <a:srgbClr val="BBD4EC"/>
                           </a:solidFill>
-                          <a:latin typeface="微软雅黑"/>
-                          <a:ea typeface="微软雅黑"/>
-                          <a:cs typeface="微软雅黑"/>
+                          <a:latin typeface="微软雅黑" panose="020B0503020204020204" charset="-122"/>
+                          <a:ea typeface="微软雅黑" panose="020B0503020204020204" charset="-122"/>
+                          <a:cs typeface="微软雅黑" panose="020B0503020204020204" charset="-122"/>
                         </a:rPr>
                         <a:t>后台验收</a:t>
                       </a:r>
+                      <a:endParaRPr sz="1100" b="0" i="0">
+                        <a:solidFill>
+                          <a:srgbClr val="BBD4EC"/>
+                        </a:solidFill>
+                        <a:latin typeface="微软雅黑" panose="020B0503020204020204" charset="-122"/>
+                        <a:ea typeface="微软雅黑" panose="020B0503020204020204" charset="-122"/>
+                        <a:cs typeface="微软雅黑" panose="020B0503020204020204" charset="-122"/>
+                      </a:endParaRPr>
                     </a:p>
                   </a:txBody>
                   <a:tcPr marL="100584" marR="100584" marT="41148" marB="41148" anchor="ctr">
@@ -5559,12 +6052,20 @@
                           <a:solidFill>
                             <a:srgbClr val="BBD4EC"/>
                           </a:solidFill>
-                          <a:latin typeface="微软雅黑"/>
-                          <a:ea typeface="微软雅黑"/>
-                          <a:cs typeface="微软雅黑"/>
+                          <a:latin typeface="微软雅黑" panose="020B0503020204020204" charset="-122"/>
+                          <a:ea typeface="微软雅黑" panose="020B0503020204020204" charset="-122"/>
+                          <a:cs typeface="微软雅黑" panose="020B0503020204020204" charset="-122"/>
                         </a:rPr>
                         <a:t>18 项</a:t>
                       </a:r>
+                      <a:endParaRPr sz="1100" b="0" i="0">
+                        <a:solidFill>
+                          <a:srgbClr val="BBD4EC"/>
+                        </a:solidFill>
+                        <a:latin typeface="微软雅黑" panose="020B0503020204020204" charset="-122"/>
+                        <a:ea typeface="微软雅黑" panose="020B0503020204020204" charset="-122"/>
+                        <a:cs typeface="微软雅黑" panose="020B0503020204020204" charset="-122"/>
+                      </a:endParaRPr>
                     </a:p>
                   </a:txBody>
                   <a:tcPr marL="100584" marR="100584" marT="41148" marB="41148" anchor="ctr">
@@ -5583,12 +6084,20 @@
                           <a:solidFill>
                             <a:srgbClr val="BBD4EC"/>
                           </a:solidFill>
-                          <a:latin typeface="微软雅黑"/>
-                          <a:ea typeface="微软雅黑"/>
-                          <a:cs typeface="微软雅黑"/>
+                          <a:latin typeface="微软雅黑" panose="020B0503020204020204" charset="-122"/>
+                          <a:ea typeface="微软雅黑" panose="020B0503020204020204" charset="-122"/>
+                          <a:cs typeface="微软雅黑" panose="020B0503020204020204" charset="-122"/>
                         </a:rPr>
                         <a:t>真实登录后逐页巡检 13 个页面，并验证越权会被拦</a:t>
                       </a:r>
+                      <a:endParaRPr sz="1100" b="0" i="0">
+                        <a:solidFill>
+                          <a:srgbClr val="BBD4EC"/>
+                        </a:solidFill>
+                        <a:latin typeface="微软雅黑" panose="020B0503020204020204" charset="-122"/>
+                        <a:ea typeface="微软雅黑" panose="020B0503020204020204" charset="-122"/>
+                        <a:cs typeface="微软雅黑" panose="020B0503020204020204" charset="-122"/>
+                      </a:endParaRPr>
                     </a:p>
                   </a:txBody>
                   <a:tcPr marL="100584" marR="100584" marT="41148" marB="41148" anchor="ctr">
@@ -5609,12 +6118,20 @@
                           <a:solidFill>
                             <a:srgbClr val="BBD4EC"/>
                           </a:solidFill>
-                          <a:latin typeface="微软雅黑"/>
-                          <a:ea typeface="微软雅黑"/>
-                          <a:cs typeface="微软雅黑"/>
+                          <a:latin typeface="微软雅黑" panose="020B0503020204020204" charset="-122"/>
+                          <a:ea typeface="微软雅黑" panose="020B0503020204020204" charset="-122"/>
+                          <a:cs typeface="微软雅黑" panose="020B0503020204020204" charset="-122"/>
                         </a:rPr>
                         <a:t>公网版验收</a:t>
                       </a:r>
+                      <a:endParaRPr sz="1100" b="0" i="0">
+                        <a:solidFill>
+                          <a:srgbClr val="BBD4EC"/>
+                        </a:solidFill>
+                        <a:latin typeface="微软雅黑" panose="020B0503020204020204" charset="-122"/>
+                        <a:ea typeface="微软雅黑" panose="020B0503020204020204" charset="-122"/>
+                        <a:cs typeface="微软雅黑" panose="020B0503020204020204" charset="-122"/>
+                      </a:endParaRPr>
                     </a:p>
                   </a:txBody>
                   <a:tcPr marL="100584" marR="100584" marT="41148" marB="41148" anchor="ctr">
@@ -5633,12 +6150,20 @@
                           <a:solidFill>
                             <a:srgbClr val="BBD4EC"/>
                           </a:solidFill>
-                          <a:latin typeface="微软雅黑"/>
-                          <a:ea typeface="微软雅黑"/>
-                          <a:cs typeface="微软雅黑"/>
+                          <a:latin typeface="微软雅黑" panose="020B0503020204020204" charset="-122"/>
+                          <a:ea typeface="微软雅黑" panose="020B0503020204020204" charset="-122"/>
+                          <a:cs typeface="微软雅黑" panose="020B0503020204020204" charset="-122"/>
                         </a:rPr>
                         <a:t>33 项</a:t>
                       </a:r>
+                      <a:endParaRPr sz="1100" b="0" i="0">
+                        <a:solidFill>
+                          <a:srgbClr val="BBD4EC"/>
+                        </a:solidFill>
+                        <a:latin typeface="微软雅黑" panose="020B0503020204020204" charset="-122"/>
+                        <a:ea typeface="微软雅黑" panose="020B0503020204020204" charset="-122"/>
+                        <a:cs typeface="微软雅黑" panose="020B0503020204020204" charset="-122"/>
+                      </a:endParaRPr>
                     </a:p>
                   </a:txBody>
                   <a:tcPr marL="100584" marR="100584" marT="41148" marB="41148" anchor="ctr">
@@ -5657,12 +6182,20 @@
                           <a:solidFill>
                             <a:srgbClr val="BBD4EC"/>
                           </a:solidFill>
-                          <a:latin typeface="微软雅黑"/>
-                          <a:ea typeface="微软雅黑"/>
-                          <a:cs typeface="微软雅黑"/>
+                          <a:latin typeface="微软雅黑" panose="020B0503020204020204" charset="-122"/>
+                          <a:ea typeface="微软雅黑" panose="020B0503020204020204" charset="-122"/>
+                          <a:cs typeface="微软雅黑" panose="020B0503020204020204" charset="-122"/>
                         </a:rPr>
                         <a:t>额外确认「响应里不出现真实机构名」和「不提供患者明文」</a:t>
                       </a:r>
+                      <a:endParaRPr sz="1100" b="0" i="0">
+                        <a:solidFill>
+                          <a:srgbClr val="BBD4EC"/>
+                        </a:solidFill>
+                        <a:latin typeface="微软雅黑" panose="020B0503020204020204" charset="-122"/>
+                        <a:ea typeface="微软雅黑" panose="020B0503020204020204" charset="-122"/>
+                        <a:cs typeface="微软雅黑" panose="020B0503020204020204" charset="-122"/>
+                      </a:endParaRPr>
                     </a:p>
                   </a:txBody>
                   <a:tcPr marL="100584" marR="100584" marT="41148" marB="41148" anchor="ctr">
@@ -5683,12 +6216,20 @@
                           <a:solidFill>
                             <a:srgbClr val="BBD4EC"/>
                           </a:solidFill>
-                          <a:latin typeface="微软雅黑"/>
-                          <a:ea typeface="微软雅黑"/>
-                          <a:cs typeface="微软雅黑"/>
+                          <a:latin typeface="微软雅黑" panose="020B0503020204020204" charset="-122"/>
+                          <a:ea typeface="微软雅黑" panose="020B0503020204020204" charset="-122"/>
+                          <a:cs typeface="微软雅黑" panose="020B0503020204020204" charset="-122"/>
                         </a:rPr>
                         <a:t>批处理编码检查</a:t>
                       </a:r>
+                      <a:endParaRPr sz="1100" b="0" i="0">
+                        <a:solidFill>
+                          <a:srgbClr val="BBD4EC"/>
+                        </a:solidFill>
+                        <a:latin typeface="微软雅黑" panose="020B0503020204020204" charset="-122"/>
+                        <a:ea typeface="微软雅黑" panose="020B0503020204020204" charset="-122"/>
+                        <a:cs typeface="微软雅黑" panose="020B0503020204020204" charset="-122"/>
+                      </a:endParaRPr>
                     </a:p>
                   </a:txBody>
                   <a:tcPr marL="100584" marR="100584" marT="41148" marB="41148" anchor="ctr">
@@ -5707,12 +6248,20 @@
                           <a:solidFill>
                             <a:srgbClr val="BBD4EC"/>
                           </a:solidFill>
-                          <a:latin typeface="微软雅黑"/>
-                          <a:ea typeface="微软雅黑"/>
-                          <a:cs typeface="微软雅黑"/>
+                          <a:latin typeface="微软雅黑" panose="020B0503020204020204" charset="-122"/>
+                          <a:ea typeface="微软雅黑" panose="020B0503020204020204" charset="-122"/>
+                          <a:cs typeface="微软雅黑" panose="020B0503020204020204" charset="-122"/>
                         </a:rPr>
                         <a:t>1 项</a:t>
                       </a:r>
+                      <a:endParaRPr sz="1100" b="0" i="0">
+                        <a:solidFill>
+                          <a:srgbClr val="BBD4EC"/>
+                        </a:solidFill>
+                        <a:latin typeface="微软雅黑" panose="020B0503020204020204" charset="-122"/>
+                        <a:ea typeface="微软雅黑" panose="020B0503020204020204" charset="-122"/>
+                        <a:cs typeface="微软雅黑" panose="020B0503020204020204" charset="-122"/>
+                      </a:endParaRPr>
                     </a:p>
                   </a:txBody>
                   <a:tcPr marL="100584" marR="100584" marT="41148" marB="41148" anchor="ctr">
@@ -5731,12 +6280,20 @@
                           <a:solidFill>
                             <a:srgbClr val="BBD4EC"/>
                           </a:solidFill>
-                          <a:latin typeface="微软雅黑"/>
-                          <a:ea typeface="微软雅黑"/>
-                          <a:cs typeface="微软雅黑"/>
+                          <a:latin typeface="微软雅黑" panose="020B0503020204020204" charset="-122"/>
+                          <a:ea typeface="微软雅黑" panose="020B0503020204020204" charset="-122"/>
+                          <a:cs typeface="微软雅黑" panose="020B0503020204020204" charset="-122"/>
                         </a:rPr>
                         <a:t>防止中文写进 .bat 导致命令解析错乱——这是踩过的坑，做成回归守卫</a:t>
                       </a:r>
+                      <a:endParaRPr sz="1100" b="0" i="0">
+                        <a:solidFill>
+                          <a:srgbClr val="BBD4EC"/>
+                        </a:solidFill>
+                        <a:latin typeface="微软雅黑" panose="020B0503020204020204" charset="-122"/>
+                        <a:ea typeface="微软雅黑" panose="020B0503020204020204" charset="-122"/>
+                        <a:cs typeface="微软雅黑" panose="020B0503020204020204" charset="-122"/>
+                      </a:endParaRPr>
                     </a:p>
                   </a:txBody>
                   <a:tcPr marL="100584" marR="100584" marT="41148" marB="41148" anchor="ctr">
@@ -5767,7 +6324,7 @@
           <a:noFill/>
         </p:spPr>
         <p:txBody>
-          <a:bodyPr wrap="square" anchor="t" lIns="0" rIns="0" tIns="0" bIns="0">
+          <a:bodyPr wrap="square" lIns="0" tIns="0" rIns="0" bIns="0" anchor="t">
             <a:spAutoFit/>
           </a:bodyPr>
           <a:lstStyle/>
@@ -5778,9 +6335,9 @@
                 <a:solidFill>
                   <a:srgbClr val="BBD4EC"/>
                 </a:solidFill>
-                <a:latin typeface="微软雅黑"/>
-                <a:ea typeface="微软雅黑"/>
-                <a:cs typeface="微软雅黑"/>
+                <a:latin typeface="微软雅黑" panose="020B0503020204020204" charset="-122"/>
+                <a:ea typeface="微软雅黑" panose="020B0503020204020204" charset="-122"/>
+                <a:cs typeface="微软雅黑" panose="020B0503020204020204" charset="-122"/>
               </a:rPr>
               <a:t>全部只依赖系统自带的 Node 和 Chrome，</a:t>
             </a:r>
@@ -5789,9 +6346,9 @@
                 <a:solidFill>
                   <a:srgbClr val="ECF7FF"/>
                 </a:solidFill>
-                <a:latin typeface="微软雅黑"/>
-                <a:ea typeface="微软雅黑"/>
-                <a:cs typeface="微软雅黑"/>
+                <a:latin typeface="微软雅黑" panose="020B0503020204020204" charset="-122"/>
+                <a:ea typeface="微软雅黑" panose="020B0503020204020204" charset="-122"/>
+                <a:cs typeface="微软雅黑" panose="020B0503020204020204" charset="-122"/>
               </a:rPr>
               <a:t>不需要装 Playwright 之类的测试框架</a:t>
             </a:r>
@@ -5800,12 +6357,20 @@
                 <a:solidFill>
                   <a:srgbClr val="BBD4EC"/>
                 </a:solidFill>
-                <a:latin typeface="微软雅黑"/>
-                <a:ea typeface="微软雅黑"/>
-                <a:cs typeface="微软雅黑"/>
+                <a:latin typeface="微软雅黑" panose="020B0503020204020204" charset="-122"/>
+                <a:ea typeface="微软雅黑" panose="020B0503020204020204" charset="-122"/>
+                <a:cs typeface="微软雅黑" panose="020B0503020204020204" charset="-122"/>
               </a:rPr>
               <a:t>。</a:t>
             </a:r>
+            <a:endParaRPr sz="1350" b="0" i="0">
+              <a:solidFill>
+                <a:srgbClr val="BBD4EC"/>
+              </a:solidFill>
+              <a:latin typeface="微软雅黑" panose="020B0503020204020204" charset="-122"/>
+              <a:ea typeface="微软雅黑" panose="020B0503020204020204" charset="-122"/>
+              <a:cs typeface="微软雅黑" panose="020B0503020204020204" charset="-122"/>
+            </a:endParaRPr>
           </a:p>
         </p:txBody>
       </p:sp>
@@ -5818,7 +6383,7 @@
 </file>
 
 <file path=ppt/slides/slide13.xml><?xml version="1.0" encoding="utf-8"?>
-<p:sld xmlns:a="http://schemas.openxmlformats.org/drawingml/2006/main" xmlns:p="http://schemas.openxmlformats.org/presentationml/2006/main" xmlns:r="http://schemas.openxmlformats.org/officeDocument/2006/relationships">
+<p:sld xmlns:a="http://schemas.openxmlformats.org/drawingml/2006/main" xmlns:r="http://schemas.openxmlformats.org/officeDocument/2006/relationships" xmlns:p="http://schemas.openxmlformats.org/presentationml/2006/main">
   <p:cSld>
     <p:spTree>
       <p:nvGrpSpPr>
@@ -5888,7 +6453,7 @@
           <a:noFill/>
         </p:spPr>
         <p:txBody>
-          <a:bodyPr wrap="square" anchor="t" lIns="0" rIns="0" tIns="0" bIns="0">
+          <a:bodyPr wrap="square" lIns="0" tIns="0" rIns="0" bIns="0" anchor="t">
             <a:spAutoFit/>
           </a:bodyPr>
           <a:lstStyle/>
@@ -5903,12 +6468,20 @@
                 <a:solidFill>
                   <a:srgbClr val="FFFFFF"/>
                 </a:solidFill>
-                <a:latin typeface="微软雅黑"/>
-                <a:ea typeface="微软雅黑"/>
-                <a:cs typeface="微软雅黑"/>
+                <a:latin typeface="微软雅黑" panose="020B0503020204020204" charset="-122"/>
+                <a:ea typeface="微软雅黑" panose="020B0503020204020204" charset="-122"/>
+                <a:cs typeface="微软雅黑" panose="020B0503020204020204" charset="-122"/>
               </a:rPr>
               <a:t>现在就能用</a:t>
             </a:r>
+            <a:endParaRPr sz="4000" b="1" i="0">
+              <a:solidFill>
+                <a:srgbClr val="FFFFFF"/>
+              </a:solidFill>
+              <a:latin typeface="微软雅黑" panose="020B0503020204020204" charset="-122"/>
+              <a:ea typeface="微软雅黑" panose="020B0503020204020204" charset="-122"/>
+              <a:cs typeface="微软雅黑" panose="020B0503020204020204" charset="-122"/>
+            </a:endParaRPr>
           </a:p>
           <a:p>
             <a:pPr algn="ctr"/>
@@ -5917,12 +6490,20 @@
                 <a:solidFill>
                   <a:srgbClr val="C7DCF2"/>
                 </a:solidFill>
-                <a:latin typeface="微软雅黑"/>
-                <a:ea typeface="微软雅黑"/>
-                <a:cs typeface="微软雅黑"/>
+                <a:latin typeface="微软雅黑" panose="020B0503020204020204" charset="-122"/>
+                <a:ea typeface="微软雅黑" panose="020B0503020204020204" charset="-122"/>
+                <a:cs typeface="微软雅黑" panose="020B0503020204020204" charset="-122"/>
               </a:rPr>
               <a:t>三步：双击启动 → 浏览器打开 → 用 admin / Hospital@123 登录。</a:t>
             </a:r>
+            <a:endParaRPr sz="1600" b="0" i="0">
+              <a:solidFill>
+                <a:srgbClr val="C7DCF2"/>
+              </a:solidFill>
+              <a:latin typeface="微软雅黑" panose="020B0503020204020204" charset="-122"/>
+              <a:ea typeface="微软雅黑" panose="020B0503020204020204" charset="-122"/>
+              <a:cs typeface="微软雅黑" panose="020B0503020204020204" charset="-122"/>
+            </a:endParaRPr>
           </a:p>
         </p:txBody>
       </p:sp>
@@ -6013,7 +6594,7 @@
           </a:fontRef>
         </p:style>
         <p:txBody>
-          <a:bodyPr rtlCol="0" anchor="ctr" lIns="0" rIns="0" tIns="0" bIns="0"/>
+          <a:bodyPr lIns="0" tIns="0" rIns="0" bIns="0" rtlCol="0" anchor="ctr"/>
           <a:lstStyle/>
           <a:p>
             <a:pPr algn="ctr"/>
@@ -6022,12 +6603,20 @@
                 <a:solidFill>
                   <a:srgbClr val="FFFFFF"/>
                 </a:solidFill>
-                <a:latin typeface="微软雅黑"/>
-                <a:ea typeface="微软雅黑"/>
-                <a:cs typeface="微软雅黑"/>
+                <a:latin typeface="微软雅黑" panose="020B0503020204020204" charset="-122"/>
+                <a:ea typeface="微软雅黑" panose="020B0503020204020204" charset="-122"/>
+                <a:cs typeface="微软雅黑" panose="020B0503020204020204" charset="-122"/>
               </a:rPr>
               <a:t>1</a:t>
             </a:r>
+            <a:endParaRPr sz="1100" b="1" i="0">
+              <a:solidFill>
+                <a:srgbClr val="FFFFFF"/>
+              </a:solidFill>
+              <a:latin typeface="微软雅黑" panose="020B0503020204020204" charset="-122"/>
+              <a:ea typeface="微软雅黑" panose="020B0503020204020204" charset="-122"/>
+              <a:cs typeface="微软雅黑" panose="020B0503020204020204" charset="-122"/>
+            </a:endParaRPr>
           </a:p>
         </p:txBody>
       </p:sp>
@@ -6048,7 +6637,7 @@
           <a:noFill/>
         </p:spPr>
         <p:txBody>
-          <a:bodyPr wrap="square" anchor="t" lIns="0" rIns="0" tIns="0" bIns="0">
+          <a:bodyPr wrap="square" lIns="0" tIns="0" rIns="0" bIns="0" anchor="t">
             <a:spAutoFit/>
           </a:bodyPr>
           <a:lstStyle/>
@@ -6063,12 +6652,20 @@
                 <a:solidFill>
                   <a:srgbClr val="FFFFFF"/>
                 </a:solidFill>
-                <a:latin typeface="微软雅黑"/>
-                <a:ea typeface="微软雅黑"/>
-                <a:cs typeface="微软雅黑"/>
+                <a:latin typeface="微软雅黑" panose="020B0503020204020204" charset="-122"/>
+                <a:ea typeface="微软雅黑" panose="020B0503020204020204" charset="-122"/>
+                <a:cs typeface="微软雅黑" panose="020B0503020204020204" charset="-122"/>
               </a:rPr>
               <a:t>启动</a:t>
             </a:r>
+            <a:endParaRPr sz="1300" b="1" i="0">
+              <a:solidFill>
+                <a:srgbClr val="FFFFFF"/>
+              </a:solidFill>
+              <a:latin typeface="微软雅黑" panose="020B0503020204020204" charset="-122"/>
+              <a:ea typeface="微软雅黑" panose="020B0503020204020204" charset="-122"/>
+              <a:cs typeface="微软雅黑" panose="020B0503020204020204" charset="-122"/>
+            </a:endParaRPr>
           </a:p>
           <a:p>
             <a:pPr algn="l">
@@ -6081,12 +6678,20 @@
                 <a:solidFill>
                   <a:srgbClr val="7F9DC4"/>
                 </a:solidFill>
-                <a:latin typeface="微软雅黑"/>
-                <a:ea typeface="微软雅黑"/>
-                <a:cs typeface="微软雅黑"/>
+                <a:latin typeface="微软雅黑" panose="020B0503020204020204" charset="-122"/>
+                <a:ea typeface="微软雅黑" panose="020B0503020204020204" charset="-122"/>
+                <a:cs typeface="微软雅黑" panose="020B0503020204020204" charset="-122"/>
               </a:rPr>
               <a:t>双击项目根目录的「启动.bat」</a:t>
             </a:r>
+            <a:endParaRPr sz="950" b="0" i="0">
+              <a:solidFill>
+                <a:srgbClr val="7F9DC4"/>
+              </a:solidFill>
+              <a:latin typeface="微软雅黑" panose="020B0503020204020204" charset="-122"/>
+              <a:ea typeface="微软雅黑" panose="020B0503020204020204" charset="-122"/>
+              <a:cs typeface="微软雅黑" panose="020B0503020204020204" charset="-122"/>
+            </a:endParaRPr>
           </a:p>
         </p:txBody>
       </p:sp>
@@ -6177,7 +6782,7 @@
           </a:fontRef>
         </p:style>
         <p:txBody>
-          <a:bodyPr rtlCol="0" anchor="ctr" lIns="0" rIns="0" tIns="0" bIns="0"/>
+          <a:bodyPr lIns="0" tIns="0" rIns="0" bIns="0" rtlCol="0" anchor="ctr"/>
           <a:lstStyle/>
           <a:p>
             <a:pPr algn="ctr"/>
@@ -6186,12 +6791,20 @@
                 <a:solidFill>
                   <a:srgbClr val="FFFFFF"/>
                 </a:solidFill>
-                <a:latin typeface="微软雅黑"/>
-                <a:ea typeface="微软雅黑"/>
-                <a:cs typeface="微软雅黑"/>
+                <a:latin typeface="微软雅黑" panose="020B0503020204020204" charset="-122"/>
+                <a:ea typeface="微软雅黑" panose="020B0503020204020204" charset="-122"/>
+                <a:cs typeface="微软雅黑" panose="020B0503020204020204" charset="-122"/>
               </a:rPr>
               <a:t>2</a:t>
             </a:r>
+            <a:endParaRPr sz="1100" b="1" i="0">
+              <a:solidFill>
+                <a:srgbClr val="FFFFFF"/>
+              </a:solidFill>
+              <a:latin typeface="微软雅黑" panose="020B0503020204020204" charset="-122"/>
+              <a:ea typeface="微软雅黑" panose="020B0503020204020204" charset="-122"/>
+              <a:cs typeface="微软雅黑" panose="020B0503020204020204" charset="-122"/>
+            </a:endParaRPr>
           </a:p>
         </p:txBody>
       </p:sp>
@@ -6212,7 +6825,7 @@
           <a:noFill/>
         </p:spPr>
         <p:txBody>
-          <a:bodyPr wrap="square" anchor="t" lIns="0" rIns="0" tIns="0" bIns="0">
+          <a:bodyPr wrap="square" lIns="0" tIns="0" rIns="0" bIns="0" anchor="t">
             <a:spAutoFit/>
           </a:bodyPr>
           <a:lstStyle/>
@@ -6227,12 +6840,20 @@
                 <a:solidFill>
                   <a:srgbClr val="FFFFFF"/>
                 </a:solidFill>
-                <a:latin typeface="微软雅黑"/>
-                <a:ea typeface="微软雅黑"/>
-                <a:cs typeface="微软雅黑"/>
+                <a:latin typeface="微软雅黑" panose="020B0503020204020204" charset="-122"/>
+                <a:ea typeface="微软雅黑" panose="020B0503020204020204" charset="-122"/>
+                <a:cs typeface="微软雅黑" panose="020B0503020204020204" charset="-122"/>
               </a:rPr>
               <a:t>打开</a:t>
             </a:r>
+            <a:endParaRPr sz="1300" b="1" i="0">
+              <a:solidFill>
+                <a:srgbClr val="FFFFFF"/>
+              </a:solidFill>
+              <a:latin typeface="微软雅黑" panose="020B0503020204020204" charset="-122"/>
+              <a:ea typeface="微软雅黑" panose="020B0503020204020204" charset="-122"/>
+              <a:cs typeface="微软雅黑" panose="020B0503020204020204" charset="-122"/>
+            </a:endParaRPr>
           </a:p>
           <a:p>
             <a:pPr algn="l">
@@ -6245,12 +6866,20 @@
                 <a:solidFill>
                   <a:srgbClr val="7F9DC4"/>
                 </a:solidFill>
-                <a:latin typeface="微软雅黑"/>
-                <a:ea typeface="微软雅黑"/>
-                <a:cs typeface="微软雅黑"/>
+                <a:latin typeface="微软雅黑" panose="020B0503020204020204" charset="-122"/>
+                <a:ea typeface="微软雅黑" panose="020B0503020204020204" charset="-122"/>
+                <a:cs typeface="微软雅黑" panose="020B0503020204020204" charset="-122"/>
               </a:rPr>
               <a:t>后台 /admin/ ｜ 大屏 /screen/</a:t>
             </a:r>
+            <a:endParaRPr sz="950" b="0" i="0">
+              <a:solidFill>
+                <a:srgbClr val="7F9DC4"/>
+              </a:solidFill>
+              <a:latin typeface="微软雅黑" panose="020B0503020204020204" charset="-122"/>
+              <a:ea typeface="微软雅黑" panose="020B0503020204020204" charset="-122"/>
+              <a:cs typeface="微软雅黑" panose="020B0503020204020204" charset="-122"/>
+            </a:endParaRPr>
           </a:p>
         </p:txBody>
       </p:sp>
@@ -6341,7 +6970,7 @@
           </a:fontRef>
         </p:style>
         <p:txBody>
-          <a:bodyPr rtlCol="0" anchor="ctr" lIns="0" rIns="0" tIns="0" bIns="0"/>
+          <a:bodyPr lIns="0" tIns="0" rIns="0" bIns="0" rtlCol="0" anchor="ctr"/>
           <a:lstStyle/>
           <a:p>
             <a:pPr algn="ctr"/>
@@ -6350,12 +6979,20 @@
                 <a:solidFill>
                   <a:srgbClr val="FFFFFF"/>
                 </a:solidFill>
-                <a:latin typeface="微软雅黑"/>
-                <a:ea typeface="微软雅黑"/>
-                <a:cs typeface="微软雅黑"/>
+                <a:latin typeface="微软雅黑" panose="020B0503020204020204" charset="-122"/>
+                <a:ea typeface="微软雅黑" panose="020B0503020204020204" charset="-122"/>
+                <a:cs typeface="微软雅黑" panose="020B0503020204020204" charset="-122"/>
               </a:rPr>
               <a:t>3</a:t>
             </a:r>
+            <a:endParaRPr sz="1100" b="1" i="0">
+              <a:solidFill>
+                <a:srgbClr val="FFFFFF"/>
+              </a:solidFill>
+              <a:latin typeface="微软雅黑" panose="020B0503020204020204" charset="-122"/>
+              <a:ea typeface="微软雅黑" panose="020B0503020204020204" charset="-122"/>
+              <a:cs typeface="微软雅黑" panose="020B0503020204020204" charset="-122"/>
+            </a:endParaRPr>
           </a:p>
         </p:txBody>
       </p:sp>
@@ -6376,7 +7013,7 @@
           <a:noFill/>
         </p:spPr>
         <p:txBody>
-          <a:bodyPr wrap="square" anchor="t" lIns="0" rIns="0" tIns="0" bIns="0">
+          <a:bodyPr wrap="square" lIns="0" tIns="0" rIns="0" bIns="0" anchor="t">
             <a:spAutoFit/>
           </a:bodyPr>
           <a:lstStyle/>
@@ -6391,12 +7028,20 @@
                 <a:solidFill>
                   <a:srgbClr val="FFFFFF"/>
                 </a:solidFill>
-                <a:latin typeface="微软雅黑"/>
-                <a:ea typeface="微软雅黑"/>
-                <a:cs typeface="微软雅黑"/>
+                <a:latin typeface="微软雅黑" panose="020B0503020204020204" charset="-122"/>
+                <a:ea typeface="微软雅黑" panose="020B0503020204020204" charset="-122"/>
+                <a:cs typeface="微软雅黑" panose="020B0503020204020204" charset="-122"/>
               </a:rPr>
               <a:t>停止</a:t>
             </a:r>
+            <a:endParaRPr sz="1300" b="1" i="0">
+              <a:solidFill>
+                <a:srgbClr val="FFFFFF"/>
+              </a:solidFill>
+              <a:latin typeface="微软雅黑" panose="020B0503020204020204" charset="-122"/>
+              <a:ea typeface="微软雅黑" panose="020B0503020204020204" charset="-122"/>
+              <a:cs typeface="微软雅黑" panose="020B0503020204020204" charset="-122"/>
+            </a:endParaRPr>
           </a:p>
           <a:p>
             <a:pPr algn="l">
@@ -6409,12 +7054,20 @@
                 <a:solidFill>
                   <a:srgbClr val="7F9DC4"/>
                 </a:solidFill>
-                <a:latin typeface="微软雅黑"/>
-                <a:ea typeface="微软雅黑"/>
-                <a:cs typeface="微软雅黑"/>
+                <a:latin typeface="微软雅黑" panose="020B0503020204020204" charset="-122"/>
+                <a:ea typeface="微软雅黑" panose="020B0503020204020204" charset="-122"/>
+                <a:cs typeface="微软雅黑" panose="020B0503020204020204" charset="-122"/>
               </a:rPr>
               <a:t>双击「停止.bat」；取消自启用「取消开机自启.bat」</a:t>
             </a:r>
+            <a:endParaRPr sz="950" b="0" i="0">
+              <a:solidFill>
+                <a:srgbClr val="7F9DC4"/>
+              </a:solidFill>
+              <a:latin typeface="微软雅黑" panose="020B0503020204020204" charset="-122"/>
+              <a:ea typeface="微软雅黑" panose="020B0503020204020204" charset="-122"/>
+              <a:cs typeface="微软雅黑" panose="020B0503020204020204" charset="-122"/>
+            </a:endParaRPr>
           </a:p>
         </p:txBody>
       </p:sp>
@@ -6435,7 +7088,7 @@
           <a:noFill/>
         </p:spPr>
         <p:txBody>
-          <a:bodyPr wrap="square" anchor="t" lIns="0" rIns="0" tIns="0" bIns="0">
+          <a:bodyPr wrap="square" lIns="0" tIns="0" rIns="0" bIns="0" anchor="t">
             <a:spAutoFit/>
           </a:bodyPr>
           <a:lstStyle/>
@@ -6450,12 +7103,20 @@
                 <a:solidFill>
                   <a:srgbClr val="FFFFFF"/>
                 </a:solidFill>
-                <a:latin typeface="微软雅黑"/>
-                <a:ea typeface="微软雅黑"/>
-                <a:cs typeface="微软雅黑"/>
+                <a:latin typeface="微软雅黑" panose="020B0503020204020204" charset="-122"/>
+                <a:ea typeface="微软雅黑" panose="020B0503020204020204" charset="-122"/>
+                <a:cs typeface="微软雅黑" panose="020B0503020204020204" charset="-122"/>
               </a:rPr>
               <a:t>公网大屏：popostar11.github.io/hospital-data-platform</a:t>
             </a:r>
+            <a:endParaRPr sz="1400" b="0" i="0">
+              <a:solidFill>
+                <a:srgbClr val="FFFFFF"/>
+              </a:solidFill>
+              <a:latin typeface="微软雅黑" panose="020B0503020204020204" charset="-122"/>
+              <a:ea typeface="微软雅黑" panose="020B0503020204020204" charset="-122"/>
+              <a:cs typeface="微软雅黑" panose="020B0503020204020204" charset="-122"/>
+            </a:endParaRPr>
           </a:p>
           <a:p>
             <a:pPr algn="ctr"/>
@@ -6464,12 +7125,20 @@
                 <a:solidFill>
                   <a:srgbClr val="7F9DC4"/>
                 </a:solidFill>
-                <a:latin typeface="微软雅黑"/>
-                <a:ea typeface="微软雅黑"/>
-                <a:cs typeface="微软雅黑"/>
+                <a:latin typeface="微软雅黑" panose="020B0503020204020204" charset="-122"/>
+                <a:ea typeface="微软雅黑" panose="020B0503020204020204" charset="-122"/>
+                <a:cs typeface="微软雅黑" panose="020B0503020204020204" charset="-122"/>
               </a:rPr>
               <a:t>全部数据为合成的示例数据，不代表任何真实机构或真实统计结果</a:t>
             </a:r>
+            <a:endParaRPr sz="1150" b="0" i="0">
+              <a:solidFill>
+                <a:srgbClr val="7F9DC4"/>
+              </a:solidFill>
+              <a:latin typeface="微软雅黑" panose="020B0503020204020204" charset="-122"/>
+              <a:ea typeface="微软雅黑" panose="020B0503020204020204" charset="-122"/>
+              <a:cs typeface="微软雅黑" panose="020B0503020204020204" charset="-122"/>
+            </a:endParaRPr>
           </a:p>
         </p:txBody>
       </p:sp>
@@ -6482,7 +7151,7 @@
 </file>
 
 <file path=ppt/slides/slide2.xml><?xml version="1.0" encoding="utf-8"?>
-<p:sld xmlns:a="http://schemas.openxmlformats.org/drawingml/2006/main" xmlns:p="http://schemas.openxmlformats.org/presentationml/2006/main" xmlns:r="http://schemas.openxmlformats.org/officeDocument/2006/relationships">
+<p:sld xmlns:a="http://schemas.openxmlformats.org/drawingml/2006/main" xmlns:r="http://schemas.openxmlformats.org/officeDocument/2006/relationships" xmlns:p="http://schemas.openxmlformats.org/presentationml/2006/main">
   <p:cSld>
     <p:spTree>
       <p:nvGrpSpPr>
@@ -6552,7 +7221,7 @@
           <a:noFill/>
         </p:spPr>
         <p:txBody>
-          <a:bodyPr wrap="square" anchor="t" lIns="0" rIns="0" tIns="0" bIns="0">
+          <a:bodyPr wrap="square" lIns="0" tIns="0" rIns="0" bIns="0" anchor="t">
             <a:spAutoFit/>
           </a:bodyPr>
           <a:lstStyle/>
@@ -6563,12 +7232,20 @@
                 <a:solidFill>
                   <a:srgbClr val="7FE3FF"/>
                 </a:solidFill>
-                <a:latin typeface="微软雅黑"/>
-                <a:ea typeface="微软雅黑"/>
-                <a:cs typeface="微软雅黑"/>
+                <a:latin typeface="微软雅黑" panose="020B0503020204020204" charset="-122"/>
+                <a:ea typeface="微软雅黑" panose="020B0503020204020204" charset="-122"/>
+                <a:cs typeface="微软雅黑" panose="020B0503020204020204" charset="-122"/>
               </a:rPr>
               <a:t>目录</a:t>
             </a:r>
+            <a:endParaRPr sz="1150" b="1" i="0">
+              <a:solidFill>
+                <a:srgbClr val="7FE3FF"/>
+              </a:solidFill>
+              <a:latin typeface="微软雅黑" panose="020B0503020204020204" charset="-122"/>
+              <a:ea typeface="微软雅黑" panose="020B0503020204020204" charset="-122"/>
+              <a:cs typeface="微软雅黑" panose="020B0503020204020204" charset="-122"/>
+            </a:endParaRPr>
           </a:p>
         </p:txBody>
       </p:sp>
@@ -6589,7 +7266,7 @@
           <a:noFill/>
         </p:spPr>
         <p:txBody>
-          <a:bodyPr wrap="square" anchor="t" lIns="0" rIns="0" tIns="0" bIns="0">
+          <a:bodyPr wrap="square" lIns="0" tIns="0" rIns="0" bIns="0" anchor="t">
             <a:spAutoFit/>
           </a:bodyPr>
           <a:lstStyle/>
@@ -6600,12 +7277,20 @@
                 <a:solidFill>
                   <a:srgbClr val="ECF7FF"/>
                 </a:solidFill>
-                <a:latin typeface="微软雅黑"/>
-                <a:ea typeface="微软雅黑"/>
-                <a:cs typeface="微软雅黑"/>
+                <a:latin typeface="微软雅黑" panose="020B0503020204020204" charset="-122"/>
+                <a:ea typeface="微软雅黑" panose="020B0503020204020204" charset="-122"/>
+                <a:cs typeface="微软雅黑" panose="020B0503020204020204" charset="-122"/>
               </a:rPr>
               <a:t>今天只讲三个问题</a:t>
             </a:r>
+            <a:endParaRPr sz="2700" b="1" i="0">
+              <a:solidFill>
+                <a:srgbClr val="ECF7FF"/>
+              </a:solidFill>
+              <a:latin typeface="微软雅黑" panose="020B0503020204020204" charset="-122"/>
+              <a:ea typeface="微软雅黑" panose="020B0503020204020204" charset="-122"/>
+              <a:cs typeface="微软雅黑" panose="020B0503020204020204" charset="-122"/>
+            </a:endParaRPr>
           </a:p>
         </p:txBody>
       </p:sp>
@@ -6626,7 +7311,7 @@
           <a:noFill/>
         </p:spPr>
         <p:txBody>
-          <a:bodyPr wrap="square" anchor="t" lIns="0" rIns="0" tIns="0" bIns="0">
+          <a:bodyPr wrap="square" lIns="0" tIns="0" rIns="0" bIns="0" anchor="t">
             <a:spAutoFit/>
           </a:bodyPr>
           <a:lstStyle/>
@@ -6637,12 +7322,20 @@
                 <a:solidFill>
                   <a:srgbClr val="7E9EC4"/>
                 </a:solidFill>
-                <a:latin typeface="微软雅黑"/>
-                <a:ea typeface="微软雅黑"/>
-                <a:cs typeface="微软雅黑"/>
+                <a:latin typeface="微软雅黑" panose="020B0503020204020204" charset="-122"/>
+                <a:ea typeface="微软雅黑" panose="020B0503020204020204" charset="-122"/>
+                <a:cs typeface="微软雅黑" panose="020B0503020204020204" charset="-122"/>
               </a:rPr>
               <a:t>急救绿道 · 2 / 13</a:t>
             </a:r>
+            <a:endParaRPr sz="1000" b="0" i="0">
+              <a:solidFill>
+                <a:srgbClr val="7E9EC4"/>
+              </a:solidFill>
+              <a:latin typeface="微软雅黑" panose="020B0503020204020204" charset="-122"/>
+              <a:ea typeface="微软雅黑" panose="020B0503020204020204" charset="-122"/>
+              <a:cs typeface="微软雅黑" panose="020B0503020204020204" charset="-122"/>
+            </a:endParaRPr>
           </a:p>
         </p:txBody>
       </p:sp>
@@ -6755,7 +7448,7 @@
           <a:noFill/>
         </p:spPr>
         <p:txBody>
-          <a:bodyPr wrap="square" anchor="t" lIns="0" rIns="0" tIns="0" bIns="0">
+          <a:bodyPr wrap="square" lIns="0" tIns="0" rIns="0" bIns="0" anchor="t">
             <a:spAutoFit/>
           </a:bodyPr>
           <a:lstStyle/>
@@ -6770,12 +7463,20 @@
                 <a:solidFill>
                   <a:srgbClr val="ECF7FF"/>
                 </a:solidFill>
-                <a:latin typeface="微软雅黑"/>
-                <a:ea typeface="微软雅黑"/>
-                <a:cs typeface="微软雅黑"/>
+                <a:latin typeface="微软雅黑" panose="020B0503020204020204" charset="-122"/>
+                <a:ea typeface="微软雅黑" panose="020B0503020204020204" charset="-122"/>
+                <a:cs typeface="微软雅黑" panose="020B0503020204020204" charset="-122"/>
               </a:rPr>
               <a:t>01 · 它是什么</a:t>
             </a:r>
+            <a:endParaRPr sz="1900" b="1" i="0">
+              <a:solidFill>
+                <a:srgbClr val="ECF7FF"/>
+              </a:solidFill>
+              <a:latin typeface="微软雅黑" panose="020B0503020204020204" charset="-122"/>
+              <a:ea typeface="微软雅黑" panose="020B0503020204020204" charset="-122"/>
+              <a:cs typeface="微软雅黑" panose="020B0503020204020204" charset="-122"/>
+            </a:endParaRPr>
           </a:p>
           <a:p>
             <a:pPr algn="l">
@@ -6791,12 +7492,20 @@
                 <a:solidFill>
                   <a:srgbClr val="BBD4EC"/>
                 </a:solidFill>
-                <a:latin typeface="微软雅黑"/>
-                <a:ea typeface="微软雅黑"/>
-                <a:cs typeface="微软雅黑"/>
+                <a:latin typeface="微软雅黑" panose="020B0503020204020204" charset="-122"/>
+                <a:ea typeface="微软雅黑" panose="020B0503020204020204" charset="-122"/>
+                <a:cs typeface="微软雅黑" panose="020B0503020204020204" charset="-122"/>
               </a:rPr>
               <a:t>谁在用、解决什么问题、长什么样。</a:t>
             </a:r>
+            <a:endParaRPr sz="1300" b="0" i="0">
+              <a:solidFill>
+                <a:srgbClr val="BBD4EC"/>
+              </a:solidFill>
+              <a:latin typeface="微软雅黑" panose="020B0503020204020204" charset="-122"/>
+              <a:ea typeface="微软雅黑" panose="020B0503020204020204" charset="-122"/>
+              <a:cs typeface="微软雅黑" panose="020B0503020204020204" charset="-122"/>
+            </a:endParaRPr>
           </a:p>
           <a:p>
             <a:pPr algn="l"/>
@@ -6805,12 +7514,20 @@
                 <a:solidFill>
                   <a:srgbClr val="7E9EC4"/>
                 </a:solidFill>
-                <a:latin typeface="微软雅黑"/>
-                <a:ea typeface="微软雅黑"/>
-                <a:cs typeface="微软雅黑"/>
+                <a:latin typeface="微软雅黑" panose="020B0503020204020204" charset="-122"/>
+                <a:ea typeface="微软雅黑" panose="020B0503020204020204" charset="-122"/>
+                <a:cs typeface="微软雅黑" panose="020B0503020204020204" charset="-122"/>
               </a:rPr>
               <a:t>第 3 ~ 6 页</a:t>
             </a:r>
+            <a:endParaRPr sz="1100" b="0" i="0">
+              <a:solidFill>
+                <a:srgbClr val="7E9EC4"/>
+              </a:solidFill>
+              <a:latin typeface="微软雅黑" panose="020B0503020204020204" charset="-122"/>
+              <a:ea typeface="微软雅黑" panose="020B0503020204020204" charset="-122"/>
+              <a:cs typeface="微软雅黑" panose="020B0503020204020204" charset="-122"/>
+            </a:endParaRPr>
           </a:p>
         </p:txBody>
       </p:sp>
@@ -6923,7 +7640,7 @@
           <a:noFill/>
         </p:spPr>
         <p:txBody>
-          <a:bodyPr wrap="square" anchor="t" lIns="0" rIns="0" tIns="0" bIns="0">
+          <a:bodyPr wrap="square" lIns="0" tIns="0" rIns="0" bIns="0" anchor="t">
             <a:spAutoFit/>
           </a:bodyPr>
           <a:lstStyle/>
@@ -6938,12 +7655,20 @@
                 <a:solidFill>
                   <a:srgbClr val="ECF7FF"/>
                 </a:solidFill>
-                <a:latin typeface="微软雅黑"/>
-                <a:ea typeface="微软雅黑"/>
-                <a:cs typeface="微软雅黑"/>
+                <a:latin typeface="微软雅黑" panose="020B0503020204020204" charset="-122"/>
+                <a:ea typeface="微软雅黑" panose="020B0503020204020204" charset="-122"/>
+                <a:cs typeface="微软雅黑" panose="020B0503020204020204" charset="-122"/>
               </a:rPr>
               <a:t>02 · 怎么做的</a:t>
             </a:r>
+            <a:endParaRPr sz="1900" b="1" i="0">
+              <a:solidFill>
+                <a:srgbClr val="ECF7FF"/>
+              </a:solidFill>
+              <a:latin typeface="微软雅黑" panose="020B0503020204020204" charset="-122"/>
+              <a:ea typeface="微软雅黑" panose="020B0503020204020204" charset="-122"/>
+              <a:cs typeface="微软雅黑" panose="020B0503020204020204" charset="-122"/>
+            </a:endParaRPr>
           </a:p>
           <a:p>
             <a:pPr algn="l">
@@ -6959,12 +7684,20 @@
                 <a:solidFill>
                   <a:srgbClr val="BBD4EC"/>
                 </a:solidFill>
-                <a:latin typeface="微软雅黑"/>
-                <a:ea typeface="微软雅黑"/>
-                <a:cs typeface="微软雅黑"/>
+                <a:latin typeface="微软雅黑" panose="020B0503020204020204" charset="-122"/>
+                <a:ea typeface="微软雅黑" panose="020B0503020204020204" charset="-122"/>
+                <a:cs typeface="微软雅黑" panose="020B0503020204020204" charset="-122"/>
               </a:rPr>
               <a:t>数据怎么流、系统分几层、为什么这么选。</a:t>
             </a:r>
+            <a:endParaRPr sz="1300" b="0" i="0">
+              <a:solidFill>
+                <a:srgbClr val="BBD4EC"/>
+              </a:solidFill>
+              <a:latin typeface="微软雅黑" panose="020B0503020204020204" charset="-122"/>
+              <a:ea typeface="微软雅黑" panose="020B0503020204020204" charset="-122"/>
+              <a:cs typeface="微软雅黑" panose="020B0503020204020204" charset="-122"/>
+            </a:endParaRPr>
           </a:p>
           <a:p>
             <a:pPr algn="l"/>
@@ -6973,12 +7706,20 @@
                 <a:solidFill>
                   <a:srgbClr val="7E9EC4"/>
                 </a:solidFill>
-                <a:latin typeface="微软雅黑"/>
-                <a:ea typeface="微软雅黑"/>
-                <a:cs typeface="微软雅黑"/>
+                <a:latin typeface="微软雅黑" panose="020B0503020204020204" charset="-122"/>
+                <a:ea typeface="微软雅黑" panose="020B0503020204020204" charset="-122"/>
+                <a:cs typeface="微软雅黑" panose="020B0503020204020204" charset="-122"/>
               </a:rPr>
               <a:t>第 7 ~ 11 页</a:t>
             </a:r>
+            <a:endParaRPr sz="1100" b="0" i="0">
+              <a:solidFill>
+                <a:srgbClr val="7E9EC4"/>
+              </a:solidFill>
+              <a:latin typeface="微软雅黑" panose="020B0503020204020204" charset="-122"/>
+              <a:ea typeface="微软雅黑" panose="020B0503020204020204" charset="-122"/>
+              <a:cs typeface="微软雅黑" panose="020B0503020204020204" charset="-122"/>
+            </a:endParaRPr>
           </a:p>
         </p:txBody>
       </p:sp>
@@ -7091,7 +7832,7 @@
           <a:noFill/>
         </p:spPr>
         <p:txBody>
-          <a:bodyPr wrap="square" anchor="t" lIns="0" rIns="0" tIns="0" bIns="0">
+          <a:bodyPr wrap="square" lIns="0" tIns="0" rIns="0" bIns="0" anchor="t">
             <a:spAutoFit/>
           </a:bodyPr>
           <a:lstStyle/>
@@ -7106,12 +7847,20 @@
                 <a:solidFill>
                   <a:srgbClr val="ECF7FF"/>
                 </a:solidFill>
-                <a:latin typeface="微软雅黑"/>
-                <a:ea typeface="微软雅黑"/>
-                <a:cs typeface="微软雅黑"/>
+                <a:latin typeface="微软雅黑" panose="020B0503020204020204" charset="-122"/>
+                <a:ea typeface="微软雅黑" panose="020B0503020204020204" charset="-122"/>
+                <a:cs typeface="微软雅黑" panose="020B0503020204020204" charset="-122"/>
               </a:rPr>
               <a:t>03 · 怎么用</a:t>
             </a:r>
+            <a:endParaRPr sz="1900" b="1" i="0">
+              <a:solidFill>
+                <a:srgbClr val="ECF7FF"/>
+              </a:solidFill>
+              <a:latin typeface="微软雅黑" panose="020B0503020204020204" charset="-122"/>
+              <a:ea typeface="微软雅黑" panose="020B0503020204020204" charset="-122"/>
+              <a:cs typeface="微软雅黑" panose="020B0503020204020204" charset="-122"/>
+            </a:endParaRPr>
           </a:p>
           <a:p>
             <a:pPr algn="l">
@@ -7127,12 +7876,20 @@
                 <a:solidFill>
                   <a:srgbClr val="BBD4EC"/>
                 </a:solidFill>
-                <a:latin typeface="微软雅黑"/>
-                <a:ea typeface="微软雅黑"/>
-                <a:cs typeface="微软雅黑"/>
+                <a:latin typeface="微软雅黑" panose="020B0503020204020204" charset="-122"/>
+                <a:ea typeface="微软雅黑" panose="020B0503020204020204" charset="-122"/>
+                <a:cs typeface="微软雅黑" panose="020B0503020204020204" charset="-122"/>
               </a:rPr>
               <a:t>两个入口、怎么打开、怎么验收到位。</a:t>
             </a:r>
+            <a:endParaRPr sz="1300" b="0" i="0">
+              <a:solidFill>
+                <a:srgbClr val="BBD4EC"/>
+              </a:solidFill>
+              <a:latin typeface="微软雅黑" panose="020B0503020204020204" charset="-122"/>
+              <a:ea typeface="微软雅黑" panose="020B0503020204020204" charset="-122"/>
+              <a:cs typeface="微软雅黑" panose="020B0503020204020204" charset="-122"/>
+            </a:endParaRPr>
           </a:p>
           <a:p>
             <a:pPr algn="l"/>
@@ -7141,12 +7898,20 @@
                 <a:solidFill>
                   <a:srgbClr val="7E9EC4"/>
                 </a:solidFill>
-                <a:latin typeface="微软雅黑"/>
-                <a:ea typeface="微软雅黑"/>
-                <a:cs typeface="微软雅黑"/>
+                <a:latin typeface="微软雅黑" panose="020B0503020204020204" charset="-122"/>
+                <a:ea typeface="微软雅黑" panose="020B0503020204020204" charset="-122"/>
+                <a:cs typeface="微软雅黑" panose="020B0503020204020204" charset="-122"/>
               </a:rPr>
               <a:t>第 12 ~ 13 页</a:t>
             </a:r>
+            <a:endParaRPr sz="1100" b="0" i="0">
+              <a:solidFill>
+                <a:srgbClr val="7E9EC4"/>
+              </a:solidFill>
+              <a:latin typeface="微软雅黑" panose="020B0503020204020204" charset="-122"/>
+              <a:ea typeface="微软雅黑" panose="020B0503020204020204" charset="-122"/>
+              <a:cs typeface="微软雅黑" panose="020B0503020204020204" charset="-122"/>
+            </a:endParaRPr>
           </a:p>
         </p:txBody>
       </p:sp>
@@ -7159,7 +7924,7 @@
 </file>
 
 <file path=ppt/slides/slide3.xml><?xml version="1.0" encoding="utf-8"?>
-<p:sld xmlns:a="http://schemas.openxmlformats.org/drawingml/2006/main" xmlns:p="http://schemas.openxmlformats.org/presentationml/2006/main" xmlns:r="http://schemas.openxmlformats.org/officeDocument/2006/relationships">
+<p:sld xmlns:a="http://schemas.openxmlformats.org/drawingml/2006/main" xmlns:r="http://schemas.openxmlformats.org/officeDocument/2006/relationships" xmlns:p="http://schemas.openxmlformats.org/presentationml/2006/main">
   <p:cSld>
     <p:spTree>
       <p:nvGrpSpPr>
@@ -7229,7 +7994,7 @@
           <a:noFill/>
         </p:spPr>
         <p:txBody>
-          <a:bodyPr wrap="square" anchor="t" lIns="0" rIns="0" tIns="0" bIns="0">
+          <a:bodyPr wrap="square" lIns="0" tIns="0" rIns="0" bIns="0" anchor="t">
             <a:spAutoFit/>
           </a:bodyPr>
           <a:lstStyle/>
@@ -7240,12 +8005,20 @@
                 <a:solidFill>
                   <a:srgbClr val="7FE3FF"/>
                 </a:solidFill>
-                <a:latin typeface="微软雅黑"/>
-                <a:ea typeface="微软雅黑"/>
-                <a:cs typeface="微软雅黑"/>
+                <a:latin typeface="微软雅黑" panose="020B0503020204020204" charset="-122"/>
+                <a:ea typeface="微软雅黑" panose="020B0503020204020204" charset="-122"/>
+                <a:cs typeface="微软雅黑" panose="020B0503020204020204" charset="-122"/>
               </a:rPr>
               <a:t>01 · 它是什么</a:t>
             </a:r>
+            <a:endParaRPr sz="1150" b="1" i="0">
+              <a:solidFill>
+                <a:srgbClr val="7FE3FF"/>
+              </a:solidFill>
+              <a:latin typeface="微软雅黑" panose="020B0503020204020204" charset="-122"/>
+              <a:ea typeface="微软雅黑" panose="020B0503020204020204" charset="-122"/>
+              <a:cs typeface="微软雅黑" panose="020B0503020204020204" charset="-122"/>
+            </a:endParaRPr>
           </a:p>
         </p:txBody>
       </p:sp>
@@ -7266,7 +8039,7 @@
           <a:noFill/>
         </p:spPr>
         <p:txBody>
-          <a:bodyPr wrap="square" anchor="t" lIns="0" rIns="0" tIns="0" bIns="0">
+          <a:bodyPr wrap="square" lIns="0" tIns="0" rIns="0" bIns="0" anchor="t">
             <a:spAutoFit/>
           </a:bodyPr>
           <a:lstStyle/>
@@ -7277,12 +8050,20 @@
                 <a:solidFill>
                   <a:srgbClr val="ECF7FF"/>
                 </a:solidFill>
-                <a:latin typeface="微软雅黑"/>
-                <a:ea typeface="微软雅黑"/>
-                <a:cs typeface="微软雅黑"/>
+                <a:latin typeface="微软雅黑" panose="020B0503020204020204" charset="-122"/>
+                <a:ea typeface="微软雅黑" panose="020B0503020204020204" charset="-122"/>
+                <a:cs typeface="微软雅黑" panose="020B0503020204020204" charset="-122"/>
               </a:rPr>
               <a:t>一句话：把「急救快不快」变成看得见的数字</a:t>
             </a:r>
+            <a:endParaRPr sz="2700" b="1" i="0">
+              <a:solidFill>
+                <a:srgbClr val="ECF7FF"/>
+              </a:solidFill>
+              <a:latin typeface="微软雅黑" panose="020B0503020204020204" charset="-122"/>
+              <a:ea typeface="微软雅黑" panose="020B0503020204020204" charset="-122"/>
+              <a:cs typeface="微软雅黑" panose="020B0503020204020204" charset="-122"/>
+            </a:endParaRPr>
           </a:p>
         </p:txBody>
       </p:sp>
@@ -7303,7 +8084,7 @@
           <a:noFill/>
         </p:spPr>
         <p:txBody>
-          <a:bodyPr wrap="square" anchor="t" lIns="0" rIns="0" tIns="0" bIns="0">
+          <a:bodyPr wrap="square" lIns="0" tIns="0" rIns="0" bIns="0" anchor="t">
             <a:spAutoFit/>
           </a:bodyPr>
           <a:lstStyle/>
@@ -7314,12 +8095,20 @@
                 <a:solidFill>
                   <a:srgbClr val="7E9EC4"/>
                 </a:solidFill>
-                <a:latin typeface="微软雅黑"/>
-                <a:ea typeface="微软雅黑"/>
-                <a:cs typeface="微软雅黑"/>
+                <a:latin typeface="微软雅黑" panose="020B0503020204020204" charset="-122"/>
+                <a:ea typeface="微软雅黑" panose="020B0503020204020204" charset="-122"/>
+                <a:cs typeface="微软雅黑" panose="020B0503020204020204" charset="-122"/>
               </a:rPr>
               <a:t>急救绿道 · 3 / 13</a:t>
             </a:r>
+            <a:endParaRPr sz="1000" b="0" i="0">
+              <a:solidFill>
+                <a:srgbClr val="7E9EC4"/>
+              </a:solidFill>
+              <a:latin typeface="微软雅黑" panose="020B0503020204020204" charset="-122"/>
+              <a:ea typeface="微软雅黑" panose="020B0503020204020204" charset="-122"/>
+              <a:cs typeface="微软雅黑" panose="020B0503020204020204" charset="-122"/>
+            </a:endParaRPr>
           </a:p>
         </p:txBody>
       </p:sp>
@@ -7340,7 +8129,7 @@
           <a:noFill/>
         </p:spPr>
         <p:txBody>
-          <a:bodyPr wrap="square" anchor="t" lIns="0" rIns="0" tIns="0" bIns="0">
+          <a:bodyPr wrap="square" lIns="0" tIns="0" rIns="0" bIns="0" anchor="t">
             <a:spAutoFit/>
           </a:bodyPr>
           <a:lstStyle/>
@@ -7351,12 +8140,20 @@
                 <a:solidFill>
                   <a:srgbClr val="7E9EC4"/>
                 </a:solidFill>
-                <a:latin typeface="微软雅黑"/>
-                <a:ea typeface="微软雅黑"/>
-                <a:cs typeface="微软雅黑"/>
+                <a:latin typeface="微软雅黑" panose="020B0503020204020204" charset="-122"/>
+                <a:ea typeface="微软雅黑" panose="020B0503020204020204" charset="-122"/>
+                <a:cs typeface="微软雅黑" panose="020B0503020204020204" charset="-122"/>
               </a:rPr>
               <a:t>过去要翻表格、打电话问；现在抬头看屏幕就知道。</a:t>
             </a:r>
+            <a:endParaRPr sz="1450" b="0" i="0">
+              <a:solidFill>
+                <a:srgbClr val="7E9EC4"/>
+              </a:solidFill>
+              <a:latin typeface="微软雅黑" panose="020B0503020204020204" charset="-122"/>
+              <a:ea typeface="微软雅黑" panose="020B0503020204020204" charset="-122"/>
+              <a:cs typeface="微软雅黑" panose="020B0503020204020204" charset="-122"/>
+            </a:endParaRPr>
           </a:p>
         </p:txBody>
       </p:sp>
@@ -7425,7 +8222,7 @@
           <a:noFill/>
         </p:spPr>
         <p:txBody>
-          <a:bodyPr wrap="square" anchor="t" lIns="0" rIns="0" tIns="0" bIns="0">
+          <a:bodyPr wrap="square" lIns="0" tIns="0" rIns="0" bIns="0" anchor="t">
             <a:spAutoFit/>
           </a:bodyPr>
           <a:lstStyle/>
@@ -7440,12 +8237,20 @@
                 <a:solidFill>
                   <a:srgbClr val="BBD4EC"/>
                 </a:solidFill>
-                <a:latin typeface="微软雅黑"/>
-                <a:ea typeface="微软雅黑"/>
-                <a:cs typeface="微软雅黑"/>
+                <a:latin typeface="微软雅黑" panose="020B0503020204020204" charset="-122"/>
+                <a:ea typeface="微软雅黑" panose="020B0503020204020204" charset="-122"/>
+                <a:cs typeface="微软雅黑" panose="020B0503020204020204" charset="-122"/>
               </a:rPr>
               <a:t>🖥</a:t>
             </a:r>
+            <a:endParaRPr sz="2600" b="0" i="0">
+              <a:solidFill>
+                <a:srgbClr val="BBD4EC"/>
+              </a:solidFill>
+              <a:latin typeface="微软雅黑" panose="020B0503020204020204" charset="-122"/>
+              <a:ea typeface="微软雅黑" panose="020B0503020204020204" charset="-122"/>
+              <a:cs typeface="微软雅黑" panose="020B0503020204020204" charset="-122"/>
+            </a:endParaRPr>
           </a:p>
           <a:p>
             <a:pPr algn="l">
@@ -7458,12 +8263,20 @@
                 <a:solidFill>
                   <a:srgbClr val="ECF7FF"/>
                 </a:solidFill>
-                <a:latin typeface="微软雅黑"/>
-                <a:ea typeface="微软雅黑"/>
-                <a:cs typeface="微软雅黑"/>
+                <a:latin typeface="微软雅黑" panose="020B0503020204020204" charset="-122"/>
+                <a:ea typeface="微软雅黑" panose="020B0503020204020204" charset="-122"/>
+                <a:cs typeface="微软雅黑" panose="020B0503020204020204" charset="-122"/>
               </a:rPr>
               <a:t>一块大屏</a:t>
             </a:r>
+            <a:endParaRPr sz="1800" b="1" i="0">
+              <a:solidFill>
+                <a:srgbClr val="ECF7FF"/>
+              </a:solidFill>
+              <a:latin typeface="微软雅黑" panose="020B0503020204020204" charset="-122"/>
+              <a:ea typeface="微软雅黑" panose="020B0503020204020204" charset="-122"/>
+              <a:cs typeface="微软雅黑" panose="020B0503020204020204" charset="-122"/>
+            </a:endParaRPr>
           </a:p>
           <a:p>
             <a:pPr algn="l">
@@ -7476,12 +8289,20 @@
                 <a:solidFill>
                   <a:srgbClr val="BBD4EC"/>
                 </a:solidFill>
-                <a:latin typeface="微软雅黑"/>
-                <a:ea typeface="微软雅黑"/>
-                <a:cs typeface="微软雅黑"/>
+                <a:latin typeface="微软雅黑" panose="020B0503020204020204" charset="-122"/>
+                <a:ea typeface="微软雅黑" panose="020B0503020204020204" charset="-122"/>
+                <a:cs typeface="微软雅黑" panose="020B0503020204020204" charset="-122"/>
               </a:rPr>
               <a:t>挂在急诊、医务科或指挥中心。患者从呼救到进入绿道，实时滚动，谁都能看。</a:t>
             </a:r>
+            <a:endParaRPr sz="1250" b="0" i="0">
+              <a:solidFill>
+                <a:srgbClr val="BBD4EC"/>
+              </a:solidFill>
+              <a:latin typeface="微软雅黑" panose="020B0503020204020204" charset="-122"/>
+              <a:ea typeface="微软雅黑" panose="020B0503020204020204" charset="-122"/>
+              <a:cs typeface="微软雅黑" panose="020B0503020204020204" charset="-122"/>
+            </a:endParaRPr>
           </a:p>
         </p:txBody>
       </p:sp>
@@ -7550,7 +8371,7 @@
           <a:noFill/>
         </p:spPr>
         <p:txBody>
-          <a:bodyPr wrap="square" anchor="t" lIns="0" rIns="0" tIns="0" bIns="0">
+          <a:bodyPr wrap="square" lIns="0" tIns="0" rIns="0" bIns="0" anchor="t">
             <a:spAutoFit/>
           </a:bodyPr>
           <a:lstStyle/>
@@ -7565,12 +8386,20 @@
                 <a:solidFill>
                   <a:srgbClr val="BBD4EC"/>
                 </a:solidFill>
-                <a:latin typeface="微软雅黑"/>
-                <a:ea typeface="微软雅黑"/>
-                <a:cs typeface="微软雅黑"/>
+                <a:latin typeface="微软雅黑" panose="020B0503020204020204" charset="-122"/>
+                <a:ea typeface="微软雅黑" panose="020B0503020204020204" charset="-122"/>
+                <a:cs typeface="微软雅黑" panose="020B0503020204020204" charset="-122"/>
               </a:rPr>
               <a:t>🗂</a:t>
             </a:r>
+            <a:endParaRPr sz="2600" b="0" i="0">
+              <a:solidFill>
+                <a:srgbClr val="BBD4EC"/>
+              </a:solidFill>
+              <a:latin typeface="微软雅黑" panose="020B0503020204020204" charset="-122"/>
+              <a:ea typeface="微软雅黑" panose="020B0503020204020204" charset="-122"/>
+              <a:cs typeface="微软雅黑" panose="020B0503020204020204" charset="-122"/>
+            </a:endParaRPr>
           </a:p>
           <a:p>
             <a:pPr algn="l">
@@ -7583,12 +8412,20 @@
                 <a:solidFill>
                   <a:srgbClr val="ECF7FF"/>
                 </a:solidFill>
-                <a:latin typeface="微软雅黑"/>
-                <a:ea typeface="微软雅黑"/>
-                <a:cs typeface="微软雅黑"/>
+                <a:latin typeface="微软雅黑" panose="020B0503020204020204" charset="-122"/>
+                <a:ea typeface="微软雅黑" panose="020B0503020204020204" charset="-122"/>
+                <a:cs typeface="微软雅黑" panose="020B0503020204020204" charset="-122"/>
               </a:rPr>
               <a:t>一个后台</a:t>
             </a:r>
+            <a:endParaRPr sz="1800" b="1" i="0">
+              <a:solidFill>
+                <a:srgbClr val="ECF7FF"/>
+              </a:solidFill>
+              <a:latin typeface="微软雅黑" panose="020B0503020204020204" charset="-122"/>
+              <a:ea typeface="微软雅黑" panose="020B0503020204020204" charset="-122"/>
+              <a:cs typeface="微软雅黑" panose="020B0503020204020204" charset="-122"/>
+            </a:endParaRPr>
           </a:p>
           <a:p>
             <a:pPr algn="l">
@@ -7601,12 +8438,20 @@
                 <a:solidFill>
                   <a:srgbClr val="BBD4EC"/>
                 </a:solidFill>
-                <a:latin typeface="微软雅黑"/>
-                <a:ea typeface="微软雅黑"/>
-                <a:cs typeface="微软雅黑"/>
+                <a:latin typeface="微软雅黑" panose="020B0503020204020204" charset="-122"/>
+                <a:ea typeface="微软雅黑" panose="020B0503020204020204" charset="-122"/>
+                <a:cs typeface="微软雅黑" panose="020B0503020204020204" charset="-122"/>
               </a:rPr>
               <a:t>医生护士录病例、补齐时间节点、维护疾病字典；管理员管账号和权限。</a:t>
             </a:r>
+            <a:endParaRPr sz="1250" b="0" i="0">
+              <a:solidFill>
+                <a:srgbClr val="BBD4EC"/>
+              </a:solidFill>
+              <a:latin typeface="微软雅黑" panose="020B0503020204020204" charset="-122"/>
+              <a:ea typeface="微软雅黑" panose="020B0503020204020204" charset="-122"/>
+              <a:cs typeface="微软雅黑" panose="020B0503020204020204" charset="-122"/>
+            </a:endParaRPr>
           </a:p>
         </p:txBody>
       </p:sp>
@@ -7675,7 +8520,7 @@
           <a:noFill/>
         </p:spPr>
         <p:txBody>
-          <a:bodyPr wrap="square" anchor="t" lIns="0" rIns="0" tIns="0" bIns="0">
+          <a:bodyPr wrap="square" lIns="0" tIns="0" rIns="0" bIns="0" anchor="t">
             <a:spAutoFit/>
           </a:bodyPr>
           <a:lstStyle/>
@@ -7690,12 +8535,20 @@
                 <a:solidFill>
                   <a:srgbClr val="BBD4EC"/>
                 </a:solidFill>
-                <a:latin typeface="微软雅黑"/>
-                <a:ea typeface="微软雅黑"/>
-                <a:cs typeface="微软雅黑"/>
+                <a:latin typeface="微软雅黑" panose="020B0503020204020204" charset="-122"/>
+                <a:ea typeface="微软雅黑" panose="020B0503020204020204" charset="-122"/>
+                <a:cs typeface="微软雅黑" panose="020B0503020204020204" charset="-122"/>
               </a:rPr>
               <a:t>📈</a:t>
             </a:r>
+            <a:endParaRPr sz="2600" b="0" i="0">
+              <a:solidFill>
+                <a:srgbClr val="BBD4EC"/>
+              </a:solidFill>
+              <a:latin typeface="微软雅黑" panose="020B0503020204020204" charset="-122"/>
+              <a:ea typeface="微软雅黑" panose="020B0503020204020204" charset="-122"/>
+              <a:cs typeface="微软雅黑" panose="020B0503020204020204" charset="-122"/>
+            </a:endParaRPr>
           </a:p>
           <a:p>
             <a:pPr algn="l">
@@ -7708,12 +8561,20 @@
                 <a:solidFill>
                   <a:srgbClr val="ECF7FF"/>
                 </a:solidFill>
-                <a:latin typeface="微软雅黑"/>
-                <a:ea typeface="微软雅黑"/>
-                <a:cs typeface="微软雅黑"/>
+                <a:latin typeface="微软雅黑" panose="020B0503020204020204" charset="-122"/>
+                <a:ea typeface="微软雅黑" panose="020B0503020204020204" charset="-122"/>
+                <a:cs typeface="微软雅黑" panose="020B0503020204020204" charset="-122"/>
               </a:rPr>
               <a:t>一套报表</a:t>
             </a:r>
+            <a:endParaRPr sz="1800" b="1" i="0">
+              <a:solidFill>
+                <a:srgbClr val="ECF7FF"/>
+              </a:solidFill>
+              <a:latin typeface="微软雅黑" panose="020B0503020204020204" charset="-122"/>
+              <a:ea typeface="微软雅黑" panose="020B0503020204020204" charset="-122"/>
+              <a:cs typeface="微软雅黑" panose="020B0503020204020204" charset="-122"/>
+            </a:endParaRPr>
           </a:p>
           <a:p>
             <a:pPr algn="l">
@@ -7726,12 +8587,20 @@
                 <a:solidFill>
                   <a:srgbClr val="BBD4EC"/>
                 </a:solidFill>
-                <a:latin typeface="微软雅黑"/>
-                <a:ea typeface="微软雅黑"/>
-                <a:cs typeface="微软雅黑"/>
+                <a:latin typeface="微软雅黑" panose="020B0503020204020204" charset="-122"/>
+                <a:ea typeface="微软雅黑" panose="020B0503020204020204" charset="-122"/>
+                <a:cs typeface="微软雅黑" panose="020B0503020204020204" charset="-122"/>
               </a:rPr>
               <a:t>按月、按科室、按病种统计数量与响应时长，还能一键导出成 Excel。</a:t>
             </a:r>
+            <a:endParaRPr sz="1250" b="0" i="0">
+              <a:solidFill>
+                <a:srgbClr val="BBD4EC"/>
+              </a:solidFill>
+              <a:latin typeface="微软雅黑" panose="020B0503020204020204" charset="-122"/>
+              <a:ea typeface="微软雅黑" panose="020B0503020204020204" charset="-122"/>
+              <a:cs typeface="微软雅黑" panose="020B0503020204020204" charset="-122"/>
+            </a:endParaRPr>
           </a:p>
         </p:txBody>
       </p:sp>
@@ -7744,7 +8613,7 @@
 </file>
 
 <file path=ppt/slides/slide4.xml><?xml version="1.0" encoding="utf-8"?>
-<p:sld xmlns:a="http://schemas.openxmlformats.org/drawingml/2006/main" xmlns:p="http://schemas.openxmlformats.org/presentationml/2006/main" xmlns:r="http://schemas.openxmlformats.org/officeDocument/2006/relationships">
+<p:sld xmlns:a="http://schemas.openxmlformats.org/drawingml/2006/main" xmlns:r="http://schemas.openxmlformats.org/officeDocument/2006/relationships" xmlns:p="http://schemas.openxmlformats.org/presentationml/2006/main">
   <p:cSld>
     <p:spTree>
       <p:nvGrpSpPr>
@@ -7814,7 +8683,7 @@
           <a:noFill/>
         </p:spPr>
         <p:txBody>
-          <a:bodyPr wrap="square" anchor="t" lIns="0" rIns="0" tIns="0" bIns="0">
+          <a:bodyPr wrap="square" lIns="0" tIns="0" rIns="0" bIns="0" anchor="t">
             <a:spAutoFit/>
           </a:bodyPr>
           <a:lstStyle/>
@@ -7825,12 +8694,20 @@
                 <a:solidFill>
                   <a:srgbClr val="7FE3FF"/>
                 </a:solidFill>
-                <a:latin typeface="微软雅黑"/>
-                <a:ea typeface="微软雅黑"/>
-                <a:cs typeface="微软雅黑"/>
+                <a:latin typeface="微软雅黑" panose="020B0503020204020204" charset="-122"/>
+                <a:ea typeface="微软雅黑" panose="020B0503020204020204" charset="-122"/>
+                <a:cs typeface="微软雅黑" panose="020B0503020204020204" charset="-122"/>
               </a:rPr>
               <a:t>01 · 它是什么</a:t>
             </a:r>
+            <a:endParaRPr sz="1150" b="1" i="0">
+              <a:solidFill>
+                <a:srgbClr val="7FE3FF"/>
+              </a:solidFill>
+              <a:latin typeface="微软雅黑" panose="020B0503020204020204" charset="-122"/>
+              <a:ea typeface="微软雅黑" panose="020B0503020204020204" charset="-122"/>
+              <a:cs typeface="微软雅黑" panose="020B0503020204020204" charset="-122"/>
+            </a:endParaRPr>
           </a:p>
         </p:txBody>
       </p:sp>
@@ -7851,7 +8728,7 @@
           <a:noFill/>
         </p:spPr>
         <p:txBody>
-          <a:bodyPr wrap="square" anchor="t" lIns="0" rIns="0" tIns="0" bIns="0">
+          <a:bodyPr wrap="square" lIns="0" tIns="0" rIns="0" bIns="0" anchor="t">
             <a:spAutoFit/>
           </a:bodyPr>
           <a:lstStyle/>
@@ -7862,12 +8739,20 @@
                 <a:solidFill>
                   <a:srgbClr val="ECF7FF"/>
                 </a:solidFill>
-                <a:latin typeface="微软雅黑"/>
-                <a:ea typeface="微软雅黑"/>
-                <a:cs typeface="微软雅黑"/>
+                <a:latin typeface="微软雅黑" panose="020B0503020204020204" charset="-122"/>
+                <a:ea typeface="微软雅黑" panose="020B0503020204020204" charset="-122"/>
+                <a:cs typeface="微软雅黑" panose="020B0503020204020204" charset="-122"/>
               </a:rPr>
               <a:t>大屏长这样：五个区域，各有分工</a:t>
             </a:r>
+            <a:endParaRPr sz="2700" b="1" i="0">
+              <a:solidFill>
+                <a:srgbClr val="ECF7FF"/>
+              </a:solidFill>
+              <a:latin typeface="微软雅黑" panose="020B0503020204020204" charset="-122"/>
+              <a:ea typeface="微软雅黑" panose="020B0503020204020204" charset="-122"/>
+              <a:cs typeface="微软雅黑" panose="020B0503020204020204" charset="-122"/>
+            </a:endParaRPr>
           </a:p>
         </p:txBody>
       </p:sp>
@@ -7888,7 +8773,7 @@
           <a:noFill/>
         </p:spPr>
         <p:txBody>
-          <a:bodyPr wrap="square" anchor="t" lIns="0" rIns="0" tIns="0" bIns="0">
+          <a:bodyPr wrap="square" lIns="0" tIns="0" rIns="0" bIns="0" anchor="t">
             <a:spAutoFit/>
           </a:bodyPr>
           <a:lstStyle/>
@@ -7899,12 +8784,20 @@
                 <a:solidFill>
                   <a:srgbClr val="7E9EC4"/>
                 </a:solidFill>
-                <a:latin typeface="微软雅黑"/>
-                <a:ea typeface="微软雅黑"/>
-                <a:cs typeface="微软雅黑"/>
+                <a:latin typeface="微软雅黑" panose="020B0503020204020204" charset="-122"/>
+                <a:ea typeface="微软雅黑" panose="020B0503020204020204" charset="-122"/>
+                <a:cs typeface="微软雅黑" panose="020B0503020204020204" charset="-122"/>
               </a:rPr>
               <a:t>急救绿道 · 4 / 13</a:t>
             </a:r>
+            <a:endParaRPr sz="1000" b="0" i="0">
+              <a:solidFill>
+                <a:srgbClr val="7E9EC4"/>
+              </a:solidFill>
+              <a:latin typeface="微软雅黑" panose="020B0503020204020204" charset="-122"/>
+              <a:ea typeface="微软雅黑" panose="020B0503020204020204" charset="-122"/>
+              <a:cs typeface="微软雅黑" panose="020B0503020204020204" charset="-122"/>
+            </a:endParaRPr>
           </a:p>
         </p:txBody>
       </p:sp>
@@ -7917,7 +8810,7 @@
           <p:nvPr/>
         </p:nvPicPr>
         <p:blipFill>
-          <a:blip r:embed="rId2"/>
+          <a:blip r:embed="rId1"/>
           <a:stretch>
             <a:fillRect/>
           </a:stretch>
@@ -7949,7 +8842,7 @@
           <a:noFill/>
         </p:spPr>
         <p:txBody>
-          <a:bodyPr wrap="square" anchor="t" lIns="0" rIns="0" tIns="0" bIns="0">
+          <a:bodyPr wrap="square" lIns="0" tIns="0" rIns="0" bIns="0" anchor="t">
             <a:spAutoFit/>
           </a:bodyPr>
           <a:lstStyle/>
@@ -7960,12 +8853,20 @@
                 <a:solidFill>
                   <a:srgbClr val="7E9EC4"/>
                 </a:solidFill>
-                <a:latin typeface="微软雅黑"/>
-                <a:ea typeface="微软雅黑"/>
-                <a:cs typeface="微软雅黑"/>
+                <a:latin typeface="微软雅黑" panose="020B0503020204020204" charset="-122"/>
+                <a:ea typeface="微软雅黑" panose="020B0503020204020204" charset="-122"/>
+                <a:cs typeface="微软雅黑" panose="020B0503020204020204" charset="-122"/>
               </a:rPr>
               <a:t>图 1 · 1920×1080 实机渲染（数据为合成演示数据）</a:t>
             </a:r>
+            <a:endParaRPr sz="950" b="0" i="0">
+              <a:solidFill>
+                <a:srgbClr val="7E9EC4"/>
+              </a:solidFill>
+              <a:latin typeface="微软雅黑" panose="020B0503020204020204" charset="-122"/>
+              <a:ea typeface="微软雅黑" panose="020B0503020204020204" charset="-122"/>
+              <a:cs typeface="微软雅黑" panose="020B0503020204020204" charset="-122"/>
+            </a:endParaRPr>
           </a:p>
         </p:txBody>
       </p:sp>
@@ -8008,7 +8909,7 @@
           </a:fontRef>
         </p:style>
         <p:txBody>
-          <a:bodyPr rtlCol="0" anchor="ctr" lIns="0" rIns="0" tIns="0" bIns="0"/>
+          <a:bodyPr lIns="0" tIns="0" rIns="0" bIns="0" rtlCol="0" anchor="ctr"/>
           <a:lstStyle/>
           <a:p>
             <a:pPr algn="ctr"/>
@@ -8017,12 +8918,20 @@
                 <a:solidFill>
                   <a:srgbClr val="FFFFFF"/>
                 </a:solidFill>
-                <a:latin typeface="微软雅黑"/>
-                <a:ea typeface="微软雅黑"/>
-                <a:cs typeface="微软雅黑"/>
+                <a:latin typeface="微软雅黑" panose="020B0503020204020204" charset="-122"/>
+                <a:ea typeface="微软雅黑" panose="020B0503020204020204" charset="-122"/>
+                <a:cs typeface="微软雅黑" panose="020B0503020204020204" charset="-122"/>
               </a:rPr>
               <a:t>1</a:t>
             </a:r>
+            <a:endParaRPr sz="1000" b="1" i="0">
+              <a:solidFill>
+                <a:srgbClr val="FFFFFF"/>
+              </a:solidFill>
+              <a:latin typeface="微软雅黑" panose="020B0503020204020204" charset="-122"/>
+              <a:ea typeface="微软雅黑" panose="020B0503020204020204" charset="-122"/>
+              <a:cs typeface="微软雅黑" panose="020B0503020204020204" charset="-122"/>
+            </a:endParaRPr>
           </a:p>
         </p:txBody>
       </p:sp>
@@ -8065,7 +8974,7 @@
           </a:fontRef>
         </p:style>
         <p:txBody>
-          <a:bodyPr rtlCol="0" anchor="ctr" lIns="0" rIns="0" tIns="0" bIns="0"/>
+          <a:bodyPr lIns="0" tIns="0" rIns="0" bIns="0" rtlCol="0" anchor="ctr"/>
           <a:lstStyle/>
           <a:p>
             <a:pPr algn="ctr"/>
@@ -8074,12 +8983,20 @@
                 <a:solidFill>
                   <a:srgbClr val="FFFFFF"/>
                 </a:solidFill>
-                <a:latin typeface="微软雅黑"/>
-                <a:ea typeface="微软雅黑"/>
-                <a:cs typeface="微软雅黑"/>
+                <a:latin typeface="微软雅黑" panose="020B0503020204020204" charset="-122"/>
+                <a:ea typeface="微软雅黑" panose="020B0503020204020204" charset="-122"/>
+                <a:cs typeface="微软雅黑" panose="020B0503020204020204" charset="-122"/>
               </a:rPr>
               <a:t>2</a:t>
             </a:r>
+            <a:endParaRPr sz="1000" b="1" i="0">
+              <a:solidFill>
+                <a:srgbClr val="FFFFFF"/>
+              </a:solidFill>
+              <a:latin typeface="微软雅黑" panose="020B0503020204020204" charset="-122"/>
+              <a:ea typeface="微软雅黑" panose="020B0503020204020204" charset="-122"/>
+              <a:cs typeface="微软雅黑" panose="020B0503020204020204" charset="-122"/>
+            </a:endParaRPr>
           </a:p>
         </p:txBody>
       </p:sp>
@@ -8122,7 +9039,7 @@
           </a:fontRef>
         </p:style>
         <p:txBody>
-          <a:bodyPr rtlCol="0" anchor="ctr" lIns="0" rIns="0" tIns="0" bIns="0"/>
+          <a:bodyPr lIns="0" tIns="0" rIns="0" bIns="0" rtlCol="0" anchor="ctr"/>
           <a:lstStyle/>
           <a:p>
             <a:pPr algn="ctr"/>
@@ -8131,12 +9048,20 @@
                 <a:solidFill>
                   <a:srgbClr val="FFFFFF"/>
                 </a:solidFill>
-                <a:latin typeface="微软雅黑"/>
-                <a:ea typeface="微软雅黑"/>
-                <a:cs typeface="微软雅黑"/>
+                <a:latin typeface="微软雅黑" panose="020B0503020204020204" charset="-122"/>
+                <a:ea typeface="微软雅黑" panose="020B0503020204020204" charset="-122"/>
+                <a:cs typeface="微软雅黑" panose="020B0503020204020204" charset="-122"/>
               </a:rPr>
               <a:t>3</a:t>
             </a:r>
+            <a:endParaRPr sz="1000" b="1" i="0">
+              <a:solidFill>
+                <a:srgbClr val="FFFFFF"/>
+              </a:solidFill>
+              <a:latin typeface="微软雅黑" panose="020B0503020204020204" charset="-122"/>
+              <a:ea typeface="微软雅黑" panose="020B0503020204020204" charset="-122"/>
+              <a:cs typeface="微软雅黑" panose="020B0503020204020204" charset="-122"/>
+            </a:endParaRPr>
           </a:p>
         </p:txBody>
       </p:sp>
@@ -8179,7 +9104,7 @@
           </a:fontRef>
         </p:style>
         <p:txBody>
-          <a:bodyPr rtlCol="0" anchor="ctr" lIns="0" rIns="0" tIns="0" bIns="0"/>
+          <a:bodyPr lIns="0" tIns="0" rIns="0" bIns="0" rtlCol="0" anchor="ctr"/>
           <a:lstStyle/>
           <a:p>
             <a:pPr algn="ctr"/>
@@ -8188,12 +9113,20 @@
                 <a:solidFill>
                   <a:srgbClr val="FFFFFF"/>
                 </a:solidFill>
-                <a:latin typeface="微软雅黑"/>
-                <a:ea typeface="微软雅黑"/>
-                <a:cs typeface="微软雅黑"/>
+                <a:latin typeface="微软雅黑" panose="020B0503020204020204" charset="-122"/>
+                <a:ea typeface="微软雅黑" panose="020B0503020204020204" charset="-122"/>
+                <a:cs typeface="微软雅黑" panose="020B0503020204020204" charset="-122"/>
               </a:rPr>
               <a:t>4</a:t>
             </a:r>
+            <a:endParaRPr sz="1000" b="1" i="0">
+              <a:solidFill>
+                <a:srgbClr val="FFFFFF"/>
+              </a:solidFill>
+              <a:latin typeface="微软雅黑" panose="020B0503020204020204" charset="-122"/>
+              <a:ea typeface="微软雅黑" panose="020B0503020204020204" charset="-122"/>
+              <a:cs typeface="微软雅黑" panose="020B0503020204020204" charset="-122"/>
+            </a:endParaRPr>
           </a:p>
         </p:txBody>
       </p:sp>
@@ -8236,7 +9169,7 @@
           </a:fontRef>
         </p:style>
         <p:txBody>
-          <a:bodyPr rtlCol="0" anchor="ctr" lIns="0" rIns="0" tIns="0" bIns="0"/>
+          <a:bodyPr lIns="0" tIns="0" rIns="0" bIns="0" rtlCol="0" anchor="ctr"/>
           <a:lstStyle/>
           <a:p>
             <a:pPr algn="ctr"/>
@@ -8245,12 +9178,20 @@
                 <a:solidFill>
                   <a:srgbClr val="FFFFFF"/>
                 </a:solidFill>
-                <a:latin typeface="微软雅黑"/>
-                <a:ea typeface="微软雅黑"/>
-                <a:cs typeface="微软雅黑"/>
+                <a:latin typeface="微软雅黑" panose="020B0503020204020204" charset="-122"/>
+                <a:ea typeface="微软雅黑" panose="020B0503020204020204" charset="-122"/>
+                <a:cs typeface="微软雅黑" panose="020B0503020204020204" charset="-122"/>
               </a:rPr>
               <a:t>5</a:t>
             </a:r>
+            <a:endParaRPr sz="1000" b="1" i="0">
+              <a:solidFill>
+                <a:srgbClr val="FFFFFF"/>
+              </a:solidFill>
+              <a:latin typeface="微软雅黑" panose="020B0503020204020204" charset="-122"/>
+              <a:ea typeface="微软雅黑" panose="020B0503020204020204" charset="-122"/>
+              <a:cs typeface="微软雅黑" panose="020B0503020204020204" charset="-122"/>
+            </a:endParaRPr>
           </a:p>
         </p:txBody>
       </p:sp>
@@ -8341,7 +9282,7 @@
           </a:fontRef>
         </p:style>
         <p:txBody>
-          <a:bodyPr rtlCol="0" anchor="ctr" lIns="0" rIns="0" tIns="0" bIns="0"/>
+          <a:bodyPr lIns="0" tIns="0" rIns="0" bIns="0" rtlCol="0" anchor="ctr"/>
           <a:lstStyle/>
           <a:p>
             <a:pPr algn="ctr"/>
@@ -8350,12 +9291,20 @@
                 <a:solidFill>
                   <a:srgbClr val="FFFFFF"/>
                 </a:solidFill>
-                <a:latin typeface="微软雅黑"/>
-                <a:ea typeface="微软雅黑"/>
-                <a:cs typeface="微软雅黑"/>
+                <a:latin typeface="微软雅黑" panose="020B0503020204020204" charset="-122"/>
+                <a:ea typeface="微软雅黑" panose="020B0503020204020204" charset="-122"/>
+                <a:cs typeface="微软雅黑" panose="020B0503020204020204" charset="-122"/>
               </a:rPr>
               <a:t>1</a:t>
             </a:r>
+            <a:endParaRPr sz="1000" b="1" i="0">
+              <a:solidFill>
+                <a:srgbClr val="FFFFFF"/>
+              </a:solidFill>
+              <a:latin typeface="微软雅黑" panose="020B0503020204020204" charset="-122"/>
+              <a:ea typeface="微软雅黑" panose="020B0503020204020204" charset="-122"/>
+              <a:cs typeface="微软雅黑" panose="020B0503020204020204" charset="-122"/>
+            </a:endParaRPr>
           </a:p>
         </p:txBody>
       </p:sp>
@@ -8376,7 +9325,7 @@
           <a:noFill/>
         </p:spPr>
         <p:txBody>
-          <a:bodyPr wrap="square" anchor="t" lIns="0" rIns="0" tIns="0" bIns="0">
+          <a:bodyPr wrap="square" lIns="0" tIns="0" rIns="0" bIns="0" anchor="t">
             <a:spAutoFit/>
           </a:bodyPr>
           <a:lstStyle/>
@@ -8391,12 +9340,20 @@
                 <a:solidFill>
                   <a:srgbClr val="BBD4EC"/>
                 </a:solidFill>
-                <a:latin typeface="微软雅黑"/>
-                <a:ea typeface="微软雅黑"/>
-                <a:cs typeface="微软雅黑"/>
+                <a:latin typeface="微软雅黑" panose="020B0503020204020204" charset="-122"/>
+                <a:ea typeface="微软雅黑" panose="020B0503020204020204" charset="-122"/>
+                <a:cs typeface="微软雅黑" panose="020B0503020204020204" charset="-122"/>
               </a:rPr>
               <a:t>顶部标题栏</a:t>
             </a:r>
+            <a:endParaRPr sz="1150" b="1" i="0">
+              <a:solidFill>
+                <a:srgbClr val="BBD4EC"/>
+              </a:solidFill>
+              <a:latin typeface="微软雅黑" panose="020B0503020204020204" charset="-122"/>
+              <a:ea typeface="微软雅黑" panose="020B0503020204020204" charset="-122"/>
+              <a:cs typeface="微软雅黑" panose="020B0503020204020204" charset="-122"/>
+            </a:endParaRPr>
           </a:p>
           <a:p>
             <a:pPr algn="l">
@@ -8409,12 +9366,20 @@
                 <a:solidFill>
                   <a:srgbClr val="7E9EC4"/>
                 </a:solidFill>
-                <a:latin typeface="微软雅黑"/>
-                <a:ea typeface="微软雅黑"/>
-                <a:cs typeface="微软雅黑"/>
+                <a:latin typeface="微软雅黑" panose="020B0503020204020204" charset="-122"/>
+                <a:ea typeface="微软雅黑" panose="020B0503020204020204" charset="-122"/>
+                <a:cs typeface="微软雅黑" panose="020B0503020204020204" charset="-122"/>
               </a:rPr>
               <a:t>机构名称 + 实时时钟，一眼确认「这屏是活的」</a:t>
             </a:r>
+            <a:endParaRPr sz="950" b="0" i="0">
+              <a:solidFill>
+                <a:srgbClr val="7E9EC4"/>
+              </a:solidFill>
+              <a:latin typeface="微软雅黑" panose="020B0503020204020204" charset="-122"/>
+              <a:ea typeface="微软雅黑" panose="020B0503020204020204" charset="-122"/>
+              <a:cs typeface="微软雅黑" panose="020B0503020204020204" charset="-122"/>
+            </a:endParaRPr>
           </a:p>
         </p:txBody>
       </p:sp>
@@ -8505,7 +9470,7 @@
           </a:fontRef>
         </p:style>
         <p:txBody>
-          <a:bodyPr rtlCol="0" anchor="ctr" lIns="0" rIns="0" tIns="0" bIns="0"/>
+          <a:bodyPr lIns="0" tIns="0" rIns="0" bIns="0" rtlCol="0" anchor="ctr"/>
           <a:lstStyle/>
           <a:p>
             <a:pPr algn="ctr"/>
@@ -8514,12 +9479,20 @@
                 <a:solidFill>
                   <a:srgbClr val="FFFFFF"/>
                 </a:solidFill>
-                <a:latin typeface="微软雅黑"/>
-                <a:ea typeface="微软雅黑"/>
-                <a:cs typeface="微软雅黑"/>
+                <a:latin typeface="微软雅黑" panose="020B0503020204020204" charset="-122"/>
+                <a:ea typeface="微软雅黑" panose="020B0503020204020204" charset="-122"/>
+                <a:cs typeface="微软雅黑" panose="020B0503020204020204" charset="-122"/>
               </a:rPr>
               <a:t>2</a:t>
             </a:r>
+            <a:endParaRPr sz="1000" b="1" i="0">
+              <a:solidFill>
+                <a:srgbClr val="FFFFFF"/>
+              </a:solidFill>
+              <a:latin typeface="微软雅黑" panose="020B0503020204020204" charset="-122"/>
+              <a:ea typeface="微软雅黑" panose="020B0503020204020204" charset="-122"/>
+              <a:cs typeface="微软雅黑" panose="020B0503020204020204" charset="-122"/>
+            </a:endParaRPr>
           </a:p>
         </p:txBody>
       </p:sp>
@@ -8540,7 +9513,7 @@
           <a:noFill/>
         </p:spPr>
         <p:txBody>
-          <a:bodyPr wrap="square" anchor="t" lIns="0" rIns="0" tIns="0" bIns="0">
+          <a:bodyPr wrap="square" lIns="0" tIns="0" rIns="0" bIns="0" anchor="t">
             <a:spAutoFit/>
           </a:bodyPr>
           <a:lstStyle/>
@@ -8555,12 +9528,20 @@
                 <a:solidFill>
                   <a:srgbClr val="BBD4EC"/>
                 </a:solidFill>
-                <a:latin typeface="微软雅黑"/>
-                <a:ea typeface="微软雅黑"/>
-                <a:cs typeface="微软雅黑"/>
+                <a:latin typeface="微软雅黑" panose="020B0503020204020204" charset="-122"/>
+                <a:ea typeface="微软雅黑" panose="020B0503020204020204" charset="-122"/>
+                <a:cs typeface="微软雅黑" panose="020B0503020204020204" charset="-122"/>
               </a:rPr>
               <a:t>累计患者饼图</a:t>
             </a:r>
+            <a:endParaRPr sz="1150" b="1" i="0">
+              <a:solidFill>
+                <a:srgbClr val="BBD4EC"/>
+              </a:solidFill>
+              <a:latin typeface="微软雅黑" panose="020B0503020204020204" charset="-122"/>
+              <a:ea typeface="微软雅黑" panose="020B0503020204020204" charset="-122"/>
+              <a:cs typeface="微软雅黑" panose="020B0503020204020204" charset="-122"/>
+            </a:endParaRPr>
           </a:p>
           <a:p>
             <a:pPr algn="l">
@@ -8573,12 +9554,20 @@
                 <a:solidFill>
                   <a:srgbClr val="7E9EC4"/>
                 </a:solidFill>
-                <a:latin typeface="微软雅黑"/>
-                <a:ea typeface="微软雅黑"/>
-                <a:cs typeface="微软雅黑"/>
+                <a:latin typeface="微软雅黑" panose="020B0503020204020204" charset="-122"/>
+                <a:ea typeface="微软雅黑" panose="020B0503020204020204" charset="-122"/>
+                <a:cs typeface="微软雅黑" panose="020B0503020204020204" charset="-122"/>
               </a:rPr>
               <a:t>绿道总人数，点一下可切到别的病种</a:t>
             </a:r>
+            <a:endParaRPr sz="950" b="0" i="0">
+              <a:solidFill>
+                <a:srgbClr val="7E9EC4"/>
+              </a:solidFill>
+              <a:latin typeface="微软雅黑" panose="020B0503020204020204" charset="-122"/>
+              <a:ea typeface="微软雅黑" panose="020B0503020204020204" charset="-122"/>
+              <a:cs typeface="微软雅黑" panose="020B0503020204020204" charset="-122"/>
+            </a:endParaRPr>
           </a:p>
         </p:txBody>
       </p:sp>
@@ -8669,7 +9658,7 @@
           </a:fontRef>
         </p:style>
         <p:txBody>
-          <a:bodyPr rtlCol="0" anchor="ctr" lIns="0" rIns="0" tIns="0" bIns="0"/>
+          <a:bodyPr lIns="0" tIns="0" rIns="0" bIns="0" rtlCol="0" anchor="ctr"/>
           <a:lstStyle/>
           <a:p>
             <a:pPr algn="ctr"/>
@@ -8678,12 +9667,20 @@
                 <a:solidFill>
                   <a:srgbClr val="FFFFFF"/>
                 </a:solidFill>
-                <a:latin typeface="微软雅黑"/>
-                <a:ea typeface="微软雅黑"/>
-                <a:cs typeface="微软雅黑"/>
+                <a:latin typeface="微软雅黑" panose="020B0503020204020204" charset="-122"/>
+                <a:ea typeface="微软雅黑" panose="020B0503020204020204" charset="-122"/>
+                <a:cs typeface="微软雅黑" panose="020B0503020204020204" charset="-122"/>
               </a:rPr>
               <a:t>3</a:t>
             </a:r>
+            <a:endParaRPr sz="1000" b="1" i="0">
+              <a:solidFill>
+                <a:srgbClr val="FFFFFF"/>
+              </a:solidFill>
+              <a:latin typeface="微软雅黑" panose="020B0503020204020204" charset="-122"/>
+              <a:ea typeface="微软雅黑" panose="020B0503020204020204" charset="-122"/>
+              <a:cs typeface="微软雅黑" panose="020B0503020204020204" charset="-122"/>
+            </a:endParaRPr>
           </a:p>
         </p:txBody>
       </p:sp>
@@ -8704,7 +9701,7 @@
           <a:noFill/>
         </p:spPr>
         <p:txBody>
-          <a:bodyPr wrap="square" anchor="t" lIns="0" rIns="0" tIns="0" bIns="0">
+          <a:bodyPr wrap="square" lIns="0" tIns="0" rIns="0" bIns="0" anchor="t">
             <a:spAutoFit/>
           </a:bodyPr>
           <a:lstStyle/>
@@ -8719,12 +9716,20 @@
                 <a:solidFill>
                   <a:srgbClr val="BBD4EC"/>
                 </a:solidFill>
-                <a:latin typeface="微软雅黑"/>
-                <a:ea typeface="微软雅黑"/>
-                <a:cs typeface="微软雅黑"/>
+                <a:latin typeface="微软雅黑" panose="020B0503020204020204" charset="-122"/>
+                <a:ea typeface="微软雅黑" panose="020B0503020204020204" charset="-122"/>
+                <a:cs typeface="微软雅黑" panose="020B0503020204020204" charset="-122"/>
               </a:rPr>
               <a:t>近 12 个月柱状图</a:t>
             </a:r>
+            <a:endParaRPr sz="1150" b="1" i="0">
+              <a:solidFill>
+                <a:srgbClr val="BBD4EC"/>
+              </a:solidFill>
+              <a:latin typeface="微软雅黑" panose="020B0503020204020204" charset="-122"/>
+              <a:ea typeface="微软雅黑" panose="020B0503020204020204" charset="-122"/>
+              <a:cs typeface="微软雅黑" panose="020B0503020204020204" charset="-122"/>
+            </a:endParaRPr>
           </a:p>
           <a:p>
             <a:pPr algn="l">
@@ -8737,12 +9742,20 @@
                 <a:solidFill>
                   <a:srgbClr val="7E9EC4"/>
                 </a:solidFill>
-                <a:latin typeface="微软雅黑"/>
-                <a:ea typeface="微软雅黑"/>
-                <a:cs typeface="微软雅黑"/>
+                <a:latin typeface="微软雅黑" panose="020B0503020204020204" charset="-122"/>
+                <a:ea typeface="微软雅黑" panose="020B0503020204020204" charset="-122"/>
+                <a:cs typeface="微软雅黑" panose="020B0503020204020204" charset="-122"/>
               </a:rPr>
               <a:t>看趋势；末月标注「本月至今」，不会显得掉量</a:t>
             </a:r>
+            <a:endParaRPr sz="950" b="0" i="0">
+              <a:solidFill>
+                <a:srgbClr val="7E9EC4"/>
+              </a:solidFill>
+              <a:latin typeface="微软雅黑" panose="020B0503020204020204" charset="-122"/>
+              <a:ea typeface="微软雅黑" panose="020B0503020204020204" charset="-122"/>
+              <a:cs typeface="微软雅黑" panose="020B0503020204020204" charset="-122"/>
+            </a:endParaRPr>
           </a:p>
         </p:txBody>
       </p:sp>
@@ -8833,7 +9846,7 @@
           </a:fontRef>
         </p:style>
         <p:txBody>
-          <a:bodyPr rtlCol="0" anchor="ctr" lIns="0" rIns="0" tIns="0" bIns="0"/>
+          <a:bodyPr lIns="0" tIns="0" rIns="0" bIns="0" rtlCol="0" anchor="ctr"/>
           <a:lstStyle/>
           <a:p>
             <a:pPr algn="ctr"/>
@@ -8842,12 +9855,20 @@
                 <a:solidFill>
                   <a:srgbClr val="FFFFFF"/>
                 </a:solidFill>
-                <a:latin typeface="微软雅黑"/>
-                <a:ea typeface="微软雅黑"/>
-                <a:cs typeface="微软雅黑"/>
+                <a:latin typeface="微软雅黑" panose="020B0503020204020204" charset="-122"/>
+                <a:ea typeface="微软雅黑" panose="020B0503020204020204" charset="-122"/>
+                <a:cs typeface="微软雅黑" panose="020B0503020204020204" charset="-122"/>
               </a:rPr>
               <a:t>4</a:t>
             </a:r>
+            <a:endParaRPr sz="1000" b="1" i="0">
+              <a:solidFill>
+                <a:srgbClr val="FFFFFF"/>
+              </a:solidFill>
+              <a:latin typeface="微软雅黑" panose="020B0503020204020204" charset="-122"/>
+              <a:ea typeface="微软雅黑" panose="020B0503020204020204" charset="-122"/>
+              <a:cs typeface="微软雅黑" panose="020B0503020204020204" charset="-122"/>
+            </a:endParaRPr>
           </a:p>
         </p:txBody>
       </p:sp>
@@ -8868,7 +9889,7 @@
           <a:noFill/>
         </p:spPr>
         <p:txBody>
-          <a:bodyPr wrap="square" anchor="t" lIns="0" rIns="0" tIns="0" bIns="0">
+          <a:bodyPr wrap="square" lIns="0" tIns="0" rIns="0" bIns="0" anchor="t">
             <a:spAutoFit/>
           </a:bodyPr>
           <a:lstStyle/>
@@ -8883,12 +9904,20 @@
                 <a:solidFill>
                   <a:srgbClr val="BBD4EC"/>
                 </a:solidFill>
-                <a:latin typeface="微软雅黑"/>
-                <a:ea typeface="微软雅黑"/>
-                <a:cs typeface="微软雅黑"/>
+                <a:latin typeface="微软雅黑" panose="020B0503020204020204" charset="-122"/>
+                <a:ea typeface="微软雅黑" panose="020B0503020204020204" charset="-122"/>
+                <a:cs typeface="微软雅黑" panose="020B0503020204020204" charset="-122"/>
               </a:rPr>
               <a:t>24 小时内患者表</a:t>
             </a:r>
+            <a:endParaRPr sz="1150" b="1" i="0">
+              <a:solidFill>
+                <a:srgbClr val="BBD4EC"/>
+              </a:solidFill>
+              <a:latin typeface="微软雅黑" panose="020B0503020204020204" charset="-122"/>
+              <a:ea typeface="微软雅黑" panose="020B0503020204020204" charset="-122"/>
+              <a:cs typeface="微软雅黑" panose="020B0503020204020204" charset="-122"/>
+            </a:endParaRPr>
           </a:p>
           <a:p>
             <a:pPr algn="l">
@@ -8901,12 +9930,20 @@
                 <a:solidFill>
                   <a:srgbClr val="7E9EC4"/>
                 </a:solidFill>
-                <a:latin typeface="微软雅黑"/>
-                <a:ea typeface="微软雅黑"/>
-                <a:cs typeface="微软雅黑"/>
+                <a:latin typeface="微软雅黑" panose="020B0503020204020204" charset="-122"/>
+                <a:ea typeface="微软雅黑" panose="020B0503020204020204" charset="-122"/>
+                <a:cs typeface="微软雅黑" panose="020B0503020204020204" charset="-122"/>
               </a:rPr>
               <a:t>姓名（脱敏）、病种、推送方式、距离、状态；超一屏自动无缝滚动</a:t>
             </a:r>
+            <a:endParaRPr sz="950" b="0" i="0">
+              <a:solidFill>
+                <a:srgbClr val="7E9EC4"/>
+              </a:solidFill>
+              <a:latin typeface="微软雅黑" panose="020B0503020204020204" charset="-122"/>
+              <a:ea typeface="微软雅黑" panose="020B0503020204020204" charset="-122"/>
+              <a:cs typeface="微软雅黑" panose="020B0503020204020204" charset="-122"/>
+            </a:endParaRPr>
           </a:p>
         </p:txBody>
       </p:sp>
@@ -8997,7 +10034,7 @@
           </a:fontRef>
         </p:style>
         <p:txBody>
-          <a:bodyPr rtlCol="0" anchor="ctr" lIns="0" rIns="0" tIns="0" bIns="0"/>
+          <a:bodyPr lIns="0" tIns="0" rIns="0" bIns="0" rtlCol="0" anchor="ctr"/>
           <a:lstStyle/>
           <a:p>
             <a:pPr algn="ctr"/>
@@ -9006,12 +10043,20 @@
                 <a:solidFill>
                   <a:srgbClr val="FFFFFF"/>
                 </a:solidFill>
-                <a:latin typeface="微软雅黑"/>
-                <a:ea typeface="微软雅黑"/>
-                <a:cs typeface="微软雅黑"/>
+                <a:latin typeface="微软雅黑" panose="020B0503020204020204" charset="-122"/>
+                <a:ea typeface="微软雅黑" panose="020B0503020204020204" charset="-122"/>
+                <a:cs typeface="微软雅黑" panose="020B0503020204020204" charset="-122"/>
               </a:rPr>
               <a:t>5</a:t>
             </a:r>
+            <a:endParaRPr sz="1000" b="1" i="0">
+              <a:solidFill>
+                <a:srgbClr val="FFFFFF"/>
+              </a:solidFill>
+              <a:latin typeface="微软雅黑" panose="020B0503020204020204" charset="-122"/>
+              <a:ea typeface="微软雅黑" panose="020B0503020204020204" charset="-122"/>
+              <a:cs typeface="微软雅黑" panose="020B0503020204020204" charset="-122"/>
+            </a:endParaRPr>
           </a:p>
         </p:txBody>
       </p:sp>
@@ -9032,7 +10077,7 @@
           <a:noFill/>
         </p:spPr>
         <p:txBody>
-          <a:bodyPr wrap="square" anchor="t" lIns="0" rIns="0" tIns="0" bIns="0">
+          <a:bodyPr wrap="square" lIns="0" tIns="0" rIns="0" bIns="0" anchor="t">
             <a:spAutoFit/>
           </a:bodyPr>
           <a:lstStyle/>
@@ -9047,12 +10092,20 @@
                 <a:solidFill>
                   <a:srgbClr val="BBD4EC"/>
                 </a:solidFill>
-                <a:latin typeface="微软雅黑"/>
-                <a:ea typeface="微软雅黑"/>
-                <a:cs typeface="微软雅黑"/>
+                <a:latin typeface="微软雅黑" panose="020B0503020204020204" charset="-122"/>
+                <a:ea typeface="微软雅黑" panose="020B0503020204020204" charset="-122"/>
+                <a:cs typeface="微软雅黑" panose="020B0503020204020204" charset="-122"/>
               </a:rPr>
               <a:t>底部统计条</a:t>
             </a:r>
+            <a:endParaRPr sz="1150" b="1" i="0">
+              <a:solidFill>
+                <a:srgbClr val="BBD4EC"/>
+              </a:solidFill>
+              <a:latin typeface="微软雅黑" panose="020B0503020204020204" charset="-122"/>
+              <a:ea typeface="微软雅黑" panose="020B0503020204020204" charset="-122"/>
+              <a:cs typeface="微软雅黑" panose="020B0503020204020204" charset="-122"/>
+            </a:endParaRPr>
           </a:p>
           <a:p>
             <a:pPr algn="l">
@@ -9065,12 +10118,20 @@
                 <a:solidFill>
                   <a:srgbClr val="7E9EC4"/>
                 </a:solidFill>
-                <a:latin typeface="微软雅黑"/>
-                <a:ea typeface="微软雅黑"/>
-                <a:cs typeface="微软雅黑"/>
+                <a:latin typeface="微软雅黑" panose="020B0503020204020204" charset="-122"/>
+                <a:ea typeface="微软雅黑" panose="020B0503020204020204" charset="-122"/>
+                <a:cs typeface="微软雅黑" panose="020B0503020204020204" charset="-122"/>
               </a:rPr>
               <a:t>各病种未闭环数量，提醒还有谁没走完流程</a:t>
             </a:r>
+            <a:endParaRPr sz="950" b="0" i="0">
+              <a:solidFill>
+                <a:srgbClr val="7E9EC4"/>
+              </a:solidFill>
+              <a:latin typeface="微软雅黑" panose="020B0503020204020204" charset="-122"/>
+              <a:ea typeface="微软雅黑" panose="020B0503020204020204" charset="-122"/>
+              <a:cs typeface="微软雅黑" panose="020B0503020204020204" charset="-122"/>
+            </a:endParaRPr>
           </a:p>
         </p:txBody>
       </p:sp>
@@ -9083,7 +10144,7 @@
 </file>
 
 <file path=ppt/slides/slide5.xml><?xml version="1.0" encoding="utf-8"?>
-<p:sld xmlns:a="http://schemas.openxmlformats.org/drawingml/2006/main" xmlns:p="http://schemas.openxmlformats.org/presentationml/2006/main" xmlns:r="http://schemas.openxmlformats.org/officeDocument/2006/relationships">
+<p:sld xmlns:a="http://schemas.openxmlformats.org/drawingml/2006/main" xmlns:r="http://schemas.openxmlformats.org/officeDocument/2006/relationships" xmlns:p="http://schemas.openxmlformats.org/presentationml/2006/main">
   <p:cSld>
     <p:spTree>
       <p:nvGrpSpPr>
@@ -9153,7 +10214,7 @@
           <a:noFill/>
         </p:spPr>
         <p:txBody>
-          <a:bodyPr wrap="square" anchor="t" lIns="0" rIns="0" tIns="0" bIns="0">
+          <a:bodyPr wrap="square" lIns="0" tIns="0" rIns="0" bIns="0" anchor="t">
             <a:spAutoFit/>
           </a:bodyPr>
           <a:lstStyle/>
@@ -9164,12 +10225,20 @@
                 <a:solidFill>
                   <a:srgbClr val="7FE3FF"/>
                 </a:solidFill>
-                <a:latin typeface="微软雅黑"/>
-                <a:ea typeface="微软雅黑"/>
-                <a:cs typeface="微软雅黑"/>
+                <a:latin typeface="微软雅黑" panose="020B0503020204020204" charset="-122"/>
+                <a:ea typeface="微软雅黑" panose="020B0503020204020204" charset="-122"/>
+                <a:cs typeface="微软雅黑" panose="020B0503020204020204" charset="-122"/>
               </a:rPr>
               <a:t>01 · 它是什么</a:t>
             </a:r>
+            <a:endParaRPr sz="1150" b="1" i="0">
+              <a:solidFill>
+                <a:srgbClr val="7FE3FF"/>
+              </a:solidFill>
+              <a:latin typeface="微软雅黑" panose="020B0503020204020204" charset="-122"/>
+              <a:ea typeface="微软雅黑" panose="020B0503020204020204" charset="-122"/>
+              <a:cs typeface="微软雅黑" panose="020B0503020204020204" charset="-122"/>
+            </a:endParaRPr>
           </a:p>
         </p:txBody>
       </p:sp>
@@ -9190,7 +10259,7 @@
           <a:noFill/>
         </p:spPr>
         <p:txBody>
-          <a:bodyPr wrap="square" anchor="t" lIns="0" rIns="0" tIns="0" bIns="0">
+          <a:bodyPr wrap="square" lIns="0" tIns="0" rIns="0" bIns="0" anchor="t">
             <a:spAutoFit/>
           </a:bodyPr>
           <a:lstStyle/>
@@ -9201,12 +10270,20 @@
                 <a:solidFill>
                   <a:srgbClr val="ECF7FF"/>
                 </a:solidFill>
-                <a:latin typeface="微软雅黑"/>
-                <a:ea typeface="微软雅黑"/>
-                <a:cs typeface="微软雅黑"/>
+                <a:latin typeface="微软雅黑" panose="020B0503020204020204" charset="-122"/>
+                <a:ea typeface="微软雅黑" panose="020B0503020204020204" charset="-122"/>
+                <a:cs typeface="微软雅黑" panose="020B0503020204020204" charset="-122"/>
               </a:rPr>
               <a:t>后台管细节：谁都能上手，但谁都不能越权</a:t>
             </a:r>
+            <a:endParaRPr sz="2700" b="1" i="0">
+              <a:solidFill>
+                <a:srgbClr val="ECF7FF"/>
+              </a:solidFill>
+              <a:latin typeface="微软雅黑" panose="020B0503020204020204" charset="-122"/>
+              <a:ea typeface="微软雅黑" panose="020B0503020204020204" charset="-122"/>
+              <a:cs typeface="微软雅黑" panose="020B0503020204020204" charset="-122"/>
+            </a:endParaRPr>
           </a:p>
         </p:txBody>
       </p:sp>
@@ -9227,7 +10304,7 @@
           <a:noFill/>
         </p:spPr>
         <p:txBody>
-          <a:bodyPr wrap="square" anchor="t" lIns="0" rIns="0" tIns="0" bIns="0">
+          <a:bodyPr wrap="square" lIns="0" tIns="0" rIns="0" bIns="0" anchor="t">
             <a:spAutoFit/>
           </a:bodyPr>
           <a:lstStyle/>
@@ -9238,12 +10315,20 @@
                 <a:solidFill>
                   <a:srgbClr val="7E9EC4"/>
                 </a:solidFill>
-                <a:latin typeface="微软雅黑"/>
-                <a:ea typeface="微软雅黑"/>
-                <a:cs typeface="微软雅黑"/>
+                <a:latin typeface="微软雅黑" panose="020B0503020204020204" charset="-122"/>
+                <a:ea typeface="微软雅黑" panose="020B0503020204020204" charset="-122"/>
+                <a:cs typeface="微软雅黑" panose="020B0503020204020204" charset="-122"/>
               </a:rPr>
               <a:t>急救绿道 · 5 / 13</a:t>
             </a:r>
+            <a:endParaRPr sz="1000" b="0" i="0">
+              <a:solidFill>
+                <a:srgbClr val="7E9EC4"/>
+              </a:solidFill>
+              <a:latin typeface="微软雅黑" panose="020B0503020204020204" charset="-122"/>
+              <a:ea typeface="微软雅黑" panose="020B0503020204020204" charset="-122"/>
+              <a:cs typeface="微软雅黑" panose="020B0503020204020204" charset="-122"/>
+            </a:endParaRPr>
           </a:p>
         </p:txBody>
       </p:sp>
@@ -9256,7 +10341,7 @@
           <p:nvPr/>
         </p:nvPicPr>
         <p:blipFill>
-          <a:blip r:embed="rId2"/>
+          <a:blip r:embed="rId1"/>
           <a:stretch>
             <a:fillRect/>
           </a:stretch>
@@ -9288,7 +10373,7 @@
           <a:noFill/>
         </p:spPr>
         <p:txBody>
-          <a:bodyPr wrap="square" anchor="t" lIns="0" rIns="0" tIns="0" bIns="0">
+          <a:bodyPr wrap="square" lIns="0" tIns="0" rIns="0" bIns="0" anchor="t">
             <a:spAutoFit/>
           </a:bodyPr>
           <a:lstStyle/>
@@ -9299,12 +10384,20 @@
                 <a:solidFill>
                   <a:srgbClr val="7E9EC4"/>
                 </a:solidFill>
-                <a:latin typeface="微软雅黑"/>
-                <a:ea typeface="微软雅黑"/>
-                <a:cs typeface="微软雅黑"/>
+                <a:latin typeface="微软雅黑" panose="020B0503020204020204" charset="-122"/>
+                <a:ea typeface="微软雅黑" panose="020B0503020204020204" charset="-122"/>
+                <a:cs typeface="微软雅黑" panose="020B0503020204020204" charset="-122"/>
               </a:rPr>
               <a:t>图 2 · 后台工作台：今日新增、在绿道中、超时提醒、7 日趋势</a:t>
             </a:r>
+            <a:endParaRPr sz="950" b="0" i="0">
+              <a:solidFill>
+                <a:srgbClr val="7E9EC4"/>
+              </a:solidFill>
+              <a:latin typeface="微软雅黑" panose="020B0503020204020204" charset="-122"/>
+              <a:ea typeface="微软雅黑" panose="020B0503020204020204" charset="-122"/>
+              <a:cs typeface="微软雅黑" panose="020B0503020204020204" charset="-122"/>
+            </a:endParaRPr>
           </a:p>
         </p:txBody>
       </p:sp>
@@ -9395,7 +10488,7 @@
           </a:fontRef>
         </p:style>
         <p:txBody>
-          <a:bodyPr rtlCol="0" anchor="ctr" lIns="0" rIns="0" tIns="0" bIns="0"/>
+          <a:bodyPr lIns="0" tIns="0" rIns="0" bIns="0" rtlCol="0" anchor="ctr"/>
           <a:lstStyle/>
           <a:p>
             <a:pPr algn="ctr"/>
@@ -9404,12 +10497,20 @@
                 <a:solidFill>
                   <a:srgbClr val="FFFFFF"/>
                 </a:solidFill>
-                <a:latin typeface="微软雅黑"/>
-                <a:ea typeface="微软雅黑"/>
-                <a:cs typeface="微软雅黑"/>
+                <a:latin typeface="微软雅黑" panose="020B0503020204020204" charset="-122"/>
+                <a:ea typeface="微软雅黑" panose="020B0503020204020204" charset="-122"/>
+                <a:cs typeface="微软雅黑" panose="020B0503020204020204" charset="-122"/>
               </a:rPr>
               <a:t>A</a:t>
             </a:r>
+            <a:endParaRPr sz="1000" b="1" i="0">
+              <a:solidFill>
+                <a:srgbClr val="FFFFFF"/>
+              </a:solidFill>
+              <a:latin typeface="微软雅黑" panose="020B0503020204020204" charset="-122"/>
+              <a:ea typeface="微软雅黑" panose="020B0503020204020204" charset="-122"/>
+              <a:cs typeface="微软雅黑" panose="020B0503020204020204" charset="-122"/>
+            </a:endParaRPr>
           </a:p>
         </p:txBody>
       </p:sp>
@@ -9430,7 +10531,7 @@
           <a:noFill/>
         </p:spPr>
         <p:txBody>
-          <a:bodyPr wrap="square" anchor="t" lIns="0" rIns="0" tIns="0" bIns="0">
+          <a:bodyPr wrap="square" lIns="0" tIns="0" rIns="0" bIns="0" anchor="t">
             <a:spAutoFit/>
           </a:bodyPr>
           <a:lstStyle/>
@@ -9445,12 +10546,20 @@
                 <a:solidFill>
                   <a:srgbClr val="BBD4EC"/>
                 </a:solidFill>
-                <a:latin typeface="微软雅黑"/>
-                <a:ea typeface="微软雅黑"/>
-                <a:cs typeface="微软雅黑"/>
+                <a:latin typeface="微软雅黑" panose="020B0503020204020204" charset="-122"/>
+                <a:ea typeface="微软雅黑" panose="020B0503020204020204" charset="-122"/>
+                <a:cs typeface="微软雅黑" panose="020B0503020204020204" charset="-122"/>
               </a:rPr>
               <a:t>病例管理</a:t>
             </a:r>
+            <a:endParaRPr sz="1150" b="1" i="0">
+              <a:solidFill>
+                <a:srgbClr val="BBD4EC"/>
+              </a:solidFill>
+              <a:latin typeface="微软雅黑" panose="020B0503020204020204" charset="-122"/>
+              <a:ea typeface="微软雅黑" panose="020B0503020204020204" charset="-122"/>
+              <a:cs typeface="微软雅黑" panose="020B0503020204020204" charset="-122"/>
+            </a:endParaRPr>
           </a:p>
           <a:p>
             <a:pPr algn="l"/>
@@ -9459,12 +10568,20 @@
                 <a:solidFill>
                   <a:srgbClr val="7E9EC4"/>
                 </a:solidFill>
-                <a:latin typeface="微软雅黑"/>
-                <a:ea typeface="微软雅黑"/>
-                <a:cs typeface="微软雅黑"/>
+                <a:latin typeface="微软雅黑" panose="020B0503020204020204" charset="-122"/>
+                <a:ea typeface="微软雅黑" panose="020B0503020204020204" charset="-122"/>
+                <a:cs typeface="微软雅黑" panose="020B0503020204020204" charset="-122"/>
               </a:rPr>
               <a:t>新建、修改、闭环</a:t>
             </a:r>
+            <a:endParaRPr sz="950" b="0" i="0">
+              <a:solidFill>
+                <a:srgbClr val="7E9EC4"/>
+              </a:solidFill>
+              <a:latin typeface="微软雅黑" panose="020B0503020204020204" charset="-122"/>
+              <a:ea typeface="微软雅黑" panose="020B0503020204020204" charset="-122"/>
+              <a:cs typeface="微软雅黑" panose="020B0503020204020204" charset="-122"/>
+            </a:endParaRPr>
           </a:p>
         </p:txBody>
       </p:sp>
@@ -9555,7 +10672,7 @@
           </a:fontRef>
         </p:style>
         <p:txBody>
-          <a:bodyPr rtlCol="0" anchor="ctr" lIns="0" rIns="0" tIns="0" bIns="0"/>
+          <a:bodyPr lIns="0" tIns="0" rIns="0" bIns="0" rtlCol="0" anchor="ctr"/>
           <a:lstStyle/>
           <a:p>
             <a:pPr algn="ctr"/>
@@ -9564,12 +10681,20 @@
                 <a:solidFill>
                   <a:srgbClr val="FFFFFF"/>
                 </a:solidFill>
-                <a:latin typeface="微软雅黑"/>
-                <a:ea typeface="微软雅黑"/>
-                <a:cs typeface="微软雅黑"/>
+                <a:latin typeface="微软雅黑" panose="020B0503020204020204" charset="-122"/>
+                <a:ea typeface="微软雅黑" panose="020B0503020204020204" charset="-122"/>
+                <a:cs typeface="微软雅黑" panose="020B0503020204020204" charset="-122"/>
               </a:rPr>
               <a:t>B</a:t>
             </a:r>
+            <a:endParaRPr sz="1000" b="1" i="0">
+              <a:solidFill>
+                <a:srgbClr val="FFFFFF"/>
+              </a:solidFill>
+              <a:latin typeface="微软雅黑" panose="020B0503020204020204" charset="-122"/>
+              <a:ea typeface="微软雅黑" panose="020B0503020204020204" charset="-122"/>
+              <a:cs typeface="微软雅黑" panose="020B0503020204020204" charset="-122"/>
+            </a:endParaRPr>
           </a:p>
         </p:txBody>
       </p:sp>
@@ -9590,7 +10715,7 @@
           <a:noFill/>
         </p:spPr>
         <p:txBody>
-          <a:bodyPr wrap="square" anchor="t" lIns="0" rIns="0" tIns="0" bIns="0">
+          <a:bodyPr wrap="square" lIns="0" tIns="0" rIns="0" bIns="0" anchor="t">
             <a:spAutoFit/>
           </a:bodyPr>
           <a:lstStyle/>
@@ -9605,12 +10730,20 @@
                 <a:solidFill>
                   <a:srgbClr val="BBD4EC"/>
                 </a:solidFill>
-                <a:latin typeface="微软雅黑"/>
-                <a:ea typeface="微软雅黑"/>
-                <a:cs typeface="微软雅黑"/>
+                <a:latin typeface="微软雅黑" panose="020B0503020204020204" charset="-122"/>
+                <a:ea typeface="微软雅黑" panose="020B0503020204020204" charset="-122"/>
+                <a:cs typeface="微软雅黑" panose="020B0503020204020204" charset="-122"/>
               </a:rPr>
               <a:t>患者管理</a:t>
             </a:r>
+            <a:endParaRPr sz="1150" b="1" i="0">
+              <a:solidFill>
+                <a:srgbClr val="BBD4EC"/>
+              </a:solidFill>
+              <a:latin typeface="微软雅黑" panose="020B0503020204020204" charset="-122"/>
+              <a:ea typeface="微软雅黑" panose="020B0503020204020204" charset="-122"/>
+              <a:cs typeface="微软雅黑" panose="020B0503020204020204" charset="-122"/>
+            </a:endParaRPr>
           </a:p>
           <a:p>
             <a:pPr algn="l"/>
@@ -9619,12 +10752,20 @@
                 <a:solidFill>
                   <a:srgbClr val="7E9EC4"/>
                 </a:solidFill>
-                <a:latin typeface="微软雅黑"/>
-                <a:ea typeface="微软雅黑"/>
-                <a:cs typeface="微软雅黑"/>
+                <a:latin typeface="微软雅黑" panose="020B0503020204020204" charset="-122"/>
+                <a:ea typeface="微软雅黑" panose="020B0503020204020204" charset="-122"/>
+                <a:cs typeface="微软雅黑" panose="020B0503020204020204" charset="-122"/>
               </a:rPr>
               <a:t>姓名自动脱敏</a:t>
             </a:r>
+            <a:endParaRPr sz="950" b="0" i="0">
+              <a:solidFill>
+                <a:srgbClr val="7E9EC4"/>
+              </a:solidFill>
+              <a:latin typeface="微软雅黑" panose="020B0503020204020204" charset="-122"/>
+              <a:ea typeface="微软雅黑" panose="020B0503020204020204" charset="-122"/>
+              <a:cs typeface="微软雅黑" panose="020B0503020204020204" charset="-122"/>
+            </a:endParaRPr>
           </a:p>
         </p:txBody>
       </p:sp>
@@ -9715,7 +10856,7 @@
           </a:fontRef>
         </p:style>
         <p:txBody>
-          <a:bodyPr rtlCol="0" anchor="ctr" lIns="0" rIns="0" tIns="0" bIns="0"/>
+          <a:bodyPr lIns="0" tIns="0" rIns="0" bIns="0" rtlCol="0" anchor="ctr"/>
           <a:lstStyle/>
           <a:p>
             <a:pPr algn="ctr"/>
@@ -9724,12 +10865,20 @@
                 <a:solidFill>
                   <a:srgbClr val="FFFFFF"/>
                 </a:solidFill>
-                <a:latin typeface="微软雅黑"/>
-                <a:ea typeface="微软雅黑"/>
-                <a:cs typeface="微软雅黑"/>
+                <a:latin typeface="微软雅黑" panose="020B0503020204020204" charset="-122"/>
+                <a:ea typeface="微软雅黑" panose="020B0503020204020204" charset="-122"/>
+                <a:cs typeface="微软雅黑" panose="020B0503020204020204" charset="-122"/>
               </a:rPr>
               <a:t>C</a:t>
             </a:r>
+            <a:endParaRPr sz="1000" b="1" i="0">
+              <a:solidFill>
+                <a:srgbClr val="FFFFFF"/>
+              </a:solidFill>
+              <a:latin typeface="微软雅黑" panose="020B0503020204020204" charset="-122"/>
+              <a:ea typeface="微软雅黑" panose="020B0503020204020204" charset="-122"/>
+              <a:cs typeface="微软雅黑" panose="020B0503020204020204" charset="-122"/>
+            </a:endParaRPr>
           </a:p>
         </p:txBody>
       </p:sp>
@@ -9750,7 +10899,7 @@
           <a:noFill/>
         </p:spPr>
         <p:txBody>
-          <a:bodyPr wrap="square" anchor="t" lIns="0" rIns="0" tIns="0" bIns="0">
+          <a:bodyPr wrap="square" lIns="0" tIns="0" rIns="0" bIns="0" anchor="t">
             <a:spAutoFit/>
           </a:bodyPr>
           <a:lstStyle/>
@@ -9765,12 +10914,20 @@
                 <a:solidFill>
                   <a:srgbClr val="BBD4EC"/>
                 </a:solidFill>
-                <a:latin typeface="微软雅黑"/>
-                <a:ea typeface="微软雅黑"/>
-                <a:cs typeface="微软雅黑"/>
+                <a:latin typeface="微软雅黑" panose="020B0503020204020204" charset="-122"/>
+                <a:ea typeface="微软雅黑" panose="020B0503020204020204" charset="-122"/>
+                <a:cs typeface="微软雅黑" panose="020B0503020204020204" charset="-122"/>
               </a:rPr>
               <a:t>字典维护</a:t>
             </a:r>
+            <a:endParaRPr sz="1150" b="1" i="0">
+              <a:solidFill>
+                <a:srgbClr val="BBD4EC"/>
+              </a:solidFill>
+              <a:latin typeface="微软雅黑" panose="020B0503020204020204" charset="-122"/>
+              <a:ea typeface="微软雅黑" panose="020B0503020204020204" charset="-122"/>
+              <a:cs typeface="微软雅黑" panose="020B0503020204020204" charset="-122"/>
+            </a:endParaRPr>
           </a:p>
           <a:p>
             <a:pPr algn="l"/>
@@ -9779,12 +10936,20 @@
                 <a:solidFill>
                   <a:srgbClr val="7E9EC4"/>
                 </a:solidFill>
-                <a:latin typeface="微软雅黑"/>
-                <a:ea typeface="微软雅黑"/>
-                <a:cs typeface="微软雅黑"/>
+                <a:latin typeface="微软雅黑" panose="020B0503020204020204" charset="-122"/>
+                <a:ea typeface="微软雅黑" panose="020B0503020204020204" charset="-122"/>
+                <a:cs typeface="微软雅黑" panose="020B0503020204020204" charset="-122"/>
               </a:rPr>
               <a:t>病种与状态可改</a:t>
             </a:r>
+            <a:endParaRPr sz="950" b="0" i="0">
+              <a:solidFill>
+                <a:srgbClr val="7E9EC4"/>
+              </a:solidFill>
+              <a:latin typeface="微软雅黑" panose="020B0503020204020204" charset="-122"/>
+              <a:ea typeface="微软雅黑" panose="020B0503020204020204" charset="-122"/>
+              <a:cs typeface="微软雅黑" panose="020B0503020204020204" charset="-122"/>
+            </a:endParaRPr>
           </a:p>
         </p:txBody>
       </p:sp>
@@ -9875,7 +11040,7 @@
           </a:fontRef>
         </p:style>
         <p:txBody>
-          <a:bodyPr rtlCol="0" anchor="ctr" lIns="0" rIns="0" tIns="0" bIns="0"/>
+          <a:bodyPr lIns="0" tIns="0" rIns="0" bIns="0" rtlCol="0" anchor="ctr"/>
           <a:lstStyle/>
           <a:p>
             <a:pPr algn="ctr"/>
@@ -9884,12 +11049,20 @@
                 <a:solidFill>
                   <a:srgbClr val="FFFFFF"/>
                 </a:solidFill>
-                <a:latin typeface="微软雅黑"/>
-                <a:ea typeface="微软雅黑"/>
-                <a:cs typeface="微软雅黑"/>
+                <a:latin typeface="微软雅黑" panose="020B0503020204020204" charset="-122"/>
+                <a:ea typeface="微软雅黑" panose="020B0503020204020204" charset="-122"/>
+                <a:cs typeface="微软雅黑" panose="020B0503020204020204" charset="-122"/>
               </a:rPr>
               <a:t>D</a:t>
             </a:r>
+            <a:endParaRPr sz="1000" b="1" i="0">
+              <a:solidFill>
+                <a:srgbClr val="FFFFFF"/>
+              </a:solidFill>
+              <a:latin typeface="微软雅黑" panose="020B0503020204020204" charset="-122"/>
+              <a:ea typeface="微软雅黑" panose="020B0503020204020204" charset="-122"/>
+              <a:cs typeface="微软雅黑" panose="020B0503020204020204" charset="-122"/>
+            </a:endParaRPr>
           </a:p>
         </p:txBody>
       </p:sp>
@@ -9910,7 +11083,7 @@
           <a:noFill/>
         </p:spPr>
         <p:txBody>
-          <a:bodyPr wrap="square" anchor="t" lIns="0" rIns="0" tIns="0" bIns="0">
+          <a:bodyPr wrap="square" lIns="0" tIns="0" rIns="0" bIns="0" anchor="t">
             <a:spAutoFit/>
           </a:bodyPr>
           <a:lstStyle/>
@@ -9925,12 +11098,20 @@
                 <a:solidFill>
                   <a:srgbClr val="BBD4EC"/>
                 </a:solidFill>
-                <a:latin typeface="微软雅黑"/>
-                <a:ea typeface="微软雅黑"/>
-                <a:cs typeface="微软雅黑"/>
+                <a:latin typeface="微软雅黑" panose="020B0503020204020204" charset="-122"/>
+                <a:ea typeface="微软雅黑" panose="020B0503020204020204" charset="-122"/>
+                <a:cs typeface="微软雅黑" panose="020B0503020204020204" charset="-122"/>
               </a:rPr>
               <a:t>组织人员</a:t>
             </a:r>
+            <a:endParaRPr sz="1150" b="1" i="0">
+              <a:solidFill>
+                <a:srgbClr val="BBD4EC"/>
+              </a:solidFill>
+              <a:latin typeface="微软雅黑" panose="020B0503020204020204" charset="-122"/>
+              <a:ea typeface="微软雅黑" panose="020B0503020204020204" charset="-122"/>
+              <a:cs typeface="微软雅黑" panose="020B0503020204020204" charset="-122"/>
+            </a:endParaRPr>
           </a:p>
           <a:p>
             <a:pPr algn="l"/>
@@ -9939,12 +11120,20 @@
                 <a:solidFill>
                   <a:srgbClr val="7E9EC4"/>
                 </a:solidFill>
-                <a:latin typeface="微软雅黑"/>
-                <a:ea typeface="微软雅黑"/>
-                <a:cs typeface="微软雅黑"/>
+                <a:latin typeface="微软雅黑" panose="020B0503020204020204" charset="-122"/>
+                <a:ea typeface="微软雅黑" panose="020B0503020204020204" charset="-122"/>
+                <a:cs typeface="微软雅黑" panose="020B0503020204020204" charset="-122"/>
               </a:rPr>
               <a:t>科室 + 账号 + 角色</a:t>
             </a:r>
+            <a:endParaRPr sz="950" b="0" i="0">
+              <a:solidFill>
+                <a:srgbClr val="7E9EC4"/>
+              </a:solidFill>
+              <a:latin typeface="微软雅黑" panose="020B0503020204020204" charset="-122"/>
+              <a:ea typeface="微软雅黑" panose="020B0503020204020204" charset="-122"/>
+              <a:cs typeface="微软雅黑" panose="020B0503020204020204" charset="-122"/>
+            </a:endParaRPr>
           </a:p>
         </p:txBody>
       </p:sp>
@@ -10035,7 +11224,7 @@
           </a:fontRef>
         </p:style>
         <p:txBody>
-          <a:bodyPr rtlCol="0" anchor="ctr" lIns="0" rIns="0" tIns="0" bIns="0"/>
+          <a:bodyPr lIns="0" tIns="0" rIns="0" bIns="0" rtlCol="0" anchor="ctr"/>
           <a:lstStyle/>
           <a:p>
             <a:pPr algn="ctr"/>
@@ -10044,12 +11233,20 @@
                 <a:solidFill>
                   <a:srgbClr val="FFFFFF"/>
                 </a:solidFill>
-                <a:latin typeface="微软雅黑"/>
-                <a:ea typeface="微软雅黑"/>
-                <a:cs typeface="微软雅黑"/>
+                <a:latin typeface="微软雅黑" panose="020B0503020204020204" charset="-122"/>
+                <a:ea typeface="微软雅黑" panose="020B0503020204020204" charset="-122"/>
+                <a:cs typeface="微软雅黑" panose="020B0503020204020204" charset="-122"/>
               </a:rPr>
               <a:t>E</a:t>
             </a:r>
+            <a:endParaRPr sz="1000" b="1" i="0">
+              <a:solidFill>
+                <a:srgbClr val="FFFFFF"/>
+              </a:solidFill>
+              <a:latin typeface="微软雅黑" panose="020B0503020204020204" charset="-122"/>
+              <a:ea typeface="微软雅黑" panose="020B0503020204020204" charset="-122"/>
+              <a:cs typeface="微软雅黑" panose="020B0503020204020204" charset="-122"/>
+            </a:endParaRPr>
           </a:p>
         </p:txBody>
       </p:sp>
@@ -10070,7 +11267,7 @@
           <a:noFill/>
         </p:spPr>
         <p:txBody>
-          <a:bodyPr wrap="square" anchor="t" lIns="0" rIns="0" tIns="0" bIns="0">
+          <a:bodyPr wrap="square" lIns="0" tIns="0" rIns="0" bIns="0" anchor="t">
             <a:spAutoFit/>
           </a:bodyPr>
           <a:lstStyle/>
@@ -10085,12 +11282,20 @@
                 <a:solidFill>
                   <a:srgbClr val="BBD4EC"/>
                 </a:solidFill>
-                <a:latin typeface="微软雅黑"/>
-                <a:ea typeface="微软雅黑"/>
-                <a:cs typeface="微软雅黑"/>
+                <a:latin typeface="微软雅黑" panose="020B0503020204020204" charset="-122"/>
+                <a:ea typeface="微软雅黑" panose="020B0503020204020204" charset="-122"/>
+                <a:cs typeface="微软雅黑" panose="020B0503020204020204" charset="-122"/>
               </a:rPr>
               <a:t>报表统计</a:t>
             </a:r>
+            <a:endParaRPr sz="1150" b="1" i="0">
+              <a:solidFill>
+                <a:srgbClr val="BBD4EC"/>
+              </a:solidFill>
+              <a:latin typeface="微软雅黑" panose="020B0503020204020204" charset="-122"/>
+              <a:ea typeface="微软雅黑" panose="020B0503020204020204" charset="-122"/>
+              <a:cs typeface="微软雅黑" panose="020B0503020204020204" charset="-122"/>
+            </a:endParaRPr>
           </a:p>
           <a:p>
             <a:pPr algn="l"/>
@@ -10099,12 +11304,20 @@
                 <a:solidFill>
                   <a:srgbClr val="7E9EC4"/>
                 </a:solidFill>
-                <a:latin typeface="微软雅黑"/>
-                <a:ea typeface="微软雅黑"/>
-                <a:cs typeface="微软雅黑"/>
+                <a:latin typeface="微软雅黑" panose="020B0503020204020204" charset="-122"/>
+                <a:ea typeface="微软雅黑" panose="020B0503020204020204" charset="-122"/>
+                <a:cs typeface="微软雅黑" panose="020B0503020204020204" charset="-122"/>
               </a:rPr>
               <a:t>月报、KPI、导出</a:t>
             </a:r>
+            <a:endParaRPr sz="950" b="0" i="0">
+              <a:solidFill>
+                <a:srgbClr val="7E9EC4"/>
+              </a:solidFill>
+              <a:latin typeface="微软雅黑" panose="020B0503020204020204" charset="-122"/>
+              <a:ea typeface="微软雅黑" panose="020B0503020204020204" charset="-122"/>
+              <a:cs typeface="微软雅黑" panose="020B0503020204020204" charset="-122"/>
+            </a:endParaRPr>
           </a:p>
         </p:txBody>
       </p:sp>
@@ -10195,7 +11408,7 @@
           </a:fontRef>
         </p:style>
         <p:txBody>
-          <a:bodyPr rtlCol="0" anchor="ctr" lIns="0" rIns="0" tIns="0" bIns="0"/>
+          <a:bodyPr lIns="0" tIns="0" rIns="0" bIns="0" rtlCol="0" anchor="ctr"/>
           <a:lstStyle/>
           <a:p>
             <a:pPr algn="ctr"/>
@@ -10204,12 +11417,20 @@
                 <a:solidFill>
                   <a:srgbClr val="FFFFFF"/>
                 </a:solidFill>
-                <a:latin typeface="微软雅黑"/>
-                <a:ea typeface="微软雅黑"/>
-                <a:cs typeface="微软雅黑"/>
+                <a:latin typeface="微软雅黑" panose="020B0503020204020204" charset="-122"/>
+                <a:ea typeface="微软雅黑" panose="020B0503020204020204" charset="-122"/>
+                <a:cs typeface="微软雅黑" panose="020B0503020204020204" charset="-122"/>
               </a:rPr>
               <a:t>F</a:t>
             </a:r>
+            <a:endParaRPr sz="1000" b="1" i="0">
+              <a:solidFill>
+                <a:srgbClr val="FFFFFF"/>
+              </a:solidFill>
+              <a:latin typeface="微软雅黑" panose="020B0503020204020204" charset="-122"/>
+              <a:ea typeface="微软雅黑" panose="020B0503020204020204" charset="-122"/>
+              <a:cs typeface="微软雅黑" panose="020B0503020204020204" charset="-122"/>
+            </a:endParaRPr>
           </a:p>
         </p:txBody>
       </p:sp>
@@ -10230,7 +11451,7 @@
           <a:noFill/>
         </p:spPr>
         <p:txBody>
-          <a:bodyPr wrap="square" anchor="t" lIns="0" rIns="0" tIns="0" bIns="0">
+          <a:bodyPr wrap="square" lIns="0" tIns="0" rIns="0" bIns="0" anchor="t">
             <a:spAutoFit/>
           </a:bodyPr>
           <a:lstStyle/>
@@ -10245,12 +11466,20 @@
                 <a:solidFill>
                   <a:srgbClr val="BBD4EC"/>
                 </a:solidFill>
-                <a:latin typeface="微软雅黑"/>
-                <a:ea typeface="微软雅黑"/>
-                <a:cs typeface="微软雅黑"/>
+                <a:latin typeface="微软雅黑" panose="020B0503020204020204" charset="-122"/>
+                <a:ea typeface="微软雅黑" panose="020B0503020204020204" charset="-122"/>
+                <a:cs typeface="微软雅黑" panose="020B0503020204020204" charset="-122"/>
               </a:rPr>
               <a:t>审计日志</a:t>
             </a:r>
+            <a:endParaRPr sz="1150" b="1" i="0">
+              <a:solidFill>
+                <a:srgbClr val="BBD4EC"/>
+              </a:solidFill>
+              <a:latin typeface="微软雅黑" panose="020B0503020204020204" charset="-122"/>
+              <a:ea typeface="微软雅黑" panose="020B0503020204020204" charset="-122"/>
+              <a:cs typeface="微软雅黑" panose="020B0503020204020204" charset="-122"/>
+            </a:endParaRPr>
           </a:p>
           <a:p>
             <a:pPr algn="l"/>
@@ -10259,12 +11488,20 @@
                 <a:solidFill>
                   <a:srgbClr val="7E9EC4"/>
                 </a:solidFill>
-                <a:latin typeface="微软雅黑"/>
-                <a:ea typeface="微软雅黑"/>
-                <a:cs typeface="微软雅黑"/>
+                <a:latin typeface="微软雅黑" panose="020B0503020204020204" charset="-122"/>
+                <a:ea typeface="微软雅黑" panose="020B0503020204020204" charset="-122"/>
+                <a:cs typeface="微软雅黑" panose="020B0503020204020204" charset="-122"/>
               </a:rPr>
               <a:t>谁改了什么全留底</a:t>
             </a:r>
+            <a:endParaRPr sz="950" b="0" i="0">
+              <a:solidFill>
+                <a:srgbClr val="7E9EC4"/>
+              </a:solidFill>
+              <a:latin typeface="微软雅黑" panose="020B0503020204020204" charset="-122"/>
+              <a:ea typeface="微软雅黑" panose="020B0503020204020204" charset="-122"/>
+              <a:cs typeface="微软雅黑" panose="020B0503020204020204" charset="-122"/>
+            </a:endParaRPr>
           </a:p>
         </p:txBody>
       </p:sp>
@@ -10285,7 +11522,7 @@
           <a:noFill/>
         </p:spPr>
         <p:txBody>
-          <a:bodyPr wrap="square" anchor="t" lIns="0" rIns="0" tIns="0" bIns="0">
+          <a:bodyPr wrap="square" lIns="0" tIns="0" rIns="0" bIns="0" anchor="t">
             <a:spAutoFit/>
           </a:bodyPr>
           <a:lstStyle/>
@@ -10303,9 +11540,9 @@
                 <a:solidFill>
                   <a:srgbClr val="BBD4EC"/>
                 </a:solidFill>
-                <a:latin typeface="微软雅黑"/>
-                <a:ea typeface="微软雅黑"/>
-                <a:cs typeface="微软雅黑"/>
+                <a:latin typeface="微软雅黑" panose="020B0503020204020204" charset="-122"/>
+                <a:ea typeface="微软雅黑" panose="020B0503020204020204" charset="-122"/>
+                <a:cs typeface="微软雅黑" panose="020B0503020204020204" charset="-122"/>
               </a:rPr>
               <a:t>七种角色：</a:t>
             </a:r>
@@ -10314,12 +11551,20 @@
                 <a:solidFill>
                   <a:srgbClr val="BBD4EC"/>
                 </a:solidFill>
-                <a:latin typeface="微软雅黑"/>
-                <a:ea typeface="微软雅黑"/>
-                <a:cs typeface="微软雅黑"/>
+                <a:latin typeface="微软雅黑" panose="020B0503020204020204" charset="-122"/>
+                <a:ea typeface="微软雅黑" panose="020B0503020204020204" charset="-122"/>
+                <a:cs typeface="微软雅黑" panose="020B0503020204020204" charset="-122"/>
               </a:rPr>
               <a:t>管理员、急诊管理员、医生、护士、质控、院领导、大屏终端。</a:t>
             </a:r>
+            <a:endParaRPr sz="1150" b="0" i="0">
+              <a:solidFill>
+                <a:srgbClr val="BBD4EC"/>
+              </a:solidFill>
+              <a:latin typeface="微软雅黑" panose="020B0503020204020204" charset="-122"/>
+              <a:ea typeface="微软雅黑" panose="020B0503020204020204" charset="-122"/>
+              <a:cs typeface="微软雅黑" panose="020B0503020204020204" charset="-122"/>
+            </a:endParaRPr>
           </a:p>
           <a:p>
             <a:pPr algn="l">
@@ -10332,9 +11577,9 @@
                 <a:solidFill>
                   <a:srgbClr val="5CC8FF"/>
                 </a:solidFill>
-                <a:latin typeface="微软雅黑"/>
-                <a:ea typeface="微软雅黑"/>
-                <a:cs typeface="微软雅黑"/>
+                <a:latin typeface="微软雅黑" panose="020B0503020204020204" charset="-122"/>
+                <a:ea typeface="微软雅黑" panose="020B0503020204020204" charset="-122"/>
+                <a:cs typeface="微软雅黑" panose="020B0503020204020204" charset="-122"/>
               </a:rPr>
               <a:t>院领导看不到患者明文，护士进不了审计页</a:t>
             </a:r>
@@ -10343,12 +11588,20 @@
                 <a:solidFill>
                   <a:srgbClr val="BBD4EC"/>
                 </a:solidFill>
-                <a:latin typeface="微软雅黑"/>
-                <a:ea typeface="微软雅黑"/>
-                <a:cs typeface="微软雅黑"/>
+                <a:latin typeface="微软雅黑" panose="020B0503020204020204" charset="-122"/>
+                <a:ea typeface="微软雅黑" panose="020B0503020204020204" charset="-122"/>
+                <a:cs typeface="微软雅黑" panose="020B0503020204020204" charset="-122"/>
               </a:rPr>
               <a:t>——这是系统自己拦的，不靠人自觉。</a:t>
             </a:r>
+            <a:endParaRPr sz="1150" b="0" i="0">
+              <a:solidFill>
+                <a:srgbClr val="BBD4EC"/>
+              </a:solidFill>
+              <a:latin typeface="微软雅黑" panose="020B0503020204020204" charset="-122"/>
+              <a:ea typeface="微软雅黑" panose="020B0503020204020204" charset="-122"/>
+              <a:cs typeface="微软雅黑" panose="020B0503020204020204" charset="-122"/>
+            </a:endParaRPr>
           </a:p>
         </p:txBody>
       </p:sp>
@@ -10361,7 +11614,7 @@
 </file>
 
 <file path=ppt/slides/slide6.xml><?xml version="1.0" encoding="utf-8"?>
-<p:sld xmlns:a="http://schemas.openxmlformats.org/drawingml/2006/main" xmlns:p="http://schemas.openxmlformats.org/presentationml/2006/main" xmlns:r="http://schemas.openxmlformats.org/officeDocument/2006/relationships">
+<p:sld xmlns:a="http://schemas.openxmlformats.org/drawingml/2006/main" xmlns:r="http://schemas.openxmlformats.org/officeDocument/2006/relationships" xmlns:p="http://schemas.openxmlformats.org/presentationml/2006/main">
   <p:cSld>
     <p:spTree>
       <p:nvGrpSpPr>
@@ -10431,7 +11684,7 @@
           <a:noFill/>
         </p:spPr>
         <p:txBody>
-          <a:bodyPr wrap="square" anchor="t" lIns="0" rIns="0" tIns="0" bIns="0">
+          <a:bodyPr wrap="square" lIns="0" tIns="0" rIns="0" bIns="0" anchor="t">
             <a:spAutoFit/>
           </a:bodyPr>
           <a:lstStyle/>
@@ -10442,12 +11695,20 @@
                 <a:solidFill>
                   <a:srgbClr val="7FE3FF"/>
                 </a:solidFill>
-                <a:latin typeface="微软雅黑"/>
-                <a:ea typeface="微软雅黑"/>
-                <a:cs typeface="微软雅黑"/>
+                <a:latin typeface="微软雅黑" panose="020B0503020204020204" charset="-122"/>
+                <a:ea typeface="微软雅黑" panose="020B0503020204020204" charset="-122"/>
+                <a:cs typeface="微软雅黑" panose="020B0503020204020204" charset="-122"/>
               </a:rPr>
               <a:t>01 · 它是什么</a:t>
             </a:r>
+            <a:endParaRPr sz="1150" b="1" i="0">
+              <a:solidFill>
+                <a:srgbClr val="7FE3FF"/>
+              </a:solidFill>
+              <a:latin typeface="微软雅黑" panose="020B0503020204020204" charset="-122"/>
+              <a:ea typeface="微软雅黑" panose="020B0503020204020204" charset="-122"/>
+              <a:cs typeface="微软雅黑" panose="020B0503020204020204" charset="-122"/>
+            </a:endParaRPr>
           </a:p>
         </p:txBody>
       </p:sp>
@@ -10468,7 +11729,7 @@
           <a:noFill/>
         </p:spPr>
         <p:txBody>
-          <a:bodyPr wrap="square" anchor="t" lIns="0" rIns="0" tIns="0" bIns="0">
+          <a:bodyPr wrap="square" lIns="0" tIns="0" rIns="0" bIns="0" anchor="t">
             <a:spAutoFit/>
           </a:bodyPr>
           <a:lstStyle/>
@@ -10479,12 +11740,20 @@
                 <a:solidFill>
                   <a:srgbClr val="ECF7FF"/>
                 </a:solidFill>
-                <a:latin typeface="微软雅黑"/>
-                <a:ea typeface="微软雅黑"/>
-                <a:cs typeface="微软雅黑"/>
+                <a:latin typeface="微软雅黑" panose="020B0503020204020204" charset="-122"/>
+                <a:ea typeface="微软雅黑" panose="020B0503020204020204" charset="-122"/>
+                <a:cs typeface="微软雅黑" panose="020B0503020204020204" charset="-122"/>
               </a:rPr>
               <a:t>用数字感受一下这套系统</a:t>
             </a:r>
+            <a:endParaRPr sz="2700" b="1" i="0">
+              <a:solidFill>
+                <a:srgbClr val="ECF7FF"/>
+              </a:solidFill>
+              <a:latin typeface="微软雅黑" panose="020B0503020204020204" charset="-122"/>
+              <a:ea typeface="微软雅黑" panose="020B0503020204020204" charset="-122"/>
+              <a:cs typeface="微软雅黑" panose="020B0503020204020204" charset="-122"/>
+            </a:endParaRPr>
           </a:p>
         </p:txBody>
       </p:sp>
@@ -10505,7 +11774,7 @@
           <a:noFill/>
         </p:spPr>
         <p:txBody>
-          <a:bodyPr wrap="square" anchor="t" lIns="0" rIns="0" tIns="0" bIns="0">
+          <a:bodyPr wrap="square" lIns="0" tIns="0" rIns="0" bIns="0" anchor="t">
             <a:spAutoFit/>
           </a:bodyPr>
           <a:lstStyle/>
@@ -10516,12 +11785,20 @@
                 <a:solidFill>
                   <a:srgbClr val="7E9EC4"/>
                 </a:solidFill>
-                <a:latin typeface="微软雅黑"/>
-                <a:ea typeface="微软雅黑"/>
-                <a:cs typeface="微软雅黑"/>
+                <a:latin typeface="微软雅黑" panose="020B0503020204020204" charset="-122"/>
+                <a:ea typeface="微软雅黑" panose="020B0503020204020204" charset="-122"/>
+                <a:cs typeface="微软雅黑" panose="020B0503020204020204" charset="-122"/>
               </a:rPr>
               <a:t>急救绿道 · 6 / 13</a:t>
             </a:r>
+            <a:endParaRPr sz="1000" b="0" i="0">
+              <a:solidFill>
+                <a:srgbClr val="7E9EC4"/>
+              </a:solidFill>
+              <a:latin typeface="微软雅黑" panose="020B0503020204020204" charset="-122"/>
+              <a:ea typeface="微软雅黑" panose="020B0503020204020204" charset="-122"/>
+              <a:cs typeface="微软雅黑" panose="020B0503020204020204" charset="-122"/>
+            </a:endParaRPr>
           </a:p>
         </p:txBody>
       </p:sp>
@@ -10634,7 +11911,7 @@
           <a:noFill/>
         </p:spPr>
         <p:txBody>
-          <a:bodyPr wrap="square" anchor="t" lIns="0" rIns="0" tIns="0" bIns="0">
+          <a:bodyPr wrap="square" lIns="0" tIns="0" rIns="0" bIns="0" anchor="t">
             <a:spAutoFit/>
           </a:bodyPr>
           <a:lstStyle/>
@@ -10649,12 +11926,20 @@
                 <a:solidFill>
                   <a:srgbClr val="7E9EC4"/>
                 </a:solidFill>
-                <a:latin typeface="微软雅黑"/>
-                <a:ea typeface="微软雅黑"/>
-                <a:cs typeface="微软雅黑"/>
+                <a:latin typeface="微软雅黑" panose="020B0503020204020204" charset="-122"/>
+                <a:ea typeface="微软雅黑" panose="020B0503020204020204" charset="-122"/>
+                <a:cs typeface="微软雅黑" panose="020B0503020204020204" charset="-122"/>
               </a:rPr>
               <a:t>示例病例</a:t>
             </a:r>
+            <a:endParaRPr sz="1100" b="1" i="0">
+              <a:solidFill>
+                <a:srgbClr val="7E9EC4"/>
+              </a:solidFill>
+              <a:latin typeface="微软雅黑" panose="020B0503020204020204" charset="-122"/>
+              <a:ea typeface="微软雅黑" panose="020B0503020204020204" charset="-122"/>
+              <a:cs typeface="微软雅黑" panose="020B0503020204020204" charset="-122"/>
+            </a:endParaRPr>
           </a:p>
           <a:p>
             <a:pPr algn="l">
@@ -10667,12 +11952,20 @@
                 <a:solidFill>
                   <a:srgbClr val="ECF7FF"/>
                 </a:solidFill>
-                <a:latin typeface="微软雅黑"/>
-                <a:ea typeface="微软雅黑"/>
-                <a:cs typeface="微软雅黑"/>
+                <a:latin typeface="微软雅黑" panose="020B0503020204020204" charset="-122"/>
+                <a:ea typeface="微软雅黑" panose="020B0503020204020204" charset="-122"/>
+                <a:cs typeface="微软雅黑" panose="020B0503020204020204" charset="-122"/>
               </a:rPr>
               <a:t>5089</a:t>
             </a:r>
+            <a:endParaRPr sz="4000" b="1" i="0">
+              <a:solidFill>
+                <a:srgbClr val="ECF7FF"/>
+              </a:solidFill>
+              <a:latin typeface="微软雅黑" panose="020B0503020204020204" charset="-122"/>
+              <a:ea typeface="微软雅黑" panose="020B0503020204020204" charset="-122"/>
+              <a:cs typeface="微软雅黑" panose="020B0503020204020204" charset="-122"/>
+            </a:endParaRPr>
           </a:p>
           <a:p>
             <a:pPr algn="l">
@@ -10685,12 +11978,20 @@
                 <a:solidFill>
                   <a:srgbClr val="BBD4EC"/>
                 </a:solidFill>
-                <a:latin typeface="微软雅黑"/>
-                <a:ea typeface="微软雅黑"/>
-                <a:cs typeface="微软雅黑"/>
+                <a:latin typeface="微软雅黑" panose="020B0503020204020204" charset="-122"/>
+                <a:ea typeface="微软雅黑" panose="020B0503020204020204" charset="-122"/>
+                <a:cs typeface="微软雅黑" panose="020B0503020204020204" charset="-122"/>
               </a:rPr>
               <a:t>含 12 个月历史，够看出趋势</a:t>
             </a:r>
+            <a:endParaRPr sz="1100" b="0" i="0">
+              <a:solidFill>
+                <a:srgbClr val="BBD4EC"/>
+              </a:solidFill>
+              <a:latin typeface="微软雅黑" panose="020B0503020204020204" charset="-122"/>
+              <a:ea typeface="微软雅黑" panose="020B0503020204020204" charset="-122"/>
+              <a:cs typeface="微软雅黑" panose="020B0503020204020204" charset="-122"/>
+            </a:endParaRPr>
           </a:p>
         </p:txBody>
       </p:sp>
@@ -10803,7 +12104,7 @@
           <a:noFill/>
         </p:spPr>
         <p:txBody>
-          <a:bodyPr wrap="square" anchor="t" lIns="0" rIns="0" tIns="0" bIns="0">
+          <a:bodyPr wrap="square" lIns="0" tIns="0" rIns="0" bIns="0" anchor="t">
             <a:spAutoFit/>
           </a:bodyPr>
           <a:lstStyle/>
@@ -10818,12 +12119,20 @@
                 <a:solidFill>
                   <a:srgbClr val="7E9EC4"/>
                 </a:solidFill>
-                <a:latin typeface="微软雅黑"/>
-                <a:ea typeface="微软雅黑"/>
-                <a:cs typeface="微软雅黑"/>
+                <a:latin typeface="微软雅黑" panose="020B0503020204020204" charset="-122"/>
+                <a:ea typeface="微软雅黑" panose="020B0503020204020204" charset="-122"/>
+                <a:cs typeface="微软雅黑" panose="020B0503020204020204" charset="-122"/>
               </a:rPr>
               <a:t>时间节点</a:t>
             </a:r>
+            <a:endParaRPr sz="1100" b="1" i="0">
+              <a:solidFill>
+                <a:srgbClr val="7E9EC4"/>
+              </a:solidFill>
+              <a:latin typeface="微软雅黑" panose="020B0503020204020204" charset="-122"/>
+              <a:ea typeface="微软雅黑" panose="020B0503020204020204" charset="-122"/>
+              <a:cs typeface="微软雅黑" panose="020B0503020204020204" charset="-122"/>
+            </a:endParaRPr>
           </a:p>
           <a:p>
             <a:pPr algn="l">
@@ -10836,12 +12145,20 @@
                 <a:solidFill>
                   <a:srgbClr val="ECF7FF"/>
                 </a:solidFill>
-                <a:latin typeface="微软雅黑"/>
-                <a:ea typeface="微软雅黑"/>
-                <a:cs typeface="微软雅黑"/>
+                <a:latin typeface="微软雅黑" panose="020B0503020204020204" charset="-122"/>
+                <a:ea typeface="微软雅黑" panose="020B0503020204020204" charset="-122"/>
+                <a:cs typeface="微软雅黑" panose="020B0503020204020204" charset="-122"/>
               </a:rPr>
               <a:t>30689</a:t>
             </a:r>
+            <a:endParaRPr sz="4000" b="1" i="0">
+              <a:solidFill>
+                <a:srgbClr val="ECF7FF"/>
+              </a:solidFill>
+              <a:latin typeface="微软雅黑" panose="020B0503020204020204" charset="-122"/>
+              <a:ea typeface="微软雅黑" panose="020B0503020204020204" charset="-122"/>
+              <a:cs typeface="微软雅黑" panose="020B0503020204020204" charset="-122"/>
+            </a:endParaRPr>
           </a:p>
           <a:p>
             <a:pPr algn="l">
@@ -10854,12 +12171,20 @@
                 <a:solidFill>
                   <a:srgbClr val="BBD4EC"/>
                 </a:solidFill>
-                <a:latin typeface="微软雅黑"/>
-                <a:ea typeface="微软雅黑"/>
-                <a:cs typeface="微软雅黑"/>
+                <a:latin typeface="微软雅黑" panose="020B0503020204020204" charset="-122"/>
+                <a:ea typeface="微软雅黑" panose="020B0503020204020204" charset="-122"/>
+                <a:cs typeface="微软雅黑" panose="020B0503020204020204" charset="-122"/>
               </a:rPr>
               <a:t>每个病例 6 个环节，用来算时长</a:t>
             </a:r>
+            <a:endParaRPr sz="1100" b="0" i="0">
+              <a:solidFill>
+                <a:srgbClr val="BBD4EC"/>
+              </a:solidFill>
+              <a:latin typeface="微软雅黑" panose="020B0503020204020204" charset="-122"/>
+              <a:ea typeface="微软雅黑" panose="020B0503020204020204" charset="-122"/>
+              <a:cs typeface="微软雅黑" panose="020B0503020204020204" charset="-122"/>
+            </a:endParaRPr>
           </a:p>
         </p:txBody>
       </p:sp>
@@ -10972,7 +12297,7 @@
           <a:noFill/>
         </p:spPr>
         <p:txBody>
-          <a:bodyPr wrap="square" anchor="t" lIns="0" rIns="0" tIns="0" bIns="0">
+          <a:bodyPr wrap="square" lIns="0" tIns="0" rIns="0" bIns="0" anchor="t">
             <a:spAutoFit/>
           </a:bodyPr>
           <a:lstStyle/>
@@ -10987,12 +12312,20 @@
                 <a:solidFill>
                   <a:srgbClr val="7E9EC4"/>
                 </a:solidFill>
-                <a:latin typeface="微软雅黑"/>
-                <a:ea typeface="微软雅黑"/>
-                <a:cs typeface="微软雅黑"/>
+                <a:latin typeface="微软雅黑" panose="020B0503020204020204" charset="-122"/>
+                <a:ea typeface="微软雅黑" panose="020B0503020204020204" charset="-122"/>
+                <a:cs typeface="微软雅黑" panose="020B0503020204020204" charset="-122"/>
               </a:rPr>
               <a:t>自动化验收</a:t>
             </a:r>
+            <a:endParaRPr sz="1100" b="1" i="0">
+              <a:solidFill>
+                <a:srgbClr val="7E9EC4"/>
+              </a:solidFill>
+              <a:latin typeface="微软雅黑" panose="020B0503020204020204" charset="-122"/>
+              <a:ea typeface="微软雅黑" panose="020B0503020204020204" charset="-122"/>
+              <a:cs typeface="微软雅黑" panose="020B0503020204020204" charset="-122"/>
+            </a:endParaRPr>
           </a:p>
           <a:p>
             <a:pPr algn="l">
@@ -11005,12 +12338,20 @@
                 <a:solidFill>
                   <a:srgbClr val="ECF7FF"/>
                 </a:solidFill>
-                <a:latin typeface="微软雅黑"/>
-                <a:ea typeface="微软雅黑"/>
-                <a:cs typeface="微软雅黑"/>
+                <a:latin typeface="微软雅黑" panose="020B0503020204020204" charset="-122"/>
+                <a:ea typeface="微软雅黑" panose="020B0503020204020204" charset="-122"/>
+                <a:cs typeface="微软雅黑" panose="020B0503020204020204" charset="-122"/>
               </a:rPr>
               <a:t>71</a:t>
             </a:r>
+            <a:endParaRPr sz="4000" b="1" i="0">
+              <a:solidFill>
+                <a:srgbClr val="ECF7FF"/>
+              </a:solidFill>
+              <a:latin typeface="微软雅黑" panose="020B0503020204020204" charset="-122"/>
+              <a:ea typeface="微软雅黑" panose="020B0503020204020204" charset="-122"/>
+              <a:cs typeface="微软雅黑" panose="020B0503020204020204" charset="-122"/>
+            </a:endParaRPr>
           </a:p>
           <a:p>
             <a:pPr algn="l">
@@ -11023,12 +12364,20 @@
                 <a:solidFill>
                   <a:srgbClr val="BBD4EC"/>
                 </a:solidFill>
-                <a:latin typeface="微软雅黑"/>
-                <a:ea typeface="微软雅黑"/>
-                <a:cs typeface="微软雅黑"/>
+                <a:latin typeface="微软雅黑" panose="020B0503020204020204" charset="-122"/>
+                <a:ea typeface="微软雅黑" panose="020B0503020204020204" charset="-122"/>
+                <a:cs typeface="微软雅黑" panose="020B0503020204020204" charset="-122"/>
               </a:rPr>
               <a:t>改代码后自动跑，坏了立刻知道</a:t>
             </a:r>
+            <a:endParaRPr sz="1100" b="0" i="0">
+              <a:solidFill>
+                <a:srgbClr val="BBD4EC"/>
+              </a:solidFill>
+              <a:latin typeface="微软雅黑" panose="020B0503020204020204" charset="-122"/>
+              <a:ea typeface="微软雅黑" panose="020B0503020204020204" charset="-122"/>
+              <a:cs typeface="微软雅黑" panose="020B0503020204020204" charset="-122"/>
+            </a:endParaRPr>
           </a:p>
         </p:txBody>
       </p:sp>
@@ -11141,7 +12490,7 @@
           <a:noFill/>
         </p:spPr>
         <p:txBody>
-          <a:bodyPr wrap="square" anchor="t" lIns="0" rIns="0" tIns="0" bIns="0">
+          <a:bodyPr wrap="square" lIns="0" tIns="0" rIns="0" bIns="0" anchor="t">
             <a:spAutoFit/>
           </a:bodyPr>
           <a:lstStyle/>
@@ -11156,12 +12505,20 @@
                 <a:solidFill>
                   <a:srgbClr val="7E9EC4"/>
                 </a:solidFill>
-                <a:latin typeface="微软雅黑"/>
-                <a:ea typeface="微软雅黑"/>
-                <a:cs typeface="微软雅黑"/>
+                <a:latin typeface="微软雅黑" panose="020B0503020204020204" charset="-122"/>
+                <a:ea typeface="微软雅黑" panose="020B0503020204020204" charset="-122"/>
+                <a:cs typeface="微软雅黑" panose="020B0503020204020204" charset="-122"/>
               </a:rPr>
               <a:t>页面</a:t>
             </a:r>
+            <a:endParaRPr sz="1100" b="1" i="0">
+              <a:solidFill>
+                <a:srgbClr val="7E9EC4"/>
+              </a:solidFill>
+              <a:latin typeface="微软雅黑" panose="020B0503020204020204" charset="-122"/>
+              <a:ea typeface="微软雅黑" panose="020B0503020204020204" charset="-122"/>
+              <a:cs typeface="微软雅黑" panose="020B0503020204020204" charset="-122"/>
+            </a:endParaRPr>
           </a:p>
           <a:p>
             <a:pPr algn="l">
@@ -11174,12 +12531,20 @@
                 <a:solidFill>
                   <a:srgbClr val="ECF7FF"/>
                 </a:solidFill>
-                <a:latin typeface="微软雅黑"/>
-                <a:ea typeface="微软雅黑"/>
-                <a:cs typeface="微软雅黑"/>
+                <a:latin typeface="微软雅黑" panose="020B0503020204020204" charset="-122"/>
+                <a:ea typeface="微软雅黑" panose="020B0503020204020204" charset="-122"/>
+                <a:cs typeface="微软雅黑" panose="020B0503020204020204" charset="-122"/>
               </a:rPr>
               <a:t>14</a:t>
             </a:r>
+            <a:endParaRPr sz="4000" b="1" i="0">
+              <a:solidFill>
+                <a:srgbClr val="ECF7FF"/>
+              </a:solidFill>
+              <a:latin typeface="微软雅黑" panose="020B0503020204020204" charset="-122"/>
+              <a:ea typeface="微软雅黑" panose="020B0503020204020204" charset="-122"/>
+              <a:cs typeface="微软雅黑" panose="020B0503020204020204" charset="-122"/>
+            </a:endParaRPr>
           </a:p>
           <a:p>
             <a:pPr algn="l">
@@ -11192,12 +12557,20 @@
                 <a:solidFill>
                   <a:srgbClr val="BBD4EC"/>
                 </a:solidFill>
-                <a:latin typeface="微软雅黑"/>
-                <a:ea typeface="微软雅黑"/>
-                <a:cs typeface="微软雅黑"/>
+                <a:latin typeface="微软雅黑" panose="020B0503020204020204" charset="-122"/>
+                <a:ea typeface="微软雅黑" panose="020B0503020204020204" charset="-122"/>
+                <a:cs typeface="微软雅黑" panose="020B0503020204020204" charset="-122"/>
               </a:rPr>
               <a:t>大屏 1 页 + 后台 13 页</a:t>
             </a:r>
+            <a:endParaRPr sz="1100" b="0" i="0">
+              <a:solidFill>
+                <a:srgbClr val="BBD4EC"/>
+              </a:solidFill>
+              <a:latin typeface="微软雅黑" panose="020B0503020204020204" charset="-122"/>
+              <a:ea typeface="微软雅黑" panose="020B0503020204020204" charset="-122"/>
+              <a:cs typeface="微软雅黑" panose="020B0503020204020204" charset="-122"/>
+            </a:endParaRPr>
           </a:p>
         </p:txBody>
       </p:sp>
@@ -11218,7 +12591,7 @@
           <a:noFill/>
         </p:spPr>
         <p:txBody>
-          <a:bodyPr wrap="square" anchor="t" lIns="0" rIns="0" tIns="0" bIns="0">
+          <a:bodyPr wrap="square" lIns="0" tIns="0" rIns="0" bIns="0" anchor="t">
             <a:spAutoFit/>
           </a:bodyPr>
           <a:lstStyle/>
@@ -11233,9 +12606,9 @@
                 <a:solidFill>
                   <a:srgbClr val="BBD4EC"/>
                 </a:solidFill>
-                <a:latin typeface="微软雅黑"/>
-                <a:ea typeface="微软雅黑"/>
-                <a:cs typeface="微软雅黑"/>
+                <a:latin typeface="微软雅黑" panose="020B0503020204020204" charset="-122"/>
+                <a:ea typeface="微软雅黑" panose="020B0503020204020204" charset="-122"/>
+                <a:cs typeface="微软雅黑" panose="020B0503020204020204" charset="-122"/>
               </a:rPr>
               <a:t>冷启动（全新电脑、什么都没装）：</a:t>
             </a:r>
@@ -11244,12 +12617,20 @@
                 <a:solidFill>
                   <a:srgbClr val="ECF7FF"/>
                 </a:solidFill>
-                <a:latin typeface="微软雅黑"/>
-                <a:ea typeface="微软雅黑"/>
-                <a:cs typeface="微软雅黑"/>
+                <a:latin typeface="微软雅黑" panose="020B0503020204020204" charset="-122"/>
+                <a:ea typeface="微软雅黑" panose="020B0503020204020204" charset="-122"/>
+                <a:cs typeface="微软雅黑" panose="020B0503020204020204" charset="-122"/>
               </a:rPr>
               <a:t>双击一个文件，30 秒内自动装好依赖、建库、灌数据、打开浏览器。</a:t>
             </a:r>
+            <a:endParaRPr sz="1500" b="1" i="0">
+              <a:solidFill>
+                <a:srgbClr val="ECF7FF"/>
+              </a:solidFill>
+              <a:latin typeface="微软雅黑" panose="020B0503020204020204" charset="-122"/>
+              <a:ea typeface="微软雅黑" panose="020B0503020204020204" charset="-122"/>
+              <a:cs typeface="微软雅黑" panose="020B0503020204020204" charset="-122"/>
+            </a:endParaRPr>
           </a:p>
         </p:txBody>
       </p:sp>
@@ -11262,7 +12643,7 @@
 </file>
 
 <file path=ppt/slides/slide7.xml><?xml version="1.0" encoding="utf-8"?>
-<p:sld xmlns:a="http://schemas.openxmlformats.org/drawingml/2006/main" xmlns:p="http://schemas.openxmlformats.org/presentationml/2006/main" xmlns:r="http://schemas.openxmlformats.org/officeDocument/2006/relationships">
+<p:sld xmlns:a="http://schemas.openxmlformats.org/drawingml/2006/main" xmlns:r="http://schemas.openxmlformats.org/officeDocument/2006/relationships" xmlns:p="http://schemas.openxmlformats.org/presentationml/2006/main">
   <p:cSld>
     <p:spTree>
       <p:nvGrpSpPr>
@@ -11332,7 +12713,7 @@
           <a:noFill/>
         </p:spPr>
         <p:txBody>
-          <a:bodyPr wrap="square" anchor="t" lIns="0" rIns="0" tIns="0" bIns="0">
+          <a:bodyPr wrap="square" lIns="0" tIns="0" rIns="0" bIns="0" anchor="t">
             <a:spAutoFit/>
           </a:bodyPr>
           <a:lstStyle/>
@@ -11343,12 +12724,20 @@
                 <a:solidFill>
                   <a:srgbClr val="7FE3FF"/>
                 </a:solidFill>
-                <a:latin typeface="微软雅黑"/>
-                <a:ea typeface="微软雅黑"/>
-                <a:cs typeface="微软雅黑"/>
+                <a:latin typeface="微软雅黑" panose="020B0503020204020204" charset="-122"/>
+                <a:ea typeface="微软雅黑" panose="020B0503020204020204" charset="-122"/>
+                <a:cs typeface="微软雅黑" panose="020B0503020204020204" charset="-122"/>
               </a:rPr>
               <a:t>02 · 怎么做的</a:t>
             </a:r>
+            <a:endParaRPr sz="1150" b="1" i="0">
+              <a:solidFill>
+                <a:srgbClr val="7FE3FF"/>
+              </a:solidFill>
+              <a:latin typeface="微软雅黑" panose="020B0503020204020204" charset="-122"/>
+              <a:ea typeface="微软雅黑" panose="020B0503020204020204" charset="-122"/>
+              <a:cs typeface="微软雅黑" panose="020B0503020204020204" charset="-122"/>
+            </a:endParaRPr>
           </a:p>
         </p:txBody>
       </p:sp>
@@ -11369,7 +12758,7 @@
           <a:noFill/>
         </p:spPr>
         <p:txBody>
-          <a:bodyPr wrap="square" anchor="t" lIns="0" rIns="0" tIns="0" bIns="0">
+          <a:bodyPr wrap="square" lIns="0" tIns="0" rIns="0" bIns="0" anchor="t">
             <a:spAutoFit/>
           </a:bodyPr>
           <a:lstStyle/>
@@ -11380,12 +12769,20 @@
                 <a:solidFill>
                   <a:srgbClr val="ECF7FF"/>
                 </a:solidFill>
-                <a:latin typeface="微软雅黑"/>
-                <a:ea typeface="微软雅黑"/>
-                <a:cs typeface="微软雅黑"/>
+                <a:latin typeface="微软雅黑" panose="020B0503020204020204" charset="-122"/>
+                <a:ea typeface="微软雅黑" panose="020B0503020204020204" charset="-122"/>
+                <a:cs typeface="微软雅黑" panose="020B0503020204020204" charset="-122"/>
               </a:rPr>
               <a:t>一条数据从产生到上屏，走五步</a:t>
             </a:r>
+            <a:endParaRPr sz="2700" b="1" i="0">
+              <a:solidFill>
+                <a:srgbClr val="ECF7FF"/>
+              </a:solidFill>
+              <a:latin typeface="微软雅黑" panose="020B0503020204020204" charset="-122"/>
+              <a:ea typeface="微软雅黑" panose="020B0503020204020204" charset="-122"/>
+              <a:cs typeface="微软雅黑" panose="020B0503020204020204" charset="-122"/>
+            </a:endParaRPr>
           </a:p>
         </p:txBody>
       </p:sp>
@@ -11406,7 +12803,7 @@
           <a:noFill/>
         </p:spPr>
         <p:txBody>
-          <a:bodyPr wrap="square" anchor="t" lIns="0" rIns="0" tIns="0" bIns="0">
+          <a:bodyPr wrap="square" lIns="0" tIns="0" rIns="0" bIns="0" anchor="t">
             <a:spAutoFit/>
           </a:bodyPr>
           <a:lstStyle/>
@@ -11417,12 +12814,20 @@
                 <a:solidFill>
                   <a:srgbClr val="7E9EC4"/>
                 </a:solidFill>
-                <a:latin typeface="微软雅黑"/>
-                <a:ea typeface="微软雅黑"/>
-                <a:cs typeface="微软雅黑"/>
+                <a:latin typeface="微软雅黑" panose="020B0503020204020204" charset="-122"/>
+                <a:ea typeface="微软雅黑" panose="020B0503020204020204" charset="-122"/>
+                <a:cs typeface="微软雅黑" panose="020B0503020204020204" charset="-122"/>
               </a:rPr>
               <a:t>急救绿道 · 7 / 13</a:t>
             </a:r>
+            <a:endParaRPr sz="1000" b="0" i="0">
+              <a:solidFill>
+                <a:srgbClr val="7E9EC4"/>
+              </a:solidFill>
+              <a:latin typeface="微软雅黑" panose="020B0503020204020204" charset="-122"/>
+              <a:ea typeface="微软雅黑" panose="020B0503020204020204" charset="-122"/>
+              <a:cs typeface="微软雅黑" panose="020B0503020204020204" charset="-122"/>
+            </a:endParaRPr>
           </a:p>
         </p:txBody>
       </p:sp>
@@ -11491,7 +12896,7 @@
           <a:noFill/>
         </p:spPr>
         <p:txBody>
-          <a:bodyPr wrap="square" anchor="t" lIns="0" rIns="0" tIns="0" bIns="0">
+          <a:bodyPr wrap="square" lIns="0" tIns="0" rIns="0" bIns="0" anchor="t">
             <a:spAutoFit/>
           </a:bodyPr>
           <a:lstStyle/>
@@ -11506,12 +12911,20 @@
                 <a:solidFill>
                   <a:srgbClr val="ECF7FF"/>
                 </a:solidFill>
-                <a:latin typeface="微软雅黑"/>
-                <a:ea typeface="微软雅黑"/>
-                <a:cs typeface="微软雅黑"/>
+                <a:latin typeface="微软雅黑" panose="020B0503020204020204" charset="-122"/>
+                <a:ea typeface="微软雅黑" panose="020B0503020204020204" charset="-122"/>
+                <a:cs typeface="微软雅黑" panose="020B0503020204020204" charset="-122"/>
               </a:rPr>
               <a:t>① 产生</a:t>
             </a:r>
+            <a:endParaRPr sz="1500" b="1" i="0">
+              <a:solidFill>
+                <a:srgbClr val="ECF7FF"/>
+              </a:solidFill>
+              <a:latin typeface="微软雅黑" panose="020B0503020204020204" charset="-122"/>
+              <a:ea typeface="微软雅黑" panose="020B0503020204020204" charset="-122"/>
+              <a:cs typeface="微软雅黑" panose="020B0503020204020204" charset="-122"/>
+            </a:endParaRPr>
           </a:p>
           <a:p>
             <a:pPr algn="ctr">
@@ -11524,13 +12937,21 @@
                 <a:solidFill>
                   <a:srgbClr val="BBD4EC"/>
                 </a:solidFill>
-                <a:latin typeface="微软雅黑"/>
-                <a:ea typeface="微软雅黑"/>
-                <a:cs typeface="微软雅黑"/>
+                <a:latin typeface="微软雅黑" panose="020B0503020204020204" charset="-122"/>
+                <a:ea typeface="微软雅黑" panose="020B0503020204020204" charset="-122"/>
+                <a:cs typeface="微软雅黑" panose="020B0503020204020204" charset="-122"/>
               </a:rPr>
               <a:t>120 送来 / 院内接诊
 或 HIS 系统推送</a:t>
             </a:r>
+            <a:endParaRPr sz="1050" b="0" i="0">
+              <a:solidFill>
+                <a:srgbClr val="BBD4EC"/>
+              </a:solidFill>
+              <a:latin typeface="微软雅黑" panose="020B0503020204020204" charset="-122"/>
+              <a:ea typeface="微软雅黑" panose="020B0503020204020204" charset="-122"/>
+              <a:cs typeface="微软雅黑" panose="020B0503020204020204" charset="-122"/>
+            </a:endParaRPr>
           </a:p>
         </p:txBody>
       </p:sp>
@@ -11551,7 +12972,7 @@
           <a:noFill/>
         </p:spPr>
         <p:txBody>
-          <a:bodyPr wrap="square" anchor="t" lIns="0" rIns="0" tIns="0" bIns="0">
+          <a:bodyPr wrap="square" lIns="0" tIns="0" rIns="0" bIns="0" anchor="t">
             <a:spAutoFit/>
           </a:bodyPr>
           <a:lstStyle/>
@@ -11562,12 +12983,20 @@
                 <a:solidFill>
                   <a:srgbClr val="7FE3FF"/>
                 </a:solidFill>
-                <a:latin typeface="微软雅黑"/>
-                <a:ea typeface="微软雅黑"/>
-                <a:cs typeface="微软雅黑"/>
+                <a:latin typeface="微软雅黑" panose="020B0503020204020204" charset="-122"/>
+                <a:ea typeface="微软雅黑" panose="020B0503020204020204" charset="-122"/>
+                <a:cs typeface="微软雅黑" panose="020B0503020204020204" charset="-122"/>
               </a:rPr>
               <a:t>→</a:t>
             </a:r>
+            <a:endParaRPr sz="2000" b="1" i="0">
+              <a:solidFill>
+                <a:srgbClr val="7FE3FF"/>
+              </a:solidFill>
+              <a:latin typeface="微软雅黑" panose="020B0503020204020204" charset="-122"/>
+              <a:ea typeface="微软雅黑" panose="020B0503020204020204" charset="-122"/>
+              <a:cs typeface="微软雅黑" panose="020B0503020204020204" charset="-122"/>
+            </a:endParaRPr>
           </a:p>
         </p:txBody>
       </p:sp>
@@ -11636,7 +13065,7 @@
           <a:noFill/>
         </p:spPr>
         <p:txBody>
-          <a:bodyPr wrap="square" anchor="t" lIns="0" rIns="0" tIns="0" bIns="0">
+          <a:bodyPr wrap="square" lIns="0" tIns="0" rIns="0" bIns="0" anchor="t">
             <a:spAutoFit/>
           </a:bodyPr>
           <a:lstStyle/>
@@ -11651,12 +13080,20 @@
                 <a:solidFill>
                   <a:srgbClr val="ECF7FF"/>
                 </a:solidFill>
-                <a:latin typeface="微软雅黑"/>
-                <a:ea typeface="微软雅黑"/>
-                <a:cs typeface="微软雅黑"/>
+                <a:latin typeface="微软雅黑" panose="020B0503020204020204" charset="-122"/>
+                <a:ea typeface="微软雅黑" panose="020B0503020204020204" charset="-122"/>
+                <a:cs typeface="微软雅黑" panose="020B0503020204020204" charset="-122"/>
               </a:rPr>
               <a:t>② 录入</a:t>
             </a:r>
+            <a:endParaRPr sz="1500" b="1" i="0">
+              <a:solidFill>
+                <a:srgbClr val="ECF7FF"/>
+              </a:solidFill>
+              <a:latin typeface="微软雅黑" panose="020B0503020204020204" charset="-122"/>
+              <a:ea typeface="微软雅黑" panose="020B0503020204020204" charset="-122"/>
+              <a:cs typeface="微软雅黑" panose="020B0503020204020204" charset="-122"/>
+            </a:endParaRPr>
           </a:p>
           <a:p>
             <a:pPr algn="ctr">
@@ -11669,13 +13106,21 @@
                 <a:solidFill>
                   <a:srgbClr val="BBD4EC"/>
                 </a:solidFill>
-                <a:latin typeface="微软雅黑"/>
-                <a:ea typeface="微软雅黑"/>
-                <a:cs typeface="微软雅黑"/>
+                <a:latin typeface="微软雅黑" panose="020B0503020204020204" charset="-122"/>
+                <a:ea typeface="微软雅黑" panose="020B0503020204020204" charset="-122"/>
+                <a:cs typeface="微软雅黑" panose="020B0503020204020204" charset="-122"/>
               </a:rPr>
               <a:t>后台填病例
 或接口自动创建</a:t>
             </a:r>
+            <a:endParaRPr sz="1050" b="0" i="0">
+              <a:solidFill>
+                <a:srgbClr val="BBD4EC"/>
+              </a:solidFill>
+              <a:latin typeface="微软雅黑" panose="020B0503020204020204" charset="-122"/>
+              <a:ea typeface="微软雅黑" panose="020B0503020204020204" charset="-122"/>
+              <a:cs typeface="微软雅黑" panose="020B0503020204020204" charset="-122"/>
+            </a:endParaRPr>
           </a:p>
         </p:txBody>
       </p:sp>
@@ -11696,7 +13141,7 @@
           <a:noFill/>
         </p:spPr>
         <p:txBody>
-          <a:bodyPr wrap="square" anchor="t" lIns="0" rIns="0" tIns="0" bIns="0">
+          <a:bodyPr wrap="square" lIns="0" tIns="0" rIns="0" bIns="0" anchor="t">
             <a:spAutoFit/>
           </a:bodyPr>
           <a:lstStyle/>
@@ -11707,12 +13152,20 @@
                 <a:solidFill>
                   <a:srgbClr val="7FE3FF"/>
                 </a:solidFill>
-                <a:latin typeface="微软雅黑"/>
-                <a:ea typeface="微软雅黑"/>
-                <a:cs typeface="微软雅黑"/>
+                <a:latin typeface="微软雅黑" panose="020B0503020204020204" charset="-122"/>
+                <a:ea typeface="微软雅黑" panose="020B0503020204020204" charset="-122"/>
+                <a:cs typeface="微软雅黑" panose="020B0503020204020204" charset="-122"/>
               </a:rPr>
               <a:t>→</a:t>
             </a:r>
+            <a:endParaRPr sz="2000" b="1" i="0">
+              <a:solidFill>
+                <a:srgbClr val="7FE3FF"/>
+              </a:solidFill>
+              <a:latin typeface="微软雅黑" panose="020B0503020204020204" charset="-122"/>
+              <a:ea typeface="微软雅黑" panose="020B0503020204020204" charset="-122"/>
+              <a:cs typeface="微软雅黑" panose="020B0503020204020204" charset="-122"/>
+            </a:endParaRPr>
           </a:p>
         </p:txBody>
       </p:sp>
@@ -11825,7 +13278,7 @@
           <a:noFill/>
         </p:spPr>
         <p:txBody>
-          <a:bodyPr wrap="square" anchor="t" lIns="0" rIns="0" tIns="0" bIns="0">
+          <a:bodyPr wrap="square" lIns="0" tIns="0" rIns="0" bIns="0" anchor="t">
             <a:spAutoFit/>
           </a:bodyPr>
           <a:lstStyle/>
@@ -11840,12 +13293,20 @@
                 <a:solidFill>
                   <a:srgbClr val="ECF7FF"/>
                 </a:solidFill>
-                <a:latin typeface="微软雅黑"/>
-                <a:ea typeface="微软雅黑"/>
-                <a:cs typeface="微软雅黑"/>
+                <a:latin typeface="微软雅黑" panose="020B0503020204020204" charset="-122"/>
+                <a:ea typeface="微软雅黑" panose="020B0503020204020204" charset="-122"/>
+                <a:cs typeface="微软雅黑" panose="020B0503020204020204" charset="-122"/>
               </a:rPr>
               <a:t>③ 存储</a:t>
             </a:r>
+            <a:endParaRPr sz="1500" b="1" i="0">
+              <a:solidFill>
+                <a:srgbClr val="ECF7FF"/>
+              </a:solidFill>
+              <a:latin typeface="微软雅黑" panose="020B0503020204020204" charset="-122"/>
+              <a:ea typeface="微软雅黑" panose="020B0503020204020204" charset="-122"/>
+              <a:cs typeface="微软雅黑" panose="020B0503020204020204" charset="-122"/>
+            </a:endParaRPr>
           </a:p>
           <a:p>
             <a:pPr algn="ctr">
@@ -11858,13 +13319,21 @@
                 <a:solidFill>
                   <a:srgbClr val="BBD4EC"/>
                 </a:solidFill>
-                <a:latin typeface="微软雅黑"/>
-                <a:ea typeface="微软雅黑"/>
-                <a:cs typeface="微软雅黑"/>
+                <a:latin typeface="微软雅黑" panose="020B0503020204020204" charset="-122"/>
+                <a:ea typeface="微软雅黑" panose="020B0503020204020204" charset="-122"/>
+                <a:cs typeface="微软雅黑" panose="020B0503020204020204" charset="-122"/>
               </a:rPr>
               <a:t>一个 SQLite 数据库文件
 时间统一存本地时区</a:t>
             </a:r>
+            <a:endParaRPr sz="1050" b="0" i="0">
+              <a:solidFill>
+                <a:srgbClr val="BBD4EC"/>
+              </a:solidFill>
+              <a:latin typeface="微软雅黑" panose="020B0503020204020204" charset="-122"/>
+              <a:ea typeface="微软雅黑" panose="020B0503020204020204" charset="-122"/>
+              <a:cs typeface="微软雅黑" panose="020B0503020204020204" charset="-122"/>
+            </a:endParaRPr>
           </a:p>
         </p:txBody>
       </p:sp>
@@ -11885,7 +13354,7 @@
           <a:noFill/>
         </p:spPr>
         <p:txBody>
-          <a:bodyPr wrap="square" anchor="t" lIns="0" rIns="0" tIns="0" bIns="0">
+          <a:bodyPr wrap="square" lIns="0" tIns="0" rIns="0" bIns="0" anchor="t">
             <a:spAutoFit/>
           </a:bodyPr>
           <a:lstStyle/>
@@ -11896,12 +13365,20 @@
                 <a:solidFill>
                   <a:srgbClr val="7FE3FF"/>
                 </a:solidFill>
-                <a:latin typeface="微软雅黑"/>
-                <a:ea typeface="微软雅黑"/>
-                <a:cs typeface="微软雅黑"/>
+                <a:latin typeface="微软雅黑" panose="020B0503020204020204" charset="-122"/>
+                <a:ea typeface="微软雅黑" panose="020B0503020204020204" charset="-122"/>
+                <a:cs typeface="微软雅黑" panose="020B0503020204020204" charset="-122"/>
               </a:rPr>
               <a:t>→</a:t>
             </a:r>
+            <a:endParaRPr sz="2000" b="1" i="0">
+              <a:solidFill>
+                <a:srgbClr val="7FE3FF"/>
+              </a:solidFill>
+              <a:latin typeface="微软雅黑" panose="020B0503020204020204" charset="-122"/>
+              <a:ea typeface="微软雅黑" panose="020B0503020204020204" charset="-122"/>
+              <a:cs typeface="微软雅黑" panose="020B0503020204020204" charset="-122"/>
+            </a:endParaRPr>
           </a:p>
         </p:txBody>
       </p:sp>
@@ -12014,7 +13491,7 @@
           <a:noFill/>
         </p:spPr>
         <p:txBody>
-          <a:bodyPr wrap="square" anchor="t" lIns="0" rIns="0" tIns="0" bIns="0">
+          <a:bodyPr wrap="square" lIns="0" tIns="0" rIns="0" bIns="0" anchor="t">
             <a:spAutoFit/>
           </a:bodyPr>
           <a:lstStyle/>
@@ -12029,12 +13506,20 @@
                 <a:solidFill>
                   <a:srgbClr val="ECF7FF"/>
                 </a:solidFill>
-                <a:latin typeface="微软雅黑"/>
-                <a:ea typeface="微软雅黑"/>
-                <a:cs typeface="微软雅黑"/>
+                <a:latin typeface="微软雅黑" panose="020B0503020204020204" charset="-122"/>
+                <a:ea typeface="微软雅黑" panose="020B0503020204020204" charset="-122"/>
+                <a:cs typeface="微软雅黑" panose="020B0503020204020204" charset="-122"/>
               </a:rPr>
               <a:t>④ 聚合</a:t>
             </a:r>
+            <a:endParaRPr sz="1500" b="1" i="0">
+              <a:solidFill>
+                <a:srgbClr val="ECF7FF"/>
+              </a:solidFill>
+              <a:latin typeface="微软雅黑" panose="020B0503020204020204" charset="-122"/>
+              <a:ea typeface="微软雅黑" panose="020B0503020204020204" charset="-122"/>
+              <a:cs typeface="微软雅黑" panose="020B0503020204020204" charset="-122"/>
+            </a:endParaRPr>
           </a:p>
           <a:p>
             <a:pPr algn="ctr">
@@ -12047,13 +13532,21 @@
                 <a:solidFill>
                   <a:srgbClr val="BBD4EC"/>
                 </a:solidFill>
-                <a:latin typeface="微软雅黑"/>
-                <a:ea typeface="微软雅黑"/>
-                <a:cs typeface="微软雅黑"/>
+                <a:latin typeface="微软雅黑" panose="020B0503020204020204" charset="-122"/>
+                <a:ea typeface="微软雅黑" panose="020B0503020204020204" charset="-122"/>
+                <a:cs typeface="微软雅黑" panose="020B0503020204020204" charset="-122"/>
               </a:rPr>
               <a:t>服务端算好饼图 / 柱状图
 大屏不用自己算</a:t>
             </a:r>
+            <a:endParaRPr sz="1050" b="0" i="0">
+              <a:solidFill>
+                <a:srgbClr val="BBD4EC"/>
+              </a:solidFill>
+              <a:latin typeface="微软雅黑" panose="020B0503020204020204" charset="-122"/>
+              <a:ea typeface="微软雅黑" panose="020B0503020204020204" charset="-122"/>
+              <a:cs typeface="微软雅黑" panose="020B0503020204020204" charset="-122"/>
+            </a:endParaRPr>
           </a:p>
         </p:txBody>
       </p:sp>
@@ -12074,7 +13567,7 @@
           <a:noFill/>
         </p:spPr>
         <p:txBody>
-          <a:bodyPr wrap="square" anchor="t" lIns="0" rIns="0" tIns="0" bIns="0">
+          <a:bodyPr wrap="square" lIns="0" tIns="0" rIns="0" bIns="0" anchor="t">
             <a:spAutoFit/>
           </a:bodyPr>
           <a:lstStyle/>
@@ -12085,12 +13578,20 @@
                 <a:solidFill>
                   <a:srgbClr val="7FE3FF"/>
                 </a:solidFill>
-                <a:latin typeface="微软雅黑"/>
-                <a:ea typeface="微软雅黑"/>
-                <a:cs typeface="微软雅黑"/>
+                <a:latin typeface="微软雅黑" panose="020B0503020204020204" charset="-122"/>
+                <a:ea typeface="微软雅黑" panose="020B0503020204020204" charset="-122"/>
+                <a:cs typeface="微软雅黑" panose="020B0503020204020204" charset="-122"/>
               </a:rPr>
               <a:t>→</a:t>
             </a:r>
+            <a:endParaRPr sz="2000" b="1" i="0">
+              <a:solidFill>
+                <a:srgbClr val="7FE3FF"/>
+              </a:solidFill>
+              <a:latin typeface="微软雅黑" panose="020B0503020204020204" charset="-122"/>
+              <a:ea typeface="微软雅黑" panose="020B0503020204020204" charset="-122"/>
+              <a:cs typeface="微软雅黑" panose="020B0503020204020204" charset="-122"/>
+            </a:endParaRPr>
           </a:p>
         </p:txBody>
       </p:sp>
@@ -12159,7 +13660,7 @@
           <a:noFill/>
         </p:spPr>
         <p:txBody>
-          <a:bodyPr wrap="square" anchor="t" lIns="0" rIns="0" tIns="0" bIns="0">
+          <a:bodyPr wrap="square" lIns="0" tIns="0" rIns="0" bIns="0" anchor="t">
             <a:spAutoFit/>
           </a:bodyPr>
           <a:lstStyle/>
@@ -12174,12 +13675,20 @@
                 <a:solidFill>
                   <a:srgbClr val="ECF7FF"/>
                 </a:solidFill>
-                <a:latin typeface="微软雅黑"/>
-                <a:ea typeface="微软雅黑"/>
-                <a:cs typeface="微软雅黑"/>
+                <a:latin typeface="微软雅黑" panose="020B0503020204020204" charset="-122"/>
+                <a:ea typeface="微软雅黑" panose="020B0503020204020204" charset="-122"/>
+                <a:cs typeface="微软雅黑" panose="020B0503020204020204" charset="-122"/>
               </a:rPr>
               <a:t>⑤ 展示</a:t>
             </a:r>
+            <a:endParaRPr sz="1500" b="1" i="0">
+              <a:solidFill>
+                <a:srgbClr val="ECF7FF"/>
+              </a:solidFill>
+              <a:latin typeface="微软雅黑" panose="020B0503020204020204" charset="-122"/>
+              <a:ea typeface="微软雅黑" panose="020B0503020204020204" charset="-122"/>
+              <a:cs typeface="微软雅黑" panose="020B0503020204020204" charset="-122"/>
+            </a:endParaRPr>
           </a:p>
           <a:p>
             <a:pPr algn="ctr">
@@ -12192,13 +13701,21 @@
                 <a:solidFill>
                   <a:srgbClr val="BBD4EC"/>
                 </a:solidFill>
-                <a:latin typeface="微软雅黑"/>
-                <a:ea typeface="微软雅黑"/>
-                <a:cs typeface="微软雅黑"/>
+                <a:latin typeface="微软雅黑" panose="020B0503020204020204" charset="-122"/>
+                <a:ea typeface="微软雅黑" panose="020B0503020204020204" charset="-122"/>
+                <a:cs typeface="微软雅黑" panose="020B0503020204020204" charset="-122"/>
               </a:rPr>
               <a:t>大屏 + 后台 + 报表
 同时拿到同一份数据</a:t>
             </a:r>
+            <a:endParaRPr sz="1050" b="0" i="0">
+              <a:solidFill>
+                <a:srgbClr val="BBD4EC"/>
+              </a:solidFill>
+              <a:latin typeface="微软雅黑" panose="020B0503020204020204" charset="-122"/>
+              <a:ea typeface="微软雅黑" panose="020B0503020204020204" charset="-122"/>
+              <a:cs typeface="微软雅黑" panose="020B0503020204020204" charset="-122"/>
+            </a:endParaRPr>
           </a:p>
         </p:txBody>
       </p:sp>
@@ -12267,7 +13784,7 @@
           <a:noFill/>
         </p:spPr>
         <p:txBody>
-          <a:bodyPr wrap="square" anchor="t" lIns="0" rIns="0" tIns="0" bIns="0">
+          <a:bodyPr wrap="square" lIns="0" tIns="0" rIns="0" bIns="0" anchor="t">
             <a:spAutoFit/>
           </a:bodyPr>
           <a:lstStyle/>
@@ -12282,12 +13799,20 @@
                 <a:solidFill>
                   <a:srgbClr val="BBD4EC"/>
                 </a:solidFill>
-                <a:latin typeface="微软雅黑"/>
-                <a:ea typeface="微软雅黑"/>
-                <a:cs typeface="微软雅黑"/>
+                <a:latin typeface="微软雅黑" panose="020B0503020204020204" charset="-122"/>
+                <a:ea typeface="微软雅黑" panose="020B0503020204020204" charset="-122"/>
+                <a:cs typeface="微软雅黑" panose="020B0503020204020204" charset="-122"/>
               </a:rPr>
               <a:t>蓝边 = 服务端在做的事</a:t>
             </a:r>
+            <a:endParaRPr sz="1100" b="1" i="0">
+              <a:solidFill>
+                <a:srgbClr val="BBD4EC"/>
+              </a:solidFill>
+              <a:latin typeface="微软雅黑" panose="020B0503020204020204" charset="-122"/>
+              <a:ea typeface="微软雅黑" panose="020B0503020204020204" charset="-122"/>
+              <a:cs typeface="微软雅黑" panose="020B0503020204020204" charset="-122"/>
+            </a:endParaRPr>
           </a:p>
           <a:p>
             <a:pPr algn="l">
@@ -12300,12 +13825,20 @@
                 <a:solidFill>
                   <a:srgbClr val="7E9EC4"/>
                 </a:solidFill>
-                <a:latin typeface="微软雅黑"/>
-                <a:ea typeface="微软雅黑"/>
-                <a:cs typeface="微软雅黑"/>
+                <a:latin typeface="微软雅黑" panose="020B0503020204020204" charset="-122"/>
+                <a:ea typeface="微软雅黑" panose="020B0503020204020204" charset="-122"/>
+                <a:cs typeface="微软雅黑" panose="020B0503020204020204" charset="-122"/>
               </a:rPr>
               <a:t>③④两步是关键：算在服务端，屏幕只负责画</a:t>
             </a:r>
+            <a:endParaRPr sz="950" b="0" i="0">
+              <a:solidFill>
+                <a:srgbClr val="7E9EC4"/>
+              </a:solidFill>
+              <a:latin typeface="微软雅黑" panose="020B0503020204020204" charset="-122"/>
+              <a:ea typeface="微软雅黑" panose="020B0503020204020204" charset="-122"/>
+              <a:cs typeface="微软雅黑" panose="020B0503020204020204" charset="-122"/>
+            </a:endParaRPr>
           </a:p>
         </p:txBody>
       </p:sp>
@@ -12374,7 +13907,7 @@
           <a:noFill/>
         </p:spPr>
         <p:txBody>
-          <a:bodyPr wrap="square" anchor="t" lIns="0" rIns="0" tIns="0" bIns="0">
+          <a:bodyPr wrap="square" lIns="0" tIns="0" rIns="0" bIns="0" anchor="t">
             <a:spAutoFit/>
           </a:bodyPr>
           <a:lstStyle/>
@@ -12389,12 +13922,20 @@
                 <a:solidFill>
                   <a:srgbClr val="BBD4EC"/>
                 </a:solidFill>
-                <a:latin typeface="微软雅黑"/>
-                <a:ea typeface="微软雅黑"/>
-                <a:cs typeface="微软雅黑"/>
+                <a:latin typeface="微软雅黑" panose="020B0503020204020204" charset="-122"/>
+                <a:ea typeface="微软雅黑" panose="020B0503020204020204" charset="-122"/>
+                <a:cs typeface="微软雅黑" panose="020B0503020204020204" charset="-122"/>
               </a:rPr>
               <a:t>实时刷新</a:t>
             </a:r>
+            <a:endParaRPr sz="1100" b="1" i="0">
+              <a:solidFill>
+                <a:srgbClr val="BBD4EC"/>
+              </a:solidFill>
+              <a:latin typeface="微软雅黑" panose="020B0503020204020204" charset="-122"/>
+              <a:ea typeface="微软雅黑" panose="020B0503020204020204" charset="-122"/>
+              <a:cs typeface="微软雅黑" panose="020B0503020204020204" charset="-122"/>
+            </a:endParaRPr>
           </a:p>
           <a:p>
             <a:pPr algn="l">
@@ -12407,12 +13948,20 @@
                 <a:solidFill>
                   <a:srgbClr val="7E9EC4"/>
                 </a:solidFill>
-                <a:latin typeface="微软雅黑"/>
-                <a:ea typeface="微软雅黑"/>
-                <a:cs typeface="微软雅黑"/>
+                <a:latin typeface="微软雅黑" panose="020B0503020204020204" charset="-122"/>
+                <a:ea typeface="微软雅黑" panose="020B0503020204020204" charset="-122"/>
+                <a:cs typeface="微软雅黑" panose="020B0503020204020204" charset="-122"/>
               </a:rPr>
               <a:t>有新数据就推送信号，大屏 1~3 秒内更新</a:t>
             </a:r>
+            <a:endParaRPr sz="950" b="0" i="0">
+              <a:solidFill>
+                <a:srgbClr val="7E9EC4"/>
+              </a:solidFill>
+              <a:latin typeface="微软雅黑" panose="020B0503020204020204" charset="-122"/>
+              <a:ea typeface="微软雅黑" panose="020B0503020204020204" charset="-122"/>
+              <a:cs typeface="微软雅黑" panose="020B0503020204020204" charset="-122"/>
+            </a:endParaRPr>
           </a:p>
         </p:txBody>
       </p:sp>
@@ -12481,7 +14030,7 @@
           <a:noFill/>
         </p:spPr>
         <p:txBody>
-          <a:bodyPr wrap="square" anchor="t" lIns="0" rIns="0" tIns="0" bIns="0">
+          <a:bodyPr wrap="square" lIns="0" tIns="0" rIns="0" bIns="0" anchor="t">
             <a:spAutoFit/>
           </a:bodyPr>
           <a:lstStyle/>
@@ -12496,12 +14045,20 @@
                 <a:solidFill>
                   <a:srgbClr val="BBD4EC"/>
                 </a:solidFill>
-                <a:latin typeface="微软雅黑"/>
-                <a:ea typeface="微软雅黑"/>
-                <a:cs typeface="微软雅黑"/>
+                <a:latin typeface="微软雅黑" panose="020B0503020204020204" charset="-122"/>
+                <a:ea typeface="微软雅黑" panose="020B0503020204020204" charset="-122"/>
+                <a:cs typeface="微软雅黑" panose="020B0503020204020204" charset="-122"/>
               </a:rPr>
               <a:t>兜底轮询</a:t>
             </a:r>
+            <a:endParaRPr sz="1100" b="1" i="0">
+              <a:solidFill>
+                <a:srgbClr val="BBD4EC"/>
+              </a:solidFill>
+              <a:latin typeface="微软雅黑" panose="020B0503020204020204" charset="-122"/>
+              <a:ea typeface="微软雅黑" panose="020B0503020204020204" charset="-122"/>
+              <a:cs typeface="微软雅黑" panose="020B0503020204020204" charset="-122"/>
+            </a:endParaRPr>
           </a:p>
           <a:p>
             <a:pPr algn="l">
@@ -12514,12 +14071,20 @@
                 <a:solidFill>
                   <a:srgbClr val="7E9EC4"/>
                 </a:solidFill>
-                <a:latin typeface="微软雅黑"/>
-                <a:ea typeface="微软雅黑"/>
-                <a:cs typeface="微软雅黑"/>
+                <a:latin typeface="微软雅黑" panose="020B0503020204020204" charset="-122"/>
+                <a:ea typeface="微软雅黑" panose="020B0503020204020204" charset="-122"/>
+                <a:cs typeface="微软雅黑" panose="020B0503020204020204" charset="-122"/>
               </a:rPr>
               <a:t>推送断了也不会卡死，按周期自己拉一次</a:t>
             </a:r>
+            <a:endParaRPr sz="950" b="0" i="0">
+              <a:solidFill>
+                <a:srgbClr val="7E9EC4"/>
+              </a:solidFill>
+              <a:latin typeface="微软雅黑" panose="020B0503020204020204" charset="-122"/>
+              <a:ea typeface="微软雅黑" panose="020B0503020204020204" charset="-122"/>
+              <a:cs typeface="微软雅黑" panose="020B0503020204020204" charset="-122"/>
+            </a:endParaRPr>
           </a:p>
         </p:txBody>
       </p:sp>
@@ -12588,7 +14153,7 @@
           <a:noFill/>
         </p:spPr>
         <p:txBody>
-          <a:bodyPr wrap="square" anchor="t" lIns="0" rIns="0" tIns="0" bIns="0">
+          <a:bodyPr wrap="square" lIns="0" tIns="0" rIns="0" bIns="0" anchor="t">
             <a:spAutoFit/>
           </a:bodyPr>
           <a:lstStyle/>
@@ -12603,12 +14168,20 @@
                 <a:solidFill>
                   <a:srgbClr val="BBD4EC"/>
                 </a:solidFill>
-                <a:latin typeface="微软雅黑"/>
-                <a:ea typeface="微软雅黑"/>
-                <a:cs typeface="微软雅黑"/>
+                <a:latin typeface="微软雅黑" panose="020B0503020204020204" charset="-122"/>
+                <a:ea typeface="微软雅黑" panose="020B0503020204020204" charset="-122"/>
+                <a:cs typeface="微软雅黑" panose="020B0503020204020204" charset="-122"/>
               </a:rPr>
               <a:t>月度归集</a:t>
             </a:r>
+            <a:endParaRPr sz="1100" b="1" i="0">
+              <a:solidFill>
+                <a:srgbClr val="BBD4EC"/>
+              </a:solidFill>
+              <a:latin typeface="微软雅黑" panose="020B0503020204020204" charset="-122"/>
+              <a:ea typeface="微软雅黑" panose="020B0503020204020204" charset="-122"/>
+              <a:cs typeface="微软雅黑" panose="020B0503020204020204" charset="-122"/>
+            </a:endParaRPr>
           </a:p>
           <a:p>
             <a:pPr algn="l">
@@ -12621,12 +14194,20 @@
                 <a:solidFill>
                   <a:srgbClr val="7E9EC4"/>
                 </a:solidFill>
-                <a:latin typeface="微软雅黑"/>
-                <a:ea typeface="微软雅黑"/>
-                <a:cs typeface="微软雅黑"/>
+                <a:latin typeface="微软雅黑" panose="020B0503020204020204" charset="-122"/>
+                <a:ea typeface="微软雅黑" panose="020B0503020204020204" charset="-122"/>
+                <a:cs typeface="微软雅黑" panose="020B0503020204020204" charset="-122"/>
               </a:rPr>
               <a:t>柱状图按「年-月」分组，跨年也不会乱</a:t>
             </a:r>
+            <a:endParaRPr sz="950" b="0" i="0">
+              <a:solidFill>
+                <a:srgbClr val="7E9EC4"/>
+              </a:solidFill>
+              <a:latin typeface="微软雅黑" panose="020B0503020204020204" charset="-122"/>
+              <a:ea typeface="微软雅黑" panose="020B0503020204020204" charset="-122"/>
+              <a:cs typeface="微软雅黑" panose="020B0503020204020204" charset="-122"/>
+            </a:endParaRPr>
           </a:p>
         </p:txBody>
       </p:sp>
@@ -12639,7 +14220,7 @@
 </file>
 
 <file path=ppt/slides/slide8.xml><?xml version="1.0" encoding="utf-8"?>
-<p:sld xmlns:a="http://schemas.openxmlformats.org/drawingml/2006/main" xmlns:p="http://schemas.openxmlformats.org/presentationml/2006/main" xmlns:r="http://schemas.openxmlformats.org/officeDocument/2006/relationships">
+<p:sld xmlns:a="http://schemas.openxmlformats.org/drawingml/2006/main" xmlns:r="http://schemas.openxmlformats.org/officeDocument/2006/relationships" xmlns:p="http://schemas.openxmlformats.org/presentationml/2006/main">
   <p:cSld>
     <p:spTree>
       <p:nvGrpSpPr>
@@ -12709,7 +14290,7 @@
           <a:noFill/>
         </p:spPr>
         <p:txBody>
-          <a:bodyPr wrap="square" anchor="t" lIns="0" rIns="0" tIns="0" bIns="0">
+          <a:bodyPr wrap="square" lIns="0" tIns="0" rIns="0" bIns="0" anchor="t">
             <a:spAutoFit/>
           </a:bodyPr>
           <a:lstStyle/>
@@ -12720,12 +14301,20 @@
                 <a:solidFill>
                   <a:srgbClr val="7FE3FF"/>
                 </a:solidFill>
-                <a:latin typeface="微软雅黑"/>
-                <a:ea typeface="微软雅黑"/>
-                <a:cs typeface="微软雅黑"/>
+                <a:latin typeface="微软雅黑" panose="020B0503020204020204" charset="-122"/>
+                <a:ea typeface="微软雅黑" panose="020B0503020204020204" charset="-122"/>
+                <a:cs typeface="微软雅黑" panose="020B0503020204020204" charset="-122"/>
               </a:rPr>
               <a:t>02 · 怎么做的</a:t>
             </a:r>
+            <a:endParaRPr sz="1150" b="1" i="0">
+              <a:solidFill>
+                <a:srgbClr val="7FE3FF"/>
+              </a:solidFill>
+              <a:latin typeface="微软雅黑" panose="020B0503020204020204" charset="-122"/>
+              <a:ea typeface="微软雅黑" panose="020B0503020204020204" charset="-122"/>
+              <a:cs typeface="微软雅黑" panose="020B0503020204020204" charset="-122"/>
+            </a:endParaRPr>
           </a:p>
         </p:txBody>
       </p:sp>
@@ -12746,7 +14335,7 @@
           <a:noFill/>
         </p:spPr>
         <p:txBody>
-          <a:bodyPr wrap="square" anchor="t" lIns="0" rIns="0" tIns="0" bIns="0">
+          <a:bodyPr wrap="square" lIns="0" tIns="0" rIns="0" bIns="0" anchor="t">
             <a:spAutoFit/>
           </a:bodyPr>
           <a:lstStyle/>
@@ -12757,12 +14346,20 @@
                 <a:solidFill>
                   <a:srgbClr val="ECF7FF"/>
                 </a:solidFill>
-                <a:latin typeface="微软雅黑"/>
-                <a:ea typeface="微软雅黑"/>
-                <a:cs typeface="微软雅黑"/>
+                <a:latin typeface="微软雅黑" panose="020B0503020204020204" charset="-122"/>
+                <a:ea typeface="微软雅黑" panose="020B0503020204020204" charset="-122"/>
+                <a:cs typeface="微软雅黑" panose="020B0503020204020204" charset="-122"/>
               </a:rPr>
               <a:t>系统分四层，各管各的</a:t>
             </a:r>
+            <a:endParaRPr sz="2700" b="1" i="0">
+              <a:solidFill>
+                <a:srgbClr val="ECF7FF"/>
+              </a:solidFill>
+              <a:latin typeface="微软雅黑" panose="020B0503020204020204" charset="-122"/>
+              <a:ea typeface="微软雅黑" panose="020B0503020204020204" charset="-122"/>
+              <a:cs typeface="微软雅黑" panose="020B0503020204020204" charset="-122"/>
+            </a:endParaRPr>
           </a:p>
         </p:txBody>
       </p:sp>
@@ -12783,7 +14380,7 @@
           <a:noFill/>
         </p:spPr>
         <p:txBody>
-          <a:bodyPr wrap="square" anchor="t" lIns="0" rIns="0" tIns="0" bIns="0">
+          <a:bodyPr wrap="square" lIns="0" tIns="0" rIns="0" bIns="0" anchor="t">
             <a:spAutoFit/>
           </a:bodyPr>
           <a:lstStyle/>
@@ -12794,12 +14391,20 @@
                 <a:solidFill>
                   <a:srgbClr val="7E9EC4"/>
                 </a:solidFill>
-                <a:latin typeface="微软雅黑"/>
-                <a:ea typeface="微软雅黑"/>
-                <a:cs typeface="微软雅黑"/>
+                <a:latin typeface="微软雅黑" panose="020B0503020204020204" charset="-122"/>
+                <a:ea typeface="微软雅黑" panose="020B0503020204020204" charset="-122"/>
+                <a:cs typeface="微软雅黑" panose="020B0503020204020204" charset="-122"/>
               </a:rPr>
               <a:t>急救绿道 · 8 / 13</a:t>
             </a:r>
+            <a:endParaRPr sz="1000" b="0" i="0">
+              <a:solidFill>
+                <a:srgbClr val="7E9EC4"/>
+              </a:solidFill>
+              <a:latin typeface="微软雅黑" panose="020B0503020204020204" charset="-122"/>
+              <a:ea typeface="微软雅黑" panose="020B0503020204020204" charset="-122"/>
+              <a:cs typeface="微软雅黑" panose="020B0503020204020204" charset="-122"/>
+            </a:endParaRPr>
           </a:p>
         </p:txBody>
       </p:sp>
@@ -12868,7 +14473,7 @@
           <a:noFill/>
         </p:spPr>
         <p:txBody>
-          <a:bodyPr wrap="square" anchor="t" lIns="0" rIns="0" tIns="0" bIns="0">
+          <a:bodyPr wrap="square" lIns="0" tIns="0" rIns="0" bIns="0" anchor="t">
             <a:spAutoFit/>
           </a:bodyPr>
           <a:lstStyle/>
@@ -12879,12 +14484,20 @@
                 <a:solidFill>
                   <a:srgbClr val="ECF7FF"/>
                 </a:solidFill>
-                <a:latin typeface="微软雅黑"/>
-                <a:ea typeface="微软雅黑"/>
-                <a:cs typeface="微软雅黑"/>
+                <a:latin typeface="微软雅黑" panose="020B0503020204020204" charset="-122"/>
+                <a:ea typeface="微软雅黑" panose="020B0503020204020204" charset="-122"/>
+                <a:cs typeface="微软雅黑" panose="020B0503020204020204" charset="-122"/>
               </a:rPr>
               <a:t>使用者</a:t>
             </a:r>
+            <a:endParaRPr sz="1200" b="1" i="0">
+              <a:solidFill>
+                <a:srgbClr val="ECF7FF"/>
+              </a:solidFill>
+              <a:latin typeface="微软雅黑" panose="020B0503020204020204" charset="-122"/>
+              <a:ea typeface="微软雅黑" panose="020B0503020204020204" charset="-122"/>
+              <a:cs typeface="微软雅黑" panose="020B0503020204020204" charset="-122"/>
+            </a:endParaRPr>
           </a:p>
         </p:txBody>
       </p:sp>
@@ -12953,7 +14566,7 @@
           <a:noFill/>
         </p:spPr>
         <p:txBody>
-          <a:bodyPr wrap="square" anchor="t" lIns="0" rIns="0" tIns="0" bIns="0">
+          <a:bodyPr wrap="square" lIns="0" tIns="0" rIns="0" bIns="0" anchor="t">
             <a:spAutoFit/>
           </a:bodyPr>
           <a:lstStyle/>
@@ -12968,12 +14581,20 @@
                 <a:solidFill>
                   <a:srgbClr val="BBD4EC"/>
                 </a:solidFill>
-                <a:latin typeface="微软雅黑"/>
-                <a:ea typeface="微软雅黑"/>
-                <a:cs typeface="微软雅黑"/>
+                <a:latin typeface="微软雅黑" panose="020B0503020204020204" charset="-122"/>
+                <a:ea typeface="微软雅黑" panose="020B0503020204020204" charset="-122"/>
+                <a:cs typeface="微软雅黑" panose="020B0503020204020204" charset="-122"/>
               </a:rPr>
               <a:t>👩‍⚕️</a:t>
             </a:r>
+            <a:endParaRPr sz="1500" b="0" i="0">
+              <a:solidFill>
+                <a:srgbClr val="BBD4EC"/>
+              </a:solidFill>
+              <a:latin typeface="微软雅黑" panose="020B0503020204020204" charset="-122"/>
+              <a:ea typeface="微软雅黑" panose="020B0503020204020204" charset="-122"/>
+              <a:cs typeface="微软雅黑" panose="020B0503020204020204" charset="-122"/>
+            </a:endParaRPr>
           </a:p>
           <a:p>
             <a:pPr algn="ctr">
@@ -12986,12 +14607,20 @@
                 <a:solidFill>
                   <a:srgbClr val="BBD4EC"/>
                 </a:solidFill>
-                <a:latin typeface="微软雅黑"/>
-                <a:ea typeface="微软雅黑"/>
-                <a:cs typeface="微软雅黑"/>
+                <a:latin typeface="微软雅黑" panose="020B0503020204020204" charset="-122"/>
+                <a:ea typeface="微软雅黑" panose="020B0503020204020204" charset="-122"/>
+                <a:cs typeface="微软雅黑" panose="020B0503020204020204" charset="-122"/>
               </a:rPr>
               <a:t>医生 / 护士</a:t>
             </a:r>
+            <a:endParaRPr sz="1250" b="1" i="0">
+              <a:solidFill>
+                <a:srgbClr val="BBD4EC"/>
+              </a:solidFill>
+              <a:latin typeface="微软雅黑" panose="020B0503020204020204" charset="-122"/>
+              <a:ea typeface="微软雅黑" panose="020B0503020204020204" charset="-122"/>
+              <a:cs typeface="微软雅黑" panose="020B0503020204020204" charset="-122"/>
+            </a:endParaRPr>
           </a:p>
           <a:p>
             <a:pPr algn="ctr">
@@ -13004,12 +14633,20 @@
                 <a:solidFill>
                   <a:srgbClr val="7E9EC4"/>
                 </a:solidFill>
-                <a:latin typeface="微软雅黑"/>
-                <a:ea typeface="微软雅黑"/>
-                <a:cs typeface="微软雅黑"/>
+                <a:latin typeface="微软雅黑" panose="020B0503020204020204" charset="-122"/>
+                <a:ea typeface="微软雅黑" panose="020B0503020204020204" charset="-122"/>
+                <a:cs typeface="微软雅黑" panose="020B0503020204020204" charset="-122"/>
               </a:rPr>
               <a:t>录入与跟进</a:t>
             </a:r>
+            <a:endParaRPr sz="950" b="0" i="0">
+              <a:solidFill>
+                <a:srgbClr val="7E9EC4"/>
+              </a:solidFill>
+              <a:latin typeface="微软雅黑" panose="020B0503020204020204" charset="-122"/>
+              <a:ea typeface="微软雅黑" panose="020B0503020204020204" charset="-122"/>
+              <a:cs typeface="微软雅黑" panose="020B0503020204020204" charset="-122"/>
+            </a:endParaRPr>
           </a:p>
         </p:txBody>
       </p:sp>
@@ -13078,7 +14715,7 @@
           <a:noFill/>
         </p:spPr>
         <p:txBody>
-          <a:bodyPr wrap="square" anchor="t" lIns="0" rIns="0" tIns="0" bIns="0">
+          <a:bodyPr wrap="square" lIns="0" tIns="0" rIns="0" bIns="0" anchor="t">
             <a:spAutoFit/>
           </a:bodyPr>
           <a:lstStyle/>
@@ -13093,12 +14730,20 @@
                 <a:solidFill>
                   <a:srgbClr val="BBD4EC"/>
                 </a:solidFill>
-                <a:latin typeface="微软雅黑"/>
-                <a:ea typeface="微软雅黑"/>
-                <a:cs typeface="微软雅黑"/>
+                <a:latin typeface="微软雅黑" panose="020B0503020204020204" charset="-122"/>
+                <a:ea typeface="微软雅黑" panose="020B0503020204020204" charset="-122"/>
+                <a:cs typeface="微软雅黑" panose="020B0503020204020204" charset="-122"/>
               </a:rPr>
               <a:t>📋</a:t>
             </a:r>
+            <a:endParaRPr sz="1500" b="0" i="0">
+              <a:solidFill>
+                <a:srgbClr val="BBD4EC"/>
+              </a:solidFill>
+              <a:latin typeface="微软雅黑" panose="020B0503020204020204" charset="-122"/>
+              <a:ea typeface="微软雅黑" panose="020B0503020204020204" charset="-122"/>
+              <a:cs typeface="微软雅黑" panose="020B0503020204020204" charset="-122"/>
+            </a:endParaRPr>
           </a:p>
           <a:p>
             <a:pPr algn="ctr">
@@ -13111,12 +14756,20 @@
                 <a:solidFill>
                   <a:srgbClr val="BBD4EC"/>
                 </a:solidFill>
-                <a:latin typeface="微软雅黑"/>
-                <a:ea typeface="微软雅黑"/>
-                <a:cs typeface="微软雅黑"/>
+                <a:latin typeface="微软雅黑" panose="020B0503020204020204" charset="-122"/>
+                <a:ea typeface="微软雅黑" panose="020B0503020204020204" charset="-122"/>
+                <a:cs typeface="微软雅黑" panose="020B0503020204020204" charset="-122"/>
               </a:rPr>
               <a:t>质控 / 领导</a:t>
             </a:r>
+            <a:endParaRPr sz="1250" b="1" i="0">
+              <a:solidFill>
+                <a:srgbClr val="BBD4EC"/>
+              </a:solidFill>
+              <a:latin typeface="微软雅黑" panose="020B0503020204020204" charset="-122"/>
+              <a:ea typeface="微软雅黑" panose="020B0503020204020204" charset="-122"/>
+              <a:cs typeface="微软雅黑" panose="020B0503020204020204" charset="-122"/>
+            </a:endParaRPr>
           </a:p>
           <a:p>
             <a:pPr algn="ctr">
@@ -13129,12 +14782,20 @@
                 <a:solidFill>
                   <a:srgbClr val="7E9EC4"/>
                 </a:solidFill>
-                <a:latin typeface="微软雅黑"/>
-                <a:ea typeface="微软雅黑"/>
-                <a:cs typeface="微软雅黑"/>
+                <a:latin typeface="微软雅黑" panose="020B0503020204020204" charset="-122"/>
+                <a:ea typeface="微软雅黑" panose="020B0503020204020204" charset="-122"/>
+                <a:cs typeface="微软雅黑" panose="020B0503020204020204" charset="-122"/>
               </a:rPr>
               <a:t>看报表与指标</a:t>
             </a:r>
+            <a:endParaRPr sz="950" b="0" i="0">
+              <a:solidFill>
+                <a:srgbClr val="7E9EC4"/>
+              </a:solidFill>
+              <a:latin typeface="微软雅黑" panose="020B0503020204020204" charset="-122"/>
+              <a:ea typeface="微软雅黑" panose="020B0503020204020204" charset="-122"/>
+              <a:cs typeface="微软雅黑" panose="020B0503020204020204" charset="-122"/>
+            </a:endParaRPr>
           </a:p>
         </p:txBody>
       </p:sp>
@@ -13203,7 +14864,7 @@
           <a:noFill/>
         </p:spPr>
         <p:txBody>
-          <a:bodyPr wrap="square" anchor="t" lIns="0" rIns="0" tIns="0" bIns="0">
+          <a:bodyPr wrap="square" lIns="0" tIns="0" rIns="0" bIns="0" anchor="t">
             <a:spAutoFit/>
           </a:bodyPr>
           <a:lstStyle/>
@@ -13218,12 +14879,20 @@
                 <a:solidFill>
                   <a:srgbClr val="BBD4EC"/>
                 </a:solidFill>
-                <a:latin typeface="微软雅黑"/>
-                <a:ea typeface="微软雅黑"/>
-                <a:cs typeface="微软雅黑"/>
+                <a:latin typeface="微软雅黑" panose="020B0503020204020204" charset="-122"/>
+                <a:ea typeface="微软雅黑" panose="020B0503020204020204" charset="-122"/>
+                <a:cs typeface="微软雅黑" panose="020B0503020204020204" charset="-122"/>
               </a:rPr>
               <a:t>📺</a:t>
             </a:r>
+            <a:endParaRPr sz="1500" b="0" i="0">
+              <a:solidFill>
+                <a:srgbClr val="BBD4EC"/>
+              </a:solidFill>
+              <a:latin typeface="微软雅黑" panose="020B0503020204020204" charset="-122"/>
+              <a:ea typeface="微软雅黑" panose="020B0503020204020204" charset="-122"/>
+              <a:cs typeface="微软雅黑" panose="020B0503020204020204" charset="-122"/>
+            </a:endParaRPr>
           </a:p>
           <a:p>
             <a:pPr algn="ctr">
@@ -13236,12 +14905,20 @@
                 <a:solidFill>
                   <a:srgbClr val="BBD4EC"/>
                 </a:solidFill>
-                <a:latin typeface="微软雅黑"/>
-                <a:ea typeface="微软雅黑"/>
-                <a:cs typeface="微软雅黑"/>
+                <a:latin typeface="微软雅黑" panose="020B0503020204020204" charset="-122"/>
+                <a:ea typeface="微软雅黑" panose="020B0503020204020204" charset="-122"/>
+                <a:cs typeface="微软雅黑" panose="020B0503020204020204" charset="-122"/>
               </a:rPr>
               <a:t>大屏终端</a:t>
             </a:r>
+            <a:endParaRPr sz="1250" b="1" i="0">
+              <a:solidFill>
+                <a:srgbClr val="BBD4EC"/>
+              </a:solidFill>
+              <a:latin typeface="微软雅黑" panose="020B0503020204020204" charset="-122"/>
+              <a:ea typeface="微软雅黑" panose="020B0503020204020204" charset="-122"/>
+              <a:cs typeface="微软雅黑" panose="020B0503020204020204" charset="-122"/>
+            </a:endParaRPr>
           </a:p>
           <a:p>
             <a:pPr algn="ctr">
@@ -13254,12 +14931,20 @@
                 <a:solidFill>
                   <a:srgbClr val="7E9EC4"/>
                 </a:solidFill>
-                <a:latin typeface="微软雅黑"/>
-                <a:ea typeface="微软雅黑"/>
-                <a:cs typeface="微软雅黑"/>
+                <a:latin typeface="微软雅黑" panose="020B0503020204020204" charset="-122"/>
+                <a:ea typeface="微软雅黑" panose="020B0503020204020204" charset="-122"/>
+                <a:cs typeface="微软雅黑" panose="020B0503020204020204" charset="-122"/>
               </a:rPr>
               <a:t>只读展示</a:t>
             </a:r>
+            <a:endParaRPr sz="950" b="0" i="0">
+              <a:solidFill>
+                <a:srgbClr val="7E9EC4"/>
+              </a:solidFill>
+              <a:latin typeface="微软雅黑" panose="020B0503020204020204" charset="-122"/>
+              <a:ea typeface="微软雅黑" panose="020B0503020204020204" charset="-122"/>
+              <a:cs typeface="微软雅黑" panose="020B0503020204020204" charset="-122"/>
+            </a:endParaRPr>
           </a:p>
         </p:txBody>
       </p:sp>
@@ -13328,7 +15013,7 @@
           <a:noFill/>
         </p:spPr>
         <p:txBody>
-          <a:bodyPr wrap="square" anchor="t" lIns="0" rIns="0" tIns="0" bIns="0">
+          <a:bodyPr wrap="square" lIns="0" tIns="0" rIns="0" bIns="0" anchor="t">
             <a:spAutoFit/>
           </a:bodyPr>
           <a:lstStyle/>
@@ -13339,12 +15024,20 @@
                 <a:solidFill>
                   <a:srgbClr val="ECF7FF"/>
                 </a:solidFill>
-                <a:latin typeface="微软雅黑"/>
-                <a:ea typeface="微软雅黑"/>
-                <a:cs typeface="微软雅黑"/>
+                <a:latin typeface="微软雅黑" panose="020B0503020204020204" charset="-122"/>
+                <a:ea typeface="微软雅黑" panose="020B0503020204020204" charset="-122"/>
+                <a:cs typeface="微软雅黑" panose="020B0503020204020204" charset="-122"/>
               </a:rPr>
               <a:t>前端</a:t>
             </a:r>
+            <a:endParaRPr sz="1200" b="1" i="0">
+              <a:solidFill>
+                <a:srgbClr val="ECF7FF"/>
+              </a:solidFill>
+              <a:latin typeface="微软雅黑" panose="020B0503020204020204" charset="-122"/>
+              <a:ea typeface="微软雅黑" panose="020B0503020204020204" charset="-122"/>
+              <a:cs typeface="微软雅黑" panose="020B0503020204020204" charset="-122"/>
+            </a:endParaRPr>
           </a:p>
         </p:txBody>
       </p:sp>
@@ -13448,7 +15141,7 @@
         </p:nvSpPr>
         <p:spPr>
           <a:xfrm>
-            <a:off x="1911095" y="2587752"/>
+            <a:off x="1911095" y="2505202"/>
             <a:ext cx="4591659" cy="475488"/>
           </a:xfrm>
           <a:prstGeom prst="rect">
@@ -13457,7 +15150,7 @@
           <a:noFill/>
         </p:spPr>
         <p:txBody>
-          <a:bodyPr wrap="square" anchor="t" lIns="0" rIns="0" tIns="0" bIns="0">
+          <a:bodyPr wrap="square" lIns="0" tIns="0" rIns="0" bIns="0" anchor="t">
             <a:spAutoFit/>
           </a:bodyPr>
           <a:lstStyle/>
@@ -13472,12 +15165,20 @@
                 <a:solidFill>
                   <a:srgbClr val="BBD4EC"/>
                 </a:solidFill>
-                <a:latin typeface="微软雅黑"/>
-                <a:ea typeface="微软雅黑"/>
-                <a:cs typeface="微软雅黑"/>
+                <a:latin typeface="微软雅黑" panose="020B0503020204020204" charset="-122"/>
+                <a:ea typeface="微软雅黑" panose="020B0503020204020204" charset="-122"/>
+                <a:cs typeface="微软雅黑" panose="020B0503020204020204" charset="-122"/>
               </a:rPr>
               <a:t>🖥️</a:t>
             </a:r>
+            <a:endParaRPr sz="1500" b="0" i="0">
+              <a:solidFill>
+                <a:srgbClr val="BBD4EC"/>
+              </a:solidFill>
+              <a:latin typeface="微软雅黑" panose="020B0503020204020204" charset="-122"/>
+              <a:ea typeface="微软雅黑" panose="020B0503020204020204" charset="-122"/>
+              <a:cs typeface="微软雅黑" panose="020B0503020204020204" charset="-122"/>
+            </a:endParaRPr>
           </a:p>
           <a:p>
             <a:pPr algn="ctr">
@@ -13490,12 +15191,20 @@
                 <a:solidFill>
                   <a:srgbClr val="BBD4EC"/>
                 </a:solidFill>
-                <a:latin typeface="微软雅黑"/>
-                <a:ea typeface="微软雅黑"/>
-                <a:cs typeface="微软雅黑"/>
+                <a:latin typeface="微软雅黑" panose="020B0503020204020204" charset="-122"/>
+                <a:ea typeface="微软雅黑" panose="020B0503020204020204" charset="-122"/>
+                <a:cs typeface="微软雅黑" panose="020B0503020204020204" charset="-122"/>
               </a:rPr>
               <a:t>大屏端</a:t>
             </a:r>
+            <a:endParaRPr sz="1250" b="1" i="0">
+              <a:solidFill>
+                <a:srgbClr val="BBD4EC"/>
+              </a:solidFill>
+              <a:latin typeface="微软雅黑" panose="020B0503020204020204" charset="-122"/>
+              <a:ea typeface="微软雅黑" panose="020B0503020204020204" charset="-122"/>
+              <a:cs typeface="微软雅黑" panose="020B0503020204020204" charset="-122"/>
+            </a:endParaRPr>
           </a:p>
           <a:p>
             <a:pPr algn="ctr">
@@ -13508,12 +15217,20 @@
                 <a:solidFill>
                   <a:srgbClr val="7E9EC4"/>
                 </a:solidFill>
-                <a:latin typeface="微软雅黑"/>
-                <a:ea typeface="微软雅黑"/>
-                <a:cs typeface="微软雅黑"/>
+                <a:latin typeface="微软雅黑" panose="020B0503020204020204" charset="-122"/>
+                <a:ea typeface="微软雅黑" panose="020B0503020204020204" charset="-122"/>
+                <a:cs typeface="微软雅黑" panose="020B0503020204020204" charset="-122"/>
               </a:rPr>
               <a:t>Vue 3 + ECharts，手写 HUD 界面</a:t>
             </a:r>
+            <a:endParaRPr sz="950" b="0" i="0">
+              <a:solidFill>
+                <a:srgbClr val="7E9EC4"/>
+              </a:solidFill>
+              <a:latin typeface="微软雅黑" panose="020B0503020204020204" charset="-122"/>
+              <a:ea typeface="微软雅黑" panose="020B0503020204020204" charset="-122"/>
+              <a:cs typeface="微软雅黑" panose="020B0503020204020204" charset="-122"/>
+            </a:endParaRPr>
           </a:p>
         </p:txBody>
       </p:sp>
@@ -13617,7 +15334,7 @@
         </p:nvSpPr>
         <p:spPr>
           <a:xfrm>
-            <a:off x="6905091" y="2587752"/>
+            <a:off x="6905091" y="2505202"/>
             <a:ext cx="4591659" cy="475488"/>
           </a:xfrm>
           <a:prstGeom prst="rect">
@@ -13626,7 +15343,7 @@
           <a:noFill/>
         </p:spPr>
         <p:txBody>
-          <a:bodyPr wrap="square" anchor="t" lIns="0" rIns="0" tIns="0" bIns="0">
+          <a:bodyPr wrap="square" lIns="0" tIns="0" rIns="0" bIns="0" anchor="t">
             <a:spAutoFit/>
           </a:bodyPr>
           <a:lstStyle/>
@@ -13641,12 +15358,20 @@
                 <a:solidFill>
                   <a:srgbClr val="BBD4EC"/>
                 </a:solidFill>
-                <a:latin typeface="微软雅黑"/>
-                <a:ea typeface="微软雅黑"/>
-                <a:cs typeface="微软雅黑"/>
+                <a:latin typeface="微软雅黑" panose="020B0503020204020204" charset="-122"/>
+                <a:ea typeface="微软雅黑" panose="020B0503020204020204" charset="-122"/>
+                <a:cs typeface="微软雅黑" panose="020B0503020204020204" charset="-122"/>
               </a:rPr>
               <a:t>🗂️</a:t>
             </a:r>
+            <a:endParaRPr sz="1500" b="0" i="0">
+              <a:solidFill>
+                <a:srgbClr val="BBD4EC"/>
+              </a:solidFill>
+              <a:latin typeface="微软雅黑" panose="020B0503020204020204" charset="-122"/>
+              <a:ea typeface="微软雅黑" panose="020B0503020204020204" charset="-122"/>
+              <a:cs typeface="微软雅黑" panose="020B0503020204020204" charset="-122"/>
+            </a:endParaRPr>
           </a:p>
           <a:p>
             <a:pPr algn="ctr">
@@ -13659,12 +15384,20 @@
                 <a:solidFill>
                   <a:srgbClr val="BBD4EC"/>
                 </a:solidFill>
-                <a:latin typeface="微软雅黑"/>
-                <a:ea typeface="微软雅黑"/>
-                <a:cs typeface="微软雅黑"/>
+                <a:latin typeface="微软雅黑" panose="020B0503020204020204" charset="-122"/>
+                <a:ea typeface="微软雅黑" panose="020B0503020204020204" charset="-122"/>
+                <a:cs typeface="微软雅黑" panose="020B0503020204020204" charset="-122"/>
               </a:rPr>
               <a:t>后台端</a:t>
             </a:r>
+            <a:endParaRPr sz="1250" b="1" i="0">
+              <a:solidFill>
+                <a:srgbClr val="BBD4EC"/>
+              </a:solidFill>
+              <a:latin typeface="微软雅黑" panose="020B0503020204020204" charset="-122"/>
+              <a:ea typeface="微软雅黑" panose="020B0503020204020204" charset="-122"/>
+              <a:cs typeface="微软雅黑" panose="020B0503020204020204" charset="-122"/>
+            </a:endParaRPr>
           </a:p>
           <a:p>
             <a:pPr algn="ctr">
@@ -13677,12 +15410,20 @@
                 <a:solidFill>
                   <a:srgbClr val="7E9EC4"/>
                 </a:solidFill>
-                <a:latin typeface="微软雅黑"/>
-                <a:ea typeface="微软雅黑"/>
-                <a:cs typeface="微软雅黑"/>
+                <a:latin typeface="微软雅黑" panose="020B0503020204020204" charset="-122"/>
+                <a:ea typeface="微软雅黑" panose="020B0503020204020204" charset="-122"/>
+                <a:cs typeface="微软雅黑" panose="020B0503020204020204" charset="-122"/>
               </a:rPr>
               <a:t>Vue 3 + Element Plus，13 个页面</a:t>
             </a:r>
+            <a:endParaRPr sz="950" b="0" i="0">
+              <a:solidFill>
+                <a:srgbClr val="7E9EC4"/>
+              </a:solidFill>
+              <a:latin typeface="微软雅黑" panose="020B0503020204020204" charset="-122"/>
+              <a:ea typeface="微软雅黑" panose="020B0503020204020204" charset="-122"/>
+              <a:cs typeface="微软雅黑" panose="020B0503020204020204" charset="-122"/>
+            </a:endParaRPr>
           </a:p>
         </p:txBody>
       </p:sp>
@@ -13751,7 +15492,7 @@
           <a:noFill/>
         </p:spPr>
         <p:txBody>
-          <a:bodyPr wrap="square" anchor="t" lIns="0" rIns="0" tIns="0" bIns="0">
+          <a:bodyPr wrap="square" lIns="0" tIns="0" rIns="0" bIns="0" anchor="t">
             <a:spAutoFit/>
           </a:bodyPr>
           <a:lstStyle/>
@@ -13762,12 +15503,20 @@
                 <a:solidFill>
                   <a:srgbClr val="ECF7FF"/>
                 </a:solidFill>
-                <a:latin typeface="微软雅黑"/>
-                <a:ea typeface="微软雅黑"/>
-                <a:cs typeface="微软雅黑"/>
+                <a:latin typeface="微软雅黑" panose="020B0503020204020204" charset="-122"/>
+                <a:ea typeface="微软雅黑" panose="020B0503020204020204" charset="-122"/>
+                <a:cs typeface="微软雅黑" panose="020B0503020204020204" charset="-122"/>
               </a:rPr>
               <a:t>后端</a:t>
             </a:r>
+            <a:endParaRPr sz="1200" b="1" i="0">
+              <a:solidFill>
+                <a:srgbClr val="ECF7FF"/>
+              </a:solidFill>
+              <a:latin typeface="微软雅黑" panose="020B0503020204020204" charset="-122"/>
+              <a:ea typeface="微软雅黑" panose="020B0503020204020204" charset="-122"/>
+              <a:cs typeface="微软雅黑" panose="020B0503020204020204" charset="-122"/>
+            </a:endParaRPr>
           </a:p>
         </p:txBody>
       </p:sp>
@@ -13880,7 +15629,7 @@
           <a:noFill/>
         </p:spPr>
         <p:txBody>
-          <a:bodyPr wrap="square" anchor="t" lIns="0" rIns="0" tIns="0" bIns="0">
+          <a:bodyPr wrap="square" lIns="0" tIns="0" rIns="0" bIns="0" anchor="t">
             <a:spAutoFit/>
           </a:bodyPr>
           <a:lstStyle/>
@@ -13895,12 +15644,20 @@
                 <a:solidFill>
                   <a:srgbClr val="BBD4EC"/>
                 </a:solidFill>
-                <a:latin typeface="微软雅黑"/>
-                <a:ea typeface="微软雅黑"/>
-                <a:cs typeface="微软雅黑"/>
+                <a:latin typeface="微软雅黑" panose="020B0503020204020204" charset="-122"/>
+                <a:ea typeface="微软雅黑" panose="020B0503020204020204" charset="-122"/>
+                <a:cs typeface="微软雅黑" panose="020B0503020204020204" charset="-122"/>
               </a:rPr>
               <a:t>登录与权限</a:t>
             </a:r>
+            <a:endParaRPr sz="1250" b="1" i="0">
+              <a:solidFill>
+                <a:srgbClr val="BBD4EC"/>
+              </a:solidFill>
+              <a:latin typeface="微软雅黑" panose="020B0503020204020204" charset="-122"/>
+              <a:ea typeface="微软雅黑" panose="020B0503020204020204" charset="-122"/>
+              <a:cs typeface="微软雅黑" panose="020B0503020204020204" charset="-122"/>
+            </a:endParaRPr>
           </a:p>
           <a:p>
             <a:pPr algn="ctr">
@@ -13913,12 +15670,20 @@
                 <a:solidFill>
                   <a:srgbClr val="7E9EC4"/>
                 </a:solidFill>
-                <a:latin typeface="微软雅黑"/>
-                <a:ea typeface="微软雅黑"/>
-                <a:cs typeface="微软雅黑"/>
+                <a:latin typeface="微软雅黑" panose="020B0503020204020204" charset="-122"/>
+                <a:ea typeface="微软雅黑" panose="020B0503020204020204" charset="-122"/>
+                <a:cs typeface="微软雅黑" panose="020B0503020204020204" charset="-122"/>
               </a:rPr>
               <a:t>7 种角色、登录令牌、操作留痕</a:t>
             </a:r>
+            <a:endParaRPr sz="950" b="0" i="0">
+              <a:solidFill>
+                <a:srgbClr val="7E9EC4"/>
+              </a:solidFill>
+              <a:latin typeface="微软雅黑" panose="020B0503020204020204" charset="-122"/>
+              <a:ea typeface="微软雅黑" panose="020B0503020204020204" charset="-122"/>
+              <a:cs typeface="微软雅黑" panose="020B0503020204020204" charset="-122"/>
+            </a:endParaRPr>
           </a:p>
         </p:txBody>
       </p:sp>
@@ -14031,7 +15796,7 @@
           <a:noFill/>
         </p:spPr>
         <p:txBody>
-          <a:bodyPr wrap="square" anchor="t" lIns="0" rIns="0" tIns="0" bIns="0">
+          <a:bodyPr wrap="square" lIns="0" tIns="0" rIns="0" bIns="0" anchor="t">
             <a:spAutoFit/>
           </a:bodyPr>
           <a:lstStyle/>
@@ -14046,12 +15811,20 @@
                 <a:solidFill>
                   <a:srgbClr val="BBD4EC"/>
                 </a:solidFill>
-                <a:latin typeface="微软雅黑"/>
-                <a:ea typeface="微软雅黑"/>
-                <a:cs typeface="微软雅黑"/>
+                <a:latin typeface="微软雅黑" panose="020B0503020204020204" charset="-122"/>
+                <a:ea typeface="微软雅黑" panose="020B0503020204020204" charset="-122"/>
+                <a:cs typeface="微软雅黑" panose="020B0503020204020204" charset="-122"/>
               </a:rPr>
               <a:t>业务接口</a:t>
             </a:r>
+            <a:endParaRPr sz="1250" b="1" i="0">
+              <a:solidFill>
+                <a:srgbClr val="BBD4EC"/>
+              </a:solidFill>
+              <a:latin typeface="微软雅黑" panose="020B0503020204020204" charset="-122"/>
+              <a:ea typeface="微软雅黑" panose="020B0503020204020204" charset="-122"/>
+              <a:cs typeface="微软雅黑" panose="020B0503020204020204" charset="-122"/>
+            </a:endParaRPr>
           </a:p>
           <a:p>
             <a:pPr algn="ctr">
@@ -14064,12 +15837,20 @@
                 <a:solidFill>
                   <a:srgbClr val="7E9EC4"/>
                 </a:solidFill>
-                <a:latin typeface="微软雅黑"/>
-                <a:ea typeface="微软雅黑"/>
-                <a:cs typeface="微软雅黑"/>
+                <a:latin typeface="微软雅黑" panose="020B0503020204020204" charset="-122"/>
+                <a:ea typeface="微软雅黑" panose="020B0503020204020204" charset="-122"/>
+                <a:cs typeface="微软雅黑" panose="020B0503020204020204" charset="-122"/>
               </a:rPr>
               <a:t>病例 / 患者 / 字典 / 组织 / 审计</a:t>
             </a:r>
+            <a:endParaRPr sz="950" b="0" i="0">
+              <a:solidFill>
+                <a:srgbClr val="7E9EC4"/>
+              </a:solidFill>
+              <a:latin typeface="微软雅黑" panose="020B0503020204020204" charset="-122"/>
+              <a:ea typeface="微软雅黑" panose="020B0503020204020204" charset="-122"/>
+              <a:cs typeface="微软雅黑" panose="020B0503020204020204" charset="-122"/>
+            </a:endParaRPr>
           </a:p>
         </p:txBody>
       </p:sp>
@@ -14182,7 +15963,7 @@
           <a:noFill/>
         </p:spPr>
         <p:txBody>
-          <a:bodyPr wrap="square" anchor="t" lIns="0" rIns="0" tIns="0" bIns="0">
+          <a:bodyPr wrap="square" lIns="0" tIns="0" rIns="0" bIns="0" anchor="t">
             <a:spAutoFit/>
           </a:bodyPr>
           <a:lstStyle/>
@@ -14197,12 +15978,20 @@
                 <a:solidFill>
                   <a:srgbClr val="BBD4EC"/>
                 </a:solidFill>
-                <a:latin typeface="微软雅黑"/>
-                <a:ea typeface="微软雅黑"/>
-                <a:cs typeface="微软雅黑"/>
+                <a:latin typeface="微软雅黑" panose="020B0503020204020204" charset="-122"/>
+                <a:ea typeface="微软雅黑" panose="020B0503020204020204" charset="-122"/>
+                <a:cs typeface="微软雅黑" panose="020B0503020204020204" charset="-122"/>
               </a:rPr>
               <a:t>统计与推送</a:t>
             </a:r>
+            <a:endParaRPr sz="1250" b="1" i="0">
+              <a:solidFill>
+                <a:srgbClr val="BBD4EC"/>
+              </a:solidFill>
+              <a:latin typeface="微软雅黑" panose="020B0503020204020204" charset="-122"/>
+              <a:ea typeface="微软雅黑" panose="020B0503020204020204" charset="-122"/>
+              <a:cs typeface="微软雅黑" panose="020B0503020204020204" charset="-122"/>
+            </a:endParaRPr>
           </a:p>
           <a:p>
             <a:pPr algn="ctr">
@@ -14215,12 +16004,20 @@
                 <a:solidFill>
                   <a:srgbClr val="7E9EC4"/>
                 </a:solidFill>
-                <a:latin typeface="微软雅黑"/>
-                <a:ea typeface="微软雅黑"/>
-                <a:cs typeface="微软雅黑"/>
+                <a:latin typeface="微软雅黑" panose="020B0503020204020204" charset="-122"/>
+                <a:ea typeface="微软雅黑" panose="020B0503020204020204" charset="-122"/>
+                <a:cs typeface="微软雅黑" panose="020B0503020204020204" charset="-122"/>
               </a:rPr>
               <a:t>报表聚合、质控指标、实时信号</a:t>
             </a:r>
+            <a:endParaRPr sz="950" b="0" i="0">
+              <a:solidFill>
+                <a:srgbClr val="7E9EC4"/>
+              </a:solidFill>
+              <a:latin typeface="微软雅黑" panose="020B0503020204020204" charset="-122"/>
+              <a:ea typeface="微软雅黑" panose="020B0503020204020204" charset="-122"/>
+              <a:cs typeface="微软雅黑" panose="020B0503020204020204" charset="-122"/>
+            </a:endParaRPr>
           </a:p>
         </p:txBody>
       </p:sp>
@@ -14289,7 +16086,7 @@
           <a:noFill/>
         </p:spPr>
         <p:txBody>
-          <a:bodyPr wrap="square" anchor="t" lIns="0" rIns="0" tIns="0" bIns="0">
+          <a:bodyPr wrap="square" lIns="0" tIns="0" rIns="0" bIns="0" anchor="t">
             <a:spAutoFit/>
           </a:bodyPr>
           <a:lstStyle/>
@@ -14300,12 +16097,20 @@
                 <a:solidFill>
                   <a:srgbClr val="ECF7FF"/>
                 </a:solidFill>
-                <a:latin typeface="微软雅黑"/>
-                <a:ea typeface="微软雅黑"/>
-                <a:cs typeface="微软雅黑"/>
+                <a:latin typeface="微软雅黑" panose="020B0503020204020204" charset="-122"/>
+                <a:ea typeface="微软雅黑" panose="020B0503020204020204" charset="-122"/>
+                <a:cs typeface="微软雅黑" panose="020B0503020204020204" charset="-122"/>
               </a:rPr>
               <a:t>数据</a:t>
             </a:r>
+            <a:endParaRPr sz="1200" b="1" i="0">
+              <a:solidFill>
+                <a:srgbClr val="ECF7FF"/>
+              </a:solidFill>
+              <a:latin typeface="微软雅黑" panose="020B0503020204020204" charset="-122"/>
+              <a:ea typeface="微软雅黑" panose="020B0503020204020204" charset="-122"/>
+              <a:cs typeface="微软雅黑" panose="020B0503020204020204" charset="-122"/>
+            </a:endParaRPr>
           </a:p>
         </p:txBody>
       </p:sp>
@@ -14374,7 +16179,7 @@
           <a:noFill/>
         </p:spPr>
         <p:txBody>
-          <a:bodyPr wrap="square" anchor="t" lIns="0" rIns="0" tIns="0" bIns="0">
+          <a:bodyPr wrap="square" lIns="0" tIns="0" rIns="0" bIns="0" anchor="t">
             <a:spAutoFit/>
           </a:bodyPr>
           <a:lstStyle/>
@@ -14389,12 +16194,20 @@
                 <a:solidFill>
                   <a:srgbClr val="BBD4EC"/>
                 </a:solidFill>
-                <a:latin typeface="微软雅黑"/>
-                <a:ea typeface="微软雅黑"/>
-                <a:cs typeface="微软雅黑"/>
+                <a:latin typeface="微软雅黑" panose="020B0503020204020204" charset="-122"/>
+                <a:ea typeface="微软雅黑" panose="020B0503020204020204" charset="-122"/>
+                <a:cs typeface="微软雅黑" panose="020B0503020204020204" charset="-122"/>
               </a:rPr>
               <a:t>SQLite 数据库</a:t>
             </a:r>
+            <a:endParaRPr sz="1250" b="1" i="0">
+              <a:solidFill>
+                <a:srgbClr val="BBD4EC"/>
+              </a:solidFill>
+              <a:latin typeface="微软雅黑" panose="020B0503020204020204" charset="-122"/>
+              <a:ea typeface="微软雅黑" panose="020B0503020204020204" charset="-122"/>
+              <a:cs typeface="微软雅黑" panose="020B0503020204020204" charset="-122"/>
+            </a:endParaRPr>
           </a:p>
           <a:p>
             <a:pPr algn="ctr">
@@ -14407,12 +16220,20 @@
                 <a:solidFill>
                   <a:srgbClr val="7E9EC4"/>
                 </a:solidFill>
-                <a:latin typeface="微软雅黑"/>
-                <a:ea typeface="微软雅黑"/>
-                <a:cs typeface="微软雅黑"/>
+                <a:latin typeface="微软雅黑" panose="020B0503020204020204" charset="-122"/>
+                <a:ea typeface="微软雅黑" panose="020B0503020204020204" charset="-122"/>
+                <a:cs typeface="微软雅黑" panose="020B0503020204020204" charset="-122"/>
               </a:rPr>
               <a:t>15 张表，单文件，随项目走</a:t>
             </a:r>
+            <a:endParaRPr sz="950" b="0" i="0">
+              <a:solidFill>
+                <a:srgbClr val="7E9EC4"/>
+              </a:solidFill>
+              <a:latin typeface="微软雅黑" panose="020B0503020204020204" charset="-122"/>
+              <a:ea typeface="微软雅黑" panose="020B0503020204020204" charset="-122"/>
+              <a:cs typeface="微软雅黑" panose="020B0503020204020204" charset="-122"/>
+            </a:endParaRPr>
           </a:p>
         </p:txBody>
       </p:sp>
@@ -14481,7 +16302,7 @@
           <a:noFill/>
         </p:spPr>
         <p:txBody>
-          <a:bodyPr wrap="square" anchor="t" lIns="0" rIns="0" tIns="0" bIns="0">
+          <a:bodyPr wrap="square" lIns="0" tIns="0" rIns="0" bIns="0" anchor="t">
             <a:spAutoFit/>
           </a:bodyPr>
           <a:lstStyle/>
@@ -14496,12 +16317,20 @@
                 <a:solidFill>
                   <a:srgbClr val="BBD4EC"/>
                 </a:solidFill>
-                <a:latin typeface="微软雅黑"/>
-                <a:ea typeface="微软雅黑"/>
-                <a:cs typeface="微软雅黑"/>
+                <a:latin typeface="微软雅黑" panose="020B0503020204020204" charset="-122"/>
+                <a:ea typeface="微软雅黑" panose="020B0503020204020204" charset="-122"/>
+                <a:cs typeface="微软雅黑" panose="020B0503020204020204" charset="-122"/>
               </a:rPr>
               <a:t>D1 云数据库</a:t>
             </a:r>
+            <a:endParaRPr sz="1250" b="1" i="0">
+              <a:solidFill>
+                <a:srgbClr val="BBD4EC"/>
+              </a:solidFill>
+              <a:latin typeface="微软雅黑" panose="020B0503020204020204" charset="-122"/>
+              <a:ea typeface="微软雅黑" panose="020B0503020204020204" charset="-122"/>
+              <a:cs typeface="微软雅黑" panose="020B0503020204020204" charset="-122"/>
+            </a:endParaRPr>
           </a:p>
           <a:p>
             <a:pPr algn="ctr">
@@ -14514,12 +16343,20 @@
                 <a:solidFill>
                   <a:srgbClr val="7E9EC4"/>
                 </a:solidFill>
-                <a:latin typeface="微软雅黑"/>
-                <a:ea typeface="微软雅黑"/>
-                <a:cs typeface="微软雅黑"/>
+                <a:latin typeface="微软雅黑" panose="020B0503020204020204" charset="-122"/>
+                <a:ea typeface="微软雅黑" panose="020B0503020204020204" charset="-122"/>
+                <a:cs typeface="微软雅黑" panose="020B0503020204020204" charset="-122"/>
               </a:rPr>
               <a:t>公网版用同一套表结构</a:t>
             </a:r>
+            <a:endParaRPr sz="950" b="0" i="0">
+              <a:solidFill>
+                <a:srgbClr val="7E9EC4"/>
+              </a:solidFill>
+              <a:latin typeface="微软雅黑" panose="020B0503020204020204" charset="-122"/>
+              <a:ea typeface="微软雅黑" panose="020B0503020204020204" charset="-122"/>
+              <a:cs typeface="微软雅黑" panose="020B0503020204020204" charset="-122"/>
+            </a:endParaRPr>
           </a:p>
         </p:txBody>
       </p:sp>
@@ -14588,7 +16425,7 @@
           <a:noFill/>
         </p:spPr>
         <p:txBody>
-          <a:bodyPr wrap="square" anchor="t" lIns="0" rIns="0" tIns="0" bIns="0">
+          <a:bodyPr wrap="square" lIns="0" tIns="0" rIns="0" bIns="0" anchor="t">
             <a:spAutoFit/>
           </a:bodyPr>
           <a:lstStyle/>
@@ -14603,12 +16440,20 @@
                 <a:solidFill>
                   <a:srgbClr val="5CC8FF"/>
                 </a:solidFill>
-                <a:latin typeface="微软雅黑"/>
-                <a:ea typeface="微软雅黑"/>
-                <a:cs typeface="微软雅黑"/>
+                <a:latin typeface="微软雅黑" panose="020B0503020204020204" charset="-122"/>
+                <a:ea typeface="微软雅黑" panose="020B0503020204020204" charset="-122"/>
+                <a:cs typeface="微软雅黑" panose="020B0503020204020204" charset="-122"/>
               </a:rPr>
               <a:t>蓝边 = 核心</a:t>
             </a:r>
+            <a:endParaRPr sz="1100" b="1" i="0">
+              <a:solidFill>
+                <a:srgbClr val="5CC8FF"/>
+              </a:solidFill>
+              <a:latin typeface="微软雅黑" panose="020B0503020204020204" charset="-122"/>
+              <a:ea typeface="微软雅黑" panose="020B0503020204020204" charset="-122"/>
+              <a:cs typeface="微软雅黑" panose="020B0503020204020204" charset="-122"/>
+            </a:endParaRPr>
           </a:p>
           <a:p>
             <a:pPr algn="l"/>
@@ -14617,12 +16462,20 @@
                 <a:solidFill>
                   <a:srgbClr val="7E9EC4"/>
                 </a:solidFill>
-                <a:latin typeface="微软雅黑"/>
-                <a:ea typeface="微软雅黑"/>
-                <a:cs typeface="微软雅黑"/>
+                <a:latin typeface="微软雅黑" panose="020B0503020204020204" charset="-122"/>
+                <a:ea typeface="微软雅黑" panose="020B0503020204020204" charset="-122"/>
+                <a:cs typeface="微软雅黑" panose="020B0503020204020204" charset="-122"/>
               </a:rPr>
               <a:t>前端、后端这两层是项目主体</a:t>
             </a:r>
+            <a:endParaRPr sz="950" b="0" i="0">
+              <a:solidFill>
+                <a:srgbClr val="7E9EC4"/>
+              </a:solidFill>
+              <a:latin typeface="微软雅黑" panose="020B0503020204020204" charset="-122"/>
+              <a:ea typeface="微软雅黑" panose="020B0503020204020204" charset="-122"/>
+              <a:cs typeface="微软雅黑" panose="020B0503020204020204" charset="-122"/>
+            </a:endParaRPr>
           </a:p>
         </p:txBody>
       </p:sp>
@@ -14691,7 +16544,7 @@
           <a:noFill/>
         </p:spPr>
         <p:txBody>
-          <a:bodyPr wrap="square" anchor="t" lIns="0" rIns="0" tIns="0" bIns="0">
+          <a:bodyPr wrap="square" lIns="0" tIns="0" rIns="0" bIns="0" anchor="t">
             <a:spAutoFit/>
           </a:bodyPr>
           <a:lstStyle/>
@@ -14706,12 +16559,20 @@
                 <a:solidFill>
                   <a:srgbClr val="5CC8FF"/>
                 </a:solidFill>
-                <a:latin typeface="微软雅黑"/>
-                <a:ea typeface="微软雅黑"/>
-                <a:cs typeface="微软雅黑"/>
+                <a:latin typeface="微软雅黑" panose="020B0503020204020204" charset="-122"/>
+                <a:ea typeface="微软雅黑" panose="020B0503020204020204" charset="-122"/>
+                <a:cs typeface="微软雅黑" panose="020B0503020204020204" charset="-122"/>
               </a:rPr>
               <a:t>无蓝边 = 配套</a:t>
             </a:r>
+            <a:endParaRPr sz="1100" b="1" i="0">
+              <a:solidFill>
+                <a:srgbClr val="5CC8FF"/>
+              </a:solidFill>
+              <a:latin typeface="微软雅黑" panose="020B0503020204020204" charset="-122"/>
+              <a:ea typeface="微软雅黑" panose="020B0503020204020204" charset="-122"/>
+              <a:cs typeface="微软雅黑" panose="020B0503020204020204" charset="-122"/>
+            </a:endParaRPr>
           </a:p>
           <a:p>
             <a:pPr algn="l"/>
@@ -14720,12 +16581,20 @@
                 <a:solidFill>
                   <a:srgbClr val="7E9EC4"/>
                 </a:solidFill>
-                <a:latin typeface="微软雅黑"/>
-                <a:ea typeface="微软雅黑"/>
-                <a:cs typeface="微软雅黑"/>
+                <a:latin typeface="微软雅黑" panose="020B0503020204020204" charset="-122"/>
+                <a:ea typeface="微软雅黑" panose="020B0503020204020204" charset="-122"/>
+                <a:cs typeface="微软雅黑" panose="020B0503020204020204" charset="-122"/>
               </a:rPr>
               <a:t>使用者与数据层，改动少</a:t>
             </a:r>
+            <a:endParaRPr sz="950" b="0" i="0">
+              <a:solidFill>
+                <a:srgbClr val="7E9EC4"/>
+              </a:solidFill>
+              <a:latin typeface="微软雅黑" panose="020B0503020204020204" charset="-122"/>
+              <a:ea typeface="微软雅黑" panose="020B0503020204020204" charset="-122"/>
+              <a:cs typeface="微软雅黑" panose="020B0503020204020204" charset="-122"/>
+            </a:endParaRPr>
           </a:p>
         </p:txBody>
       </p:sp>
@@ -14794,7 +16663,7 @@
           <a:noFill/>
         </p:spPr>
         <p:txBody>
-          <a:bodyPr wrap="square" anchor="t" lIns="0" rIns="0" tIns="0" bIns="0">
+          <a:bodyPr wrap="square" lIns="0" tIns="0" rIns="0" bIns="0" anchor="t">
             <a:spAutoFit/>
           </a:bodyPr>
           <a:lstStyle/>
@@ -14809,12 +16678,20 @@
                 <a:solidFill>
                   <a:srgbClr val="5CC8FF"/>
                 </a:solidFill>
-                <a:latin typeface="微软雅黑"/>
-                <a:ea typeface="微软雅黑"/>
-                <a:cs typeface="微软雅黑"/>
+                <a:latin typeface="微软雅黑" panose="020B0503020204020204" charset="-122"/>
+                <a:ea typeface="微软雅黑" panose="020B0503020204020204" charset="-122"/>
+                <a:cs typeface="微软雅黑" panose="020B0503020204020204" charset="-122"/>
               </a:rPr>
               <a:t>上下依赖单向</a:t>
             </a:r>
+            <a:endParaRPr sz="1100" b="1" i="0">
+              <a:solidFill>
+                <a:srgbClr val="5CC8FF"/>
+              </a:solidFill>
+              <a:latin typeface="微软雅黑" panose="020B0503020204020204" charset="-122"/>
+              <a:ea typeface="微软雅黑" panose="020B0503020204020204" charset="-122"/>
+              <a:cs typeface="微软雅黑" panose="020B0503020204020204" charset="-122"/>
+            </a:endParaRPr>
           </a:p>
           <a:p>
             <a:pPr algn="l"/>
@@ -14823,12 +16700,20 @@
                 <a:solidFill>
                   <a:srgbClr val="7E9EC4"/>
                 </a:solidFill>
-                <a:latin typeface="微软雅黑"/>
-                <a:ea typeface="微软雅黑"/>
-                <a:cs typeface="微软雅黑"/>
+                <a:latin typeface="微软雅黑" panose="020B0503020204020204" charset="-122"/>
+                <a:ea typeface="微软雅黑" panose="020B0503020204020204" charset="-122"/>
+                <a:cs typeface="微软雅黑" panose="020B0503020204020204" charset="-122"/>
               </a:rPr>
               <a:t>每层只调用下一层，不反向依赖</a:t>
             </a:r>
+            <a:endParaRPr sz="950" b="0" i="0">
+              <a:solidFill>
+                <a:srgbClr val="7E9EC4"/>
+              </a:solidFill>
+              <a:latin typeface="微软雅黑" panose="020B0503020204020204" charset="-122"/>
+              <a:ea typeface="微软雅黑" panose="020B0503020204020204" charset="-122"/>
+              <a:cs typeface="微软雅黑" panose="020B0503020204020204" charset="-122"/>
+            </a:endParaRPr>
           </a:p>
         </p:txBody>
       </p:sp>
@@ -14841,7 +16726,7 @@
 </file>
 
 <file path=ppt/slides/slide9.xml><?xml version="1.0" encoding="utf-8"?>
-<p:sld xmlns:a="http://schemas.openxmlformats.org/drawingml/2006/main" xmlns:p="http://schemas.openxmlformats.org/presentationml/2006/main" xmlns:r="http://schemas.openxmlformats.org/officeDocument/2006/relationships">
+<p:sld xmlns:a="http://schemas.openxmlformats.org/drawingml/2006/main" xmlns:r="http://schemas.openxmlformats.org/officeDocument/2006/relationships" xmlns:p="http://schemas.openxmlformats.org/presentationml/2006/main">
   <p:cSld>
     <p:spTree>
       <p:nvGrpSpPr>
@@ -14911,7 +16796,7 @@
           <a:noFill/>
         </p:spPr>
         <p:txBody>
-          <a:bodyPr wrap="square" anchor="t" lIns="0" rIns="0" tIns="0" bIns="0">
+          <a:bodyPr wrap="square" lIns="0" tIns="0" rIns="0" bIns="0" anchor="t">
             <a:spAutoFit/>
           </a:bodyPr>
           <a:lstStyle/>
@@ -14922,12 +16807,20 @@
                 <a:solidFill>
                   <a:srgbClr val="7FE3FF"/>
                 </a:solidFill>
-                <a:latin typeface="微软雅黑"/>
-                <a:ea typeface="微软雅黑"/>
-                <a:cs typeface="微软雅黑"/>
+                <a:latin typeface="微软雅黑" panose="020B0503020204020204" charset="-122"/>
+                <a:ea typeface="微软雅黑" panose="020B0503020204020204" charset="-122"/>
+                <a:cs typeface="微软雅黑" panose="020B0503020204020204" charset="-122"/>
               </a:rPr>
               <a:t>02 · 怎么做的</a:t>
             </a:r>
+            <a:endParaRPr sz="1150" b="1" i="0">
+              <a:solidFill>
+                <a:srgbClr val="7FE3FF"/>
+              </a:solidFill>
+              <a:latin typeface="微软雅黑" panose="020B0503020204020204" charset="-122"/>
+              <a:ea typeface="微软雅黑" panose="020B0503020204020204" charset="-122"/>
+              <a:cs typeface="微软雅黑" panose="020B0503020204020204" charset="-122"/>
+            </a:endParaRPr>
           </a:p>
         </p:txBody>
       </p:sp>
@@ -14948,7 +16841,7 @@
           <a:noFill/>
         </p:spPr>
         <p:txBody>
-          <a:bodyPr wrap="square" anchor="t" lIns="0" rIns="0" tIns="0" bIns="0">
+          <a:bodyPr wrap="square" lIns="0" tIns="0" rIns="0" bIns="0" anchor="t">
             <a:spAutoFit/>
           </a:bodyPr>
           <a:lstStyle/>
@@ -14959,12 +16852,20 @@
                 <a:solidFill>
                   <a:srgbClr val="ECF7FF"/>
                 </a:solidFill>
-                <a:latin typeface="微软雅黑"/>
-                <a:ea typeface="微软雅黑"/>
-                <a:cs typeface="微软雅黑"/>
+                <a:latin typeface="微软雅黑" panose="020B0503020204020204" charset="-122"/>
+                <a:ea typeface="微软雅黑" panose="020B0503020204020204" charset="-122"/>
+                <a:cs typeface="微软雅黑" panose="020B0503020204020204" charset="-122"/>
               </a:rPr>
               <a:t>「随时能打开」是怎么做到的</a:t>
             </a:r>
+            <a:endParaRPr sz="2700" b="1" i="0">
+              <a:solidFill>
+                <a:srgbClr val="ECF7FF"/>
+              </a:solidFill>
+              <a:latin typeface="微软雅黑" panose="020B0503020204020204" charset="-122"/>
+              <a:ea typeface="微软雅黑" panose="020B0503020204020204" charset="-122"/>
+              <a:cs typeface="微软雅黑" panose="020B0503020204020204" charset="-122"/>
+            </a:endParaRPr>
           </a:p>
         </p:txBody>
       </p:sp>
@@ -14985,7 +16886,7 @@
           <a:noFill/>
         </p:spPr>
         <p:txBody>
-          <a:bodyPr wrap="square" anchor="t" lIns="0" rIns="0" tIns="0" bIns="0">
+          <a:bodyPr wrap="square" lIns="0" tIns="0" rIns="0" bIns="0" anchor="t">
             <a:spAutoFit/>
           </a:bodyPr>
           <a:lstStyle/>
@@ -14996,12 +16897,20 @@
                 <a:solidFill>
                   <a:srgbClr val="7E9EC4"/>
                 </a:solidFill>
-                <a:latin typeface="微软雅黑"/>
-                <a:ea typeface="微软雅黑"/>
-                <a:cs typeface="微软雅黑"/>
+                <a:latin typeface="微软雅黑" panose="020B0503020204020204" charset="-122"/>
+                <a:ea typeface="微软雅黑" panose="020B0503020204020204" charset="-122"/>
+                <a:cs typeface="微软雅黑" panose="020B0503020204020204" charset="-122"/>
               </a:rPr>
               <a:t>急救绿道 · 9 / 13</a:t>
             </a:r>
+            <a:endParaRPr sz="1000" b="0" i="0">
+              <a:solidFill>
+                <a:srgbClr val="7E9EC4"/>
+              </a:solidFill>
+              <a:latin typeface="微软雅黑" panose="020B0503020204020204" charset="-122"/>
+              <a:ea typeface="微软雅黑" panose="020B0503020204020204" charset="-122"/>
+              <a:cs typeface="微软雅黑" panose="020B0503020204020204" charset="-122"/>
+            </a:endParaRPr>
           </a:p>
         </p:txBody>
       </p:sp>
@@ -15022,7 +16931,7 @@
           <a:noFill/>
         </p:spPr>
         <p:txBody>
-          <a:bodyPr wrap="square" anchor="t" lIns="0" rIns="0" tIns="0" bIns="0">
+          <a:bodyPr wrap="square" lIns="0" tIns="0" rIns="0" bIns="0" anchor="t">
             <a:spAutoFit/>
           </a:bodyPr>
           <a:lstStyle/>
@@ -15033,9 +16942,9 @@
                 <a:solidFill>
                   <a:srgbClr val="BBD4EC"/>
                 </a:solidFill>
-                <a:latin typeface="微软雅黑"/>
-                <a:ea typeface="微软雅黑"/>
-                <a:cs typeface="微软雅黑"/>
+                <a:latin typeface="微软雅黑" panose="020B0503020204020204" charset="-122"/>
+                <a:ea typeface="微软雅黑" panose="020B0503020204020204" charset="-122"/>
+                <a:cs typeface="微软雅黑" panose="020B0503020204020204" charset="-122"/>
               </a:rPr>
               <a:t>起因是一个真实的坑：服务跑在前台窗口里，</a:t>
             </a:r>
@@ -15044,9 +16953,9 @@
                 <a:solidFill>
                   <a:srgbClr val="5CC8FF"/>
                 </a:solidFill>
-                <a:latin typeface="微软雅黑"/>
-                <a:ea typeface="微软雅黑"/>
-                <a:cs typeface="微软雅黑"/>
+                <a:latin typeface="微软雅黑" panose="020B0503020204020204" charset="-122"/>
+                <a:ea typeface="微软雅黑" panose="020B0503020204020204" charset="-122"/>
+                <a:cs typeface="微软雅黑" panose="020B0503020204020204" charset="-122"/>
               </a:rPr>
               <a:t>按 Ctrl+C 想复制文字，结果把服务关了</a:t>
             </a:r>
@@ -15055,12 +16964,20 @@
                 <a:solidFill>
                   <a:srgbClr val="BBD4EC"/>
                 </a:solidFill>
-                <a:latin typeface="微软雅黑"/>
-                <a:ea typeface="微软雅黑"/>
-                <a:cs typeface="微软雅黑"/>
+                <a:latin typeface="微软雅黑" panose="020B0503020204020204" charset="-122"/>
+                <a:ea typeface="微软雅黑" panose="020B0503020204020204" charset="-122"/>
+                <a:cs typeface="微软雅黑" panose="020B0503020204020204" charset="-122"/>
               </a:rPr>
               <a:t>。</a:t>
             </a:r>
+            <a:endParaRPr sz="1400" b="0" i="0">
+              <a:solidFill>
+                <a:srgbClr val="BBD4EC"/>
+              </a:solidFill>
+              <a:latin typeface="微软雅黑" panose="020B0503020204020204" charset="-122"/>
+              <a:ea typeface="微软雅黑" panose="020B0503020204020204" charset="-122"/>
+              <a:cs typeface="微软雅黑" panose="020B0503020204020204" charset="-122"/>
+            </a:endParaRPr>
           </a:p>
         </p:txBody>
       </p:sp>
@@ -15195,7 +17112,7 @@
           </a:fontRef>
         </p:style>
         <p:txBody>
-          <a:bodyPr rtlCol="0" anchor="ctr" lIns="0" rIns="0" tIns="0" bIns="0"/>
+          <a:bodyPr lIns="0" tIns="0" rIns="0" bIns="0" rtlCol="0" anchor="ctr"/>
           <a:lstStyle/>
           <a:p>
             <a:pPr algn="ctr"/>
@@ -15204,12 +17121,20 @@
                 <a:solidFill>
                   <a:srgbClr val="FFFFFF"/>
                 </a:solidFill>
-                <a:latin typeface="微软雅黑"/>
-                <a:ea typeface="微软雅黑"/>
-                <a:cs typeface="微软雅黑"/>
+                <a:latin typeface="微软雅黑" panose="020B0503020204020204" charset="-122"/>
+                <a:ea typeface="微软雅黑" panose="020B0503020204020204" charset="-122"/>
+                <a:cs typeface="微软雅黑" panose="020B0503020204020204" charset="-122"/>
               </a:rPr>
               <a:t>1</a:t>
             </a:r>
+            <a:endParaRPr sz="1400" b="1" i="0">
+              <a:solidFill>
+                <a:srgbClr val="FFFFFF"/>
+              </a:solidFill>
+              <a:latin typeface="微软雅黑" panose="020B0503020204020204" charset="-122"/>
+              <a:ea typeface="微软雅黑" panose="020B0503020204020204" charset="-122"/>
+              <a:cs typeface="微软雅黑" panose="020B0503020204020204" charset="-122"/>
+            </a:endParaRPr>
           </a:p>
         </p:txBody>
       </p:sp>
@@ -15230,7 +17155,7 @@
           <a:noFill/>
         </p:spPr>
         <p:txBody>
-          <a:bodyPr wrap="square" anchor="t" lIns="0" rIns="0" tIns="0" bIns="0">
+          <a:bodyPr wrap="square" lIns="0" tIns="0" rIns="0" bIns="0" anchor="t">
             <a:spAutoFit/>
           </a:bodyPr>
           <a:lstStyle/>
@@ -15245,12 +17170,20 @@
                 <a:solidFill>
                   <a:srgbClr val="ECF7FF"/>
                 </a:solidFill>
-                <a:latin typeface="微软雅黑"/>
-                <a:ea typeface="微软雅黑"/>
-                <a:cs typeface="微软雅黑"/>
+                <a:latin typeface="微软雅黑" panose="020B0503020204020204" charset="-122"/>
+                <a:ea typeface="微软雅黑" panose="020B0503020204020204" charset="-122"/>
+                <a:cs typeface="微软雅黑" panose="020B0503020204020204" charset="-122"/>
               </a:rPr>
               <a:t>双击启动</a:t>
             </a:r>
+            <a:endParaRPr sz="1500" b="1" i="0">
+              <a:solidFill>
+                <a:srgbClr val="ECF7FF"/>
+              </a:solidFill>
+              <a:latin typeface="微软雅黑" panose="020B0503020204020204" charset="-122"/>
+              <a:ea typeface="微软雅黑" panose="020B0503020204020204" charset="-122"/>
+              <a:cs typeface="微软雅黑" panose="020B0503020204020204" charset="-122"/>
+            </a:endParaRPr>
           </a:p>
           <a:p>
             <a:pPr algn="l">
@@ -15263,12 +17196,20 @@
                 <a:solidFill>
                   <a:srgbClr val="BBD4EC"/>
                 </a:solidFill>
-                <a:latin typeface="微软雅黑"/>
-                <a:ea typeface="微软雅黑"/>
-                <a:cs typeface="微软雅黑"/>
+                <a:latin typeface="微软雅黑" panose="020B0503020204020204" charset="-122"/>
+                <a:ea typeface="微软雅黑" panose="020B0503020204020204" charset="-122"/>
+                <a:cs typeface="微软雅黑" panose="020B0503020204020204" charset="-122"/>
               </a:rPr>
               <a:t>自动装依赖、建库、灌数据、打开浏览器，缺哪步补哪步。</a:t>
             </a:r>
+            <a:endParaRPr sz="1100" b="0" i="0">
+              <a:solidFill>
+                <a:srgbClr val="BBD4EC"/>
+              </a:solidFill>
+              <a:latin typeface="微软雅黑" panose="020B0503020204020204" charset="-122"/>
+              <a:ea typeface="微软雅黑" panose="020B0503020204020204" charset="-122"/>
+              <a:cs typeface="微软雅黑" panose="020B0503020204020204" charset="-122"/>
+            </a:endParaRPr>
           </a:p>
         </p:txBody>
       </p:sp>
@@ -15403,7 +17344,7 @@
           </a:fontRef>
         </p:style>
         <p:txBody>
-          <a:bodyPr rtlCol="0" anchor="ctr" lIns="0" rIns="0" tIns="0" bIns="0"/>
+          <a:bodyPr lIns="0" tIns="0" rIns="0" bIns="0" rtlCol="0" anchor="ctr"/>
           <a:lstStyle/>
           <a:p>
             <a:pPr algn="ctr"/>
@@ -15412,12 +17353,20 @@
                 <a:solidFill>
                   <a:srgbClr val="FFFFFF"/>
                 </a:solidFill>
-                <a:latin typeface="微软雅黑"/>
-                <a:ea typeface="微软雅黑"/>
-                <a:cs typeface="微软雅黑"/>
+                <a:latin typeface="微软雅黑" panose="020B0503020204020204" charset="-122"/>
+                <a:ea typeface="微软雅黑" panose="020B0503020204020204" charset="-122"/>
+                <a:cs typeface="微软雅黑" panose="020B0503020204020204" charset="-122"/>
               </a:rPr>
               <a:t>2</a:t>
             </a:r>
+            <a:endParaRPr sz="1400" b="1" i="0">
+              <a:solidFill>
+                <a:srgbClr val="FFFFFF"/>
+              </a:solidFill>
+              <a:latin typeface="微软雅黑" panose="020B0503020204020204" charset="-122"/>
+              <a:ea typeface="微软雅黑" panose="020B0503020204020204" charset="-122"/>
+              <a:cs typeface="微软雅黑" panose="020B0503020204020204" charset="-122"/>
+            </a:endParaRPr>
           </a:p>
         </p:txBody>
       </p:sp>
@@ -15438,7 +17387,7 @@
           <a:noFill/>
         </p:spPr>
         <p:txBody>
-          <a:bodyPr wrap="square" anchor="t" lIns="0" rIns="0" tIns="0" bIns="0">
+          <a:bodyPr wrap="square" lIns="0" tIns="0" rIns="0" bIns="0" anchor="t">
             <a:spAutoFit/>
           </a:bodyPr>
           <a:lstStyle/>
@@ -15453,12 +17402,20 @@
                 <a:solidFill>
                   <a:srgbClr val="ECF7FF"/>
                 </a:solidFill>
-                <a:latin typeface="微软雅黑"/>
-                <a:ea typeface="微软雅黑"/>
-                <a:cs typeface="微软雅黑"/>
+                <a:latin typeface="微软雅黑" panose="020B0503020204020204" charset="-122"/>
+                <a:ea typeface="微软雅黑" panose="020B0503020204020204" charset="-122"/>
+                <a:cs typeface="微软雅黑" panose="020B0503020204020204" charset="-122"/>
               </a:rPr>
               <a:t>交给守护进程</a:t>
             </a:r>
+            <a:endParaRPr sz="1500" b="1" i="0">
+              <a:solidFill>
+                <a:srgbClr val="ECF7FF"/>
+              </a:solidFill>
+              <a:latin typeface="微软雅黑" panose="020B0503020204020204" charset="-122"/>
+              <a:ea typeface="微软雅黑" panose="020B0503020204020204" charset="-122"/>
+              <a:cs typeface="微软雅黑" panose="020B0503020204020204" charset="-122"/>
+            </a:endParaRPr>
           </a:p>
           <a:p>
             <a:pPr algn="l">
@@ -15471,12 +17428,20 @@
                 <a:solidFill>
                   <a:srgbClr val="BBD4EC"/>
                 </a:solidFill>
-                <a:latin typeface="微软雅黑"/>
-                <a:ea typeface="微软雅黑"/>
-                <a:cs typeface="微软雅黑"/>
+                <a:latin typeface="微软雅黑" panose="020B0503020204020204" charset="-122"/>
+                <a:ea typeface="微软雅黑" panose="020B0503020204020204" charset="-122"/>
+                <a:cs typeface="微软雅黑" panose="020B0503020204020204" charset="-122"/>
               </a:rPr>
               <a:t>服务在后台跑，没有窗口，Ctrl+C 和误关窗口都影响不到它。</a:t>
             </a:r>
+            <a:endParaRPr sz="1100" b="0" i="0">
+              <a:solidFill>
+                <a:srgbClr val="BBD4EC"/>
+              </a:solidFill>
+              <a:latin typeface="微软雅黑" panose="020B0503020204020204" charset="-122"/>
+              <a:ea typeface="微软雅黑" panose="020B0503020204020204" charset="-122"/>
+              <a:cs typeface="微软雅黑" panose="020B0503020204020204" charset="-122"/>
+            </a:endParaRPr>
           </a:p>
         </p:txBody>
       </p:sp>
@@ -15611,7 +17576,7 @@
           </a:fontRef>
         </p:style>
         <p:txBody>
-          <a:bodyPr rtlCol="0" anchor="ctr" lIns="0" rIns="0" tIns="0" bIns="0"/>
+          <a:bodyPr lIns="0" tIns="0" rIns="0" bIns="0" rtlCol="0" anchor="ctr"/>
           <a:lstStyle/>
           <a:p>
             <a:pPr algn="ctr"/>
@@ -15620,12 +17585,20 @@
                 <a:solidFill>
                   <a:srgbClr val="FFFFFF"/>
                 </a:solidFill>
-                <a:latin typeface="微软雅黑"/>
-                <a:ea typeface="微软雅黑"/>
-                <a:cs typeface="微软雅黑"/>
+                <a:latin typeface="微软雅黑" panose="020B0503020204020204" charset="-122"/>
+                <a:ea typeface="微软雅黑" panose="020B0503020204020204" charset="-122"/>
+                <a:cs typeface="微软雅黑" panose="020B0503020204020204" charset="-122"/>
               </a:rPr>
               <a:t>3</a:t>
             </a:r>
+            <a:endParaRPr sz="1400" b="1" i="0">
+              <a:solidFill>
+                <a:srgbClr val="FFFFFF"/>
+              </a:solidFill>
+              <a:latin typeface="微软雅黑" panose="020B0503020204020204" charset="-122"/>
+              <a:ea typeface="微软雅黑" panose="020B0503020204020204" charset="-122"/>
+              <a:cs typeface="微软雅黑" panose="020B0503020204020204" charset="-122"/>
+            </a:endParaRPr>
           </a:p>
         </p:txBody>
       </p:sp>
@@ -15646,7 +17619,7 @@
           <a:noFill/>
         </p:spPr>
         <p:txBody>
-          <a:bodyPr wrap="square" anchor="t" lIns="0" rIns="0" tIns="0" bIns="0">
+          <a:bodyPr wrap="square" lIns="0" tIns="0" rIns="0" bIns="0" anchor="t">
             <a:spAutoFit/>
           </a:bodyPr>
           <a:lstStyle/>
@@ -15661,12 +17634,20 @@
                 <a:solidFill>
                   <a:srgbClr val="ECF7FF"/>
                 </a:solidFill>
-                <a:latin typeface="微软雅黑"/>
-                <a:ea typeface="微软雅黑"/>
-                <a:cs typeface="微软雅黑"/>
+                <a:latin typeface="微软雅黑" panose="020B0503020204020204" charset="-122"/>
+                <a:ea typeface="微软雅黑" panose="020B0503020204020204" charset="-122"/>
+                <a:cs typeface="微软雅黑" panose="020B0503020204020204" charset="-122"/>
               </a:rPr>
               <a:t>崩了自动拉起</a:t>
             </a:r>
+            <a:endParaRPr sz="1500" b="1" i="0">
+              <a:solidFill>
+                <a:srgbClr val="ECF7FF"/>
+              </a:solidFill>
+              <a:latin typeface="微软雅黑" panose="020B0503020204020204" charset="-122"/>
+              <a:ea typeface="微软雅黑" panose="020B0503020204020204" charset="-122"/>
+              <a:cs typeface="微软雅黑" panose="020B0503020204020204" charset="-122"/>
+            </a:endParaRPr>
           </a:p>
           <a:p>
             <a:pPr algn="l">
@@ -15679,12 +17660,20 @@
                 <a:solidFill>
                   <a:srgbClr val="BBD4EC"/>
                 </a:solidFill>
-                <a:latin typeface="微软雅黑"/>
-                <a:ea typeface="微软雅黑"/>
-                <a:cs typeface="微软雅黑"/>
+                <a:latin typeface="微软雅黑" panose="020B0503020204020204" charset="-122"/>
+                <a:ea typeface="微软雅黑" panose="020B0503020204020204" charset="-122"/>
+                <a:cs typeface="微软雅黑" panose="020B0503020204020204" charset="-122"/>
               </a:rPr>
               <a:t>进程一退出 3 秒内自动重启。实测强杀后 12 秒恢复正常。</a:t>
             </a:r>
+            <a:endParaRPr sz="1100" b="0" i="0">
+              <a:solidFill>
+                <a:srgbClr val="BBD4EC"/>
+              </a:solidFill>
+              <a:latin typeface="微软雅黑" panose="020B0503020204020204" charset="-122"/>
+              <a:ea typeface="微软雅黑" panose="020B0503020204020204" charset="-122"/>
+              <a:cs typeface="微软雅黑" panose="020B0503020204020204" charset="-122"/>
+            </a:endParaRPr>
           </a:p>
         </p:txBody>
       </p:sp>
@@ -15819,7 +17808,7 @@
           </a:fontRef>
         </p:style>
         <p:txBody>
-          <a:bodyPr rtlCol="0" anchor="ctr" lIns="0" rIns="0" tIns="0" bIns="0"/>
+          <a:bodyPr lIns="0" tIns="0" rIns="0" bIns="0" rtlCol="0" anchor="ctr"/>
           <a:lstStyle/>
           <a:p>
             <a:pPr algn="ctr"/>
@@ -15828,12 +17817,20 @@
                 <a:solidFill>
                   <a:srgbClr val="FFFFFF"/>
                 </a:solidFill>
-                <a:latin typeface="微软雅黑"/>
-                <a:ea typeface="微软雅黑"/>
-                <a:cs typeface="微软雅黑"/>
+                <a:latin typeface="微软雅黑" panose="020B0503020204020204" charset="-122"/>
+                <a:ea typeface="微软雅黑" panose="020B0503020204020204" charset="-122"/>
+                <a:cs typeface="微软雅黑" panose="020B0503020204020204" charset="-122"/>
               </a:rPr>
               <a:t>4</a:t>
             </a:r>
+            <a:endParaRPr sz="1400" b="1" i="0">
+              <a:solidFill>
+                <a:srgbClr val="FFFFFF"/>
+              </a:solidFill>
+              <a:latin typeface="微软雅黑" panose="020B0503020204020204" charset="-122"/>
+              <a:ea typeface="微软雅黑" panose="020B0503020204020204" charset="-122"/>
+              <a:cs typeface="微软雅黑" panose="020B0503020204020204" charset="-122"/>
+            </a:endParaRPr>
           </a:p>
         </p:txBody>
       </p:sp>
@@ -15854,7 +17851,7 @@
           <a:noFill/>
         </p:spPr>
         <p:txBody>
-          <a:bodyPr wrap="square" anchor="t" lIns="0" rIns="0" tIns="0" bIns="0">
+          <a:bodyPr wrap="square" lIns="0" tIns="0" rIns="0" bIns="0" anchor="t">
             <a:spAutoFit/>
           </a:bodyPr>
           <a:lstStyle/>
@@ -15869,12 +17866,20 @@
                 <a:solidFill>
                   <a:srgbClr val="ECF7FF"/>
                 </a:solidFill>
-                <a:latin typeface="微软雅黑"/>
-                <a:ea typeface="微软雅黑"/>
-                <a:cs typeface="微软雅黑"/>
+                <a:latin typeface="微软雅黑" panose="020B0503020204020204" charset="-122"/>
+                <a:ea typeface="微软雅黑" panose="020B0503020204020204" charset="-122"/>
+                <a:cs typeface="微软雅黑" panose="020B0503020204020204" charset="-122"/>
               </a:rPr>
               <a:t>开机自己起来</a:t>
             </a:r>
+            <a:endParaRPr sz="1500" b="1" i="0">
+              <a:solidFill>
+                <a:srgbClr val="ECF7FF"/>
+              </a:solidFill>
+              <a:latin typeface="微软雅黑" panose="020B0503020204020204" charset="-122"/>
+              <a:ea typeface="微软雅黑" panose="020B0503020204020204" charset="-122"/>
+              <a:cs typeface="微软雅黑" panose="020B0503020204020204" charset="-122"/>
+            </a:endParaRPr>
           </a:p>
           <a:p>
             <a:pPr algn="l">
@@ -15887,12 +17892,20 @@
                 <a:solidFill>
                   <a:srgbClr val="BBD4EC"/>
                 </a:solidFill>
-                <a:latin typeface="微软雅黑"/>
-                <a:ea typeface="微软雅黑"/>
-                <a:cs typeface="微软雅黑"/>
+                <a:latin typeface="微软雅黑" panose="020B0503020204020204" charset="-122"/>
+                <a:ea typeface="微软雅黑" panose="020B0503020204020204" charset="-122"/>
+                <a:cs typeface="微软雅黑" panose="020B0503020204020204" charset="-122"/>
               </a:rPr>
               <a:t>装一次自启，之后重启电脑也不用管，大屏终端断电恢复即可用。</a:t>
             </a:r>
+            <a:endParaRPr sz="1100" b="0" i="0">
+              <a:solidFill>
+                <a:srgbClr val="BBD4EC"/>
+              </a:solidFill>
+              <a:latin typeface="微软雅黑" panose="020B0503020204020204" charset="-122"/>
+              <a:ea typeface="微软雅黑" panose="020B0503020204020204" charset="-122"/>
+              <a:cs typeface="微软雅黑" panose="020B0503020204020204" charset="-122"/>
+            </a:endParaRPr>
           </a:p>
         </p:txBody>
       </p:sp>
@@ -15913,7 +17926,7 @@
           <a:noFill/>
         </p:spPr>
         <p:txBody>
-          <a:bodyPr wrap="square" anchor="t" lIns="0" rIns="0" tIns="0" bIns="0">
+          <a:bodyPr wrap="square" lIns="0" tIns="0" rIns="0" bIns="0" anchor="t">
             <a:spAutoFit/>
           </a:bodyPr>
           <a:lstStyle/>
@@ -15924,9 +17937,9 @@
                 <a:solidFill>
                   <a:srgbClr val="BBD4EC"/>
                 </a:solidFill>
-                <a:latin typeface="微软雅黑"/>
-                <a:ea typeface="微软雅黑"/>
-                <a:cs typeface="微软雅黑"/>
+                <a:latin typeface="微软雅黑" panose="020B0503020204020204" charset="-122"/>
+                <a:ea typeface="微软雅黑" panose="020B0503020204020204" charset="-122"/>
+                <a:cs typeface="微软雅黑" panose="020B0503020204020204" charset="-122"/>
               </a:rPr>
               <a:t>另外：演示数据会随日期自动「保鲜」，隔几天再打开，大屏</a:t>
             </a:r>
@@ -15935,9 +17948,9 @@
                 <a:solidFill>
                   <a:srgbClr val="ECF7FF"/>
                 </a:solidFill>
-                <a:latin typeface="微软雅黑"/>
-                <a:ea typeface="微软雅黑"/>
-                <a:cs typeface="微软雅黑"/>
+                <a:latin typeface="微软雅黑" panose="020B0503020204020204" charset="-122"/>
+                <a:ea typeface="微软雅黑" panose="020B0503020204020204" charset="-122"/>
+                <a:cs typeface="微软雅黑" panose="020B0503020204020204" charset="-122"/>
               </a:rPr>
               <a:t>不会出现空白表格</a:t>
             </a:r>
@@ -15946,12 +17959,20 @@
                 <a:solidFill>
                   <a:srgbClr val="BBD4EC"/>
                 </a:solidFill>
-                <a:latin typeface="微软雅黑"/>
-                <a:ea typeface="微软雅黑"/>
-                <a:cs typeface="微软雅黑"/>
+                <a:latin typeface="微软雅黑" panose="020B0503020204020204" charset="-122"/>
+                <a:ea typeface="微软雅黑" panose="020B0503020204020204" charset="-122"/>
+                <a:cs typeface="微软雅黑" panose="020B0503020204020204" charset="-122"/>
               </a:rPr>
               <a:t>。</a:t>
             </a:r>
+            <a:endParaRPr sz="1350" b="0" i="0">
+              <a:solidFill>
+                <a:srgbClr val="BBD4EC"/>
+              </a:solidFill>
+              <a:latin typeface="微软雅黑" panose="020B0503020204020204" charset="-122"/>
+              <a:ea typeface="微软雅黑" panose="020B0503020204020204" charset="-122"/>
+              <a:cs typeface="微软雅黑" panose="020B0503020204020204" charset="-122"/>
+            </a:endParaRPr>
           </a:p>
         </p:txBody>
       </p:sp>
@@ -16279,6 +18300,10 @@
       </a:style>
     </a:lnDef>
   </a:objectDefaults>
-  <a:extraClrSchemeLst/>
+  <a:extLst>
+    <a:ext uri="{05A4C25C-085E-4340-85A3-A5531E510DB2}">
+      <thm15:themeFamily xmlns:thm15="http://schemas.microsoft.com/office/thememl/2012/main" name="Office Theme" id="{62F939B6-93AF-4DB8-9C6B-D6C7DFDC589F}" vid="{4A3C46E8-61CC-4603-A589-7422A47A8E4A}"/>
+    </a:ext>
+  </a:extLst>
 </a:theme>
 </file>
--- a/docs/ppt/医院数据管理平台-项目介绍.pptx
+++ b/docs/ppt/医院数据管理平台-项目介绍.pptx
@@ -1,25 +1,25 @@
 
 <file path=ppt/presentation.xml><?xml version="1.0" encoding="utf-8"?>
-<p:presentation xmlns:a="http://schemas.openxmlformats.org/drawingml/2006/main" xmlns:r="http://schemas.openxmlformats.org/officeDocument/2006/relationships" xmlns:p="http://schemas.openxmlformats.org/presentationml/2006/main" autoCompressPictures="0">
+<p:presentation xmlns:a="http://schemas.openxmlformats.org/drawingml/2006/main" xmlns:r="http://schemas.openxmlformats.org/officeDocument/2006/relationships" xmlns:p="http://schemas.openxmlformats.org/presentationml/2006/main" saveSubsetFonts="1" autoCompressPictures="0">
   <p:sldMasterIdLst>
     <p:sldMasterId id="2147483648" r:id="rId1"/>
   </p:sldMasterIdLst>
   <p:sldIdLst>
-    <p:sldId id="256" r:id="rId3"/>
-    <p:sldId id="257" r:id="rId4"/>
-    <p:sldId id="258" r:id="rId5"/>
-    <p:sldId id="259" r:id="rId6"/>
-    <p:sldId id="260" r:id="rId7"/>
-    <p:sldId id="261" r:id="rId8"/>
-    <p:sldId id="262" r:id="rId9"/>
-    <p:sldId id="263" r:id="rId10"/>
-    <p:sldId id="264" r:id="rId11"/>
-    <p:sldId id="265" r:id="rId12"/>
-    <p:sldId id="266" r:id="rId13"/>
-    <p:sldId id="267" r:id="rId14"/>
-    <p:sldId id="268" r:id="rId15"/>
+    <p:sldId id="256" r:id="rId7"/>
+    <p:sldId id="257" r:id="rId8"/>
+    <p:sldId id="258" r:id="rId9"/>
+    <p:sldId id="259" r:id="rId10"/>
+    <p:sldId id="260" r:id="rId11"/>
+    <p:sldId id="261" r:id="rId12"/>
+    <p:sldId id="262" r:id="rId13"/>
+    <p:sldId id="263" r:id="rId14"/>
+    <p:sldId id="264" r:id="rId15"/>
+    <p:sldId id="265" r:id="rId16"/>
+    <p:sldId id="266" r:id="rId17"/>
+    <p:sldId id="267" r:id="rId18"/>
+    <p:sldId id="268" r:id="rId19"/>
   </p:sldIdLst>
-  <p:sldSz cx="12191365" cy="6858000" type="screen4x3"/>
+  <p:sldSz cx="12191695" cy="6858000" type="screen4x3"/>
   <p:notesSz cx="6858000" cy="9144000"/>
   <p:defaultTextStyle>
     <a:defPPr>
@@ -116,22 +116,6 @@
       </a:defRPr>
     </a:lvl9pPr>
   </p:defaultTextStyle>
-  <p:extLst>
-    <p:ext uri="{EFAFB233-063F-42B5-8137-9DF3F51BA10A}">
-      <p15:sldGuideLst xmlns:p15="http://schemas.microsoft.com/office/powerpoint/2012/main">
-        <p15:guide id="1" orient="horz" pos="2177" userDrawn="1">
-          <p15:clr>
-            <a:srgbClr val="A4A3A4"/>
-          </p15:clr>
-        </p15:guide>
-        <p15:guide id="2" pos="2880" userDrawn="1">
-          <p15:clr>
-            <a:srgbClr val="A4A3A4"/>
-          </p15:clr>
-        </p15:guide>
-      </p15:sldGuideLst>
-    </p:ext>
-  </p:extLst>
 </p:presentation>
 </file>
 
@@ -316,6 +300,7 @@
           <a:p>
             <a:fld id="{5BCAD085-E8A6-8845-BD4E-CB4CCA059FC4}" type="datetimeFigureOut">
               <a:rPr lang="en-US" smtClean="0"/>
+              <a:t>1/27/13</a:t>
             </a:fld>
             <a:endParaRPr lang="en-US"/>
           </a:p>
@@ -357,12 +342,18 @@
           <a:p>
             <a:fld id="{C1FF6DA9-008F-8B48-92A6-B652298478BF}" type="slidenum">
               <a:rPr lang="en-US" smtClean="0"/>
+              <a:t>‹#›</a:t>
             </a:fld>
             <a:endParaRPr lang="en-US"/>
           </a:p>
         </p:txBody>
       </p:sp>
     </p:spTree>
+    <p:extLst>
+      <p:ext uri="{BB962C8B-B14F-4D97-AF65-F5344CB8AC3E}">
+        <p14:creationId xmlns:p14="http://schemas.microsoft.com/office/powerpoint/2010/main" val="3168075583"/>
+      </p:ext>
+    </p:extLst>
   </p:cSld>
   <p:clrMapOvr>
     <a:masterClrMapping/>
@@ -430,7 +421,6 @@
               <a:rPr lang="en-US" smtClean="0"/>
               <a:t>Click to edit Master text styles</a:t>
             </a:r>
-            <a:endParaRPr lang="en-US" smtClean="0"/>
           </a:p>
           <a:p>
             <a:pPr lvl="1"/>
@@ -438,7 +428,6 @@
               <a:rPr lang="en-US" smtClean="0"/>
               <a:t>Second level</a:t>
             </a:r>
-            <a:endParaRPr lang="en-US" smtClean="0"/>
           </a:p>
           <a:p>
             <a:pPr lvl="2"/>
@@ -446,7 +435,6 @@
               <a:rPr lang="en-US" smtClean="0"/>
               <a:t>Third level</a:t>
             </a:r>
-            <a:endParaRPr lang="en-US" smtClean="0"/>
           </a:p>
           <a:p>
             <a:pPr lvl="3"/>
@@ -454,7 +442,6 @@
               <a:rPr lang="en-US" smtClean="0"/>
               <a:t>Fourth level</a:t>
             </a:r>
-            <a:endParaRPr lang="en-US" smtClean="0"/>
           </a:p>
           <a:p>
             <a:pPr lvl="4"/>
@@ -483,6 +470,7 @@
           <a:p>
             <a:fld id="{5BCAD085-E8A6-8845-BD4E-CB4CCA059FC4}" type="datetimeFigureOut">
               <a:rPr lang="en-US" smtClean="0"/>
+              <a:t>1/27/13</a:t>
             </a:fld>
             <a:endParaRPr lang="en-US"/>
           </a:p>
@@ -524,12 +512,18 @@
           <a:p>
             <a:fld id="{C1FF6DA9-008F-8B48-92A6-B652298478BF}" type="slidenum">
               <a:rPr lang="en-US" smtClean="0"/>
+              <a:t>‹#›</a:t>
             </a:fld>
             <a:endParaRPr lang="en-US"/>
           </a:p>
         </p:txBody>
       </p:sp>
     </p:spTree>
+    <p:extLst>
+      <p:ext uri="{BB962C8B-B14F-4D97-AF65-F5344CB8AC3E}">
+        <p14:creationId xmlns:p14="http://schemas.microsoft.com/office/powerpoint/2010/main" val="2910927964"/>
+      </p:ext>
+    </p:extLst>
   </p:cSld>
   <p:clrMapOvr>
     <a:masterClrMapping/>
@@ -607,7 +601,6 @@
               <a:rPr lang="en-US" smtClean="0"/>
               <a:t>Click to edit Master text styles</a:t>
             </a:r>
-            <a:endParaRPr lang="en-US" smtClean="0"/>
           </a:p>
           <a:p>
             <a:pPr lvl="1"/>
@@ -615,7 +608,6 @@
               <a:rPr lang="en-US" smtClean="0"/>
               <a:t>Second level</a:t>
             </a:r>
-            <a:endParaRPr lang="en-US" smtClean="0"/>
           </a:p>
           <a:p>
             <a:pPr lvl="2"/>
@@ -623,7 +615,6 @@
               <a:rPr lang="en-US" smtClean="0"/>
               <a:t>Third level</a:t>
             </a:r>
-            <a:endParaRPr lang="en-US" smtClean="0"/>
           </a:p>
           <a:p>
             <a:pPr lvl="3"/>
@@ -631,7 +622,6 @@
               <a:rPr lang="en-US" smtClean="0"/>
               <a:t>Fourth level</a:t>
             </a:r>
-            <a:endParaRPr lang="en-US" smtClean="0"/>
           </a:p>
           <a:p>
             <a:pPr lvl="4"/>
@@ -660,6 +650,7 @@
           <a:p>
             <a:fld id="{5BCAD085-E8A6-8845-BD4E-CB4CCA059FC4}" type="datetimeFigureOut">
               <a:rPr lang="en-US" smtClean="0"/>
+              <a:t>1/27/13</a:t>
             </a:fld>
             <a:endParaRPr lang="en-US"/>
           </a:p>
@@ -701,12 +692,18 @@
           <a:p>
             <a:fld id="{C1FF6DA9-008F-8B48-92A6-B652298478BF}" type="slidenum">
               <a:rPr lang="en-US" smtClean="0"/>
+              <a:t>‹#›</a:t>
             </a:fld>
             <a:endParaRPr lang="en-US"/>
           </a:p>
         </p:txBody>
       </p:sp>
     </p:spTree>
+    <p:extLst>
+      <p:ext uri="{BB962C8B-B14F-4D97-AF65-F5344CB8AC3E}">
+        <p14:creationId xmlns:p14="http://schemas.microsoft.com/office/powerpoint/2010/main" val="3612223792"/>
+      </p:ext>
+    </p:extLst>
   </p:cSld>
   <p:clrMapOvr>
     <a:masterClrMapping/>
@@ -774,7 +771,6 @@
               <a:rPr lang="en-US" smtClean="0"/>
               <a:t>Click to edit Master text styles</a:t>
             </a:r>
-            <a:endParaRPr lang="en-US" smtClean="0"/>
           </a:p>
           <a:p>
             <a:pPr lvl="1"/>
@@ -782,7 +778,6 @@
               <a:rPr lang="en-US" smtClean="0"/>
               <a:t>Second level</a:t>
             </a:r>
-            <a:endParaRPr lang="en-US" smtClean="0"/>
           </a:p>
           <a:p>
             <a:pPr lvl="2"/>
@@ -790,7 +785,6 @@
               <a:rPr lang="en-US" smtClean="0"/>
               <a:t>Third level</a:t>
             </a:r>
-            <a:endParaRPr lang="en-US" smtClean="0"/>
           </a:p>
           <a:p>
             <a:pPr lvl="3"/>
@@ -798,7 +792,6 @@
               <a:rPr lang="en-US" smtClean="0"/>
               <a:t>Fourth level</a:t>
             </a:r>
-            <a:endParaRPr lang="en-US" smtClean="0"/>
           </a:p>
           <a:p>
             <a:pPr lvl="4"/>
@@ -827,6 +820,7 @@
           <a:p>
             <a:fld id="{5BCAD085-E8A6-8845-BD4E-CB4CCA059FC4}" type="datetimeFigureOut">
               <a:rPr lang="en-US" smtClean="0"/>
+              <a:t>1/27/13</a:t>
             </a:fld>
             <a:endParaRPr lang="en-US"/>
           </a:p>
@@ -868,12 +862,18 @@
           <a:p>
             <a:fld id="{C1FF6DA9-008F-8B48-92A6-B652298478BF}" type="slidenum">
               <a:rPr lang="en-US" smtClean="0"/>
+              <a:t>‹#›</a:t>
             </a:fld>
             <a:endParaRPr lang="en-US"/>
           </a:p>
         </p:txBody>
       </p:sp>
     </p:spTree>
+    <p:extLst>
+      <p:ext uri="{BB962C8B-B14F-4D97-AF65-F5344CB8AC3E}">
+        <p14:creationId xmlns:p14="http://schemas.microsoft.com/office/powerpoint/2010/main" val="2614314258"/>
+      </p:ext>
+    </p:extLst>
   </p:cSld>
   <p:clrMapOvr>
     <a:masterClrMapping/>
@@ -1046,7 +1046,6 @@
               <a:rPr lang="en-US" smtClean="0"/>
               <a:t>Click to edit Master text styles</a:t>
             </a:r>
-            <a:endParaRPr lang="en-US" smtClean="0"/>
           </a:p>
         </p:txBody>
       </p:sp>
@@ -1067,6 +1066,7 @@
           <a:p>
             <a:fld id="{5BCAD085-E8A6-8845-BD4E-CB4CCA059FC4}" type="datetimeFigureOut">
               <a:rPr lang="en-US" smtClean="0"/>
+              <a:t>1/27/13</a:t>
             </a:fld>
             <a:endParaRPr lang="en-US"/>
           </a:p>
@@ -1108,12 +1108,18 @@
           <a:p>
             <a:fld id="{C1FF6DA9-008F-8B48-92A6-B652298478BF}" type="slidenum">
               <a:rPr lang="en-US" smtClean="0"/>
+              <a:t>‹#›</a:t>
             </a:fld>
             <a:endParaRPr lang="en-US"/>
           </a:p>
         </p:txBody>
       </p:sp>
     </p:spTree>
+    <p:extLst>
+      <p:ext uri="{BB962C8B-B14F-4D97-AF65-F5344CB8AC3E}">
+        <p14:creationId xmlns:p14="http://schemas.microsoft.com/office/powerpoint/2010/main" val="960648375"/>
+      </p:ext>
+    </p:extLst>
   </p:cSld>
   <p:clrMapOvr>
     <a:masterClrMapping/>
@@ -1214,7 +1220,6 @@
               <a:rPr lang="en-US" smtClean="0"/>
               <a:t>Click to edit Master text styles</a:t>
             </a:r>
-            <a:endParaRPr lang="en-US" smtClean="0"/>
           </a:p>
           <a:p>
             <a:pPr lvl="1"/>
@@ -1222,7 +1227,6 @@
               <a:rPr lang="en-US" smtClean="0"/>
               <a:t>Second level</a:t>
             </a:r>
-            <a:endParaRPr lang="en-US" smtClean="0"/>
           </a:p>
           <a:p>
             <a:pPr lvl="2"/>
@@ -1230,7 +1234,6 @@
               <a:rPr lang="en-US" smtClean="0"/>
               <a:t>Third level</a:t>
             </a:r>
-            <a:endParaRPr lang="en-US" smtClean="0"/>
           </a:p>
           <a:p>
             <a:pPr lvl="3"/>
@@ -1238,7 +1241,6 @@
               <a:rPr lang="en-US" smtClean="0"/>
               <a:t>Fourth level</a:t>
             </a:r>
-            <a:endParaRPr lang="en-US" smtClean="0"/>
           </a:p>
           <a:p>
             <a:pPr lvl="4"/>
@@ -1303,7 +1305,6 @@
               <a:rPr lang="en-US" smtClean="0"/>
               <a:t>Click to edit Master text styles</a:t>
             </a:r>
-            <a:endParaRPr lang="en-US" smtClean="0"/>
           </a:p>
           <a:p>
             <a:pPr lvl="1"/>
@@ -1311,7 +1312,6 @@
               <a:rPr lang="en-US" smtClean="0"/>
               <a:t>Second level</a:t>
             </a:r>
-            <a:endParaRPr lang="en-US" smtClean="0"/>
           </a:p>
           <a:p>
             <a:pPr lvl="2"/>
@@ -1319,7 +1319,6 @@
               <a:rPr lang="en-US" smtClean="0"/>
               <a:t>Third level</a:t>
             </a:r>
-            <a:endParaRPr lang="en-US" smtClean="0"/>
           </a:p>
           <a:p>
             <a:pPr lvl="3"/>
@@ -1327,7 +1326,6 @@
               <a:rPr lang="en-US" smtClean="0"/>
               <a:t>Fourth level</a:t>
             </a:r>
-            <a:endParaRPr lang="en-US" smtClean="0"/>
           </a:p>
           <a:p>
             <a:pPr lvl="4"/>
@@ -1356,6 +1354,7 @@
           <a:p>
             <a:fld id="{5BCAD085-E8A6-8845-BD4E-CB4CCA059FC4}" type="datetimeFigureOut">
               <a:rPr lang="en-US" smtClean="0"/>
+              <a:t>1/27/13</a:t>
             </a:fld>
             <a:endParaRPr lang="en-US"/>
           </a:p>
@@ -1397,12 +1396,18 @@
           <a:p>
             <a:fld id="{C1FF6DA9-008F-8B48-92A6-B652298478BF}" type="slidenum">
               <a:rPr lang="en-US" smtClean="0"/>
+              <a:t>‹#›</a:t>
             </a:fld>
             <a:endParaRPr lang="en-US"/>
           </a:p>
         </p:txBody>
       </p:sp>
     </p:spTree>
+    <p:extLst>
+      <p:ext uri="{BB962C8B-B14F-4D97-AF65-F5344CB8AC3E}">
+        <p14:creationId xmlns:p14="http://schemas.microsoft.com/office/powerpoint/2010/main" val="2782244947"/>
+      </p:ext>
+    </p:extLst>
   </p:cSld>
   <p:clrMapOvr>
     <a:masterClrMapping/>
@@ -1516,7 +1521,6 @@
               <a:rPr lang="en-US" smtClean="0"/>
               <a:t>Click to edit Master text styles</a:t>
             </a:r>
-            <a:endParaRPr lang="en-US" smtClean="0"/>
           </a:p>
         </p:txBody>
       </p:sp>
@@ -1573,7 +1577,6 @@
               <a:rPr lang="en-US" smtClean="0"/>
               <a:t>Click to edit Master text styles</a:t>
             </a:r>
-            <a:endParaRPr lang="en-US" smtClean="0"/>
           </a:p>
           <a:p>
             <a:pPr lvl="1"/>
@@ -1581,7 +1584,6 @@
               <a:rPr lang="en-US" smtClean="0"/>
               <a:t>Second level</a:t>
             </a:r>
-            <a:endParaRPr lang="en-US" smtClean="0"/>
           </a:p>
           <a:p>
             <a:pPr lvl="2"/>
@@ -1589,7 +1591,6 @@
               <a:rPr lang="en-US" smtClean="0"/>
               <a:t>Third level</a:t>
             </a:r>
-            <a:endParaRPr lang="en-US" smtClean="0"/>
           </a:p>
           <a:p>
             <a:pPr lvl="3"/>
@@ -1597,7 +1598,6 @@
               <a:rPr lang="en-US" smtClean="0"/>
               <a:t>Fourth level</a:t>
             </a:r>
-            <a:endParaRPr lang="en-US" smtClean="0"/>
           </a:p>
           <a:p>
             <a:pPr lvl="4"/>
@@ -1671,7 +1671,6 @@
               <a:rPr lang="en-US" smtClean="0"/>
               <a:t>Click to edit Master text styles</a:t>
             </a:r>
-            <a:endParaRPr lang="en-US" smtClean="0"/>
           </a:p>
         </p:txBody>
       </p:sp>
@@ -1728,7 +1727,6 @@
               <a:rPr lang="en-US" smtClean="0"/>
               <a:t>Click to edit Master text styles</a:t>
             </a:r>
-            <a:endParaRPr lang="en-US" smtClean="0"/>
           </a:p>
           <a:p>
             <a:pPr lvl="1"/>
@@ -1736,7 +1734,6 @@
               <a:rPr lang="en-US" smtClean="0"/>
               <a:t>Second level</a:t>
             </a:r>
-            <a:endParaRPr lang="en-US" smtClean="0"/>
           </a:p>
           <a:p>
             <a:pPr lvl="2"/>
@@ -1744,7 +1741,6 @@
               <a:rPr lang="en-US" smtClean="0"/>
               <a:t>Third level</a:t>
             </a:r>
-            <a:endParaRPr lang="en-US" smtClean="0"/>
           </a:p>
           <a:p>
             <a:pPr lvl="3"/>
@@ -1752,7 +1748,6 @@
               <a:rPr lang="en-US" smtClean="0"/>
               <a:t>Fourth level</a:t>
             </a:r>
-            <a:endParaRPr lang="en-US" smtClean="0"/>
           </a:p>
           <a:p>
             <a:pPr lvl="4"/>
@@ -1781,6 +1776,7 @@
           <a:p>
             <a:fld id="{5BCAD085-E8A6-8845-BD4E-CB4CCA059FC4}" type="datetimeFigureOut">
               <a:rPr lang="en-US" smtClean="0"/>
+              <a:t>1/27/13</a:t>
             </a:fld>
             <a:endParaRPr lang="en-US"/>
           </a:p>
@@ -1822,12 +1818,18 @@
           <a:p>
             <a:fld id="{C1FF6DA9-008F-8B48-92A6-B652298478BF}" type="slidenum">
               <a:rPr lang="en-US" smtClean="0"/>
+              <a:t>‹#›</a:t>
             </a:fld>
             <a:endParaRPr lang="en-US"/>
           </a:p>
         </p:txBody>
       </p:sp>
     </p:spTree>
+    <p:extLst>
+      <p:ext uri="{BB962C8B-B14F-4D97-AF65-F5344CB8AC3E}">
+        <p14:creationId xmlns:p14="http://schemas.microsoft.com/office/powerpoint/2010/main" val="990158736"/>
+      </p:ext>
+    </p:extLst>
   </p:cSld>
   <p:clrMapOvr>
     <a:masterClrMapping/>
@@ -1892,6 +1894,7 @@
           <a:p>
             <a:fld id="{5BCAD085-E8A6-8845-BD4E-CB4CCA059FC4}" type="datetimeFigureOut">
               <a:rPr lang="en-US" smtClean="0"/>
+              <a:t>1/27/13</a:t>
             </a:fld>
             <a:endParaRPr lang="en-US"/>
           </a:p>
@@ -1933,12 +1936,18 @@
           <a:p>
             <a:fld id="{C1FF6DA9-008F-8B48-92A6-B652298478BF}" type="slidenum">
               <a:rPr lang="en-US" smtClean="0"/>
+              <a:t>‹#›</a:t>
             </a:fld>
             <a:endParaRPr lang="en-US"/>
           </a:p>
         </p:txBody>
       </p:sp>
     </p:spTree>
+    <p:extLst>
+      <p:ext uri="{BB962C8B-B14F-4D97-AF65-F5344CB8AC3E}">
+        <p14:creationId xmlns:p14="http://schemas.microsoft.com/office/powerpoint/2010/main" val="727027711"/>
+      </p:ext>
+    </p:extLst>
   </p:cSld>
   <p:clrMapOvr>
     <a:masterClrMapping/>
@@ -1980,6 +1989,7 @@
           <a:p>
             <a:fld id="{5BCAD085-E8A6-8845-BD4E-CB4CCA059FC4}" type="datetimeFigureOut">
               <a:rPr lang="en-US" smtClean="0"/>
+              <a:t>1/27/13</a:t>
             </a:fld>
             <a:endParaRPr lang="en-US"/>
           </a:p>
@@ -2021,12 +2031,18 @@
           <a:p>
             <a:fld id="{C1FF6DA9-008F-8B48-92A6-B652298478BF}" type="slidenum">
               <a:rPr lang="en-US" smtClean="0"/>
+              <a:t>‹#›</a:t>
             </a:fld>
             <a:endParaRPr lang="en-US"/>
           </a:p>
         </p:txBody>
       </p:sp>
     </p:spTree>
+    <p:extLst>
+      <p:ext uri="{BB962C8B-B14F-4D97-AF65-F5344CB8AC3E}">
+        <p14:creationId xmlns:p14="http://schemas.microsoft.com/office/powerpoint/2010/main" val="1212999818"/>
+      </p:ext>
+    </p:extLst>
   </p:cSld>
   <p:clrMapOvr>
     <a:masterClrMapping/>
@@ -2136,7 +2152,6 @@
               <a:rPr lang="en-US" smtClean="0"/>
               <a:t>Click to edit Master text styles</a:t>
             </a:r>
-            <a:endParaRPr lang="en-US" smtClean="0"/>
           </a:p>
           <a:p>
             <a:pPr lvl="1"/>
@@ -2144,7 +2159,6 @@
               <a:rPr lang="en-US" smtClean="0"/>
               <a:t>Second level</a:t>
             </a:r>
-            <a:endParaRPr lang="en-US" smtClean="0"/>
           </a:p>
           <a:p>
             <a:pPr lvl="2"/>
@@ -2152,7 +2166,6 @@
               <a:rPr lang="en-US" smtClean="0"/>
               <a:t>Third level</a:t>
             </a:r>
-            <a:endParaRPr lang="en-US" smtClean="0"/>
           </a:p>
           <a:p>
             <a:pPr lvl="3"/>
@@ -2160,7 +2173,6 @@
               <a:rPr lang="en-US" smtClean="0"/>
               <a:t>Fourth level</a:t>
             </a:r>
-            <a:endParaRPr lang="en-US" smtClean="0"/>
           </a:p>
           <a:p>
             <a:pPr lvl="4"/>
@@ -2234,7 +2246,6 @@
               <a:rPr lang="en-US" smtClean="0"/>
               <a:t>Click to edit Master text styles</a:t>
             </a:r>
-            <a:endParaRPr lang="en-US" smtClean="0"/>
           </a:p>
         </p:txBody>
       </p:sp>
@@ -2255,6 +2266,7 @@
           <a:p>
             <a:fld id="{5BCAD085-E8A6-8845-BD4E-CB4CCA059FC4}" type="datetimeFigureOut">
               <a:rPr lang="en-US" smtClean="0"/>
+              <a:t>1/27/13</a:t>
             </a:fld>
             <a:endParaRPr lang="en-US"/>
           </a:p>
@@ -2296,12 +2308,18 @@
           <a:p>
             <a:fld id="{C1FF6DA9-008F-8B48-92A6-B652298478BF}" type="slidenum">
               <a:rPr lang="en-US" smtClean="0"/>
+              <a:t>‹#›</a:t>
             </a:fld>
             <a:endParaRPr lang="en-US"/>
           </a:p>
         </p:txBody>
       </p:sp>
     </p:spTree>
+    <p:extLst>
+      <p:ext uri="{BB962C8B-B14F-4D97-AF65-F5344CB8AC3E}">
+        <p14:creationId xmlns:p14="http://schemas.microsoft.com/office/powerpoint/2010/main" val="1840726560"/>
+      </p:ext>
+    </p:extLst>
   </p:cSld>
   <p:clrMapOvr>
     <a:masterClrMapping/>
@@ -2481,7 +2499,6 @@
               <a:rPr lang="en-US" smtClean="0"/>
               <a:t>Click to edit Master text styles</a:t>
             </a:r>
-            <a:endParaRPr lang="en-US" smtClean="0"/>
           </a:p>
         </p:txBody>
       </p:sp>
@@ -2502,6 +2519,7 @@
           <a:p>
             <a:fld id="{5BCAD085-E8A6-8845-BD4E-CB4CCA059FC4}" type="datetimeFigureOut">
               <a:rPr lang="en-US" smtClean="0"/>
+              <a:t>1/27/13</a:t>
             </a:fld>
             <a:endParaRPr lang="en-US"/>
           </a:p>
@@ -2543,12 +2561,18 @@
           <a:p>
             <a:fld id="{C1FF6DA9-008F-8B48-92A6-B652298478BF}" type="slidenum">
               <a:rPr lang="en-US" smtClean="0"/>
+              <a:t>‹#›</a:t>
             </a:fld>
             <a:endParaRPr lang="en-US"/>
           </a:p>
         </p:txBody>
       </p:sp>
     </p:spTree>
+    <p:extLst>
+      <p:ext uri="{BB962C8B-B14F-4D97-AF65-F5344CB8AC3E}">
+        <p14:creationId xmlns:p14="http://schemas.microsoft.com/office/powerpoint/2010/main" val="3889236939"/>
+      </p:ext>
+    </p:extLst>
   </p:cSld>
   <p:clrMapOvr>
     <a:masterClrMapping/>
@@ -2641,7 +2665,6 @@
               <a:rPr lang="en-US" smtClean="0"/>
               <a:t>Click to edit Master text styles</a:t>
             </a:r>
-            <a:endParaRPr lang="en-US" smtClean="0"/>
           </a:p>
           <a:p>
             <a:pPr lvl="1"/>
@@ -2649,7 +2672,6 @@
               <a:rPr lang="en-US" smtClean="0"/>
               <a:t>Second level</a:t>
             </a:r>
-            <a:endParaRPr lang="en-US" smtClean="0"/>
           </a:p>
           <a:p>
             <a:pPr lvl="2"/>
@@ -2657,7 +2679,6 @@
               <a:rPr lang="en-US" smtClean="0"/>
               <a:t>Third level</a:t>
             </a:r>
-            <a:endParaRPr lang="en-US" smtClean="0"/>
           </a:p>
           <a:p>
             <a:pPr lvl="3"/>
@@ -2665,7 +2686,6 @@
               <a:rPr lang="en-US" smtClean="0"/>
               <a:t>Fourth level</a:t>
             </a:r>
-            <a:endParaRPr lang="en-US" smtClean="0"/>
           </a:p>
           <a:p>
             <a:pPr lvl="4"/>
@@ -2712,6 +2732,7 @@
           <a:p>
             <a:fld id="{5BCAD085-E8A6-8845-BD4E-CB4CCA059FC4}" type="datetimeFigureOut">
               <a:rPr lang="en-US" smtClean="0"/>
+              <a:t>1/27/13</a:t>
             </a:fld>
             <a:endParaRPr lang="en-US"/>
           </a:p>
@@ -2789,12 +2810,18 @@
           <a:p>
             <a:fld id="{C1FF6DA9-008F-8B48-92A6-B652298478BF}" type="slidenum">
               <a:rPr lang="en-US" smtClean="0"/>
+              <a:t>‹#›</a:t>
             </a:fld>
             <a:endParaRPr lang="en-US"/>
           </a:p>
         </p:txBody>
       </p:sp>
     </p:spTree>
+    <p:extLst>
+      <p:ext uri="{BB962C8B-B14F-4D97-AF65-F5344CB8AC3E}">
+        <p14:creationId xmlns:p14="http://schemas.microsoft.com/office/powerpoint/2010/main" val="2209977519"/>
+      </p:ext>
+    </p:extLst>
   </p:cSld>
   <p:clrMap bg1="lt1" tx1="dk1" bg2="lt2" tx2="dk2" accent1="accent1" accent2="accent2" accent3="accent3" accent4="accent4" accent5="accent5" accent6="accent6" hlink="hlink" folHlink="folHlink"/>
   <p:sldLayoutIdLst>
@@ -2832,7 +2859,7 @@
         <a:spcBef>
           <a:spcPct val="20000"/>
         </a:spcBef>
-        <a:buFont typeface="Arial" panose="020B0604020202020204"/>
+        <a:buFont typeface="Arial"/>
         <a:buChar char="•"/>
         <a:defRPr sz="3200" kern="1200">
           <a:solidFill>
@@ -2847,7 +2874,7 @@
         <a:spcBef>
           <a:spcPct val="20000"/>
         </a:spcBef>
-        <a:buFont typeface="Arial" panose="020B0604020202020204"/>
+        <a:buFont typeface="Arial"/>
         <a:buChar char="–"/>
         <a:defRPr sz="2800" kern="1200">
           <a:solidFill>
@@ -2862,7 +2889,7 @@
         <a:spcBef>
           <a:spcPct val="20000"/>
         </a:spcBef>
-        <a:buFont typeface="Arial" panose="020B0604020202020204"/>
+        <a:buFont typeface="Arial"/>
         <a:buChar char="•"/>
         <a:defRPr sz="2400" kern="1200">
           <a:solidFill>
@@ -2877,7 +2904,7 @@
         <a:spcBef>
           <a:spcPct val="20000"/>
         </a:spcBef>
-        <a:buFont typeface="Arial" panose="020B0604020202020204"/>
+        <a:buFont typeface="Arial"/>
         <a:buChar char="–"/>
         <a:defRPr sz="2000" kern="1200">
           <a:solidFill>
@@ -2892,7 +2919,7 @@
         <a:spcBef>
           <a:spcPct val="20000"/>
         </a:spcBef>
-        <a:buFont typeface="Arial" panose="020B0604020202020204"/>
+        <a:buFont typeface="Arial"/>
         <a:buChar char="»"/>
         <a:defRPr sz="2000" kern="1200">
           <a:solidFill>
@@ -2907,7 +2934,7 @@
         <a:spcBef>
           <a:spcPct val="20000"/>
         </a:spcBef>
-        <a:buFont typeface="Arial" panose="020B0604020202020204"/>
+        <a:buFont typeface="Arial"/>
         <a:buChar char="•"/>
         <a:defRPr sz="2000" kern="1200">
           <a:solidFill>
@@ -2922,7 +2949,7 @@
         <a:spcBef>
           <a:spcPct val="20000"/>
         </a:spcBef>
-        <a:buFont typeface="Arial" panose="020B0604020202020204"/>
+        <a:buFont typeface="Arial"/>
         <a:buChar char="•"/>
         <a:defRPr sz="2000" kern="1200">
           <a:solidFill>
@@ -2937,7 +2964,7 @@
         <a:spcBef>
           <a:spcPct val="20000"/>
         </a:spcBef>
-        <a:buFont typeface="Arial" panose="020B0604020202020204"/>
+        <a:buFont typeface="Arial"/>
         <a:buChar char="•"/>
         <a:defRPr sz="2000" kern="1200">
           <a:solidFill>
@@ -2952,7 +2979,7 @@
         <a:spcBef>
           <a:spcPct val="20000"/>
         </a:spcBef>
-        <a:buFont typeface="Arial" panose="020B0604020202020204"/>
+        <a:buFont typeface="Arial"/>
         <a:buChar char="•"/>
         <a:defRPr sz="2000" kern="1200">
           <a:solidFill>
@@ -3064,7 +3091,7 @@
 </file>
 
 <file path=ppt/slides/slide1.xml><?xml version="1.0" encoding="utf-8"?>
-<p:sld xmlns:a="http://schemas.openxmlformats.org/drawingml/2006/main" xmlns:r="http://schemas.openxmlformats.org/officeDocument/2006/relationships" xmlns:p="http://schemas.openxmlformats.org/presentationml/2006/main">
+<p:sld xmlns:a="http://schemas.openxmlformats.org/drawingml/2006/main" xmlns:p="http://schemas.openxmlformats.org/presentationml/2006/main" xmlns:r="http://schemas.openxmlformats.org/officeDocument/2006/relationships">
   <p:cSld>
     <p:spTree>
       <p:nvGrpSpPr>
@@ -3134,7 +3161,7 @@
           <a:noFill/>
         </p:spPr>
         <p:txBody>
-          <a:bodyPr wrap="square" lIns="0" tIns="0" rIns="0" bIns="0" anchor="t">
+          <a:bodyPr wrap="square" anchor="t" lIns="0" rIns="0" tIns="0" bIns="0">
             <a:spAutoFit/>
           </a:bodyPr>
           <a:lstStyle/>
@@ -3145,20 +3172,12 @@
                 <a:solidFill>
                   <a:srgbClr val="7FE3FF"/>
                 </a:solidFill>
-                <a:latin typeface="微软雅黑" panose="020B0503020204020204" charset="-122"/>
-                <a:ea typeface="微软雅黑" panose="020B0503020204020204" charset="-122"/>
-                <a:cs typeface="微软雅黑" panose="020B0503020204020204" charset="-122"/>
+                <a:latin typeface="微软雅黑"/>
+                <a:ea typeface="微软雅黑"/>
+                <a:cs typeface="微软雅黑"/>
               </a:rPr>
               <a:t>项目介绍 · 2026</a:t>
             </a:r>
-            <a:endParaRPr sz="1400" b="1" i="0">
-              <a:solidFill>
-                <a:srgbClr val="7FE3FF"/>
-              </a:solidFill>
-              <a:latin typeface="微软雅黑" panose="020B0503020204020204" charset="-122"/>
-              <a:ea typeface="微软雅黑" panose="020B0503020204020204" charset="-122"/>
-              <a:cs typeface="微软雅黑" panose="020B0503020204020204" charset="-122"/>
-            </a:endParaRPr>
           </a:p>
         </p:txBody>
       </p:sp>
@@ -3179,7 +3198,7 @@
           <a:noFill/>
         </p:spPr>
         <p:txBody>
-          <a:bodyPr wrap="square" lIns="0" tIns="0" rIns="0" bIns="0" anchor="t">
+          <a:bodyPr wrap="square" anchor="t" lIns="0" rIns="0" tIns="0" bIns="0">
             <a:spAutoFit/>
           </a:bodyPr>
           <a:lstStyle/>
@@ -3194,20 +3213,12 @@
                 <a:solidFill>
                   <a:srgbClr val="FFFFFF"/>
                 </a:solidFill>
-                <a:latin typeface="微软雅黑" panose="020B0503020204020204" charset="-122"/>
-                <a:ea typeface="微软雅黑" panose="020B0503020204020204" charset="-122"/>
-                <a:cs typeface="微软雅黑" panose="020B0503020204020204" charset="-122"/>
+                <a:latin typeface="微软雅黑"/>
+                <a:ea typeface="微软雅黑"/>
+                <a:cs typeface="微软雅黑"/>
               </a:rPr>
               <a:t>医院数据管理平台</a:t>
             </a:r>
-            <a:endParaRPr sz="4400" b="1" i="0">
-              <a:solidFill>
-                <a:srgbClr val="FFFFFF"/>
-              </a:solidFill>
-              <a:latin typeface="微软雅黑" panose="020B0503020204020204" charset="-122"/>
-              <a:ea typeface="微软雅黑" panose="020B0503020204020204" charset="-122"/>
-              <a:cs typeface="微软雅黑" panose="020B0503020204020204" charset="-122"/>
-            </a:endParaRPr>
           </a:p>
           <a:p>
             <a:pPr algn="l"/>
@@ -3216,20 +3227,12 @@
                 <a:solidFill>
                   <a:srgbClr val="7FE3FF"/>
                 </a:solidFill>
-                <a:latin typeface="微软雅黑" panose="020B0503020204020204" charset="-122"/>
-                <a:ea typeface="微软雅黑" panose="020B0503020204020204" charset="-122"/>
-                <a:cs typeface="微软雅黑" panose="020B0503020204020204" charset="-122"/>
+                <a:latin typeface="微软雅黑"/>
+                <a:ea typeface="微软雅黑"/>
+                <a:cs typeface="微软雅黑"/>
               </a:rPr>
               <a:t>急救绿道</a:t>
             </a:r>
-            <a:endParaRPr sz="4400" b="1" i="0">
-              <a:solidFill>
-                <a:srgbClr val="7FE3FF"/>
-              </a:solidFill>
-              <a:latin typeface="微软雅黑" panose="020B0503020204020204" charset="-122"/>
-              <a:ea typeface="微软雅黑" panose="020B0503020204020204" charset="-122"/>
-              <a:cs typeface="微软雅黑" panose="020B0503020204020204" charset="-122"/>
-            </a:endParaRPr>
           </a:p>
         </p:txBody>
       </p:sp>
@@ -3250,7 +3253,7 @@
           <a:noFill/>
         </p:spPr>
         <p:txBody>
-          <a:bodyPr wrap="square" lIns="0" tIns="0" rIns="0" bIns="0" anchor="t">
+          <a:bodyPr wrap="square" anchor="t" lIns="0" rIns="0" tIns="0" bIns="0">
             <a:spAutoFit/>
           </a:bodyPr>
           <a:lstStyle/>
@@ -3265,20 +3268,12 @@
                 <a:solidFill>
                   <a:srgbClr val="C7DCF2"/>
                 </a:solidFill>
-                <a:latin typeface="微软雅黑" panose="020B0503020204020204" charset="-122"/>
-                <a:ea typeface="微软雅黑" panose="020B0503020204020204" charset="-122"/>
-                <a:cs typeface="微软雅黑" panose="020B0503020204020204" charset="-122"/>
+                <a:latin typeface="微软雅黑"/>
+                <a:ea typeface="微软雅黑"/>
+                <a:cs typeface="微软雅黑"/>
               </a:rPr>
               <a:t>一块大屏看全局，一个后台管细节。</a:t>
             </a:r>
-            <a:endParaRPr sz="1700" b="0" i="0">
-              <a:solidFill>
-                <a:srgbClr val="C7DCF2"/>
-              </a:solidFill>
-              <a:latin typeface="微软雅黑" panose="020B0503020204020204" charset="-122"/>
-              <a:ea typeface="微软雅黑" panose="020B0503020204020204" charset="-122"/>
-              <a:cs typeface="微软雅黑" panose="020B0503020204020204" charset="-122"/>
-            </a:endParaRPr>
           </a:p>
           <a:p>
             <a:pPr algn="l"/>
@@ -3287,20 +3282,12 @@
                 <a:solidFill>
                   <a:srgbClr val="C7DCF2"/>
                 </a:solidFill>
-                <a:latin typeface="微软雅黑" panose="020B0503020204020204" charset="-122"/>
-                <a:ea typeface="微软雅黑" panose="020B0503020204020204" charset="-122"/>
-                <a:cs typeface="微软雅黑" panose="020B0503020204020204" charset="-122"/>
+                <a:latin typeface="微软雅黑"/>
+                <a:ea typeface="微软雅黑"/>
+                <a:cs typeface="微软雅黑"/>
               </a:rPr>
               <a:t>这份 PPT 用大白话讲清楚：它是什么、怎么做的、怎么用。</a:t>
             </a:r>
-            <a:endParaRPr sz="1700" b="0" i="0">
-              <a:solidFill>
-                <a:srgbClr val="C7DCF2"/>
-              </a:solidFill>
-              <a:latin typeface="微软雅黑" panose="020B0503020204020204" charset="-122"/>
-              <a:ea typeface="微软雅黑" panose="020B0503020204020204" charset="-122"/>
-              <a:cs typeface="微软雅黑" panose="020B0503020204020204" charset="-122"/>
-            </a:endParaRPr>
           </a:p>
         </p:txBody>
       </p:sp>
@@ -3391,7 +3378,7 @@
           </a:fontRef>
         </p:style>
         <p:txBody>
-          <a:bodyPr lIns="0" tIns="0" rIns="0" bIns="0" rtlCol="0" anchor="ctr"/>
+          <a:bodyPr rtlCol="0" anchor="ctr" lIns="0" rIns="0" tIns="0" bIns="0"/>
           <a:lstStyle/>
           <a:p>
             <a:pPr algn="ctr"/>
@@ -3400,20 +3387,12 @@
                 <a:solidFill>
                   <a:srgbClr val="FFFFFF"/>
                 </a:solidFill>
-                <a:latin typeface="微软雅黑" panose="020B0503020204020204" charset="-122"/>
-                <a:ea typeface="微软雅黑" panose="020B0503020204020204" charset="-122"/>
-                <a:cs typeface="微软雅黑" panose="020B0503020204020204" charset="-122"/>
+                <a:latin typeface="微软雅黑"/>
+                <a:ea typeface="微软雅黑"/>
+                <a:cs typeface="微软雅黑"/>
               </a:rPr>
               <a:t>1</a:t>
             </a:r>
-            <a:endParaRPr sz="1100" b="1" i="0">
-              <a:solidFill>
-                <a:srgbClr val="FFFFFF"/>
-              </a:solidFill>
-              <a:latin typeface="微软雅黑" panose="020B0503020204020204" charset="-122"/>
-              <a:ea typeface="微软雅黑" panose="020B0503020204020204" charset="-122"/>
-              <a:cs typeface="微软雅黑" panose="020B0503020204020204" charset="-122"/>
-            </a:endParaRPr>
           </a:p>
         </p:txBody>
       </p:sp>
@@ -3434,7 +3413,7 @@
           <a:noFill/>
         </p:spPr>
         <p:txBody>
-          <a:bodyPr wrap="square" lIns="0" tIns="0" rIns="0" bIns="0" anchor="t">
+          <a:bodyPr wrap="square" anchor="t" lIns="0" rIns="0" tIns="0" bIns="0">
             <a:spAutoFit/>
           </a:bodyPr>
           <a:lstStyle/>
@@ -3449,20 +3428,12 @@
                 <a:solidFill>
                   <a:srgbClr val="FFFFFF"/>
                 </a:solidFill>
-                <a:latin typeface="微软雅黑" panose="020B0503020204020204" charset="-122"/>
-                <a:ea typeface="微软雅黑" panose="020B0503020204020204" charset="-122"/>
-                <a:cs typeface="微软雅黑" panose="020B0503020204020204" charset="-122"/>
+                <a:latin typeface="微软雅黑"/>
+                <a:ea typeface="微软雅黑"/>
+                <a:cs typeface="微软雅黑"/>
               </a:rPr>
               <a:t>全自动</a:t>
             </a:r>
-            <a:endParaRPr sz="1300" b="1" i="0">
-              <a:solidFill>
-                <a:srgbClr val="FFFFFF"/>
-              </a:solidFill>
-              <a:latin typeface="微软雅黑" panose="020B0503020204020204" charset="-122"/>
-              <a:ea typeface="微软雅黑" panose="020B0503020204020204" charset="-122"/>
-              <a:cs typeface="微软雅黑" panose="020B0503020204020204" charset="-122"/>
-            </a:endParaRPr>
           </a:p>
           <a:p>
             <a:pPr algn="l">
@@ -3475,20 +3446,12 @@
                 <a:solidFill>
                   <a:srgbClr val="7F9DC4"/>
                 </a:solidFill>
-                <a:latin typeface="微软雅黑" panose="020B0503020204020204" charset="-122"/>
-                <a:ea typeface="微软雅黑" panose="020B0503020204020204" charset="-122"/>
-                <a:cs typeface="微软雅黑" panose="020B0503020204020204" charset="-122"/>
+                <a:latin typeface="微软雅黑"/>
+                <a:ea typeface="微软雅黑"/>
+                <a:cs typeface="微软雅黑"/>
               </a:rPr>
               <a:t>双击启动，之后开机即用、崩了自愈</a:t>
             </a:r>
-            <a:endParaRPr sz="950" b="0" i="0">
-              <a:solidFill>
-                <a:srgbClr val="7F9DC4"/>
-              </a:solidFill>
-              <a:latin typeface="微软雅黑" panose="020B0503020204020204" charset="-122"/>
-              <a:ea typeface="微软雅黑" panose="020B0503020204020204" charset="-122"/>
-              <a:cs typeface="微软雅黑" panose="020B0503020204020204" charset="-122"/>
-            </a:endParaRPr>
           </a:p>
         </p:txBody>
       </p:sp>
@@ -3579,7 +3542,7 @@
           </a:fontRef>
         </p:style>
         <p:txBody>
-          <a:bodyPr lIns="0" tIns="0" rIns="0" bIns="0" rtlCol="0" anchor="ctr"/>
+          <a:bodyPr rtlCol="0" anchor="ctr" lIns="0" rIns="0" tIns="0" bIns="0"/>
           <a:lstStyle/>
           <a:p>
             <a:pPr algn="ctr"/>
@@ -3588,20 +3551,12 @@
                 <a:solidFill>
                   <a:srgbClr val="FFFFFF"/>
                 </a:solidFill>
-                <a:latin typeface="微软雅黑" panose="020B0503020204020204" charset="-122"/>
-                <a:ea typeface="微软雅黑" panose="020B0503020204020204" charset="-122"/>
-                <a:cs typeface="微软雅黑" panose="020B0503020204020204" charset="-122"/>
+                <a:latin typeface="微软雅黑"/>
+                <a:ea typeface="微软雅黑"/>
+                <a:cs typeface="微软雅黑"/>
               </a:rPr>
               <a:t>2</a:t>
             </a:r>
-            <a:endParaRPr sz="1100" b="1" i="0">
-              <a:solidFill>
-                <a:srgbClr val="FFFFFF"/>
-              </a:solidFill>
-              <a:latin typeface="微软雅黑" panose="020B0503020204020204" charset="-122"/>
-              <a:ea typeface="微软雅黑" panose="020B0503020204020204" charset="-122"/>
-              <a:cs typeface="微软雅黑" panose="020B0503020204020204" charset="-122"/>
-            </a:endParaRPr>
           </a:p>
         </p:txBody>
       </p:sp>
@@ -3622,7 +3577,7 @@
           <a:noFill/>
         </p:spPr>
         <p:txBody>
-          <a:bodyPr wrap="square" lIns="0" tIns="0" rIns="0" bIns="0" anchor="t">
+          <a:bodyPr wrap="square" anchor="t" lIns="0" rIns="0" tIns="0" bIns="0">
             <a:spAutoFit/>
           </a:bodyPr>
           <a:lstStyle/>
@@ -3637,20 +3592,12 @@
                 <a:solidFill>
                   <a:srgbClr val="FFFFFF"/>
                 </a:solidFill>
-                <a:latin typeface="微软雅黑" panose="020B0503020204020204" charset="-122"/>
-                <a:ea typeface="微软雅黑" panose="020B0503020204020204" charset="-122"/>
-                <a:cs typeface="微软雅黑" panose="020B0503020204020204" charset="-122"/>
+                <a:latin typeface="微软雅黑"/>
+                <a:ea typeface="微软雅黑"/>
+                <a:cs typeface="微软雅黑"/>
               </a:rPr>
               <a:t>有验收</a:t>
             </a:r>
-            <a:endParaRPr sz="1300" b="1" i="0">
-              <a:solidFill>
-                <a:srgbClr val="FFFFFF"/>
-              </a:solidFill>
-              <a:latin typeface="微软雅黑" panose="020B0503020204020204" charset="-122"/>
-              <a:ea typeface="微软雅黑" panose="020B0503020204020204" charset="-122"/>
-              <a:cs typeface="微软雅黑" panose="020B0503020204020204" charset="-122"/>
-            </a:endParaRPr>
           </a:p>
           <a:p>
             <a:pPr algn="l">
@@ -3663,20 +3610,12 @@
                 <a:solidFill>
                   <a:srgbClr val="7F9DC4"/>
                 </a:solidFill>
-                <a:latin typeface="微软雅黑" panose="020B0503020204020204" charset="-122"/>
-                <a:ea typeface="微软雅黑" panose="020B0503020204020204" charset="-122"/>
-                <a:cs typeface="微软雅黑" panose="020B0503020204020204" charset="-122"/>
+                <a:latin typeface="微软雅黑"/>
+                <a:ea typeface="微软雅黑"/>
+                <a:cs typeface="微软雅黑"/>
               </a:rPr>
               <a:t>71 项自动化检查，改坏了立刻知道</a:t>
             </a:r>
-            <a:endParaRPr sz="950" b="0" i="0">
-              <a:solidFill>
-                <a:srgbClr val="7F9DC4"/>
-              </a:solidFill>
-              <a:latin typeface="微软雅黑" panose="020B0503020204020204" charset="-122"/>
-              <a:ea typeface="微软雅黑" panose="020B0503020204020204" charset="-122"/>
-              <a:cs typeface="微软雅黑" panose="020B0503020204020204" charset="-122"/>
-            </a:endParaRPr>
           </a:p>
         </p:txBody>
       </p:sp>
@@ -3767,7 +3706,7 @@
           </a:fontRef>
         </p:style>
         <p:txBody>
-          <a:bodyPr lIns="0" tIns="0" rIns="0" bIns="0" rtlCol="0" anchor="ctr"/>
+          <a:bodyPr rtlCol="0" anchor="ctr" lIns="0" rIns="0" tIns="0" bIns="0"/>
           <a:lstStyle/>
           <a:p>
             <a:pPr algn="ctr"/>
@@ -3776,20 +3715,12 @@
                 <a:solidFill>
                   <a:srgbClr val="FFFFFF"/>
                 </a:solidFill>
-                <a:latin typeface="微软雅黑" panose="020B0503020204020204" charset="-122"/>
-                <a:ea typeface="微软雅黑" panose="020B0503020204020204" charset="-122"/>
-                <a:cs typeface="微软雅黑" panose="020B0503020204020204" charset="-122"/>
+                <a:latin typeface="微软雅黑"/>
+                <a:ea typeface="微软雅黑"/>
+                <a:cs typeface="微软雅黑"/>
               </a:rPr>
               <a:t>3</a:t>
             </a:r>
-            <a:endParaRPr sz="1100" b="1" i="0">
-              <a:solidFill>
-                <a:srgbClr val="FFFFFF"/>
-              </a:solidFill>
-              <a:latin typeface="微软雅黑" panose="020B0503020204020204" charset="-122"/>
-              <a:ea typeface="微软雅黑" panose="020B0503020204020204" charset="-122"/>
-              <a:cs typeface="微软雅黑" panose="020B0503020204020204" charset="-122"/>
-            </a:endParaRPr>
           </a:p>
         </p:txBody>
       </p:sp>
@@ -3810,7 +3741,7 @@
           <a:noFill/>
         </p:spPr>
         <p:txBody>
-          <a:bodyPr wrap="square" lIns="0" tIns="0" rIns="0" bIns="0" anchor="t">
+          <a:bodyPr wrap="square" anchor="t" lIns="0" rIns="0" tIns="0" bIns="0">
             <a:spAutoFit/>
           </a:bodyPr>
           <a:lstStyle/>
@@ -3825,20 +3756,12 @@
                 <a:solidFill>
                   <a:srgbClr val="FFFFFF"/>
                 </a:solidFill>
-                <a:latin typeface="微软雅黑" panose="020B0503020204020204" charset="-122"/>
-                <a:ea typeface="微软雅黑" panose="020B0503020204020204" charset="-122"/>
-                <a:cs typeface="微软雅黑" panose="020B0503020204020204" charset="-122"/>
+                <a:latin typeface="微软雅黑"/>
+                <a:ea typeface="微软雅黑"/>
+                <a:cs typeface="微软雅黑"/>
               </a:rPr>
               <a:t>已脱敏</a:t>
             </a:r>
-            <a:endParaRPr sz="1300" b="1" i="0">
-              <a:solidFill>
-                <a:srgbClr val="FFFFFF"/>
-              </a:solidFill>
-              <a:latin typeface="微软雅黑" panose="020B0503020204020204" charset="-122"/>
-              <a:ea typeface="微软雅黑" panose="020B0503020204020204" charset="-122"/>
-              <a:cs typeface="微软雅黑" panose="020B0503020204020204" charset="-122"/>
-            </a:endParaRPr>
           </a:p>
           <a:p>
             <a:pPr algn="l">
@@ -3851,20 +3774,12 @@
                 <a:solidFill>
                   <a:srgbClr val="7F9DC4"/>
                 </a:solidFill>
-                <a:latin typeface="微软雅黑" panose="020B0503020204020204" charset="-122"/>
-                <a:ea typeface="微软雅黑" panose="020B0503020204020204" charset="-122"/>
-                <a:cs typeface="微软雅黑" panose="020B0503020204020204" charset="-122"/>
+                <a:latin typeface="微软雅黑"/>
+                <a:ea typeface="微软雅黑"/>
+                <a:cs typeface="微软雅黑"/>
               </a:rPr>
               <a:t>示例机构名与合成数据，可安全公开</a:t>
             </a:r>
-            <a:endParaRPr sz="950" b="0" i="0">
-              <a:solidFill>
-                <a:srgbClr val="7F9DC4"/>
-              </a:solidFill>
-              <a:latin typeface="微软雅黑" panose="020B0503020204020204" charset="-122"/>
-              <a:ea typeface="微软雅黑" panose="020B0503020204020204" charset="-122"/>
-              <a:cs typeface="微软雅黑" panose="020B0503020204020204" charset="-122"/>
-            </a:endParaRPr>
           </a:p>
         </p:txBody>
       </p:sp>
@@ -3877,7 +3792,7 @@
 </file>
 
 <file path=ppt/slides/slide10.xml><?xml version="1.0" encoding="utf-8"?>
-<p:sld xmlns:a="http://schemas.openxmlformats.org/drawingml/2006/main" xmlns:r="http://schemas.openxmlformats.org/officeDocument/2006/relationships" xmlns:p="http://schemas.openxmlformats.org/presentationml/2006/main">
+<p:sld xmlns:a="http://schemas.openxmlformats.org/drawingml/2006/main" xmlns:p="http://schemas.openxmlformats.org/presentationml/2006/main" xmlns:r="http://schemas.openxmlformats.org/officeDocument/2006/relationships">
   <p:cSld>
     <p:spTree>
       <p:nvGrpSpPr>
@@ -3947,7 +3862,7 @@
           <a:noFill/>
         </p:spPr>
         <p:txBody>
-          <a:bodyPr wrap="square" lIns="0" tIns="0" rIns="0" bIns="0" anchor="t">
+          <a:bodyPr wrap="square" anchor="t" lIns="0" rIns="0" tIns="0" bIns="0">
             <a:spAutoFit/>
           </a:bodyPr>
           <a:lstStyle/>
@@ -3958,20 +3873,12 @@
                 <a:solidFill>
                   <a:srgbClr val="7FE3FF"/>
                 </a:solidFill>
-                <a:latin typeface="微软雅黑" panose="020B0503020204020204" charset="-122"/>
-                <a:ea typeface="微软雅黑" panose="020B0503020204020204" charset="-122"/>
-                <a:cs typeface="微软雅黑" panose="020B0503020204020204" charset="-122"/>
+                <a:latin typeface="微软雅黑"/>
+                <a:ea typeface="微软雅黑"/>
+                <a:cs typeface="微软雅黑"/>
               </a:rPr>
               <a:t>03 · 怎么用</a:t>
             </a:r>
-            <a:endParaRPr sz="1150" b="1" i="0">
-              <a:solidFill>
-                <a:srgbClr val="7FE3FF"/>
-              </a:solidFill>
-              <a:latin typeface="微软雅黑" panose="020B0503020204020204" charset="-122"/>
-              <a:ea typeface="微软雅黑" panose="020B0503020204020204" charset="-122"/>
-              <a:cs typeface="微软雅黑" panose="020B0503020204020204" charset="-122"/>
-            </a:endParaRPr>
           </a:p>
         </p:txBody>
       </p:sp>
@@ -3992,7 +3899,7 @@
           <a:noFill/>
         </p:spPr>
         <p:txBody>
-          <a:bodyPr wrap="square" lIns="0" tIns="0" rIns="0" bIns="0" anchor="t">
+          <a:bodyPr wrap="square" anchor="t" lIns="0" rIns="0" tIns="0" bIns="0">
             <a:spAutoFit/>
           </a:bodyPr>
           <a:lstStyle/>
@@ -4003,20 +3910,12 @@
                 <a:solidFill>
                   <a:srgbClr val="ECF7FF"/>
                 </a:solidFill>
-                <a:latin typeface="微软雅黑" panose="020B0503020204020204" charset="-122"/>
-                <a:ea typeface="微软雅黑" panose="020B0503020204020204" charset="-122"/>
-                <a:cs typeface="微软雅黑" panose="020B0503020204020204" charset="-122"/>
+                <a:latin typeface="微软雅黑"/>
+                <a:ea typeface="微软雅黑"/>
+                <a:cs typeface="微软雅黑"/>
               </a:rPr>
               <a:t>两个入口，按需要选</a:t>
             </a:r>
-            <a:endParaRPr sz="2700" b="1" i="0">
-              <a:solidFill>
-                <a:srgbClr val="ECF7FF"/>
-              </a:solidFill>
-              <a:latin typeface="微软雅黑" panose="020B0503020204020204" charset="-122"/>
-              <a:ea typeface="微软雅黑" panose="020B0503020204020204" charset="-122"/>
-              <a:cs typeface="微软雅黑" panose="020B0503020204020204" charset="-122"/>
-            </a:endParaRPr>
           </a:p>
         </p:txBody>
       </p:sp>
@@ -4037,7 +3936,7 @@
           <a:noFill/>
         </p:spPr>
         <p:txBody>
-          <a:bodyPr wrap="square" lIns="0" tIns="0" rIns="0" bIns="0" anchor="t">
+          <a:bodyPr wrap="square" anchor="t" lIns="0" rIns="0" tIns="0" bIns="0">
             <a:spAutoFit/>
           </a:bodyPr>
           <a:lstStyle/>
@@ -4048,20 +3947,12 @@
                 <a:solidFill>
                   <a:srgbClr val="7E9EC4"/>
                 </a:solidFill>
-                <a:latin typeface="微软雅黑" panose="020B0503020204020204" charset="-122"/>
-                <a:ea typeface="微软雅黑" panose="020B0503020204020204" charset="-122"/>
-                <a:cs typeface="微软雅黑" panose="020B0503020204020204" charset="-122"/>
+                <a:latin typeface="微软雅黑"/>
+                <a:ea typeface="微软雅黑"/>
+                <a:cs typeface="微软雅黑"/>
               </a:rPr>
               <a:t>急救绿道 · 10 / 13</a:t>
             </a:r>
-            <a:endParaRPr sz="1000" b="0" i="0">
-              <a:solidFill>
-                <a:srgbClr val="7E9EC4"/>
-              </a:solidFill>
-              <a:latin typeface="微软雅黑" panose="020B0503020204020204" charset="-122"/>
-              <a:ea typeface="微软雅黑" panose="020B0503020204020204" charset="-122"/>
-              <a:cs typeface="微软雅黑" panose="020B0503020204020204" charset="-122"/>
-            </a:endParaRPr>
           </a:p>
         </p:txBody>
       </p:sp>
@@ -4174,7 +4065,7 @@
           <a:noFill/>
         </p:spPr>
         <p:txBody>
-          <a:bodyPr wrap="square" lIns="0" tIns="0" rIns="0" bIns="0" anchor="t">
+          <a:bodyPr wrap="square" anchor="t" lIns="0" rIns="0" tIns="0" bIns="0">
             <a:spAutoFit/>
           </a:bodyPr>
           <a:lstStyle/>
@@ -4189,20 +4080,12 @@
                 <a:solidFill>
                   <a:srgbClr val="7E9EC4"/>
                 </a:solidFill>
-                <a:latin typeface="微软雅黑" panose="020B0503020204020204" charset="-122"/>
-                <a:ea typeface="微软雅黑" panose="020B0503020204020204" charset="-122"/>
-                <a:cs typeface="微软雅黑" panose="020B0503020204020204" charset="-122"/>
+                <a:latin typeface="微软雅黑"/>
+                <a:ea typeface="微软雅黑"/>
+                <a:cs typeface="微软雅黑"/>
               </a:rPr>
               <a:t>本地完整版</a:t>
             </a:r>
-            <a:endParaRPr sz="1150" b="1" i="0">
-              <a:solidFill>
-                <a:srgbClr val="7E9EC4"/>
-              </a:solidFill>
-              <a:latin typeface="微软雅黑" panose="020B0503020204020204" charset="-122"/>
-              <a:ea typeface="微软雅黑" panose="020B0503020204020204" charset="-122"/>
-              <a:cs typeface="微软雅黑" panose="020B0503020204020204" charset="-122"/>
-            </a:endParaRPr>
           </a:p>
           <a:p>
             <a:pPr algn="l">
@@ -4215,20 +4098,12 @@
                 <a:solidFill>
                   <a:srgbClr val="ECF7FF"/>
                 </a:solidFill>
-                <a:latin typeface="微软雅黑" panose="020B0503020204020204" charset="-122"/>
-                <a:ea typeface="微软雅黑" panose="020B0503020204020204" charset="-122"/>
-                <a:cs typeface="微软雅黑" panose="020B0503020204020204" charset="-122"/>
+                <a:latin typeface="微软雅黑"/>
+                <a:ea typeface="微软雅黑"/>
+                <a:cs typeface="微软雅黑"/>
               </a:rPr>
               <a:t>功能齐全，装在电脑上跑</a:t>
             </a:r>
-            <a:endParaRPr sz="1800" b="1" i="0">
-              <a:solidFill>
-                <a:srgbClr val="ECF7FF"/>
-              </a:solidFill>
-              <a:latin typeface="微软雅黑" panose="020B0503020204020204" charset="-122"/>
-              <a:ea typeface="微软雅黑" panose="020B0503020204020204" charset="-122"/>
-              <a:cs typeface="微软雅黑" panose="020B0503020204020204" charset="-122"/>
-            </a:endParaRPr>
           </a:p>
           <a:p>
             <a:pPr algn="l">
@@ -4241,20 +4116,12 @@
                 <a:solidFill>
                   <a:srgbClr val="5CC8FF"/>
                 </a:solidFill>
-                <a:latin typeface="微软雅黑" panose="020B0503020204020204" charset="-122"/>
-                <a:ea typeface="微软雅黑" panose="020B0503020204020204" charset="-122"/>
-                <a:cs typeface="微软雅黑" panose="020B0503020204020204" charset="-122"/>
+                <a:latin typeface="微软雅黑"/>
+                <a:ea typeface="微软雅黑"/>
+                <a:cs typeface="微软雅黑"/>
               </a:rPr>
               <a:t>http://127.0.0.1:3000/admin/</a:t>
             </a:r>
-            <a:endParaRPr sz="1100" b="0" i="0">
-              <a:solidFill>
-                <a:srgbClr val="5CC8FF"/>
-              </a:solidFill>
-              <a:latin typeface="微软雅黑" panose="020B0503020204020204" charset="-122"/>
-              <a:ea typeface="微软雅黑" panose="020B0503020204020204" charset="-122"/>
-              <a:cs typeface="微软雅黑" panose="020B0503020204020204" charset="-122"/>
-            </a:endParaRPr>
           </a:p>
           <a:p>
             <a:pPr algn="l">
@@ -4270,20 +4137,12 @@
                 <a:solidFill>
                   <a:srgbClr val="BBD4EC"/>
                 </a:solidFill>
-                <a:latin typeface="微软雅黑" panose="020B0503020204020204" charset="-122"/>
-                <a:ea typeface="微软雅黑" panose="020B0503020204020204" charset="-122"/>
-                <a:cs typeface="微软雅黑" panose="020B0503020204020204" charset="-122"/>
+                <a:latin typeface="微软雅黑"/>
+                <a:ea typeface="微软雅黑"/>
+                <a:cs typeface="微软雅黑"/>
               </a:rPr>
               <a:t>· 登录、增删改、报表导出全都能用</a:t>
             </a:r>
-            <a:endParaRPr sz="1250" b="0" i="0">
-              <a:solidFill>
-                <a:srgbClr val="BBD4EC"/>
-              </a:solidFill>
-              <a:latin typeface="微软雅黑" panose="020B0503020204020204" charset="-122"/>
-              <a:ea typeface="微软雅黑" panose="020B0503020204020204" charset="-122"/>
-              <a:cs typeface="微软雅黑" panose="020B0503020204020204" charset="-122"/>
-            </a:endParaRPr>
           </a:p>
           <a:p>
             <a:pPr algn="l">
@@ -4299,20 +4158,12 @@
                 <a:solidFill>
                   <a:srgbClr val="BBD4EC"/>
                 </a:solidFill>
-                <a:latin typeface="微软雅黑" panose="020B0503020204020204" charset="-122"/>
-                <a:ea typeface="微软雅黑" panose="020B0503020204020204" charset="-122"/>
-                <a:cs typeface="微软雅黑" panose="020B0503020204020204" charset="-122"/>
+                <a:latin typeface="微软雅黑"/>
+                <a:ea typeface="微软雅黑"/>
+                <a:cs typeface="微软雅黑"/>
               </a:rPr>
               <a:t>· 数据存在本机，不外传</a:t>
             </a:r>
-            <a:endParaRPr sz="1250" b="0" i="0">
-              <a:solidFill>
-                <a:srgbClr val="BBD4EC"/>
-              </a:solidFill>
-              <a:latin typeface="微软雅黑" panose="020B0503020204020204" charset="-122"/>
-              <a:ea typeface="微软雅黑" panose="020B0503020204020204" charset="-122"/>
-              <a:cs typeface="微软雅黑" panose="020B0503020204020204" charset="-122"/>
-            </a:endParaRPr>
           </a:p>
           <a:p>
             <a:pPr algn="l">
@@ -4328,20 +4179,12 @@
                 <a:solidFill>
                   <a:srgbClr val="BBD4EC"/>
                 </a:solidFill>
-                <a:latin typeface="微软雅黑" panose="020B0503020204020204" charset="-122"/>
-                <a:ea typeface="微软雅黑" panose="020B0503020204020204" charset="-122"/>
-                <a:cs typeface="微软雅黑" panose="020B0503020204020204" charset="-122"/>
+                <a:latin typeface="微软雅黑"/>
+                <a:ea typeface="微软雅黑"/>
+                <a:cs typeface="微软雅黑"/>
               </a:rPr>
               <a:t>· 双击「启动.bat」即可，无需装环境</a:t>
             </a:r>
-            <a:endParaRPr sz="1250" b="0" i="0">
-              <a:solidFill>
-                <a:srgbClr val="BBD4EC"/>
-              </a:solidFill>
-              <a:latin typeface="微软雅黑" panose="020B0503020204020204" charset="-122"/>
-              <a:ea typeface="微软雅黑" panose="020B0503020204020204" charset="-122"/>
-              <a:cs typeface="微软雅黑" panose="020B0503020204020204" charset="-122"/>
-            </a:endParaRPr>
           </a:p>
           <a:p>
             <a:pPr algn="l">
@@ -4357,20 +4200,12 @@
                 <a:solidFill>
                   <a:srgbClr val="BBD4EC"/>
                 </a:solidFill>
-                <a:latin typeface="微软雅黑" panose="020B0503020204020204" charset="-122"/>
-                <a:ea typeface="微软雅黑" panose="020B0503020204020204" charset="-122"/>
-                <a:cs typeface="微软雅黑" panose="020B0503020204020204" charset="-122"/>
+                <a:latin typeface="微软雅黑"/>
+                <a:ea typeface="微软雅黑"/>
+                <a:cs typeface="微软雅黑"/>
               </a:rPr>
               <a:t>· 适合：院内日常使用、演示汇报</a:t>
             </a:r>
-            <a:endParaRPr sz="1250" b="0" i="0">
-              <a:solidFill>
-                <a:srgbClr val="BBD4EC"/>
-              </a:solidFill>
-              <a:latin typeface="微软雅黑" panose="020B0503020204020204" charset="-122"/>
-              <a:ea typeface="微软雅黑" panose="020B0503020204020204" charset="-122"/>
-              <a:cs typeface="微软雅黑" panose="020B0503020204020204" charset="-122"/>
-            </a:endParaRPr>
           </a:p>
         </p:txBody>
       </p:sp>
@@ -4483,7 +4318,7 @@
           <a:noFill/>
         </p:spPr>
         <p:txBody>
-          <a:bodyPr wrap="square" lIns="0" tIns="0" rIns="0" bIns="0" anchor="t">
+          <a:bodyPr wrap="square" anchor="t" lIns="0" rIns="0" tIns="0" bIns="0">
             <a:spAutoFit/>
           </a:bodyPr>
           <a:lstStyle/>
@@ -4498,20 +4333,12 @@
                 <a:solidFill>
                   <a:srgbClr val="7E9EC4"/>
                 </a:solidFill>
-                <a:latin typeface="微软雅黑" panose="020B0503020204020204" charset="-122"/>
-                <a:ea typeface="微软雅黑" panose="020B0503020204020204" charset="-122"/>
-                <a:cs typeface="微软雅黑" panose="020B0503020204020204" charset="-122"/>
+                <a:latin typeface="微软雅黑"/>
+                <a:ea typeface="微软雅黑"/>
+                <a:cs typeface="微软雅黑"/>
               </a:rPr>
               <a:t>公网演示版</a:t>
             </a:r>
-            <a:endParaRPr sz="1150" b="1" i="0">
-              <a:solidFill>
-                <a:srgbClr val="7E9EC4"/>
-              </a:solidFill>
-              <a:latin typeface="微软雅黑" panose="020B0503020204020204" charset="-122"/>
-              <a:ea typeface="微软雅黑" panose="020B0503020204020204" charset="-122"/>
-              <a:cs typeface="微软雅黑" panose="020B0503020204020204" charset="-122"/>
-            </a:endParaRPr>
           </a:p>
           <a:p>
             <a:pPr algn="l">
@@ -4524,20 +4351,12 @@
                 <a:solidFill>
                   <a:srgbClr val="ECF7FF"/>
                 </a:solidFill>
-                <a:latin typeface="微软雅黑" panose="020B0503020204020204" charset="-122"/>
-                <a:ea typeface="微软雅黑" panose="020B0503020204020204" charset="-122"/>
-                <a:cs typeface="微软雅黑" panose="020B0503020204020204" charset="-122"/>
+                <a:latin typeface="微软雅黑"/>
+                <a:ea typeface="微软雅黑"/>
+                <a:cs typeface="微软雅黑"/>
               </a:rPr>
               <a:t>发个链接就能看，装了就能用</a:t>
             </a:r>
-            <a:endParaRPr sz="1800" b="1" i="0">
-              <a:solidFill>
-                <a:srgbClr val="ECF7FF"/>
-              </a:solidFill>
-              <a:latin typeface="微软雅黑" panose="020B0503020204020204" charset="-122"/>
-              <a:ea typeface="微软雅黑" panose="020B0503020204020204" charset="-122"/>
-              <a:cs typeface="微软雅黑" panose="020B0503020204020204" charset="-122"/>
-            </a:endParaRPr>
           </a:p>
           <a:p>
             <a:pPr algn="l">
@@ -4550,20 +4369,12 @@
                 <a:solidFill>
                   <a:srgbClr val="5CC8FF"/>
                 </a:solidFill>
-                <a:latin typeface="微软雅黑" panose="020B0503020204020204" charset="-122"/>
-                <a:ea typeface="微软雅黑" panose="020B0503020204020204" charset="-122"/>
-                <a:cs typeface="微软雅黑" panose="020B0503020204020204" charset="-122"/>
+                <a:latin typeface="微软雅黑"/>
+                <a:ea typeface="微软雅黑"/>
+                <a:cs typeface="微软雅黑"/>
               </a:rPr>
               <a:t>popostar11.github.io/hospital-data-platform</a:t>
             </a:r>
-            <a:endParaRPr sz="1100" b="0" i="0">
-              <a:solidFill>
-                <a:srgbClr val="5CC8FF"/>
-              </a:solidFill>
-              <a:latin typeface="微软雅黑" panose="020B0503020204020204" charset="-122"/>
-              <a:ea typeface="微软雅黑" panose="020B0503020204020204" charset="-122"/>
-              <a:cs typeface="微软雅黑" panose="020B0503020204020204" charset="-122"/>
-            </a:endParaRPr>
           </a:p>
           <a:p>
             <a:pPr algn="l">
@@ -4579,20 +4390,12 @@
                 <a:solidFill>
                   <a:srgbClr val="BBD4EC"/>
                 </a:solidFill>
-                <a:latin typeface="微软雅黑" panose="020B0503020204020204" charset="-122"/>
-                <a:ea typeface="微软雅黑" panose="020B0503020204020204" charset="-122"/>
-                <a:cs typeface="微软雅黑" panose="020B0503020204020204" charset="-122"/>
+                <a:latin typeface="微软雅黑"/>
+                <a:ea typeface="微软雅黑"/>
+                <a:cs typeface="微软雅黑"/>
               </a:rPr>
               <a:t>· 任何人、任何设备打开即看大屏</a:t>
             </a:r>
-            <a:endParaRPr sz="1250" b="0" i="0">
-              <a:solidFill>
-                <a:srgbClr val="BBD4EC"/>
-              </a:solidFill>
-              <a:latin typeface="微软雅黑" panose="020B0503020204020204" charset="-122"/>
-              <a:ea typeface="微软雅黑" panose="020B0503020204020204" charset="-122"/>
-              <a:cs typeface="微软雅黑" panose="020B0503020204020204" charset="-122"/>
-            </a:endParaRPr>
           </a:p>
           <a:p>
             <a:pPr algn="l">
@@ -4608,20 +4411,12 @@
                 <a:solidFill>
                   <a:srgbClr val="BBD4EC"/>
                 </a:solidFill>
-                <a:latin typeface="微软雅黑" panose="020B0503020204020204" charset="-122"/>
-                <a:ea typeface="微软雅黑" panose="020B0503020204020204" charset="-122"/>
-                <a:cs typeface="微软雅黑" panose="020B0503020204020204" charset="-122"/>
+                <a:latin typeface="微软雅黑"/>
+                <a:ea typeface="微软雅黑"/>
+                <a:cs typeface="微软雅黑"/>
               </a:rPr>
               <a:t>· 数据是导出的静态快照，只读</a:t>
             </a:r>
-            <a:endParaRPr sz="1250" b="0" i="0">
-              <a:solidFill>
-                <a:srgbClr val="BBD4EC"/>
-              </a:solidFill>
-              <a:latin typeface="微软雅黑" panose="020B0503020204020204" charset="-122"/>
-              <a:ea typeface="微软雅黑" panose="020B0503020204020204" charset="-122"/>
-              <a:cs typeface="微软雅黑" panose="020B0503020204020204" charset="-122"/>
-            </a:endParaRPr>
           </a:p>
           <a:p>
             <a:pPr algn="l">
@@ -4637,20 +4432,12 @@
                 <a:solidFill>
                   <a:srgbClr val="BBD4EC"/>
                 </a:solidFill>
-                <a:latin typeface="微软雅黑" panose="020B0503020204020204" charset="-122"/>
-                <a:ea typeface="微软雅黑" panose="020B0503020204020204" charset="-122"/>
-                <a:cs typeface="微软雅黑" panose="020B0503020204020204" charset="-122"/>
+                <a:latin typeface="微软雅黑"/>
+                <a:ea typeface="微软雅黑"/>
+                <a:cs typeface="微软雅黑"/>
               </a:rPr>
               <a:t>· 不需要服务器、不需要账号、不花钱</a:t>
             </a:r>
-            <a:endParaRPr sz="1250" b="0" i="0">
-              <a:solidFill>
-                <a:srgbClr val="BBD4EC"/>
-              </a:solidFill>
-              <a:latin typeface="微软雅黑" panose="020B0503020204020204" charset="-122"/>
-              <a:ea typeface="微软雅黑" panose="020B0503020204020204" charset="-122"/>
-              <a:cs typeface="微软雅黑" panose="020B0503020204020204" charset="-122"/>
-            </a:endParaRPr>
           </a:p>
           <a:p>
             <a:pPr algn="l">
@@ -4666,20 +4453,12 @@
                 <a:solidFill>
                   <a:srgbClr val="BBD4EC"/>
                 </a:solidFill>
-                <a:latin typeface="微软雅黑" panose="020B0503020204020204" charset="-122"/>
-                <a:ea typeface="微软雅黑" panose="020B0503020204020204" charset="-122"/>
-                <a:cs typeface="微软雅黑" panose="020B0503020204020204" charset="-122"/>
+                <a:latin typeface="微软雅黑"/>
+                <a:ea typeface="微软雅黑"/>
+                <a:cs typeface="微软雅黑"/>
               </a:rPr>
               <a:t>· 适合：分享给同行、外出演示</a:t>
             </a:r>
-            <a:endParaRPr sz="1250" b="0" i="0">
-              <a:solidFill>
-                <a:srgbClr val="BBD4EC"/>
-              </a:solidFill>
-              <a:latin typeface="微软雅黑" panose="020B0503020204020204" charset="-122"/>
-              <a:ea typeface="微软雅黑" panose="020B0503020204020204" charset="-122"/>
-              <a:cs typeface="微软雅黑" panose="020B0503020204020204" charset="-122"/>
-            </a:endParaRPr>
           </a:p>
         </p:txBody>
       </p:sp>
@@ -4692,7 +4471,7 @@
 </file>
 
 <file path=ppt/slides/slide11.xml><?xml version="1.0" encoding="utf-8"?>
-<p:sld xmlns:a="http://schemas.openxmlformats.org/drawingml/2006/main" xmlns:r="http://schemas.openxmlformats.org/officeDocument/2006/relationships" xmlns:p="http://schemas.openxmlformats.org/presentationml/2006/main">
+<p:sld xmlns:a="http://schemas.openxmlformats.org/drawingml/2006/main" xmlns:p="http://schemas.openxmlformats.org/presentationml/2006/main" xmlns:r="http://schemas.openxmlformats.org/officeDocument/2006/relationships">
   <p:cSld>
     <p:spTree>
       <p:nvGrpSpPr>
@@ -4762,7 +4541,7 @@
           <a:noFill/>
         </p:spPr>
         <p:txBody>
-          <a:bodyPr wrap="square" lIns="0" tIns="0" rIns="0" bIns="0" anchor="t">
+          <a:bodyPr wrap="square" anchor="t" lIns="0" rIns="0" tIns="0" bIns="0">
             <a:spAutoFit/>
           </a:bodyPr>
           <a:lstStyle/>
@@ -4773,20 +4552,12 @@
                 <a:solidFill>
                   <a:srgbClr val="7FE3FF"/>
                 </a:solidFill>
-                <a:latin typeface="微软雅黑" panose="020B0503020204020204" charset="-122"/>
-                <a:ea typeface="微软雅黑" panose="020B0503020204020204" charset="-122"/>
-                <a:cs typeface="微软雅黑" panose="020B0503020204020204" charset="-122"/>
+                <a:latin typeface="微软雅黑"/>
+                <a:ea typeface="微软雅黑"/>
+                <a:cs typeface="微软雅黑"/>
               </a:rPr>
               <a:t>02 · 怎么做的</a:t>
             </a:r>
-            <a:endParaRPr sz="1150" b="1" i="0">
-              <a:solidFill>
-                <a:srgbClr val="7FE3FF"/>
-              </a:solidFill>
-              <a:latin typeface="微软雅黑" panose="020B0503020204020204" charset="-122"/>
-              <a:ea typeface="微软雅黑" panose="020B0503020204020204" charset="-122"/>
-              <a:cs typeface="微软雅黑" panose="020B0503020204020204" charset="-122"/>
-            </a:endParaRPr>
           </a:p>
         </p:txBody>
       </p:sp>
@@ -4807,7 +4578,7 @@
           <a:noFill/>
         </p:spPr>
         <p:txBody>
-          <a:bodyPr wrap="square" lIns="0" tIns="0" rIns="0" bIns="0" anchor="t">
+          <a:bodyPr wrap="square" anchor="t" lIns="0" rIns="0" tIns="0" bIns="0">
             <a:spAutoFit/>
           </a:bodyPr>
           <a:lstStyle/>
@@ -4818,20 +4589,12 @@
                 <a:solidFill>
                   <a:srgbClr val="ECF7FF"/>
                 </a:solidFill>
-                <a:latin typeface="微软雅黑" panose="020B0503020204020204" charset="-122"/>
-                <a:ea typeface="微软雅黑" panose="020B0503020204020204" charset="-122"/>
-                <a:cs typeface="微软雅黑" panose="020B0503020204020204" charset="-122"/>
+                <a:latin typeface="微软雅黑"/>
+                <a:ea typeface="微软雅黑"/>
+                <a:cs typeface="微软雅黑"/>
               </a:rPr>
               <a:t>几个关键选择，以及为什么</a:t>
             </a:r>
-            <a:endParaRPr sz="2700" b="1" i="0">
-              <a:solidFill>
-                <a:srgbClr val="ECF7FF"/>
-              </a:solidFill>
-              <a:latin typeface="微软雅黑" panose="020B0503020204020204" charset="-122"/>
-              <a:ea typeface="微软雅黑" panose="020B0503020204020204" charset="-122"/>
-              <a:cs typeface="微软雅黑" panose="020B0503020204020204" charset="-122"/>
-            </a:endParaRPr>
           </a:p>
         </p:txBody>
       </p:sp>
@@ -4852,7 +4615,7 @@
           <a:noFill/>
         </p:spPr>
         <p:txBody>
-          <a:bodyPr wrap="square" lIns="0" tIns="0" rIns="0" bIns="0" anchor="t">
+          <a:bodyPr wrap="square" anchor="t" lIns="0" rIns="0" tIns="0" bIns="0">
             <a:spAutoFit/>
           </a:bodyPr>
           <a:lstStyle/>
@@ -4863,20 +4626,12 @@
                 <a:solidFill>
                   <a:srgbClr val="7E9EC4"/>
                 </a:solidFill>
-                <a:latin typeface="微软雅黑" panose="020B0503020204020204" charset="-122"/>
-                <a:ea typeface="微软雅黑" panose="020B0503020204020204" charset="-122"/>
-                <a:cs typeface="微软雅黑" panose="020B0503020204020204" charset="-122"/>
+                <a:latin typeface="微软雅黑"/>
+                <a:ea typeface="微软雅黑"/>
+                <a:cs typeface="微软雅黑"/>
               </a:rPr>
               <a:t>急救绿道 · 11 / 13</a:t>
             </a:r>
-            <a:endParaRPr sz="1000" b="0" i="0">
-              <a:solidFill>
-                <a:srgbClr val="7E9EC4"/>
-              </a:solidFill>
-              <a:latin typeface="微软雅黑" panose="020B0503020204020204" charset="-122"/>
-              <a:ea typeface="微软雅黑" panose="020B0503020204020204" charset="-122"/>
-              <a:cs typeface="微软雅黑" panose="020B0503020204020204" charset="-122"/>
-            </a:endParaRPr>
           </a:p>
         </p:txBody>
       </p:sp>
@@ -4914,20 +4669,12 @@
                           <a:solidFill>
                             <a:srgbClr val="7FE3FF"/>
                           </a:solidFill>
-                          <a:latin typeface="微软雅黑" panose="020B0503020204020204" charset="-122"/>
-                          <a:ea typeface="微软雅黑" panose="020B0503020204020204" charset="-122"/>
-                          <a:cs typeface="微软雅黑" panose="020B0503020204020204" charset="-122"/>
+                          <a:latin typeface="微软雅黑"/>
+                          <a:ea typeface="微软雅黑"/>
+                          <a:cs typeface="微软雅黑"/>
                         </a:rPr>
                         <a:t>选择</a:t>
                       </a:r>
-                      <a:endParaRPr sz="1100" b="1" i="0">
-                        <a:solidFill>
-                          <a:srgbClr val="7FE3FF"/>
-                        </a:solidFill>
-                        <a:latin typeface="微软雅黑" panose="020B0503020204020204" charset="-122"/>
-                        <a:ea typeface="微软雅黑" panose="020B0503020204020204" charset="-122"/>
-                        <a:cs typeface="微软雅黑" panose="020B0503020204020204" charset="-122"/>
-                      </a:endParaRPr>
                     </a:p>
                   </a:txBody>
                   <a:tcPr marL="100584" marR="100584" marT="41148" marB="41148" anchor="ctr">
@@ -4946,20 +4693,12 @@
                           <a:solidFill>
                             <a:srgbClr val="7FE3FF"/>
                           </a:solidFill>
-                          <a:latin typeface="微软雅黑" panose="020B0503020204020204" charset="-122"/>
-                          <a:ea typeface="微软雅黑" panose="020B0503020204020204" charset="-122"/>
-                          <a:cs typeface="微软雅黑" panose="020B0503020204020204" charset="-122"/>
+                          <a:latin typeface="微软雅黑"/>
+                          <a:ea typeface="微软雅黑"/>
+                          <a:cs typeface="微软雅黑"/>
                         </a:rPr>
                         <a:t>决定了什么</a:t>
                       </a:r>
-                      <a:endParaRPr sz="1100" b="1" i="0">
-                        <a:solidFill>
-                          <a:srgbClr val="7FE3FF"/>
-                        </a:solidFill>
-                        <a:latin typeface="微软雅黑" panose="020B0503020204020204" charset="-122"/>
-                        <a:ea typeface="微软雅黑" panose="020B0503020204020204" charset="-122"/>
-                        <a:cs typeface="微软雅黑" panose="020B0503020204020204" charset="-122"/>
-                      </a:endParaRPr>
                     </a:p>
                   </a:txBody>
                   <a:tcPr marL="100584" marR="100584" marT="41148" marB="41148" anchor="ctr">
@@ -4978,20 +4717,12 @@
                           <a:solidFill>
                             <a:srgbClr val="7FE3FF"/>
                           </a:solidFill>
-                          <a:latin typeface="微软雅黑" panose="020B0503020204020204" charset="-122"/>
-                          <a:ea typeface="微软雅黑" panose="020B0503020204020204" charset="-122"/>
-                          <a:cs typeface="微软雅黑" panose="020B0503020204020204" charset="-122"/>
+                          <a:latin typeface="微软雅黑"/>
+                          <a:ea typeface="微软雅黑"/>
+                          <a:cs typeface="微软雅黑"/>
                         </a:rPr>
                         <a:t>为什么这么定</a:t>
                       </a:r>
-                      <a:endParaRPr sz="1100" b="1" i="0">
-                        <a:solidFill>
-                          <a:srgbClr val="7FE3FF"/>
-                        </a:solidFill>
-                        <a:latin typeface="微软雅黑" panose="020B0503020204020204" charset="-122"/>
-                        <a:ea typeface="微软雅黑" panose="020B0503020204020204" charset="-122"/>
-                        <a:cs typeface="微软雅黑" panose="020B0503020204020204" charset="-122"/>
-                      </a:endParaRPr>
                     </a:p>
                   </a:txBody>
                   <a:tcPr marL="100584" marR="100584" marT="41148" marB="41148" anchor="ctr">
@@ -5012,20 +4743,12 @@
                           <a:solidFill>
                             <a:srgbClr val="BBD4EC"/>
                           </a:solidFill>
-                          <a:latin typeface="微软雅黑" panose="020B0503020204020204" charset="-122"/>
-                          <a:ea typeface="微软雅黑" panose="020B0503020204020204" charset="-122"/>
-                          <a:cs typeface="微软雅黑" panose="020B0503020204020204" charset="-122"/>
+                          <a:latin typeface="微软雅黑"/>
+                          <a:ea typeface="微软雅黑"/>
+                          <a:cs typeface="微软雅黑"/>
                         </a:rPr>
                         <a:t>SQLite 单文件数据库</a:t>
                       </a:r>
-                      <a:endParaRPr sz="1100" b="0" i="0">
-                        <a:solidFill>
-                          <a:srgbClr val="BBD4EC"/>
-                        </a:solidFill>
-                        <a:latin typeface="微软雅黑" panose="020B0503020204020204" charset="-122"/>
-                        <a:ea typeface="微软雅黑" panose="020B0503020204020204" charset="-122"/>
-                        <a:cs typeface="微软雅黑" panose="020B0503020204020204" charset="-122"/>
-                      </a:endParaRPr>
                     </a:p>
                   </a:txBody>
                   <a:tcPr marL="100584" marR="100584" marT="41148" marB="41148" anchor="ctr">
@@ -5044,20 +4767,12 @@
                           <a:solidFill>
                             <a:srgbClr val="BBD4EC"/>
                           </a:solidFill>
-                          <a:latin typeface="微软雅黑" panose="020B0503020204020204" charset="-122"/>
-                          <a:ea typeface="微软雅黑" panose="020B0503020204020204" charset="-122"/>
-                          <a:cs typeface="微软雅黑" panose="020B0503020204020204" charset="-122"/>
+                          <a:latin typeface="微软雅黑"/>
+                          <a:ea typeface="微软雅黑"/>
+                          <a:cs typeface="微软雅黑"/>
                         </a:rPr>
                         <a:t>不用装 MySQL</a:t>
                       </a:r>
-                      <a:endParaRPr sz="1100" b="0" i="0">
-                        <a:solidFill>
-                          <a:srgbClr val="BBD4EC"/>
-                        </a:solidFill>
-                        <a:latin typeface="微软雅黑" panose="020B0503020204020204" charset="-122"/>
-                        <a:ea typeface="微软雅黑" panose="020B0503020204020204" charset="-122"/>
-                        <a:cs typeface="微软雅黑" panose="020B0503020204020204" charset="-122"/>
-                      </a:endParaRPr>
                     </a:p>
                   </a:txBody>
                   <a:tcPr marL="100584" marR="100584" marT="41148" marB="41148" anchor="ctr">
@@ -5076,20 +4791,12 @@
                           <a:solidFill>
                             <a:srgbClr val="BBD4EC"/>
                           </a:solidFill>
-                          <a:latin typeface="微软雅黑" panose="020B0503020204020204" charset="-122"/>
-                          <a:ea typeface="微软雅黑" panose="020B0503020204020204" charset="-122"/>
-                          <a:cs typeface="微软雅黑" panose="020B0503020204020204" charset="-122"/>
+                          <a:latin typeface="微软雅黑"/>
+                          <a:ea typeface="微软雅黑"/>
+                          <a:cs typeface="微软雅黑"/>
                         </a:rPr>
                         <a:t>院内一台电脑就能跑，拷走一个文件就是完整备份；数据量到几十万条都够用</a:t>
                       </a:r>
-                      <a:endParaRPr sz="1100" b="0" i="0">
-                        <a:solidFill>
-                          <a:srgbClr val="BBD4EC"/>
-                        </a:solidFill>
-                        <a:latin typeface="微软雅黑" panose="020B0503020204020204" charset="-122"/>
-                        <a:ea typeface="微软雅黑" panose="020B0503020204020204" charset="-122"/>
-                        <a:cs typeface="微软雅黑" panose="020B0503020204020204" charset="-122"/>
-                      </a:endParaRPr>
                     </a:p>
                   </a:txBody>
                   <a:tcPr marL="100584" marR="100584" marT="41148" marB="41148" anchor="ctr">
@@ -5110,20 +4817,12 @@
                           <a:solidFill>
                             <a:srgbClr val="BBD4EC"/>
                           </a:solidFill>
-                          <a:latin typeface="微软雅黑" panose="020B0503020204020204" charset="-122"/>
-                          <a:ea typeface="微软雅黑" panose="020B0503020204020204" charset="-122"/>
-                          <a:cs typeface="微软雅黑" panose="020B0503020204020204" charset="-122"/>
+                          <a:latin typeface="微软雅黑"/>
+                          <a:ea typeface="微软雅黑"/>
+                          <a:cs typeface="微软雅黑"/>
                         </a:rPr>
                         <a:t>大屏与后台分成两个前端</a:t>
                       </a:r>
-                      <a:endParaRPr sz="1100" b="0" i="0">
-                        <a:solidFill>
-                          <a:srgbClr val="BBD4EC"/>
-                        </a:solidFill>
-                        <a:latin typeface="微软雅黑" panose="020B0503020204020204" charset="-122"/>
-                        <a:ea typeface="微软雅黑" panose="020B0503020204020204" charset="-122"/>
-                        <a:cs typeface="微软雅黑" panose="020B0503020204020204" charset="-122"/>
-                      </a:endParaRPr>
                     </a:p>
                   </a:txBody>
                   <a:tcPr marL="100584" marR="100584" marT="41148" marB="41148" anchor="ctr">
@@ -5142,20 +4841,12 @@
                           <a:solidFill>
                             <a:srgbClr val="BBD4EC"/>
                           </a:solidFill>
-                          <a:latin typeface="微软雅黑" panose="020B0503020204020204" charset="-122"/>
-                          <a:ea typeface="微软雅黑" panose="020B0503020204020204" charset="-122"/>
-                          <a:cs typeface="微软雅黑" panose="020B0503020204020204" charset="-122"/>
+                          <a:latin typeface="微软雅黑"/>
+                          <a:ea typeface="微软雅黑"/>
+                          <a:cs typeface="微软雅黑"/>
                         </a:rPr>
                         <a:t>互不影响</a:t>
                       </a:r>
-                      <a:endParaRPr sz="1100" b="0" i="0">
-                        <a:solidFill>
-                          <a:srgbClr val="BBD4EC"/>
-                        </a:solidFill>
-                        <a:latin typeface="微软雅黑" panose="020B0503020204020204" charset="-122"/>
-                        <a:ea typeface="微软雅黑" panose="020B0503020204020204" charset="-122"/>
-                        <a:cs typeface="微软雅黑" panose="020B0503020204020204" charset="-122"/>
-                      </a:endParaRPr>
                     </a:p>
                   </a:txBody>
                   <a:tcPr marL="100584" marR="100584" marT="41148" marB="41148" anchor="ctr">
@@ -5174,20 +4865,12 @@
                           <a:solidFill>
                             <a:srgbClr val="BBD4EC"/>
                           </a:solidFill>
-                          <a:latin typeface="微软雅黑" panose="020B0503020204020204" charset="-122"/>
-                          <a:ea typeface="微软雅黑" panose="020B0503020204020204" charset="-122"/>
-                          <a:cs typeface="微软雅黑" panose="020B0503020204020204" charset="-122"/>
+                          <a:latin typeface="微软雅黑"/>
+                          <a:ea typeface="微软雅黑"/>
+                          <a:cs typeface="微软雅黑"/>
                         </a:rPr>
                         <a:t>大屏要 7×24 常驻、不能被后台改崩；分开后各自升级，大屏可以只读锁定</a:t>
                       </a:r>
-                      <a:endParaRPr sz="1100" b="0" i="0">
-                        <a:solidFill>
-                          <a:srgbClr val="BBD4EC"/>
-                        </a:solidFill>
-                        <a:latin typeface="微软雅黑" panose="020B0503020204020204" charset="-122"/>
-                        <a:ea typeface="微软雅黑" panose="020B0503020204020204" charset="-122"/>
-                        <a:cs typeface="微软雅黑" panose="020B0503020204020204" charset="-122"/>
-                      </a:endParaRPr>
                     </a:p>
                   </a:txBody>
                   <a:tcPr marL="100584" marR="100584" marT="41148" marB="41148" anchor="ctr">
@@ -5208,20 +4891,12 @@
                           <a:solidFill>
                             <a:srgbClr val="BBD4EC"/>
                           </a:solidFill>
-                          <a:latin typeface="微软雅黑" panose="020B0503020204020204" charset="-122"/>
-                          <a:ea typeface="微软雅黑" panose="020B0503020204020204" charset="-122"/>
-                          <a:cs typeface="微软雅黑" panose="020B0503020204020204" charset="-122"/>
+                          <a:latin typeface="微软雅黑"/>
+                          <a:ea typeface="微软雅黑"/>
+                          <a:cs typeface="微软雅黑"/>
                         </a:rPr>
                         <a:t>计算放在服务端</a:t>
                       </a:r>
-                      <a:endParaRPr sz="1100" b="0" i="0">
-                        <a:solidFill>
-                          <a:srgbClr val="BBD4EC"/>
-                        </a:solidFill>
-                        <a:latin typeface="微软雅黑" panose="020B0503020204020204" charset="-122"/>
-                        <a:ea typeface="微软雅黑" panose="020B0503020204020204" charset="-122"/>
-                        <a:cs typeface="微软雅黑" panose="020B0503020204020204" charset="-122"/>
-                      </a:endParaRPr>
                     </a:p>
                   </a:txBody>
                   <a:tcPr marL="100584" marR="100584" marT="41148" marB="41148" anchor="ctr">
@@ -5240,20 +4915,12 @@
                           <a:solidFill>
                             <a:srgbClr val="BBD4EC"/>
                           </a:solidFill>
-                          <a:latin typeface="微软雅黑" panose="020B0503020204020204" charset="-122"/>
-                          <a:ea typeface="微软雅黑" panose="020B0503020204020204" charset="-122"/>
-                          <a:cs typeface="微软雅黑" panose="020B0503020204020204" charset="-122"/>
+                          <a:latin typeface="微软雅黑"/>
+                          <a:ea typeface="微软雅黑"/>
+                          <a:cs typeface="微软雅黑"/>
                         </a:rPr>
                         <a:t>屏幕只管画</a:t>
                       </a:r>
-                      <a:endParaRPr sz="1100" b="0" i="0">
-                        <a:solidFill>
-                          <a:srgbClr val="BBD4EC"/>
-                        </a:solidFill>
-                        <a:latin typeface="微软雅黑" panose="020B0503020204020204" charset="-122"/>
-                        <a:ea typeface="微软雅黑" panose="020B0503020204020204" charset="-122"/>
-                        <a:cs typeface="微软雅黑" panose="020B0503020204020204" charset="-122"/>
-                      </a:endParaRPr>
                     </a:p>
                   </a:txBody>
                   <a:tcPr marL="100584" marR="100584" marT="41148" marB="41148" anchor="ctr">
@@ -5272,20 +4939,12 @@
                           <a:solidFill>
                             <a:srgbClr val="BBD4EC"/>
                           </a:solidFill>
-                          <a:latin typeface="微软雅黑" panose="020B0503020204020204" charset="-122"/>
-                          <a:ea typeface="微软雅黑" panose="020B0503020204020204" charset="-122"/>
-                          <a:cs typeface="微软雅黑" panose="020B0503020204020204" charset="-122"/>
+                          <a:latin typeface="微软雅黑"/>
+                          <a:ea typeface="微软雅黑"/>
+                          <a:cs typeface="微软雅黑"/>
                         </a:rPr>
                         <a:t>换屏幕、加屏幕不用改逻辑，弱配置的终端也能流畅</a:t>
                       </a:r>
-                      <a:endParaRPr sz="1100" b="0" i="0">
-                        <a:solidFill>
-                          <a:srgbClr val="BBD4EC"/>
-                        </a:solidFill>
-                        <a:latin typeface="微软雅黑" panose="020B0503020204020204" charset="-122"/>
-                        <a:ea typeface="微软雅黑" panose="020B0503020204020204" charset="-122"/>
-                        <a:cs typeface="微软雅黑" panose="020B0503020204020204" charset="-122"/>
-                      </a:endParaRPr>
                     </a:p>
                   </a:txBody>
                   <a:tcPr marL="100584" marR="100584" marT="41148" marB="41148" anchor="ctr">
@@ -5306,20 +4965,12 @@
                           <a:solidFill>
                             <a:srgbClr val="BBD4EC"/>
                           </a:solidFill>
-                          <a:latin typeface="微软雅黑" panose="020B0503020204020204" charset="-122"/>
-                          <a:ea typeface="微软雅黑" panose="020B0503020204020204" charset="-122"/>
-                          <a:cs typeface="微软雅黑" panose="020B0503020204020204" charset="-122"/>
+                          <a:latin typeface="微软雅黑"/>
+                          <a:ea typeface="微软雅黑"/>
+                          <a:cs typeface="微软雅黑"/>
                         </a:rPr>
                         <a:t>公网版重写一层后端</a:t>
                       </a:r>
-                      <a:endParaRPr sz="1100" b="0" i="0">
-                        <a:solidFill>
-                          <a:srgbClr val="BBD4EC"/>
-                        </a:solidFill>
-                        <a:latin typeface="微软雅黑" panose="020B0503020204020204" charset="-122"/>
-                        <a:ea typeface="微软雅黑" panose="020B0503020204020204" charset="-122"/>
-                        <a:cs typeface="微软雅黑" panose="020B0503020204020204" charset="-122"/>
-                      </a:endParaRPr>
                     </a:p>
                   </a:txBody>
                   <a:tcPr marL="100584" marR="100584" marT="41148" marB="41148" anchor="ctr">
@@ -5338,20 +4989,12 @@
                           <a:solidFill>
                             <a:srgbClr val="BBD4EC"/>
                           </a:solidFill>
-                          <a:latin typeface="微软雅黑" panose="020B0503020204020204" charset="-122"/>
-                          <a:ea typeface="微软雅黑" panose="020B0503020204020204" charset="-122"/>
-                          <a:cs typeface="微软雅黑" panose="020B0503020204020204" charset="-122"/>
+                          <a:latin typeface="微软雅黑"/>
+                          <a:ea typeface="微软雅黑"/>
+                          <a:cs typeface="微软雅黑"/>
                         </a:rPr>
                         <a:t>能上 Cloudflare 免费额度</a:t>
                       </a:r>
-                      <a:endParaRPr sz="1100" b="0" i="0">
-                        <a:solidFill>
-                          <a:srgbClr val="BBD4EC"/>
-                        </a:solidFill>
-                        <a:latin typeface="微软雅黑" panose="020B0503020204020204" charset="-122"/>
-                        <a:ea typeface="微软雅黑" panose="020B0503020204020204" charset="-122"/>
-                        <a:cs typeface="微软雅黑" panose="020B0503020204020204" charset="-122"/>
-                      </a:endParaRPr>
                     </a:p>
                   </a:txBody>
                   <a:tcPr marL="100584" marR="100584" marT="41148" marB="41148" anchor="ctr">
@@ -5370,20 +5013,12 @@
                           <a:solidFill>
                             <a:srgbClr val="BBD4EC"/>
                           </a:solidFill>
-                          <a:latin typeface="微软雅黑" panose="020B0503020204020204" charset="-122"/>
-                          <a:ea typeface="微软雅黑" panose="020B0503020204020204" charset="-122"/>
-                          <a:cs typeface="微软雅黑" panose="020B0503020204020204" charset="-122"/>
+                          <a:latin typeface="微软雅黑"/>
+                          <a:ea typeface="微软雅黑"/>
+                          <a:cs typeface="微软雅黑"/>
                         </a:rPr>
                         <a:t>云函数跑不了本地数据库和 NestJS；重写的是「壳」，接口与算法口径和本地版保持一致</a:t>
                       </a:r>
-                      <a:endParaRPr sz="1100" b="0" i="0">
-                        <a:solidFill>
-                          <a:srgbClr val="BBD4EC"/>
-                        </a:solidFill>
-                        <a:latin typeface="微软雅黑" panose="020B0503020204020204" charset="-122"/>
-                        <a:ea typeface="微软雅黑" panose="020B0503020204020204" charset="-122"/>
-                        <a:cs typeface="微软雅黑" panose="020B0503020204020204" charset="-122"/>
-                      </a:endParaRPr>
                     </a:p>
                   </a:txBody>
                   <a:tcPr marL="100584" marR="100584" marT="41148" marB="41148" anchor="ctr">
@@ -5404,20 +5039,12 @@
                           <a:solidFill>
                             <a:srgbClr val="BBD4EC"/>
                           </a:solidFill>
-                          <a:latin typeface="微软雅黑" panose="020B0503020204020204" charset="-122"/>
-                          <a:ea typeface="微软雅黑" panose="020B0503020204020204" charset="-122"/>
-                          <a:cs typeface="微软雅黑" panose="020B0503020204020204" charset="-122"/>
+                          <a:latin typeface="微软雅黑"/>
+                          <a:ea typeface="微软雅黑"/>
+                          <a:cs typeface="微软雅黑"/>
                         </a:rPr>
                         <a:t>机构名与数据全部脱敏</a:t>
                       </a:r>
-                      <a:endParaRPr sz="1100" b="0" i="0">
-                        <a:solidFill>
-                          <a:srgbClr val="BBD4EC"/>
-                        </a:solidFill>
-                        <a:latin typeface="微软雅黑" panose="020B0503020204020204" charset="-122"/>
-                        <a:ea typeface="微软雅黑" panose="020B0503020204020204" charset="-122"/>
-                        <a:cs typeface="微软雅黑" panose="020B0503020204020204" charset="-122"/>
-                      </a:endParaRPr>
                     </a:p>
                   </a:txBody>
                   <a:tcPr marL="100584" marR="100584" marT="41148" marB="41148" anchor="ctr">
@@ -5436,20 +5063,12 @@
                           <a:solidFill>
                             <a:srgbClr val="BBD4EC"/>
                           </a:solidFill>
-                          <a:latin typeface="微软雅黑" panose="020B0503020204020204" charset="-122"/>
-                          <a:ea typeface="微软雅黑" panose="020B0503020204020204" charset="-122"/>
-                          <a:cs typeface="微软雅黑" panose="020B0503020204020204" charset="-122"/>
+                          <a:latin typeface="微软雅黑"/>
+                          <a:ea typeface="微软雅黑"/>
+                          <a:cs typeface="微软雅黑"/>
                         </a:rPr>
                         <a:t>可以安全公开</a:t>
                       </a:r>
-                      <a:endParaRPr sz="1100" b="0" i="0">
-                        <a:solidFill>
-                          <a:srgbClr val="BBD4EC"/>
-                        </a:solidFill>
-                        <a:latin typeface="微软雅黑" panose="020B0503020204020204" charset="-122"/>
-                        <a:ea typeface="微软雅黑" panose="020B0503020204020204" charset="-122"/>
-                        <a:cs typeface="微软雅黑" panose="020B0503020204020204" charset="-122"/>
-                      </a:endParaRPr>
                     </a:p>
                   </a:txBody>
                   <a:tcPr marL="100584" marR="100584" marT="41148" marB="41148" anchor="ctr">
@@ -5468,20 +5087,12 @@
                           <a:solidFill>
                             <a:srgbClr val="BBD4EC"/>
                           </a:solidFill>
-                          <a:latin typeface="微软雅黑" panose="020B0503020204020204" charset="-122"/>
-                          <a:ea typeface="微软雅黑" panose="020B0503020204020204" charset="-122"/>
-                          <a:cs typeface="微软雅黑" panose="020B0503020204020204" charset="-122"/>
+                          <a:latin typeface="微软雅黑"/>
+                          <a:ea typeface="微软雅黑"/>
+                          <a:cs typeface="微软雅黑"/>
                         </a:rPr>
                         <a:t>示例机构名 + 合成数据，真实素材不进仓库；公开仓库里搜不到任何真实名称</a:t>
                       </a:r>
-                      <a:endParaRPr sz="1100" b="0" i="0">
-                        <a:solidFill>
-                          <a:srgbClr val="BBD4EC"/>
-                        </a:solidFill>
-                        <a:latin typeface="微软雅黑" panose="020B0503020204020204" charset="-122"/>
-                        <a:ea typeface="微软雅黑" panose="020B0503020204020204" charset="-122"/>
-                        <a:cs typeface="微软雅黑" panose="020B0503020204020204" charset="-122"/>
-                      </a:endParaRPr>
                     </a:p>
                   </a:txBody>
                   <a:tcPr marL="100584" marR="100584" marT="41148" marB="41148" anchor="ctr">
@@ -5504,7 +5115,7 @@
 </file>
 
 <file path=ppt/slides/slide12.xml><?xml version="1.0" encoding="utf-8"?>
-<p:sld xmlns:a="http://schemas.openxmlformats.org/drawingml/2006/main" xmlns:r="http://schemas.openxmlformats.org/officeDocument/2006/relationships" xmlns:p="http://schemas.openxmlformats.org/presentationml/2006/main">
+<p:sld xmlns:a="http://schemas.openxmlformats.org/drawingml/2006/main" xmlns:p="http://schemas.openxmlformats.org/presentationml/2006/main" xmlns:r="http://schemas.openxmlformats.org/officeDocument/2006/relationships">
   <p:cSld>
     <p:spTree>
       <p:nvGrpSpPr>
@@ -5574,7 +5185,7 @@
           <a:noFill/>
         </p:spPr>
         <p:txBody>
-          <a:bodyPr wrap="square" lIns="0" tIns="0" rIns="0" bIns="0" anchor="t">
+          <a:bodyPr wrap="square" anchor="t" lIns="0" rIns="0" tIns="0" bIns="0">
             <a:spAutoFit/>
           </a:bodyPr>
           <a:lstStyle/>
@@ -5585,20 +5196,12 @@
                 <a:solidFill>
                   <a:srgbClr val="7FE3FF"/>
                 </a:solidFill>
-                <a:latin typeface="微软雅黑" panose="020B0503020204020204" charset="-122"/>
-                <a:ea typeface="微软雅黑" panose="020B0503020204020204" charset="-122"/>
-                <a:cs typeface="微软雅黑" panose="020B0503020204020204" charset="-122"/>
+                <a:latin typeface="微软雅黑"/>
+                <a:ea typeface="微软雅黑"/>
+                <a:cs typeface="微软雅黑"/>
               </a:rPr>
               <a:t>03 · 怎么用</a:t>
             </a:r>
-            <a:endParaRPr sz="1150" b="1" i="0">
-              <a:solidFill>
-                <a:srgbClr val="7FE3FF"/>
-              </a:solidFill>
-              <a:latin typeface="微软雅黑" panose="020B0503020204020204" charset="-122"/>
-              <a:ea typeface="微软雅黑" panose="020B0503020204020204" charset="-122"/>
-              <a:cs typeface="微软雅黑" panose="020B0503020204020204" charset="-122"/>
-            </a:endParaRPr>
           </a:p>
         </p:txBody>
       </p:sp>
@@ -5619,7 +5222,7 @@
           <a:noFill/>
         </p:spPr>
         <p:txBody>
-          <a:bodyPr wrap="square" lIns="0" tIns="0" rIns="0" bIns="0" anchor="t">
+          <a:bodyPr wrap="square" anchor="t" lIns="0" rIns="0" tIns="0" bIns="0">
             <a:spAutoFit/>
           </a:bodyPr>
           <a:lstStyle/>
@@ -5630,20 +5233,12 @@
                 <a:solidFill>
                   <a:srgbClr val="ECF7FF"/>
                 </a:solidFill>
-                <a:latin typeface="微软雅黑" panose="020B0503020204020204" charset="-122"/>
-                <a:ea typeface="微软雅黑" panose="020B0503020204020204" charset="-122"/>
-                <a:cs typeface="微软雅黑" panose="020B0503020204020204" charset="-122"/>
+                <a:latin typeface="微软雅黑"/>
+                <a:ea typeface="微软雅黑"/>
+                <a:cs typeface="微软雅黑"/>
               </a:rPr>
               <a:t>改完代码，用 71 项检查确认没坏</a:t>
             </a:r>
-            <a:endParaRPr sz="2700" b="1" i="0">
-              <a:solidFill>
-                <a:srgbClr val="ECF7FF"/>
-              </a:solidFill>
-              <a:latin typeface="微软雅黑" panose="020B0503020204020204" charset="-122"/>
-              <a:ea typeface="微软雅黑" panose="020B0503020204020204" charset="-122"/>
-              <a:cs typeface="微软雅黑" panose="020B0503020204020204" charset="-122"/>
-            </a:endParaRPr>
           </a:p>
         </p:txBody>
       </p:sp>
@@ -5664,7 +5259,7 @@
           <a:noFill/>
         </p:spPr>
         <p:txBody>
-          <a:bodyPr wrap="square" lIns="0" tIns="0" rIns="0" bIns="0" anchor="t">
+          <a:bodyPr wrap="square" anchor="t" lIns="0" rIns="0" tIns="0" bIns="0">
             <a:spAutoFit/>
           </a:bodyPr>
           <a:lstStyle/>
@@ -5675,20 +5270,12 @@
                 <a:solidFill>
                   <a:srgbClr val="7E9EC4"/>
                 </a:solidFill>
-                <a:latin typeface="微软雅黑" panose="020B0503020204020204" charset="-122"/>
-                <a:ea typeface="微软雅黑" panose="020B0503020204020204" charset="-122"/>
-                <a:cs typeface="微软雅黑" panose="020B0503020204020204" charset="-122"/>
+                <a:latin typeface="微软雅黑"/>
+                <a:ea typeface="微软雅黑"/>
+                <a:cs typeface="微软雅黑"/>
               </a:rPr>
               <a:t>急救绿道 · 12 / 13</a:t>
             </a:r>
-            <a:endParaRPr sz="1000" b="0" i="0">
-              <a:solidFill>
-                <a:srgbClr val="7E9EC4"/>
-              </a:solidFill>
-              <a:latin typeface="微软雅黑" panose="020B0503020204020204" charset="-122"/>
-              <a:ea typeface="微软雅黑" panose="020B0503020204020204" charset="-122"/>
-              <a:cs typeface="微软雅黑" panose="020B0503020204020204" charset="-122"/>
-            </a:endParaRPr>
           </a:p>
         </p:txBody>
       </p:sp>
@@ -5726,20 +5313,12 @@
                           <a:solidFill>
                             <a:srgbClr val="7FE3FF"/>
                           </a:solidFill>
-                          <a:latin typeface="微软雅黑" panose="020B0503020204020204" charset="-122"/>
-                          <a:ea typeface="微软雅黑" panose="020B0503020204020204" charset="-122"/>
-                          <a:cs typeface="微软雅黑" panose="020B0503020204020204" charset="-122"/>
+                          <a:latin typeface="微软雅黑"/>
+                          <a:ea typeface="微软雅黑"/>
+                          <a:cs typeface="微软雅黑"/>
                         </a:rPr>
                         <a:t>验收套件</a:t>
                       </a:r>
-                      <a:endParaRPr sz="1100" b="1" i="0">
-                        <a:solidFill>
-                          <a:srgbClr val="7FE3FF"/>
-                        </a:solidFill>
-                        <a:latin typeface="微软雅黑" panose="020B0503020204020204" charset="-122"/>
-                        <a:ea typeface="微软雅黑" panose="020B0503020204020204" charset="-122"/>
-                        <a:cs typeface="微软雅黑" panose="020B0503020204020204" charset="-122"/>
-                      </a:endParaRPr>
                     </a:p>
                   </a:txBody>
                   <a:tcPr marL="100584" marR="100584" marT="41148" marB="41148" anchor="ctr">
@@ -5758,20 +5337,12 @@
                           <a:solidFill>
                             <a:srgbClr val="7FE3FF"/>
                           </a:solidFill>
-                          <a:latin typeface="微软雅黑" panose="020B0503020204020204" charset="-122"/>
-                          <a:ea typeface="微软雅黑" panose="020B0503020204020204" charset="-122"/>
-                          <a:cs typeface="微软雅黑" panose="020B0503020204020204" charset="-122"/>
+                          <a:latin typeface="微软雅黑"/>
+                          <a:ea typeface="微软雅黑"/>
+                          <a:cs typeface="微软雅黑"/>
                         </a:rPr>
                         <a:t>项数</a:t>
                       </a:r>
-                      <a:endParaRPr sz="1100" b="1" i="0">
-                        <a:solidFill>
-                          <a:srgbClr val="7FE3FF"/>
-                        </a:solidFill>
-                        <a:latin typeface="微软雅黑" panose="020B0503020204020204" charset="-122"/>
-                        <a:ea typeface="微软雅黑" panose="020B0503020204020204" charset="-122"/>
-                        <a:cs typeface="微软雅黑" panose="020B0503020204020204" charset="-122"/>
-                      </a:endParaRPr>
                     </a:p>
                   </a:txBody>
                   <a:tcPr marL="100584" marR="100584" marT="41148" marB="41148" anchor="ctr">
@@ -5790,20 +5361,12 @@
                           <a:solidFill>
                             <a:srgbClr val="7FE3FF"/>
                           </a:solidFill>
-                          <a:latin typeface="微软雅黑" panose="020B0503020204020204" charset="-122"/>
-                          <a:ea typeface="微软雅黑" panose="020B0503020204020204" charset="-122"/>
-                          <a:cs typeface="微软雅黑" panose="020B0503020204020204" charset="-122"/>
+                          <a:latin typeface="微软雅黑"/>
+                          <a:ea typeface="微软雅黑"/>
+                          <a:cs typeface="微软雅黑"/>
                         </a:rPr>
                         <a:t>检查什么</a:t>
                       </a:r>
-                      <a:endParaRPr sz="1100" b="1" i="0">
-                        <a:solidFill>
-                          <a:srgbClr val="7FE3FF"/>
-                        </a:solidFill>
-                        <a:latin typeface="微软雅黑" panose="020B0503020204020204" charset="-122"/>
-                        <a:ea typeface="微软雅黑" panose="020B0503020204020204" charset="-122"/>
-                        <a:cs typeface="微软雅黑" panose="020B0503020204020204" charset="-122"/>
-                      </a:endParaRPr>
                     </a:p>
                   </a:txBody>
                   <a:tcPr marL="100584" marR="100584" marT="41148" marB="41148" anchor="ctr">
@@ -5824,20 +5387,12 @@
                           <a:solidFill>
                             <a:srgbClr val="BBD4EC"/>
                           </a:solidFill>
-                          <a:latin typeface="微软雅黑" panose="020B0503020204020204" charset="-122"/>
-                          <a:ea typeface="微软雅黑" panose="020B0503020204020204" charset="-122"/>
-                          <a:cs typeface="微软雅黑" panose="020B0503020204020204" charset="-122"/>
+                          <a:latin typeface="微软雅黑"/>
+                          <a:ea typeface="微软雅黑"/>
+                          <a:cs typeface="微软雅黑"/>
                         </a:rPr>
                         <a:t>接口验收</a:t>
                       </a:r>
-                      <a:endParaRPr sz="1100" b="0" i="0">
-                        <a:solidFill>
-                          <a:srgbClr val="BBD4EC"/>
-                        </a:solidFill>
-                        <a:latin typeface="微软雅黑" panose="020B0503020204020204" charset="-122"/>
-                        <a:ea typeface="微软雅黑" panose="020B0503020204020204" charset="-122"/>
-                        <a:cs typeface="微软雅黑" panose="020B0503020204020204" charset="-122"/>
-                      </a:endParaRPr>
                     </a:p>
                   </a:txBody>
                   <a:tcPr marL="100584" marR="100584" marT="41148" marB="41148" anchor="ctr">
@@ -5856,20 +5411,12 @@
                           <a:solidFill>
                             <a:srgbClr val="BBD4EC"/>
                           </a:solidFill>
-                          <a:latin typeface="微软雅黑" panose="020B0503020204020204" charset="-122"/>
-                          <a:ea typeface="微软雅黑" panose="020B0503020204020204" charset="-122"/>
-                          <a:cs typeface="微软雅黑" panose="020B0503020204020204" charset="-122"/>
+                          <a:latin typeface="微软雅黑"/>
+                          <a:ea typeface="微软雅黑"/>
+                          <a:cs typeface="微软雅黑"/>
                         </a:rPr>
                         <a:t>37 项</a:t>
                       </a:r>
-                      <a:endParaRPr sz="1100" b="0" i="0">
-                        <a:solidFill>
-                          <a:srgbClr val="BBD4EC"/>
-                        </a:solidFill>
-                        <a:latin typeface="微软雅黑" panose="020B0503020204020204" charset="-122"/>
-                        <a:ea typeface="微软雅黑" panose="020B0503020204020204" charset="-122"/>
-                        <a:cs typeface="微软雅黑" panose="020B0503020204020204" charset="-122"/>
-                      </a:endParaRPr>
                     </a:p>
                   </a:txBody>
                   <a:tcPr marL="100584" marR="100584" marT="41148" marB="41148" anchor="ctr">
@@ -5888,20 +5435,12 @@
                           <a:solidFill>
                             <a:srgbClr val="BBD4EC"/>
                           </a:solidFill>
-                          <a:latin typeface="微软雅黑" panose="020B0503020204020204" charset="-122"/>
-                          <a:ea typeface="微软雅黑" panose="020B0503020204020204" charset="-122"/>
-                          <a:cs typeface="微软雅黑" panose="020B0503020204020204" charset="-122"/>
+                          <a:latin typeface="微软雅黑"/>
+                          <a:ea typeface="微软雅黑"/>
+                          <a:cs typeface="微软雅黑"/>
                         </a:rPr>
                         <a:t>把大屏上的每个数字都钉死成断言：累计人数、12 个月序列、24 小时表格内容、筛选排序、权限拦截</a:t>
                       </a:r>
-                      <a:endParaRPr sz="1100" b="0" i="0">
-                        <a:solidFill>
-                          <a:srgbClr val="BBD4EC"/>
-                        </a:solidFill>
-                        <a:latin typeface="微软雅黑" panose="020B0503020204020204" charset="-122"/>
-                        <a:ea typeface="微软雅黑" panose="020B0503020204020204" charset="-122"/>
-                        <a:cs typeface="微软雅黑" panose="020B0503020204020204" charset="-122"/>
-                      </a:endParaRPr>
                     </a:p>
                   </a:txBody>
                   <a:tcPr marL="100584" marR="100584" marT="41148" marB="41148" anchor="ctr">
@@ -5922,20 +5461,12 @@
                           <a:solidFill>
                             <a:srgbClr val="BBD4EC"/>
                           </a:solidFill>
-                          <a:latin typeface="微软雅黑" panose="020B0503020204020204" charset="-122"/>
-                          <a:ea typeface="微软雅黑" panose="020B0503020204020204" charset="-122"/>
-                          <a:cs typeface="微软雅黑" panose="020B0503020204020204" charset="-122"/>
+                          <a:latin typeface="微软雅黑"/>
+                          <a:ea typeface="微软雅黑"/>
+                          <a:cs typeface="微软雅黑"/>
                         </a:rPr>
                         <a:t>大屏验收</a:t>
                       </a:r>
-                      <a:endParaRPr sz="1100" b="0" i="0">
-                        <a:solidFill>
-                          <a:srgbClr val="BBD4EC"/>
-                        </a:solidFill>
-                        <a:latin typeface="微软雅黑" panose="020B0503020204020204" charset="-122"/>
-                        <a:ea typeface="微软雅黑" panose="020B0503020204020204" charset="-122"/>
-                        <a:cs typeface="微软雅黑" panose="020B0503020204020204" charset="-122"/>
-                      </a:endParaRPr>
                     </a:p>
                   </a:txBody>
                   <a:tcPr marL="100584" marR="100584" marT="41148" marB="41148" anchor="ctr">
@@ -5954,20 +5485,12 @@
                           <a:solidFill>
                             <a:srgbClr val="BBD4EC"/>
                           </a:solidFill>
-                          <a:latin typeface="微软雅黑" panose="020B0503020204020204" charset="-122"/>
-                          <a:ea typeface="微软雅黑" panose="020B0503020204020204" charset="-122"/>
-                          <a:cs typeface="微软雅黑" panose="020B0503020204020204" charset="-122"/>
+                          <a:latin typeface="微软雅黑"/>
+                          <a:ea typeface="微软雅黑"/>
+                          <a:cs typeface="微软雅黑"/>
                         </a:rPr>
                         <a:t>7 项</a:t>
                       </a:r>
-                      <a:endParaRPr sz="1100" b="0" i="0">
-                        <a:solidFill>
-                          <a:srgbClr val="BBD4EC"/>
-                        </a:solidFill>
-                        <a:latin typeface="微软雅黑" panose="020B0503020204020204" charset="-122"/>
-                        <a:ea typeface="微软雅黑" panose="020B0503020204020204" charset="-122"/>
-                        <a:cs typeface="微软雅黑" panose="020B0503020204020204" charset="-122"/>
-                      </a:endParaRPr>
                     </a:p>
                   </a:txBody>
                   <a:tcPr marL="100584" marR="100584" marT="41148" marB="41148" anchor="ctr">
@@ -5986,20 +5509,12 @@
                           <a:solidFill>
                             <a:srgbClr val="BBD4EC"/>
                           </a:solidFill>
-                          <a:latin typeface="微软雅黑" panose="020B0503020204020204" charset="-122"/>
-                          <a:ea typeface="微软雅黑" panose="020B0503020204020204" charset="-122"/>
-                          <a:cs typeface="微软雅黑" panose="020B0503020204020204" charset="-122"/>
+                          <a:latin typeface="微软雅黑"/>
+                          <a:ea typeface="微软雅黑"/>
+                          <a:cs typeface="微软雅黑"/>
                         </a:rPr>
                         <a:t>真浏览器打开：标题、8 列表头、姓名脱敏、无缝滚动，并输出 1920×1080 截图</a:t>
                       </a:r>
-                      <a:endParaRPr sz="1100" b="0" i="0">
-                        <a:solidFill>
-                          <a:srgbClr val="BBD4EC"/>
-                        </a:solidFill>
-                        <a:latin typeface="微软雅黑" panose="020B0503020204020204" charset="-122"/>
-                        <a:ea typeface="微软雅黑" panose="020B0503020204020204" charset="-122"/>
-                        <a:cs typeface="微软雅黑" panose="020B0503020204020204" charset="-122"/>
-                      </a:endParaRPr>
                     </a:p>
                   </a:txBody>
                   <a:tcPr marL="100584" marR="100584" marT="41148" marB="41148" anchor="ctr">
@@ -6020,20 +5535,12 @@
                           <a:solidFill>
                             <a:srgbClr val="BBD4EC"/>
                           </a:solidFill>
-                          <a:latin typeface="微软雅黑" panose="020B0503020204020204" charset="-122"/>
-                          <a:ea typeface="微软雅黑" panose="020B0503020204020204" charset="-122"/>
-                          <a:cs typeface="微软雅黑" panose="020B0503020204020204" charset="-122"/>
+                          <a:latin typeface="微软雅黑"/>
+                          <a:ea typeface="微软雅黑"/>
+                          <a:cs typeface="微软雅黑"/>
                         </a:rPr>
                         <a:t>后台验收</a:t>
                       </a:r>
-                      <a:endParaRPr sz="1100" b="0" i="0">
-                        <a:solidFill>
-                          <a:srgbClr val="BBD4EC"/>
-                        </a:solidFill>
-                        <a:latin typeface="微软雅黑" panose="020B0503020204020204" charset="-122"/>
-                        <a:ea typeface="微软雅黑" panose="020B0503020204020204" charset="-122"/>
-                        <a:cs typeface="微软雅黑" panose="020B0503020204020204" charset="-122"/>
-                      </a:endParaRPr>
                     </a:p>
                   </a:txBody>
                   <a:tcPr marL="100584" marR="100584" marT="41148" marB="41148" anchor="ctr">
@@ -6052,20 +5559,12 @@
                           <a:solidFill>
                             <a:srgbClr val="BBD4EC"/>
                           </a:solidFill>
-                          <a:latin typeface="微软雅黑" panose="020B0503020204020204" charset="-122"/>
-                          <a:ea typeface="微软雅黑" panose="020B0503020204020204" charset="-122"/>
-                          <a:cs typeface="微软雅黑" panose="020B0503020204020204" charset="-122"/>
+                          <a:latin typeface="微软雅黑"/>
+                          <a:ea typeface="微软雅黑"/>
+                          <a:cs typeface="微软雅黑"/>
                         </a:rPr>
                         <a:t>18 项</a:t>
                       </a:r>
-                      <a:endParaRPr sz="1100" b="0" i="0">
-                        <a:solidFill>
-                          <a:srgbClr val="BBD4EC"/>
-                        </a:solidFill>
-                        <a:latin typeface="微软雅黑" panose="020B0503020204020204" charset="-122"/>
-                        <a:ea typeface="微软雅黑" panose="020B0503020204020204" charset="-122"/>
-                        <a:cs typeface="微软雅黑" panose="020B0503020204020204" charset="-122"/>
-                      </a:endParaRPr>
                     </a:p>
                   </a:txBody>
                   <a:tcPr marL="100584" marR="100584" marT="41148" marB="41148" anchor="ctr">
@@ -6084,20 +5583,12 @@
                           <a:solidFill>
                             <a:srgbClr val="BBD4EC"/>
                           </a:solidFill>
-                          <a:latin typeface="微软雅黑" panose="020B0503020204020204" charset="-122"/>
-                          <a:ea typeface="微软雅黑" panose="020B0503020204020204" charset="-122"/>
-                          <a:cs typeface="微软雅黑" panose="020B0503020204020204" charset="-122"/>
+                          <a:latin typeface="微软雅黑"/>
+                          <a:ea typeface="微软雅黑"/>
+                          <a:cs typeface="微软雅黑"/>
                         </a:rPr>
                         <a:t>真实登录后逐页巡检 13 个页面，并验证越权会被拦</a:t>
                       </a:r>
-                      <a:endParaRPr sz="1100" b="0" i="0">
-                        <a:solidFill>
-                          <a:srgbClr val="BBD4EC"/>
-                        </a:solidFill>
-                        <a:latin typeface="微软雅黑" panose="020B0503020204020204" charset="-122"/>
-                        <a:ea typeface="微软雅黑" panose="020B0503020204020204" charset="-122"/>
-                        <a:cs typeface="微软雅黑" panose="020B0503020204020204" charset="-122"/>
-                      </a:endParaRPr>
                     </a:p>
                   </a:txBody>
                   <a:tcPr marL="100584" marR="100584" marT="41148" marB="41148" anchor="ctr">
@@ -6118,20 +5609,12 @@
                           <a:solidFill>
                             <a:srgbClr val="BBD4EC"/>
                           </a:solidFill>
-                          <a:latin typeface="微软雅黑" panose="020B0503020204020204" charset="-122"/>
-                          <a:ea typeface="微软雅黑" panose="020B0503020204020204" charset="-122"/>
-                          <a:cs typeface="微软雅黑" panose="020B0503020204020204" charset="-122"/>
+                          <a:latin typeface="微软雅黑"/>
+                          <a:ea typeface="微软雅黑"/>
+                          <a:cs typeface="微软雅黑"/>
                         </a:rPr>
                         <a:t>公网版验收</a:t>
                       </a:r>
-                      <a:endParaRPr sz="1100" b="0" i="0">
-                        <a:solidFill>
-                          <a:srgbClr val="BBD4EC"/>
-                        </a:solidFill>
-                        <a:latin typeface="微软雅黑" panose="020B0503020204020204" charset="-122"/>
-                        <a:ea typeface="微软雅黑" panose="020B0503020204020204" charset="-122"/>
-                        <a:cs typeface="微软雅黑" panose="020B0503020204020204" charset="-122"/>
-                      </a:endParaRPr>
                     </a:p>
                   </a:txBody>
                   <a:tcPr marL="100584" marR="100584" marT="41148" marB="41148" anchor="ctr">
@@ -6150,20 +5633,12 @@
                           <a:solidFill>
                             <a:srgbClr val="BBD4EC"/>
                           </a:solidFill>
-                          <a:latin typeface="微软雅黑" panose="020B0503020204020204" charset="-122"/>
-                          <a:ea typeface="微软雅黑" panose="020B0503020204020204" charset="-122"/>
-                          <a:cs typeface="微软雅黑" panose="020B0503020204020204" charset="-122"/>
+                          <a:latin typeface="微软雅黑"/>
+                          <a:ea typeface="微软雅黑"/>
+                          <a:cs typeface="微软雅黑"/>
                         </a:rPr>
                         <a:t>33 项</a:t>
                       </a:r>
-                      <a:endParaRPr sz="1100" b="0" i="0">
-                        <a:solidFill>
-                          <a:srgbClr val="BBD4EC"/>
-                        </a:solidFill>
-                        <a:latin typeface="微软雅黑" panose="020B0503020204020204" charset="-122"/>
-                        <a:ea typeface="微软雅黑" panose="020B0503020204020204" charset="-122"/>
-                        <a:cs typeface="微软雅黑" panose="020B0503020204020204" charset="-122"/>
-                      </a:endParaRPr>
                     </a:p>
                   </a:txBody>
                   <a:tcPr marL="100584" marR="100584" marT="41148" marB="41148" anchor="ctr">
@@ -6182,20 +5657,12 @@
                           <a:solidFill>
                             <a:srgbClr val="BBD4EC"/>
                           </a:solidFill>
-                          <a:latin typeface="微软雅黑" panose="020B0503020204020204" charset="-122"/>
-                          <a:ea typeface="微软雅黑" panose="020B0503020204020204" charset="-122"/>
-                          <a:cs typeface="微软雅黑" panose="020B0503020204020204" charset="-122"/>
+                          <a:latin typeface="微软雅黑"/>
+                          <a:ea typeface="微软雅黑"/>
+                          <a:cs typeface="微软雅黑"/>
                         </a:rPr>
                         <a:t>额外确认「响应里不出现真实机构名」和「不提供患者明文」</a:t>
                       </a:r>
-                      <a:endParaRPr sz="1100" b="0" i="0">
-                        <a:solidFill>
-                          <a:srgbClr val="BBD4EC"/>
-                        </a:solidFill>
-                        <a:latin typeface="微软雅黑" panose="020B0503020204020204" charset="-122"/>
-                        <a:ea typeface="微软雅黑" panose="020B0503020204020204" charset="-122"/>
-                        <a:cs typeface="微软雅黑" panose="020B0503020204020204" charset="-122"/>
-                      </a:endParaRPr>
                     </a:p>
                   </a:txBody>
                   <a:tcPr marL="100584" marR="100584" marT="41148" marB="41148" anchor="ctr">
@@ -6216,20 +5683,12 @@
                           <a:solidFill>
                             <a:srgbClr val="BBD4EC"/>
                           </a:solidFill>
-                          <a:latin typeface="微软雅黑" panose="020B0503020204020204" charset="-122"/>
-                          <a:ea typeface="微软雅黑" panose="020B0503020204020204" charset="-122"/>
-                          <a:cs typeface="微软雅黑" panose="020B0503020204020204" charset="-122"/>
+                          <a:latin typeface="微软雅黑"/>
+                          <a:ea typeface="微软雅黑"/>
+                          <a:cs typeface="微软雅黑"/>
                         </a:rPr>
                         <a:t>批处理编码检查</a:t>
                       </a:r>
-                      <a:endParaRPr sz="1100" b="0" i="0">
-                        <a:solidFill>
-                          <a:srgbClr val="BBD4EC"/>
-                        </a:solidFill>
-                        <a:latin typeface="微软雅黑" panose="020B0503020204020204" charset="-122"/>
-                        <a:ea typeface="微软雅黑" panose="020B0503020204020204" charset="-122"/>
-                        <a:cs typeface="微软雅黑" panose="020B0503020204020204" charset="-122"/>
-                      </a:endParaRPr>
                     </a:p>
                   </a:txBody>
                   <a:tcPr marL="100584" marR="100584" marT="41148" marB="41148" anchor="ctr">
@@ -6248,20 +5707,12 @@
                           <a:solidFill>
                             <a:srgbClr val="BBD4EC"/>
                           </a:solidFill>
-                          <a:latin typeface="微软雅黑" panose="020B0503020204020204" charset="-122"/>
-                          <a:ea typeface="微软雅黑" panose="020B0503020204020204" charset="-122"/>
-                          <a:cs typeface="微软雅黑" panose="020B0503020204020204" charset="-122"/>
+                          <a:latin typeface="微软雅黑"/>
+                          <a:ea typeface="微软雅黑"/>
+                          <a:cs typeface="微软雅黑"/>
                         </a:rPr>
                         <a:t>1 项</a:t>
                       </a:r>
-                      <a:endParaRPr sz="1100" b="0" i="0">
-                        <a:solidFill>
-                          <a:srgbClr val="BBD4EC"/>
-                        </a:solidFill>
-                        <a:latin typeface="微软雅黑" panose="020B0503020204020204" charset="-122"/>
-                        <a:ea typeface="微软雅黑" panose="020B0503020204020204" charset="-122"/>
-                        <a:cs typeface="微软雅黑" panose="020B0503020204020204" charset="-122"/>
-                      </a:endParaRPr>
                     </a:p>
                   </a:txBody>
                   <a:tcPr marL="100584" marR="100584" marT="41148" marB="41148" anchor="ctr">
@@ -6280,20 +5731,12 @@
                           <a:solidFill>
                             <a:srgbClr val="BBD4EC"/>
                           </a:solidFill>
-                          <a:latin typeface="微软雅黑" panose="020B0503020204020204" charset="-122"/>
-                          <a:ea typeface="微软雅黑" panose="020B0503020204020204" charset="-122"/>
-                          <a:cs typeface="微软雅黑" panose="020B0503020204020204" charset="-122"/>
+                          <a:latin typeface="微软雅黑"/>
+                          <a:ea typeface="微软雅黑"/>
+                          <a:cs typeface="微软雅黑"/>
                         </a:rPr>
                         <a:t>防止中文写进 .bat 导致命令解析错乱——这是踩过的坑，做成回归守卫</a:t>
                       </a:r>
-                      <a:endParaRPr sz="1100" b="0" i="0">
-                        <a:solidFill>
-                          <a:srgbClr val="BBD4EC"/>
-                        </a:solidFill>
-                        <a:latin typeface="微软雅黑" panose="020B0503020204020204" charset="-122"/>
-                        <a:ea typeface="微软雅黑" panose="020B0503020204020204" charset="-122"/>
-                        <a:cs typeface="微软雅黑" panose="020B0503020204020204" charset="-122"/>
-                      </a:endParaRPr>
                     </a:p>
                   </a:txBody>
                   <a:tcPr marL="100584" marR="100584" marT="41148" marB="41148" anchor="ctr">
@@ -6324,7 +5767,7 @@
           <a:noFill/>
         </p:spPr>
         <p:txBody>
-          <a:bodyPr wrap="square" lIns="0" tIns="0" rIns="0" bIns="0" anchor="t">
+          <a:bodyPr wrap="square" anchor="t" lIns="0" rIns="0" tIns="0" bIns="0">
             <a:spAutoFit/>
           </a:bodyPr>
           <a:lstStyle/>
@@ -6335,9 +5778,9 @@
                 <a:solidFill>
                   <a:srgbClr val="BBD4EC"/>
                 </a:solidFill>
-                <a:latin typeface="微软雅黑" panose="020B0503020204020204" charset="-122"/>
-                <a:ea typeface="微软雅黑" panose="020B0503020204020204" charset="-122"/>
-                <a:cs typeface="微软雅黑" panose="020B0503020204020204" charset="-122"/>
+                <a:latin typeface="微软雅黑"/>
+                <a:ea typeface="微软雅黑"/>
+                <a:cs typeface="微软雅黑"/>
               </a:rPr>
               <a:t>全部只依赖系统自带的 Node 和 Chrome，</a:t>
             </a:r>
@@ -6346,9 +5789,9 @@
                 <a:solidFill>
                   <a:srgbClr val="ECF7FF"/>
                 </a:solidFill>
-                <a:latin typeface="微软雅黑" panose="020B0503020204020204" charset="-122"/>
-                <a:ea typeface="微软雅黑" panose="020B0503020204020204" charset="-122"/>
-                <a:cs typeface="微软雅黑" panose="020B0503020204020204" charset="-122"/>
+                <a:latin typeface="微软雅黑"/>
+                <a:ea typeface="微软雅黑"/>
+                <a:cs typeface="微软雅黑"/>
               </a:rPr>
               <a:t>不需要装 Playwright 之类的测试框架</a:t>
             </a:r>
@@ -6357,20 +5800,12 @@
                 <a:solidFill>
                   <a:srgbClr val="BBD4EC"/>
                 </a:solidFill>
-                <a:latin typeface="微软雅黑" panose="020B0503020204020204" charset="-122"/>
-                <a:ea typeface="微软雅黑" panose="020B0503020204020204" charset="-122"/>
-                <a:cs typeface="微软雅黑" panose="020B0503020204020204" charset="-122"/>
+                <a:latin typeface="微软雅黑"/>
+                <a:ea typeface="微软雅黑"/>
+                <a:cs typeface="微软雅黑"/>
               </a:rPr>
               <a:t>。</a:t>
             </a:r>
-            <a:endParaRPr sz="1350" b="0" i="0">
-              <a:solidFill>
-                <a:srgbClr val="BBD4EC"/>
-              </a:solidFill>
-              <a:latin typeface="微软雅黑" panose="020B0503020204020204" charset="-122"/>
-              <a:ea typeface="微软雅黑" panose="020B0503020204020204" charset="-122"/>
-              <a:cs typeface="微软雅黑" panose="020B0503020204020204" charset="-122"/>
-            </a:endParaRPr>
           </a:p>
         </p:txBody>
       </p:sp>
@@ -6383,7 +5818,7 @@
 </file>
 
 <file path=ppt/slides/slide13.xml><?xml version="1.0" encoding="utf-8"?>
-<p:sld xmlns:a="http://schemas.openxmlformats.org/drawingml/2006/main" xmlns:r="http://schemas.openxmlformats.org/officeDocument/2006/relationships" xmlns:p="http://schemas.openxmlformats.org/presentationml/2006/main">
+<p:sld xmlns:a="http://schemas.openxmlformats.org/drawingml/2006/main" xmlns:p="http://schemas.openxmlformats.org/presentationml/2006/main" xmlns:r="http://schemas.openxmlformats.org/officeDocument/2006/relationships">
   <p:cSld>
     <p:spTree>
       <p:nvGrpSpPr>
@@ -6453,7 +5888,7 @@
           <a:noFill/>
         </p:spPr>
         <p:txBody>
-          <a:bodyPr wrap="square" lIns="0" tIns="0" rIns="0" bIns="0" anchor="t">
+          <a:bodyPr wrap="square" anchor="t" lIns="0" rIns="0" tIns="0" bIns="0">
             <a:spAutoFit/>
           </a:bodyPr>
           <a:lstStyle/>
@@ -6468,20 +5903,12 @@
                 <a:solidFill>
                   <a:srgbClr val="FFFFFF"/>
                 </a:solidFill>
-                <a:latin typeface="微软雅黑" panose="020B0503020204020204" charset="-122"/>
-                <a:ea typeface="微软雅黑" panose="020B0503020204020204" charset="-122"/>
-                <a:cs typeface="微软雅黑" panose="020B0503020204020204" charset="-122"/>
+                <a:latin typeface="微软雅黑"/>
+                <a:ea typeface="微软雅黑"/>
+                <a:cs typeface="微软雅黑"/>
               </a:rPr>
               <a:t>现在就能用</a:t>
             </a:r>
-            <a:endParaRPr sz="4000" b="1" i="0">
-              <a:solidFill>
-                <a:srgbClr val="FFFFFF"/>
-              </a:solidFill>
-              <a:latin typeface="微软雅黑" panose="020B0503020204020204" charset="-122"/>
-              <a:ea typeface="微软雅黑" panose="020B0503020204020204" charset="-122"/>
-              <a:cs typeface="微软雅黑" panose="020B0503020204020204" charset="-122"/>
-            </a:endParaRPr>
           </a:p>
           <a:p>
             <a:pPr algn="ctr"/>
@@ -6490,20 +5917,12 @@
                 <a:solidFill>
                   <a:srgbClr val="C7DCF2"/>
                 </a:solidFill>
-                <a:latin typeface="微软雅黑" panose="020B0503020204020204" charset="-122"/>
-                <a:ea typeface="微软雅黑" panose="020B0503020204020204" charset="-122"/>
-                <a:cs typeface="微软雅黑" panose="020B0503020204020204" charset="-122"/>
+                <a:latin typeface="微软雅黑"/>
+                <a:ea typeface="微软雅黑"/>
+                <a:cs typeface="微软雅黑"/>
               </a:rPr>
               <a:t>三步：双击启动 → 浏览器打开 → 用 admin / Hospital@123 登录。</a:t>
             </a:r>
-            <a:endParaRPr sz="1600" b="0" i="0">
-              <a:solidFill>
-                <a:srgbClr val="C7DCF2"/>
-              </a:solidFill>
-              <a:latin typeface="微软雅黑" panose="020B0503020204020204" charset="-122"/>
-              <a:ea typeface="微软雅黑" panose="020B0503020204020204" charset="-122"/>
-              <a:cs typeface="微软雅黑" panose="020B0503020204020204" charset="-122"/>
-            </a:endParaRPr>
           </a:p>
         </p:txBody>
       </p:sp>
@@ -6594,7 +6013,7 @@
           </a:fontRef>
         </p:style>
         <p:txBody>
-          <a:bodyPr lIns="0" tIns="0" rIns="0" bIns="0" rtlCol="0" anchor="ctr"/>
+          <a:bodyPr rtlCol="0" anchor="ctr" lIns="0" rIns="0" tIns="0" bIns="0"/>
           <a:lstStyle/>
           <a:p>
             <a:pPr algn="ctr"/>
@@ -6603,20 +6022,12 @@
                 <a:solidFill>
                   <a:srgbClr val="FFFFFF"/>
                 </a:solidFill>
-                <a:latin typeface="微软雅黑" panose="020B0503020204020204" charset="-122"/>
-                <a:ea typeface="微软雅黑" panose="020B0503020204020204" charset="-122"/>
-                <a:cs typeface="微软雅黑" panose="020B0503020204020204" charset="-122"/>
+                <a:latin typeface="微软雅黑"/>
+                <a:ea typeface="微软雅黑"/>
+                <a:cs typeface="微软雅黑"/>
               </a:rPr>
               <a:t>1</a:t>
             </a:r>
-            <a:endParaRPr sz="1100" b="1" i="0">
-              <a:solidFill>
-                <a:srgbClr val="FFFFFF"/>
-              </a:solidFill>
-              <a:latin typeface="微软雅黑" panose="020B0503020204020204" charset="-122"/>
-              <a:ea typeface="微软雅黑" panose="020B0503020204020204" charset="-122"/>
-              <a:cs typeface="微软雅黑" panose="020B0503020204020204" charset="-122"/>
-            </a:endParaRPr>
           </a:p>
         </p:txBody>
       </p:sp>
@@ -6637,7 +6048,7 @@
           <a:noFill/>
         </p:spPr>
         <p:txBody>
-          <a:bodyPr wrap="square" lIns="0" tIns="0" rIns="0" bIns="0" anchor="t">
+          <a:bodyPr wrap="square" anchor="t" lIns="0" rIns="0" tIns="0" bIns="0">
             <a:spAutoFit/>
           </a:bodyPr>
           <a:lstStyle/>
@@ -6652,20 +6063,12 @@
                 <a:solidFill>
                   <a:srgbClr val="FFFFFF"/>
                 </a:solidFill>
-                <a:latin typeface="微软雅黑" panose="020B0503020204020204" charset="-122"/>
-                <a:ea typeface="微软雅黑" panose="020B0503020204020204" charset="-122"/>
-                <a:cs typeface="微软雅黑" panose="020B0503020204020204" charset="-122"/>
+                <a:latin typeface="微软雅黑"/>
+                <a:ea typeface="微软雅黑"/>
+                <a:cs typeface="微软雅黑"/>
               </a:rPr>
               <a:t>启动</a:t>
             </a:r>
-            <a:endParaRPr sz="1300" b="1" i="0">
-              <a:solidFill>
-                <a:srgbClr val="FFFFFF"/>
-              </a:solidFill>
-              <a:latin typeface="微软雅黑" panose="020B0503020204020204" charset="-122"/>
-              <a:ea typeface="微软雅黑" panose="020B0503020204020204" charset="-122"/>
-              <a:cs typeface="微软雅黑" panose="020B0503020204020204" charset="-122"/>
-            </a:endParaRPr>
           </a:p>
           <a:p>
             <a:pPr algn="l">
@@ -6678,20 +6081,12 @@
                 <a:solidFill>
                   <a:srgbClr val="7F9DC4"/>
                 </a:solidFill>
-                <a:latin typeface="微软雅黑" panose="020B0503020204020204" charset="-122"/>
-                <a:ea typeface="微软雅黑" panose="020B0503020204020204" charset="-122"/>
-                <a:cs typeface="微软雅黑" panose="020B0503020204020204" charset="-122"/>
+                <a:latin typeface="微软雅黑"/>
+                <a:ea typeface="微软雅黑"/>
+                <a:cs typeface="微软雅黑"/>
               </a:rPr>
               <a:t>双击项目根目录的「启动.bat」</a:t>
             </a:r>
-            <a:endParaRPr sz="950" b="0" i="0">
-              <a:solidFill>
-                <a:srgbClr val="7F9DC4"/>
-              </a:solidFill>
-              <a:latin typeface="微软雅黑" panose="020B0503020204020204" charset="-122"/>
-              <a:ea typeface="微软雅黑" panose="020B0503020204020204" charset="-122"/>
-              <a:cs typeface="微软雅黑" panose="020B0503020204020204" charset="-122"/>
-            </a:endParaRPr>
           </a:p>
         </p:txBody>
       </p:sp>
@@ -6782,7 +6177,7 @@
           </a:fontRef>
         </p:style>
         <p:txBody>
-          <a:bodyPr lIns="0" tIns="0" rIns="0" bIns="0" rtlCol="0" anchor="ctr"/>
+          <a:bodyPr rtlCol="0" anchor="ctr" lIns="0" rIns="0" tIns="0" bIns="0"/>
           <a:lstStyle/>
           <a:p>
             <a:pPr algn="ctr"/>
@@ -6791,20 +6186,12 @@
                 <a:solidFill>
                   <a:srgbClr val="FFFFFF"/>
                 </a:solidFill>
-                <a:latin typeface="微软雅黑" panose="020B0503020204020204" charset="-122"/>
-                <a:ea typeface="微软雅黑" panose="020B0503020204020204" charset="-122"/>
-                <a:cs typeface="微软雅黑" panose="020B0503020204020204" charset="-122"/>
+                <a:latin typeface="微软雅黑"/>
+                <a:ea typeface="微软雅黑"/>
+                <a:cs typeface="微软雅黑"/>
               </a:rPr>
               <a:t>2</a:t>
             </a:r>
-            <a:endParaRPr sz="1100" b="1" i="0">
-              <a:solidFill>
-                <a:srgbClr val="FFFFFF"/>
-              </a:solidFill>
-              <a:latin typeface="微软雅黑" panose="020B0503020204020204" charset="-122"/>
-              <a:ea typeface="微软雅黑" panose="020B0503020204020204" charset="-122"/>
-              <a:cs typeface="微软雅黑" panose="020B0503020204020204" charset="-122"/>
-            </a:endParaRPr>
           </a:p>
         </p:txBody>
       </p:sp>
@@ -6825,7 +6212,7 @@
           <a:noFill/>
         </p:spPr>
         <p:txBody>
-          <a:bodyPr wrap="square" lIns="0" tIns="0" rIns="0" bIns="0" anchor="t">
+          <a:bodyPr wrap="square" anchor="t" lIns="0" rIns="0" tIns="0" bIns="0">
             <a:spAutoFit/>
           </a:bodyPr>
           <a:lstStyle/>
@@ -6840,20 +6227,12 @@
                 <a:solidFill>
                   <a:srgbClr val="FFFFFF"/>
                 </a:solidFill>
-                <a:latin typeface="微软雅黑" panose="020B0503020204020204" charset="-122"/>
-                <a:ea typeface="微软雅黑" panose="020B0503020204020204" charset="-122"/>
-                <a:cs typeface="微软雅黑" panose="020B0503020204020204" charset="-122"/>
+                <a:latin typeface="微软雅黑"/>
+                <a:ea typeface="微软雅黑"/>
+                <a:cs typeface="微软雅黑"/>
               </a:rPr>
               <a:t>打开</a:t>
             </a:r>
-            <a:endParaRPr sz="1300" b="1" i="0">
-              <a:solidFill>
-                <a:srgbClr val="FFFFFF"/>
-              </a:solidFill>
-              <a:latin typeface="微软雅黑" panose="020B0503020204020204" charset="-122"/>
-              <a:ea typeface="微软雅黑" panose="020B0503020204020204" charset="-122"/>
-              <a:cs typeface="微软雅黑" panose="020B0503020204020204" charset="-122"/>
-            </a:endParaRPr>
           </a:p>
           <a:p>
             <a:pPr algn="l">
@@ -6866,20 +6245,12 @@
                 <a:solidFill>
                   <a:srgbClr val="7F9DC4"/>
                 </a:solidFill>
-                <a:latin typeface="微软雅黑" panose="020B0503020204020204" charset="-122"/>
-                <a:ea typeface="微软雅黑" panose="020B0503020204020204" charset="-122"/>
-                <a:cs typeface="微软雅黑" panose="020B0503020204020204" charset="-122"/>
+                <a:latin typeface="微软雅黑"/>
+                <a:ea typeface="微软雅黑"/>
+                <a:cs typeface="微软雅黑"/>
               </a:rPr>
               <a:t>后台 /admin/ ｜ 大屏 /screen/</a:t>
             </a:r>
-            <a:endParaRPr sz="950" b="0" i="0">
-              <a:solidFill>
-                <a:srgbClr val="7F9DC4"/>
-              </a:solidFill>
-              <a:latin typeface="微软雅黑" panose="020B0503020204020204" charset="-122"/>
-              <a:ea typeface="微软雅黑" panose="020B0503020204020204" charset="-122"/>
-              <a:cs typeface="微软雅黑" panose="020B0503020204020204" charset="-122"/>
-            </a:endParaRPr>
           </a:p>
         </p:txBody>
       </p:sp>
@@ -6970,7 +6341,7 @@
           </a:fontRef>
         </p:style>
         <p:txBody>
-          <a:bodyPr lIns="0" tIns="0" rIns="0" bIns="0" rtlCol="0" anchor="ctr"/>
+          <a:bodyPr rtlCol="0" anchor="ctr" lIns="0" rIns="0" tIns="0" bIns="0"/>
           <a:lstStyle/>
           <a:p>
             <a:pPr algn="ctr"/>
@@ -6979,20 +6350,12 @@
                 <a:solidFill>
                   <a:srgbClr val="FFFFFF"/>
                 </a:solidFill>
-                <a:latin typeface="微软雅黑" panose="020B0503020204020204" charset="-122"/>
-                <a:ea typeface="微软雅黑" panose="020B0503020204020204" charset="-122"/>
-                <a:cs typeface="微软雅黑" panose="020B0503020204020204" charset="-122"/>
+                <a:latin typeface="微软雅黑"/>
+                <a:ea typeface="微软雅黑"/>
+                <a:cs typeface="微软雅黑"/>
               </a:rPr>
               <a:t>3</a:t>
             </a:r>
-            <a:endParaRPr sz="1100" b="1" i="0">
-              <a:solidFill>
-                <a:srgbClr val="FFFFFF"/>
-              </a:solidFill>
-              <a:latin typeface="微软雅黑" panose="020B0503020204020204" charset="-122"/>
-              <a:ea typeface="微软雅黑" panose="020B0503020204020204" charset="-122"/>
-              <a:cs typeface="微软雅黑" panose="020B0503020204020204" charset="-122"/>
-            </a:endParaRPr>
           </a:p>
         </p:txBody>
       </p:sp>
@@ -7013,7 +6376,7 @@
           <a:noFill/>
         </p:spPr>
         <p:txBody>
-          <a:bodyPr wrap="square" lIns="0" tIns="0" rIns="0" bIns="0" anchor="t">
+          <a:bodyPr wrap="square" anchor="t" lIns="0" rIns="0" tIns="0" bIns="0">
             <a:spAutoFit/>
           </a:bodyPr>
           <a:lstStyle/>
@@ -7028,20 +6391,12 @@
                 <a:solidFill>
                   <a:srgbClr val="FFFFFF"/>
                 </a:solidFill>
-                <a:latin typeface="微软雅黑" panose="020B0503020204020204" charset="-122"/>
-                <a:ea typeface="微软雅黑" panose="020B0503020204020204" charset="-122"/>
-                <a:cs typeface="微软雅黑" panose="020B0503020204020204" charset="-122"/>
+                <a:latin typeface="微软雅黑"/>
+                <a:ea typeface="微软雅黑"/>
+                <a:cs typeface="微软雅黑"/>
               </a:rPr>
               <a:t>停止</a:t>
             </a:r>
-            <a:endParaRPr sz="1300" b="1" i="0">
-              <a:solidFill>
-                <a:srgbClr val="FFFFFF"/>
-              </a:solidFill>
-              <a:latin typeface="微软雅黑" panose="020B0503020204020204" charset="-122"/>
-              <a:ea typeface="微软雅黑" panose="020B0503020204020204" charset="-122"/>
-              <a:cs typeface="微软雅黑" panose="020B0503020204020204" charset="-122"/>
-            </a:endParaRPr>
           </a:p>
           <a:p>
             <a:pPr algn="l">
@@ -7054,20 +6409,12 @@
                 <a:solidFill>
                   <a:srgbClr val="7F9DC4"/>
                 </a:solidFill>
-                <a:latin typeface="微软雅黑" panose="020B0503020204020204" charset="-122"/>
-                <a:ea typeface="微软雅黑" panose="020B0503020204020204" charset="-122"/>
-                <a:cs typeface="微软雅黑" panose="020B0503020204020204" charset="-122"/>
+                <a:latin typeface="微软雅黑"/>
+                <a:ea typeface="微软雅黑"/>
+                <a:cs typeface="微软雅黑"/>
               </a:rPr>
               <a:t>双击「停止.bat」；取消自启用「取消开机自启.bat」</a:t>
             </a:r>
-            <a:endParaRPr sz="950" b="0" i="0">
-              <a:solidFill>
-                <a:srgbClr val="7F9DC4"/>
-              </a:solidFill>
-              <a:latin typeface="微软雅黑" panose="020B0503020204020204" charset="-122"/>
-              <a:ea typeface="微软雅黑" panose="020B0503020204020204" charset="-122"/>
-              <a:cs typeface="微软雅黑" panose="020B0503020204020204" charset="-122"/>
-            </a:endParaRPr>
           </a:p>
         </p:txBody>
       </p:sp>
@@ -7088,7 +6435,7 @@
           <a:noFill/>
         </p:spPr>
         <p:txBody>
-          <a:bodyPr wrap="square" lIns="0" tIns="0" rIns="0" bIns="0" anchor="t">
+          <a:bodyPr wrap="square" anchor="t" lIns="0" rIns="0" tIns="0" bIns="0">
             <a:spAutoFit/>
           </a:bodyPr>
           <a:lstStyle/>
@@ -7103,20 +6450,12 @@
                 <a:solidFill>
                   <a:srgbClr val="FFFFFF"/>
                 </a:solidFill>
-                <a:latin typeface="微软雅黑" panose="020B0503020204020204" charset="-122"/>
-                <a:ea typeface="微软雅黑" panose="020B0503020204020204" charset="-122"/>
-                <a:cs typeface="微软雅黑" panose="020B0503020204020204" charset="-122"/>
+                <a:latin typeface="微软雅黑"/>
+                <a:ea typeface="微软雅黑"/>
+                <a:cs typeface="微软雅黑"/>
               </a:rPr>
               <a:t>公网大屏：popostar11.github.io/hospital-data-platform</a:t>
             </a:r>
-            <a:endParaRPr sz="1400" b="0" i="0">
-              <a:solidFill>
-                <a:srgbClr val="FFFFFF"/>
-              </a:solidFill>
-              <a:latin typeface="微软雅黑" panose="020B0503020204020204" charset="-122"/>
-              <a:ea typeface="微软雅黑" panose="020B0503020204020204" charset="-122"/>
-              <a:cs typeface="微软雅黑" panose="020B0503020204020204" charset="-122"/>
-            </a:endParaRPr>
           </a:p>
           <a:p>
             <a:pPr algn="ctr"/>
@@ -7125,20 +6464,12 @@
                 <a:solidFill>
                   <a:srgbClr val="7F9DC4"/>
                 </a:solidFill>
-                <a:latin typeface="微软雅黑" panose="020B0503020204020204" charset="-122"/>
-                <a:ea typeface="微软雅黑" panose="020B0503020204020204" charset="-122"/>
-                <a:cs typeface="微软雅黑" panose="020B0503020204020204" charset="-122"/>
+                <a:latin typeface="微软雅黑"/>
+                <a:ea typeface="微软雅黑"/>
+                <a:cs typeface="微软雅黑"/>
               </a:rPr>
               <a:t>全部数据为合成的示例数据，不代表任何真实机构或真实统计结果</a:t>
             </a:r>
-            <a:endParaRPr sz="1150" b="0" i="0">
-              <a:solidFill>
-                <a:srgbClr val="7F9DC4"/>
-              </a:solidFill>
-              <a:latin typeface="微软雅黑" panose="020B0503020204020204" charset="-122"/>
-              <a:ea typeface="微软雅黑" panose="020B0503020204020204" charset="-122"/>
-              <a:cs typeface="微软雅黑" panose="020B0503020204020204" charset="-122"/>
-            </a:endParaRPr>
           </a:p>
         </p:txBody>
       </p:sp>
@@ -7151,7 +6482,7 @@
 </file>
 
 <file path=ppt/slides/slide2.xml><?xml version="1.0" encoding="utf-8"?>
-<p:sld xmlns:a="http://schemas.openxmlformats.org/drawingml/2006/main" xmlns:r="http://schemas.openxmlformats.org/officeDocument/2006/relationships" xmlns:p="http://schemas.openxmlformats.org/presentationml/2006/main">
+<p:sld xmlns:a="http://schemas.openxmlformats.org/drawingml/2006/main" xmlns:p="http://schemas.openxmlformats.org/presentationml/2006/main" xmlns:r="http://schemas.openxmlformats.org/officeDocument/2006/relationships">
   <p:cSld>
     <p:spTree>
       <p:nvGrpSpPr>
@@ -7221,7 +6552,7 @@
           <a:noFill/>
         </p:spPr>
         <p:txBody>
-          <a:bodyPr wrap="square" lIns="0" tIns="0" rIns="0" bIns="0" anchor="t">
+          <a:bodyPr wrap="square" anchor="t" lIns="0" rIns="0" tIns="0" bIns="0">
             <a:spAutoFit/>
           </a:bodyPr>
           <a:lstStyle/>
@@ -7232,20 +6563,12 @@
                 <a:solidFill>
                   <a:srgbClr val="7FE3FF"/>
                 </a:solidFill>
-                <a:latin typeface="微软雅黑" panose="020B0503020204020204" charset="-122"/>
-                <a:ea typeface="微软雅黑" panose="020B0503020204020204" charset="-122"/>
-                <a:cs typeface="微软雅黑" panose="020B0503020204020204" charset="-122"/>
+                <a:latin typeface="微软雅黑"/>
+                <a:ea typeface="微软雅黑"/>
+                <a:cs typeface="微软雅黑"/>
               </a:rPr>
               <a:t>目录</a:t>
             </a:r>
-            <a:endParaRPr sz="1150" b="1" i="0">
-              <a:solidFill>
-                <a:srgbClr val="7FE3FF"/>
-              </a:solidFill>
-              <a:latin typeface="微软雅黑" panose="020B0503020204020204" charset="-122"/>
-              <a:ea typeface="微软雅黑" panose="020B0503020204020204" charset="-122"/>
-              <a:cs typeface="微软雅黑" panose="020B0503020204020204" charset="-122"/>
-            </a:endParaRPr>
           </a:p>
         </p:txBody>
       </p:sp>
@@ -7266,7 +6589,7 @@
           <a:noFill/>
         </p:spPr>
         <p:txBody>
-          <a:bodyPr wrap="square" lIns="0" tIns="0" rIns="0" bIns="0" anchor="t">
+          <a:bodyPr wrap="square" anchor="t" lIns="0" rIns="0" tIns="0" bIns="0">
             <a:spAutoFit/>
           </a:bodyPr>
           <a:lstStyle/>
@@ -7277,20 +6600,12 @@
                 <a:solidFill>
                   <a:srgbClr val="ECF7FF"/>
                 </a:solidFill>
-                <a:latin typeface="微软雅黑" panose="020B0503020204020204" charset="-122"/>
-                <a:ea typeface="微软雅黑" panose="020B0503020204020204" charset="-122"/>
-                <a:cs typeface="微软雅黑" panose="020B0503020204020204" charset="-122"/>
+                <a:latin typeface="微软雅黑"/>
+                <a:ea typeface="微软雅黑"/>
+                <a:cs typeface="微软雅黑"/>
               </a:rPr>
               <a:t>今天只讲三个问题</a:t>
             </a:r>
-            <a:endParaRPr sz="2700" b="1" i="0">
-              <a:solidFill>
-                <a:srgbClr val="ECF7FF"/>
-              </a:solidFill>
-              <a:latin typeface="微软雅黑" panose="020B0503020204020204" charset="-122"/>
-              <a:ea typeface="微软雅黑" panose="020B0503020204020204" charset="-122"/>
-              <a:cs typeface="微软雅黑" panose="020B0503020204020204" charset="-122"/>
-            </a:endParaRPr>
           </a:p>
         </p:txBody>
       </p:sp>
@@ -7311,7 +6626,7 @@
           <a:noFill/>
         </p:spPr>
         <p:txBody>
-          <a:bodyPr wrap="square" lIns="0" tIns="0" rIns="0" bIns="0" anchor="t">
+          <a:bodyPr wrap="square" anchor="t" lIns="0" rIns="0" tIns="0" bIns="0">
             <a:spAutoFit/>
           </a:bodyPr>
           <a:lstStyle/>
@@ -7322,20 +6637,12 @@
                 <a:solidFill>
                   <a:srgbClr val="7E9EC4"/>
                 </a:solidFill>
-                <a:latin typeface="微软雅黑" panose="020B0503020204020204" charset="-122"/>
-                <a:ea typeface="微软雅黑" panose="020B0503020204020204" charset="-122"/>
-                <a:cs typeface="微软雅黑" panose="020B0503020204020204" charset="-122"/>
+                <a:latin typeface="微软雅黑"/>
+                <a:ea typeface="微软雅黑"/>
+                <a:cs typeface="微软雅黑"/>
               </a:rPr>
               <a:t>急救绿道 · 2 / 13</a:t>
             </a:r>
-            <a:endParaRPr sz="1000" b="0" i="0">
-              <a:solidFill>
-                <a:srgbClr val="7E9EC4"/>
-              </a:solidFill>
-              <a:latin typeface="微软雅黑" panose="020B0503020204020204" charset="-122"/>
-              <a:ea typeface="微软雅黑" panose="020B0503020204020204" charset="-122"/>
-              <a:cs typeface="微软雅黑" panose="020B0503020204020204" charset="-122"/>
-            </a:endParaRPr>
           </a:p>
         </p:txBody>
       </p:sp>
@@ -7448,7 +6755,7 @@
           <a:noFill/>
         </p:spPr>
         <p:txBody>
-          <a:bodyPr wrap="square" lIns="0" tIns="0" rIns="0" bIns="0" anchor="t">
+          <a:bodyPr wrap="square" anchor="t" lIns="0" rIns="0" tIns="0" bIns="0">
             <a:spAutoFit/>
           </a:bodyPr>
           <a:lstStyle/>
@@ -7463,20 +6770,12 @@
                 <a:solidFill>
                   <a:srgbClr val="ECF7FF"/>
                 </a:solidFill>
-                <a:latin typeface="微软雅黑" panose="020B0503020204020204" charset="-122"/>
-                <a:ea typeface="微软雅黑" panose="020B0503020204020204" charset="-122"/>
-                <a:cs typeface="微软雅黑" panose="020B0503020204020204" charset="-122"/>
+                <a:latin typeface="微软雅黑"/>
+                <a:ea typeface="微软雅黑"/>
+                <a:cs typeface="微软雅黑"/>
               </a:rPr>
               <a:t>01 · 它是什么</a:t>
             </a:r>
-            <a:endParaRPr sz="1900" b="1" i="0">
-              <a:solidFill>
-                <a:srgbClr val="ECF7FF"/>
-              </a:solidFill>
-              <a:latin typeface="微软雅黑" panose="020B0503020204020204" charset="-122"/>
-              <a:ea typeface="微软雅黑" panose="020B0503020204020204" charset="-122"/>
-              <a:cs typeface="微软雅黑" panose="020B0503020204020204" charset="-122"/>
-            </a:endParaRPr>
           </a:p>
           <a:p>
             <a:pPr algn="l">
@@ -7492,20 +6791,12 @@
                 <a:solidFill>
                   <a:srgbClr val="BBD4EC"/>
                 </a:solidFill>
-                <a:latin typeface="微软雅黑" panose="020B0503020204020204" charset="-122"/>
-                <a:ea typeface="微软雅黑" panose="020B0503020204020204" charset="-122"/>
-                <a:cs typeface="微软雅黑" panose="020B0503020204020204" charset="-122"/>
+                <a:latin typeface="微软雅黑"/>
+                <a:ea typeface="微软雅黑"/>
+                <a:cs typeface="微软雅黑"/>
               </a:rPr>
               <a:t>谁在用、解决什么问题、长什么样。</a:t>
             </a:r>
-            <a:endParaRPr sz="1300" b="0" i="0">
-              <a:solidFill>
-                <a:srgbClr val="BBD4EC"/>
-              </a:solidFill>
-              <a:latin typeface="微软雅黑" panose="020B0503020204020204" charset="-122"/>
-              <a:ea typeface="微软雅黑" panose="020B0503020204020204" charset="-122"/>
-              <a:cs typeface="微软雅黑" panose="020B0503020204020204" charset="-122"/>
-            </a:endParaRPr>
           </a:p>
           <a:p>
             <a:pPr algn="l"/>
@@ -7514,20 +6805,12 @@
                 <a:solidFill>
                   <a:srgbClr val="7E9EC4"/>
                 </a:solidFill>
-                <a:latin typeface="微软雅黑" panose="020B0503020204020204" charset="-122"/>
-                <a:ea typeface="微软雅黑" panose="020B0503020204020204" charset="-122"/>
-                <a:cs typeface="微软雅黑" panose="020B0503020204020204" charset="-122"/>
+                <a:latin typeface="微软雅黑"/>
+                <a:ea typeface="微软雅黑"/>
+                <a:cs typeface="微软雅黑"/>
               </a:rPr>
               <a:t>第 3 ~ 6 页</a:t>
             </a:r>
-            <a:endParaRPr sz="1100" b="0" i="0">
-              <a:solidFill>
-                <a:srgbClr val="7E9EC4"/>
-              </a:solidFill>
-              <a:latin typeface="微软雅黑" panose="020B0503020204020204" charset="-122"/>
-              <a:ea typeface="微软雅黑" panose="020B0503020204020204" charset="-122"/>
-              <a:cs typeface="微软雅黑" panose="020B0503020204020204" charset="-122"/>
-            </a:endParaRPr>
           </a:p>
         </p:txBody>
       </p:sp>
@@ -7640,7 +6923,7 @@
           <a:noFill/>
         </p:spPr>
         <p:txBody>
-          <a:bodyPr wrap="square" lIns="0" tIns="0" rIns="0" bIns="0" anchor="t">
+          <a:bodyPr wrap="square" anchor="t" lIns="0" rIns="0" tIns="0" bIns="0">
             <a:spAutoFit/>
           </a:bodyPr>
           <a:lstStyle/>
@@ -7655,20 +6938,12 @@
                 <a:solidFill>
                   <a:srgbClr val="ECF7FF"/>
                 </a:solidFill>
-                <a:latin typeface="微软雅黑" panose="020B0503020204020204" charset="-122"/>
-                <a:ea typeface="微软雅黑" panose="020B0503020204020204" charset="-122"/>
-                <a:cs typeface="微软雅黑" panose="020B0503020204020204" charset="-122"/>
+                <a:latin typeface="微软雅黑"/>
+                <a:ea typeface="微软雅黑"/>
+                <a:cs typeface="微软雅黑"/>
               </a:rPr>
               <a:t>02 · 怎么做的</a:t>
             </a:r>
-            <a:endParaRPr sz="1900" b="1" i="0">
-              <a:solidFill>
-                <a:srgbClr val="ECF7FF"/>
-              </a:solidFill>
-              <a:latin typeface="微软雅黑" panose="020B0503020204020204" charset="-122"/>
-              <a:ea typeface="微软雅黑" panose="020B0503020204020204" charset="-122"/>
-              <a:cs typeface="微软雅黑" panose="020B0503020204020204" charset="-122"/>
-            </a:endParaRPr>
           </a:p>
           <a:p>
             <a:pPr algn="l">
@@ -7684,20 +6959,12 @@
                 <a:solidFill>
                   <a:srgbClr val="BBD4EC"/>
                 </a:solidFill>
-                <a:latin typeface="微软雅黑" panose="020B0503020204020204" charset="-122"/>
-                <a:ea typeface="微软雅黑" panose="020B0503020204020204" charset="-122"/>
-                <a:cs typeface="微软雅黑" panose="020B0503020204020204" charset="-122"/>
+                <a:latin typeface="微软雅黑"/>
+                <a:ea typeface="微软雅黑"/>
+                <a:cs typeface="微软雅黑"/>
               </a:rPr>
               <a:t>数据怎么流、系统分几层、为什么这么选。</a:t>
             </a:r>
-            <a:endParaRPr sz="1300" b="0" i="0">
-              <a:solidFill>
-                <a:srgbClr val="BBD4EC"/>
-              </a:solidFill>
-              <a:latin typeface="微软雅黑" panose="020B0503020204020204" charset="-122"/>
-              <a:ea typeface="微软雅黑" panose="020B0503020204020204" charset="-122"/>
-              <a:cs typeface="微软雅黑" panose="020B0503020204020204" charset="-122"/>
-            </a:endParaRPr>
           </a:p>
           <a:p>
             <a:pPr algn="l"/>
@@ -7706,20 +6973,12 @@
                 <a:solidFill>
                   <a:srgbClr val="7E9EC4"/>
                 </a:solidFill>
-                <a:latin typeface="微软雅黑" panose="020B0503020204020204" charset="-122"/>
-                <a:ea typeface="微软雅黑" panose="020B0503020204020204" charset="-122"/>
-                <a:cs typeface="微软雅黑" panose="020B0503020204020204" charset="-122"/>
+                <a:latin typeface="微软雅黑"/>
+                <a:ea typeface="微软雅黑"/>
+                <a:cs typeface="微软雅黑"/>
               </a:rPr>
               <a:t>第 7 ~ 11 页</a:t>
             </a:r>
-            <a:endParaRPr sz="1100" b="0" i="0">
-              <a:solidFill>
-                <a:srgbClr val="7E9EC4"/>
-              </a:solidFill>
-              <a:latin typeface="微软雅黑" panose="020B0503020204020204" charset="-122"/>
-              <a:ea typeface="微软雅黑" panose="020B0503020204020204" charset="-122"/>
-              <a:cs typeface="微软雅黑" panose="020B0503020204020204" charset="-122"/>
-            </a:endParaRPr>
           </a:p>
         </p:txBody>
       </p:sp>
@@ -7832,7 +7091,7 @@
           <a:noFill/>
         </p:spPr>
         <p:txBody>
-          <a:bodyPr wrap="square" lIns="0" tIns="0" rIns="0" bIns="0" anchor="t">
+          <a:bodyPr wrap="square" anchor="t" lIns="0" rIns="0" tIns="0" bIns="0">
             <a:spAutoFit/>
           </a:bodyPr>
           <a:lstStyle/>
@@ -7847,20 +7106,12 @@
                 <a:solidFill>
                   <a:srgbClr val="ECF7FF"/>
                 </a:solidFill>
-                <a:latin typeface="微软雅黑" panose="020B0503020204020204" charset="-122"/>
-                <a:ea typeface="微软雅黑" panose="020B0503020204020204" charset="-122"/>
-                <a:cs typeface="微软雅黑" panose="020B0503020204020204" charset="-122"/>
+                <a:latin typeface="微软雅黑"/>
+                <a:ea typeface="微软雅黑"/>
+                <a:cs typeface="微软雅黑"/>
               </a:rPr>
               <a:t>03 · 怎么用</a:t>
             </a:r>
-            <a:endParaRPr sz="1900" b="1" i="0">
-              <a:solidFill>
-                <a:srgbClr val="ECF7FF"/>
-              </a:solidFill>
-              <a:latin typeface="微软雅黑" panose="020B0503020204020204" charset="-122"/>
-              <a:ea typeface="微软雅黑" panose="020B0503020204020204" charset="-122"/>
-              <a:cs typeface="微软雅黑" panose="020B0503020204020204" charset="-122"/>
-            </a:endParaRPr>
           </a:p>
           <a:p>
             <a:pPr algn="l">
@@ -7876,20 +7127,12 @@
                 <a:solidFill>
                   <a:srgbClr val="BBD4EC"/>
                 </a:solidFill>
-                <a:latin typeface="微软雅黑" panose="020B0503020204020204" charset="-122"/>
-                <a:ea typeface="微软雅黑" panose="020B0503020204020204" charset="-122"/>
-                <a:cs typeface="微软雅黑" panose="020B0503020204020204" charset="-122"/>
+                <a:latin typeface="微软雅黑"/>
+                <a:ea typeface="微软雅黑"/>
+                <a:cs typeface="微软雅黑"/>
               </a:rPr>
               <a:t>两个入口、怎么打开、怎么验收到位。</a:t>
             </a:r>
-            <a:endParaRPr sz="1300" b="0" i="0">
-              <a:solidFill>
-                <a:srgbClr val="BBD4EC"/>
-              </a:solidFill>
-              <a:latin typeface="微软雅黑" panose="020B0503020204020204" charset="-122"/>
-              <a:ea typeface="微软雅黑" panose="020B0503020204020204" charset="-122"/>
-              <a:cs typeface="微软雅黑" panose="020B0503020204020204" charset="-122"/>
-            </a:endParaRPr>
           </a:p>
           <a:p>
             <a:pPr algn="l"/>
@@ -7898,20 +7141,12 @@
                 <a:solidFill>
                   <a:srgbClr val="7E9EC4"/>
                 </a:solidFill>
-                <a:latin typeface="微软雅黑" panose="020B0503020204020204" charset="-122"/>
-                <a:ea typeface="微软雅黑" panose="020B0503020204020204" charset="-122"/>
-                <a:cs typeface="微软雅黑" panose="020B0503020204020204" charset="-122"/>
+                <a:latin typeface="微软雅黑"/>
+                <a:ea typeface="微软雅黑"/>
+                <a:cs typeface="微软雅黑"/>
               </a:rPr>
               <a:t>第 12 ~ 13 页</a:t>
             </a:r>
-            <a:endParaRPr sz="1100" b="0" i="0">
-              <a:solidFill>
-                <a:srgbClr val="7E9EC4"/>
-              </a:solidFill>
-              <a:latin typeface="微软雅黑" panose="020B0503020204020204" charset="-122"/>
-              <a:ea typeface="微软雅黑" panose="020B0503020204020204" charset="-122"/>
-              <a:cs typeface="微软雅黑" panose="020B0503020204020204" charset="-122"/>
-            </a:endParaRPr>
           </a:p>
         </p:txBody>
       </p:sp>
@@ -7924,7 +7159,7 @@
 </file>
 
 <file path=ppt/slides/slide3.xml><?xml version="1.0" encoding="utf-8"?>
-<p:sld xmlns:a="http://schemas.openxmlformats.org/drawingml/2006/main" xmlns:r="http://schemas.openxmlformats.org/officeDocument/2006/relationships" xmlns:p="http://schemas.openxmlformats.org/presentationml/2006/main">
+<p:sld xmlns:a="http://schemas.openxmlformats.org/drawingml/2006/main" xmlns:p="http://schemas.openxmlformats.org/presentationml/2006/main" xmlns:r="http://schemas.openxmlformats.org/officeDocument/2006/relationships">
   <p:cSld>
     <p:spTree>
       <p:nvGrpSpPr>
@@ -7994,7 +7229,7 @@
           <a:noFill/>
         </p:spPr>
         <p:txBody>
-          <a:bodyPr wrap="square" lIns="0" tIns="0" rIns="0" bIns="0" anchor="t">
+          <a:bodyPr wrap="square" anchor="t" lIns="0" rIns="0" tIns="0" bIns="0">
             <a:spAutoFit/>
           </a:bodyPr>
           <a:lstStyle/>
@@ -8005,20 +7240,12 @@
                 <a:solidFill>
                   <a:srgbClr val="7FE3FF"/>
                 </a:solidFill>
-                <a:latin typeface="微软雅黑" panose="020B0503020204020204" charset="-122"/>
-                <a:ea typeface="微软雅黑" panose="020B0503020204020204" charset="-122"/>
-                <a:cs typeface="微软雅黑" panose="020B0503020204020204" charset="-122"/>
+                <a:latin typeface="微软雅黑"/>
+                <a:ea typeface="微软雅黑"/>
+                <a:cs typeface="微软雅黑"/>
               </a:rPr>
               <a:t>01 · 它是什么</a:t>
             </a:r>
-            <a:endParaRPr sz="1150" b="1" i="0">
-              <a:solidFill>
-                <a:srgbClr val="7FE3FF"/>
-              </a:solidFill>
-              <a:latin typeface="微软雅黑" panose="020B0503020204020204" charset="-122"/>
-              <a:ea typeface="微软雅黑" panose="020B0503020204020204" charset="-122"/>
-              <a:cs typeface="微软雅黑" panose="020B0503020204020204" charset="-122"/>
-            </a:endParaRPr>
           </a:p>
         </p:txBody>
       </p:sp>
@@ -8039,7 +7266,7 @@
           <a:noFill/>
         </p:spPr>
         <p:txBody>
-          <a:bodyPr wrap="square" lIns="0" tIns="0" rIns="0" bIns="0" anchor="t">
+          <a:bodyPr wrap="square" anchor="t" lIns="0" rIns="0" tIns="0" bIns="0">
             <a:spAutoFit/>
           </a:bodyPr>
           <a:lstStyle/>
@@ -8050,20 +7277,12 @@
                 <a:solidFill>
                   <a:srgbClr val="ECF7FF"/>
                 </a:solidFill>
-                <a:latin typeface="微软雅黑" panose="020B0503020204020204" charset="-122"/>
-                <a:ea typeface="微软雅黑" panose="020B0503020204020204" charset="-122"/>
-                <a:cs typeface="微软雅黑" panose="020B0503020204020204" charset="-122"/>
+                <a:latin typeface="微软雅黑"/>
+                <a:ea typeface="微软雅黑"/>
+                <a:cs typeface="微软雅黑"/>
               </a:rPr>
               <a:t>一句话：把「急救快不快」变成看得见的数字</a:t>
             </a:r>
-            <a:endParaRPr sz="2700" b="1" i="0">
-              <a:solidFill>
-                <a:srgbClr val="ECF7FF"/>
-              </a:solidFill>
-              <a:latin typeface="微软雅黑" panose="020B0503020204020204" charset="-122"/>
-              <a:ea typeface="微软雅黑" panose="020B0503020204020204" charset="-122"/>
-              <a:cs typeface="微软雅黑" panose="020B0503020204020204" charset="-122"/>
-            </a:endParaRPr>
           </a:p>
         </p:txBody>
       </p:sp>
@@ -8084,7 +7303,7 @@
           <a:noFill/>
         </p:spPr>
         <p:txBody>
-          <a:bodyPr wrap="square" lIns="0" tIns="0" rIns="0" bIns="0" anchor="t">
+          <a:bodyPr wrap="square" anchor="t" lIns="0" rIns="0" tIns="0" bIns="0">
             <a:spAutoFit/>
           </a:bodyPr>
           <a:lstStyle/>
@@ -8095,20 +7314,12 @@
                 <a:solidFill>
                   <a:srgbClr val="7E9EC4"/>
                 </a:solidFill>
-                <a:latin typeface="微软雅黑" panose="020B0503020204020204" charset="-122"/>
-                <a:ea typeface="微软雅黑" panose="020B0503020204020204" charset="-122"/>
-                <a:cs typeface="微软雅黑" panose="020B0503020204020204" charset="-122"/>
+                <a:latin typeface="微软雅黑"/>
+                <a:ea typeface="微软雅黑"/>
+                <a:cs typeface="微软雅黑"/>
               </a:rPr>
               <a:t>急救绿道 · 3 / 13</a:t>
             </a:r>
-            <a:endParaRPr sz="1000" b="0" i="0">
-              <a:solidFill>
-                <a:srgbClr val="7E9EC4"/>
-              </a:solidFill>
-              <a:latin typeface="微软雅黑" panose="020B0503020204020204" charset="-122"/>
-              <a:ea typeface="微软雅黑" panose="020B0503020204020204" charset="-122"/>
-              <a:cs typeface="微软雅黑" panose="020B0503020204020204" charset="-122"/>
-            </a:endParaRPr>
           </a:p>
         </p:txBody>
       </p:sp>
@@ -8129,7 +7340,7 @@
           <a:noFill/>
         </p:spPr>
         <p:txBody>
-          <a:bodyPr wrap="square" lIns="0" tIns="0" rIns="0" bIns="0" anchor="t">
+          <a:bodyPr wrap="square" anchor="t" lIns="0" rIns="0" tIns="0" bIns="0">
             <a:spAutoFit/>
           </a:bodyPr>
           <a:lstStyle/>
@@ -8140,20 +7351,12 @@
                 <a:solidFill>
                   <a:srgbClr val="7E9EC4"/>
                 </a:solidFill>
-                <a:latin typeface="微软雅黑" panose="020B0503020204020204" charset="-122"/>
-                <a:ea typeface="微软雅黑" panose="020B0503020204020204" charset="-122"/>
-                <a:cs typeface="微软雅黑" panose="020B0503020204020204" charset="-122"/>
+                <a:latin typeface="微软雅黑"/>
+                <a:ea typeface="微软雅黑"/>
+                <a:cs typeface="微软雅黑"/>
               </a:rPr>
               <a:t>过去要翻表格、打电话问；现在抬头看屏幕就知道。</a:t>
             </a:r>
-            <a:endParaRPr sz="1450" b="0" i="0">
-              <a:solidFill>
-                <a:srgbClr val="7E9EC4"/>
-              </a:solidFill>
-              <a:latin typeface="微软雅黑" panose="020B0503020204020204" charset="-122"/>
-              <a:ea typeface="微软雅黑" panose="020B0503020204020204" charset="-122"/>
-              <a:cs typeface="微软雅黑" panose="020B0503020204020204" charset="-122"/>
-            </a:endParaRPr>
           </a:p>
         </p:txBody>
       </p:sp>
@@ -8222,7 +7425,7 @@
           <a:noFill/>
         </p:spPr>
         <p:txBody>
-          <a:bodyPr wrap="square" lIns="0" tIns="0" rIns="0" bIns="0" anchor="t">
+          <a:bodyPr wrap="square" anchor="t" lIns="0" rIns="0" tIns="0" bIns="0">
             <a:spAutoFit/>
           </a:bodyPr>
           <a:lstStyle/>
@@ -8237,20 +7440,12 @@
                 <a:solidFill>
                   <a:srgbClr val="BBD4EC"/>
                 </a:solidFill>
-                <a:latin typeface="微软雅黑" panose="020B0503020204020204" charset="-122"/>
-                <a:ea typeface="微软雅黑" panose="020B0503020204020204" charset="-122"/>
-                <a:cs typeface="微软雅黑" panose="020B0503020204020204" charset="-122"/>
+                <a:latin typeface="微软雅黑"/>
+                <a:ea typeface="微软雅黑"/>
+                <a:cs typeface="微软雅黑"/>
               </a:rPr>
               <a:t>🖥</a:t>
             </a:r>
-            <a:endParaRPr sz="2600" b="0" i="0">
-              <a:solidFill>
-                <a:srgbClr val="BBD4EC"/>
-              </a:solidFill>
-              <a:latin typeface="微软雅黑" panose="020B0503020204020204" charset="-122"/>
-              <a:ea typeface="微软雅黑" panose="020B0503020204020204" charset="-122"/>
-              <a:cs typeface="微软雅黑" panose="020B0503020204020204" charset="-122"/>
-            </a:endParaRPr>
           </a:p>
           <a:p>
             <a:pPr algn="l">
@@ -8263,20 +7458,12 @@
                 <a:solidFill>
                   <a:srgbClr val="ECF7FF"/>
                 </a:solidFill>
-                <a:latin typeface="微软雅黑" panose="020B0503020204020204" charset="-122"/>
-                <a:ea typeface="微软雅黑" panose="020B0503020204020204" charset="-122"/>
-                <a:cs typeface="微软雅黑" panose="020B0503020204020204" charset="-122"/>
+                <a:latin typeface="微软雅黑"/>
+                <a:ea typeface="微软雅黑"/>
+                <a:cs typeface="微软雅黑"/>
               </a:rPr>
               <a:t>一块大屏</a:t>
             </a:r>
-            <a:endParaRPr sz="1800" b="1" i="0">
-              <a:solidFill>
-                <a:srgbClr val="ECF7FF"/>
-              </a:solidFill>
-              <a:latin typeface="微软雅黑" panose="020B0503020204020204" charset="-122"/>
-              <a:ea typeface="微软雅黑" panose="020B0503020204020204" charset="-122"/>
-              <a:cs typeface="微软雅黑" panose="020B0503020204020204" charset="-122"/>
-            </a:endParaRPr>
           </a:p>
           <a:p>
             <a:pPr algn="l">
@@ -8289,20 +7476,12 @@
                 <a:solidFill>
                   <a:srgbClr val="BBD4EC"/>
                 </a:solidFill>
-                <a:latin typeface="微软雅黑" panose="020B0503020204020204" charset="-122"/>
-                <a:ea typeface="微软雅黑" panose="020B0503020204020204" charset="-122"/>
-                <a:cs typeface="微软雅黑" panose="020B0503020204020204" charset="-122"/>
+                <a:latin typeface="微软雅黑"/>
+                <a:ea typeface="微软雅黑"/>
+                <a:cs typeface="微软雅黑"/>
               </a:rPr>
               <a:t>挂在急诊、医务科或指挥中心。患者从呼救到进入绿道，实时滚动，谁都能看。</a:t>
             </a:r>
-            <a:endParaRPr sz="1250" b="0" i="0">
-              <a:solidFill>
-                <a:srgbClr val="BBD4EC"/>
-              </a:solidFill>
-              <a:latin typeface="微软雅黑" panose="020B0503020204020204" charset="-122"/>
-              <a:ea typeface="微软雅黑" panose="020B0503020204020204" charset="-122"/>
-              <a:cs typeface="微软雅黑" panose="020B0503020204020204" charset="-122"/>
-            </a:endParaRPr>
           </a:p>
         </p:txBody>
       </p:sp>
@@ -8371,7 +7550,7 @@
           <a:noFill/>
         </p:spPr>
         <p:txBody>
-          <a:bodyPr wrap="square" lIns="0" tIns="0" rIns="0" bIns="0" anchor="t">
+          <a:bodyPr wrap="square" anchor="t" lIns="0" rIns="0" tIns="0" bIns="0">
             <a:spAutoFit/>
           </a:bodyPr>
           <a:lstStyle/>
@@ -8386,20 +7565,12 @@
                 <a:solidFill>
                   <a:srgbClr val="BBD4EC"/>
                 </a:solidFill>
-                <a:latin typeface="微软雅黑" panose="020B0503020204020204" charset="-122"/>
-                <a:ea typeface="微软雅黑" panose="020B0503020204020204" charset="-122"/>
-                <a:cs typeface="微软雅黑" panose="020B0503020204020204" charset="-122"/>
+                <a:latin typeface="微软雅黑"/>
+                <a:ea typeface="微软雅黑"/>
+                <a:cs typeface="微软雅黑"/>
               </a:rPr>
               <a:t>🗂</a:t>
             </a:r>
-            <a:endParaRPr sz="2600" b="0" i="0">
-              <a:solidFill>
-                <a:srgbClr val="BBD4EC"/>
-              </a:solidFill>
-              <a:latin typeface="微软雅黑" panose="020B0503020204020204" charset="-122"/>
-              <a:ea typeface="微软雅黑" panose="020B0503020204020204" charset="-122"/>
-              <a:cs typeface="微软雅黑" panose="020B0503020204020204" charset="-122"/>
-            </a:endParaRPr>
           </a:p>
           <a:p>
             <a:pPr algn="l">
@@ -8412,20 +7583,12 @@
                 <a:solidFill>
                   <a:srgbClr val="ECF7FF"/>
                 </a:solidFill>
-                <a:latin typeface="微软雅黑" panose="020B0503020204020204" charset="-122"/>
-                <a:ea typeface="微软雅黑" panose="020B0503020204020204" charset="-122"/>
-                <a:cs typeface="微软雅黑" panose="020B0503020204020204" charset="-122"/>
+                <a:latin typeface="微软雅黑"/>
+                <a:ea typeface="微软雅黑"/>
+                <a:cs typeface="微软雅黑"/>
               </a:rPr>
               <a:t>一个后台</a:t>
             </a:r>
-            <a:endParaRPr sz="1800" b="1" i="0">
-              <a:solidFill>
-                <a:srgbClr val="ECF7FF"/>
-              </a:solidFill>
-              <a:latin typeface="微软雅黑" panose="020B0503020204020204" charset="-122"/>
-              <a:ea typeface="微软雅黑" panose="020B0503020204020204" charset="-122"/>
-              <a:cs typeface="微软雅黑" panose="020B0503020204020204" charset="-122"/>
-            </a:endParaRPr>
           </a:p>
           <a:p>
             <a:pPr algn="l">
@@ -8438,20 +7601,12 @@
                 <a:solidFill>
                   <a:srgbClr val="BBD4EC"/>
                 </a:solidFill>
-                <a:latin typeface="微软雅黑" panose="020B0503020204020204" charset="-122"/>
-                <a:ea typeface="微软雅黑" panose="020B0503020204020204" charset="-122"/>
-                <a:cs typeface="微软雅黑" panose="020B0503020204020204" charset="-122"/>
+                <a:latin typeface="微软雅黑"/>
+                <a:ea typeface="微软雅黑"/>
+                <a:cs typeface="微软雅黑"/>
               </a:rPr>
               <a:t>医生护士录病例、补齐时间节点、维护疾病字典；管理员管账号和权限。</a:t>
             </a:r>
-            <a:endParaRPr sz="1250" b="0" i="0">
-              <a:solidFill>
-                <a:srgbClr val="BBD4EC"/>
-              </a:solidFill>
-              <a:latin typeface="微软雅黑" panose="020B0503020204020204" charset="-122"/>
-              <a:ea typeface="微软雅黑" panose="020B0503020204020204" charset="-122"/>
-              <a:cs typeface="微软雅黑" panose="020B0503020204020204" charset="-122"/>
-            </a:endParaRPr>
           </a:p>
         </p:txBody>
       </p:sp>
@@ -8520,7 +7675,7 @@
           <a:noFill/>
         </p:spPr>
         <p:txBody>
-          <a:bodyPr wrap="square" lIns="0" tIns="0" rIns="0" bIns="0" anchor="t">
+          <a:bodyPr wrap="square" anchor="t" lIns="0" rIns="0" tIns="0" bIns="0">
             <a:spAutoFit/>
           </a:bodyPr>
           <a:lstStyle/>
@@ -8535,20 +7690,12 @@
                 <a:solidFill>
                   <a:srgbClr val="BBD4EC"/>
                 </a:solidFill>
-                <a:latin typeface="微软雅黑" panose="020B0503020204020204" charset="-122"/>
-                <a:ea typeface="微软雅黑" panose="020B0503020204020204" charset="-122"/>
-                <a:cs typeface="微软雅黑" panose="020B0503020204020204" charset="-122"/>
+                <a:latin typeface="微软雅黑"/>
+                <a:ea typeface="微软雅黑"/>
+                <a:cs typeface="微软雅黑"/>
               </a:rPr>
               <a:t>📈</a:t>
             </a:r>
-            <a:endParaRPr sz="2600" b="0" i="0">
-              <a:solidFill>
-                <a:srgbClr val="BBD4EC"/>
-              </a:solidFill>
-              <a:latin typeface="微软雅黑" panose="020B0503020204020204" charset="-122"/>
-              <a:ea typeface="微软雅黑" panose="020B0503020204020204" charset="-122"/>
-              <a:cs typeface="微软雅黑" panose="020B0503020204020204" charset="-122"/>
-            </a:endParaRPr>
           </a:p>
           <a:p>
             <a:pPr algn="l">
@@ -8561,20 +7708,12 @@
                 <a:solidFill>
                   <a:srgbClr val="ECF7FF"/>
                 </a:solidFill>
-                <a:latin typeface="微软雅黑" panose="020B0503020204020204" charset="-122"/>
-                <a:ea typeface="微软雅黑" panose="020B0503020204020204" charset="-122"/>
-                <a:cs typeface="微软雅黑" panose="020B0503020204020204" charset="-122"/>
+                <a:latin typeface="微软雅黑"/>
+                <a:ea typeface="微软雅黑"/>
+                <a:cs typeface="微软雅黑"/>
               </a:rPr>
               <a:t>一套报表</a:t>
             </a:r>
-            <a:endParaRPr sz="1800" b="1" i="0">
-              <a:solidFill>
-                <a:srgbClr val="ECF7FF"/>
-              </a:solidFill>
-              <a:latin typeface="微软雅黑" panose="020B0503020204020204" charset="-122"/>
-              <a:ea typeface="微软雅黑" panose="020B0503020204020204" charset="-122"/>
-              <a:cs typeface="微软雅黑" panose="020B0503020204020204" charset="-122"/>
-            </a:endParaRPr>
           </a:p>
           <a:p>
             <a:pPr algn="l">
@@ -8587,20 +7726,12 @@
                 <a:solidFill>
                   <a:srgbClr val="BBD4EC"/>
                 </a:solidFill>
-                <a:latin typeface="微软雅黑" panose="020B0503020204020204" charset="-122"/>
-                <a:ea typeface="微软雅黑" panose="020B0503020204020204" charset="-122"/>
-                <a:cs typeface="微软雅黑" panose="020B0503020204020204" charset="-122"/>
+                <a:latin typeface="微软雅黑"/>
+                <a:ea typeface="微软雅黑"/>
+                <a:cs typeface="微软雅黑"/>
               </a:rPr>
               <a:t>按月、按科室、按病种统计数量与响应时长，还能一键导出成 Excel。</a:t>
             </a:r>
-            <a:endParaRPr sz="1250" b="0" i="0">
-              <a:solidFill>
-                <a:srgbClr val="BBD4EC"/>
-              </a:solidFill>
-              <a:latin typeface="微软雅黑" panose="020B0503020204020204" charset="-122"/>
-              <a:ea typeface="微软雅黑" panose="020B0503020204020204" charset="-122"/>
-              <a:cs typeface="微软雅黑" panose="020B0503020204020204" charset="-122"/>
-            </a:endParaRPr>
           </a:p>
         </p:txBody>
       </p:sp>
@@ -8613,7 +7744,7 @@
 </file>
 
 <file path=ppt/slides/slide4.xml><?xml version="1.0" encoding="utf-8"?>
-<p:sld xmlns:a="http://schemas.openxmlformats.org/drawingml/2006/main" xmlns:r="http://schemas.openxmlformats.org/officeDocument/2006/relationships" xmlns:p="http://schemas.openxmlformats.org/presentationml/2006/main">
+<p:sld xmlns:a="http://schemas.openxmlformats.org/drawingml/2006/main" xmlns:p="http://schemas.openxmlformats.org/presentationml/2006/main" xmlns:r="http://schemas.openxmlformats.org/officeDocument/2006/relationships">
   <p:cSld>
     <p:spTree>
       <p:nvGrpSpPr>
@@ -8683,7 +7814,7 @@
           <a:noFill/>
         </p:spPr>
         <p:txBody>
-          <a:bodyPr wrap="square" lIns="0" tIns="0" rIns="0" bIns="0" anchor="t">
+          <a:bodyPr wrap="square" anchor="t" lIns="0" rIns="0" tIns="0" bIns="0">
             <a:spAutoFit/>
           </a:bodyPr>
           <a:lstStyle/>
@@ -8694,20 +7825,12 @@
                 <a:solidFill>
                   <a:srgbClr val="7FE3FF"/>
                 </a:solidFill>
-                <a:latin typeface="微软雅黑" panose="020B0503020204020204" charset="-122"/>
-                <a:ea typeface="微软雅黑" panose="020B0503020204020204" charset="-122"/>
-                <a:cs typeface="微软雅黑" panose="020B0503020204020204" charset="-122"/>
+                <a:latin typeface="微软雅黑"/>
+                <a:ea typeface="微软雅黑"/>
+                <a:cs typeface="微软雅黑"/>
               </a:rPr>
               <a:t>01 · 它是什么</a:t>
             </a:r>
-            <a:endParaRPr sz="1150" b="1" i="0">
-              <a:solidFill>
-                <a:srgbClr val="7FE3FF"/>
-              </a:solidFill>
-              <a:latin typeface="微软雅黑" panose="020B0503020204020204" charset="-122"/>
-              <a:ea typeface="微软雅黑" panose="020B0503020204020204" charset="-122"/>
-              <a:cs typeface="微软雅黑" panose="020B0503020204020204" charset="-122"/>
-            </a:endParaRPr>
           </a:p>
         </p:txBody>
       </p:sp>
@@ -8728,7 +7851,7 @@
           <a:noFill/>
         </p:spPr>
         <p:txBody>
-          <a:bodyPr wrap="square" lIns="0" tIns="0" rIns="0" bIns="0" anchor="t">
+          <a:bodyPr wrap="square" anchor="t" lIns="0" rIns="0" tIns="0" bIns="0">
             <a:spAutoFit/>
           </a:bodyPr>
           <a:lstStyle/>
@@ -8739,20 +7862,12 @@
                 <a:solidFill>
                   <a:srgbClr val="ECF7FF"/>
                 </a:solidFill>
-                <a:latin typeface="微软雅黑" panose="020B0503020204020204" charset="-122"/>
-                <a:ea typeface="微软雅黑" panose="020B0503020204020204" charset="-122"/>
-                <a:cs typeface="微软雅黑" panose="020B0503020204020204" charset="-122"/>
+                <a:latin typeface="微软雅黑"/>
+                <a:ea typeface="微软雅黑"/>
+                <a:cs typeface="微软雅黑"/>
               </a:rPr>
               <a:t>大屏长这样：五个区域，各有分工</a:t>
             </a:r>
-            <a:endParaRPr sz="2700" b="1" i="0">
-              <a:solidFill>
-                <a:srgbClr val="ECF7FF"/>
-              </a:solidFill>
-              <a:latin typeface="微软雅黑" panose="020B0503020204020204" charset="-122"/>
-              <a:ea typeface="微软雅黑" panose="020B0503020204020204" charset="-122"/>
-              <a:cs typeface="微软雅黑" panose="020B0503020204020204" charset="-122"/>
-            </a:endParaRPr>
           </a:p>
         </p:txBody>
       </p:sp>
@@ -8773,7 +7888,7 @@
           <a:noFill/>
         </p:spPr>
         <p:txBody>
-          <a:bodyPr wrap="square" lIns="0" tIns="0" rIns="0" bIns="0" anchor="t">
+          <a:bodyPr wrap="square" anchor="t" lIns="0" rIns="0" tIns="0" bIns="0">
             <a:spAutoFit/>
           </a:bodyPr>
           <a:lstStyle/>
@@ -8784,20 +7899,12 @@
                 <a:solidFill>
                   <a:srgbClr val="7E9EC4"/>
                 </a:solidFill>
-                <a:latin typeface="微软雅黑" panose="020B0503020204020204" charset="-122"/>
-                <a:ea typeface="微软雅黑" panose="020B0503020204020204" charset="-122"/>
-                <a:cs typeface="微软雅黑" panose="020B0503020204020204" charset="-122"/>
+                <a:latin typeface="微软雅黑"/>
+                <a:ea typeface="微软雅黑"/>
+                <a:cs typeface="微软雅黑"/>
               </a:rPr>
               <a:t>急救绿道 · 4 / 13</a:t>
             </a:r>
-            <a:endParaRPr sz="1000" b="0" i="0">
-              <a:solidFill>
-                <a:srgbClr val="7E9EC4"/>
-              </a:solidFill>
-              <a:latin typeface="微软雅黑" panose="020B0503020204020204" charset="-122"/>
-              <a:ea typeface="微软雅黑" panose="020B0503020204020204" charset="-122"/>
-              <a:cs typeface="微软雅黑" panose="020B0503020204020204" charset="-122"/>
-            </a:endParaRPr>
           </a:p>
         </p:txBody>
       </p:sp>
@@ -8810,7 +7917,7 @@
           <p:nvPr/>
         </p:nvPicPr>
         <p:blipFill>
-          <a:blip r:embed="rId1"/>
+          <a:blip r:embed="rId2"/>
           <a:stretch>
             <a:fillRect/>
           </a:stretch>
@@ -8842,7 +7949,7 @@
           <a:noFill/>
         </p:spPr>
         <p:txBody>
-          <a:bodyPr wrap="square" lIns="0" tIns="0" rIns="0" bIns="0" anchor="t">
+          <a:bodyPr wrap="square" anchor="t" lIns="0" rIns="0" tIns="0" bIns="0">
             <a:spAutoFit/>
           </a:bodyPr>
           <a:lstStyle/>
@@ -8853,20 +7960,12 @@
                 <a:solidFill>
                   <a:srgbClr val="7E9EC4"/>
                 </a:solidFill>
-                <a:latin typeface="微软雅黑" panose="020B0503020204020204" charset="-122"/>
-                <a:ea typeface="微软雅黑" panose="020B0503020204020204" charset="-122"/>
-                <a:cs typeface="微软雅黑" panose="020B0503020204020204" charset="-122"/>
+                <a:latin typeface="微软雅黑"/>
+                <a:ea typeface="微软雅黑"/>
+                <a:cs typeface="微软雅黑"/>
               </a:rPr>
               <a:t>图 1 · 1920×1080 实机渲染（数据为合成演示数据）</a:t>
             </a:r>
-            <a:endParaRPr sz="950" b="0" i="0">
-              <a:solidFill>
-                <a:srgbClr val="7E9EC4"/>
-              </a:solidFill>
-              <a:latin typeface="微软雅黑" panose="020B0503020204020204" charset="-122"/>
-              <a:ea typeface="微软雅黑" panose="020B0503020204020204" charset="-122"/>
-              <a:cs typeface="微软雅黑" panose="020B0503020204020204" charset="-122"/>
-            </a:endParaRPr>
           </a:p>
         </p:txBody>
       </p:sp>
@@ -8909,7 +8008,7 @@
           </a:fontRef>
         </p:style>
         <p:txBody>
-          <a:bodyPr lIns="0" tIns="0" rIns="0" bIns="0" rtlCol="0" anchor="ctr"/>
+          <a:bodyPr rtlCol="0" anchor="ctr" lIns="0" rIns="0" tIns="0" bIns="0"/>
           <a:lstStyle/>
           <a:p>
             <a:pPr algn="ctr"/>
@@ -8918,20 +8017,12 @@
                 <a:solidFill>
                   <a:srgbClr val="FFFFFF"/>
                 </a:solidFill>
-                <a:latin typeface="微软雅黑" panose="020B0503020204020204" charset="-122"/>
-                <a:ea typeface="微软雅黑" panose="020B0503020204020204" charset="-122"/>
-                <a:cs typeface="微软雅黑" panose="020B0503020204020204" charset="-122"/>
+                <a:latin typeface="微软雅黑"/>
+                <a:ea typeface="微软雅黑"/>
+                <a:cs typeface="微软雅黑"/>
               </a:rPr>
               <a:t>1</a:t>
             </a:r>
-            <a:endParaRPr sz="1000" b="1" i="0">
-              <a:solidFill>
-                <a:srgbClr val="FFFFFF"/>
-              </a:solidFill>
-              <a:latin typeface="微软雅黑" panose="020B0503020204020204" charset="-122"/>
-              <a:ea typeface="微软雅黑" panose="020B0503020204020204" charset="-122"/>
-              <a:cs typeface="微软雅黑" panose="020B0503020204020204" charset="-122"/>
-            </a:endParaRPr>
           </a:p>
         </p:txBody>
       </p:sp>
@@ -8974,7 +8065,7 @@
           </a:fontRef>
         </p:style>
         <p:txBody>
-          <a:bodyPr lIns="0" tIns="0" rIns="0" bIns="0" rtlCol="0" anchor="ctr"/>
+          <a:bodyPr rtlCol="0" anchor="ctr" lIns="0" rIns="0" tIns="0" bIns="0"/>
           <a:lstStyle/>
           <a:p>
             <a:pPr algn="ctr"/>
@@ -8983,20 +8074,12 @@
                 <a:solidFill>
                   <a:srgbClr val="FFFFFF"/>
                 </a:solidFill>
-                <a:latin typeface="微软雅黑" panose="020B0503020204020204" charset="-122"/>
-                <a:ea typeface="微软雅黑" panose="020B0503020204020204" charset="-122"/>
-                <a:cs typeface="微软雅黑" panose="020B0503020204020204" charset="-122"/>
+                <a:latin typeface="微软雅黑"/>
+                <a:ea typeface="微软雅黑"/>
+                <a:cs typeface="微软雅黑"/>
               </a:rPr>
               <a:t>2</a:t>
             </a:r>
-            <a:endParaRPr sz="1000" b="1" i="0">
-              <a:solidFill>
-                <a:srgbClr val="FFFFFF"/>
-              </a:solidFill>
-              <a:latin typeface="微软雅黑" panose="020B0503020204020204" charset="-122"/>
-              <a:ea typeface="微软雅黑" panose="020B0503020204020204" charset="-122"/>
-              <a:cs typeface="微软雅黑" panose="020B0503020204020204" charset="-122"/>
-            </a:endParaRPr>
           </a:p>
         </p:txBody>
       </p:sp>
@@ -9039,7 +8122,7 @@
           </a:fontRef>
         </p:style>
         <p:txBody>
-          <a:bodyPr lIns="0" tIns="0" rIns="0" bIns="0" rtlCol="0" anchor="ctr"/>
+          <a:bodyPr rtlCol="0" anchor="ctr" lIns="0" rIns="0" tIns="0" bIns="0"/>
           <a:lstStyle/>
           <a:p>
             <a:pPr algn="ctr"/>
@@ -9048,20 +8131,12 @@
                 <a:solidFill>
                   <a:srgbClr val="FFFFFF"/>
                 </a:solidFill>
-                <a:latin typeface="微软雅黑" panose="020B0503020204020204" charset="-122"/>
-                <a:ea typeface="微软雅黑" panose="020B0503020204020204" charset="-122"/>
-                <a:cs typeface="微软雅黑" panose="020B0503020204020204" charset="-122"/>
+                <a:latin typeface="微软雅黑"/>
+                <a:ea typeface="微软雅黑"/>
+                <a:cs typeface="微软雅黑"/>
               </a:rPr>
               <a:t>3</a:t>
             </a:r>
-            <a:endParaRPr sz="1000" b="1" i="0">
-              <a:solidFill>
-                <a:srgbClr val="FFFFFF"/>
-              </a:solidFill>
-              <a:latin typeface="微软雅黑" panose="020B0503020204020204" charset="-122"/>
-              <a:ea typeface="微软雅黑" panose="020B0503020204020204" charset="-122"/>
-              <a:cs typeface="微软雅黑" panose="020B0503020204020204" charset="-122"/>
-            </a:endParaRPr>
           </a:p>
         </p:txBody>
       </p:sp>
@@ -9104,7 +8179,7 @@
           </a:fontRef>
         </p:style>
         <p:txBody>
-          <a:bodyPr lIns="0" tIns="0" rIns="0" bIns="0" rtlCol="0" anchor="ctr"/>
+          <a:bodyPr rtlCol="0" anchor="ctr" lIns="0" rIns="0" tIns="0" bIns="0"/>
           <a:lstStyle/>
           <a:p>
             <a:pPr algn="ctr"/>
@@ -9113,20 +8188,12 @@
                 <a:solidFill>
                   <a:srgbClr val="FFFFFF"/>
                 </a:solidFill>
-                <a:latin typeface="微软雅黑" panose="020B0503020204020204" charset="-122"/>
-                <a:ea typeface="微软雅黑" panose="020B0503020204020204" charset="-122"/>
-                <a:cs typeface="微软雅黑" panose="020B0503020204020204" charset="-122"/>
+                <a:latin typeface="微软雅黑"/>
+                <a:ea typeface="微软雅黑"/>
+                <a:cs typeface="微软雅黑"/>
               </a:rPr>
               <a:t>4</a:t>
             </a:r>
-            <a:endParaRPr sz="1000" b="1" i="0">
-              <a:solidFill>
-                <a:srgbClr val="FFFFFF"/>
-              </a:solidFill>
-              <a:latin typeface="微软雅黑" panose="020B0503020204020204" charset="-122"/>
-              <a:ea typeface="微软雅黑" panose="020B0503020204020204" charset="-122"/>
-              <a:cs typeface="微软雅黑" panose="020B0503020204020204" charset="-122"/>
-            </a:endParaRPr>
           </a:p>
         </p:txBody>
       </p:sp>
@@ -9169,7 +8236,7 @@
           </a:fontRef>
         </p:style>
         <p:txBody>
-          <a:bodyPr lIns="0" tIns="0" rIns="0" bIns="0" rtlCol="0" anchor="ctr"/>
+          <a:bodyPr rtlCol="0" anchor="ctr" lIns="0" rIns="0" tIns="0" bIns="0"/>
           <a:lstStyle/>
           <a:p>
             <a:pPr algn="ctr"/>
@@ -9178,20 +8245,12 @@
                 <a:solidFill>
                   <a:srgbClr val="FFFFFF"/>
                 </a:solidFill>
-                <a:latin typeface="微软雅黑" panose="020B0503020204020204" charset="-122"/>
-                <a:ea typeface="微软雅黑" panose="020B0503020204020204" charset="-122"/>
-                <a:cs typeface="微软雅黑" panose="020B0503020204020204" charset="-122"/>
+                <a:latin typeface="微软雅黑"/>
+                <a:ea typeface="微软雅黑"/>
+                <a:cs typeface="微软雅黑"/>
               </a:rPr>
               <a:t>5</a:t>
             </a:r>
-            <a:endParaRPr sz="1000" b="1" i="0">
-              <a:solidFill>
-                <a:srgbClr val="FFFFFF"/>
-              </a:solidFill>
-              <a:latin typeface="微软雅黑" panose="020B0503020204020204" charset="-122"/>
-              <a:ea typeface="微软雅黑" panose="020B0503020204020204" charset="-122"/>
-              <a:cs typeface="微软雅黑" panose="020B0503020204020204" charset="-122"/>
-            </a:endParaRPr>
           </a:p>
         </p:txBody>
       </p:sp>
@@ -9282,7 +8341,7 @@
           </a:fontRef>
         </p:style>
         <p:txBody>
-          <a:bodyPr lIns="0" tIns="0" rIns="0" bIns="0" rtlCol="0" anchor="ctr"/>
+          <a:bodyPr rtlCol="0" anchor="ctr" lIns="0" rIns="0" tIns="0" bIns="0"/>
           <a:lstStyle/>
           <a:p>
             <a:pPr algn="ctr"/>
@@ -9291,20 +8350,12 @@
                 <a:solidFill>
                   <a:srgbClr val="FFFFFF"/>
                 </a:solidFill>
-                <a:latin typeface="微软雅黑" panose="020B0503020204020204" charset="-122"/>
-                <a:ea typeface="微软雅黑" panose="020B0503020204020204" charset="-122"/>
-                <a:cs typeface="微软雅黑" panose="020B0503020204020204" charset="-122"/>
+                <a:latin typeface="微软雅黑"/>
+                <a:ea typeface="微软雅黑"/>
+                <a:cs typeface="微软雅黑"/>
               </a:rPr>
               <a:t>1</a:t>
             </a:r>
-            <a:endParaRPr sz="1000" b="1" i="0">
-              <a:solidFill>
-                <a:srgbClr val="FFFFFF"/>
-              </a:solidFill>
-              <a:latin typeface="微软雅黑" panose="020B0503020204020204" charset="-122"/>
-              <a:ea typeface="微软雅黑" panose="020B0503020204020204" charset="-122"/>
-              <a:cs typeface="微软雅黑" panose="020B0503020204020204" charset="-122"/>
-            </a:endParaRPr>
           </a:p>
         </p:txBody>
       </p:sp>
@@ -9325,7 +8376,7 @@
           <a:noFill/>
         </p:spPr>
         <p:txBody>
-          <a:bodyPr wrap="square" lIns="0" tIns="0" rIns="0" bIns="0" anchor="t">
+          <a:bodyPr wrap="square" anchor="t" lIns="0" rIns="0" tIns="0" bIns="0">
             <a:spAutoFit/>
           </a:bodyPr>
           <a:lstStyle/>
@@ -9340,20 +8391,12 @@
                 <a:solidFill>
                   <a:srgbClr val="BBD4EC"/>
                 </a:solidFill>
-                <a:latin typeface="微软雅黑" panose="020B0503020204020204" charset="-122"/>
-                <a:ea typeface="微软雅黑" panose="020B0503020204020204" charset="-122"/>
-                <a:cs typeface="微软雅黑" panose="020B0503020204020204" charset="-122"/>
+                <a:latin typeface="微软雅黑"/>
+                <a:ea typeface="微软雅黑"/>
+                <a:cs typeface="微软雅黑"/>
               </a:rPr>
               <a:t>顶部标题栏</a:t>
             </a:r>
-            <a:endParaRPr sz="1150" b="1" i="0">
-              <a:solidFill>
-                <a:srgbClr val="BBD4EC"/>
-              </a:solidFill>
-              <a:latin typeface="微软雅黑" panose="020B0503020204020204" charset="-122"/>
-              <a:ea typeface="微软雅黑" panose="020B0503020204020204" charset="-122"/>
-              <a:cs typeface="微软雅黑" panose="020B0503020204020204" charset="-122"/>
-            </a:endParaRPr>
           </a:p>
           <a:p>
             <a:pPr algn="l">
@@ -9366,20 +8409,12 @@
                 <a:solidFill>
                   <a:srgbClr val="7E9EC4"/>
                 </a:solidFill>
-                <a:latin typeface="微软雅黑" panose="020B0503020204020204" charset="-122"/>
-                <a:ea typeface="微软雅黑" panose="020B0503020204020204" charset="-122"/>
-                <a:cs typeface="微软雅黑" panose="020B0503020204020204" charset="-122"/>
+                <a:latin typeface="微软雅黑"/>
+                <a:ea typeface="微软雅黑"/>
+                <a:cs typeface="微软雅黑"/>
               </a:rPr>
               <a:t>机构名称 + 实时时钟，一眼确认「这屏是活的」</a:t>
             </a:r>
-            <a:endParaRPr sz="950" b="0" i="0">
-              <a:solidFill>
-                <a:srgbClr val="7E9EC4"/>
-              </a:solidFill>
-              <a:latin typeface="微软雅黑" panose="020B0503020204020204" charset="-122"/>
-              <a:ea typeface="微软雅黑" panose="020B0503020204020204" charset="-122"/>
-              <a:cs typeface="微软雅黑" panose="020B0503020204020204" charset="-122"/>
-            </a:endParaRPr>
           </a:p>
         </p:txBody>
       </p:sp>
@@ -9470,7 +8505,7 @@
           </a:fontRef>
         </p:style>
         <p:txBody>
-          <a:bodyPr lIns="0" tIns="0" rIns="0" bIns="0" rtlCol="0" anchor="ctr"/>
+          <a:bodyPr rtlCol="0" anchor="ctr" lIns="0" rIns="0" tIns="0" bIns="0"/>
           <a:lstStyle/>
           <a:p>
             <a:pPr algn="ctr"/>
@@ -9479,20 +8514,12 @@
                 <a:solidFill>
                   <a:srgbClr val="FFFFFF"/>
                 </a:solidFill>
-                <a:latin typeface="微软雅黑" panose="020B0503020204020204" charset="-122"/>
-                <a:ea typeface="微软雅黑" panose="020B0503020204020204" charset="-122"/>
-                <a:cs typeface="微软雅黑" panose="020B0503020204020204" charset="-122"/>
+                <a:latin typeface="微软雅黑"/>
+                <a:ea typeface="微软雅黑"/>
+                <a:cs typeface="微软雅黑"/>
               </a:rPr>
               <a:t>2</a:t>
             </a:r>
-            <a:endParaRPr sz="1000" b="1" i="0">
-              <a:solidFill>
-                <a:srgbClr val="FFFFFF"/>
-              </a:solidFill>
-              <a:latin typeface="微软雅黑" panose="020B0503020204020204" charset="-122"/>
-              <a:ea typeface="微软雅黑" panose="020B0503020204020204" charset="-122"/>
-              <a:cs typeface="微软雅黑" panose="020B0503020204020204" charset="-122"/>
-            </a:endParaRPr>
           </a:p>
         </p:txBody>
       </p:sp>
@@ -9513,7 +8540,7 @@
           <a:noFill/>
         </p:spPr>
         <p:txBody>
-          <a:bodyPr wrap="square" lIns="0" tIns="0" rIns="0" bIns="0" anchor="t">
+          <a:bodyPr wrap="square" anchor="t" lIns="0" rIns="0" tIns="0" bIns="0">
             <a:spAutoFit/>
           </a:bodyPr>
           <a:lstStyle/>
@@ -9528,20 +8555,12 @@
                 <a:solidFill>
                   <a:srgbClr val="BBD4EC"/>
                 </a:solidFill>
-                <a:latin typeface="微软雅黑" panose="020B0503020204020204" charset="-122"/>
-                <a:ea typeface="微软雅黑" panose="020B0503020204020204" charset="-122"/>
-                <a:cs typeface="微软雅黑" panose="020B0503020204020204" charset="-122"/>
+                <a:latin typeface="微软雅黑"/>
+                <a:ea typeface="微软雅黑"/>
+                <a:cs typeface="微软雅黑"/>
               </a:rPr>
               <a:t>累计患者饼图</a:t>
             </a:r>
-            <a:endParaRPr sz="1150" b="1" i="0">
-              <a:solidFill>
-                <a:srgbClr val="BBD4EC"/>
-              </a:solidFill>
-              <a:latin typeface="微软雅黑" panose="020B0503020204020204" charset="-122"/>
-              <a:ea typeface="微软雅黑" panose="020B0503020204020204" charset="-122"/>
-              <a:cs typeface="微软雅黑" panose="020B0503020204020204" charset="-122"/>
-            </a:endParaRPr>
           </a:p>
           <a:p>
             <a:pPr algn="l">
@@ -9554,20 +8573,12 @@
                 <a:solidFill>
                   <a:srgbClr val="7E9EC4"/>
                 </a:solidFill>
-                <a:latin typeface="微软雅黑" panose="020B0503020204020204" charset="-122"/>
-                <a:ea typeface="微软雅黑" panose="020B0503020204020204" charset="-122"/>
-                <a:cs typeface="微软雅黑" panose="020B0503020204020204" charset="-122"/>
+                <a:latin typeface="微软雅黑"/>
+                <a:ea typeface="微软雅黑"/>
+                <a:cs typeface="微软雅黑"/>
               </a:rPr>
               <a:t>绿道总人数，点一下可切到别的病种</a:t>
             </a:r>
-            <a:endParaRPr sz="950" b="0" i="0">
-              <a:solidFill>
-                <a:srgbClr val="7E9EC4"/>
-              </a:solidFill>
-              <a:latin typeface="微软雅黑" panose="020B0503020204020204" charset="-122"/>
-              <a:ea typeface="微软雅黑" panose="020B0503020204020204" charset="-122"/>
-              <a:cs typeface="微软雅黑" panose="020B0503020204020204" charset="-122"/>
-            </a:endParaRPr>
           </a:p>
         </p:txBody>
       </p:sp>
@@ -9658,7 +8669,7 @@
           </a:fontRef>
         </p:style>
         <p:txBody>
-          <a:bodyPr lIns="0" tIns="0" rIns="0" bIns="0" rtlCol="0" anchor="ctr"/>
+          <a:bodyPr rtlCol="0" anchor="ctr" lIns="0" rIns="0" tIns="0" bIns="0"/>
           <a:lstStyle/>
           <a:p>
             <a:pPr algn="ctr"/>
@@ -9667,20 +8678,12 @@
                 <a:solidFill>
                   <a:srgbClr val="FFFFFF"/>
                 </a:solidFill>
-                <a:latin typeface="微软雅黑" panose="020B0503020204020204" charset="-122"/>
-                <a:ea typeface="微软雅黑" panose="020B0503020204020204" charset="-122"/>
-                <a:cs typeface="微软雅黑" panose="020B0503020204020204" charset="-122"/>
+                <a:latin typeface="微软雅黑"/>
+                <a:ea typeface="微软雅黑"/>
+                <a:cs typeface="微软雅黑"/>
               </a:rPr>
               <a:t>3</a:t>
             </a:r>
-            <a:endParaRPr sz="1000" b="1" i="0">
-              <a:solidFill>
-                <a:srgbClr val="FFFFFF"/>
-              </a:solidFill>
-              <a:latin typeface="微软雅黑" panose="020B0503020204020204" charset="-122"/>
-              <a:ea typeface="微软雅黑" panose="020B0503020204020204" charset="-122"/>
-              <a:cs typeface="微软雅黑" panose="020B0503020204020204" charset="-122"/>
-            </a:endParaRPr>
           </a:p>
         </p:txBody>
       </p:sp>
@@ -9701,7 +8704,7 @@
           <a:noFill/>
         </p:spPr>
         <p:txBody>
-          <a:bodyPr wrap="square" lIns="0" tIns="0" rIns="0" bIns="0" anchor="t">
+          <a:bodyPr wrap="square" anchor="t" lIns="0" rIns="0" tIns="0" bIns="0">
             <a:spAutoFit/>
           </a:bodyPr>
           <a:lstStyle/>
@@ -9716,20 +8719,12 @@
                 <a:solidFill>
                   <a:srgbClr val="BBD4EC"/>
                 </a:solidFill>
-                <a:latin typeface="微软雅黑" panose="020B0503020204020204" charset="-122"/>
-                <a:ea typeface="微软雅黑" panose="020B0503020204020204" charset="-122"/>
-                <a:cs typeface="微软雅黑" panose="020B0503020204020204" charset="-122"/>
+                <a:latin typeface="微软雅黑"/>
+                <a:ea typeface="微软雅黑"/>
+                <a:cs typeface="微软雅黑"/>
               </a:rPr>
               <a:t>近 12 个月柱状图</a:t>
             </a:r>
-            <a:endParaRPr sz="1150" b="1" i="0">
-              <a:solidFill>
-                <a:srgbClr val="BBD4EC"/>
-              </a:solidFill>
-              <a:latin typeface="微软雅黑" panose="020B0503020204020204" charset="-122"/>
-              <a:ea typeface="微软雅黑" panose="020B0503020204020204" charset="-122"/>
-              <a:cs typeface="微软雅黑" panose="020B0503020204020204" charset="-122"/>
-            </a:endParaRPr>
           </a:p>
           <a:p>
             <a:pPr algn="l">
@@ -9742,20 +8737,12 @@
                 <a:solidFill>
                   <a:srgbClr val="7E9EC4"/>
                 </a:solidFill>
-                <a:latin typeface="微软雅黑" panose="020B0503020204020204" charset="-122"/>
-                <a:ea typeface="微软雅黑" panose="020B0503020204020204" charset="-122"/>
-                <a:cs typeface="微软雅黑" panose="020B0503020204020204" charset="-122"/>
+                <a:latin typeface="微软雅黑"/>
+                <a:ea typeface="微软雅黑"/>
+                <a:cs typeface="微软雅黑"/>
               </a:rPr>
               <a:t>看趋势；末月标注「本月至今」，不会显得掉量</a:t>
             </a:r>
-            <a:endParaRPr sz="950" b="0" i="0">
-              <a:solidFill>
-                <a:srgbClr val="7E9EC4"/>
-              </a:solidFill>
-              <a:latin typeface="微软雅黑" panose="020B0503020204020204" charset="-122"/>
-              <a:ea typeface="微软雅黑" panose="020B0503020204020204" charset="-122"/>
-              <a:cs typeface="微软雅黑" panose="020B0503020204020204" charset="-122"/>
-            </a:endParaRPr>
           </a:p>
         </p:txBody>
       </p:sp>
@@ -9846,7 +8833,7 @@
           </a:fontRef>
         </p:style>
         <p:txBody>
-          <a:bodyPr lIns="0" tIns="0" rIns="0" bIns="0" rtlCol="0" anchor="ctr"/>
+          <a:bodyPr rtlCol="0" anchor="ctr" lIns="0" rIns="0" tIns="0" bIns="0"/>
           <a:lstStyle/>
           <a:p>
             <a:pPr algn="ctr"/>
@@ -9855,20 +8842,12 @@
                 <a:solidFill>
                   <a:srgbClr val="FFFFFF"/>
                 </a:solidFill>
-                <a:latin typeface="微软雅黑" panose="020B0503020204020204" charset="-122"/>
-                <a:ea typeface="微软雅黑" panose="020B0503020204020204" charset="-122"/>
-                <a:cs typeface="微软雅黑" panose="020B0503020204020204" charset="-122"/>
+                <a:latin typeface="微软雅黑"/>
+                <a:ea typeface="微软雅黑"/>
+                <a:cs typeface="微软雅黑"/>
               </a:rPr>
               <a:t>4</a:t>
             </a:r>
-            <a:endParaRPr sz="1000" b="1" i="0">
-              <a:solidFill>
-                <a:srgbClr val="FFFFFF"/>
-              </a:solidFill>
-              <a:latin typeface="微软雅黑" panose="020B0503020204020204" charset="-122"/>
-              <a:ea typeface="微软雅黑" panose="020B0503020204020204" charset="-122"/>
-              <a:cs typeface="微软雅黑" panose="020B0503020204020204" charset="-122"/>
-            </a:endParaRPr>
           </a:p>
         </p:txBody>
       </p:sp>
@@ -9889,7 +8868,7 @@
           <a:noFill/>
         </p:spPr>
         <p:txBody>
-          <a:bodyPr wrap="square" lIns="0" tIns="0" rIns="0" bIns="0" anchor="t">
+          <a:bodyPr wrap="square" anchor="t" lIns="0" rIns="0" tIns="0" bIns="0">
             <a:spAutoFit/>
           </a:bodyPr>
           <a:lstStyle/>
@@ -9904,20 +8883,12 @@
                 <a:solidFill>
                   <a:srgbClr val="BBD4EC"/>
                 </a:solidFill>
-                <a:latin typeface="微软雅黑" panose="020B0503020204020204" charset="-122"/>
-                <a:ea typeface="微软雅黑" panose="020B0503020204020204" charset="-122"/>
-                <a:cs typeface="微软雅黑" panose="020B0503020204020204" charset="-122"/>
+                <a:latin typeface="微软雅黑"/>
+                <a:ea typeface="微软雅黑"/>
+                <a:cs typeface="微软雅黑"/>
               </a:rPr>
               <a:t>24 小时内患者表</a:t>
             </a:r>
-            <a:endParaRPr sz="1150" b="1" i="0">
-              <a:solidFill>
-                <a:srgbClr val="BBD4EC"/>
-              </a:solidFill>
-              <a:latin typeface="微软雅黑" panose="020B0503020204020204" charset="-122"/>
-              <a:ea typeface="微软雅黑" panose="020B0503020204020204" charset="-122"/>
-              <a:cs typeface="微软雅黑" panose="020B0503020204020204" charset="-122"/>
-            </a:endParaRPr>
           </a:p>
           <a:p>
             <a:pPr algn="l">
@@ -9930,20 +8901,12 @@
                 <a:solidFill>
                   <a:srgbClr val="7E9EC4"/>
                 </a:solidFill>
-                <a:latin typeface="微软雅黑" panose="020B0503020204020204" charset="-122"/>
-                <a:ea typeface="微软雅黑" panose="020B0503020204020204" charset="-122"/>
-                <a:cs typeface="微软雅黑" panose="020B0503020204020204" charset="-122"/>
+                <a:latin typeface="微软雅黑"/>
+                <a:ea typeface="微软雅黑"/>
+                <a:cs typeface="微软雅黑"/>
               </a:rPr>
               <a:t>姓名（脱敏）、病种、推送方式、距离、状态；超一屏自动无缝滚动</a:t>
             </a:r>
-            <a:endParaRPr sz="950" b="0" i="0">
-              <a:solidFill>
-                <a:srgbClr val="7E9EC4"/>
-              </a:solidFill>
-              <a:latin typeface="微软雅黑" panose="020B0503020204020204" charset="-122"/>
-              <a:ea typeface="微软雅黑" panose="020B0503020204020204" charset="-122"/>
-              <a:cs typeface="微软雅黑" panose="020B0503020204020204" charset="-122"/>
-            </a:endParaRPr>
           </a:p>
         </p:txBody>
       </p:sp>
@@ -10034,7 +8997,7 @@
           </a:fontRef>
         </p:style>
         <p:txBody>
-          <a:bodyPr lIns="0" tIns="0" rIns="0" bIns="0" rtlCol="0" anchor="ctr"/>
+          <a:bodyPr rtlCol="0" anchor="ctr" lIns="0" rIns="0" tIns="0" bIns="0"/>
           <a:lstStyle/>
           <a:p>
             <a:pPr algn="ctr"/>
@@ -10043,20 +9006,12 @@
                 <a:solidFill>
                   <a:srgbClr val="FFFFFF"/>
                 </a:solidFill>
-                <a:latin typeface="微软雅黑" panose="020B0503020204020204" charset="-122"/>
-                <a:ea typeface="微软雅黑" panose="020B0503020204020204" charset="-122"/>
-                <a:cs typeface="微软雅黑" panose="020B0503020204020204" charset="-122"/>
+                <a:latin typeface="微软雅黑"/>
+                <a:ea typeface="微软雅黑"/>
+                <a:cs typeface="微软雅黑"/>
               </a:rPr>
               <a:t>5</a:t>
             </a:r>
-            <a:endParaRPr sz="1000" b="1" i="0">
-              <a:solidFill>
-                <a:srgbClr val="FFFFFF"/>
-              </a:solidFill>
-              <a:latin typeface="微软雅黑" panose="020B0503020204020204" charset="-122"/>
-              <a:ea typeface="微软雅黑" panose="020B0503020204020204" charset="-122"/>
-              <a:cs typeface="微软雅黑" panose="020B0503020204020204" charset="-122"/>
-            </a:endParaRPr>
           </a:p>
         </p:txBody>
       </p:sp>
@@ -10077,7 +9032,7 @@
           <a:noFill/>
         </p:spPr>
         <p:txBody>
-          <a:bodyPr wrap="square" lIns="0" tIns="0" rIns="0" bIns="0" anchor="t">
+          <a:bodyPr wrap="square" anchor="t" lIns="0" rIns="0" tIns="0" bIns="0">
             <a:spAutoFit/>
           </a:bodyPr>
           <a:lstStyle/>
@@ -10092,20 +9047,12 @@
                 <a:solidFill>
                   <a:srgbClr val="BBD4EC"/>
                 </a:solidFill>
-                <a:latin typeface="微软雅黑" panose="020B0503020204020204" charset="-122"/>
-                <a:ea typeface="微软雅黑" panose="020B0503020204020204" charset="-122"/>
-                <a:cs typeface="微软雅黑" panose="020B0503020204020204" charset="-122"/>
+                <a:latin typeface="微软雅黑"/>
+                <a:ea typeface="微软雅黑"/>
+                <a:cs typeface="微软雅黑"/>
               </a:rPr>
               <a:t>底部统计条</a:t>
             </a:r>
-            <a:endParaRPr sz="1150" b="1" i="0">
-              <a:solidFill>
-                <a:srgbClr val="BBD4EC"/>
-              </a:solidFill>
-              <a:latin typeface="微软雅黑" panose="020B0503020204020204" charset="-122"/>
-              <a:ea typeface="微软雅黑" panose="020B0503020204020204" charset="-122"/>
-              <a:cs typeface="微软雅黑" panose="020B0503020204020204" charset="-122"/>
-            </a:endParaRPr>
           </a:p>
           <a:p>
             <a:pPr algn="l">
@@ -10118,20 +9065,12 @@
                 <a:solidFill>
                   <a:srgbClr val="7E9EC4"/>
                 </a:solidFill>
-                <a:latin typeface="微软雅黑" panose="020B0503020204020204" charset="-122"/>
-                <a:ea typeface="微软雅黑" panose="020B0503020204020204" charset="-122"/>
-                <a:cs typeface="微软雅黑" panose="020B0503020204020204" charset="-122"/>
+                <a:latin typeface="微软雅黑"/>
+                <a:ea typeface="微软雅黑"/>
+                <a:cs typeface="微软雅黑"/>
               </a:rPr>
               <a:t>各病种未闭环数量，提醒还有谁没走完流程</a:t>
             </a:r>
-            <a:endParaRPr sz="950" b="0" i="0">
-              <a:solidFill>
-                <a:srgbClr val="7E9EC4"/>
-              </a:solidFill>
-              <a:latin typeface="微软雅黑" panose="020B0503020204020204" charset="-122"/>
-              <a:ea typeface="微软雅黑" panose="020B0503020204020204" charset="-122"/>
-              <a:cs typeface="微软雅黑" panose="020B0503020204020204" charset="-122"/>
-            </a:endParaRPr>
           </a:p>
         </p:txBody>
       </p:sp>
@@ -10144,7 +9083,7 @@
 </file>
 
 <file path=ppt/slides/slide5.xml><?xml version="1.0" encoding="utf-8"?>
-<p:sld xmlns:a="http://schemas.openxmlformats.org/drawingml/2006/main" xmlns:r="http://schemas.openxmlformats.org/officeDocument/2006/relationships" xmlns:p="http://schemas.openxmlformats.org/presentationml/2006/main">
+<p:sld xmlns:a="http://schemas.openxmlformats.org/drawingml/2006/main" xmlns:p="http://schemas.openxmlformats.org/presentationml/2006/main" xmlns:r="http://schemas.openxmlformats.org/officeDocument/2006/relationships">
   <p:cSld>
     <p:spTree>
       <p:nvGrpSpPr>
@@ -10214,7 +9153,7 @@
           <a:noFill/>
         </p:spPr>
         <p:txBody>
-          <a:bodyPr wrap="square" lIns="0" tIns="0" rIns="0" bIns="0" anchor="t">
+          <a:bodyPr wrap="square" anchor="t" lIns="0" rIns="0" tIns="0" bIns="0">
             <a:spAutoFit/>
           </a:bodyPr>
           <a:lstStyle/>
@@ -10225,20 +9164,12 @@
                 <a:solidFill>
                   <a:srgbClr val="7FE3FF"/>
                 </a:solidFill>
-                <a:latin typeface="微软雅黑" panose="020B0503020204020204" charset="-122"/>
-                <a:ea typeface="微软雅黑" panose="020B0503020204020204" charset="-122"/>
-                <a:cs typeface="微软雅黑" panose="020B0503020204020204" charset="-122"/>
+                <a:latin typeface="微软雅黑"/>
+                <a:ea typeface="微软雅黑"/>
+                <a:cs typeface="微软雅黑"/>
               </a:rPr>
               <a:t>01 · 它是什么</a:t>
             </a:r>
-            <a:endParaRPr sz="1150" b="1" i="0">
-              <a:solidFill>
-                <a:srgbClr val="7FE3FF"/>
-              </a:solidFill>
-              <a:latin typeface="微软雅黑" panose="020B0503020204020204" charset="-122"/>
-              <a:ea typeface="微软雅黑" panose="020B0503020204020204" charset="-122"/>
-              <a:cs typeface="微软雅黑" panose="020B0503020204020204" charset="-122"/>
-            </a:endParaRPr>
           </a:p>
         </p:txBody>
       </p:sp>
@@ -10259,7 +9190,7 @@
           <a:noFill/>
         </p:spPr>
         <p:txBody>
-          <a:bodyPr wrap="square" lIns="0" tIns="0" rIns="0" bIns="0" anchor="t">
+          <a:bodyPr wrap="square" anchor="t" lIns="0" rIns="0" tIns="0" bIns="0">
             <a:spAutoFit/>
           </a:bodyPr>
           <a:lstStyle/>
@@ -10270,20 +9201,12 @@
                 <a:solidFill>
                   <a:srgbClr val="ECF7FF"/>
                 </a:solidFill>
-                <a:latin typeface="微软雅黑" panose="020B0503020204020204" charset="-122"/>
-                <a:ea typeface="微软雅黑" panose="020B0503020204020204" charset="-122"/>
-                <a:cs typeface="微软雅黑" panose="020B0503020204020204" charset="-122"/>
+                <a:latin typeface="微软雅黑"/>
+                <a:ea typeface="微软雅黑"/>
+                <a:cs typeface="微软雅黑"/>
               </a:rPr>
               <a:t>后台管细节：谁都能上手，但谁都不能越权</a:t>
             </a:r>
-            <a:endParaRPr sz="2700" b="1" i="0">
-              <a:solidFill>
-                <a:srgbClr val="ECF7FF"/>
-              </a:solidFill>
-              <a:latin typeface="微软雅黑" panose="020B0503020204020204" charset="-122"/>
-              <a:ea typeface="微软雅黑" panose="020B0503020204020204" charset="-122"/>
-              <a:cs typeface="微软雅黑" panose="020B0503020204020204" charset="-122"/>
-            </a:endParaRPr>
           </a:p>
         </p:txBody>
       </p:sp>
@@ -10304,7 +9227,7 @@
           <a:noFill/>
         </p:spPr>
         <p:txBody>
-          <a:bodyPr wrap="square" lIns="0" tIns="0" rIns="0" bIns="0" anchor="t">
+          <a:bodyPr wrap="square" anchor="t" lIns="0" rIns="0" tIns="0" bIns="0">
             <a:spAutoFit/>
           </a:bodyPr>
           <a:lstStyle/>
@@ -10315,20 +9238,12 @@
                 <a:solidFill>
                   <a:srgbClr val="7E9EC4"/>
                 </a:solidFill>
-                <a:latin typeface="微软雅黑" panose="020B0503020204020204" charset="-122"/>
-                <a:ea typeface="微软雅黑" panose="020B0503020204020204" charset="-122"/>
-                <a:cs typeface="微软雅黑" panose="020B0503020204020204" charset="-122"/>
+                <a:latin typeface="微软雅黑"/>
+                <a:ea typeface="微软雅黑"/>
+                <a:cs typeface="微软雅黑"/>
               </a:rPr>
               <a:t>急救绿道 · 5 / 13</a:t>
             </a:r>
-            <a:endParaRPr sz="1000" b="0" i="0">
-              <a:solidFill>
-                <a:srgbClr val="7E9EC4"/>
-              </a:solidFill>
-              <a:latin typeface="微软雅黑" panose="020B0503020204020204" charset="-122"/>
-              <a:ea typeface="微软雅黑" panose="020B0503020204020204" charset="-122"/>
-              <a:cs typeface="微软雅黑" panose="020B0503020204020204" charset="-122"/>
-            </a:endParaRPr>
           </a:p>
         </p:txBody>
       </p:sp>
@@ -10341,7 +9256,7 @@
           <p:nvPr/>
         </p:nvPicPr>
         <p:blipFill>
-          <a:blip r:embed="rId1"/>
+          <a:blip r:embed="rId2"/>
           <a:stretch>
             <a:fillRect/>
           </a:stretch>
@@ -10373,7 +9288,7 @@
           <a:noFill/>
         </p:spPr>
         <p:txBody>
-          <a:bodyPr wrap="square" lIns="0" tIns="0" rIns="0" bIns="0" anchor="t">
+          <a:bodyPr wrap="square" anchor="t" lIns="0" rIns="0" tIns="0" bIns="0">
             <a:spAutoFit/>
           </a:bodyPr>
           <a:lstStyle/>
@@ -10384,20 +9299,12 @@
                 <a:solidFill>
                   <a:srgbClr val="7E9EC4"/>
                 </a:solidFill>
-                <a:latin typeface="微软雅黑" panose="020B0503020204020204" charset="-122"/>
-                <a:ea typeface="微软雅黑" panose="020B0503020204020204" charset="-122"/>
-                <a:cs typeface="微软雅黑" panose="020B0503020204020204" charset="-122"/>
+                <a:latin typeface="微软雅黑"/>
+                <a:ea typeface="微软雅黑"/>
+                <a:cs typeface="微软雅黑"/>
               </a:rPr>
               <a:t>图 2 · 后台工作台：今日新增、在绿道中、超时提醒、7 日趋势</a:t>
             </a:r>
-            <a:endParaRPr sz="950" b="0" i="0">
-              <a:solidFill>
-                <a:srgbClr val="7E9EC4"/>
-              </a:solidFill>
-              <a:latin typeface="微软雅黑" panose="020B0503020204020204" charset="-122"/>
-              <a:ea typeface="微软雅黑" panose="020B0503020204020204" charset="-122"/>
-              <a:cs typeface="微软雅黑" panose="020B0503020204020204" charset="-122"/>
-            </a:endParaRPr>
           </a:p>
         </p:txBody>
       </p:sp>
@@ -10488,7 +9395,7 @@
           </a:fontRef>
         </p:style>
         <p:txBody>
-          <a:bodyPr lIns="0" tIns="0" rIns="0" bIns="0" rtlCol="0" anchor="ctr"/>
+          <a:bodyPr rtlCol="0" anchor="ctr" lIns="0" rIns="0" tIns="0" bIns="0"/>
           <a:lstStyle/>
           <a:p>
             <a:pPr algn="ctr"/>
@@ -10497,20 +9404,12 @@
                 <a:solidFill>
                   <a:srgbClr val="FFFFFF"/>
                 </a:solidFill>
-                <a:latin typeface="微软雅黑" panose="020B0503020204020204" charset="-122"/>
-                <a:ea typeface="微软雅黑" panose="020B0503020204020204" charset="-122"/>
-                <a:cs typeface="微软雅黑" panose="020B0503020204020204" charset="-122"/>
+                <a:latin typeface="微软雅黑"/>
+                <a:ea typeface="微软雅黑"/>
+                <a:cs typeface="微软雅黑"/>
               </a:rPr>
               <a:t>A</a:t>
             </a:r>
-            <a:endParaRPr sz="1000" b="1" i="0">
-              <a:solidFill>
-                <a:srgbClr val="FFFFFF"/>
-              </a:solidFill>
-              <a:latin typeface="微软雅黑" panose="020B0503020204020204" charset="-122"/>
-              <a:ea typeface="微软雅黑" panose="020B0503020204020204" charset="-122"/>
-              <a:cs typeface="微软雅黑" panose="020B0503020204020204" charset="-122"/>
-            </a:endParaRPr>
           </a:p>
         </p:txBody>
       </p:sp>
@@ -10531,7 +9430,7 @@
           <a:noFill/>
         </p:spPr>
         <p:txBody>
-          <a:bodyPr wrap="square" lIns="0" tIns="0" rIns="0" bIns="0" anchor="t">
+          <a:bodyPr wrap="square" anchor="t" lIns="0" rIns="0" tIns="0" bIns="0">
             <a:spAutoFit/>
           </a:bodyPr>
           <a:lstStyle/>
@@ -10546,20 +9445,12 @@
                 <a:solidFill>
                   <a:srgbClr val="BBD4EC"/>
                 </a:solidFill>
-                <a:latin typeface="微软雅黑" panose="020B0503020204020204" charset="-122"/>
-                <a:ea typeface="微软雅黑" panose="020B0503020204020204" charset="-122"/>
-                <a:cs typeface="微软雅黑" panose="020B0503020204020204" charset="-122"/>
+                <a:latin typeface="微软雅黑"/>
+                <a:ea typeface="微软雅黑"/>
+                <a:cs typeface="微软雅黑"/>
               </a:rPr>
               <a:t>病例管理</a:t>
             </a:r>
-            <a:endParaRPr sz="1150" b="1" i="0">
-              <a:solidFill>
-                <a:srgbClr val="BBD4EC"/>
-              </a:solidFill>
-              <a:latin typeface="微软雅黑" panose="020B0503020204020204" charset="-122"/>
-              <a:ea typeface="微软雅黑" panose="020B0503020204020204" charset="-122"/>
-              <a:cs typeface="微软雅黑" panose="020B0503020204020204" charset="-122"/>
-            </a:endParaRPr>
           </a:p>
           <a:p>
             <a:pPr algn="l"/>
@@ -10568,20 +9459,12 @@
                 <a:solidFill>
                   <a:srgbClr val="7E9EC4"/>
                 </a:solidFill>
-                <a:latin typeface="微软雅黑" panose="020B0503020204020204" charset="-122"/>
-                <a:ea typeface="微软雅黑" panose="020B0503020204020204" charset="-122"/>
-                <a:cs typeface="微软雅黑" panose="020B0503020204020204" charset="-122"/>
+                <a:latin typeface="微软雅黑"/>
+                <a:ea typeface="微软雅黑"/>
+                <a:cs typeface="微软雅黑"/>
               </a:rPr>
               <a:t>新建、修改、闭环</a:t>
             </a:r>
-            <a:endParaRPr sz="950" b="0" i="0">
-              <a:solidFill>
-                <a:srgbClr val="7E9EC4"/>
-              </a:solidFill>
-              <a:latin typeface="微软雅黑" panose="020B0503020204020204" charset="-122"/>
-              <a:ea typeface="微软雅黑" panose="020B0503020204020204" charset="-122"/>
-              <a:cs typeface="微软雅黑" panose="020B0503020204020204" charset="-122"/>
-            </a:endParaRPr>
           </a:p>
         </p:txBody>
       </p:sp>
@@ -10672,7 +9555,7 @@
           </a:fontRef>
         </p:style>
         <p:txBody>
-          <a:bodyPr lIns="0" tIns="0" rIns="0" bIns="0" rtlCol="0" anchor="ctr"/>
+          <a:bodyPr rtlCol="0" anchor="ctr" lIns="0" rIns="0" tIns="0" bIns="0"/>
           <a:lstStyle/>
           <a:p>
             <a:pPr algn="ctr"/>
@@ -10681,20 +9564,12 @@
                 <a:solidFill>
                   <a:srgbClr val="FFFFFF"/>
                 </a:solidFill>
-                <a:latin typeface="微软雅黑" panose="020B0503020204020204" charset="-122"/>
-                <a:ea typeface="微软雅黑" panose="020B0503020204020204" charset="-122"/>
-                <a:cs typeface="微软雅黑" panose="020B0503020204020204" charset="-122"/>
+                <a:latin typeface="微软雅黑"/>
+                <a:ea typeface="微软雅黑"/>
+                <a:cs typeface="微软雅黑"/>
               </a:rPr>
               <a:t>B</a:t>
             </a:r>
-            <a:endParaRPr sz="1000" b="1" i="0">
-              <a:solidFill>
-                <a:srgbClr val="FFFFFF"/>
-              </a:solidFill>
-              <a:latin typeface="微软雅黑" panose="020B0503020204020204" charset="-122"/>
-              <a:ea typeface="微软雅黑" panose="020B0503020204020204" charset="-122"/>
-              <a:cs typeface="微软雅黑" panose="020B0503020204020204" charset="-122"/>
-            </a:endParaRPr>
           </a:p>
         </p:txBody>
       </p:sp>
@@ -10715,7 +9590,7 @@
           <a:noFill/>
         </p:spPr>
         <p:txBody>
-          <a:bodyPr wrap="square" lIns="0" tIns="0" rIns="0" bIns="0" anchor="t">
+          <a:bodyPr wrap="square" anchor="t" lIns="0" rIns="0" tIns="0" bIns="0">
             <a:spAutoFit/>
           </a:bodyPr>
           <a:lstStyle/>
@@ -10730,20 +9605,12 @@
                 <a:solidFill>
                   <a:srgbClr val="BBD4EC"/>
                 </a:solidFill>
-                <a:latin typeface="微软雅黑" panose="020B0503020204020204" charset="-122"/>
-                <a:ea typeface="微软雅黑" panose="020B0503020204020204" charset="-122"/>
-                <a:cs typeface="微软雅黑" panose="020B0503020204020204" charset="-122"/>
+                <a:latin typeface="微软雅黑"/>
+                <a:ea typeface="微软雅黑"/>
+                <a:cs typeface="微软雅黑"/>
               </a:rPr>
               <a:t>患者管理</a:t>
             </a:r>
-            <a:endParaRPr sz="1150" b="1" i="0">
-              <a:solidFill>
-                <a:srgbClr val="BBD4EC"/>
-              </a:solidFill>
-              <a:latin typeface="微软雅黑" panose="020B0503020204020204" charset="-122"/>
-              <a:ea typeface="微软雅黑" panose="020B0503020204020204" charset="-122"/>
-              <a:cs typeface="微软雅黑" panose="020B0503020204020204" charset="-122"/>
-            </a:endParaRPr>
           </a:p>
           <a:p>
             <a:pPr algn="l"/>
@@ -10752,20 +9619,12 @@
                 <a:solidFill>
                   <a:srgbClr val="7E9EC4"/>
                 </a:solidFill>
-                <a:latin typeface="微软雅黑" panose="020B0503020204020204" charset="-122"/>
-                <a:ea typeface="微软雅黑" panose="020B0503020204020204" charset="-122"/>
-                <a:cs typeface="微软雅黑" panose="020B0503020204020204" charset="-122"/>
+                <a:latin typeface="微软雅黑"/>
+                <a:ea typeface="微软雅黑"/>
+                <a:cs typeface="微软雅黑"/>
               </a:rPr>
               <a:t>姓名自动脱敏</a:t>
             </a:r>
-            <a:endParaRPr sz="950" b="0" i="0">
-              <a:solidFill>
-                <a:srgbClr val="7E9EC4"/>
-              </a:solidFill>
-              <a:latin typeface="微软雅黑" panose="020B0503020204020204" charset="-122"/>
-              <a:ea typeface="微软雅黑" panose="020B0503020204020204" charset="-122"/>
-              <a:cs typeface="微软雅黑" panose="020B0503020204020204" charset="-122"/>
-            </a:endParaRPr>
           </a:p>
         </p:txBody>
       </p:sp>
@@ -10856,7 +9715,7 @@
           </a:fontRef>
         </p:style>
         <p:txBody>
-          <a:bodyPr lIns="0" tIns="0" rIns="0" bIns="0" rtlCol="0" anchor="ctr"/>
+          <a:bodyPr rtlCol="0" anchor="ctr" lIns="0" rIns="0" tIns="0" bIns="0"/>
           <a:lstStyle/>
           <a:p>
             <a:pPr algn="ctr"/>
@@ -10865,20 +9724,12 @@
                 <a:solidFill>
                   <a:srgbClr val="FFFFFF"/>
                 </a:solidFill>
-                <a:latin typeface="微软雅黑" panose="020B0503020204020204" charset="-122"/>
-                <a:ea typeface="微软雅黑" panose="020B0503020204020204" charset="-122"/>
-                <a:cs typeface="微软雅黑" panose="020B0503020204020204" charset="-122"/>
+                <a:latin typeface="微软雅黑"/>
+                <a:ea typeface="微软雅黑"/>
+                <a:cs typeface="微软雅黑"/>
               </a:rPr>
               <a:t>C</a:t>
             </a:r>
-            <a:endParaRPr sz="1000" b="1" i="0">
-              <a:solidFill>
-                <a:srgbClr val="FFFFFF"/>
-              </a:solidFill>
-              <a:latin typeface="微软雅黑" panose="020B0503020204020204" charset="-122"/>
-              <a:ea typeface="微软雅黑" panose="020B0503020204020204" charset="-122"/>
-              <a:cs typeface="微软雅黑" panose="020B0503020204020204" charset="-122"/>
-            </a:endParaRPr>
           </a:p>
         </p:txBody>
       </p:sp>
@@ -10899,7 +9750,7 @@
           <a:noFill/>
         </p:spPr>
         <p:txBody>
-          <a:bodyPr wrap="square" lIns="0" tIns="0" rIns="0" bIns="0" anchor="t">
+          <a:bodyPr wrap="square" anchor="t" lIns="0" rIns="0" tIns="0" bIns="0">
             <a:spAutoFit/>
           </a:bodyPr>
           <a:lstStyle/>
@@ -10914,20 +9765,12 @@
                 <a:solidFill>
                   <a:srgbClr val="BBD4EC"/>
                 </a:solidFill>
-                <a:latin typeface="微软雅黑" panose="020B0503020204020204" charset="-122"/>
-                <a:ea typeface="微软雅黑" panose="020B0503020204020204" charset="-122"/>
-                <a:cs typeface="微软雅黑" panose="020B0503020204020204" charset="-122"/>
+                <a:latin typeface="微软雅黑"/>
+                <a:ea typeface="微软雅黑"/>
+                <a:cs typeface="微软雅黑"/>
               </a:rPr>
               <a:t>字典维护</a:t>
             </a:r>
-            <a:endParaRPr sz="1150" b="1" i="0">
-              <a:solidFill>
-                <a:srgbClr val="BBD4EC"/>
-              </a:solidFill>
-              <a:latin typeface="微软雅黑" panose="020B0503020204020204" charset="-122"/>
-              <a:ea typeface="微软雅黑" panose="020B0503020204020204" charset="-122"/>
-              <a:cs typeface="微软雅黑" panose="020B0503020204020204" charset="-122"/>
-            </a:endParaRPr>
           </a:p>
           <a:p>
             <a:pPr algn="l"/>
@@ -10936,20 +9779,12 @@
                 <a:solidFill>
                   <a:srgbClr val="7E9EC4"/>
                 </a:solidFill>
-                <a:latin typeface="微软雅黑" panose="020B0503020204020204" charset="-122"/>
-                <a:ea typeface="微软雅黑" panose="020B0503020204020204" charset="-122"/>
-                <a:cs typeface="微软雅黑" panose="020B0503020204020204" charset="-122"/>
+                <a:latin typeface="微软雅黑"/>
+                <a:ea typeface="微软雅黑"/>
+                <a:cs typeface="微软雅黑"/>
               </a:rPr>
               <a:t>病种与状态可改</a:t>
             </a:r>
-            <a:endParaRPr sz="950" b="0" i="0">
-              <a:solidFill>
-                <a:srgbClr val="7E9EC4"/>
-              </a:solidFill>
-              <a:latin typeface="微软雅黑" panose="020B0503020204020204" charset="-122"/>
-              <a:ea typeface="微软雅黑" panose="020B0503020204020204" charset="-122"/>
-              <a:cs typeface="微软雅黑" panose="020B0503020204020204" charset="-122"/>
-            </a:endParaRPr>
           </a:p>
         </p:txBody>
       </p:sp>
@@ -11040,7 +9875,7 @@
           </a:fontRef>
         </p:style>
         <p:txBody>
-          <a:bodyPr lIns="0" tIns="0" rIns="0" bIns="0" rtlCol="0" anchor="ctr"/>
+          <a:bodyPr rtlCol="0" anchor="ctr" lIns="0" rIns="0" tIns="0" bIns="0"/>
           <a:lstStyle/>
           <a:p>
             <a:pPr algn="ctr"/>
@@ -11049,20 +9884,12 @@
                 <a:solidFill>
                   <a:srgbClr val="FFFFFF"/>
                 </a:solidFill>
-                <a:latin typeface="微软雅黑" panose="020B0503020204020204" charset="-122"/>
-                <a:ea typeface="微软雅黑" panose="020B0503020204020204" charset="-122"/>
-                <a:cs typeface="微软雅黑" panose="020B0503020204020204" charset="-122"/>
+                <a:latin typeface="微软雅黑"/>
+                <a:ea typeface="微软雅黑"/>
+                <a:cs typeface="微软雅黑"/>
               </a:rPr>
               <a:t>D</a:t>
             </a:r>
-            <a:endParaRPr sz="1000" b="1" i="0">
-              <a:solidFill>
-                <a:srgbClr val="FFFFFF"/>
-              </a:solidFill>
-              <a:latin typeface="微软雅黑" panose="020B0503020204020204" charset="-122"/>
-              <a:ea typeface="微软雅黑" panose="020B0503020204020204" charset="-122"/>
-              <a:cs typeface="微软雅黑" panose="020B0503020204020204" charset="-122"/>
-            </a:endParaRPr>
           </a:p>
         </p:txBody>
       </p:sp>
@@ -11083,7 +9910,7 @@
           <a:noFill/>
         </p:spPr>
         <p:txBody>
-          <a:bodyPr wrap="square" lIns="0" tIns="0" rIns="0" bIns="0" anchor="t">
+          <a:bodyPr wrap="square" anchor="t" lIns="0" rIns="0" tIns="0" bIns="0">
             <a:spAutoFit/>
           </a:bodyPr>
           <a:lstStyle/>
@@ -11098,20 +9925,12 @@
                 <a:solidFill>
                   <a:srgbClr val="BBD4EC"/>
                 </a:solidFill>
-                <a:latin typeface="微软雅黑" panose="020B0503020204020204" charset="-122"/>
-                <a:ea typeface="微软雅黑" panose="020B0503020204020204" charset="-122"/>
-                <a:cs typeface="微软雅黑" panose="020B0503020204020204" charset="-122"/>
+                <a:latin typeface="微软雅黑"/>
+                <a:ea typeface="微软雅黑"/>
+                <a:cs typeface="微软雅黑"/>
               </a:rPr>
               <a:t>组织人员</a:t>
             </a:r>
-            <a:endParaRPr sz="1150" b="1" i="0">
-              <a:solidFill>
-                <a:srgbClr val="BBD4EC"/>
-              </a:solidFill>
-              <a:latin typeface="微软雅黑" panose="020B0503020204020204" charset="-122"/>
-              <a:ea typeface="微软雅黑" panose="020B0503020204020204" charset="-122"/>
-              <a:cs typeface="微软雅黑" panose="020B0503020204020204" charset="-122"/>
-            </a:endParaRPr>
           </a:p>
           <a:p>
             <a:pPr algn="l"/>
@@ -11120,20 +9939,12 @@
                 <a:solidFill>
                   <a:srgbClr val="7E9EC4"/>
                 </a:solidFill>
-                <a:latin typeface="微软雅黑" panose="020B0503020204020204" charset="-122"/>
-                <a:ea typeface="微软雅黑" panose="020B0503020204020204" charset="-122"/>
-                <a:cs typeface="微软雅黑" panose="020B0503020204020204" charset="-122"/>
+                <a:latin typeface="微软雅黑"/>
+                <a:ea typeface="微软雅黑"/>
+                <a:cs typeface="微软雅黑"/>
               </a:rPr>
               <a:t>科室 + 账号 + 角色</a:t>
             </a:r>
-            <a:endParaRPr sz="950" b="0" i="0">
-              <a:solidFill>
-                <a:srgbClr val="7E9EC4"/>
-              </a:solidFill>
-              <a:latin typeface="微软雅黑" panose="020B0503020204020204" charset="-122"/>
-              <a:ea typeface="微软雅黑" panose="020B0503020204020204" charset="-122"/>
-              <a:cs typeface="微软雅黑" panose="020B0503020204020204" charset="-122"/>
-            </a:endParaRPr>
           </a:p>
         </p:txBody>
       </p:sp>
@@ -11224,7 +10035,7 @@
           </a:fontRef>
         </p:style>
         <p:txBody>
-          <a:bodyPr lIns="0" tIns="0" rIns="0" bIns="0" rtlCol="0" anchor="ctr"/>
+          <a:bodyPr rtlCol="0" anchor="ctr" lIns="0" rIns="0" tIns="0" bIns="0"/>
           <a:lstStyle/>
           <a:p>
             <a:pPr algn="ctr"/>
@@ -11233,20 +10044,12 @@
                 <a:solidFill>
                   <a:srgbClr val="FFFFFF"/>
                 </a:solidFill>
-                <a:latin typeface="微软雅黑" panose="020B0503020204020204" charset="-122"/>
-                <a:ea typeface="微软雅黑" panose="020B0503020204020204" charset="-122"/>
-                <a:cs typeface="微软雅黑" panose="020B0503020204020204" charset="-122"/>
+                <a:latin typeface="微软雅黑"/>
+                <a:ea typeface="微软雅黑"/>
+                <a:cs typeface="微软雅黑"/>
               </a:rPr>
               <a:t>E</a:t>
             </a:r>
-            <a:endParaRPr sz="1000" b="1" i="0">
-              <a:solidFill>
-                <a:srgbClr val="FFFFFF"/>
-              </a:solidFill>
-              <a:latin typeface="微软雅黑" panose="020B0503020204020204" charset="-122"/>
-              <a:ea typeface="微软雅黑" panose="020B0503020204020204" charset="-122"/>
-              <a:cs typeface="微软雅黑" panose="020B0503020204020204" charset="-122"/>
-            </a:endParaRPr>
           </a:p>
         </p:txBody>
       </p:sp>
@@ -11267,7 +10070,7 @@
           <a:noFill/>
         </p:spPr>
         <p:txBody>
-          <a:bodyPr wrap="square" lIns="0" tIns="0" rIns="0" bIns="0" anchor="t">
+          <a:bodyPr wrap="square" anchor="t" lIns="0" rIns="0" tIns="0" bIns="0">
             <a:spAutoFit/>
           </a:bodyPr>
           <a:lstStyle/>
@@ -11282,20 +10085,12 @@
                 <a:solidFill>
                   <a:srgbClr val="BBD4EC"/>
                 </a:solidFill>
-                <a:latin typeface="微软雅黑" panose="020B0503020204020204" charset="-122"/>
-                <a:ea typeface="微软雅黑" panose="020B0503020204020204" charset="-122"/>
-                <a:cs typeface="微软雅黑" panose="020B0503020204020204" charset="-122"/>
+                <a:latin typeface="微软雅黑"/>
+                <a:ea typeface="微软雅黑"/>
+                <a:cs typeface="微软雅黑"/>
               </a:rPr>
               <a:t>报表统计</a:t>
             </a:r>
-            <a:endParaRPr sz="1150" b="1" i="0">
-              <a:solidFill>
-                <a:srgbClr val="BBD4EC"/>
-              </a:solidFill>
-              <a:latin typeface="微软雅黑" panose="020B0503020204020204" charset="-122"/>
-              <a:ea typeface="微软雅黑" panose="020B0503020204020204" charset="-122"/>
-              <a:cs typeface="微软雅黑" panose="020B0503020204020204" charset="-122"/>
-            </a:endParaRPr>
           </a:p>
           <a:p>
             <a:pPr algn="l"/>
@@ -11304,20 +10099,12 @@
                 <a:solidFill>
                   <a:srgbClr val="7E9EC4"/>
                 </a:solidFill>
-                <a:latin typeface="微软雅黑" panose="020B0503020204020204" charset="-122"/>
-                <a:ea typeface="微软雅黑" panose="020B0503020204020204" charset="-122"/>
-                <a:cs typeface="微软雅黑" panose="020B0503020204020204" charset="-122"/>
+                <a:latin typeface="微软雅黑"/>
+                <a:ea typeface="微软雅黑"/>
+                <a:cs typeface="微软雅黑"/>
               </a:rPr>
               <a:t>月报、KPI、导出</a:t>
             </a:r>
-            <a:endParaRPr sz="950" b="0" i="0">
-              <a:solidFill>
-                <a:srgbClr val="7E9EC4"/>
-              </a:solidFill>
-              <a:latin typeface="微软雅黑" panose="020B0503020204020204" charset="-122"/>
-              <a:ea typeface="微软雅黑" panose="020B0503020204020204" charset="-122"/>
-              <a:cs typeface="微软雅黑" panose="020B0503020204020204" charset="-122"/>
-            </a:endParaRPr>
           </a:p>
         </p:txBody>
       </p:sp>
@@ -11408,7 +10195,7 @@
           </a:fontRef>
         </p:style>
         <p:txBody>
-          <a:bodyPr lIns="0" tIns="0" rIns="0" bIns="0" rtlCol="0" anchor="ctr"/>
+          <a:bodyPr rtlCol="0" anchor="ctr" lIns="0" rIns="0" tIns="0" bIns="0"/>
           <a:lstStyle/>
           <a:p>
             <a:pPr algn="ctr"/>
@@ -11417,20 +10204,12 @@
                 <a:solidFill>
                   <a:srgbClr val="FFFFFF"/>
                 </a:solidFill>
-                <a:latin typeface="微软雅黑" panose="020B0503020204020204" charset="-122"/>
-                <a:ea typeface="微软雅黑" panose="020B0503020204020204" charset="-122"/>
-                <a:cs typeface="微软雅黑" panose="020B0503020204020204" charset="-122"/>
+                <a:latin typeface="微软雅黑"/>
+                <a:ea typeface="微软雅黑"/>
+                <a:cs typeface="微软雅黑"/>
               </a:rPr>
               <a:t>F</a:t>
             </a:r>
-            <a:endParaRPr sz="1000" b="1" i="0">
-              <a:solidFill>
-                <a:srgbClr val="FFFFFF"/>
-              </a:solidFill>
-              <a:latin typeface="微软雅黑" panose="020B0503020204020204" charset="-122"/>
-              <a:ea typeface="微软雅黑" panose="020B0503020204020204" charset="-122"/>
-              <a:cs typeface="微软雅黑" panose="020B0503020204020204" charset="-122"/>
-            </a:endParaRPr>
           </a:p>
         </p:txBody>
       </p:sp>
@@ -11451,7 +10230,7 @@
           <a:noFill/>
         </p:spPr>
         <p:txBody>
-          <a:bodyPr wrap="square" lIns="0" tIns="0" rIns="0" bIns="0" anchor="t">
+          <a:bodyPr wrap="square" anchor="t" lIns="0" rIns="0" tIns="0" bIns="0">
             <a:spAutoFit/>
           </a:bodyPr>
           <a:lstStyle/>
@@ -11466,20 +10245,12 @@
                 <a:solidFill>
                   <a:srgbClr val="BBD4EC"/>
                 </a:solidFill>
-                <a:latin typeface="微软雅黑" panose="020B0503020204020204" charset="-122"/>
-                <a:ea typeface="微软雅黑" panose="020B0503020204020204" charset="-122"/>
-                <a:cs typeface="微软雅黑" panose="020B0503020204020204" charset="-122"/>
+                <a:latin typeface="微软雅黑"/>
+                <a:ea typeface="微软雅黑"/>
+                <a:cs typeface="微软雅黑"/>
               </a:rPr>
               <a:t>审计日志</a:t>
             </a:r>
-            <a:endParaRPr sz="1150" b="1" i="0">
-              <a:solidFill>
-                <a:srgbClr val="BBD4EC"/>
-              </a:solidFill>
-              <a:latin typeface="微软雅黑" panose="020B0503020204020204" charset="-122"/>
-              <a:ea typeface="微软雅黑" panose="020B0503020204020204" charset="-122"/>
-              <a:cs typeface="微软雅黑" panose="020B0503020204020204" charset="-122"/>
-            </a:endParaRPr>
           </a:p>
           <a:p>
             <a:pPr algn="l"/>
@@ -11488,20 +10259,12 @@
                 <a:solidFill>
                   <a:srgbClr val="7E9EC4"/>
                 </a:solidFill>
-                <a:latin typeface="微软雅黑" panose="020B0503020204020204" charset="-122"/>
-                <a:ea typeface="微软雅黑" panose="020B0503020204020204" charset="-122"/>
-                <a:cs typeface="微软雅黑" panose="020B0503020204020204" charset="-122"/>
+                <a:latin typeface="微软雅黑"/>
+                <a:ea typeface="微软雅黑"/>
+                <a:cs typeface="微软雅黑"/>
               </a:rPr>
               <a:t>谁改了什么全留底</a:t>
             </a:r>
-            <a:endParaRPr sz="950" b="0" i="0">
-              <a:solidFill>
-                <a:srgbClr val="7E9EC4"/>
-              </a:solidFill>
-              <a:latin typeface="微软雅黑" panose="020B0503020204020204" charset="-122"/>
-              <a:ea typeface="微软雅黑" panose="020B0503020204020204" charset="-122"/>
-              <a:cs typeface="微软雅黑" panose="020B0503020204020204" charset="-122"/>
-            </a:endParaRPr>
           </a:p>
         </p:txBody>
       </p:sp>
@@ -11522,7 +10285,7 @@
           <a:noFill/>
         </p:spPr>
         <p:txBody>
-          <a:bodyPr wrap="square" lIns="0" tIns="0" rIns="0" bIns="0" anchor="t">
+          <a:bodyPr wrap="square" anchor="t" lIns="0" rIns="0" tIns="0" bIns="0">
             <a:spAutoFit/>
           </a:bodyPr>
           <a:lstStyle/>
@@ -11540,9 +10303,9 @@
                 <a:solidFill>
                   <a:srgbClr val="BBD4EC"/>
                 </a:solidFill>
-                <a:latin typeface="微软雅黑" panose="020B0503020204020204" charset="-122"/>
-                <a:ea typeface="微软雅黑" panose="020B0503020204020204" charset="-122"/>
-                <a:cs typeface="微软雅黑" panose="020B0503020204020204" charset="-122"/>
+                <a:latin typeface="微软雅黑"/>
+                <a:ea typeface="微软雅黑"/>
+                <a:cs typeface="微软雅黑"/>
               </a:rPr>
               <a:t>七种角色：</a:t>
             </a:r>
@@ -11551,20 +10314,12 @@
                 <a:solidFill>
                   <a:srgbClr val="BBD4EC"/>
                 </a:solidFill>
-                <a:latin typeface="微软雅黑" panose="020B0503020204020204" charset="-122"/>
-                <a:ea typeface="微软雅黑" panose="020B0503020204020204" charset="-122"/>
-                <a:cs typeface="微软雅黑" panose="020B0503020204020204" charset="-122"/>
+                <a:latin typeface="微软雅黑"/>
+                <a:ea typeface="微软雅黑"/>
+                <a:cs typeface="微软雅黑"/>
               </a:rPr>
               <a:t>管理员、急诊管理员、医生、护士、质控、院领导、大屏终端。</a:t>
             </a:r>
-            <a:endParaRPr sz="1150" b="0" i="0">
-              <a:solidFill>
-                <a:srgbClr val="BBD4EC"/>
-              </a:solidFill>
-              <a:latin typeface="微软雅黑" panose="020B0503020204020204" charset="-122"/>
-              <a:ea typeface="微软雅黑" panose="020B0503020204020204" charset="-122"/>
-              <a:cs typeface="微软雅黑" panose="020B0503020204020204" charset="-122"/>
-            </a:endParaRPr>
           </a:p>
           <a:p>
             <a:pPr algn="l">
@@ -11577,9 +10332,9 @@
                 <a:solidFill>
                   <a:srgbClr val="5CC8FF"/>
                 </a:solidFill>
-                <a:latin typeface="微软雅黑" panose="020B0503020204020204" charset="-122"/>
-                <a:ea typeface="微软雅黑" panose="020B0503020204020204" charset="-122"/>
-                <a:cs typeface="微软雅黑" panose="020B0503020204020204" charset="-122"/>
+                <a:latin typeface="微软雅黑"/>
+                <a:ea typeface="微软雅黑"/>
+                <a:cs typeface="微软雅黑"/>
               </a:rPr>
               <a:t>院领导看不到患者明文，护士进不了审计页</a:t>
             </a:r>
@@ -11588,20 +10343,12 @@
                 <a:solidFill>
                   <a:srgbClr val="BBD4EC"/>
                 </a:solidFill>
-                <a:latin typeface="微软雅黑" panose="020B0503020204020204" charset="-122"/>
-                <a:ea typeface="微软雅黑" panose="020B0503020204020204" charset="-122"/>
-                <a:cs typeface="微软雅黑" panose="020B0503020204020204" charset="-122"/>
+                <a:latin typeface="微软雅黑"/>
+                <a:ea typeface="微软雅黑"/>
+                <a:cs typeface="微软雅黑"/>
               </a:rPr>
               <a:t>——这是系统自己拦的，不靠人自觉。</a:t>
             </a:r>
-            <a:endParaRPr sz="1150" b="0" i="0">
-              <a:solidFill>
-                <a:srgbClr val="BBD4EC"/>
-              </a:solidFill>
-              <a:latin typeface="微软雅黑" panose="020B0503020204020204" charset="-122"/>
-              <a:ea typeface="微软雅黑" panose="020B0503020204020204" charset="-122"/>
-              <a:cs typeface="微软雅黑" panose="020B0503020204020204" charset="-122"/>
-            </a:endParaRPr>
           </a:p>
         </p:txBody>
       </p:sp>
@@ -11614,7 +10361,7 @@
 </file>
 
 <file path=ppt/slides/slide6.xml><?xml version="1.0" encoding="utf-8"?>
-<p:sld xmlns:a="http://schemas.openxmlformats.org/drawingml/2006/main" xmlns:r="http://schemas.openxmlformats.org/officeDocument/2006/relationships" xmlns:p="http://schemas.openxmlformats.org/presentationml/2006/main">
+<p:sld xmlns:a="http://schemas.openxmlformats.org/drawingml/2006/main" xmlns:p="http://schemas.openxmlformats.org/presentationml/2006/main" xmlns:r="http://schemas.openxmlformats.org/officeDocument/2006/relationships">
   <p:cSld>
     <p:spTree>
       <p:nvGrpSpPr>
@@ -11684,7 +10431,7 @@
           <a:noFill/>
         </p:spPr>
         <p:txBody>
-          <a:bodyPr wrap="square" lIns="0" tIns="0" rIns="0" bIns="0" anchor="t">
+          <a:bodyPr wrap="square" anchor="t" lIns="0" rIns="0" tIns="0" bIns="0">
             <a:spAutoFit/>
           </a:bodyPr>
           <a:lstStyle/>
@@ -11695,20 +10442,12 @@
                 <a:solidFill>
                   <a:srgbClr val="7FE3FF"/>
                 </a:solidFill>
-                <a:latin typeface="微软雅黑" panose="020B0503020204020204" charset="-122"/>
-                <a:ea typeface="微软雅黑" panose="020B0503020204020204" charset="-122"/>
-                <a:cs typeface="微软雅黑" panose="020B0503020204020204" charset="-122"/>
+                <a:latin typeface="微软雅黑"/>
+                <a:ea typeface="微软雅黑"/>
+                <a:cs typeface="微软雅黑"/>
               </a:rPr>
               <a:t>01 · 它是什么</a:t>
             </a:r>
-            <a:endParaRPr sz="1150" b="1" i="0">
-              <a:solidFill>
-                <a:srgbClr val="7FE3FF"/>
-              </a:solidFill>
-              <a:latin typeface="微软雅黑" panose="020B0503020204020204" charset="-122"/>
-              <a:ea typeface="微软雅黑" panose="020B0503020204020204" charset="-122"/>
-              <a:cs typeface="微软雅黑" panose="020B0503020204020204" charset="-122"/>
-            </a:endParaRPr>
           </a:p>
         </p:txBody>
       </p:sp>
@@ -11729,7 +10468,7 @@
           <a:noFill/>
         </p:spPr>
         <p:txBody>
-          <a:bodyPr wrap="square" lIns="0" tIns="0" rIns="0" bIns="0" anchor="t">
+          <a:bodyPr wrap="square" anchor="t" lIns="0" rIns="0" tIns="0" bIns="0">
             <a:spAutoFit/>
           </a:bodyPr>
           <a:lstStyle/>
@@ -11740,20 +10479,12 @@
                 <a:solidFill>
                   <a:srgbClr val="ECF7FF"/>
                 </a:solidFill>
-                <a:latin typeface="微软雅黑" panose="020B0503020204020204" charset="-122"/>
-                <a:ea typeface="微软雅黑" panose="020B0503020204020204" charset="-122"/>
-                <a:cs typeface="微软雅黑" panose="020B0503020204020204" charset="-122"/>
+                <a:latin typeface="微软雅黑"/>
+                <a:ea typeface="微软雅黑"/>
+                <a:cs typeface="微软雅黑"/>
               </a:rPr>
               <a:t>用数字感受一下这套系统</a:t>
             </a:r>
-            <a:endParaRPr sz="2700" b="1" i="0">
-              <a:solidFill>
-                <a:srgbClr val="ECF7FF"/>
-              </a:solidFill>
-              <a:latin typeface="微软雅黑" panose="020B0503020204020204" charset="-122"/>
-              <a:ea typeface="微软雅黑" panose="020B0503020204020204" charset="-122"/>
-              <a:cs typeface="微软雅黑" panose="020B0503020204020204" charset="-122"/>
-            </a:endParaRPr>
           </a:p>
         </p:txBody>
       </p:sp>
@@ -11774,7 +10505,7 @@
           <a:noFill/>
         </p:spPr>
         <p:txBody>
-          <a:bodyPr wrap="square" lIns="0" tIns="0" rIns="0" bIns="0" anchor="t">
+          <a:bodyPr wrap="square" anchor="t" lIns="0" rIns="0" tIns="0" bIns="0">
             <a:spAutoFit/>
           </a:bodyPr>
           <a:lstStyle/>
@@ -11785,20 +10516,12 @@
                 <a:solidFill>
                   <a:srgbClr val="7E9EC4"/>
                 </a:solidFill>
-                <a:latin typeface="微软雅黑" panose="020B0503020204020204" charset="-122"/>
-                <a:ea typeface="微软雅黑" panose="020B0503020204020204" charset="-122"/>
-                <a:cs typeface="微软雅黑" panose="020B0503020204020204" charset="-122"/>
+                <a:latin typeface="微软雅黑"/>
+                <a:ea typeface="微软雅黑"/>
+                <a:cs typeface="微软雅黑"/>
               </a:rPr>
               <a:t>急救绿道 · 6 / 13</a:t>
             </a:r>
-            <a:endParaRPr sz="1000" b="0" i="0">
-              <a:solidFill>
-                <a:srgbClr val="7E9EC4"/>
-              </a:solidFill>
-              <a:latin typeface="微软雅黑" panose="020B0503020204020204" charset="-122"/>
-              <a:ea typeface="微软雅黑" panose="020B0503020204020204" charset="-122"/>
-              <a:cs typeface="微软雅黑" panose="020B0503020204020204" charset="-122"/>
-            </a:endParaRPr>
           </a:p>
         </p:txBody>
       </p:sp>
@@ -11911,7 +10634,7 @@
           <a:noFill/>
         </p:spPr>
         <p:txBody>
-          <a:bodyPr wrap="square" lIns="0" tIns="0" rIns="0" bIns="0" anchor="t">
+          <a:bodyPr wrap="square" anchor="t" lIns="0" rIns="0" tIns="0" bIns="0">
             <a:spAutoFit/>
           </a:bodyPr>
           <a:lstStyle/>
@@ -11926,20 +10649,12 @@
                 <a:solidFill>
                   <a:srgbClr val="7E9EC4"/>
                 </a:solidFill>
-                <a:latin typeface="微软雅黑" panose="020B0503020204020204" charset="-122"/>
-                <a:ea typeface="微软雅黑" panose="020B0503020204020204" charset="-122"/>
-                <a:cs typeface="微软雅黑" panose="020B0503020204020204" charset="-122"/>
+                <a:latin typeface="微软雅黑"/>
+                <a:ea typeface="微软雅黑"/>
+                <a:cs typeface="微软雅黑"/>
               </a:rPr>
               <a:t>示例病例</a:t>
             </a:r>
-            <a:endParaRPr sz="1100" b="1" i="0">
-              <a:solidFill>
-                <a:srgbClr val="7E9EC4"/>
-              </a:solidFill>
-              <a:latin typeface="微软雅黑" panose="020B0503020204020204" charset="-122"/>
-              <a:ea typeface="微软雅黑" panose="020B0503020204020204" charset="-122"/>
-              <a:cs typeface="微软雅黑" panose="020B0503020204020204" charset="-122"/>
-            </a:endParaRPr>
           </a:p>
           <a:p>
             <a:pPr algn="l">
@@ -11952,20 +10667,12 @@
                 <a:solidFill>
                   <a:srgbClr val="ECF7FF"/>
                 </a:solidFill>
-                <a:latin typeface="微软雅黑" panose="020B0503020204020204" charset="-122"/>
-                <a:ea typeface="微软雅黑" panose="020B0503020204020204" charset="-122"/>
-                <a:cs typeface="微软雅黑" panose="020B0503020204020204" charset="-122"/>
+                <a:latin typeface="微软雅黑"/>
+                <a:ea typeface="微软雅黑"/>
+                <a:cs typeface="微软雅黑"/>
               </a:rPr>
               <a:t>5089</a:t>
             </a:r>
-            <a:endParaRPr sz="4000" b="1" i="0">
-              <a:solidFill>
-                <a:srgbClr val="ECF7FF"/>
-              </a:solidFill>
-              <a:latin typeface="微软雅黑" panose="020B0503020204020204" charset="-122"/>
-              <a:ea typeface="微软雅黑" panose="020B0503020204020204" charset="-122"/>
-              <a:cs typeface="微软雅黑" panose="020B0503020204020204" charset="-122"/>
-            </a:endParaRPr>
           </a:p>
           <a:p>
             <a:pPr algn="l">
@@ -11978,20 +10685,12 @@
                 <a:solidFill>
                   <a:srgbClr val="BBD4EC"/>
                 </a:solidFill>
-                <a:latin typeface="微软雅黑" panose="020B0503020204020204" charset="-122"/>
-                <a:ea typeface="微软雅黑" panose="020B0503020204020204" charset="-122"/>
-                <a:cs typeface="微软雅黑" panose="020B0503020204020204" charset="-122"/>
+                <a:latin typeface="微软雅黑"/>
+                <a:ea typeface="微软雅黑"/>
+                <a:cs typeface="微软雅黑"/>
               </a:rPr>
               <a:t>含 12 个月历史，够看出趋势</a:t>
             </a:r>
-            <a:endParaRPr sz="1100" b="0" i="0">
-              <a:solidFill>
-                <a:srgbClr val="BBD4EC"/>
-              </a:solidFill>
-              <a:latin typeface="微软雅黑" panose="020B0503020204020204" charset="-122"/>
-              <a:ea typeface="微软雅黑" panose="020B0503020204020204" charset="-122"/>
-              <a:cs typeface="微软雅黑" panose="020B0503020204020204" charset="-122"/>
-            </a:endParaRPr>
           </a:p>
         </p:txBody>
       </p:sp>
@@ -12104,7 +10803,7 @@
           <a:noFill/>
         </p:spPr>
         <p:txBody>
-          <a:bodyPr wrap="square" lIns="0" tIns="0" rIns="0" bIns="0" anchor="t">
+          <a:bodyPr wrap="square" anchor="t" lIns="0" rIns="0" tIns="0" bIns="0">
             <a:spAutoFit/>
           </a:bodyPr>
           <a:lstStyle/>
@@ -12119,20 +10818,12 @@
                 <a:solidFill>
                   <a:srgbClr val="7E9EC4"/>
                 </a:solidFill>
-                <a:latin typeface="微软雅黑" panose="020B0503020204020204" charset="-122"/>
-                <a:ea typeface="微软雅黑" panose="020B0503020204020204" charset="-122"/>
-                <a:cs typeface="微软雅黑" panose="020B0503020204020204" charset="-122"/>
+                <a:latin typeface="微软雅黑"/>
+                <a:ea typeface="微软雅黑"/>
+                <a:cs typeface="微软雅黑"/>
               </a:rPr>
               <a:t>时间节点</a:t>
             </a:r>
-            <a:endParaRPr sz="1100" b="1" i="0">
-              <a:solidFill>
-                <a:srgbClr val="7E9EC4"/>
-              </a:solidFill>
-              <a:latin typeface="微软雅黑" panose="020B0503020204020204" charset="-122"/>
-              <a:ea typeface="微软雅黑" panose="020B0503020204020204" charset="-122"/>
-              <a:cs typeface="微软雅黑" panose="020B0503020204020204" charset="-122"/>
-            </a:endParaRPr>
           </a:p>
           <a:p>
             <a:pPr algn="l">
@@ -12145,20 +10836,12 @@
                 <a:solidFill>
                   <a:srgbClr val="ECF7FF"/>
                 </a:solidFill>
-                <a:latin typeface="微软雅黑" panose="020B0503020204020204" charset="-122"/>
-                <a:ea typeface="微软雅黑" panose="020B0503020204020204" charset="-122"/>
-                <a:cs typeface="微软雅黑" panose="020B0503020204020204" charset="-122"/>
+                <a:latin typeface="微软雅黑"/>
+                <a:ea typeface="微软雅黑"/>
+                <a:cs typeface="微软雅黑"/>
               </a:rPr>
               <a:t>30689</a:t>
             </a:r>
-            <a:endParaRPr sz="4000" b="1" i="0">
-              <a:solidFill>
-                <a:srgbClr val="ECF7FF"/>
-              </a:solidFill>
-              <a:latin typeface="微软雅黑" panose="020B0503020204020204" charset="-122"/>
-              <a:ea typeface="微软雅黑" panose="020B0503020204020204" charset="-122"/>
-              <a:cs typeface="微软雅黑" panose="020B0503020204020204" charset="-122"/>
-            </a:endParaRPr>
           </a:p>
           <a:p>
             <a:pPr algn="l">
@@ -12171,20 +10854,12 @@
                 <a:solidFill>
                   <a:srgbClr val="BBD4EC"/>
                 </a:solidFill>
-                <a:latin typeface="微软雅黑" panose="020B0503020204020204" charset="-122"/>
-                <a:ea typeface="微软雅黑" panose="020B0503020204020204" charset="-122"/>
-                <a:cs typeface="微软雅黑" panose="020B0503020204020204" charset="-122"/>
+                <a:latin typeface="微软雅黑"/>
+                <a:ea typeface="微软雅黑"/>
+                <a:cs typeface="微软雅黑"/>
               </a:rPr>
               <a:t>每个病例 6 个环节，用来算时长</a:t>
             </a:r>
-            <a:endParaRPr sz="1100" b="0" i="0">
-              <a:solidFill>
-                <a:srgbClr val="BBD4EC"/>
-              </a:solidFill>
-              <a:latin typeface="微软雅黑" panose="020B0503020204020204" charset="-122"/>
-              <a:ea typeface="微软雅黑" panose="020B0503020204020204" charset="-122"/>
-              <a:cs typeface="微软雅黑" panose="020B0503020204020204" charset="-122"/>
-            </a:endParaRPr>
           </a:p>
         </p:txBody>
       </p:sp>
@@ -12297,7 +10972,7 @@
           <a:noFill/>
         </p:spPr>
         <p:txBody>
-          <a:bodyPr wrap="square" lIns="0" tIns="0" rIns="0" bIns="0" anchor="t">
+          <a:bodyPr wrap="square" anchor="t" lIns="0" rIns="0" tIns="0" bIns="0">
             <a:spAutoFit/>
           </a:bodyPr>
           <a:lstStyle/>
@@ -12312,20 +10987,12 @@
                 <a:solidFill>
                   <a:srgbClr val="7E9EC4"/>
                 </a:solidFill>
-                <a:latin typeface="微软雅黑" panose="020B0503020204020204" charset="-122"/>
-                <a:ea typeface="微软雅黑" panose="020B0503020204020204" charset="-122"/>
-                <a:cs typeface="微软雅黑" panose="020B0503020204020204" charset="-122"/>
+                <a:latin typeface="微软雅黑"/>
+                <a:ea typeface="微软雅黑"/>
+                <a:cs typeface="微软雅黑"/>
               </a:rPr>
               <a:t>自动化验收</a:t>
             </a:r>
-            <a:endParaRPr sz="1100" b="1" i="0">
-              <a:solidFill>
-                <a:srgbClr val="7E9EC4"/>
-              </a:solidFill>
-              <a:latin typeface="微软雅黑" panose="020B0503020204020204" charset="-122"/>
-              <a:ea typeface="微软雅黑" panose="020B0503020204020204" charset="-122"/>
-              <a:cs typeface="微软雅黑" panose="020B0503020204020204" charset="-122"/>
-            </a:endParaRPr>
           </a:p>
           <a:p>
             <a:pPr algn="l">
@@ -12338,20 +11005,12 @@
                 <a:solidFill>
                   <a:srgbClr val="ECF7FF"/>
                 </a:solidFill>
-                <a:latin typeface="微软雅黑" panose="020B0503020204020204" charset="-122"/>
-                <a:ea typeface="微软雅黑" panose="020B0503020204020204" charset="-122"/>
-                <a:cs typeface="微软雅黑" panose="020B0503020204020204" charset="-122"/>
+                <a:latin typeface="微软雅黑"/>
+                <a:ea typeface="微软雅黑"/>
+                <a:cs typeface="微软雅黑"/>
               </a:rPr>
               <a:t>71</a:t>
             </a:r>
-            <a:endParaRPr sz="4000" b="1" i="0">
-              <a:solidFill>
-                <a:srgbClr val="ECF7FF"/>
-              </a:solidFill>
-              <a:latin typeface="微软雅黑" panose="020B0503020204020204" charset="-122"/>
-              <a:ea typeface="微软雅黑" panose="020B0503020204020204" charset="-122"/>
-              <a:cs typeface="微软雅黑" panose="020B0503020204020204" charset="-122"/>
-            </a:endParaRPr>
           </a:p>
           <a:p>
             <a:pPr algn="l">
@@ -12364,20 +11023,12 @@
                 <a:solidFill>
                   <a:srgbClr val="BBD4EC"/>
                 </a:solidFill>
-                <a:latin typeface="微软雅黑" panose="020B0503020204020204" charset="-122"/>
-                <a:ea typeface="微软雅黑" panose="020B0503020204020204" charset="-122"/>
-                <a:cs typeface="微软雅黑" panose="020B0503020204020204" charset="-122"/>
+                <a:latin typeface="微软雅黑"/>
+                <a:ea typeface="微软雅黑"/>
+                <a:cs typeface="微软雅黑"/>
               </a:rPr>
               <a:t>改代码后自动跑，坏了立刻知道</a:t>
             </a:r>
-            <a:endParaRPr sz="1100" b="0" i="0">
-              <a:solidFill>
-                <a:srgbClr val="BBD4EC"/>
-              </a:solidFill>
-              <a:latin typeface="微软雅黑" panose="020B0503020204020204" charset="-122"/>
-              <a:ea typeface="微软雅黑" panose="020B0503020204020204" charset="-122"/>
-              <a:cs typeface="微软雅黑" panose="020B0503020204020204" charset="-122"/>
-            </a:endParaRPr>
           </a:p>
         </p:txBody>
       </p:sp>
@@ -12490,7 +11141,7 @@
           <a:noFill/>
         </p:spPr>
         <p:txBody>
-          <a:bodyPr wrap="square" lIns="0" tIns="0" rIns="0" bIns="0" anchor="t">
+          <a:bodyPr wrap="square" anchor="t" lIns="0" rIns="0" tIns="0" bIns="0">
             <a:spAutoFit/>
           </a:bodyPr>
           <a:lstStyle/>
@@ -12505,20 +11156,12 @@
                 <a:solidFill>
                   <a:srgbClr val="7E9EC4"/>
                 </a:solidFill>
-                <a:latin typeface="微软雅黑" panose="020B0503020204020204" charset="-122"/>
-                <a:ea typeface="微软雅黑" panose="020B0503020204020204" charset="-122"/>
-                <a:cs typeface="微软雅黑" panose="020B0503020204020204" charset="-122"/>
+                <a:latin typeface="微软雅黑"/>
+                <a:ea typeface="微软雅黑"/>
+                <a:cs typeface="微软雅黑"/>
               </a:rPr>
               <a:t>页面</a:t>
             </a:r>
-            <a:endParaRPr sz="1100" b="1" i="0">
-              <a:solidFill>
-                <a:srgbClr val="7E9EC4"/>
-              </a:solidFill>
-              <a:latin typeface="微软雅黑" panose="020B0503020204020204" charset="-122"/>
-              <a:ea typeface="微软雅黑" panose="020B0503020204020204" charset="-122"/>
-              <a:cs typeface="微软雅黑" panose="020B0503020204020204" charset="-122"/>
-            </a:endParaRPr>
           </a:p>
           <a:p>
             <a:pPr algn="l">
@@ -12531,20 +11174,12 @@
                 <a:solidFill>
                   <a:srgbClr val="ECF7FF"/>
                 </a:solidFill>
-                <a:latin typeface="微软雅黑" panose="020B0503020204020204" charset="-122"/>
-                <a:ea typeface="微软雅黑" panose="020B0503020204020204" charset="-122"/>
-                <a:cs typeface="微软雅黑" panose="020B0503020204020204" charset="-122"/>
+                <a:latin typeface="微软雅黑"/>
+                <a:ea typeface="微软雅黑"/>
+                <a:cs typeface="微软雅黑"/>
               </a:rPr>
               <a:t>14</a:t>
             </a:r>
-            <a:endParaRPr sz="4000" b="1" i="0">
-              <a:solidFill>
-                <a:srgbClr val="ECF7FF"/>
-              </a:solidFill>
-              <a:latin typeface="微软雅黑" panose="020B0503020204020204" charset="-122"/>
-              <a:ea typeface="微软雅黑" panose="020B0503020204020204" charset="-122"/>
-              <a:cs typeface="微软雅黑" panose="020B0503020204020204" charset="-122"/>
-            </a:endParaRPr>
           </a:p>
           <a:p>
             <a:pPr algn="l">
@@ -12557,20 +11192,12 @@
                 <a:solidFill>
                   <a:srgbClr val="BBD4EC"/>
                 </a:solidFill>
-                <a:latin typeface="微软雅黑" panose="020B0503020204020204" charset="-122"/>
-                <a:ea typeface="微软雅黑" panose="020B0503020204020204" charset="-122"/>
-                <a:cs typeface="微软雅黑" panose="020B0503020204020204" charset="-122"/>
+                <a:latin typeface="微软雅黑"/>
+                <a:ea typeface="微软雅黑"/>
+                <a:cs typeface="微软雅黑"/>
               </a:rPr>
               <a:t>大屏 1 页 + 后台 13 页</a:t>
             </a:r>
-            <a:endParaRPr sz="1100" b="0" i="0">
-              <a:solidFill>
-                <a:srgbClr val="BBD4EC"/>
-              </a:solidFill>
-              <a:latin typeface="微软雅黑" panose="020B0503020204020204" charset="-122"/>
-              <a:ea typeface="微软雅黑" panose="020B0503020204020204" charset="-122"/>
-              <a:cs typeface="微软雅黑" panose="020B0503020204020204" charset="-122"/>
-            </a:endParaRPr>
           </a:p>
         </p:txBody>
       </p:sp>
@@ -12591,7 +11218,7 @@
           <a:noFill/>
         </p:spPr>
         <p:txBody>
-          <a:bodyPr wrap="square" lIns="0" tIns="0" rIns="0" bIns="0" anchor="t">
+          <a:bodyPr wrap="square" anchor="t" lIns="0" rIns="0" tIns="0" bIns="0">
             <a:spAutoFit/>
           </a:bodyPr>
           <a:lstStyle/>
@@ -12606,9 +11233,9 @@
                 <a:solidFill>
                   <a:srgbClr val="BBD4EC"/>
                 </a:solidFill>
-                <a:latin typeface="微软雅黑" panose="020B0503020204020204" charset="-122"/>
-                <a:ea typeface="微软雅黑" panose="020B0503020204020204" charset="-122"/>
-                <a:cs typeface="微软雅黑" panose="020B0503020204020204" charset="-122"/>
+                <a:latin typeface="微软雅黑"/>
+                <a:ea typeface="微软雅黑"/>
+                <a:cs typeface="微软雅黑"/>
               </a:rPr>
               <a:t>冷启动（全新电脑、什么都没装）：</a:t>
             </a:r>
@@ -12617,20 +11244,12 @@
                 <a:solidFill>
                   <a:srgbClr val="ECF7FF"/>
                 </a:solidFill>
-                <a:latin typeface="微软雅黑" panose="020B0503020204020204" charset="-122"/>
-                <a:ea typeface="微软雅黑" panose="020B0503020204020204" charset="-122"/>
-                <a:cs typeface="微软雅黑" panose="020B0503020204020204" charset="-122"/>
+                <a:latin typeface="微软雅黑"/>
+                <a:ea typeface="微软雅黑"/>
+                <a:cs typeface="微软雅黑"/>
               </a:rPr>
               <a:t>双击一个文件，30 秒内自动装好依赖、建库、灌数据、打开浏览器。</a:t>
             </a:r>
-            <a:endParaRPr sz="1500" b="1" i="0">
-              <a:solidFill>
-                <a:srgbClr val="ECF7FF"/>
-              </a:solidFill>
-              <a:latin typeface="微软雅黑" panose="020B0503020204020204" charset="-122"/>
-              <a:ea typeface="微软雅黑" panose="020B0503020204020204" charset="-122"/>
-              <a:cs typeface="微软雅黑" panose="020B0503020204020204" charset="-122"/>
-            </a:endParaRPr>
           </a:p>
         </p:txBody>
       </p:sp>
@@ -12643,7 +11262,7 @@
 </file>
 
 <file path=ppt/slides/slide7.xml><?xml version="1.0" encoding="utf-8"?>
-<p:sld xmlns:a="http://schemas.openxmlformats.org/drawingml/2006/main" xmlns:r="http://schemas.openxmlformats.org/officeDocument/2006/relationships" xmlns:p="http://schemas.openxmlformats.org/presentationml/2006/main">
+<p:sld xmlns:a="http://schemas.openxmlformats.org/drawingml/2006/main" xmlns:p="http://schemas.openxmlformats.org/presentationml/2006/main" xmlns:r="http://schemas.openxmlformats.org/officeDocument/2006/relationships">
   <p:cSld>
     <p:spTree>
       <p:nvGrpSpPr>
@@ -12713,7 +11332,7 @@
           <a:noFill/>
         </p:spPr>
         <p:txBody>
-          <a:bodyPr wrap="square" lIns="0" tIns="0" rIns="0" bIns="0" anchor="t">
+          <a:bodyPr wrap="square" anchor="t" lIns="0" rIns="0" tIns="0" bIns="0">
             <a:spAutoFit/>
           </a:bodyPr>
           <a:lstStyle/>
@@ -12724,20 +11343,12 @@
                 <a:solidFill>
                   <a:srgbClr val="7FE3FF"/>
                 </a:solidFill>
-                <a:latin typeface="微软雅黑" panose="020B0503020204020204" charset="-122"/>
-                <a:ea typeface="微软雅黑" panose="020B0503020204020204" charset="-122"/>
-                <a:cs typeface="微软雅黑" panose="020B0503020204020204" charset="-122"/>
+                <a:latin typeface="微软雅黑"/>
+                <a:ea typeface="微软雅黑"/>
+                <a:cs typeface="微软雅黑"/>
               </a:rPr>
               <a:t>02 · 怎么做的</a:t>
             </a:r>
-            <a:endParaRPr sz="1150" b="1" i="0">
-              <a:solidFill>
-                <a:srgbClr val="7FE3FF"/>
-              </a:solidFill>
-              <a:latin typeface="微软雅黑" panose="020B0503020204020204" charset="-122"/>
-              <a:ea typeface="微软雅黑" panose="020B0503020204020204" charset="-122"/>
-              <a:cs typeface="微软雅黑" panose="020B0503020204020204" charset="-122"/>
-            </a:endParaRPr>
           </a:p>
         </p:txBody>
       </p:sp>
@@ -12758,7 +11369,7 @@
           <a:noFill/>
         </p:spPr>
         <p:txBody>
-          <a:bodyPr wrap="square" lIns="0" tIns="0" rIns="0" bIns="0" anchor="t">
+          <a:bodyPr wrap="square" anchor="t" lIns="0" rIns="0" tIns="0" bIns="0">
             <a:spAutoFit/>
           </a:bodyPr>
           <a:lstStyle/>
@@ -12769,20 +11380,12 @@
                 <a:solidFill>
                   <a:srgbClr val="ECF7FF"/>
                 </a:solidFill>
-                <a:latin typeface="微软雅黑" panose="020B0503020204020204" charset="-122"/>
-                <a:ea typeface="微软雅黑" panose="020B0503020204020204" charset="-122"/>
-                <a:cs typeface="微软雅黑" panose="020B0503020204020204" charset="-122"/>
+                <a:latin typeface="微软雅黑"/>
+                <a:ea typeface="微软雅黑"/>
+                <a:cs typeface="微软雅黑"/>
               </a:rPr>
               <a:t>一条数据从产生到上屏，走五步</a:t>
             </a:r>
-            <a:endParaRPr sz="2700" b="1" i="0">
-              <a:solidFill>
-                <a:srgbClr val="ECF7FF"/>
-              </a:solidFill>
-              <a:latin typeface="微软雅黑" panose="020B0503020204020204" charset="-122"/>
-              <a:ea typeface="微软雅黑" panose="020B0503020204020204" charset="-122"/>
-              <a:cs typeface="微软雅黑" panose="020B0503020204020204" charset="-122"/>
-            </a:endParaRPr>
           </a:p>
         </p:txBody>
       </p:sp>
@@ -12803,7 +11406,7 @@
           <a:noFill/>
         </p:spPr>
         <p:txBody>
-          <a:bodyPr wrap="square" lIns="0" tIns="0" rIns="0" bIns="0" anchor="t">
+          <a:bodyPr wrap="square" anchor="t" lIns="0" rIns="0" tIns="0" bIns="0">
             <a:spAutoFit/>
           </a:bodyPr>
           <a:lstStyle/>
@@ -12814,20 +11417,12 @@
                 <a:solidFill>
                   <a:srgbClr val="7E9EC4"/>
                 </a:solidFill>
-                <a:latin typeface="微软雅黑" panose="020B0503020204020204" charset="-122"/>
-                <a:ea typeface="微软雅黑" panose="020B0503020204020204" charset="-122"/>
-                <a:cs typeface="微软雅黑" panose="020B0503020204020204" charset="-122"/>
+                <a:latin typeface="微软雅黑"/>
+                <a:ea typeface="微软雅黑"/>
+                <a:cs typeface="微软雅黑"/>
               </a:rPr>
               <a:t>急救绿道 · 7 / 13</a:t>
             </a:r>
-            <a:endParaRPr sz="1000" b="0" i="0">
-              <a:solidFill>
-                <a:srgbClr val="7E9EC4"/>
-              </a:solidFill>
-              <a:latin typeface="微软雅黑" panose="020B0503020204020204" charset="-122"/>
-              <a:ea typeface="微软雅黑" panose="020B0503020204020204" charset="-122"/>
-              <a:cs typeface="微软雅黑" panose="020B0503020204020204" charset="-122"/>
-            </a:endParaRPr>
           </a:p>
         </p:txBody>
       </p:sp>
@@ -12896,7 +11491,7 @@
           <a:noFill/>
         </p:spPr>
         <p:txBody>
-          <a:bodyPr wrap="square" lIns="0" tIns="0" rIns="0" bIns="0" anchor="t">
+          <a:bodyPr wrap="square" anchor="t" lIns="0" rIns="0" tIns="0" bIns="0">
             <a:spAutoFit/>
           </a:bodyPr>
           <a:lstStyle/>
@@ -12911,20 +11506,12 @@
                 <a:solidFill>
                   <a:srgbClr val="ECF7FF"/>
                 </a:solidFill>
-                <a:latin typeface="微软雅黑" panose="020B0503020204020204" charset="-122"/>
-                <a:ea typeface="微软雅黑" panose="020B0503020204020204" charset="-122"/>
-                <a:cs typeface="微软雅黑" panose="020B0503020204020204" charset="-122"/>
+                <a:latin typeface="微软雅黑"/>
+                <a:ea typeface="微软雅黑"/>
+                <a:cs typeface="微软雅黑"/>
               </a:rPr>
               <a:t>① 产生</a:t>
             </a:r>
-            <a:endParaRPr sz="1500" b="1" i="0">
-              <a:solidFill>
-                <a:srgbClr val="ECF7FF"/>
-              </a:solidFill>
-              <a:latin typeface="微软雅黑" panose="020B0503020204020204" charset="-122"/>
-              <a:ea typeface="微软雅黑" panose="020B0503020204020204" charset="-122"/>
-              <a:cs typeface="微软雅黑" panose="020B0503020204020204" charset="-122"/>
-            </a:endParaRPr>
           </a:p>
           <a:p>
             <a:pPr algn="ctr">
@@ -12937,21 +11524,13 @@
                 <a:solidFill>
                   <a:srgbClr val="BBD4EC"/>
                 </a:solidFill>
-                <a:latin typeface="微软雅黑" panose="020B0503020204020204" charset="-122"/>
-                <a:ea typeface="微软雅黑" panose="020B0503020204020204" charset="-122"/>
-                <a:cs typeface="微软雅黑" panose="020B0503020204020204" charset="-122"/>
+                <a:latin typeface="微软雅黑"/>
+                <a:ea typeface="微软雅黑"/>
+                <a:cs typeface="微软雅黑"/>
               </a:rPr>
               <a:t>120 送来 / 院内接诊
 或 HIS 系统推送</a:t>
             </a:r>
-            <a:endParaRPr sz="1050" b="0" i="0">
-              <a:solidFill>
-                <a:srgbClr val="BBD4EC"/>
-              </a:solidFill>
-              <a:latin typeface="微软雅黑" panose="020B0503020204020204" charset="-122"/>
-              <a:ea typeface="微软雅黑" panose="020B0503020204020204" charset="-122"/>
-              <a:cs typeface="微软雅黑" panose="020B0503020204020204" charset="-122"/>
-            </a:endParaRPr>
           </a:p>
         </p:txBody>
       </p:sp>
@@ -12972,7 +11551,7 @@
           <a:noFill/>
         </p:spPr>
         <p:txBody>
-          <a:bodyPr wrap="square" lIns="0" tIns="0" rIns="0" bIns="0" anchor="t">
+          <a:bodyPr wrap="square" anchor="t" lIns="0" rIns="0" tIns="0" bIns="0">
             <a:spAutoFit/>
           </a:bodyPr>
           <a:lstStyle/>
@@ -12983,20 +11562,12 @@
                 <a:solidFill>
                   <a:srgbClr val="7FE3FF"/>
                 </a:solidFill>
-                <a:latin typeface="微软雅黑" panose="020B0503020204020204" charset="-122"/>
-                <a:ea typeface="微软雅黑" panose="020B0503020204020204" charset="-122"/>
-                <a:cs typeface="微软雅黑" panose="020B0503020204020204" charset="-122"/>
+                <a:latin typeface="微软雅黑"/>
+                <a:ea typeface="微软雅黑"/>
+                <a:cs typeface="微软雅黑"/>
               </a:rPr>
               <a:t>→</a:t>
             </a:r>
-            <a:endParaRPr sz="2000" b="1" i="0">
-              <a:solidFill>
-                <a:srgbClr val="7FE3FF"/>
-              </a:solidFill>
-              <a:latin typeface="微软雅黑" panose="020B0503020204020204" charset="-122"/>
-              <a:ea typeface="微软雅黑" panose="020B0503020204020204" charset="-122"/>
-              <a:cs typeface="微软雅黑" panose="020B0503020204020204" charset="-122"/>
-            </a:endParaRPr>
           </a:p>
         </p:txBody>
       </p:sp>
@@ -13065,7 +11636,7 @@
           <a:noFill/>
         </p:spPr>
         <p:txBody>
-          <a:bodyPr wrap="square" lIns="0" tIns="0" rIns="0" bIns="0" anchor="t">
+          <a:bodyPr wrap="square" anchor="t" lIns="0" rIns="0" tIns="0" bIns="0">
             <a:spAutoFit/>
           </a:bodyPr>
           <a:lstStyle/>
@@ -13080,20 +11651,12 @@
                 <a:solidFill>
                   <a:srgbClr val="ECF7FF"/>
                 </a:solidFill>
-                <a:latin typeface="微软雅黑" panose="020B0503020204020204" charset="-122"/>
-                <a:ea typeface="微软雅黑" panose="020B0503020204020204" charset="-122"/>
-                <a:cs typeface="微软雅黑" panose="020B0503020204020204" charset="-122"/>
+                <a:latin typeface="微软雅黑"/>
+                <a:ea typeface="微软雅黑"/>
+                <a:cs typeface="微软雅黑"/>
               </a:rPr>
               <a:t>② 录入</a:t>
             </a:r>
-            <a:endParaRPr sz="1500" b="1" i="0">
-              <a:solidFill>
-                <a:srgbClr val="ECF7FF"/>
-              </a:solidFill>
-              <a:latin typeface="微软雅黑" panose="020B0503020204020204" charset="-122"/>
-              <a:ea typeface="微软雅黑" panose="020B0503020204020204" charset="-122"/>
-              <a:cs typeface="微软雅黑" panose="020B0503020204020204" charset="-122"/>
-            </a:endParaRPr>
           </a:p>
           <a:p>
             <a:pPr algn="ctr">
@@ -13106,21 +11669,13 @@
                 <a:solidFill>
                   <a:srgbClr val="BBD4EC"/>
                 </a:solidFill>
-                <a:latin typeface="微软雅黑" panose="020B0503020204020204" charset="-122"/>
-                <a:ea typeface="微软雅黑" panose="020B0503020204020204" charset="-122"/>
-                <a:cs typeface="微软雅黑" panose="020B0503020204020204" charset="-122"/>
+                <a:latin typeface="微软雅黑"/>
+                <a:ea typeface="微软雅黑"/>
+                <a:cs typeface="微软雅黑"/>
               </a:rPr>
               <a:t>后台填病例
 或接口自动创建</a:t>
             </a:r>
-            <a:endParaRPr sz="1050" b="0" i="0">
-              <a:solidFill>
-                <a:srgbClr val="BBD4EC"/>
-              </a:solidFill>
-              <a:latin typeface="微软雅黑" panose="020B0503020204020204" charset="-122"/>
-              <a:ea typeface="微软雅黑" panose="020B0503020204020204" charset="-122"/>
-              <a:cs typeface="微软雅黑" panose="020B0503020204020204" charset="-122"/>
-            </a:endParaRPr>
           </a:p>
         </p:txBody>
       </p:sp>
@@ -13141,7 +11696,7 @@
           <a:noFill/>
         </p:spPr>
         <p:txBody>
-          <a:bodyPr wrap="square" lIns="0" tIns="0" rIns="0" bIns="0" anchor="t">
+          <a:bodyPr wrap="square" anchor="t" lIns="0" rIns="0" tIns="0" bIns="0">
             <a:spAutoFit/>
           </a:bodyPr>
           <a:lstStyle/>
@@ -13152,20 +11707,12 @@
                 <a:solidFill>
                   <a:srgbClr val="7FE3FF"/>
                 </a:solidFill>
-                <a:latin typeface="微软雅黑" panose="020B0503020204020204" charset="-122"/>
-                <a:ea typeface="微软雅黑" panose="020B0503020204020204" charset="-122"/>
-                <a:cs typeface="微软雅黑" panose="020B0503020204020204" charset="-122"/>
+                <a:latin typeface="微软雅黑"/>
+                <a:ea typeface="微软雅黑"/>
+                <a:cs typeface="微软雅黑"/>
               </a:rPr>
               <a:t>→</a:t>
             </a:r>
-            <a:endParaRPr sz="2000" b="1" i="0">
-              <a:solidFill>
-                <a:srgbClr val="7FE3FF"/>
-              </a:solidFill>
-              <a:latin typeface="微软雅黑" panose="020B0503020204020204" charset="-122"/>
-              <a:ea typeface="微软雅黑" panose="020B0503020204020204" charset="-122"/>
-              <a:cs typeface="微软雅黑" panose="020B0503020204020204" charset="-122"/>
-            </a:endParaRPr>
           </a:p>
         </p:txBody>
       </p:sp>
@@ -13278,7 +11825,7 @@
           <a:noFill/>
         </p:spPr>
         <p:txBody>
-          <a:bodyPr wrap="square" lIns="0" tIns="0" rIns="0" bIns="0" anchor="t">
+          <a:bodyPr wrap="square" anchor="t" lIns="0" rIns="0" tIns="0" bIns="0">
             <a:spAutoFit/>
           </a:bodyPr>
           <a:lstStyle/>
@@ -13293,20 +11840,12 @@
                 <a:solidFill>
                   <a:srgbClr val="ECF7FF"/>
                 </a:solidFill>
-                <a:latin typeface="微软雅黑" panose="020B0503020204020204" charset="-122"/>
-                <a:ea typeface="微软雅黑" panose="020B0503020204020204" charset="-122"/>
-                <a:cs typeface="微软雅黑" panose="020B0503020204020204" charset="-122"/>
+                <a:latin typeface="微软雅黑"/>
+                <a:ea typeface="微软雅黑"/>
+                <a:cs typeface="微软雅黑"/>
               </a:rPr>
               <a:t>③ 存储</a:t>
             </a:r>
-            <a:endParaRPr sz="1500" b="1" i="0">
-              <a:solidFill>
-                <a:srgbClr val="ECF7FF"/>
-              </a:solidFill>
-              <a:latin typeface="微软雅黑" panose="020B0503020204020204" charset="-122"/>
-              <a:ea typeface="微软雅黑" panose="020B0503020204020204" charset="-122"/>
-              <a:cs typeface="微软雅黑" panose="020B0503020204020204" charset="-122"/>
-            </a:endParaRPr>
           </a:p>
           <a:p>
             <a:pPr algn="ctr">
@@ -13319,21 +11858,13 @@
                 <a:solidFill>
                   <a:srgbClr val="BBD4EC"/>
                 </a:solidFill>
-                <a:latin typeface="微软雅黑" panose="020B0503020204020204" charset="-122"/>
-                <a:ea typeface="微软雅黑" panose="020B0503020204020204" charset="-122"/>
-                <a:cs typeface="微软雅黑" panose="020B0503020204020204" charset="-122"/>
+                <a:latin typeface="微软雅黑"/>
+                <a:ea typeface="微软雅黑"/>
+                <a:cs typeface="微软雅黑"/>
               </a:rPr>
               <a:t>一个 SQLite 数据库文件
 时间统一存本地时区</a:t>
             </a:r>
-            <a:endParaRPr sz="1050" b="0" i="0">
-              <a:solidFill>
-                <a:srgbClr val="BBD4EC"/>
-              </a:solidFill>
-              <a:latin typeface="微软雅黑" panose="020B0503020204020204" charset="-122"/>
-              <a:ea typeface="微软雅黑" panose="020B0503020204020204" charset="-122"/>
-              <a:cs typeface="微软雅黑" panose="020B0503020204020204" charset="-122"/>
-            </a:endParaRPr>
           </a:p>
         </p:txBody>
       </p:sp>
@@ -13354,7 +11885,7 @@
           <a:noFill/>
         </p:spPr>
         <p:txBody>
-          <a:bodyPr wrap="square" lIns="0" tIns="0" rIns="0" bIns="0" anchor="t">
+          <a:bodyPr wrap="square" anchor="t" lIns="0" rIns="0" tIns="0" bIns="0">
             <a:spAutoFit/>
           </a:bodyPr>
           <a:lstStyle/>
@@ -13365,20 +11896,12 @@
                 <a:solidFill>
                   <a:srgbClr val="7FE3FF"/>
                 </a:solidFill>
-                <a:latin typeface="微软雅黑" panose="020B0503020204020204" charset="-122"/>
-                <a:ea typeface="微软雅黑" panose="020B0503020204020204" charset="-122"/>
-                <a:cs typeface="微软雅黑" panose="020B0503020204020204" charset="-122"/>
+                <a:latin typeface="微软雅黑"/>
+                <a:ea typeface="微软雅黑"/>
+                <a:cs typeface="微软雅黑"/>
               </a:rPr>
               <a:t>→</a:t>
             </a:r>
-            <a:endParaRPr sz="2000" b="1" i="0">
-              <a:solidFill>
-                <a:srgbClr val="7FE3FF"/>
-              </a:solidFill>
-              <a:latin typeface="微软雅黑" panose="020B0503020204020204" charset="-122"/>
-              <a:ea typeface="微软雅黑" panose="020B0503020204020204" charset="-122"/>
-              <a:cs typeface="微软雅黑" panose="020B0503020204020204" charset="-122"/>
-            </a:endParaRPr>
           </a:p>
         </p:txBody>
       </p:sp>
@@ -13491,7 +12014,7 @@
           <a:noFill/>
         </p:spPr>
         <p:txBody>
-          <a:bodyPr wrap="square" lIns="0" tIns="0" rIns="0" bIns="0" anchor="t">
+          <a:bodyPr wrap="square" anchor="t" lIns="0" rIns="0" tIns="0" bIns="0">
             <a:spAutoFit/>
           </a:bodyPr>
           <a:lstStyle/>
@@ -13506,20 +12029,12 @@
                 <a:solidFill>
                   <a:srgbClr val="ECF7FF"/>
                 </a:solidFill>
-                <a:latin typeface="微软雅黑" panose="020B0503020204020204" charset="-122"/>
-                <a:ea typeface="微软雅黑" panose="020B0503020204020204" charset="-122"/>
-                <a:cs typeface="微软雅黑" panose="020B0503020204020204" charset="-122"/>
+                <a:latin typeface="微软雅黑"/>
+                <a:ea typeface="微软雅黑"/>
+                <a:cs typeface="微软雅黑"/>
               </a:rPr>
               <a:t>④ 聚合</a:t>
             </a:r>
-            <a:endParaRPr sz="1500" b="1" i="0">
-              <a:solidFill>
-                <a:srgbClr val="ECF7FF"/>
-              </a:solidFill>
-              <a:latin typeface="微软雅黑" panose="020B0503020204020204" charset="-122"/>
-              <a:ea typeface="微软雅黑" panose="020B0503020204020204" charset="-122"/>
-              <a:cs typeface="微软雅黑" panose="020B0503020204020204" charset="-122"/>
-            </a:endParaRPr>
           </a:p>
           <a:p>
             <a:pPr algn="ctr">
@@ -13532,21 +12047,13 @@
                 <a:solidFill>
                   <a:srgbClr val="BBD4EC"/>
                 </a:solidFill>
-                <a:latin typeface="微软雅黑" panose="020B0503020204020204" charset="-122"/>
-                <a:ea typeface="微软雅黑" panose="020B0503020204020204" charset="-122"/>
-                <a:cs typeface="微软雅黑" panose="020B0503020204020204" charset="-122"/>
+                <a:latin typeface="微软雅黑"/>
+                <a:ea typeface="微软雅黑"/>
+                <a:cs typeface="微软雅黑"/>
               </a:rPr>
               <a:t>服务端算好饼图 / 柱状图
 大屏不用自己算</a:t>
             </a:r>
-            <a:endParaRPr sz="1050" b="0" i="0">
-              <a:solidFill>
-                <a:srgbClr val="BBD4EC"/>
-              </a:solidFill>
-              <a:latin typeface="微软雅黑" panose="020B0503020204020204" charset="-122"/>
-              <a:ea typeface="微软雅黑" panose="020B0503020204020204" charset="-122"/>
-              <a:cs typeface="微软雅黑" panose="020B0503020204020204" charset="-122"/>
-            </a:endParaRPr>
           </a:p>
         </p:txBody>
       </p:sp>
@@ -13567,7 +12074,7 @@
           <a:noFill/>
         </p:spPr>
         <p:txBody>
-          <a:bodyPr wrap="square" lIns="0" tIns="0" rIns="0" bIns="0" anchor="t">
+          <a:bodyPr wrap="square" anchor="t" lIns="0" rIns="0" tIns="0" bIns="0">
             <a:spAutoFit/>
           </a:bodyPr>
           <a:lstStyle/>
@@ -13578,20 +12085,12 @@
                 <a:solidFill>
                   <a:srgbClr val="7FE3FF"/>
                 </a:solidFill>
-                <a:latin typeface="微软雅黑" panose="020B0503020204020204" charset="-122"/>
-                <a:ea typeface="微软雅黑" panose="020B0503020204020204" charset="-122"/>
-                <a:cs typeface="微软雅黑" panose="020B0503020204020204" charset="-122"/>
+                <a:latin typeface="微软雅黑"/>
+                <a:ea typeface="微软雅黑"/>
+                <a:cs typeface="微软雅黑"/>
               </a:rPr>
               <a:t>→</a:t>
             </a:r>
-            <a:endParaRPr sz="2000" b="1" i="0">
-              <a:solidFill>
-                <a:srgbClr val="7FE3FF"/>
-              </a:solidFill>
-              <a:latin typeface="微软雅黑" panose="020B0503020204020204" charset="-122"/>
-              <a:ea typeface="微软雅黑" panose="020B0503020204020204" charset="-122"/>
-              <a:cs typeface="微软雅黑" panose="020B0503020204020204" charset="-122"/>
-            </a:endParaRPr>
           </a:p>
         </p:txBody>
       </p:sp>
@@ -13660,7 +12159,7 @@
           <a:noFill/>
         </p:spPr>
         <p:txBody>
-          <a:bodyPr wrap="square" lIns="0" tIns="0" rIns="0" bIns="0" anchor="t">
+          <a:bodyPr wrap="square" anchor="t" lIns="0" rIns="0" tIns="0" bIns="0">
             <a:spAutoFit/>
           </a:bodyPr>
           <a:lstStyle/>
@@ -13675,20 +12174,12 @@
                 <a:solidFill>
                   <a:srgbClr val="ECF7FF"/>
                 </a:solidFill>
-                <a:latin typeface="微软雅黑" panose="020B0503020204020204" charset="-122"/>
-                <a:ea typeface="微软雅黑" panose="020B0503020204020204" charset="-122"/>
-                <a:cs typeface="微软雅黑" panose="020B0503020204020204" charset="-122"/>
+                <a:latin typeface="微软雅黑"/>
+                <a:ea typeface="微软雅黑"/>
+                <a:cs typeface="微软雅黑"/>
               </a:rPr>
               <a:t>⑤ 展示</a:t>
             </a:r>
-            <a:endParaRPr sz="1500" b="1" i="0">
-              <a:solidFill>
-                <a:srgbClr val="ECF7FF"/>
-              </a:solidFill>
-              <a:latin typeface="微软雅黑" panose="020B0503020204020204" charset="-122"/>
-              <a:ea typeface="微软雅黑" panose="020B0503020204020204" charset="-122"/>
-              <a:cs typeface="微软雅黑" panose="020B0503020204020204" charset="-122"/>
-            </a:endParaRPr>
           </a:p>
           <a:p>
             <a:pPr algn="ctr">
@@ -13701,21 +12192,13 @@
                 <a:solidFill>
                   <a:srgbClr val="BBD4EC"/>
                 </a:solidFill>
-                <a:latin typeface="微软雅黑" panose="020B0503020204020204" charset="-122"/>
-                <a:ea typeface="微软雅黑" panose="020B0503020204020204" charset="-122"/>
-                <a:cs typeface="微软雅黑" panose="020B0503020204020204" charset="-122"/>
+                <a:latin typeface="微软雅黑"/>
+                <a:ea typeface="微软雅黑"/>
+                <a:cs typeface="微软雅黑"/>
               </a:rPr>
               <a:t>大屏 + 后台 + 报表
 同时拿到同一份数据</a:t>
             </a:r>
-            <a:endParaRPr sz="1050" b="0" i="0">
-              <a:solidFill>
-                <a:srgbClr val="BBD4EC"/>
-              </a:solidFill>
-              <a:latin typeface="微软雅黑" panose="020B0503020204020204" charset="-122"/>
-              <a:ea typeface="微软雅黑" panose="020B0503020204020204" charset="-122"/>
-              <a:cs typeface="微软雅黑" panose="020B0503020204020204" charset="-122"/>
-            </a:endParaRPr>
           </a:p>
         </p:txBody>
       </p:sp>
@@ -13784,7 +12267,7 @@
           <a:noFill/>
         </p:spPr>
         <p:txBody>
-          <a:bodyPr wrap="square" lIns="0" tIns="0" rIns="0" bIns="0" anchor="t">
+          <a:bodyPr wrap="square" anchor="t" lIns="0" rIns="0" tIns="0" bIns="0">
             <a:spAutoFit/>
           </a:bodyPr>
           <a:lstStyle/>
@@ -13799,20 +12282,12 @@
                 <a:solidFill>
                   <a:srgbClr val="BBD4EC"/>
                 </a:solidFill>
-                <a:latin typeface="微软雅黑" panose="020B0503020204020204" charset="-122"/>
-                <a:ea typeface="微软雅黑" panose="020B0503020204020204" charset="-122"/>
-                <a:cs typeface="微软雅黑" panose="020B0503020204020204" charset="-122"/>
+                <a:latin typeface="微软雅黑"/>
+                <a:ea typeface="微软雅黑"/>
+                <a:cs typeface="微软雅黑"/>
               </a:rPr>
               <a:t>蓝边 = 服务端在做的事</a:t>
             </a:r>
-            <a:endParaRPr sz="1100" b="1" i="0">
-              <a:solidFill>
-                <a:srgbClr val="BBD4EC"/>
-              </a:solidFill>
-              <a:latin typeface="微软雅黑" panose="020B0503020204020204" charset="-122"/>
-              <a:ea typeface="微软雅黑" panose="020B0503020204020204" charset="-122"/>
-              <a:cs typeface="微软雅黑" panose="020B0503020204020204" charset="-122"/>
-            </a:endParaRPr>
           </a:p>
           <a:p>
             <a:pPr algn="l">
@@ -13825,20 +12300,12 @@
                 <a:solidFill>
                   <a:srgbClr val="7E9EC4"/>
                 </a:solidFill>
-                <a:latin typeface="微软雅黑" panose="020B0503020204020204" charset="-122"/>
-                <a:ea typeface="微软雅黑" panose="020B0503020204020204" charset="-122"/>
-                <a:cs typeface="微软雅黑" panose="020B0503020204020204" charset="-122"/>
+                <a:latin typeface="微软雅黑"/>
+                <a:ea typeface="微软雅黑"/>
+                <a:cs typeface="微软雅黑"/>
               </a:rPr>
               <a:t>③④两步是关键：算在服务端，屏幕只负责画</a:t>
             </a:r>
-            <a:endParaRPr sz="950" b="0" i="0">
-              <a:solidFill>
-                <a:srgbClr val="7E9EC4"/>
-              </a:solidFill>
-              <a:latin typeface="微软雅黑" panose="020B0503020204020204" charset="-122"/>
-              <a:ea typeface="微软雅黑" panose="020B0503020204020204" charset="-122"/>
-              <a:cs typeface="微软雅黑" panose="020B0503020204020204" charset="-122"/>
-            </a:endParaRPr>
           </a:p>
         </p:txBody>
       </p:sp>
@@ -13907,7 +12374,7 @@
           <a:noFill/>
         </p:spPr>
         <p:txBody>
-          <a:bodyPr wrap="square" lIns="0" tIns="0" rIns="0" bIns="0" anchor="t">
+          <a:bodyPr wrap="square" anchor="t" lIns="0" rIns="0" tIns="0" bIns="0">
             <a:spAutoFit/>
           </a:bodyPr>
           <a:lstStyle/>
@@ -13922,20 +12389,12 @@
                 <a:solidFill>
                   <a:srgbClr val="BBD4EC"/>
                 </a:solidFill>
-                <a:latin typeface="微软雅黑" panose="020B0503020204020204" charset="-122"/>
-                <a:ea typeface="微软雅黑" panose="020B0503020204020204" charset="-122"/>
-                <a:cs typeface="微软雅黑" panose="020B0503020204020204" charset="-122"/>
+                <a:latin typeface="微软雅黑"/>
+                <a:ea typeface="微软雅黑"/>
+                <a:cs typeface="微软雅黑"/>
               </a:rPr>
               <a:t>实时刷新</a:t>
             </a:r>
-            <a:endParaRPr sz="1100" b="1" i="0">
-              <a:solidFill>
-                <a:srgbClr val="BBD4EC"/>
-              </a:solidFill>
-              <a:latin typeface="微软雅黑" panose="020B0503020204020204" charset="-122"/>
-              <a:ea typeface="微软雅黑" panose="020B0503020204020204" charset="-122"/>
-              <a:cs typeface="微软雅黑" panose="020B0503020204020204" charset="-122"/>
-            </a:endParaRPr>
           </a:p>
           <a:p>
             <a:pPr algn="l">
@@ -13948,20 +12407,12 @@
                 <a:solidFill>
                   <a:srgbClr val="7E9EC4"/>
                 </a:solidFill>
-                <a:latin typeface="微软雅黑" panose="020B0503020204020204" charset="-122"/>
-                <a:ea typeface="微软雅黑" panose="020B0503020204020204" charset="-122"/>
-                <a:cs typeface="微软雅黑" panose="020B0503020204020204" charset="-122"/>
+                <a:latin typeface="微软雅黑"/>
+                <a:ea typeface="微软雅黑"/>
+                <a:cs typeface="微软雅黑"/>
               </a:rPr>
               <a:t>有新数据就推送信号，大屏 1~3 秒内更新</a:t>
             </a:r>
-            <a:endParaRPr sz="950" b="0" i="0">
-              <a:solidFill>
-                <a:srgbClr val="7E9EC4"/>
-              </a:solidFill>
-              <a:latin typeface="微软雅黑" panose="020B0503020204020204" charset="-122"/>
-              <a:ea typeface="微软雅黑" panose="020B0503020204020204" charset="-122"/>
-              <a:cs typeface="微软雅黑" panose="020B0503020204020204" charset="-122"/>
-            </a:endParaRPr>
           </a:p>
         </p:txBody>
       </p:sp>
@@ -14030,7 +12481,7 @@
           <a:noFill/>
         </p:spPr>
         <p:txBody>
-          <a:bodyPr wrap="square" lIns="0" tIns="0" rIns="0" bIns="0" anchor="t">
+          <a:bodyPr wrap="square" anchor="t" lIns="0" rIns="0" tIns="0" bIns="0">
             <a:spAutoFit/>
           </a:bodyPr>
           <a:lstStyle/>
@@ -14045,20 +12496,12 @@
                 <a:solidFill>
                   <a:srgbClr val="BBD4EC"/>
                 </a:solidFill>
-                <a:latin typeface="微软雅黑" panose="020B0503020204020204" charset="-122"/>
-                <a:ea typeface="微软雅黑" panose="020B0503020204020204" charset="-122"/>
-                <a:cs typeface="微软雅黑" panose="020B0503020204020204" charset="-122"/>
+                <a:latin typeface="微软雅黑"/>
+                <a:ea typeface="微软雅黑"/>
+                <a:cs typeface="微软雅黑"/>
               </a:rPr>
               <a:t>兜底轮询</a:t>
             </a:r>
-            <a:endParaRPr sz="1100" b="1" i="0">
-              <a:solidFill>
-                <a:srgbClr val="BBD4EC"/>
-              </a:solidFill>
-              <a:latin typeface="微软雅黑" panose="020B0503020204020204" charset="-122"/>
-              <a:ea typeface="微软雅黑" panose="020B0503020204020204" charset="-122"/>
-              <a:cs typeface="微软雅黑" panose="020B0503020204020204" charset="-122"/>
-            </a:endParaRPr>
           </a:p>
           <a:p>
             <a:pPr algn="l">
@@ -14071,20 +12514,12 @@
                 <a:solidFill>
                   <a:srgbClr val="7E9EC4"/>
                 </a:solidFill>
-                <a:latin typeface="微软雅黑" panose="020B0503020204020204" charset="-122"/>
-                <a:ea typeface="微软雅黑" panose="020B0503020204020204" charset="-122"/>
-                <a:cs typeface="微软雅黑" panose="020B0503020204020204" charset="-122"/>
+                <a:latin typeface="微软雅黑"/>
+                <a:ea typeface="微软雅黑"/>
+                <a:cs typeface="微软雅黑"/>
               </a:rPr>
               <a:t>推送断了也不会卡死，按周期自己拉一次</a:t>
             </a:r>
-            <a:endParaRPr sz="950" b="0" i="0">
-              <a:solidFill>
-                <a:srgbClr val="7E9EC4"/>
-              </a:solidFill>
-              <a:latin typeface="微软雅黑" panose="020B0503020204020204" charset="-122"/>
-              <a:ea typeface="微软雅黑" panose="020B0503020204020204" charset="-122"/>
-              <a:cs typeface="微软雅黑" panose="020B0503020204020204" charset="-122"/>
-            </a:endParaRPr>
           </a:p>
         </p:txBody>
       </p:sp>
@@ -14153,7 +12588,7 @@
           <a:noFill/>
         </p:spPr>
         <p:txBody>
-          <a:bodyPr wrap="square" lIns="0" tIns="0" rIns="0" bIns="0" anchor="t">
+          <a:bodyPr wrap="square" anchor="t" lIns="0" rIns="0" tIns="0" bIns="0">
             <a:spAutoFit/>
           </a:bodyPr>
           <a:lstStyle/>
@@ -14168,20 +12603,12 @@
                 <a:solidFill>
                   <a:srgbClr val="BBD4EC"/>
                 </a:solidFill>
-                <a:latin typeface="微软雅黑" panose="020B0503020204020204" charset="-122"/>
-                <a:ea typeface="微软雅黑" panose="020B0503020204020204" charset="-122"/>
-                <a:cs typeface="微软雅黑" panose="020B0503020204020204" charset="-122"/>
+                <a:latin typeface="微软雅黑"/>
+                <a:ea typeface="微软雅黑"/>
+                <a:cs typeface="微软雅黑"/>
               </a:rPr>
               <a:t>月度归集</a:t>
             </a:r>
-            <a:endParaRPr sz="1100" b="1" i="0">
-              <a:solidFill>
-                <a:srgbClr val="BBD4EC"/>
-              </a:solidFill>
-              <a:latin typeface="微软雅黑" panose="020B0503020204020204" charset="-122"/>
-              <a:ea typeface="微软雅黑" panose="020B0503020204020204" charset="-122"/>
-              <a:cs typeface="微软雅黑" panose="020B0503020204020204" charset="-122"/>
-            </a:endParaRPr>
           </a:p>
           <a:p>
             <a:pPr algn="l">
@@ -14194,20 +12621,12 @@
                 <a:solidFill>
                   <a:srgbClr val="7E9EC4"/>
                 </a:solidFill>
-                <a:latin typeface="微软雅黑" panose="020B0503020204020204" charset="-122"/>
-                <a:ea typeface="微软雅黑" panose="020B0503020204020204" charset="-122"/>
-                <a:cs typeface="微软雅黑" panose="020B0503020204020204" charset="-122"/>
+                <a:latin typeface="微软雅黑"/>
+                <a:ea typeface="微软雅黑"/>
+                <a:cs typeface="微软雅黑"/>
               </a:rPr>
               <a:t>柱状图按「年-月」分组，跨年也不会乱</a:t>
             </a:r>
-            <a:endParaRPr sz="950" b="0" i="0">
-              <a:solidFill>
-                <a:srgbClr val="7E9EC4"/>
-              </a:solidFill>
-              <a:latin typeface="微软雅黑" panose="020B0503020204020204" charset="-122"/>
-              <a:ea typeface="微软雅黑" panose="020B0503020204020204" charset="-122"/>
-              <a:cs typeface="微软雅黑" panose="020B0503020204020204" charset="-122"/>
-            </a:endParaRPr>
           </a:p>
         </p:txBody>
       </p:sp>
@@ -14220,7 +12639,7 @@
 </file>
 
 <file path=ppt/slides/slide8.xml><?xml version="1.0" encoding="utf-8"?>
-<p:sld xmlns:a="http://schemas.openxmlformats.org/drawingml/2006/main" xmlns:r="http://schemas.openxmlformats.org/officeDocument/2006/relationships" xmlns:p="http://schemas.openxmlformats.org/presentationml/2006/main">
+<p:sld xmlns:a="http://schemas.openxmlformats.org/drawingml/2006/main" xmlns:p="http://schemas.openxmlformats.org/presentationml/2006/main" xmlns:r="http://schemas.openxmlformats.org/officeDocument/2006/relationships">
   <p:cSld>
     <p:spTree>
       <p:nvGrpSpPr>
@@ -14290,7 +12709,7 @@
           <a:noFill/>
         </p:spPr>
         <p:txBody>
-          <a:bodyPr wrap="square" lIns="0" tIns="0" rIns="0" bIns="0" anchor="t">
+          <a:bodyPr wrap="square" anchor="t" lIns="0" rIns="0" tIns="0" bIns="0">
             <a:spAutoFit/>
           </a:bodyPr>
           <a:lstStyle/>
@@ -14301,20 +12720,12 @@
                 <a:solidFill>
                   <a:srgbClr val="7FE3FF"/>
                 </a:solidFill>
-                <a:latin typeface="微软雅黑" panose="020B0503020204020204" charset="-122"/>
-                <a:ea typeface="微软雅黑" panose="020B0503020204020204" charset="-122"/>
-                <a:cs typeface="微软雅黑" panose="020B0503020204020204" charset="-122"/>
+                <a:latin typeface="微软雅黑"/>
+                <a:ea typeface="微软雅黑"/>
+                <a:cs typeface="微软雅黑"/>
               </a:rPr>
               <a:t>02 · 怎么做的</a:t>
             </a:r>
-            <a:endParaRPr sz="1150" b="1" i="0">
-              <a:solidFill>
-                <a:srgbClr val="7FE3FF"/>
-              </a:solidFill>
-              <a:latin typeface="微软雅黑" panose="020B0503020204020204" charset="-122"/>
-              <a:ea typeface="微软雅黑" panose="020B0503020204020204" charset="-122"/>
-              <a:cs typeface="微软雅黑" panose="020B0503020204020204" charset="-122"/>
-            </a:endParaRPr>
           </a:p>
         </p:txBody>
       </p:sp>
@@ -14335,7 +12746,7 @@
           <a:noFill/>
         </p:spPr>
         <p:txBody>
-          <a:bodyPr wrap="square" lIns="0" tIns="0" rIns="0" bIns="0" anchor="t">
+          <a:bodyPr wrap="square" anchor="t" lIns="0" rIns="0" tIns="0" bIns="0">
             <a:spAutoFit/>
           </a:bodyPr>
           <a:lstStyle/>
@@ -14346,20 +12757,12 @@
                 <a:solidFill>
                   <a:srgbClr val="ECF7FF"/>
                 </a:solidFill>
-                <a:latin typeface="微软雅黑" panose="020B0503020204020204" charset="-122"/>
-                <a:ea typeface="微软雅黑" panose="020B0503020204020204" charset="-122"/>
-                <a:cs typeface="微软雅黑" panose="020B0503020204020204" charset="-122"/>
+                <a:latin typeface="微软雅黑"/>
+                <a:ea typeface="微软雅黑"/>
+                <a:cs typeface="微软雅黑"/>
               </a:rPr>
               <a:t>系统分四层，各管各的</a:t>
             </a:r>
-            <a:endParaRPr sz="2700" b="1" i="0">
-              <a:solidFill>
-                <a:srgbClr val="ECF7FF"/>
-              </a:solidFill>
-              <a:latin typeface="微软雅黑" panose="020B0503020204020204" charset="-122"/>
-              <a:ea typeface="微软雅黑" panose="020B0503020204020204" charset="-122"/>
-              <a:cs typeface="微软雅黑" panose="020B0503020204020204" charset="-122"/>
-            </a:endParaRPr>
           </a:p>
         </p:txBody>
       </p:sp>
@@ -14380,7 +12783,7 @@
           <a:noFill/>
         </p:spPr>
         <p:txBody>
-          <a:bodyPr wrap="square" lIns="0" tIns="0" rIns="0" bIns="0" anchor="t">
+          <a:bodyPr wrap="square" anchor="t" lIns="0" rIns="0" tIns="0" bIns="0">
             <a:spAutoFit/>
           </a:bodyPr>
           <a:lstStyle/>
@@ -14391,20 +12794,12 @@
                 <a:solidFill>
                   <a:srgbClr val="7E9EC4"/>
                 </a:solidFill>
-                <a:latin typeface="微软雅黑" panose="020B0503020204020204" charset="-122"/>
-                <a:ea typeface="微软雅黑" panose="020B0503020204020204" charset="-122"/>
-                <a:cs typeface="微软雅黑" panose="020B0503020204020204" charset="-122"/>
+                <a:latin typeface="微软雅黑"/>
+                <a:ea typeface="微软雅黑"/>
+                <a:cs typeface="微软雅黑"/>
               </a:rPr>
               <a:t>急救绿道 · 8 / 13</a:t>
             </a:r>
-            <a:endParaRPr sz="1000" b="0" i="0">
-              <a:solidFill>
-                <a:srgbClr val="7E9EC4"/>
-              </a:solidFill>
-              <a:latin typeface="微软雅黑" panose="020B0503020204020204" charset="-122"/>
-              <a:ea typeface="微软雅黑" panose="020B0503020204020204" charset="-122"/>
-              <a:cs typeface="微软雅黑" panose="020B0503020204020204" charset="-122"/>
-            </a:endParaRPr>
           </a:p>
         </p:txBody>
       </p:sp>
@@ -14473,7 +12868,7 @@
           <a:noFill/>
         </p:spPr>
         <p:txBody>
-          <a:bodyPr wrap="square" lIns="0" tIns="0" rIns="0" bIns="0" anchor="t">
+          <a:bodyPr wrap="square" anchor="t" lIns="0" rIns="0" tIns="0" bIns="0">
             <a:spAutoFit/>
           </a:bodyPr>
           <a:lstStyle/>
@@ -14484,20 +12879,12 @@
                 <a:solidFill>
                   <a:srgbClr val="ECF7FF"/>
                 </a:solidFill>
-                <a:latin typeface="微软雅黑" panose="020B0503020204020204" charset="-122"/>
-                <a:ea typeface="微软雅黑" panose="020B0503020204020204" charset="-122"/>
-                <a:cs typeface="微软雅黑" panose="020B0503020204020204" charset="-122"/>
+                <a:latin typeface="微软雅黑"/>
+                <a:ea typeface="微软雅黑"/>
+                <a:cs typeface="微软雅黑"/>
               </a:rPr>
               <a:t>使用者</a:t>
             </a:r>
-            <a:endParaRPr sz="1200" b="1" i="0">
-              <a:solidFill>
-                <a:srgbClr val="ECF7FF"/>
-              </a:solidFill>
-              <a:latin typeface="微软雅黑" panose="020B0503020204020204" charset="-122"/>
-              <a:ea typeface="微软雅黑" panose="020B0503020204020204" charset="-122"/>
-              <a:cs typeface="微软雅黑" panose="020B0503020204020204" charset="-122"/>
-            </a:endParaRPr>
           </a:p>
         </p:txBody>
       </p:sp>
@@ -14566,7 +12953,7 @@
           <a:noFill/>
         </p:spPr>
         <p:txBody>
-          <a:bodyPr wrap="square" lIns="0" tIns="0" rIns="0" bIns="0" anchor="t">
+          <a:bodyPr wrap="square" anchor="t" lIns="0" rIns="0" tIns="0" bIns="0">
             <a:spAutoFit/>
           </a:bodyPr>
           <a:lstStyle/>
@@ -14581,20 +12968,12 @@
                 <a:solidFill>
                   <a:srgbClr val="BBD4EC"/>
                 </a:solidFill>
-                <a:latin typeface="微软雅黑" panose="020B0503020204020204" charset="-122"/>
-                <a:ea typeface="微软雅黑" panose="020B0503020204020204" charset="-122"/>
-                <a:cs typeface="微软雅黑" panose="020B0503020204020204" charset="-122"/>
+                <a:latin typeface="微软雅黑"/>
+                <a:ea typeface="微软雅黑"/>
+                <a:cs typeface="微软雅黑"/>
               </a:rPr>
               <a:t>👩‍⚕️</a:t>
             </a:r>
-            <a:endParaRPr sz="1500" b="0" i="0">
-              <a:solidFill>
-                <a:srgbClr val="BBD4EC"/>
-              </a:solidFill>
-              <a:latin typeface="微软雅黑" panose="020B0503020204020204" charset="-122"/>
-              <a:ea typeface="微软雅黑" panose="020B0503020204020204" charset="-122"/>
-              <a:cs typeface="微软雅黑" panose="020B0503020204020204" charset="-122"/>
-            </a:endParaRPr>
           </a:p>
           <a:p>
             <a:pPr algn="ctr">
@@ -14607,20 +12986,12 @@
                 <a:solidFill>
                   <a:srgbClr val="BBD4EC"/>
                 </a:solidFill>
-                <a:latin typeface="微软雅黑" panose="020B0503020204020204" charset="-122"/>
-                <a:ea typeface="微软雅黑" panose="020B0503020204020204" charset="-122"/>
-                <a:cs typeface="微软雅黑" panose="020B0503020204020204" charset="-122"/>
+                <a:latin typeface="微软雅黑"/>
+                <a:ea typeface="微软雅黑"/>
+                <a:cs typeface="微软雅黑"/>
               </a:rPr>
               <a:t>医生 / 护士</a:t>
             </a:r>
-            <a:endParaRPr sz="1250" b="1" i="0">
-              <a:solidFill>
-                <a:srgbClr val="BBD4EC"/>
-              </a:solidFill>
-              <a:latin typeface="微软雅黑" panose="020B0503020204020204" charset="-122"/>
-              <a:ea typeface="微软雅黑" panose="020B0503020204020204" charset="-122"/>
-              <a:cs typeface="微软雅黑" panose="020B0503020204020204" charset="-122"/>
-            </a:endParaRPr>
           </a:p>
           <a:p>
             <a:pPr algn="ctr">
@@ -14633,20 +13004,12 @@
                 <a:solidFill>
                   <a:srgbClr val="7E9EC4"/>
                 </a:solidFill>
-                <a:latin typeface="微软雅黑" panose="020B0503020204020204" charset="-122"/>
-                <a:ea typeface="微软雅黑" panose="020B0503020204020204" charset="-122"/>
-                <a:cs typeface="微软雅黑" panose="020B0503020204020204" charset="-122"/>
+                <a:latin typeface="微软雅黑"/>
+                <a:ea typeface="微软雅黑"/>
+                <a:cs typeface="微软雅黑"/>
               </a:rPr>
               <a:t>录入与跟进</a:t>
             </a:r>
-            <a:endParaRPr sz="950" b="0" i="0">
-              <a:solidFill>
-                <a:srgbClr val="7E9EC4"/>
-              </a:solidFill>
-              <a:latin typeface="微软雅黑" panose="020B0503020204020204" charset="-122"/>
-              <a:ea typeface="微软雅黑" panose="020B0503020204020204" charset="-122"/>
-              <a:cs typeface="微软雅黑" panose="020B0503020204020204" charset="-122"/>
-            </a:endParaRPr>
           </a:p>
         </p:txBody>
       </p:sp>
@@ -14715,7 +13078,7 @@
           <a:noFill/>
         </p:spPr>
         <p:txBody>
-          <a:bodyPr wrap="square" lIns="0" tIns="0" rIns="0" bIns="0" anchor="t">
+          <a:bodyPr wrap="square" anchor="t" lIns="0" rIns="0" tIns="0" bIns="0">
             <a:spAutoFit/>
           </a:bodyPr>
           <a:lstStyle/>
@@ -14730,20 +13093,12 @@
                 <a:solidFill>
                   <a:srgbClr val="BBD4EC"/>
                 </a:solidFill>
-                <a:latin typeface="微软雅黑" panose="020B0503020204020204" charset="-122"/>
-                <a:ea typeface="微软雅黑" panose="020B0503020204020204" charset="-122"/>
-                <a:cs typeface="微软雅黑" panose="020B0503020204020204" charset="-122"/>
+                <a:latin typeface="微软雅黑"/>
+                <a:ea typeface="微软雅黑"/>
+                <a:cs typeface="微软雅黑"/>
               </a:rPr>
               <a:t>📋</a:t>
             </a:r>
-            <a:endParaRPr sz="1500" b="0" i="0">
-              <a:solidFill>
-                <a:srgbClr val="BBD4EC"/>
-              </a:solidFill>
-              <a:latin typeface="微软雅黑" panose="020B0503020204020204" charset="-122"/>
-              <a:ea typeface="微软雅黑" panose="020B0503020204020204" charset="-122"/>
-              <a:cs typeface="微软雅黑" panose="020B0503020204020204" charset="-122"/>
-            </a:endParaRPr>
           </a:p>
           <a:p>
             <a:pPr algn="ctr">
@@ -14756,20 +13111,12 @@
                 <a:solidFill>
                   <a:srgbClr val="BBD4EC"/>
                 </a:solidFill>
-                <a:latin typeface="微软雅黑" panose="020B0503020204020204" charset="-122"/>
-                <a:ea typeface="微软雅黑" panose="020B0503020204020204" charset="-122"/>
-                <a:cs typeface="微软雅黑" panose="020B0503020204020204" charset="-122"/>
+                <a:latin typeface="微软雅黑"/>
+                <a:ea typeface="微软雅黑"/>
+                <a:cs typeface="微软雅黑"/>
               </a:rPr>
               <a:t>质控 / 领导</a:t>
             </a:r>
-            <a:endParaRPr sz="1250" b="1" i="0">
-              <a:solidFill>
-                <a:srgbClr val="BBD4EC"/>
-              </a:solidFill>
-              <a:latin typeface="微软雅黑" panose="020B0503020204020204" charset="-122"/>
-              <a:ea typeface="微软雅黑" panose="020B0503020204020204" charset="-122"/>
-              <a:cs typeface="微软雅黑" panose="020B0503020204020204" charset="-122"/>
-            </a:endParaRPr>
           </a:p>
           <a:p>
             <a:pPr algn="ctr">
@@ -14782,20 +13129,12 @@
                 <a:solidFill>
                   <a:srgbClr val="7E9EC4"/>
                 </a:solidFill>
-                <a:latin typeface="微软雅黑" panose="020B0503020204020204" charset="-122"/>
-                <a:ea typeface="微软雅黑" panose="020B0503020204020204" charset="-122"/>
-                <a:cs typeface="微软雅黑" panose="020B0503020204020204" charset="-122"/>
+                <a:latin typeface="微软雅黑"/>
+                <a:ea typeface="微软雅黑"/>
+                <a:cs typeface="微软雅黑"/>
               </a:rPr>
               <a:t>看报表与指标</a:t>
             </a:r>
-            <a:endParaRPr sz="950" b="0" i="0">
-              <a:solidFill>
-                <a:srgbClr val="7E9EC4"/>
-              </a:solidFill>
-              <a:latin typeface="微软雅黑" panose="020B0503020204020204" charset="-122"/>
-              <a:ea typeface="微软雅黑" panose="020B0503020204020204" charset="-122"/>
-              <a:cs typeface="微软雅黑" panose="020B0503020204020204" charset="-122"/>
-            </a:endParaRPr>
           </a:p>
         </p:txBody>
       </p:sp>
@@ -14864,7 +13203,7 @@
           <a:noFill/>
         </p:spPr>
         <p:txBody>
-          <a:bodyPr wrap="square" lIns="0" tIns="0" rIns="0" bIns="0" anchor="t">
+          <a:bodyPr wrap="square" anchor="t" lIns="0" rIns="0" tIns="0" bIns="0">
             <a:spAutoFit/>
           </a:bodyPr>
           <a:lstStyle/>
@@ -14879,20 +13218,12 @@
                 <a:solidFill>
                   <a:srgbClr val="BBD4EC"/>
                 </a:solidFill>
-                <a:latin typeface="微软雅黑" panose="020B0503020204020204" charset="-122"/>
-                <a:ea typeface="微软雅黑" panose="020B0503020204020204" charset="-122"/>
-                <a:cs typeface="微软雅黑" panose="020B0503020204020204" charset="-122"/>
+                <a:latin typeface="微软雅黑"/>
+                <a:ea typeface="微软雅黑"/>
+                <a:cs typeface="微软雅黑"/>
               </a:rPr>
               <a:t>📺</a:t>
             </a:r>
-            <a:endParaRPr sz="1500" b="0" i="0">
-              <a:solidFill>
-                <a:srgbClr val="BBD4EC"/>
-              </a:solidFill>
-              <a:latin typeface="微软雅黑" panose="020B0503020204020204" charset="-122"/>
-              <a:ea typeface="微软雅黑" panose="020B0503020204020204" charset="-122"/>
-              <a:cs typeface="微软雅黑" panose="020B0503020204020204" charset="-122"/>
-            </a:endParaRPr>
           </a:p>
           <a:p>
             <a:pPr algn="ctr">
@@ -14905,20 +13236,12 @@
                 <a:solidFill>
                   <a:srgbClr val="BBD4EC"/>
                 </a:solidFill>
-                <a:latin typeface="微软雅黑" panose="020B0503020204020204" charset="-122"/>
-                <a:ea typeface="微软雅黑" panose="020B0503020204020204" charset="-122"/>
-                <a:cs typeface="微软雅黑" panose="020B0503020204020204" charset="-122"/>
+                <a:latin typeface="微软雅黑"/>
+                <a:ea typeface="微软雅黑"/>
+                <a:cs typeface="微软雅黑"/>
               </a:rPr>
               <a:t>大屏终端</a:t>
             </a:r>
-            <a:endParaRPr sz="1250" b="1" i="0">
-              <a:solidFill>
-                <a:srgbClr val="BBD4EC"/>
-              </a:solidFill>
-              <a:latin typeface="微软雅黑" panose="020B0503020204020204" charset="-122"/>
-              <a:ea typeface="微软雅黑" panose="020B0503020204020204" charset="-122"/>
-              <a:cs typeface="微软雅黑" panose="020B0503020204020204" charset="-122"/>
-            </a:endParaRPr>
           </a:p>
           <a:p>
             <a:pPr algn="ctr">
@@ -14931,20 +13254,12 @@
                 <a:solidFill>
                   <a:srgbClr val="7E9EC4"/>
                 </a:solidFill>
-                <a:latin typeface="微软雅黑" panose="020B0503020204020204" charset="-122"/>
-                <a:ea typeface="微软雅黑" panose="020B0503020204020204" charset="-122"/>
-                <a:cs typeface="微软雅黑" panose="020B0503020204020204" charset="-122"/>
+                <a:latin typeface="微软雅黑"/>
+                <a:ea typeface="微软雅黑"/>
+                <a:cs typeface="微软雅黑"/>
               </a:rPr>
               <a:t>只读展示</a:t>
             </a:r>
-            <a:endParaRPr sz="950" b="0" i="0">
-              <a:solidFill>
-                <a:srgbClr val="7E9EC4"/>
-              </a:solidFill>
-              <a:latin typeface="微软雅黑" panose="020B0503020204020204" charset="-122"/>
-              <a:ea typeface="微软雅黑" panose="020B0503020204020204" charset="-122"/>
-              <a:cs typeface="微软雅黑" panose="020B0503020204020204" charset="-122"/>
-            </a:endParaRPr>
           </a:p>
         </p:txBody>
       </p:sp>
@@ -15013,7 +13328,7 @@
           <a:noFill/>
         </p:spPr>
         <p:txBody>
-          <a:bodyPr wrap="square" lIns="0" tIns="0" rIns="0" bIns="0" anchor="t">
+          <a:bodyPr wrap="square" anchor="t" lIns="0" rIns="0" tIns="0" bIns="0">
             <a:spAutoFit/>
           </a:bodyPr>
           <a:lstStyle/>
@@ -15024,20 +13339,12 @@
                 <a:solidFill>
                   <a:srgbClr val="ECF7FF"/>
                 </a:solidFill>
-                <a:latin typeface="微软雅黑" panose="020B0503020204020204" charset="-122"/>
-                <a:ea typeface="微软雅黑" panose="020B0503020204020204" charset="-122"/>
-                <a:cs typeface="微软雅黑" panose="020B0503020204020204" charset="-122"/>
+                <a:latin typeface="微软雅黑"/>
+                <a:ea typeface="微软雅黑"/>
+                <a:cs typeface="微软雅黑"/>
               </a:rPr>
               <a:t>前端</a:t>
             </a:r>
-            <a:endParaRPr sz="1200" b="1" i="0">
-              <a:solidFill>
-                <a:srgbClr val="ECF7FF"/>
-              </a:solidFill>
-              <a:latin typeface="微软雅黑" panose="020B0503020204020204" charset="-122"/>
-              <a:ea typeface="微软雅黑" panose="020B0503020204020204" charset="-122"/>
-              <a:cs typeface="微软雅黑" panose="020B0503020204020204" charset="-122"/>
-            </a:endParaRPr>
           </a:p>
         </p:txBody>
       </p:sp>
@@ -15141,7 +13448,7 @@
         </p:nvSpPr>
         <p:spPr>
           <a:xfrm>
-            <a:off x="1911095" y="2505202"/>
+            <a:off x="1911095" y="2587752"/>
             <a:ext cx="4591659" cy="475488"/>
           </a:xfrm>
           <a:prstGeom prst="rect">
@@ -15150,7 +13457,7 @@
           <a:noFill/>
         </p:spPr>
         <p:txBody>
-          <a:bodyPr wrap="square" lIns="0" tIns="0" rIns="0" bIns="0" anchor="t">
+          <a:bodyPr wrap="square" anchor="t" lIns="0" rIns="0" tIns="0" bIns="0">
             <a:spAutoFit/>
           </a:bodyPr>
           <a:lstStyle/>
@@ -15165,20 +13472,12 @@
                 <a:solidFill>
                   <a:srgbClr val="BBD4EC"/>
                 </a:solidFill>
-                <a:latin typeface="微软雅黑" panose="020B0503020204020204" charset="-122"/>
-                <a:ea typeface="微软雅黑" panose="020B0503020204020204" charset="-122"/>
-                <a:cs typeface="微软雅黑" panose="020B0503020204020204" charset="-122"/>
+                <a:latin typeface="微软雅黑"/>
+                <a:ea typeface="微软雅黑"/>
+                <a:cs typeface="微软雅黑"/>
               </a:rPr>
               <a:t>🖥️</a:t>
             </a:r>
-            <a:endParaRPr sz="1500" b="0" i="0">
-              <a:solidFill>
-                <a:srgbClr val="BBD4EC"/>
-              </a:solidFill>
-              <a:latin typeface="微软雅黑" panose="020B0503020204020204" charset="-122"/>
-              <a:ea typeface="微软雅黑" panose="020B0503020204020204" charset="-122"/>
-              <a:cs typeface="微软雅黑" panose="020B0503020204020204" charset="-122"/>
-            </a:endParaRPr>
           </a:p>
           <a:p>
             <a:pPr algn="ctr">
@@ -15191,20 +13490,12 @@
                 <a:solidFill>
                   <a:srgbClr val="BBD4EC"/>
                 </a:solidFill>
-                <a:latin typeface="微软雅黑" panose="020B0503020204020204" charset="-122"/>
-                <a:ea typeface="微软雅黑" panose="020B0503020204020204" charset="-122"/>
-                <a:cs typeface="微软雅黑" panose="020B0503020204020204" charset="-122"/>
+                <a:latin typeface="微软雅黑"/>
+                <a:ea typeface="微软雅黑"/>
+                <a:cs typeface="微软雅黑"/>
               </a:rPr>
               <a:t>大屏端</a:t>
             </a:r>
-            <a:endParaRPr sz="1250" b="1" i="0">
-              <a:solidFill>
-                <a:srgbClr val="BBD4EC"/>
-              </a:solidFill>
-              <a:latin typeface="微软雅黑" panose="020B0503020204020204" charset="-122"/>
-              <a:ea typeface="微软雅黑" panose="020B0503020204020204" charset="-122"/>
-              <a:cs typeface="微软雅黑" panose="020B0503020204020204" charset="-122"/>
-            </a:endParaRPr>
           </a:p>
           <a:p>
             <a:pPr algn="ctr">
@@ -15217,20 +13508,12 @@
                 <a:solidFill>
                   <a:srgbClr val="7E9EC4"/>
                 </a:solidFill>
-                <a:latin typeface="微软雅黑" panose="020B0503020204020204" charset="-122"/>
-                <a:ea typeface="微软雅黑" panose="020B0503020204020204" charset="-122"/>
-                <a:cs typeface="微软雅黑" panose="020B0503020204020204" charset="-122"/>
+                <a:latin typeface="微软雅黑"/>
+                <a:ea typeface="微软雅黑"/>
+                <a:cs typeface="微软雅黑"/>
               </a:rPr>
               <a:t>Vue 3 + ECharts，手写 HUD 界面</a:t>
             </a:r>
-            <a:endParaRPr sz="950" b="0" i="0">
-              <a:solidFill>
-                <a:srgbClr val="7E9EC4"/>
-              </a:solidFill>
-              <a:latin typeface="微软雅黑" panose="020B0503020204020204" charset="-122"/>
-              <a:ea typeface="微软雅黑" panose="020B0503020204020204" charset="-122"/>
-              <a:cs typeface="微软雅黑" panose="020B0503020204020204" charset="-122"/>
-            </a:endParaRPr>
           </a:p>
         </p:txBody>
       </p:sp>
@@ -15334,7 +13617,7 @@
         </p:nvSpPr>
         <p:spPr>
           <a:xfrm>
-            <a:off x="6905091" y="2505202"/>
+            <a:off x="6905091" y="2587752"/>
             <a:ext cx="4591659" cy="475488"/>
           </a:xfrm>
           <a:prstGeom prst="rect">
@@ -15343,7 +13626,7 @@
           <a:noFill/>
         </p:spPr>
         <p:txBody>
-          <a:bodyPr wrap="square" lIns="0" tIns="0" rIns="0" bIns="0" anchor="t">
+          <a:bodyPr wrap="square" anchor="t" lIns="0" rIns="0" tIns="0" bIns="0">
             <a:spAutoFit/>
           </a:bodyPr>
           <a:lstStyle/>
@@ -15358,20 +13641,12 @@
                 <a:solidFill>
                   <a:srgbClr val="BBD4EC"/>
                 </a:solidFill>
-                <a:latin typeface="微软雅黑" panose="020B0503020204020204" charset="-122"/>
-                <a:ea typeface="微软雅黑" panose="020B0503020204020204" charset="-122"/>
-                <a:cs typeface="微软雅黑" panose="020B0503020204020204" charset="-122"/>
+                <a:latin typeface="微软雅黑"/>
+                <a:ea typeface="微软雅黑"/>
+                <a:cs typeface="微软雅黑"/>
               </a:rPr>
               <a:t>🗂️</a:t>
             </a:r>
-            <a:endParaRPr sz="1500" b="0" i="0">
-              <a:solidFill>
-                <a:srgbClr val="BBD4EC"/>
-              </a:solidFill>
-              <a:latin typeface="微软雅黑" panose="020B0503020204020204" charset="-122"/>
-              <a:ea typeface="微软雅黑" panose="020B0503020204020204" charset="-122"/>
-              <a:cs typeface="微软雅黑" panose="020B0503020204020204" charset="-122"/>
-            </a:endParaRPr>
           </a:p>
           <a:p>
             <a:pPr algn="ctr">
@@ -15384,20 +13659,12 @@
                 <a:solidFill>
                   <a:srgbClr val="BBD4EC"/>
                 </a:solidFill>
-                <a:latin typeface="微软雅黑" panose="020B0503020204020204" charset="-122"/>
-                <a:ea typeface="微软雅黑" panose="020B0503020204020204" charset="-122"/>
-                <a:cs typeface="微软雅黑" panose="020B0503020204020204" charset="-122"/>
+                <a:latin typeface="微软雅黑"/>
+                <a:ea typeface="微软雅黑"/>
+                <a:cs typeface="微软雅黑"/>
               </a:rPr>
               <a:t>后台端</a:t>
             </a:r>
-            <a:endParaRPr sz="1250" b="1" i="0">
-              <a:solidFill>
-                <a:srgbClr val="BBD4EC"/>
-              </a:solidFill>
-              <a:latin typeface="微软雅黑" panose="020B0503020204020204" charset="-122"/>
-              <a:ea typeface="微软雅黑" panose="020B0503020204020204" charset="-122"/>
-              <a:cs typeface="微软雅黑" panose="020B0503020204020204" charset="-122"/>
-            </a:endParaRPr>
           </a:p>
           <a:p>
             <a:pPr algn="ctr">
@@ -15410,20 +13677,12 @@
                 <a:solidFill>
                   <a:srgbClr val="7E9EC4"/>
                 </a:solidFill>
-                <a:latin typeface="微软雅黑" panose="020B0503020204020204" charset="-122"/>
-                <a:ea typeface="微软雅黑" panose="020B0503020204020204" charset="-122"/>
-                <a:cs typeface="微软雅黑" panose="020B0503020204020204" charset="-122"/>
+                <a:latin typeface="微软雅黑"/>
+                <a:ea typeface="微软雅黑"/>
+                <a:cs typeface="微软雅黑"/>
               </a:rPr>
               <a:t>Vue 3 + Element Plus，13 个页面</a:t>
             </a:r>
-            <a:endParaRPr sz="950" b="0" i="0">
-              <a:solidFill>
-                <a:srgbClr val="7E9EC4"/>
-              </a:solidFill>
-              <a:latin typeface="微软雅黑" panose="020B0503020204020204" charset="-122"/>
-              <a:ea typeface="微软雅黑" panose="020B0503020204020204" charset="-122"/>
-              <a:cs typeface="微软雅黑" panose="020B0503020204020204" charset="-122"/>
-            </a:endParaRPr>
           </a:p>
         </p:txBody>
       </p:sp>
@@ -15492,7 +13751,7 @@
           <a:noFill/>
         </p:spPr>
         <p:txBody>
-          <a:bodyPr wrap="square" lIns="0" tIns="0" rIns="0" bIns="0" anchor="t">
+          <a:bodyPr wrap="square" anchor="t" lIns="0" rIns="0" tIns="0" bIns="0">
             <a:spAutoFit/>
           </a:bodyPr>
           <a:lstStyle/>
@@ -15503,20 +13762,12 @@
                 <a:solidFill>
                   <a:srgbClr val="ECF7FF"/>
                 </a:solidFill>
-                <a:latin typeface="微软雅黑" panose="020B0503020204020204" charset="-122"/>
-                <a:ea typeface="微软雅黑" panose="020B0503020204020204" charset="-122"/>
-                <a:cs typeface="微软雅黑" panose="020B0503020204020204" charset="-122"/>
+                <a:latin typeface="微软雅黑"/>
+                <a:ea typeface="微软雅黑"/>
+                <a:cs typeface="微软雅黑"/>
               </a:rPr>
               <a:t>后端</a:t>
             </a:r>
-            <a:endParaRPr sz="1200" b="1" i="0">
-              <a:solidFill>
-                <a:srgbClr val="ECF7FF"/>
-              </a:solidFill>
-              <a:latin typeface="微软雅黑" panose="020B0503020204020204" charset="-122"/>
-              <a:ea typeface="微软雅黑" panose="020B0503020204020204" charset="-122"/>
-              <a:cs typeface="微软雅黑" panose="020B0503020204020204" charset="-122"/>
-            </a:endParaRPr>
           </a:p>
         </p:txBody>
       </p:sp>
@@ -15629,7 +13880,7 @@
           <a:noFill/>
         </p:spPr>
         <p:txBody>
-          <a:bodyPr wrap="square" lIns="0" tIns="0" rIns="0" bIns="0" anchor="t">
+          <a:bodyPr wrap="square" anchor="t" lIns="0" rIns="0" tIns="0" bIns="0">
             <a:spAutoFit/>
           </a:bodyPr>
           <a:lstStyle/>
@@ -15644,20 +13895,12 @@
                 <a:solidFill>
                   <a:srgbClr val="BBD4EC"/>
                 </a:solidFill>
-                <a:latin typeface="微软雅黑" panose="020B0503020204020204" charset="-122"/>
-                <a:ea typeface="微软雅黑" panose="020B0503020204020204" charset="-122"/>
-                <a:cs typeface="微软雅黑" panose="020B0503020204020204" charset="-122"/>
+                <a:latin typeface="微软雅黑"/>
+                <a:ea typeface="微软雅黑"/>
+                <a:cs typeface="微软雅黑"/>
               </a:rPr>
               <a:t>登录与权限</a:t>
             </a:r>
-            <a:endParaRPr sz="1250" b="1" i="0">
-              <a:solidFill>
-                <a:srgbClr val="BBD4EC"/>
-              </a:solidFill>
-              <a:latin typeface="微软雅黑" panose="020B0503020204020204" charset="-122"/>
-              <a:ea typeface="微软雅黑" panose="020B0503020204020204" charset="-122"/>
-              <a:cs typeface="微软雅黑" panose="020B0503020204020204" charset="-122"/>
-            </a:endParaRPr>
           </a:p>
           <a:p>
             <a:pPr algn="ctr">
@@ -15670,20 +13913,12 @@
                 <a:solidFill>
                   <a:srgbClr val="7E9EC4"/>
                 </a:solidFill>
-                <a:latin typeface="微软雅黑" panose="020B0503020204020204" charset="-122"/>
-                <a:ea typeface="微软雅黑" panose="020B0503020204020204" charset="-122"/>
-                <a:cs typeface="微软雅黑" panose="020B0503020204020204" charset="-122"/>
+                <a:latin typeface="微软雅黑"/>
+                <a:ea typeface="微软雅黑"/>
+                <a:cs typeface="微软雅黑"/>
               </a:rPr>
               <a:t>7 种角色、登录令牌、操作留痕</a:t>
             </a:r>
-            <a:endParaRPr sz="950" b="0" i="0">
-              <a:solidFill>
-                <a:srgbClr val="7E9EC4"/>
-              </a:solidFill>
-              <a:latin typeface="微软雅黑" panose="020B0503020204020204" charset="-122"/>
-              <a:ea typeface="微软雅黑" panose="020B0503020204020204" charset="-122"/>
-              <a:cs typeface="微软雅黑" panose="020B0503020204020204" charset="-122"/>
-            </a:endParaRPr>
           </a:p>
         </p:txBody>
       </p:sp>
@@ -15796,7 +14031,7 @@
           <a:noFill/>
         </p:spPr>
         <p:txBody>
-          <a:bodyPr wrap="square" lIns="0" tIns="0" rIns="0" bIns="0" anchor="t">
+          <a:bodyPr wrap="square" anchor="t" lIns="0" rIns="0" tIns="0" bIns="0">
             <a:spAutoFit/>
           </a:bodyPr>
           <a:lstStyle/>
@@ -15811,20 +14046,12 @@
                 <a:solidFill>
                   <a:srgbClr val="BBD4EC"/>
                 </a:solidFill>
-                <a:latin typeface="微软雅黑" panose="020B0503020204020204" charset="-122"/>
-                <a:ea typeface="微软雅黑" panose="020B0503020204020204" charset="-122"/>
-                <a:cs typeface="微软雅黑" panose="020B0503020204020204" charset="-122"/>
+                <a:latin typeface="微软雅黑"/>
+                <a:ea typeface="微软雅黑"/>
+                <a:cs typeface="微软雅黑"/>
               </a:rPr>
               <a:t>业务接口</a:t>
             </a:r>
-            <a:endParaRPr sz="1250" b="1" i="0">
-              <a:solidFill>
-                <a:srgbClr val="BBD4EC"/>
-              </a:solidFill>
-              <a:latin typeface="微软雅黑" panose="020B0503020204020204" charset="-122"/>
-              <a:ea typeface="微软雅黑" panose="020B0503020204020204" charset="-122"/>
-              <a:cs typeface="微软雅黑" panose="020B0503020204020204" charset="-122"/>
-            </a:endParaRPr>
           </a:p>
           <a:p>
             <a:pPr algn="ctr">
@@ -15837,20 +14064,12 @@
                 <a:solidFill>
                   <a:srgbClr val="7E9EC4"/>
                 </a:solidFill>
-                <a:latin typeface="微软雅黑" panose="020B0503020204020204" charset="-122"/>
-                <a:ea typeface="微软雅黑" panose="020B0503020204020204" charset="-122"/>
-                <a:cs typeface="微软雅黑" panose="020B0503020204020204" charset="-122"/>
+                <a:latin typeface="微软雅黑"/>
+                <a:ea typeface="微软雅黑"/>
+                <a:cs typeface="微软雅黑"/>
               </a:rPr>
               <a:t>病例 / 患者 / 字典 / 组织 / 审计</a:t>
             </a:r>
-            <a:endParaRPr sz="950" b="0" i="0">
-              <a:solidFill>
-                <a:srgbClr val="7E9EC4"/>
-              </a:solidFill>
-              <a:latin typeface="微软雅黑" panose="020B0503020204020204" charset="-122"/>
-              <a:ea typeface="微软雅黑" panose="020B0503020204020204" charset="-122"/>
-              <a:cs typeface="微软雅黑" panose="020B0503020204020204" charset="-122"/>
-            </a:endParaRPr>
           </a:p>
         </p:txBody>
       </p:sp>
@@ -15963,7 +14182,7 @@
           <a:noFill/>
         </p:spPr>
         <p:txBody>
-          <a:bodyPr wrap="square" lIns="0" tIns="0" rIns="0" bIns="0" anchor="t">
+          <a:bodyPr wrap="square" anchor="t" lIns="0" rIns="0" tIns="0" bIns="0">
             <a:spAutoFit/>
           </a:bodyPr>
           <a:lstStyle/>
@@ -15978,20 +14197,12 @@
                 <a:solidFill>
                   <a:srgbClr val="BBD4EC"/>
                 </a:solidFill>
-                <a:latin typeface="微软雅黑" panose="020B0503020204020204" charset="-122"/>
-                <a:ea typeface="微软雅黑" panose="020B0503020204020204" charset="-122"/>
-                <a:cs typeface="微软雅黑" panose="020B0503020204020204" charset="-122"/>
+                <a:latin typeface="微软雅黑"/>
+                <a:ea typeface="微软雅黑"/>
+                <a:cs typeface="微软雅黑"/>
               </a:rPr>
               <a:t>统计与推送</a:t>
             </a:r>
-            <a:endParaRPr sz="1250" b="1" i="0">
-              <a:solidFill>
-                <a:srgbClr val="BBD4EC"/>
-              </a:solidFill>
-              <a:latin typeface="微软雅黑" panose="020B0503020204020204" charset="-122"/>
-              <a:ea typeface="微软雅黑" panose="020B0503020204020204" charset="-122"/>
-              <a:cs typeface="微软雅黑" panose="020B0503020204020204" charset="-122"/>
-            </a:endParaRPr>
           </a:p>
           <a:p>
             <a:pPr algn="ctr">
@@ -16004,20 +14215,12 @@
                 <a:solidFill>
                   <a:srgbClr val="7E9EC4"/>
                 </a:solidFill>
-                <a:latin typeface="微软雅黑" panose="020B0503020204020204" charset="-122"/>
-                <a:ea typeface="微软雅黑" panose="020B0503020204020204" charset="-122"/>
-                <a:cs typeface="微软雅黑" panose="020B0503020204020204" charset="-122"/>
+                <a:latin typeface="微软雅黑"/>
+                <a:ea typeface="微软雅黑"/>
+                <a:cs typeface="微软雅黑"/>
               </a:rPr>
               <a:t>报表聚合、质控指标、实时信号</a:t>
             </a:r>
-            <a:endParaRPr sz="950" b="0" i="0">
-              <a:solidFill>
-                <a:srgbClr val="7E9EC4"/>
-              </a:solidFill>
-              <a:latin typeface="微软雅黑" panose="020B0503020204020204" charset="-122"/>
-              <a:ea typeface="微软雅黑" panose="020B0503020204020204" charset="-122"/>
-              <a:cs typeface="微软雅黑" panose="020B0503020204020204" charset="-122"/>
-            </a:endParaRPr>
           </a:p>
         </p:txBody>
       </p:sp>
@@ -16086,7 +14289,7 @@
           <a:noFill/>
         </p:spPr>
         <p:txBody>
-          <a:bodyPr wrap="square" lIns="0" tIns="0" rIns="0" bIns="0" anchor="t">
+          <a:bodyPr wrap="square" anchor="t" lIns="0" rIns="0" tIns="0" bIns="0">
             <a:spAutoFit/>
           </a:bodyPr>
           <a:lstStyle/>
@@ -16097,20 +14300,12 @@
                 <a:solidFill>
                   <a:srgbClr val="ECF7FF"/>
                 </a:solidFill>
-                <a:latin typeface="微软雅黑" panose="020B0503020204020204" charset="-122"/>
-                <a:ea typeface="微软雅黑" panose="020B0503020204020204" charset="-122"/>
-                <a:cs typeface="微软雅黑" panose="020B0503020204020204" charset="-122"/>
+                <a:latin typeface="微软雅黑"/>
+                <a:ea typeface="微软雅黑"/>
+                <a:cs typeface="微软雅黑"/>
               </a:rPr>
               <a:t>数据</a:t>
             </a:r>
-            <a:endParaRPr sz="1200" b="1" i="0">
-              <a:solidFill>
-                <a:srgbClr val="ECF7FF"/>
-              </a:solidFill>
-              <a:latin typeface="微软雅黑" panose="020B0503020204020204" charset="-122"/>
-              <a:ea typeface="微软雅黑" panose="020B0503020204020204" charset="-122"/>
-              <a:cs typeface="微软雅黑" panose="020B0503020204020204" charset="-122"/>
-            </a:endParaRPr>
           </a:p>
         </p:txBody>
       </p:sp>
@@ -16179,7 +14374,7 @@
           <a:noFill/>
         </p:spPr>
         <p:txBody>
-          <a:bodyPr wrap="square" lIns="0" tIns="0" rIns="0" bIns="0" anchor="t">
+          <a:bodyPr wrap="square" anchor="t" lIns="0" rIns="0" tIns="0" bIns="0">
             <a:spAutoFit/>
           </a:bodyPr>
           <a:lstStyle/>
@@ -16194,20 +14389,12 @@
                 <a:solidFill>
                   <a:srgbClr val="BBD4EC"/>
                 </a:solidFill>
-                <a:latin typeface="微软雅黑" panose="020B0503020204020204" charset="-122"/>
-                <a:ea typeface="微软雅黑" panose="020B0503020204020204" charset="-122"/>
-                <a:cs typeface="微软雅黑" panose="020B0503020204020204" charset="-122"/>
+                <a:latin typeface="微软雅黑"/>
+                <a:ea typeface="微软雅黑"/>
+                <a:cs typeface="微软雅黑"/>
               </a:rPr>
               <a:t>SQLite 数据库</a:t>
             </a:r>
-            <a:endParaRPr sz="1250" b="1" i="0">
-              <a:solidFill>
-                <a:srgbClr val="BBD4EC"/>
-              </a:solidFill>
-              <a:latin typeface="微软雅黑" panose="020B0503020204020204" charset="-122"/>
-              <a:ea typeface="微软雅黑" panose="020B0503020204020204" charset="-122"/>
-              <a:cs typeface="微软雅黑" panose="020B0503020204020204" charset="-122"/>
-            </a:endParaRPr>
           </a:p>
           <a:p>
             <a:pPr algn="ctr">
@@ -16220,20 +14407,12 @@
                 <a:solidFill>
                   <a:srgbClr val="7E9EC4"/>
                 </a:solidFill>
-                <a:latin typeface="微软雅黑" panose="020B0503020204020204" charset="-122"/>
-                <a:ea typeface="微软雅黑" panose="020B0503020204020204" charset="-122"/>
-                <a:cs typeface="微软雅黑" panose="020B0503020204020204" charset="-122"/>
+                <a:latin typeface="微软雅黑"/>
+                <a:ea typeface="微软雅黑"/>
+                <a:cs typeface="微软雅黑"/>
               </a:rPr>
               <a:t>15 张表，单文件，随项目走</a:t>
             </a:r>
-            <a:endParaRPr sz="950" b="0" i="0">
-              <a:solidFill>
-                <a:srgbClr val="7E9EC4"/>
-              </a:solidFill>
-              <a:latin typeface="微软雅黑" panose="020B0503020204020204" charset="-122"/>
-              <a:ea typeface="微软雅黑" panose="020B0503020204020204" charset="-122"/>
-              <a:cs typeface="微软雅黑" panose="020B0503020204020204" charset="-122"/>
-            </a:endParaRPr>
           </a:p>
         </p:txBody>
       </p:sp>
@@ -16302,7 +14481,7 @@
           <a:noFill/>
         </p:spPr>
         <p:txBody>
-          <a:bodyPr wrap="square" lIns="0" tIns="0" rIns="0" bIns="0" anchor="t">
+          <a:bodyPr wrap="square" anchor="t" lIns="0" rIns="0" tIns="0" bIns="0">
             <a:spAutoFit/>
           </a:bodyPr>
           <a:lstStyle/>
@@ -16317,20 +14496,12 @@
                 <a:solidFill>
                   <a:srgbClr val="BBD4EC"/>
                 </a:solidFill>
-                <a:latin typeface="微软雅黑" panose="020B0503020204020204" charset="-122"/>
-                <a:ea typeface="微软雅黑" panose="020B0503020204020204" charset="-122"/>
-                <a:cs typeface="微软雅黑" panose="020B0503020204020204" charset="-122"/>
+                <a:latin typeface="微软雅黑"/>
+                <a:ea typeface="微软雅黑"/>
+                <a:cs typeface="微软雅黑"/>
               </a:rPr>
               <a:t>D1 云数据库</a:t>
             </a:r>
-            <a:endParaRPr sz="1250" b="1" i="0">
-              <a:solidFill>
-                <a:srgbClr val="BBD4EC"/>
-              </a:solidFill>
-              <a:latin typeface="微软雅黑" panose="020B0503020204020204" charset="-122"/>
-              <a:ea typeface="微软雅黑" panose="020B0503020204020204" charset="-122"/>
-              <a:cs typeface="微软雅黑" panose="020B0503020204020204" charset="-122"/>
-            </a:endParaRPr>
           </a:p>
           <a:p>
             <a:pPr algn="ctr">
@@ -16343,20 +14514,12 @@
                 <a:solidFill>
                   <a:srgbClr val="7E9EC4"/>
                 </a:solidFill>
-                <a:latin typeface="微软雅黑" panose="020B0503020204020204" charset="-122"/>
-                <a:ea typeface="微软雅黑" panose="020B0503020204020204" charset="-122"/>
-                <a:cs typeface="微软雅黑" panose="020B0503020204020204" charset="-122"/>
+                <a:latin typeface="微软雅黑"/>
+                <a:ea typeface="微软雅黑"/>
+                <a:cs typeface="微软雅黑"/>
               </a:rPr>
               <a:t>公网版用同一套表结构</a:t>
             </a:r>
-            <a:endParaRPr sz="950" b="0" i="0">
-              <a:solidFill>
-                <a:srgbClr val="7E9EC4"/>
-              </a:solidFill>
-              <a:latin typeface="微软雅黑" panose="020B0503020204020204" charset="-122"/>
-              <a:ea typeface="微软雅黑" panose="020B0503020204020204" charset="-122"/>
-              <a:cs typeface="微软雅黑" panose="020B0503020204020204" charset="-122"/>
-            </a:endParaRPr>
           </a:p>
         </p:txBody>
       </p:sp>
@@ -16425,7 +14588,7 @@
           <a:noFill/>
         </p:spPr>
         <p:txBody>
-          <a:bodyPr wrap="square" lIns="0" tIns="0" rIns="0" bIns="0" anchor="t">
+          <a:bodyPr wrap="square" anchor="t" lIns="0" rIns="0" tIns="0" bIns="0">
             <a:spAutoFit/>
           </a:bodyPr>
           <a:lstStyle/>
@@ -16440,20 +14603,12 @@
                 <a:solidFill>
                   <a:srgbClr val="5CC8FF"/>
                 </a:solidFill>
-                <a:latin typeface="微软雅黑" panose="020B0503020204020204" charset="-122"/>
-                <a:ea typeface="微软雅黑" panose="020B0503020204020204" charset="-122"/>
-                <a:cs typeface="微软雅黑" panose="020B0503020204020204" charset="-122"/>
+                <a:latin typeface="微软雅黑"/>
+                <a:ea typeface="微软雅黑"/>
+                <a:cs typeface="微软雅黑"/>
               </a:rPr>
               <a:t>蓝边 = 核心</a:t>
             </a:r>
-            <a:endParaRPr sz="1100" b="1" i="0">
-              <a:solidFill>
-                <a:srgbClr val="5CC8FF"/>
-              </a:solidFill>
-              <a:latin typeface="微软雅黑" panose="020B0503020204020204" charset="-122"/>
-              <a:ea typeface="微软雅黑" panose="020B0503020204020204" charset="-122"/>
-              <a:cs typeface="微软雅黑" panose="020B0503020204020204" charset="-122"/>
-            </a:endParaRPr>
           </a:p>
           <a:p>
             <a:pPr algn="l"/>
@@ -16462,20 +14617,12 @@
                 <a:solidFill>
                   <a:srgbClr val="7E9EC4"/>
                 </a:solidFill>
-                <a:latin typeface="微软雅黑" panose="020B0503020204020204" charset="-122"/>
-                <a:ea typeface="微软雅黑" panose="020B0503020204020204" charset="-122"/>
-                <a:cs typeface="微软雅黑" panose="020B0503020204020204" charset="-122"/>
+                <a:latin typeface="微软雅黑"/>
+                <a:ea typeface="微软雅黑"/>
+                <a:cs typeface="微软雅黑"/>
               </a:rPr>
               <a:t>前端、后端这两层是项目主体</a:t>
             </a:r>
-            <a:endParaRPr sz="950" b="0" i="0">
-              <a:solidFill>
-                <a:srgbClr val="7E9EC4"/>
-              </a:solidFill>
-              <a:latin typeface="微软雅黑" panose="020B0503020204020204" charset="-122"/>
-              <a:ea typeface="微软雅黑" panose="020B0503020204020204" charset="-122"/>
-              <a:cs typeface="微软雅黑" panose="020B0503020204020204" charset="-122"/>
-            </a:endParaRPr>
           </a:p>
         </p:txBody>
       </p:sp>
@@ -16544,7 +14691,7 @@
           <a:noFill/>
         </p:spPr>
         <p:txBody>
-          <a:bodyPr wrap="square" lIns="0" tIns="0" rIns="0" bIns="0" anchor="t">
+          <a:bodyPr wrap="square" anchor="t" lIns="0" rIns="0" tIns="0" bIns="0">
             <a:spAutoFit/>
           </a:bodyPr>
           <a:lstStyle/>
@@ -16559,20 +14706,12 @@
                 <a:solidFill>
                   <a:srgbClr val="5CC8FF"/>
                 </a:solidFill>
-                <a:latin typeface="微软雅黑" panose="020B0503020204020204" charset="-122"/>
-                <a:ea typeface="微软雅黑" panose="020B0503020204020204" charset="-122"/>
-                <a:cs typeface="微软雅黑" panose="020B0503020204020204" charset="-122"/>
+                <a:latin typeface="微软雅黑"/>
+                <a:ea typeface="微软雅黑"/>
+                <a:cs typeface="微软雅黑"/>
               </a:rPr>
               <a:t>无蓝边 = 配套</a:t>
             </a:r>
-            <a:endParaRPr sz="1100" b="1" i="0">
-              <a:solidFill>
-                <a:srgbClr val="5CC8FF"/>
-              </a:solidFill>
-              <a:latin typeface="微软雅黑" panose="020B0503020204020204" charset="-122"/>
-              <a:ea typeface="微软雅黑" panose="020B0503020204020204" charset="-122"/>
-              <a:cs typeface="微软雅黑" panose="020B0503020204020204" charset="-122"/>
-            </a:endParaRPr>
           </a:p>
           <a:p>
             <a:pPr algn="l"/>
@@ -16581,20 +14720,12 @@
                 <a:solidFill>
                   <a:srgbClr val="7E9EC4"/>
                 </a:solidFill>
-                <a:latin typeface="微软雅黑" panose="020B0503020204020204" charset="-122"/>
-                <a:ea typeface="微软雅黑" panose="020B0503020204020204" charset="-122"/>
-                <a:cs typeface="微软雅黑" panose="020B0503020204020204" charset="-122"/>
+                <a:latin typeface="微软雅黑"/>
+                <a:ea typeface="微软雅黑"/>
+                <a:cs typeface="微软雅黑"/>
               </a:rPr>
               <a:t>使用者与数据层，改动少</a:t>
             </a:r>
-            <a:endParaRPr sz="950" b="0" i="0">
-              <a:solidFill>
-                <a:srgbClr val="7E9EC4"/>
-              </a:solidFill>
-              <a:latin typeface="微软雅黑" panose="020B0503020204020204" charset="-122"/>
-              <a:ea typeface="微软雅黑" panose="020B0503020204020204" charset="-122"/>
-              <a:cs typeface="微软雅黑" panose="020B0503020204020204" charset="-122"/>
-            </a:endParaRPr>
           </a:p>
         </p:txBody>
       </p:sp>
@@ -16663,7 +14794,7 @@
           <a:noFill/>
         </p:spPr>
         <p:txBody>
-          <a:bodyPr wrap="square" lIns="0" tIns="0" rIns="0" bIns="0" anchor="t">
+          <a:bodyPr wrap="square" anchor="t" lIns="0" rIns="0" tIns="0" bIns="0">
             <a:spAutoFit/>
           </a:bodyPr>
           <a:lstStyle/>
@@ -16678,20 +14809,12 @@
                 <a:solidFill>
                   <a:srgbClr val="5CC8FF"/>
                 </a:solidFill>
-                <a:latin typeface="微软雅黑" panose="020B0503020204020204" charset="-122"/>
-                <a:ea typeface="微软雅黑" panose="020B0503020204020204" charset="-122"/>
-                <a:cs typeface="微软雅黑" panose="020B0503020204020204" charset="-122"/>
+                <a:latin typeface="微软雅黑"/>
+                <a:ea typeface="微软雅黑"/>
+                <a:cs typeface="微软雅黑"/>
               </a:rPr>
               <a:t>上下依赖单向</a:t>
             </a:r>
-            <a:endParaRPr sz="1100" b="1" i="0">
-              <a:solidFill>
-                <a:srgbClr val="5CC8FF"/>
-              </a:solidFill>
-              <a:latin typeface="微软雅黑" panose="020B0503020204020204" charset="-122"/>
-              <a:ea typeface="微软雅黑" panose="020B0503020204020204" charset="-122"/>
-              <a:cs typeface="微软雅黑" panose="020B0503020204020204" charset="-122"/>
-            </a:endParaRPr>
           </a:p>
           <a:p>
             <a:pPr algn="l"/>
@@ -16700,20 +14823,12 @@
                 <a:solidFill>
                   <a:srgbClr val="7E9EC4"/>
                 </a:solidFill>
-                <a:latin typeface="微软雅黑" panose="020B0503020204020204" charset="-122"/>
-                <a:ea typeface="微软雅黑" panose="020B0503020204020204" charset="-122"/>
-                <a:cs typeface="微软雅黑" panose="020B0503020204020204" charset="-122"/>
+                <a:latin typeface="微软雅黑"/>
+                <a:ea typeface="微软雅黑"/>
+                <a:cs typeface="微软雅黑"/>
               </a:rPr>
               <a:t>每层只调用下一层，不反向依赖</a:t>
             </a:r>
-            <a:endParaRPr sz="950" b="0" i="0">
-              <a:solidFill>
-                <a:srgbClr val="7E9EC4"/>
-              </a:solidFill>
-              <a:latin typeface="微软雅黑" panose="020B0503020204020204" charset="-122"/>
-              <a:ea typeface="微软雅黑" panose="020B0503020204020204" charset="-122"/>
-              <a:cs typeface="微软雅黑" panose="020B0503020204020204" charset="-122"/>
-            </a:endParaRPr>
           </a:p>
         </p:txBody>
       </p:sp>
@@ -16726,7 +14841,7 @@
 </file>
 
 <file path=ppt/slides/slide9.xml><?xml version="1.0" encoding="utf-8"?>
-<p:sld xmlns:a="http://schemas.openxmlformats.org/drawingml/2006/main" xmlns:r="http://schemas.openxmlformats.org/officeDocument/2006/relationships" xmlns:p="http://schemas.openxmlformats.org/presentationml/2006/main">
+<p:sld xmlns:a="http://schemas.openxmlformats.org/drawingml/2006/main" xmlns:p="http://schemas.openxmlformats.org/presentationml/2006/main" xmlns:r="http://schemas.openxmlformats.org/officeDocument/2006/relationships">
   <p:cSld>
     <p:spTree>
       <p:nvGrpSpPr>
@@ -16796,7 +14911,7 @@
           <a:noFill/>
         </p:spPr>
         <p:txBody>
-          <a:bodyPr wrap="square" lIns="0" tIns="0" rIns="0" bIns="0" anchor="t">
+          <a:bodyPr wrap="square" anchor="t" lIns="0" rIns="0" tIns="0" bIns="0">
             <a:spAutoFit/>
           </a:bodyPr>
           <a:lstStyle/>
@@ -16807,20 +14922,12 @@
                 <a:solidFill>
                   <a:srgbClr val="7FE3FF"/>
                 </a:solidFill>
-                <a:latin typeface="微软雅黑" panose="020B0503020204020204" charset="-122"/>
-                <a:ea typeface="微软雅黑" panose="020B0503020204020204" charset="-122"/>
-                <a:cs typeface="微软雅黑" panose="020B0503020204020204" charset="-122"/>
+                <a:latin typeface="微软雅黑"/>
+                <a:ea typeface="微软雅黑"/>
+                <a:cs typeface="微软雅黑"/>
               </a:rPr>
               <a:t>02 · 怎么做的</a:t>
             </a:r>
-            <a:endParaRPr sz="1150" b="1" i="0">
-              <a:solidFill>
-                <a:srgbClr val="7FE3FF"/>
-              </a:solidFill>
-              <a:latin typeface="微软雅黑" panose="020B0503020204020204" charset="-122"/>
-              <a:ea typeface="微软雅黑" panose="020B0503020204020204" charset="-122"/>
-              <a:cs typeface="微软雅黑" panose="020B0503020204020204" charset="-122"/>
-            </a:endParaRPr>
           </a:p>
         </p:txBody>
       </p:sp>
@@ -16841,7 +14948,7 @@
           <a:noFill/>
         </p:spPr>
         <p:txBody>
-          <a:bodyPr wrap="square" lIns="0" tIns="0" rIns="0" bIns="0" anchor="t">
+          <a:bodyPr wrap="square" anchor="t" lIns="0" rIns="0" tIns="0" bIns="0">
             <a:spAutoFit/>
           </a:bodyPr>
           <a:lstStyle/>
@@ -16852,20 +14959,12 @@
                 <a:solidFill>
                   <a:srgbClr val="ECF7FF"/>
                 </a:solidFill>
-                <a:latin typeface="微软雅黑" panose="020B0503020204020204" charset="-122"/>
-                <a:ea typeface="微软雅黑" panose="020B0503020204020204" charset="-122"/>
-                <a:cs typeface="微软雅黑" panose="020B0503020204020204" charset="-122"/>
+                <a:latin typeface="微软雅黑"/>
+                <a:ea typeface="微软雅黑"/>
+                <a:cs typeface="微软雅黑"/>
               </a:rPr>
               <a:t>「随时能打开」是怎么做到的</a:t>
             </a:r>
-            <a:endParaRPr sz="2700" b="1" i="0">
-              <a:solidFill>
-                <a:srgbClr val="ECF7FF"/>
-              </a:solidFill>
-              <a:latin typeface="微软雅黑" panose="020B0503020204020204" charset="-122"/>
-              <a:ea typeface="微软雅黑" panose="020B0503020204020204" charset="-122"/>
-              <a:cs typeface="微软雅黑" panose="020B0503020204020204" charset="-122"/>
-            </a:endParaRPr>
           </a:p>
         </p:txBody>
       </p:sp>
@@ -16886,7 +14985,7 @@
           <a:noFill/>
         </p:spPr>
         <p:txBody>
-          <a:bodyPr wrap="square" lIns="0" tIns="0" rIns="0" bIns="0" anchor="t">
+          <a:bodyPr wrap="square" anchor="t" lIns="0" rIns="0" tIns="0" bIns="0">
             <a:spAutoFit/>
           </a:bodyPr>
           <a:lstStyle/>
@@ -16897,20 +14996,12 @@
                 <a:solidFill>
                   <a:srgbClr val="7E9EC4"/>
                 </a:solidFill>
-                <a:latin typeface="微软雅黑" panose="020B0503020204020204" charset="-122"/>
-                <a:ea typeface="微软雅黑" panose="020B0503020204020204" charset="-122"/>
-                <a:cs typeface="微软雅黑" panose="020B0503020204020204" charset="-122"/>
+                <a:latin typeface="微软雅黑"/>
+                <a:ea typeface="微软雅黑"/>
+                <a:cs typeface="微软雅黑"/>
               </a:rPr>
               <a:t>急救绿道 · 9 / 13</a:t>
             </a:r>
-            <a:endParaRPr sz="1000" b="0" i="0">
-              <a:solidFill>
-                <a:srgbClr val="7E9EC4"/>
-              </a:solidFill>
-              <a:latin typeface="微软雅黑" panose="020B0503020204020204" charset="-122"/>
-              <a:ea typeface="微软雅黑" panose="020B0503020204020204" charset="-122"/>
-              <a:cs typeface="微软雅黑" panose="020B0503020204020204" charset="-122"/>
-            </a:endParaRPr>
           </a:p>
         </p:txBody>
       </p:sp>
@@ -16931,7 +15022,7 @@
           <a:noFill/>
         </p:spPr>
         <p:txBody>
-          <a:bodyPr wrap="square" lIns="0" tIns="0" rIns="0" bIns="0" anchor="t">
+          <a:bodyPr wrap="square" anchor="t" lIns="0" rIns="0" tIns="0" bIns="0">
             <a:spAutoFit/>
           </a:bodyPr>
           <a:lstStyle/>
@@ -16942,9 +15033,9 @@
                 <a:solidFill>
                   <a:srgbClr val="BBD4EC"/>
                 </a:solidFill>
-                <a:latin typeface="微软雅黑" panose="020B0503020204020204" charset="-122"/>
-                <a:ea typeface="微软雅黑" panose="020B0503020204020204" charset="-122"/>
-                <a:cs typeface="微软雅黑" panose="020B0503020204020204" charset="-122"/>
+                <a:latin typeface="微软雅黑"/>
+                <a:ea typeface="微软雅黑"/>
+                <a:cs typeface="微软雅黑"/>
               </a:rPr>
               <a:t>起因是一个真实的坑：服务跑在前台窗口里，</a:t>
             </a:r>
@@ -16953,9 +15044,9 @@
                 <a:solidFill>
                   <a:srgbClr val="5CC8FF"/>
                 </a:solidFill>
-                <a:latin typeface="微软雅黑" panose="020B0503020204020204" charset="-122"/>
-                <a:ea typeface="微软雅黑" panose="020B0503020204020204" charset="-122"/>
-                <a:cs typeface="微软雅黑" panose="020B0503020204020204" charset="-122"/>
+                <a:latin typeface="微软雅黑"/>
+                <a:ea typeface="微软雅黑"/>
+                <a:cs typeface="微软雅黑"/>
               </a:rPr>
               <a:t>按 Ctrl+C 想复制文字，结果把服务关了</a:t>
             </a:r>
@@ -16964,20 +15055,12 @@
                 <a:solidFill>
                   <a:srgbClr val="BBD4EC"/>
                 </a:solidFill>
-                <a:latin typeface="微软雅黑" panose="020B0503020204020204" charset="-122"/>
-                <a:ea typeface="微软雅黑" panose="020B0503020204020204" charset="-122"/>
-                <a:cs typeface="微软雅黑" panose="020B0503020204020204" charset="-122"/>
+                <a:latin typeface="微软雅黑"/>
+                <a:ea typeface="微软雅黑"/>
+                <a:cs typeface="微软雅黑"/>
               </a:rPr>
               <a:t>。</a:t>
             </a:r>
-            <a:endParaRPr sz="1400" b="0" i="0">
-              <a:solidFill>
-                <a:srgbClr val="BBD4EC"/>
-              </a:solidFill>
-              <a:latin typeface="微软雅黑" panose="020B0503020204020204" charset="-122"/>
-              <a:ea typeface="微软雅黑" panose="020B0503020204020204" charset="-122"/>
-              <a:cs typeface="微软雅黑" panose="020B0503020204020204" charset="-122"/>
-            </a:endParaRPr>
           </a:p>
         </p:txBody>
       </p:sp>
@@ -17112,7 +15195,7 @@
           </a:fontRef>
         </p:style>
         <p:txBody>
-          <a:bodyPr lIns="0" tIns="0" rIns="0" bIns="0" rtlCol="0" anchor="ctr"/>
+          <a:bodyPr rtlCol="0" anchor="ctr" lIns="0" rIns="0" tIns="0" bIns="0"/>
           <a:lstStyle/>
           <a:p>
             <a:pPr algn="ctr"/>
@@ -17121,20 +15204,12 @@
                 <a:solidFill>
                   <a:srgbClr val="FFFFFF"/>
                 </a:solidFill>
-                <a:latin typeface="微软雅黑" panose="020B0503020204020204" charset="-122"/>
-                <a:ea typeface="微软雅黑" panose="020B0503020204020204" charset="-122"/>
-                <a:cs typeface="微软雅黑" panose="020B0503020204020204" charset="-122"/>
+                <a:latin typeface="微软雅黑"/>
+                <a:ea typeface="微软雅黑"/>
+                <a:cs typeface="微软雅黑"/>
               </a:rPr>
               <a:t>1</a:t>
             </a:r>
-            <a:endParaRPr sz="1400" b="1" i="0">
-              <a:solidFill>
-                <a:srgbClr val="FFFFFF"/>
-              </a:solidFill>
-              <a:latin typeface="微软雅黑" panose="020B0503020204020204" charset="-122"/>
-              <a:ea typeface="微软雅黑" panose="020B0503020204020204" charset="-122"/>
-              <a:cs typeface="微软雅黑" panose="020B0503020204020204" charset="-122"/>
-            </a:endParaRPr>
           </a:p>
         </p:txBody>
       </p:sp>
@@ -17155,7 +15230,7 @@
           <a:noFill/>
         </p:spPr>
         <p:txBody>
-          <a:bodyPr wrap="square" lIns="0" tIns="0" rIns="0" bIns="0" anchor="t">
+          <a:bodyPr wrap="square" anchor="t" lIns="0" rIns="0" tIns="0" bIns="0">
             <a:spAutoFit/>
           </a:bodyPr>
           <a:lstStyle/>
@@ -17170,20 +15245,12 @@
                 <a:solidFill>
                   <a:srgbClr val="ECF7FF"/>
                 </a:solidFill>
-                <a:latin typeface="微软雅黑" panose="020B0503020204020204" charset="-122"/>
-                <a:ea typeface="微软雅黑" panose="020B0503020204020204" charset="-122"/>
-                <a:cs typeface="微软雅黑" panose="020B0503020204020204" charset="-122"/>
+                <a:latin typeface="微软雅黑"/>
+                <a:ea typeface="微软雅黑"/>
+                <a:cs typeface="微软雅黑"/>
               </a:rPr>
               <a:t>双击启动</a:t>
             </a:r>
-            <a:endParaRPr sz="1500" b="1" i="0">
-              <a:solidFill>
-                <a:srgbClr val="ECF7FF"/>
-              </a:solidFill>
-              <a:latin typeface="微软雅黑" panose="020B0503020204020204" charset="-122"/>
-              <a:ea typeface="微软雅黑" panose="020B0503020204020204" charset="-122"/>
-              <a:cs typeface="微软雅黑" panose="020B0503020204020204" charset="-122"/>
-            </a:endParaRPr>
           </a:p>
           <a:p>
             <a:pPr algn="l">
@@ -17196,20 +15263,12 @@
                 <a:solidFill>
                   <a:srgbClr val="BBD4EC"/>
                 </a:solidFill>
-                <a:latin typeface="微软雅黑" panose="020B0503020204020204" charset="-122"/>
-                <a:ea typeface="微软雅黑" panose="020B0503020204020204" charset="-122"/>
-                <a:cs typeface="微软雅黑" panose="020B0503020204020204" charset="-122"/>
+                <a:latin typeface="微软雅黑"/>
+                <a:ea typeface="微软雅黑"/>
+                <a:cs typeface="微软雅黑"/>
               </a:rPr>
               <a:t>自动装依赖、建库、灌数据、打开浏览器，缺哪步补哪步。</a:t>
             </a:r>
-            <a:endParaRPr sz="1100" b="0" i="0">
-              <a:solidFill>
-                <a:srgbClr val="BBD4EC"/>
-              </a:solidFill>
-              <a:latin typeface="微软雅黑" panose="020B0503020204020204" charset="-122"/>
-              <a:ea typeface="微软雅黑" panose="020B0503020204020204" charset="-122"/>
-              <a:cs typeface="微软雅黑" panose="020B0503020204020204" charset="-122"/>
-            </a:endParaRPr>
           </a:p>
         </p:txBody>
       </p:sp>
@@ -17344,7 +15403,7 @@
           </a:fontRef>
         </p:style>
         <p:txBody>
-          <a:bodyPr lIns="0" tIns="0" rIns="0" bIns="0" rtlCol="0" anchor="ctr"/>
+          <a:bodyPr rtlCol="0" anchor="ctr" lIns="0" rIns="0" tIns="0" bIns="0"/>
           <a:lstStyle/>
           <a:p>
             <a:pPr algn="ctr"/>
@@ -17353,20 +15412,12 @@
                 <a:solidFill>
                   <a:srgbClr val="FFFFFF"/>
                 </a:solidFill>
-                <a:latin typeface="微软雅黑" panose="020B0503020204020204" charset="-122"/>
-                <a:ea typeface="微软雅黑" panose="020B0503020204020204" charset="-122"/>
-                <a:cs typeface="微软雅黑" panose="020B0503020204020204" charset="-122"/>
+                <a:latin typeface="微软雅黑"/>
+                <a:ea typeface="微软雅黑"/>
+                <a:cs typeface="微软雅黑"/>
               </a:rPr>
               <a:t>2</a:t>
             </a:r>
-            <a:endParaRPr sz="1400" b="1" i="0">
-              <a:solidFill>
-                <a:srgbClr val="FFFFFF"/>
-              </a:solidFill>
-              <a:latin typeface="微软雅黑" panose="020B0503020204020204" charset="-122"/>
-              <a:ea typeface="微软雅黑" panose="020B0503020204020204" charset="-122"/>
-              <a:cs typeface="微软雅黑" panose="020B0503020204020204" charset="-122"/>
-            </a:endParaRPr>
           </a:p>
         </p:txBody>
       </p:sp>
@@ -17387,7 +15438,7 @@
           <a:noFill/>
         </p:spPr>
         <p:txBody>
-          <a:bodyPr wrap="square" lIns="0" tIns="0" rIns="0" bIns="0" anchor="t">
+          <a:bodyPr wrap="square" anchor="t" lIns="0" rIns="0" tIns="0" bIns="0">
             <a:spAutoFit/>
           </a:bodyPr>
           <a:lstStyle/>
@@ -17402,20 +15453,12 @@
                 <a:solidFill>
                   <a:srgbClr val="ECF7FF"/>
                 </a:solidFill>
-                <a:latin typeface="微软雅黑" panose="020B0503020204020204" charset="-122"/>
-                <a:ea typeface="微软雅黑" panose="020B0503020204020204" charset="-122"/>
-                <a:cs typeface="微软雅黑" panose="020B0503020204020204" charset="-122"/>
+                <a:latin typeface="微软雅黑"/>
+                <a:ea typeface="微软雅黑"/>
+                <a:cs typeface="微软雅黑"/>
               </a:rPr>
               <a:t>交给守护进程</a:t>
             </a:r>
-            <a:endParaRPr sz="1500" b="1" i="0">
-              <a:solidFill>
-                <a:srgbClr val="ECF7FF"/>
-              </a:solidFill>
-              <a:latin typeface="微软雅黑" panose="020B0503020204020204" charset="-122"/>
-              <a:ea typeface="微软雅黑" panose="020B0503020204020204" charset="-122"/>
-              <a:cs typeface="微软雅黑" panose="020B0503020204020204" charset="-122"/>
-            </a:endParaRPr>
           </a:p>
           <a:p>
             <a:pPr algn="l">
@@ -17428,20 +15471,12 @@
                 <a:solidFill>
                   <a:srgbClr val="BBD4EC"/>
                 </a:solidFill>
-                <a:latin typeface="微软雅黑" panose="020B0503020204020204" charset="-122"/>
-                <a:ea typeface="微软雅黑" panose="020B0503020204020204" charset="-122"/>
-                <a:cs typeface="微软雅黑" panose="020B0503020204020204" charset="-122"/>
+                <a:latin typeface="微软雅黑"/>
+                <a:ea typeface="微软雅黑"/>
+                <a:cs typeface="微软雅黑"/>
               </a:rPr>
               <a:t>服务在后台跑，没有窗口，Ctrl+C 和误关窗口都影响不到它。</a:t>
             </a:r>
-            <a:endParaRPr sz="1100" b="0" i="0">
-              <a:solidFill>
-                <a:srgbClr val="BBD4EC"/>
-              </a:solidFill>
-              <a:latin typeface="微软雅黑" panose="020B0503020204020204" charset="-122"/>
-              <a:ea typeface="微软雅黑" panose="020B0503020204020204" charset="-122"/>
-              <a:cs typeface="微软雅黑" panose="020B0503020204020204" charset="-122"/>
-            </a:endParaRPr>
           </a:p>
         </p:txBody>
       </p:sp>
@@ -17576,7 +15611,7 @@
           </a:fontRef>
         </p:style>
         <p:txBody>
-          <a:bodyPr lIns="0" tIns="0" rIns="0" bIns="0" rtlCol="0" anchor="ctr"/>
+          <a:bodyPr rtlCol="0" anchor="ctr" lIns="0" rIns="0" tIns="0" bIns="0"/>
           <a:lstStyle/>
           <a:p>
             <a:pPr algn="ctr"/>
@@ -17585,20 +15620,12 @@
                 <a:solidFill>
                   <a:srgbClr val="FFFFFF"/>
                 </a:solidFill>
-                <a:latin typeface="微软雅黑" panose="020B0503020204020204" charset="-122"/>
-                <a:ea typeface="微软雅黑" panose="020B0503020204020204" charset="-122"/>
-                <a:cs typeface="微软雅黑" panose="020B0503020204020204" charset="-122"/>
+                <a:latin typeface="微软雅黑"/>
+                <a:ea typeface="微软雅黑"/>
+                <a:cs typeface="微软雅黑"/>
               </a:rPr>
               <a:t>3</a:t>
             </a:r>
-            <a:endParaRPr sz="1400" b="1" i="0">
-              <a:solidFill>
-                <a:srgbClr val="FFFFFF"/>
-              </a:solidFill>
-              <a:latin typeface="微软雅黑" panose="020B0503020204020204" charset="-122"/>
-              <a:ea typeface="微软雅黑" panose="020B0503020204020204" charset="-122"/>
-              <a:cs typeface="微软雅黑" panose="020B0503020204020204" charset="-122"/>
-            </a:endParaRPr>
           </a:p>
         </p:txBody>
       </p:sp>
@@ -17619,7 +15646,7 @@
           <a:noFill/>
         </p:spPr>
         <p:txBody>
-          <a:bodyPr wrap="square" lIns="0" tIns="0" rIns="0" bIns="0" anchor="t">
+          <a:bodyPr wrap="square" anchor="t" lIns="0" rIns="0" tIns="0" bIns="0">
             <a:spAutoFit/>
           </a:bodyPr>
           <a:lstStyle/>
@@ -17634,20 +15661,12 @@
                 <a:solidFill>
                   <a:srgbClr val="ECF7FF"/>
                 </a:solidFill>
-                <a:latin typeface="微软雅黑" panose="020B0503020204020204" charset="-122"/>
-                <a:ea typeface="微软雅黑" panose="020B0503020204020204" charset="-122"/>
-                <a:cs typeface="微软雅黑" panose="020B0503020204020204" charset="-122"/>
+                <a:latin typeface="微软雅黑"/>
+                <a:ea typeface="微软雅黑"/>
+                <a:cs typeface="微软雅黑"/>
               </a:rPr>
               <a:t>崩了自动拉起</a:t>
             </a:r>
-            <a:endParaRPr sz="1500" b="1" i="0">
-              <a:solidFill>
-                <a:srgbClr val="ECF7FF"/>
-              </a:solidFill>
-              <a:latin typeface="微软雅黑" panose="020B0503020204020204" charset="-122"/>
-              <a:ea typeface="微软雅黑" panose="020B0503020204020204" charset="-122"/>
-              <a:cs typeface="微软雅黑" panose="020B0503020204020204" charset="-122"/>
-            </a:endParaRPr>
           </a:p>
           <a:p>
             <a:pPr algn="l">
@@ -17660,20 +15679,12 @@
                 <a:solidFill>
                   <a:srgbClr val="BBD4EC"/>
                 </a:solidFill>
-                <a:latin typeface="微软雅黑" panose="020B0503020204020204" charset="-122"/>
-                <a:ea typeface="微软雅黑" panose="020B0503020204020204" charset="-122"/>
-                <a:cs typeface="微软雅黑" panose="020B0503020204020204" charset="-122"/>
+                <a:latin typeface="微软雅黑"/>
+                <a:ea typeface="微软雅黑"/>
+                <a:cs typeface="微软雅黑"/>
               </a:rPr>
               <a:t>进程一退出 3 秒内自动重启。实测强杀后 12 秒恢复正常。</a:t>
             </a:r>
-            <a:endParaRPr sz="1100" b="0" i="0">
-              <a:solidFill>
-                <a:srgbClr val="BBD4EC"/>
-              </a:solidFill>
-              <a:latin typeface="微软雅黑" panose="020B0503020204020204" charset="-122"/>
-              <a:ea typeface="微软雅黑" panose="020B0503020204020204" charset="-122"/>
-              <a:cs typeface="微软雅黑" panose="020B0503020204020204" charset="-122"/>
-            </a:endParaRPr>
           </a:p>
         </p:txBody>
       </p:sp>
@@ -17808,7 +15819,7 @@
           </a:fontRef>
         </p:style>
         <p:txBody>
-          <a:bodyPr lIns="0" tIns="0" rIns="0" bIns="0" rtlCol="0" anchor="ctr"/>
+          <a:bodyPr rtlCol="0" anchor="ctr" lIns="0" rIns="0" tIns="0" bIns="0"/>
           <a:lstStyle/>
           <a:p>
             <a:pPr algn="ctr"/>
@@ -17817,20 +15828,12 @@
                 <a:solidFill>
                   <a:srgbClr val="FFFFFF"/>
                 </a:solidFill>
-                <a:latin typeface="微软雅黑" panose="020B0503020204020204" charset="-122"/>
-                <a:ea typeface="微软雅黑" panose="020B0503020204020204" charset="-122"/>
-                <a:cs typeface="微软雅黑" panose="020B0503020204020204" charset="-122"/>
+                <a:latin typeface="微软雅黑"/>
+                <a:ea typeface="微软雅黑"/>
+                <a:cs typeface="微软雅黑"/>
               </a:rPr>
               <a:t>4</a:t>
             </a:r>
-            <a:endParaRPr sz="1400" b="1" i="0">
-              <a:solidFill>
-                <a:srgbClr val="FFFFFF"/>
-              </a:solidFill>
-              <a:latin typeface="微软雅黑" panose="020B0503020204020204" charset="-122"/>
-              <a:ea typeface="微软雅黑" panose="020B0503020204020204" charset="-122"/>
-              <a:cs typeface="微软雅黑" panose="020B0503020204020204" charset="-122"/>
-            </a:endParaRPr>
           </a:p>
         </p:txBody>
       </p:sp>
@@ -17851,7 +15854,7 @@
           <a:noFill/>
         </p:spPr>
         <p:txBody>
-          <a:bodyPr wrap="square" lIns="0" tIns="0" rIns="0" bIns="0" anchor="t">
+          <a:bodyPr wrap="square" anchor="t" lIns="0" rIns="0" tIns="0" bIns="0">
             <a:spAutoFit/>
           </a:bodyPr>
           <a:lstStyle/>
@@ -17866,20 +15869,12 @@
                 <a:solidFill>
                   <a:srgbClr val="ECF7FF"/>
                 </a:solidFill>
-                <a:latin typeface="微软雅黑" panose="020B0503020204020204" charset="-122"/>
-                <a:ea typeface="微软雅黑" panose="020B0503020204020204" charset="-122"/>
-                <a:cs typeface="微软雅黑" panose="020B0503020204020204" charset="-122"/>
+                <a:latin typeface="微软雅黑"/>
+                <a:ea typeface="微软雅黑"/>
+                <a:cs typeface="微软雅黑"/>
               </a:rPr>
               <a:t>开机自己起来</a:t>
             </a:r>
-            <a:endParaRPr sz="1500" b="1" i="0">
-              <a:solidFill>
-                <a:srgbClr val="ECF7FF"/>
-              </a:solidFill>
-              <a:latin typeface="微软雅黑" panose="020B0503020204020204" charset="-122"/>
-              <a:ea typeface="微软雅黑" panose="020B0503020204020204" charset="-122"/>
-              <a:cs typeface="微软雅黑" panose="020B0503020204020204" charset="-122"/>
-            </a:endParaRPr>
           </a:p>
           <a:p>
             <a:pPr algn="l">
@@ -17892,20 +15887,12 @@
                 <a:solidFill>
                   <a:srgbClr val="BBD4EC"/>
                 </a:solidFill>
-                <a:latin typeface="微软雅黑" panose="020B0503020204020204" charset="-122"/>
-                <a:ea typeface="微软雅黑" panose="020B0503020204020204" charset="-122"/>
-                <a:cs typeface="微软雅黑" panose="020B0503020204020204" charset="-122"/>
+                <a:latin typeface="微软雅黑"/>
+                <a:ea typeface="微软雅黑"/>
+                <a:cs typeface="微软雅黑"/>
               </a:rPr>
               <a:t>装一次自启，之后重启电脑也不用管，大屏终端断电恢复即可用。</a:t>
             </a:r>
-            <a:endParaRPr sz="1100" b="0" i="0">
-              <a:solidFill>
-                <a:srgbClr val="BBD4EC"/>
-              </a:solidFill>
-              <a:latin typeface="微软雅黑" panose="020B0503020204020204" charset="-122"/>
-              <a:ea typeface="微软雅黑" panose="020B0503020204020204" charset="-122"/>
-              <a:cs typeface="微软雅黑" panose="020B0503020204020204" charset="-122"/>
-            </a:endParaRPr>
           </a:p>
         </p:txBody>
       </p:sp>
@@ -17926,7 +15913,7 @@
           <a:noFill/>
         </p:spPr>
         <p:txBody>
-          <a:bodyPr wrap="square" lIns="0" tIns="0" rIns="0" bIns="0" anchor="t">
+          <a:bodyPr wrap="square" anchor="t" lIns="0" rIns="0" tIns="0" bIns="0">
             <a:spAutoFit/>
           </a:bodyPr>
           <a:lstStyle/>
@@ -17937,9 +15924,9 @@
                 <a:solidFill>
                   <a:srgbClr val="BBD4EC"/>
                 </a:solidFill>
-                <a:latin typeface="微软雅黑" panose="020B0503020204020204" charset="-122"/>
-                <a:ea typeface="微软雅黑" panose="020B0503020204020204" charset="-122"/>
-                <a:cs typeface="微软雅黑" panose="020B0503020204020204" charset="-122"/>
+                <a:latin typeface="微软雅黑"/>
+                <a:ea typeface="微软雅黑"/>
+                <a:cs typeface="微软雅黑"/>
               </a:rPr>
               <a:t>另外：演示数据会随日期自动「保鲜」，隔几天再打开，大屏</a:t>
             </a:r>
@@ -17948,9 +15935,9 @@
                 <a:solidFill>
                   <a:srgbClr val="ECF7FF"/>
                 </a:solidFill>
-                <a:latin typeface="微软雅黑" panose="020B0503020204020204" charset="-122"/>
-                <a:ea typeface="微软雅黑" panose="020B0503020204020204" charset="-122"/>
-                <a:cs typeface="微软雅黑" panose="020B0503020204020204" charset="-122"/>
+                <a:latin typeface="微软雅黑"/>
+                <a:ea typeface="微软雅黑"/>
+                <a:cs typeface="微软雅黑"/>
               </a:rPr>
               <a:t>不会出现空白表格</a:t>
             </a:r>
@@ -17959,20 +15946,12 @@
                 <a:solidFill>
                   <a:srgbClr val="BBD4EC"/>
                 </a:solidFill>
-                <a:latin typeface="微软雅黑" panose="020B0503020204020204" charset="-122"/>
-                <a:ea typeface="微软雅黑" panose="020B0503020204020204" charset="-122"/>
-                <a:cs typeface="微软雅黑" panose="020B0503020204020204" charset="-122"/>
+                <a:latin typeface="微软雅黑"/>
+                <a:ea typeface="微软雅黑"/>
+                <a:cs typeface="微软雅黑"/>
               </a:rPr>
               <a:t>。</a:t>
             </a:r>
-            <a:endParaRPr sz="1350" b="0" i="0">
-              <a:solidFill>
-                <a:srgbClr val="BBD4EC"/>
-              </a:solidFill>
-              <a:latin typeface="微软雅黑" panose="020B0503020204020204" charset="-122"/>
-              <a:ea typeface="微软雅黑" panose="020B0503020204020204" charset="-122"/>
-              <a:cs typeface="微软雅黑" panose="020B0503020204020204" charset="-122"/>
-            </a:endParaRPr>
           </a:p>
         </p:txBody>
       </p:sp>
@@ -18300,10 +16279,6 @@
       </a:style>
     </a:lnDef>
   </a:objectDefaults>
-  <a:extLst>
-    <a:ext uri="{05A4C25C-085E-4340-85A3-A5531E510DB2}">
-      <thm15:themeFamily xmlns:thm15="http://schemas.microsoft.com/office/thememl/2012/main" name="Office Theme" id="{62F939B6-93AF-4DB8-9C6B-D6C7DFDC589F}" vid="{4A3C46E8-61CC-4603-A589-7422A47A8E4A}"/>
-    </a:ext>
-  </a:extLst>
+  <a:extraClrSchemeLst/>
 </a:theme>
 </file>